--- a/blocks/C_drive_visualization/M10_ros_gz_bridge/M10_ros_gz_bridge_ROS2_Gazebo_연결.pptx
+++ b/blocks/C_drive_visualization/M10_ros_gz_bridge/M10_ros_gz_bridge_ROS2_Gazebo_연결.pptx
@@ -5837,8 +5837,8 @@
         </p:nvSpPr>
         <p:spPr>
           <a:xfrm>
-            <a:off x="658368" y="1682496"/>
-            <a:ext cx="10972800" cy="347472"/>
+            <a:off x="658368" y="1627632"/>
+            <a:ext cx="10972800" cy="256032"/>
           </a:xfrm>
           <a:prstGeom prst="rect">
             <a:avLst/>
@@ -5855,7 +5855,7 @@
               <a:spcAft>
                 <a:spcPts val="0"/>
               </a:spcAft>
-              <a:defRPr sz="1700" b="1">
+              <a:defRPr sz="1500" b="1">
                 <a:solidFill>
                   <a:srgbClr val="122C4E"/>
                 </a:solidFill>
@@ -5876,8 +5876,8 @@
         </p:nvSpPr>
         <p:spPr>
           <a:xfrm>
-            <a:off x="658368" y="2103120"/>
-            <a:ext cx="10972800" cy="493776"/>
+            <a:off x="658368" y="1956816"/>
+            <a:ext cx="10972800" cy="603504"/>
           </a:xfrm>
           <a:prstGeom prst="rect">
             <a:avLst/>
@@ -5921,7 +5921,11 @@
               </a:defRPr>
             </a:pPr>
             <a:r>
-              <a:t>파일 생성/열기: mkdir -p ~/agv_ws/src/agv_gazebo/config    &amp;&amp;    nano ~/agv_ws/src/agv_gazebo/config/bridge.yaml</a:t>
+              <a:t>파일 생성: mkdir -p ~/agv_ws/src/agv_gazebo/config</a:t>
+            </a:r>
+            <a:br/>
+            <a:r>
+              <a:t>파일 열기: nano ~/agv_ws/src/agv_gazebo/config/bridge.yaml</a:t>
             </a:r>
           </a:p>
         </p:txBody>
@@ -5934,8 +5938,8 @@
         </p:nvSpPr>
         <p:spPr>
           <a:xfrm>
-            <a:off x="658368" y="2761488"/>
-            <a:ext cx="10972800" cy="3383280"/>
+            <a:off x="658368" y="2706624"/>
+            <a:ext cx="10972800" cy="3364992"/>
           </a:xfrm>
           <a:prstGeom prst="rect">
             <a:avLst/>
@@ -5979,6 +5983,14 @@
               </a:defRPr>
             </a:pPr>
             <a:r>
+              <a:t>  ros_type_name: "sensor_msgs/msg/LaserScan"</a:t>
+            </a:r>
+            <a:br/>
+            <a:r>
+              <a:t>  gz_type_name: "gz.msgs.LaserScan"</a:t>
+            </a:r>
+            <a:br/>
+            <a:r>
               <a:t>  direction: GZ_TO_ROS</a:t>
             </a:r>
             <a:br/>
@@ -6016,22 +6028,6 @@
             <a:br/>
             <a:r>
               <a:t>  gz_type_name: "gz.msgs.Image"</a:t>
-            </a:r>
-            <a:br/>
-            <a:r>
-              <a:t>  direction: GZ_TO_ROS</a:t>
-            </a:r>
-            <a:br/>
-            <a:r>
-              <a:t>- ros_topic_name: "/clock"</a:t>
-            </a:r>
-            <a:br/>
-            <a:r>
-              <a:t>  gz_topic_name: "/clock"</a:t>
-            </a:r>
-            <a:br/>
-            <a:r>
-              <a:t>  ros_type_name: "rosgraph_msgs/msg/Clock"</a:t>
             </a:r>
           </a:p>
         </p:txBody>
@@ -6044,7 +6040,7 @@
         </p:nvSpPr>
         <p:spPr>
           <a:xfrm>
-            <a:off x="749808" y="6199632"/>
+            <a:off x="749808" y="6181344"/>
             <a:ext cx="10789920" cy="201168"/>
           </a:xfrm>
           <a:prstGeom prst="rect">
@@ -6315,8 +6311,8 @@
         </p:nvSpPr>
         <p:spPr>
           <a:xfrm>
-            <a:off x="658368" y="1682496"/>
-            <a:ext cx="10972800" cy="347472"/>
+            <a:off x="658368" y="1627632"/>
+            <a:ext cx="10972800" cy="256032"/>
           </a:xfrm>
           <a:prstGeom prst="rect">
             <a:avLst/>
@@ -6333,7 +6329,7 @@
               <a:spcAft>
                 <a:spcPts val="0"/>
               </a:spcAft>
-              <a:defRPr sz="1700" b="1">
+              <a:defRPr sz="1500" b="1">
                 <a:solidFill>
                   <a:srgbClr val="122C4E"/>
                 </a:solidFill>
@@ -6354,8 +6350,8 @@
         </p:nvSpPr>
         <p:spPr>
           <a:xfrm>
-            <a:off x="658368" y="2103120"/>
-            <a:ext cx="10972800" cy="493776"/>
+            <a:off x="658368" y="1956816"/>
+            <a:ext cx="10972800" cy="603504"/>
           </a:xfrm>
           <a:prstGeom prst="rect">
             <a:avLst/>
@@ -6399,7 +6395,11 @@
               </a:defRPr>
             </a:pPr>
             <a:r>
-              <a:t>파일 생성/열기: mkdir -p ~/agv_ws/src/agv_gazebo/config    &amp;&amp;    nano ~/agv_ws/src/agv_gazebo/config/bridge.yaml</a:t>
+              <a:t>파일 생성: mkdir -p ~/agv_ws/src/agv_gazebo/config</a:t>
+            </a:r>
+            <a:br/>
+            <a:r>
+              <a:t>파일 열기: nano ~/agv_ws/src/agv_gazebo/config/bridge.yaml</a:t>
             </a:r>
           </a:p>
         </p:txBody>
@@ -6412,8 +6412,8 @@
         </p:nvSpPr>
         <p:spPr>
           <a:xfrm>
-            <a:off x="658368" y="2761488"/>
-            <a:ext cx="10972800" cy="3383280"/>
+            <a:off x="658368" y="2706624"/>
+            <a:ext cx="10972800" cy="3364992"/>
           </a:xfrm>
           <a:prstGeom prst="rect">
             <a:avLst/>
@@ -6457,6 +6457,22 @@
               </a:defRPr>
             </a:pPr>
             <a:r>
+              <a:t>  direction: GZ_TO_ROS</a:t>
+            </a:r>
+            <a:br/>
+            <a:r>
+              <a:t>- ros_topic_name: "/clock"</a:t>
+            </a:r>
+            <a:br/>
+            <a:r>
+              <a:t>  gz_topic_name: "/clock"</a:t>
+            </a:r>
+            <a:br/>
+            <a:r>
+              <a:t>  ros_type_name: "rosgraph_msgs/msg/Clock"</a:t>
+            </a:r>
+            <a:br/>
+            <a:r>
               <a:t>  gz_type_name: "gz.msgs.Clock"</a:t>
             </a:r>
             <a:br/>
@@ -6474,7 +6490,7 @@
         </p:nvSpPr>
         <p:spPr>
           <a:xfrm>
-            <a:off x="749808" y="6199632"/>
+            <a:off x="749808" y="6181344"/>
             <a:ext cx="10789920" cy="201168"/>
           </a:xfrm>
           <a:prstGeom prst="rect">
@@ -6745,8 +6761,8 @@
         </p:nvSpPr>
         <p:spPr>
           <a:xfrm>
-            <a:off x="658368" y="1682496"/>
-            <a:ext cx="10972800" cy="347472"/>
+            <a:off x="658368" y="1627632"/>
+            <a:ext cx="10972800" cy="256032"/>
           </a:xfrm>
           <a:prstGeom prst="rect">
             <a:avLst/>
@@ -6763,7 +6779,7 @@
               <a:spcAft>
                 <a:spcPts val="0"/>
               </a:spcAft>
-              <a:defRPr sz="1700" b="1">
+              <a:defRPr sz="1500" b="1">
                 <a:solidFill>
                   <a:srgbClr val="122C4E"/>
                 </a:solidFill>
@@ -6784,8 +6800,8 @@
         </p:nvSpPr>
         <p:spPr>
           <a:xfrm>
-            <a:off x="658368" y="2103120"/>
-            <a:ext cx="10972800" cy="493776"/>
+            <a:off x="658368" y="1956816"/>
+            <a:ext cx="10972800" cy="603504"/>
           </a:xfrm>
           <a:prstGeom prst="rect">
             <a:avLst/>
@@ -6829,7 +6845,11 @@
               </a:defRPr>
             </a:pPr>
             <a:r>
-              <a:t>파일 생성/열기: mkdir -p ~/agv_ws/src/agv_gazebo/launch    &amp;&amp;    nano ~/agv_ws/src/agv_gazebo/launch/gazebo.launch.py</a:t>
+              <a:t>파일 생성: mkdir -p ~/agv_ws/src/agv_gazebo/launch</a:t>
+            </a:r>
+            <a:br/>
+            <a:r>
+              <a:t>파일 열기: nano ~/agv_ws/src/agv_gazebo/launch/gazebo.launch.py</a:t>
             </a:r>
           </a:p>
         </p:txBody>
@@ -6842,8 +6862,8 @@
         </p:nvSpPr>
         <p:spPr>
           <a:xfrm>
-            <a:off x="658368" y="2761488"/>
-            <a:ext cx="10972800" cy="3383280"/>
+            <a:off x="658368" y="2706624"/>
+            <a:ext cx="10972800" cy="3364992"/>
           </a:xfrm>
           <a:prstGeom prst="rect">
             <a:avLst/>
@@ -6930,14 +6950,6 @@
             <a:r>
               <a:t>    previous = os.environ.get('GZ_SIM_RESOURCE_PATH', '')</a:t>
             </a:r>
-            <a:br/>
-            <a:r>
-              <a:t>    gz_launch = os.path.join(get_package_share_directory('ros_gz_sim'), 'launch', 'gz_sim.launch.py')</a:t>
-            </a:r>
-            <a:br/>
-            <a:r>
-              <a:t>    return LaunchDescription([SetEnvironmentVariable('GZ_SIM_RESOURCE_PATH',</a:t>
-            </a:r>
           </a:p>
         </p:txBody>
       </p:sp>
@@ -6949,7 +6961,7 @@
         </p:nvSpPr>
         <p:spPr>
           <a:xfrm>
-            <a:off x="749808" y="6199632"/>
+            <a:off x="749808" y="6181344"/>
             <a:ext cx="10789920" cy="201168"/>
           </a:xfrm>
           <a:prstGeom prst="rect">
@@ -7220,8 +7232,8 @@
         </p:nvSpPr>
         <p:spPr>
           <a:xfrm>
-            <a:off x="658368" y="1682496"/>
-            <a:ext cx="10972800" cy="347472"/>
+            <a:off x="658368" y="1627632"/>
+            <a:ext cx="10972800" cy="256032"/>
           </a:xfrm>
           <a:prstGeom prst="rect">
             <a:avLst/>
@@ -7238,7 +7250,7 @@
               <a:spcAft>
                 <a:spcPts val="0"/>
               </a:spcAft>
-              <a:defRPr sz="1700" b="1">
+              <a:defRPr sz="1500" b="1">
                 <a:solidFill>
                   <a:srgbClr val="122C4E"/>
                 </a:solidFill>
@@ -7259,8 +7271,8 @@
         </p:nvSpPr>
         <p:spPr>
           <a:xfrm>
-            <a:off x="658368" y="2103120"/>
-            <a:ext cx="10972800" cy="493776"/>
+            <a:off x="658368" y="1956816"/>
+            <a:ext cx="10972800" cy="603504"/>
           </a:xfrm>
           <a:prstGeom prst="rect">
             <a:avLst/>
@@ -7304,7 +7316,11 @@
               </a:defRPr>
             </a:pPr>
             <a:r>
-              <a:t>파일 생성/열기: mkdir -p ~/agv_ws/src/agv_gazebo/launch    &amp;&amp;    nano ~/agv_ws/src/agv_gazebo/launch/gazebo.launch.py</a:t>
+              <a:t>파일 생성: mkdir -p ~/agv_ws/src/agv_gazebo/launch</a:t>
+            </a:r>
+            <a:br/>
+            <a:r>
+              <a:t>파일 열기: nano ~/agv_ws/src/agv_gazebo/launch/gazebo.launch.py</a:t>
             </a:r>
           </a:p>
         </p:txBody>
@@ -7317,8 +7333,8 @@
         </p:nvSpPr>
         <p:spPr>
           <a:xfrm>
-            <a:off x="658368" y="2761488"/>
-            <a:ext cx="10972800" cy="3383280"/>
+            <a:off x="658368" y="2706624"/>
+            <a:ext cx="10972800" cy="3364992"/>
           </a:xfrm>
           <a:prstGeom prst="rect">
             <a:avLst/>
@@ -7362,6 +7378,14 @@
               </a:defRPr>
             </a:pPr>
             <a:r>
+              <a:t>    gz_launch = os.path.join(get_package_share_directory('ros_gz_sim'), 'launch', 'gz_sim.launch.py')</a:t>
+            </a:r>
+            <a:br/>
+            <a:r>
+              <a:t>    return LaunchDescription([SetEnvironmentVariable('GZ_SIM_RESOURCE_PATH',</a:t>
+            </a:r>
+            <a:br/>
+            <a:r>
               <a:t>        models + (':' + previous if previous else '')),</a:t>
             </a:r>
             <a:br/>
@@ -7391,7 +7415,7 @@
         </p:nvSpPr>
         <p:spPr>
           <a:xfrm>
-            <a:off x="749808" y="6199632"/>
+            <a:off x="749808" y="6181344"/>
             <a:ext cx="10789920" cy="201168"/>
           </a:xfrm>
           <a:prstGeom prst="rect">
@@ -10395,7 +10419,7 @@
         </p:nvSpPr>
         <p:spPr>
           <a:xfrm>
-            <a:off x="914400" y="1810512"/>
+            <a:off x="914400" y="1773936"/>
             <a:ext cx="3840480" cy="256032"/>
           </a:xfrm>
           <a:prstGeom prst="rect">
@@ -10434,8 +10458,8 @@
         </p:nvSpPr>
         <p:spPr>
           <a:xfrm>
-            <a:off x="914400" y="2121408"/>
-            <a:ext cx="9966960" cy="256032"/>
+            <a:off x="914400" y="2048255"/>
+            <a:ext cx="9966960" cy="475488"/>
           </a:xfrm>
           <a:prstGeom prst="rect">
             <a:avLst/>
@@ -10452,7 +10476,7 @@
               <a:spcAft>
                 <a:spcPts val="0"/>
               </a:spcAft>
-              <a:defRPr sz="1200" b="0">
+              <a:defRPr sz="1000" b="0">
                 <a:solidFill>
                   <a:srgbClr val="225B9B"/>
                 </a:solidFill>
@@ -10473,7 +10497,7 @@
         </p:nvSpPr>
         <p:spPr>
           <a:xfrm>
-            <a:off x="914400" y="2816352"/>
+            <a:off x="914400" y="2852928"/>
             <a:ext cx="3840480" cy="256032"/>
           </a:xfrm>
           <a:prstGeom prst="rect">
@@ -10513,7 +10537,7 @@
         <p:spPr>
           <a:xfrm>
             <a:off x="914400" y="3127248"/>
-            <a:ext cx="9966960" cy="256032"/>
+            <a:ext cx="9966960" cy="475488"/>
           </a:xfrm>
           <a:prstGeom prst="rect">
             <a:avLst/>
@@ -10530,7 +10554,7 @@
               <a:spcAft>
                 <a:spcPts val="0"/>
               </a:spcAft>
-              <a:defRPr sz="1200" b="0">
+              <a:defRPr sz="1000" b="0">
                 <a:solidFill>
                   <a:srgbClr val="225B9B"/>
                 </a:solidFill>
@@ -10551,7 +10575,7 @@
         </p:nvSpPr>
         <p:spPr>
           <a:xfrm>
-            <a:off x="914400" y="3822191"/>
+            <a:off x="914400" y="3931920"/>
             <a:ext cx="3840480" cy="256032"/>
           </a:xfrm>
           <a:prstGeom prst="rect">
@@ -10590,8 +10614,8 @@
         </p:nvSpPr>
         <p:spPr>
           <a:xfrm>
-            <a:off x="914400" y="4133087"/>
-            <a:ext cx="9966960" cy="256032"/>
+            <a:off x="914400" y="4206240"/>
+            <a:ext cx="9966960" cy="475488"/>
           </a:xfrm>
           <a:prstGeom prst="rect">
             <a:avLst/>
@@ -10608,7 +10632,7 @@
               <a:spcAft>
                 <a:spcPts val="0"/>
               </a:spcAft>
-              <a:defRPr sz="1200" b="0">
+              <a:defRPr sz="1000" b="0">
                 <a:solidFill>
                   <a:srgbClr val="225B9B"/>
                 </a:solidFill>
@@ -10629,7 +10653,7 @@
         </p:nvSpPr>
         <p:spPr>
           <a:xfrm>
-            <a:off x="914400" y="4828032"/>
+            <a:off x="914400" y="5010912"/>
             <a:ext cx="3840480" cy="256032"/>
           </a:xfrm>
           <a:prstGeom prst="rect">
@@ -10668,8 +10692,8 @@
         </p:nvSpPr>
         <p:spPr>
           <a:xfrm>
-            <a:off x="914400" y="5138928"/>
-            <a:ext cx="9966960" cy="256032"/>
+            <a:off x="914400" y="5285232"/>
+            <a:ext cx="9966960" cy="475488"/>
           </a:xfrm>
           <a:prstGeom prst="rect">
             <a:avLst/>
@@ -10686,7 +10710,7 @@
               <a:spcAft>
                 <a:spcPts val="0"/>
               </a:spcAft>
-              <a:defRPr sz="1200" b="0">
+              <a:defRPr sz="1000" b="0">
                 <a:solidFill>
                   <a:srgbClr val="225B9B"/>
                 </a:solidFill>
@@ -13339,8 +13363,8 @@
         </p:nvSpPr>
         <p:spPr>
           <a:xfrm>
-            <a:off x="658368" y="1682496"/>
-            <a:ext cx="10972800" cy="347472"/>
+            <a:off x="658368" y="1627632"/>
+            <a:ext cx="10972800" cy="256032"/>
           </a:xfrm>
           <a:prstGeom prst="rect">
             <a:avLst/>
@@ -13357,7 +13381,7 @@
               <a:spcAft>
                 <a:spcPts val="0"/>
               </a:spcAft>
-              <a:defRPr sz="1700" b="1">
+              <a:defRPr sz="1500" b="1">
                 <a:solidFill>
                   <a:srgbClr val="122C4E"/>
                 </a:solidFill>
@@ -13378,8 +13402,8 @@
         </p:nvSpPr>
         <p:spPr>
           <a:xfrm>
-            <a:off x="658368" y="2103120"/>
-            <a:ext cx="10972800" cy="493776"/>
+            <a:off x="658368" y="1956816"/>
+            <a:ext cx="10972800" cy="603504"/>
           </a:xfrm>
           <a:prstGeom prst="rect">
             <a:avLst/>
@@ -13423,7 +13447,11 @@
               </a:defRPr>
             </a:pPr>
             <a:r>
-              <a:t>파일 생성/열기: mkdir -p ~/agv_ws/src/agv_gazebo/config    &amp;&amp;    nano ~/agv_ws/src/agv_gazebo/config/bridge.yaml</a:t>
+              <a:t>파일 생성: mkdir -p ~/agv_ws/src/agv_gazebo/config</a:t>
+            </a:r>
+            <a:br/>
+            <a:r>
+              <a:t>파일 열기: nano ~/agv_ws/src/agv_gazebo/config/bridge.yaml</a:t>
             </a:r>
           </a:p>
         </p:txBody>
@@ -13436,8 +13464,8 @@
         </p:nvSpPr>
         <p:spPr>
           <a:xfrm>
-            <a:off x="658368" y="2761488"/>
-            <a:ext cx="10972800" cy="3383280"/>
+            <a:off x="658368" y="2706624"/>
+            <a:ext cx="10972800" cy="3364992"/>
           </a:xfrm>
           <a:prstGeom prst="rect">
             <a:avLst/>
@@ -13527,14 +13555,6 @@
             <a:r>
               <a:t>  gz_topic_name: "/scan"</a:t>
             </a:r>
-            <a:br/>
-            <a:r>
-              <a:t>  ros_type_name: "sensor_msgs/msg/LaserScan"</a:t>
-            </a:r>
-            <a:br/>
-            <a:r>
-              <a:t>  gz_type_name: "gz.msgs.LaserScan"</a:t>
-            </a:r>
           </a:p>
         </p:txBody>
       </p:sp>
@@ -13546,7 +13566,7 @@
         </p:nvSpPr>
         <p:spPr>
           <a:xfrm>
-            <a:off x="749808" y="6199632"/>
+            <a:off x="749808" y="6181344"/>
             <a:ext cx="10789920" cy="201168"/>
           </a:xfrm>
           <a:prstGeom prst="rect">

--- a/blocks/C_drive_visualization/M10_ros_gz_bridge/M10_ros_gz_bridge_ROS2_Gazebo_연결.pptx
+++ b/blocks/C_drive_visualization/M10_ros_gz_bridge/M10_ros_gz_bridge_ROS2_Gazebo_연결.pptx
@@ -611,12 +611,12 @@
           <a:lstStyle/>
           <a:p>
             <a:r>
-              <a:t>[설명] ~/agv_ws/src/agv_gazebo/config/bridge.yaml의 전체 파일을 2/3 구간으로 작성한다.</a:t>
-            </a:r>
-          </a:p>
-          <a:p>
-            <a:r>
-              <a:t>[실행] nano ~/agv_ws/src/agv_gazebo/config/bridge.yaml</a:t>
+              <a:t>[설명] ~/ros2_curri/agv_ws/src/agv_gazebo/config/bridge.yaml의 전체 파일을 2/3 구간으로 작성한다.</a:t>
+            </a:r>
+          </a:p>
+          <a:p>
+            <a:r>
+              <a:t>[실행] nano ~/ros2_curri/agv_ws/src/agv_gazebo/config/bridge.yaml</a:t>
             </a:r>
           </a:p>
           <a:p>
@@ -701,12 +701,12 @@
           <a:lstStyle/>
           <a:p>
             <a:r>
-              <a:t>[설명] ~/agv_ws/src/agv_gazebo/config/bridge.yaml의 전체 파일을 3/3 구간으로 작성한다.</a:t>
-            </a:r>
-          </a:p>
-          <a:p>
-            <a:r>
-              <a:t>[실행] nano ~/agv_ws/src/agv_gazebo/config/bridge.yaml</a:t>
+              <a:t>[설명] ~/ros2_curri/agv_ws/src/agv_gazebo/config/bridge.yaml의 전체 파일을 3/3 구간으로 작성한다.</a:t>
+            </a:r>
+          </a:p>
+          <a:p>
+            <a:r>
+              <a:t>[실행] nano ~/ros2_curri/agv_ws/src/agv_gazebo/config/bridge.yaml</a:t>
             </a:r>
           </a:p>
           <a:p>
@@ -791,12 +791,12 @@
           <a:lstStyle/>
           <a:p>
             <a:r>
-              <a:t>[설명] ~/agv_ws/src/agv_gazebo/launch/gazebo.launch.py의 전체 파일을 1/2 구간으로 작성한다.</a:t>
-            </a:r>
-          </a:p>
-          <a:p>
-            <a:r>
-              <a:t>[실행] nano ~/agv_ws/src/agv_gazebo/launch/gazebo.launch.py</a:t>
+              <a:t>[설명] ~/ros2_curri/agv_ws/src/agv_gazebo/launch/gazebo.launch.py의 전체 파일을 1/2 구간으로 작성한다.</a:t>
+            </a:r>
+          </a:p>
+          <a:p>
+            <a:r>
+              <a:t>[실행] nano ~/ros2_curri/agv_ws/src/agv_gazebo/launch/gazebo.launch.py</a:t>
             </a:r>
           </a:p>
           <a:p>
@@ -881,12 +881,12 @@
           <a:lstStyle/>
           <a:p>
             <a:r>
-              <a:t>[설명] ~/agv_ws/src/agv_gazebo/launch/gazebo.launch.py의 전체 파일을 2/2 구간으로 작성한다.</a:t>
-            </a:r>
-          </a:p>
-          <a:p>
-            <a:r>
-              <a:t>[실행] nano ~/agv_ws/src/agv_gazebo/launch/gazebo.launch.py</a:t>
+              <a:t>[설명] ~/ros2_curri/agv_ws/src/agv_gazebo/launch/gazebo.launch.py의 전체 파일을 2/2 구간으로 작성한다.</a:t>
+            </a:r>
+          </a:p>
+          <a:p>
+            <a:r>
+              <a:t>[실행] nano ~/ros2_curri/agv_ws/src/agv_gazebo/launch/gazebo.launch.py</a:t>
             </a:r>
           </a:p>
           <a:p>
@@ -976,7 +976,7 @@
           </a:p>
           <a:p>
             <a:r>
-              <a:t>[실행] source ~/agv_ws/install/setup.bash</a:t>
+              <a:t>[실행] source ~/ros2_curri/agv_ws/install/setup.bash</a:t>
             </a:r>
           </a:p>
           <a:p>
@@ -1706,7 +1706,7 @@
           </a:p>
           <a:p>
             <a:r>
-              <a:t>[실행] pwd; source /opt/ros/jazzy/setup.bash; source ~/agv_ws/install/setup.bash</a:t>
+              <a:t>[실행] pwd; source /opt/ros/jazzy/setup.bash; source ~/ros2_curri/agv_ws/install/setup.bash</a:t>
             </a:r>
           </a:p>
           <a:p>
@@ -2066,7 +2066,7 @@
           </a:p>
           <a:p>
             <a:r>
-              <a:t>[실행] cd ~/agv_ws</a:t>
+              <a:t>[실행] cd ~/ros2_curri/agv_ws</a:t>
             </a:r>
           </a:p>
           <a:p>
@@ -2256,12 +2256,12 @@
           <a:lstStyle/>
           <a:p>
             <a:r>
-              <a:t>[설명] ~/agv_ws/src/agv_gazebo/config/bridge.yaml의 전체 파일을 1/3 구간으로 작성한다.</a:t>
-            </a:r>
-          </a:p>
-          <a:p>
-            <a:r>
-              <a:t>[실행] nano ~/agv_ws/src/agv_gazebo/config/bridge.yaml</a:t>
+              <a:t>[설명] ~/ros2_curri/agv_ws/src/agv_gazebo/config/bridge.yaml의 전체 파일을 1/3 구간으로 작성한다.</a:t>
+            </a:r>
+          </a:p>
+          <a:p>
+            <a:r>
+              <a:t>[실행] nano ~/ros2_curri/agv_ws/src/agv_gazebo/config/bridge.yaml</a:t>
             </a:r>
           </a:p>
           <a:p>
@@ -5688,7 +5688,7 @@
               </a:defRPr>
             </a:pPr>
             <a:r>
-              <a:t>~/agv_ws/src/agv_gazebo/config/bridge.yaml</a:t>
+              <a:t>~/ros2_curri/agv_ws/src/agv_gazebo/config/bridge.yaml</a:t>
             </a:r>
           </a:p>
         </p:txBody>
@@ -5824,7 +5824,7 @@
               </a:defRPr>
             </a:pPr>
             <a:r>
-              <a:t>현재 단계 4/6    |    현재 폴더 ~/agv_ws    |    현재 터미널</a:t>
+              <a:t>현재 단계 4/6    |    현재 폴더 ~/ros2_curri/agv_ws    |    현재 터미널</a:t>
             </a:r>
           </a:p>
         </p:txBody>
@@ -5921,11 +5921,11 @@
               </a:defRPr>
             </a:pPr>
             <a:r>
-              <a:t>파일 생성: mkdir -p ~/agv_ws/src/agv_gazebo/config</a:t>
+              <a:t>파일 생성: mkdir -p ~/ros2_curri/agv_ws/src/agv_gazebo/config</a:t>
             </a:r>
             <a:br/>
             <a:r>
-              <a:t>파일 열기: nano ~/agv_ws/src/agv_gazebo/config/bridge.yaml</a:t>
+              <a:t>파일 열기: nano ~/ros2_curri/agv_ws/src/agv_gazebo/config/bridge.yaml</a:t>
             </a:r>
           </a:p>
         </p:txBody>
@@ -6162,7 +6162,7 @@
               </a:defRPr>
             </a:pPr>
             <a:r>
-              <a:t>~/agv_ws/src/agv_gazebo/config/bridge.yaml</a:t>
+              <a:t>~/ros2_curri/agv_ws/src/agv_gazebo/config/bridge.yaml</a:t>
             </a:r>
           </a:p>
         </p:txBody>
@@ -6298,7 +6298,7 @@
               </a:defRPr>
             </a:pPr>
             <a:r>
-              <a:t>현재 단계 5/6    |    현재 폴더 ~/agv_ws    |    현재 터미널</a:t>
+              <a:t>현재 단계 5/6    |    현재 폴더 ~/ros2_curri/agv_ws    |    현재 터미널</a:t>
             </a:r>
           </a:p>
         </p:txBody>
@@ -6395,11 +6395,11 @@
               </a:defRPr>
             </a:pPr>
             <a:r>
-              <a:t>파일 생성: mkdir -p ~/agv_ws/src/agv_gazebo/config</a:t>
+              <a:t>파일 생성: mkdir -p ~/ros2_curri/agv_ws/src/agv_gazebo/config</a:t>
             </a:r>
             <a:br/>
             <a:r>
-              <a:t>파일 열기: nano ~/agv_ws/src/agv_gazebo/config/bridge.yaml</a:t>
+              <a:t>파일 열기: nano ~/ros2_curri/agv_ws/src/agv_gazebo/config/bridge.yaml</a:t>
             </a:r>
           </a:p>
         </p:txBody>
@@ -6612,7 +6612,7 @@
               </a:defRPr>
             </a:pPr>
             <a:r>
-              <a:t>~/agv_ws/src/agv_gazebo/launch/gazebo.launch.py</a:t>
+              <a:t>~/ros2_curri/agv_ws/src/agv_gazebo/launch/gazebo.launch.py</a:t>
             </a:r>
           </a:p>
         </p:txBody>
@@ -6748,7 +6748,7 @@
               </a:defRPr>
             </a:pPr>
             <a:r>
-              <a:t>현재 단계 6/8    |    현재 폴더 ~/agv_ws    |    현재 터미널</a:t>
+              <a:t>현재 단계 6/8    |    현재 폴더 ~/ros2_curri/agv_ws    |    현재 터미널</a:t>
             </a:r>
           </a:p>
         </p:txBody>
@@ -6845,11 +6845,11 @@
               </a:defRPr>
             </a:pPr>
             <a:r>
-              <a:t>파일 생성: mkdir -p ~/agv_ws/src/agv_gazebo/launch</a:t>
+              <a:t>파일 생성: mkdir -p ~/ros2_curri/agv_ws/src/agv_gazebo/launch</a:t>
             </a:r>
             <a:br/>
             <a:r>
-              <a:t>파일 열기: nano ~/agv_ws/src/agv_gazebo/launch/gazebo.launch.py</a:t>
+              <a:t>파일 열기: nano ~/ros2_curri/agv_ws/src/agv_gazebo/launch/gazebo.launch.py</a:t>
             </a:r>
           </a:p>
         </p:txBody>
@@ -7083,7 +7083,7 @@
               </a:defRPr>
             </a:pPr>
             <a:r>
-              <a:t>~/agv_ws/src/agv_gazebo/launch/gazebo.launch.py</a:t>
+              <a:t>~/ros2_curri/agv_ws/src/agv_gazebo/launch/gazebo.launch.py</a:t>
             </a:r>
           </a:p>
         </p:txBody>
@@ -7219,7 +7219,7 @@
               </a:defRPr>
             </a:pPr>
             <a:r>
-              <a:t>현재 단계 7/8    |    현재 폴더 ~/agv_ws    |    현재 터미널</a:t>
+              <a:t>현재 단계 7/8    |    현재 폴더 ~/ros2_curri/agv_ws    |    현재 터미널</a:t>
             </a:r>
           </a:p>
         </p:txBody>
@@ -7316,11 +7316,11 @@
               </a:defRPr>
             </a:pPr>
             <a:r>
-              <a:t>파일 생성: mkdir -p ~/agv_ws/src/agv_gazebo/launch</a:t>
+              <a:t>파일 생성: mkdir -p ~/ros2_curri/agv_ws/src/agv_gazebo/launch</a:t>
             </a:r>
             <a:br/>
             <a:r>
-              <a:t>파일 열기: nano ~/agv_ws/src/agv_gazebo/launch/gazebo.launch.py</a:t>
+              <a:t>파일 열기: nano ~/ros2_curri/agv_ws/src/agv_gazebo/launch/gazebo.launch.py</a:t>
             </a:r>
           </a:p>
         </p:txBody>
@@ -7673,7 +7673,7 @@
               </a:defRPr>
             </a:pPr>
             <a:r>
-              <a:t>현재 단계 실행    |    현재 폴더 ~/agv_ws    |    현재 터미널</a:t>
+              <a:t>현재 단계 실행    |    현재 폴더 ~/ros2_curri/agv_ws    |    현재 터미널</a:t>
             </a:r>
           </a:p>
         </p:txBody>
@@ -7731,7 +7731,7 @@
               </a:defRPr>
             </a:pPr>
             <a:r>
-              <a:t>source ~/agv_ws/install/setup.bash</a:t>
+              <a:t>source ~/ros2_curri/agv_ws/install/setup.bash</a:t>
             </a:r>
             <a:br/>
             <a:r>
@@ -8282,7 +8282,7 @@
               </a:defRPr>
             </a:pPr>
             <a:r>
-              <a:t>현재 단계 검증    |    현재 폴더 ~/agv_ws    |    현재 터미널</a:t>
+              <a:t>현재 단계 검증    |    현재 폴더 ~/ros2_curri/agv_ws    |    현재 터미널</a:t>
             </a:r>
           </a:p>
         </p:txBody>
@@ -8685,7 +8685,7 @@
               </a:defRPr>
             </a:pPr>
             <a:r>
-              <a:t>현재 단계 오류 대응    |    현재 폴더 ~/agv_ws    |    현재 터미널</a:t>
+              <a:t>현재 단계 오류 대응    |    현재 폴더 ~/ros2_curri/agv_ws    |    현재 터미널</a:t>
             </a:r>
           </a:p>
         </p:txBody>
@@ -9210,7 +9210,7 @@
               </a:defRPr>
             </a:pPr>
             <a:r>
-              <a:t>현재 단계 미니 실습    |    현재 폴더 ~/agv_ws    |    현재 터미널</a:t>
+              <a:t>현재 단계 미니 실습    |    현재 폴더 ~/ros2_curri/agv_ws    |    현재 터미널</a:t>
             </a:r>
           </a:p>
         </p:txBody>
@@ -9539,7 +9539,7 @@
               </a:defRPr>
             </a:pPr>
             <a:r>
-              <a:t>현재 단계 체크포인트    |    현재 폴더 ~/agv_ws    |    현재 터미널</a:t>
+              <a:t>현재 단계 체크포인트    |    현재 폴더 ~/ros2_curri/agv_ws    |    현재 터미널</a:t>
             </a:r>
           </a:p>
         </p:txBody>
@@ -10950,7 +10950,7 @@
               </a:defRPr>
             </a:pPr>
             <a:r>
-              <a:t>현재 단계 시작    |    현재 폴더 ~/agv_ws    |    현재 터미널</a:t>
+              <a:t>현재 단계 시작    |    현재 폴더 ~/ros2_curri/agv_ws    |    현재 터미널</a:t>
             </a:r>
           </a:p>
         </p:txBody>
@@ -11066,7 +11066,7 @@
               </a:defRPr>
             </a:pPr>
             <a:r>
-              <a:t>• 현재 폴더: ~/agv_ws</a:t>
+              <a:t>• 현재 폴더: ~/ros2_curri/agv_ws</a:t>
             </a:r>
           </a:p>
           <a:p>
@@ -11137,7 +11137,7 @@
               </a:defRPr>
             </a:pPr>
             <a:r>
-              <a:t>확인: pwd가 ~/agv_ws이고, 이전 모듈의 완료 조건을 한 문장으로 설명할 수 있으면 시작합니다.</a:t>
+              <a:t>확인: pwd가 ~/ros2_curri/agv_ws이고, 이전 모듈의 완료 조건을 한 문장으로 설명할 수 있으면 시작합니다.</a:t>
             </a:r>
           </a:p>
         </p:txBody>
@@ -12167,7 +12167,7 @@
               </a:defRPr>
             </a:pPr>
             <a:r>
-              <a:t>~/agv_ws/src/</a:t>
+              <a:t>~/ros2_curri/agv_ws/src/</a:t>
             </a:r>
             <a:br/>
             <a:r>
@@ -12446,7 +12446,7 @@
               </a:defRPr>
             </a:pPr>
             <a:r>
-              <a:t>현재 단계 1/2    |    현재 폴더 ~/agv_ws    |    현재 터미널</a:t>
+              <a:t>현재 단계 1/2    |    현재 폴더 ~/ros2_curri/agv_ws    |    현재 터미널</a:t>
             </a:r>
           </a:p>
         </p:txBody>
@@ -12582,7 +12582,7 @@
               </a:defRPr>
             </a:pPr>
             <a:r>
-              <a:t>cd ~/agv_ws</a:t>
+              <a:t>cd ~/ros2_curri/agv_ws</a:t>
             </a:r>
             <a:br/>
             <a:r>
@@ -12896,7 +12896,7 @@
               </a:defRPr>
             </a:pPr>
             <a:r>
-              <a:t>현재 단계 2/2    |    현재 폴더 ~/agv_ws    |    현재 터미널</a:t>
+              <a:t>현재 단계 2/2    |    현재 폴더 ~/ros2_curri/agv_ws    |    현재 터미널</a:t>
             </a:r>
           </a:p>
         </p:txBody>
@@ -13214,7 +13214,7 @@
               </a:defRPr>
             </a:pPr>
             <a:r>
-              <a:t>~/agv_ws/src/agv_gazebo/config/bridge.yaml</a:t>
+              <a:t>~/ros2_curri/agv_ws/src/agv_gazebo/config/bridge.yaml</a:t>
             </a:r>
           </a:p>
         </p:txBody>
@@ -13350,7 +13350,7 @@
               </a:defRPr>
             </a:pPr>
             <a:r>
-              <a:t>현재 단계 3/6    |    현재 폴더 ~/agv_ws    |    현재 터미널</a:t>
+              <a:t>현재 단계 3/6    |    현재 폴더 ~/ros2_curri/agv_ws    |    현재 터미널</a:t>
             </a:r>
           </a:p>
         </p:txBody>
@@ -13447,11 +13447,11 @@
               </a:defRPr>
             </a:pPr>
             <a:r>
-              <a:t>파일 생성: mkdir -p ~/agv_ws/src/agv_gazebo/config</a:t>
+              <a:t>파일 생성: mkdir -p ~/ros2_curri/agv_ws/src/agv_gazebo/config</a:t>
             </a:r>
             <a:br/>
             <a:r>
-              <a:t>파일 열기: nano ~/agv_ws/src/agv_gazebo/config/bridge.yaml</a:t>
+              <a:t>파일 열기: nano ~/ros2_curri/agv_ws/src/agv_gazebo/config/bridge.yaml</a:t>
             </a:r>
           </a:p>
         </p:txBody>

--- a/blocks/C_drive_visualization/M10_ros_gz_bridge/M10_ros_gz_bridge_ROS2_Gazebo_연결.pptx
+++ b/blocks/C_drive_visualization/M10_ros_gz_bridge/M10_ros_gz_bridge_ROS2_Gazebo_연결.pptx
@@ -25,6 +25,7 @@
     <p:sldId id="273" r:id="rId25"/>
     <p:sldId id="274" r:id="rId26"/>
     <p:sldId id="275" r:id="rId27"/>
+    <p:sldId id="276" r:id="rId28"/>
   </p:sldIdLst>
   <p:sldSz cx="12191999" cy="6858000" type="screen4x3"/>
   <p:notesSz cx="6858000" cy="9144000"/>
@@ -611,7 +612,7 @@
           <a:lstStyle/>
           <a:p>
             <a:r>
-              <a:t>[설명] ~/ros2_curri/agv_ws/src/agv_gazebo/config/bridge.yaml의 전체 파일을 2/3 구간으로 작성한다.</a:t>
+              <a:t>[설명] ~/ros2_curri/agv_ws/src/agv_gazebo/config/bridge.yaml의 전체 파일을 1/3 구간으로 작성한다.</a:t>
             </a:r>
           </a:p>
           <a:p>
@@ -701,7 +702,7 @@
           <a:lstStyle/>
           <a:p>
             <a:r>
-              <a:t>[설명] ~/ros2_curri/agv_ws/src/agv_gazebo/config/bridge.yaml의 전체 파일을 3/3 구간으로 작성한다.</a:t>
+              <a:t>[설명] ~/ros2_curri/agv_ws/src/agv_gazebo/config/bridge.yaml의 전체 파일을 2/3 구간으로 작성한다.</a:t>
             </a:r>
           </a:p>
           <a:p>
@@ -791,12 +792,12 @@
           <a:lstStyle/>
           <a:p>
             <a:r>
-              <a:t>[설명] ~/ros2_curri/agv_ws/src/agv_gazebo/launch/gazebo.launch.py의 전체 파일을 1/2 구간으로 작성한다.</a:t>
-            </a:r>
-          </a:p>
-          <a:p>
-            <a:r>
-              <a:t>[실행] nano ~/ros2_curri/agv_ws/src/agv_gazebo/launch/gazebo.launch.py</a:t>
+              <a:t>[설명] ~/ros2_curri/agv_ws/src/agv_gazebo/config/bridge.yaml의 전체 파일을 3/3 구간으로 작성한다.</a:t>
+            </a:r>
+          </a:p>
+          <a:p>
+            <a:r>
+              <a:t>[실행] nano ~/ros2_curri/agv_ws/src/agv_gazebo/config/bridge.yaml</a:t>
             </a:r>
           </a:p>
           <a:p>
@@ -881,7 +882,7 @@
           <a:lstStyle/>
           <a:p>
             <a:r>
-              <a:t>[설명] ~/ros2_curri/agv_ws/src/agv_gazebo/launch/gazebo.launch.py의 전체 파일을 2/2 구간으로 작성한다.</a:t>
+              <a:t>[설명] ~/ros2_curri/agv_ws/src/agv_gazebo/launch/gazebo.launch.py의 전체 파일을 1/2 구간으로 작성한다.</a:t>
             </a:r>
           </a:p>
           <a:p>
@@ -971,22 +972,17 @@
           <a:lstStyle/>
           <a:p>
             <a:r>
-              <a:t>[설명] build/source/run을 생략 없이 실행한다.</a:t>
-            </a:r>
-          </a:p>
-          <a:p>
-            <a:r>
-              <a:t>[실행] source ~/ros2_curri/agv_ws/install/setup.bash</a:t>
-            </a:r>
-          </a:p>
-          <a:p>
-            <a:r>
-              <a:t>ros2 launch agv_gazebo gazebo.launch.py</a:t>
-            </a:r>
-          </a:p>
-          <a:p>
-            <a:r>
-              <a:t>[확인] /cmd_vel ROS→Gazebo 및 odom/scan/imu/camera/clock Gazebo→ROS 매핑을 확인한다.</a:t>
+              <a:t>[설명] ~/ros2_curri/agv_ws/src/agv_gazebo/launch/gazebo.launch.py의 전체 파일을 2/2 구간으로 작성한다.</a:t>
+            </a:r>
+          </a:p>
+          <a:p>
+            <a:r>
+              <a:t>[실행] nano ~/ros2_curri/agv_ws/src/agv_gazebo/launch/gazebo.launch.py</a:t>
+            </a:r>
+          </a:p>
+          <a:p>
+            <a:r>
+              <a:t>[확인] 코드를 저장하고 다음 코드 슬라이드 또는 build 단계로 이동한다.</a:t>
             </a:r>
           </a:p>
           <a:p>
@@ -996,7 +992,7 @@
           </a:p>
           <a:p>
             <a:r>
-              <a:t>[오류] 오류가 나면 현재 폴더, source, 파일 경로를 먼저 확인한다.</a:t>
+              <a:t>[오류] 들여쓰기·XML 태그·따옴표가 슬라이드와 정확히 같은지 확인한다.</a:t>
             </a:r>
           </a:p>
         </p:txBody>
@@ -1066,17 +1062,22 @@
           <a:lstStyle/>
           <a:p>
             <a:r>
-              <a:t>[설명] 실제 Ubuntu/ROS 2 환경에서 생성한 검증 화면이다.</a:t>
-            </a:r>
-          </a:p>
-          <a:p>
-            <a:r>
-              <a:t>[실행] 슬라이드의 명령 또는 파일 작성 단계를 진행한다.</a:t>
-            </a:r>
-          </a:p>
-          <a:p>
-            <a:r>
-              <a:t>[확인] 캡처의 명령과 다음 슬라이드의 검증 명령을 비교한다.</a:t>
+              <a:t>[설명] build/source/run을 생략 없이 실행한다.</a:t>
+            </a:r>
+          </a:p>
+          <a:p>
+            <a:r>
+              <a:t>[실행] source ~/ros2_curri/agv_ws/install/setup.bash</a:t>
+            </a:r>
+          </a:p>
+          <a:p>
+            <a:r>
+              <a:t>ros2 launch agv_gazebo gazebo.launch.py</a:t>
+            </a:r>
+          </a:p>
+          <a:p>
+            <a:r>
+              <a:t>[확인] /cmd_vel ROS→Gazebo 및 odom/scan/imu/camera/clock Gazebo→ROS 매핑을 확인한다.</a:t>
             </a:r>
           </a:p>
           <a:p>
@@ -1156,22 +1157,17 @@
           <a:lstStyle/>
           <a:p>
             <a:r>
-              <a:t>[설명] 검증 명령은 GUI 결과와 별도로 실행해 재현 가능한 완료 기준을 만든다.</a:t>
-            </a:r>
-          </a:p>
-          <a:p>
-            <a:r>
-              <a:t>[실행] ros2 topic list | rg '/cmd_vel|/odom|/scan|/imu|/camera|/clock'</a:t>
-            </a:r>
-          </a:p>
-          <a:p>
-            <a:r>
-              <a:t>ros2 topic info /scan</a:t>
-            </a:r>
-          </a:p>
-          <a:p>
-            <a:r>
-              <a:t>[확인] /cmd_vel ROS→Gazebo 및 odom/scan/imu/camera/clock Gazebo→ROS 매핑을 확인한다.</a:t>
+              <a:t>[설명] 실제 Ubuntu/ROS 2 환경에서 생성한 검증 화면이다.</a:t>
+            </a:r>
+          </a:p>
+          <a:p>
+            <a:r>
+              <a:t>[실행] 슬라이드의 명령 또는 파일 작성 단계를 진행한다.</a:t>
+            </a:r>
+          </a:p>
+          <a:p>
+            <a:r>
+              <a:t>[확인] ① 명령/설정  ② 정상 출력 또는 화면  ③ 다음 검증 명령으로 재확인</a:t>
             </a:r>
           </a:p>
           <a:p>
@@ -1251,17 +1247,22 @@
           <a:lstStyle/>
           <a:p>
             <a:r>
-              <a:t>[설명] 오류를 대신 해결하지 말고 증상부터 우선 확인 순서대로 교육생이 실행하게 한다.</a:t>
-            </a:r>
-          </a:p>
-          <a:p>
-            <a:r>
-              <a:t>[실행] 슬라이드의 명령 또는 파일 작성 단계를 진행한다.</a:t>
-            </a:r>
-          </a:p>
-          <a:p>
-            <a:r>
-              <a:t>[확인] 수정 뒤 첫 검증 명령을 다시 실행한다.</a:t>
+              <a:t>[설명] 검증 명령은 GUI 결과와 별도로 실행해 재현 가능한 완료 기준을 만든다.</a:t>
+            </a:r>
+          </a:p>
+          <a:p>
+            <a:r>
+              <a:t>[실행] ros2 topic list | rg '/cmd_vel|/odom|/scan|/imu|/camera|/clock'</a:t>
+            </a:r>
+          </a:p>
+          <a:p>
+            <a:r>
+              <a:t>ros2 topic info /scan</a:t>
+            </a:r>
+          </a:p>
+          <a:p>
+            <a:r>
+              <a:t>[확인] /cmd_vel ROS→Gazebo 및 odom/scan/imu/camera/clock Gazebo→ROS 매핑을 확인한다.</a:t>
             </a:r>
           </a:p>
           <a:p>
@@ -1271,7 +1272,7 @@
           </a:p>
           <a:p>
             <a:r>
-              <a:t>[오류] 슬라이드의 두 대표 오류를 먼저 사용한다.</a:t>
+              <a:t>[오류] 오류가 나면 현재 폴더, source, 파일 경로를 먼저 확인한다.</a:t>
             </a:r>
           </a:p>
         </p:txBody>
@@ -1341,7 +1342,7 @@
           <a:lstStyle/>
           <a:p>
             <a:r>
-              <a:t>[설명] 교육생이 직접 한 값만 바꿔 원인과 결과를 연결하게 한다.</a:t>
+              <a:t>[설명] 오류를 대신 해결하지 말고 증상부터 우선 확인 순서대로 교육생이 실행하게 한다.</a:t>
             </a:r>
           </a:p>
           <a:p>
@@ -1351,7 +1352,7 @@
           </a:p>
           <a:p>
             <a:r>
-              <a:t>[확인] 원래 값과 변경 값을 모두 기록한다.</a:t>
+              <a:t>[확인] 수정 뒤 첫 검증 명령을 다시 실행한다.</a:t>
             </a:r>
           </a:p>
           <a:p>
@@ -1361,7 +1362,7 @@
           </a:p>
           <a:p>
             <a:r>
-              <a:t>[오류] 오류가 나면 현재 폴더, source, 파일 경로를 먼저 확인한다.</a:t>
+              <a:t>[오류] 슬라이드의 두 대표 오류를 먼저 사용한다.</a:t>
             </a:r>
           </a:p>
         </p:txBody>
@@ -1431,7 +1432,7 @@
           <a:lstStyle/>
           <a:p>
             <a:r>
-              <a:t>[설명] 교육생이 Complete·캡처·로그를 저장했는지 확인하고 다음 모듈의 시작 상태를 읽는다.</a:t>
+              <a:t>[설명] 교육생이 직접 한 값만 바꿔 원인과 결과를 연결하게 한다.</a:t>
             </a:r>
           </a:p>
           <a:p>
@@ -1441,7 +1442,7 @@
           </a:p>
           <a:p>
             <a:r>
-              <a:t>[확인] M11 RViz2 시작 조건을 말할 수 있다.</a:t>
+              <a:t>[확인] 원래 값과 변경 값을 모두 기록한다.</a:t>
             </a:r>
           </a:p>
           <a:p>
@@ -1611,6 +1612,96 @@
           <a:lstStyle/>
           <a:p>
             <a:r>
+              <a:t>[설명] 교육생이 Complete·캡처·로그를 저장했는지 확인하고 다음 모듈의 시작 상태를 읽는다.</a:t>
+            </a:r>
+          </a:p>
+          <a:p>
+            <a:r>
+              <a:t>[실행] 슬라이드의 명령 또는 파일 작성 단계를 진행한다.</a:t>
+            </a:r>
+          </a:p>
+          <a:p>
+            <a:r>
+              <a:t>[확인] M11 RViz2 시작 조건을 말할 수 있다.</a:t>
+            </a:r>
+          </a:p>
+          <a:p>
+            <a:r>
+              <a:t>[멈춤] 교육생이 현재 체크포인트를 통과할 때까지 기다린다.</a:t>
+            </a:r>
+          </a:p>
+          <a:p>
+            <a:r>
+              <a:t>[오류] 오류가 나면 현재 폴더, source, 파일 경로를 먼저 확인한다.</a:t>
+            </a:r>
+          </a:p>
+        </p:txBody>
+      </p:sp>
+      <p:sp>
+        <p:nvSpPr>
+          <p:cNvPr id="4" name="Slide Number Placeholder 3"/>
+          <p:cNvSpPr>
+            <a:spLocks noGrp="1"/>
+          </p:cNvSpPr>
+          <p:nvPr>
+            <p:ph type="sldNum" idx="5" sz="quarter"/>
+          </p:nvPr>
+        </p:nvSpPr>
+        <p:spPr/>
+      </p:sp>
+    </p:spTree>
+  </p:cSld>
+  <p:clrMapOvr>
+    <a:masterClrMapping/>
+  </p:clrMapOvr>
+</p:notes>
+</file>
+
+<file path=ppt/notesSlides/notesSlide21.xml><?xml version="1.0" encoding="utf-8"?>
+<p:notes xmlns:a="http://schemas.openxmlformats.org/drawingml/2006/main" xmlns:p="http://schemas.openxmlformats.org/presentationml/2006/main" xmlns:r="http://schemas.openxmlformats.org/officeDocument/2006/relationships">
+  <p:cSld>
+    <p:spTree>
+      <p:nvGrpSpPr>
+        <p:cNvPr id="1" name=""/>
+        <p:cNvGrpSpPr/>
+        <p:nvPr/>
+      </p:nvGrpSpPr>
+      <p:grpSpPr>
+        <a:xfrm>
+          <a:off x="0" y="0"/>
+          <a:ext cx="0" cy="0"/>
+          <a:chOff x="0" y="0"/>
+          <a:chExt cx="0" cy="0"/>
+        </a:xfrm>
+      </p:grpSpPr>
+      <p:sp>
+        <p:nvSpPr>
+          <p:cNvPr id="2" name="Slide Image Placeholder 1"/>
+          <p:cNvSpPr>
+            <a:spLocks noGrp="1"/>
+          </p:cNvSpPr>
+          <p:nvPr>
+            <p:ph type="sldImg" idx="2"/>
+          </p:nvPr>
+        </p:nvSpPr>
+        <p:spPr/>
+      </p:sp>
+      <p:sp>
+        <p:nvSpPr>
+          <p:cNvPr id="3" name="Notes Placeholder 2"/>
+          <p:cNvSpPr>
+            <a:spLocks noGrp="1"/>
+          </p:cNvSpPr>
+          <p:nvPr>
+            <p:ph type="body" idx="3" sz="quarter"/>
+          </p:nvPr>
+        </p:nvSpPr>
+        <p:spPr/>
+        <p:txBody>
+          <a:bodyPr/>
+          <a:lstStyle/>
+          <a:p>
+            <a:r>
               <a:t>[설명] 공식 문서는 버전 차이와 확장 학습을 확인할 때 사용한다.</a:t>
             </a:r>
           </a:p>
@@ -2061,22 +2152,17 @@
           <a:lstStyle/>
           <a:p>
             <a:r>
-              <a:t>[설명] 방향과 양쪽 message type을 한 topic마다 정확히 적는다.</a:t>
-            </a:r>
-          </a:p>
-          <a:p>
-            <a:r>
-              <a:t>[실행] cd ~/ros2_curri/agv_ws</a:t>
-            </a:r>
-          </a:p>
-          <a:p>
-            <a:r>
-              <a:t>nano src/agv_gazebo/config/bridge.yaml</a:t>
-            </a:r>
-          </a:p>
-          <a:p>
-            <a:r>
-              <a:t>[확인] 명령 출력에서 슬라이드의 확인 항목을 찾는다.</a:t>
+              <a:t>[설명] 파일을 코드 문법보다 먼저 역할·사용법·확인 화면으로 설명한다.</a:t>
+            </a:r>
+          </a:p>
+          <a:p>
+            <a:r>
+              <a:t>[실행] 슬라이드의 명령 또는 파일 작성 단계를 진행한다.</a:t>
+            </a:r>
+          </a:p>
+          <a:p>
+            <a:r>
+              <a:t>[확인] 교육생이 각 파일의 산출물과 확인 위치를 말할 수 있다.</a:t>
             </a:r>
           </a:p>
           <a:p>
@@ -2156,22 +2242,17 @@
           <a:lstStyle/>
           <a:p>
             <a:r>
-              <a:t>[설명] config_file은 package share 경로에서 찾도록 launch에 넣는다.</a:t>
-            </a:r>
-          </a:p>
-          <a:p>
-            <a:r>
-              <a:t>[실행] colcon build --symlink-install --packages-select agv_gazebo</a:t>
-            </a:r>
-          </a:p>
-          <a:p>
-            <a:r>
-              <a:t>source install/setup.bash</a:t>
-            </a:r>
-          </a:p>
-          <a:p>
-            <a:r>
-              <a:t>ros2 launch agv_gazebo gazebo.launch.py</a:t>
+              <a:t>[설명] 방향과 양쪽 message type을 한 topic마다 정확히 적는다.</a:t>
+            </a:r>
+          </a:p>
+          <a:p>
+            <a:r>
+              <a:t>[실행] cd ~/ros2_curri/agv_ws</a:t>
+            </a:r>
+          </a:p>
+          <a:p>
+            <a:r>
+              <a:t>nano src/agv_gazebo/config/bridge.yaml</a:t>
             </a:r>
           </a:p>
           <a:p>
@@ -2256,17 +2337,27 @@
           <a:lstStyle/>
           <a:p>
             <a:r>
-              <a:t>[설명] ~/ros2_curri/agv_ws/src/agv_gazebo/config/bridge.yaml의 전체 파일을 1/3 구간으로 작성한다.</a:t>
-            </a:r>
-          </a:p>
-          <a:p>
-            <a:r>
-              <a:t>[실행] nano ~/ros2_curri/agv_ws/src/agv_gazebo/config/bridge.yaml</a:t>
-            </a:r>
-          </a:p>
-          <a:p>
-            <a:r>
-              <a:t>[확인] 코드를 저장하고 다음 코드 슬라이드 또는 build 단계로 이동한다.</a:t>
+              <a:t>[설명] config_file은 package share 경로에서 찾도록 launch에 넣는다.</a:t>
+            </a:r>
+          </a:p>
+          <a:p>
+            <a:r>
+              <a:t>[실행] colcon build --symlink-install --packages-select agv_gazebo</a:t>
+            </a:r>
+          </a:p>
+          <a:p>
+            <a:r>
+              <a:t>source install/setup.bash</a:t>
+            </a:r>
+          </a:p>
+          <a:p>
+            <a:r>
+              <a:t>ros2 launch agv_gazebo gazebo.launch.py</a:t>
+            </a:r>
+          </a:p>
+          <a:p>
+            <a:r>
+              <a:t>[확인] 명령 출력에서 슬라이드의 확인 항목을 찾는다.</a:t>
             </a:r>
           </a:p>
           <a:p>
@@ -2276,7 +2367,7 @@
           </a:p>
           <a:p>
             <a:r>
-              <a:t>[오류] 들여쓰기·XML 태그·따옴표가 슬라이드와 정확히 같은지 확인한다.</a:t>
+              <a:t>[오류] 오류가 나면 현재 폴더, source, 파일 경로를 먼저 확인한다.</a:t>
             </a:r>
           </a:p>
         </p:txBody>
@@ -5649,7 +5740,7 @@
               </a:defRPr>
             </a:pPr>
             <a:r>
-              <a:t>파일을 계속 작성하고 저장한다 (2/3)</a:t>
+              <a:t>파일을 새로 만들고 저장한다 (1/3)</a:t>
             </a:r>
           </a:p>
         </p:txBody>
@@ -5824,7 +5915,7 @@
               </a:defRPr>
             </a:pPr>
             <a:r>
-              <a:t>현재 단계 4/6    |    현재 폴더 ~/ros2_curri/agv_ws    |    현재 터미널</a:t>
+              <a:t>현재 단계 3/6    |    현재 폴더 ~/ros2_curri/agv_ws    |    현재 터미널</a:t>
             </a:r>
           </a:p>
         </p:txBody>
@@ -5983,51 +6074,51 @@
               </a:defRPr>
             </a:pPr>
             <a:r>
-              <a:t>  ros_type_name: "sensor_msgs/msg/LaserScan"</a:t>
+              <a:t>- ros_topic_name: "/cmd_vel"</a:t>
             </a:r>
             <a:br/>
             <a:r>
-              <a:t>  gz_type_name: "gz.msgs.LaserScan"</a:t>
+              <a:t>  gz_topic_name: "/cmd_vel"</a:t>
             </a:r>
             <a:br/>
             <a:r>
+              <a:t>  ros_type_name: "geometry_msgs/msg/Twist"</a:t>
+            </a:r>
+            <a:br/>
+            <a:r>
+              <a:t>  gz_type_name: "gz.msgs.Twist"</a:t>
+            </a:r>
+            <a:br/>
+            <a:r>
+              <a:t>  direction: ROS_TO_GZ</a:t>
+            </a:r>
+            <a:br/>
+            <a:r>
+              <a:t>- ros_topic_name: "/odom"</a:t>
+            </a:r>
+            <a:br/>
+            <a:r>
+              <a:t>  gz_topic_name: "/odom"</a:t>
+            </a:r>
+            <a:br/>
+            <a:r>
+              <a:t>  ros_type_name: "nav_msgs/msg/Odometry"</a:t>
+            </a:r>
+            <a:br/>
+            <a:r>
+              <a:t>  gz_type_name: "gz.msgs.Odometry"</a:t>
+            </a:r>
+            <a:br/>
+            <a:r>
               <a:t>  direction: GZ_TO_ROS</a:t>
             </a:r>
             <a:br/>
             <a:r>
-              <a:t>- ros_topic_name: "/imu/data"</a:t>
+              <a:t>- ros_topic_name: "/scan"</a:t>
             </a:r>
             <a:br/>
             <a:r>
-              <a:t>  gz_topic_name: "/imu/data"</a:t>
-            </a:r>
-            <a:br/>
-            <a:r>
-              <a:t>  ros_type_name: "sensor_msgs/msg/Imu"</a:t>
-            </a:r>
-            <a:br/>
-            <a:r>
-              <a:t>  gz_type_name: "gz.msgs.IMU"</a:t>
-            </a:r>
-            <a:br/>
-            <a:r>
-              <a:t>  direction: GZ_TO_ROS</a:t>
-            </a:r>
-            <a:br/>
-            <a:r>
-              <a:t>- ros_topic_name: "/camera/image_raw"</a:t>
-            </a:r>
-            <a:br/>
-            <a:r>
-              <a:t>  gz_topic_name: "/camera/image_raw"</a:t>
-            </a:r>
-            <a:br/>
-            <a:r>
-              <a:t>  ros_type_name: "sensor_msgs/msg/Image"</a:t>
-            </a:r>
-            <a:br/>
-            <a:r>
-              <a:t>  gz_type_name: "gz.msgs.Image"</a:t>
+              <a:t>  gz_topic_name: "/scan"</a:t>
             </a:r>
           </a:p>
         </p:txBody>
@@ -6066,7 +6157,7 @@
               </a:defRPr>
             </a:pPr>
             <a:r>
-              <a:t>파일 전체 2/3 · 이 슬라이드 다음에 같은 파일의 나머지 줄이 이어집니다.</a:t>
+              <a:t>파일 전체 1/3 · 이 슬라이드 다음에 같은 파일의 나머지 줄이 이어집니다.</a:t>
             </a:r>
           </a:p>
         </p:txBody>
@@ -6123,7 +6214,7 @@
               </a:defRPr>
             </a:pPr>
             <a:r>
-              <a:t>파일을 계속 작성하고 저장한다 (3/3)</a:t>
+              <a:t>파일을 계속 작성하고 저장한다 (2/3)</a:t>
             </a:r>
           </a:p>
         </p:txBody>
@@ -6298,7 +6389,7 @@
               </a:defRPr>
             </a:pPr>
             <a:r>
-              <a:t>현재 단계 5/6    |    현재 폴더 ~/ros2_curri/agv_ws    |    현재 터미널</a:t>
+              <a:t>현재 단계 4/6    |    현재 폴더 ~/ros2_curri/agv_ws    |    현재 터미널</a:t>
             </a:r>
           </a:p>
         </p:txBody>
@@ -6457,27 +6548,51 @@
               </a:defRPr>
             </a:pPr>
             <a:r>
+              <a:t>  ros_type_name: "sensor_msgs/msg/LaserScan"</a:t>
+            </a:r>
+            <a:br/>
+            <a:r>
+              <a:t>  gz_type_name: "gz.msgs.LaserScan"</a:t>
+            </a:r>
+            <a:br/>
+            <a:r>
               <a:t>  direction: GZ_TO_ROS</a:t>
             </a:r>
             <a:br/>
             <a:r>
-              <a:t>- ros_topic_name: "/clock"</a:t>
+              <a:t>- ros_topic_name: "/imu/data"</a:t>
             </a:r>
             <a:br/>
             <a:r>
-              <a:t>  gz_topic_name: "/clock"</a:t>
+              <a:t>  gz_topic_name: "/imu/data"</a:t>
             </a:r>
             <a:br/>
             <a:r>
-              <a:t>  ros_type_name: "rosgraph_msgs/msg/Clock"</a:t>
+              <a:t>  ros_type_name: "sensor_msgs/msg/Imu"</a:t>
             </a:r>
             <a:br/>
             <a:r>
-              <a:t>  gz_type_name: "gz.msgs.Clock"</a:t>
+              <a:t>  gz_type_name: "gz.msgs.IMU"</a:t>
             </a:r>
             <a:br/>
             <a:r>
               <a:t>  direction: GZ_TO_ROS</a:t>
+            </a:r>
+            <a:br/>
+            <a:r>
+              <a:t>- ros_topic_name: "/camera/image_raw"</a:t>
+            </a:r>
+            <a:br/>
+            <a:r>
+              <a:t>  gz_topic_name: "/camera/image_raw"</a:t>
+            </a:r>
+            <a:br/>
+            <a:r>
+              <a:t>  ros_type_name: "sensor_msgs/msg/Image"</a:t>
+            </a:r>
+            <a:br/>
+            <a:r>
+              <a:t>  gz_type_name: "gz.msgs.Image"</a:t>
             </a:r>
           </a:p>
         </p:txBody>
@@ -6516,7 +6631,7 @@
               </a:defRPr>
             </a:pPr>
             <a:r>
-              <a:t>파일 전체 3/3 · 이 슬라이드 다음에 같은 파일의 나머지 줄이 이어집니다.</a:t>
+              <a:t>파일 전체 2/3 · 이 슬라이드 다음에 같은 파일의 나머지 줄이 이어집니다.</a:t>
             </a:r>
           </a:p>
         </p:txBody>
@@ -6573,7 +6688,7 @@
               </a:defRPr>
             </a:pPr>
             <a:r>
-              <a:t>파일을 새로 만들고 저장한다 (1/2)</a:t>
+              <a:t>파일을 계속 작성하고 저장한다 (3/3)</a:t>
             </a:r>
           </a:p>
         </p:txBody>
@@ -6612,7 +6727,7 @@
               </a:defRPr>
             </a:pPr>
             <a:r>
-              <a:t>~/ros2_curri/agv_ws/src/agv_gazebo/launch/gazebo.launch.py</a:t>
+              <a:t>~/ros2_curri/agv_ws/src/agv_gazebo/config/bridge.yaml</a:t>
             </a:r>
           </a:p>
         </p:txBody>
@@ -6748,7 +6863,7 @@
               </a:defRPr>
             </a:pPr>
             <a:r>
-              <a:t>현재 단계 6/8    |    현재 폴더 ~/ros2_curri/agv_ws    |    현재 터미널</a:t>
+              <a:t>현재 단계 5/6    |    현재 폴더 ~/ros2_curri/agv_ws    |    현재 터미널</a:t>
             </a:r>
           </a:p>
         </p:txBody>
@@ -6845,11 +6960,11 @@
               </a:defRPr>
             </a:pPr>
             <a:r>
-              <a:t>파일 생성: mkdir -p ~/ros2_curri/agv_ws/src/agv_gazebo/launch</a:t>
+              <a:t>파일 생성: mkdir -p ~/ros2_curri/agv_ws/src/agv_gazebo/config</a:t>
             </a:r>
             <a:br/>
             <a:r>
-              <a:t>파일 열기: nano ~/ros2_curri/agv_ws/src/agv_gazebo/launch/gazebo.launch.py</a:t>
+              <a:t>파일 열기: nano ~/ros2_curri/agv_ws/src/agv_gazebo/config/bridge.yaml</a:t>
             </a:r>
           </a:p>
         </p:txBody>
@@ -6907,48 +7022,27 @@
               </a:defRPr>
             </a:pPr>
             <a:r>
-              <a:t>import os</a:t>
+              <a:t>  direction: GZ_TO_ROS</a:t>
             </a:r>
             <a:br/>
             <a:r>
-              <a:t>from ament_index_python.packages import get_package_share_directory</a:t>
+              <a:t>- ros_topic_name: "/clock"</a:t>
             </a:r>
             <a:br/>
             <a:r>
-              <a:t>from launch import LaunchDescription</a:t>
+              <a:t>  gz_topic_name: "/clock"</a:t>
             </a:r>
             <a:br/>
             <a:r>
-              <a:t>from launch.actions import IncludeLaunchDescription, SetEnvironmentVariable</a:t>
+              <a:t>  ros_type_name: "rosgraph_msgs/msg/Clock"</a:t>
             </a:r>
             <a:br/>
             <a:r>
-              <a:t>from launch.launch_description_sources import PythonLaunchDescriptionSource</a:t>
+              <a:t>  gz_type_name: "gz.msgs.Clock"</a:t>
             </a:r>
             <a:br/>
             <a:r>
-              <a:t>from launch_ros.actions import Node</a:t>
-            </a:r>
-            <a:br/>
-            <a:br/>
-            <a:r>
-              <a:t>def generate_launch_description():</a:t>
-            </a:r>
-            <a:br/>
-            <a:r>
-              <a:t>    share = get_package_share_directory('agv_gazebo')</a:t>
-            </a:r>
-            <a:br/>
-            <a:r>
-              <a:t>    world = os.path.join(share, 'worlds', 'warehouse.sdf')</a:t>
-            </a:r>
-            <a:br/>
-            <a:r>
-              <a:t>    models = os.path.join(share, 'models')</a:t>
-            </a:r>
-            <a:br/>
-            <a:r>
-              <a:t>    previous = os.environ.get('GZ_SIM_RESOURCE_PATH', '')</a:t>
+              <a:t>  direction: GZ_TO_ROS</a:t>
             </a:r>
           </a:p>
         </p:txBody>
@@ -6987,7 +7081,7 @@
               </a:defRPr>
             </a:pPr>
             <a:r>
-              <a:t>파일 전체 1/2 · 이 슬라이드 다음에 같은 파일의 나머지 줄이 이어집니다.</a:t>
+              <a:t>파일 전체 3/3 · 이 슬라이드 다음에 같은 파일의 나머지 줄이 이어집니다.</a:t>
             </a:r>
           </a:p>
         </p:txBody>
@@ -7044,7 +7138,7 @@
               </a:defRPr>
             </a:pPr>
             <a:r>
-              <a:t>파일을 계속 작성하고 저장한다 (2/2)</a:t>
+              <a:t>파일을 새로 만들고 저장한다 (1/2)</a:t>
             </a:r>
           </a:p>
         </p:txBody>
@@ -7219,7 +7313,7 @@
               </a:defRPr>
             </a:pPr>
             <a:r>
-              <a:t>현재 단계 7/8    |    현재 폴더 ~/ros2_curri/agv_ws    |    현재 터미널</a:t>
+              <a:t>현재 단계 6/8    |    현재 폴더 ~/ros2_curri/agv_ws    |    현재 터미널</a:t>
             </a:r>
           </a:p>
         </p:txBody>
@@ -7378,31 +7472,48 @@
               </a:defRPr>
             </a:pPr>
             <a:r>
-              <a:t>    gz_launch = os.path.join(get_package_share_directory('ros_gz_sim'), 'launch', 'gz_sim.launch.py')</a:t>
+              <a:t>import os</a:t>
             </a:r>
             <a:br/>
             <a:r>
-              <a:t>    return LaunchDescription([SetEnvironmentVariable('GZ_SIM_RESOURCE_PATH',</a:t>
+              <a:t>from ament_index_python.packages import get_package_share_directory</a:t>
             </a:r>
             <a:br/>
             <a:r>
-              <a:t>        models + (':' + previous if previous else '')),</a:t>
+              <a:t>from launch import LaunchDescription</a:t>
             </a:r>
             <a:br/>
             <a:r>
-              <a:t>        IncludeLaunchDescription(PythonLaunchDescriptionSource(gz_launch),</a:t>
+              <a:t>from launch.actions import IncludeLaunchDescription, SetEnvironmentVariable</a:t>
             </a:r>
             <a:br/>
             <a:r>
-              <a:t>        launch_arguments={'gz_args': '-r ' + world}.items()), Node(package='ros_gz_bridge',</a:t>
+              <a:t>from launch.launch_description_sources import PythonLaunchDescriptionSource</a:t>
             </a:r>
             <a:br/>
             <a:r>
-              <a:t>         executable='parameter_bridge', parameters=[{'config_file': os.path.join(share,</a:t>
+              <a:t>from launch_ros.actions import Node</a:t>
             </a:r>
             <a:br/>
-            <a:r>
-              <a:t>        'config', 'bridge.yaml')}], output='screen')])</a:t>
+            <a:br/>
+            <a:r>
+              <a:t>def generate_launch_description():</a:t>
+            </a:r>
+            <a:br/>
+            <a:r>
+              <a:t>    share = get_package_share_directory('agv_gazebo')</a:t>
+            </a:r>
+            <a:br/>
+            <a:r>
+              <a:t>    world = os.path.join(share, 'worlds', 'warehouse.sdf')</a:t>
+            </a:r>
+            <a:br/>
+            <a:r>
+              <a:t>    models = os.path.join(share, 'models')</a:t>
+            </a:r>
+            <a:br/>
+            <a:r>
+              <a:t>    previous = os.environ.get('GZ_SIM_RESOURCE_PATH', '')</a:t>
             </a:r>
           </a:p>
         </p:txBody>
@@ -7441,7 +7552,7 @@
               </a:defRPr>
             </a:pPr>
             <a:r>
-              <a:t>파일 전체 2/2 · 이 슬라이드 다음에 같은 파일의 나머지 줄이 이어집니다.</a:t>
+              <a:t>파일 전체 1/2 · 이 슬라이드 다음에 같은 파일의 나머지 줄이 이어집니다.</a:t>
             </a:r>
           </a:p>
         </p:txBody>
@@ -7498,7 +7609,7 @@
               </a:defRPr>
             </a:pPr>
             <a:r>
-              <a:t>build → source → run 순서로 실행한다</a:t>
+              <a:t>파일을 계속 작성하고 저장한다 (2/2)</a:t>
             </a:r>
           </a:p>
         </p:txBody>
@@ -7537,7 +7648,7 @@
               </a:defRPr>
             </a:pPr>
             <a:r>
-              <a:t>새 파일 또는 수정 파일은 build와 source 뒤에만 실행 이름·설정에 반영됩니다.</a:t>
+              <a:t>~/ros2_curri/agv_ws/src/agv_gazebo/launch/gazebo.launch.py</a:t>
             </a:r>
           </a:p>
         </p:txBody>
@@ -7673,23 +7784,124 @@
               </a:defRPr>
             </a:pPr>
             <a:r>
-              <a:t>현재 단계 실행    |    현재 폴더 ~/ros2_curri/agv_ws    |    현재 터미널</a:t>
-            </a:r>
-          </a:p>
-        </p:txBody>
-      </p:sp>
-      <p:sp>
-        <p:nvSpPr>
-          <p:cNvPr id="7" name="Rounded Rectangle 6"/>
+              <a:t>현재 단계 7/8    |    현재 폴더 ~/ros2_curri/agv_ws    |    현재 터미널</a:t>
+            </a:r>
+          </a:p>
+        </p:txBody>
+      </p:sp>
+      <p:sp>
+        <p:nvSpPr>
+          <p:cNvPr id="7" name="TextBox 6"/>
+          <p:cNvSpPr txBox="1"/>
+          <p:nvPr/>
+        </p:nvSpPr>
+        <p:spPr>
+          <a:xfrm>
+            <a:off x="658368" y="1627632"/>
+            <a:ext cx="10972800" cy="256032"/>
+          </a:xfrm>
+          <a:prstGeom prst="rect">
+            <a:avLst/>
+          </a:prstGeom>
+          <a:noFill/>
+        </p:spPr>
+        <p:txBody>
+          <a:bodyPr wrap="square" lIns="73152" rIns="73152" tIns="36576" bIns="36576">
+            <a:spAutoFit/>
+          </a:bodyPr>
+          <a:lstStyle/>
+          <a:p>
+            <a:pPr algn="l">
+              <a:spcAft>
+                <a:spcPts val="0"/>
+              </a:spcAft>
+              <a:defRPr sz="1500" b="1">
+                <a:solidFill>
+                  <a:srgbClr val="122C4E"/>
+                </a:solidFill>
+                <a:latin typeface="Noto Sans CJK KR"/>
+              </a:defRPr>
+            </a:pPr>
+            <a:r>
+              <a:t>이번 단계: 파일의 전체 내용을 중간 생략 없이 작성합니다. 아래 줄 범위를 끝까지 입력하세요.</a:t>
+            </a:r>
+          </a:p>
+        </p:txBody>
+      </p:sp>
+      <p:sp>
+        <p:nvSpPr>
+          <p:cNvPr id="8" name="Rectangle 7"/>
           <p:cNvSpPr/>
           <p:nvPr/>
         </p:nvSpPr>
         <p:spPr>
           <a:xfrm>
-            <a:off x="658368" y="1700784"/>
-            <a:ext cx="10972800" cy="3182112"/>
-          </a:xfrm>
-          <a:prstGeom prst="roundRect">
+            <a:off x="658368" y="1956816"/>
+            <a:ext cx="10972800" cy="603504"/>
+          </a:xfrm>
+          <a:prstGeom prst="rect">
+            <a:avLst/>
+          </a:prstGeom>
+          <a:solidFill>
+            <a:srgbClr val="F4F7FB"/>
+          </a:solidFill>
+          <a:ln>
+            <a:solidFill>
+              <a:srgbClr val="F4F7FB"/>
+            </a:solidFill>
+          </a:ln>
+        </p:spPr>
+        <p:style>
+          <a:lnRef idx="1">
+            <a:schemeClr val="accent1"/>
+          </a:lnRef>
+          <a:fillRef idx="3">
+            <a:schemeClr val="accent1"/>
+          </a:fillRef>
+          <a:effectRef idx="2">
+            <a:schemeClr val="accent1"/>
+          </a:effectRef>
+          <a:fontRef idx="minor">
+            <a:schemeClr val="lt1"/>
+          </a:fontRef>
+        </p:style>
+        <p:txBody>
+          <a:bodyPr rtlCol="0" anchor="ctr" wrap="square" lIns="73152" rIns="73152" tIns="36576" bIns="36576"/>
+          <a:lstStyle/>
+          <a:p>
+            <a:pPr algn="l">
+              <a:spcAft>
+                <a:spcPts val="0"/>
+              </a:spcAft>
+              <a:defRPr sz="1400" b="0">
+                <a:solidFill>
+                  <a:srgbClr val="122C4E"/>
+                </a:solidFill>
+                <a:latin typeface="DejaVu Sans Mono"/>
+              </a:defRPr>
+            </a:pPr>
+            <a:r>
+              <a:t>파일 생성: mkdir -p ~/ros2_curri/agv_ws/src/agv_gazebo/launch</a:t>
+            </a:r>
+            <a:br/>
+            <a:r>
+              <a:t>파일 열기: nano ~/ros2_curri/agv_ws/src/agv_gazebo/launch/gazebo.launch.py</a:t>
+            </a:r>
+          </a:p>
+        </p:txBody>
+      </p:sp>
+      <p:sp>
+        <p:nvSpPr>
+          <p:cNvPr id="9" name="Rectangle 8"/>
+          <p:cNvSpPr/>
+          <p:nvPr/>
+        </p:nvSpPr>
+        <p:spPr>
+          <a:xfrm>
+            <a:off x="658368" y="2706624"/>
+            <a:ext cx="10972800" cy="3364992"/>
+          </a:xfrm>
+          <a:prstGeom prst="rect">
             <a:avLst/>
           </a:prstGeom>
           <a:solidFill>
@@ -7716,14 +7928,14 @@
           </a:fontRef>
         </p:style>
         <p:txBody>
-          <a:bodyPr rtlCol="0" anchor="ctr" wrap="square" lIns="73152" rIns="73152" tIns="36576" bIns="36576"/>
+          <a:bodyPr rtlCol="0" anchor="ctr" wrap="square" lIns="164592" rIns="164592" tIns="109728" bIns="36576"/>
           <a:lstStyle/>
           <a:p>
             <a:pPr algn="l">
               <a:spcAft>
                 <a:spcPts val="0"/>
               </a:spcAft>
-              <a:defRPr sz="1600" b="0">
+              <a:defRPr sz="1400" b="0">
                 <a:solidFill>
                   <a:srgbClr val="FFFFFF"/>
                 </a:solidFill>
@@ -7731,25 +7943,45 @@
               </a:defRPr>
             </a:pPr>
             <a:r>
-              <a:t>source ~/ros2_curri/agv_ws/install/setup.bash</a:t>
+              <a:t>    gz_launch = os.path.join(get_package_share_directory('ros_gz_sim'), 'launch', 'gz_sim.launch.py')</a:t>
             </a:r>
             <a:br/>
             <a:r>
-              <a:t>ros2 launch agv_gazebo gazebo.launch.py</a:t>
-            </a:r>
-          </a:p>
-        </p:txBody>
-      </p:sp>
-      <p:sp>
-        <p:nvSpPr>
-          <p:cNvPr id="8" name="TextBox 7"/>
+              <a:t>    return LaunchDescription([SetEnvironmentVariable('GZ_SIM_RESOURCE_PATH',</a:t>
+            </a:r>
+            <a:br/>
+            <a:r>
+              <a:t>        models + (':' + previous if previous else '')),</a:t>
+            </a:r>
+            <a:br/>
+            <a:r>
+              <a:t>        IncludeLaunchDescription(PythonLaunchDescriptionSource(gz_launch),</a:t>
+            </a:r>
+            <a:br/>
+            <a:r>
+              <a:t>        launch_arguments={'gz_args': '-r ' + world}.items()), Node(package='ros_gz_bridge',</a:t>
+            </a:r>
+            <a:br/>
+            <a:r>
+              <a:t>         executable='parameter_bridge', parameters=[{'config_file': os.path.join(share,</a:t>
+            </a:r>
+            <a:br/>
+            <a:r>
+              <a:t>        'config', 'bridge.yaml')}], output='screen')])</a:t>
+            </a:r>
+          </a:p>
+        </p:txBody>
+      </p:sp>
+      <p:sp>
+        <p:nvSpPr>
+          <p:cNvPr id="10" name="TextBox 9"/>
           <p:cNvSpPr txBox="1"/>
           <p:nvPr/>
         </p:nvSpPr>
         <p:spPr>
           <a:xfrm>
-            <a:off x="786384" y="5239512"/>
-            <a:ext cx="1261872" cy="237744"/>
+            <a:off x="749808" y="6181344"/>
+            <a:ext cx="10789920" cy="201168"/>
           </a:xfrm>
           <a:prstGeom prst="rect">
             <a:avLst/>
@@ -7766,54 +7998,15 @@
               <a:spcAft>
                 <a:spcPts val="0"/>
               </a:spcAft>
-              <a:defRPr sz="1800" b="1">
-                <a:solidFill>
-                  <a:srgbClr val="2A8B5A"/>
-                </a:solidFill>
-                <a:latin typeface="Noto Sans CJK KR"/>
-              </a:defRPr>
-            </a:pPr>
-            <a:r>
-              <a:t>확인 기준</a:t>
-            </a:r>
-          </a:p>
-        </p:txBody>
-      </p:sp>
-      <p:sp>
-        <p:nvSpPr>
-          <p:cNvPr id="9" name="TextBox 8"/>
-          <p:cNvSpPr txBox="1"/>
-          <p:nvPr/>
-        </p:nvSpPr>
-        <p:spPr>
-          <a:xfrm>
-            <a:off x="786384" y="5532120"/>
-            <a:ext cx="10469880" cy="420624"/>
-          </a:xfrm>
-          <a:prstGeom prst="rect">
-            <a:avLst/>
-          </a:prstGeom>
-          <a:noFill/>
-        </p:spPr>
-        <p:txBody>
-          <a:bodyPr wrap="square" lIns="73152" rIns="73152" tIns="36576" bIns="36576">
-            <a:spAutoFit/>
-          </a:bodyPr>
-          <a:lstStyle/>
-          <a:p>
-            <a:pPr algn="l">
-              <a:spcAft>
-                <a:spcPts val="0"/>
-              </a:spcAft>
-              <a:defRPr sz="1800" b="0">
-                <a:solidFill>
-                  <a:srgbClr val="122C4E"/>
-                </a:solidFill>
-                <a:latin typeface="Noto Sans CJK KR"/>
-              </a:defRPr>
-            </a:pPr>
-            <a:r>
-              <a:t>/cmd_vel ROS→Gazebo 및 odom/scan/imu/camera/clock Gazebo→ROS 매핑을 확인한다.</a:t>
+              <a:defRPr sz="1000" b="0">
+                <a:solidFill>
+                  <a:srgbClr val="5C6672"/>
+                </a:solidFill>
+                <a:latin typeface="Noto Sans CJK KR"/>
+              </a:defRPr>
+            </a:pPr>
+            <a:r>
+              <a:t>파일 전체 2/2 · 이 슬라이드 다음에 같은 파일의 나머지 줄이 이어집니다.</a:t>
             </a:r>
           </a:p>
         </p:txBody>
@@ -7870,7 +8063,7 @@
               </a:defRPr>
             </a:pPr>
             <a:r>
-              <a:t>정상 결과: 실제 환경에서 확인한 출력</a:t>
+              <a:t>build → source → run 순서로 실행한다</a:t>
             </a:r>
           </a:p>
         </p:txBody>
@@ -7909,7 +8102,7 @@
               </a:defRPr>
             </a:pPr>
             <a:r>
-              <a:t>실제 ROS 2 환경의 파일·패키지·구성 검증 로그</a:t>
+              <a:t>새 파일 또는 수정 파일은 build와 source 뒤에만 실행 이름·설정에 반영됩니다.</a:t>
             </a:r>
           </a:p>
         </p:txBody>
@@ -7992,40 +8185,136 @@
           </a:p>
         </p:txBody>
       </p:sp>
-      <p:pic>
-        <p:nvPicPr>
-          <p:cNvPr id="6" name="Picture 5" descr="validation_terminal.png"/>
-          <p:cNvPicPr>
-            <a:picLocks noChangeAspect="1"/>
-          </p:cNvPicPr>
-          <p:nvPr/>
-        </p:nvPicPr>
-        <p:blipFill>
-          <a:blip r:embed="rId2"/>
-          <a:stretch>
-            <a:fillRect/>
-          </a:stretch>
-        </p:blipFill>
-        <p:spPr>
-          <a:xfrm>
-            <a:off x="2855133" y="1353312"/>
-            <a:ext cx="6478685" cy="4800600"/>
-          </a:xfrm>
-          <a:prstGeom prst="rect">
-            <a:avLst/>
-          </a:prstGeom>
-        </p:spPr>
-      </p:pic>
-      <p:sp>
-        <p:nvSpPr>
-          <p:cNvPr id="7" name="TextBox 6"/>
+      <p:sp>
+        <p:nvSpPr>
+          <p:cNvPr id="6" name="Rectangle 5"/>
+          <p:cNvSpPr/>
+          <p:nvPr/>
+        </p:nvSpPr>
+        <p:spPr>
+          <a:xfrm>
+            <a:off x="566928" y="1188720"/>
+            <a:ext cx="11064240" cy="347472"/>
+          </a:xfrm>
+          <a:prstGeom prst="rect">
+            <a:avLst/>
+          </a:prstGeom>
+          <a:solidFill>
+            <a:srgbClr val="F4F7FB"/>
+          </a:solidFill>
+          <a:ln>
+            <a:solidFill>
+              <a:srgbClr val="F4F7FB"/>
+            </a:solidFill>
+          </a:ln>
+        </p:spPr>
+        <p:style>
+          <a:lnRef idx="1">
+            <a:schemeClr val="accent1"/>
+          </a:lnRef>
+          <a:fillRef idx="3">
+            <a:schemeClr val="accent1"/>
+          </a:fillRef>
+          <a:effectRef idx="2">
+            <a:schemeClr val="accent1"/>
+          </a:effectRef>
+          <a:fontRef idx="minor">
+            <a:schemeClr val="lt1"/>
+          </a:fontRef>
+        </p:style>
+        <p:txBody>
+          <a:bodyPr rtlCol="0" anchor="ctr" wrap="square" lIns="73152" rIns="73152" tIns="36576" bIns="36576"/>
+          <a:lstStyle/>
+          <a:p>
+            <a:pPr algn="l">
+              <a:spcAft>
+                <a:spcPts val="0"/>
+              </a:spcAft>
+              <a:defRPr sz="1300" b="1">
+                <a:solidFill>
+                  <a:srgbClr val="122C4E"/>
+                </a:solidFill>
+                <a:latin typeface="Noto Sans CJK KR"/>
+              </a:defRPr>
+            </a:pPr>
+            <a:r>
+              <a:t>현재 단계 실행    |    현재 폴더 ~/ros2_curri/agv_ws    |    현재 터미널</a:t>
+            </a:r>
+          </a:p>
+        </p:txBody>
+      </p:sp>
+      <p:sp>
+        <p:nvSpPr>
+          <p:cNvPr id="7" name="Rounded Rectangle 6"/>
+          <p:cNvSpPr/>
+          <p:nvPr/>
+        </p:nvSpPr>
+        <p:spPr>
+          <a:xfrm>
+            <a:off x="658368" y="1700784"/>
+            <a:ext cx="10972800" cy="3182112"/>
+          </a:xfrm>
+          <a:prstGeom prst="roundRect">
+            <a:avLst/>
+          </a:prstGeom>
+          <a:solidFill>
+            <a:srgbClr val="1D232D"/>
+          </a:solidFill>
+          <a:ln>
+            <a:solidFill>
+              <a:srgbClr val="1D232D"/>
+            </a:solidFill>
+          </a:ln>
+        </p:spPr>
+        <p:style>
+          <a:lnRef idx="1">
+            <a:schemeClr val="accent1"/>
+          </a:lnRef>
+          <a:fillRef idx="3">
+            <a:schemeClr val="accent1"/>
+          </a:fillRef>
+          <a:effectRef idx="2">
+            <a:schemeClr val="accent1"/>
+          </a:effectRef>
+          <a:fontRef idx="minor">
+            <a:schemeClr val="lt1"/>
+          </a:fontRef>
+        </p:style>
+        <p:txBody>
+          <a:bodyPr rtlCol="0" anchor="ctr" wrap="square" lIns="73152" rIns="73152" tIns="36576" bIns="36576"/>
+          <a:lstStyle/>
+          <a:p>
+            <a:pPr algn="l">
+              <a:spcAft>
+                <a:spcPts val="0"/>
+              </a:spcAft>
+              <a:defRPr sz="1600" b="0">
+                <a:solidFill>
+                  <a:srgbClr val="FFFFFF"/>
+                </a:solidFill>
+                <a:latin typeface="DejaVu Sans Mono"/>
+              </a:defRPr>
+            </a:pPr>
+            <a:r>
+              <a:t>source ~/ros2_curri/agv_ws/install/setup.bash</a:t>
+            </a:r>
+            <a:br/>
+            <a:r>
+              <a:t>ros2 launch agv_gazebo gazebo.launch.py</a:t>
+            </a:r>
+          </a:p>
+        </p:txBody>
+      </p:sp>
+      <p:sp>
+        <p:nvSpPr>
+          <p:cNvPr id="8" name="TextBox 7"/>
           <p:cNvSpPr txBox="1"/>
           <p:nvPr/>
         </p:nvSpPr>
         <p:spPr>
           <a:xfrm>
-            <a:off x="777240" y="6217920"/>
-            <a:ext cx="10607040" cy="182880"/>
+            <a:off x="786384" y="5239512"/>
+            <a:ext cx="1261872" cy="237744"/>
           </a:xfrm>
           <a:prstGeom prst="rect">
             <a:avLst/>
@@ -8038,11 +8327,11 @@
           </a:bodyPr>
           <a:lstStyle/>
           <a:p>
-            <a:pPr algn="ctr">
-              <a:spcAft>
-                <a:spcPts val="0"/>
-              </a:spcAft>
-              <a:defRPr sz="1100" b="1">
+            <a:pPr algn="l">
+              <a:spcAft>
+                <a:spcPts val="0"/>
+              </a:spcAft>
+              <a:defRPr sz="1800" b="1">
                 <a:solidFill>
                   <a:srgbClr val="2A8B5A"/>
                 </a:solidFill>
@@ -8050,7 +8339,46 @@
               </a:defRPr>
             </a:pPr>
             <a:r>
-              <a:t>① 명령/설정  ② 정상 출력 또는 화면  ③ 다음 검증 명령으로 재확인</a:t>
+              <a:t>확인 기준</a:t>
+            </a:r>
+          </a:p>
+        </p:txBody>
+      </p:sp>
+      <p:sp>
+        <p:nvSpPr>
+          <p:cNvPr id="9" name="TextBox 8"/>
+          <p:cNvSpPr txBox="1"/>
+          <p:nvPr/>
+        </p:nvSpPr>
+        <p:spPr>
+          <a:xfrm>
+            <a:off x="786384" y="5532120"/>
+            <a:ext cx="10469880" cy="420624"/>
+          </a:xfrm>
+          <a:prstGeom prst="rect">
+            <a:avLst/>
+          </a:prstGeom>
+          <a:noFill/>
+        </p:spPr>
+        <p:txBody>
+          <a:bodyPr wrap="square" lIns="73152" rIns="73152" tIns="36576" bIns="36576">
+            <a:spAutoFit/>
+          </a:bodyPr>
+          <a:lstStyle/>
+          <a:p>
+            <a:pPr algn="l">
+              <a:spcAft>
+                <a:spcPts val="0"/>
+              </a:spcAft>
+              <a:defRPr sz="1800" b="0">
+                <a:solidFill>
+                  <a:srgbClr val="122C4E"/>
+                </a:solidFill>
+                <a:latin typeface="Noto Sans CJK KR"/>
+              </a:defRPr>
+            </a:pPr>
+            <a:r>
+              <a:t>/cmd_vel ROS→Gazebo 및 odom/scan/imu/camera/clock Gazebo→ROS 매핑을 확인한다.</a:t>
             </a:r>
           </a:p>
         </p:txBody>
@@ -8107,7 +8435,7 @@
               </a:defRPr>
             </a:pPr>
             <a:r>
-              <a:t>객관적 검증 명령으로 완료를 확인한다</a:t>
+              <a:t>정상 결과: 실제 환경에서 확인한 출력</a:t>
             </a:r>
           </a:p>
         </p:txBody>
@@ -8146,7 +8474,7 @@
               </a:defRPr>
             </a:pPr>
             <a:r>
-              <a:t>화면만 보지 말고 topic·frame·파일·parameter를 다시 확인합니다.</a:t>
+              <a:t>실제 ROS 2 환경의 파일·패키지·구성 검증 로그</a:t>
             </a:r>
           </a:p>
         </p:txBody>
@@ -8229,206 +8557,40 @@
           </a:p>
         </p:txBody>
       </p:sp>
-      <p:sp>
-        <p:nvSpPr>
-          <p:cNvPr id="6" name="Rectangle 5"/>
-          <p:cNvSpPr/>
-          <p:nvPr/>
-        </p:nvSpPr>
-        <p:spPr>
-          <a:xfrm>
-            <a:off x="566928" y="1188720"/>
-            <a:ext cx="11064240" cy="347472"/>
-          </a:xfrm>
-          <a:prstGeom prst="rect">
-            <a:avLst/>
-          </a:prstGeom>
-          <a:solidFill>
-            <a:srgbClr val="F4F7FB"/>
-          </a:solidFill>
-          <a:ln>
-            <a:solidFill>
-              <a:srgbClr val="F4F7FB"/>
-            </a:solidFill>
-          </a:ln>
-        </p:spPr>
-        <p:style>
-          <a:lnRef idx="1">
-            <a:schemeClr val="accent1"/>
-          </a:lnRef>
-          <a:fillRef idx="3">
-            <a:schemeClr val="accent1"/>
-          </a:fillRef>
-          <a:effectRef idx="2">
-            <a:schemeClr val="accent1"/>
-          </a:effectRef>
-          <a:fontRef idx="minor">
-            <a:schemeClr val="lt1"/>
-          </a:fontRef>
-        </p:style>
-        <p:txBody>
-          <a:bodyPr rtlCol="0" anchor="ctr" wrap="square" lIns="73152" rIns="73152" tIns="36576" bIns="36576"/>
-          <a:lstStyle/>
-          <a:p>
-            <a:pPr algn="l">
-              <a:spcAft>
-                <a:spcPts val="0"/>
-              </a:spcAft>
-              <a:defRPr sz="1300" b="1">
-                <a:solidFill>
-                  <a:srgbClr val="122C4E"/>
-                </a:solidFill>
-                <a:latin typeface="Noto Sans CJK KR"/>
-              </a:defRPr>
-            </a:pPr>
-            <a:r>
-              <a:t>현재 단계 검증    |    현재 폴더 ~/ros2_curri/agv_ws    |    현재 터미널</a:t>
-            </a:r>
-          </a:p>
-        </p:txBody>
-      </p:sp>
-      <p:sp>
-        <p:nvSpPr>
-          <p:cNvPr id="7" name="Rounded Rectangle 6"/>
-          <p:cNvSpPr/>
-          <p:nvPr/>
-        </p:nvSpPr>
-        <p:spPr>
-          <a:xfrm>
-            <a:off x="658368" y="1755648"/>
-            <a:ext cx="10972800" cy="2148840"/>
-          </a:xfrm>
-          <a:prstGeom prst="roundRect">
-            <a:avLst/>
-          </a:prstGeom>
-          <a:solidFill>
-            <a:srgbClr val="1D232D"/>
-          </a:solidFill>
-          <a:ln>
-            <a:solidFill>
-              <a:srgbClr val="1D232D"/>
-            </a:solidFill>
-          </a:ln>
-        </p:spPr>
-        <p:style>
-          <a:lnRef idx="1">
-            <a:schemeClr val="accent1"/>
-          </a:lnRef>
-          <a:fillRef idx="3">
-            <a:schemeClr val="accent1"/>
-          </a:fillRef>
-          <a:effectRef idx="2">
-            <a:schemeClr val="accent1"/>
-          </a:effectRef>
-          <a:fontRef idx="minor">
-            <a:schemeClr val="lt1"/>
-          </a:fontRef>
-        </p:style>
-        <p:txBody>
-          <a:bodyPr rtlCol="0" anchor="ctr" wrap="square" lIns="73152" rIns="73152" tIns="36576" bIns="36576"/>
-          <a:lstStyle/>
-          <a:p>
-            <a:pPr algn="l">
-              <a:spcAft>
-                <a:spcPts val="0"/>
-              </a:spcAft>
-              <a:defRPr sz="1600" b="0">
-                <a:solidFill>
-                  <a:srgbClr val="FFFFFF"/>
-                </a:solidFill>
-                <a:latin typeface="DejaVu Sans Mono"/>
-              </a:defRPr>
-            </a:pPr>
-            <a:r>
-              <a:t>ros2 topic list | rg '/cmd_vel|/odom|/scan|/imu|/camera|/clock'</a:t>
-            </a:r>
-            <a:br/>
-            <a:r>
-              <a:t>ros2 topic info /scan</a:t>
-            </a:r>
-          </a:p>
-        </p:txBody>
-      </p:sp>
-      <p:sp>
-        <p:nvSpPr>
-          <p:cNvPr id="8" name="Rounded Rectangle 7"/>
-          <p:cNvSpPr/>
-          <p:nvPr/>
-        </p:nvSpPr>
-        <p:spPr>
-          <a:xfrm>
-            <a:off x="658368" y="4206240"/>
-            <a:ext cx="10972800" cy="1554480"/>
-          </a:xfrm>
-          <a:prstGeom prst="roundRect">
-            <a:avLst/>
-          </a:prstGeom>
-          <a:solidFill>
-            <a:srgbClr val="F4F7FB"/>
-          </a:solidFill>
-          <a:ln>
-            <a:solidFill>
-              <a:srgbClr val="D1DFD5"/>
-            </a:solidFill>
-          </a:ln>
-        </p:spPr>
-        <p:style>
-          <a:lnRef idx="1">
-            <a:schemeClr val="accent1"/>
-          </a:lnRef>
-          <a:fillRef idx="3">
-            <a:schemeClr val="accent1"/>
-          </a:fillRef>
-          <a:effectRef idx="2">
-            <a:schemeClr val="accent1"/>
-          </a:effectRef>
-          <a:fontRef idx="minor">
-            <a:schemeClr val="lt1"/>
-          </a:fontRef>
-        </p:style>
-        <p:txBody>
-          <a:bodyPr rtlCol="0" anchor="ctr" wrap="square" lIns="73152" rIns="73152" tIns="36576" bIns="36576"/>
-          <a:lstStyle/>
-          <a:p>
-            <a:pPr algn="l">
-              <a:spcAft>
-                <a:spcPts val="0"/>
-              </a:spcAft>
-              <a:defRPr sz="1800" b="1">
-                <a:solidFill>
-                  <a:srgbClr val="2A8B5A"/>
-                </a:solidFill>
-                <a:latin typeface="Noto Sans CJK KR"/>
-              </a:defRPr>
-            </a:pPr>
-            <a:r>
-              <a:t>완료 체크</a:t>
-            </a:r>
-            <a:br/>
-            <a:r>
-              <a:t>□ 명령이 오류 없이 실행된다.</a:t>
-            </a:r>
-            <a:br/>
-            <a:r>
-              <a:t>□ 기대한 파일·topic·frame·parameter 이름이 보인다.</a:t>
-            </a:r>
-            <a:br/>
-            <a:r>
-              <a:t>□ 값의 단위와 방향을 한 문장으로 설명할 수 있다.</a:t>
-            </a:r>
-          </a:p>
-        </p:txBody>
-      </p:sp>
-      <p:sp>
-        <p:nvSpPr>
-          <p:cNvPr id="9" name="TextBox 8"/>
+      <p:pic>
+        <p:nvPicPr>
+          <p:cNvPr id="6" name="Picture 5" descr="validation_terminal.png"/>
+          <p:cNvPicPr>
+            <a:picLocks noChangeAspect="1"/>
+          </p:cNvPicPr>
+          <p:nvPr/>
+        </p:nvPicPr>
+        <p:blipFill>
+          <a:blip r:embed="rId2"/>
+          <a:stretch>
+            <a:fillRect/>
+          </a:stretch>
+        </p:blipFill>
+        <p:spPr>
+          <a:xfrm>
+            <a:off x="2855133" y="1353312"/>
+            <a:ext cx="6478685" cy="4800600"/>
+          </a:xfrm>
+          <a:prstGeom prst="rect">
+            <a:avLst/>
+          </a:prstGeom>
+        </p:spPr>
+      </p:pic>
+      <p:sp>
+        <p:nvSpPr>
+          <p:cNvPr id="7" name="TextBox 6"/>
           <p:cNvSpPr txBox="1"/>
           <p:nvPr/>
         </p:nvSpPr>
         <p:spPr>
           <a:xfrm>
-            <a:off x="731520" y="5989320"/>
-            <a:ext cx="10789920" cy="237744"/>
+            <a:off x="777240" y="6144768"/>
+            <a:ext cx="10607040" cy="310896"/>
           </a:xfrm>
           <a:prstGeom prst="rect">
             <a:avLst/>
@@ -8441,19 +8603,19 @@
           </a:bodyPr>
           <a:lstStyle/>
           <a:p>
-            <a:pPr algn="l">
-              <a:spcAft>
-                <a:spcPts val="0"/>
-              </a:spcAft>
-              <a:defRPr sz="1500" b="1">
-                <a:solidFill>
-                  <a:srgbClr val="122C4E"/>
-                </a:solidFill>
-                <a:latin typeface="Noto Sans CJK KR"/>
-              </a:defRPr>
-            </a:pPr>
-            <a:r>
-              <a:t>완료 조건: /cmd_vel ROS→Gazebo 및 odom/scan/imu/camera/clock Gazebo→ROS 매핑을 확인한다.</a:t>
+            <a:pPr algn="ctr">
+              <a:spcAft>
+                <a:spcPts val="0"/>
+              </a:spcAft>
+              <a:defRPr sz="1100" b="1">
+                <a:solidFill>
+                  <a:srgbClr val="2A8B5A"/>
+                </a:solidFill>
+                <a:latin typeface="Noto Sans CJK KR"/>
+              </a:defRPr>
+            </a:pPr>
+            <a:r>
+              <a:t>화면에서 확인: ① 명령/설정  ② 정상 출력 또는 화면  ③ 다음 검증 명령으로 재확인</a:t>
             </a:r>
           </a:p>
         </p:txBody>
@@ -8510,7 +8672,7 @@
               </a:defRPr>
             </a:pPr>
             <a:r>
-              <a:t>막히면: 증상 → 우선 확인 → 재검증</a:t>
+              <a:t>객관적 검증 명령으로 완료를 확인한다</a:t>
             </a:r>
           </a:p>
         </p:txBody>
@@ -8549,7 +8711,7 @@
               </a:defRPr>
             </a:pPr>
             <a:r>
-              <a:t>오류 메시지를 숨기지 않고 같은 순서로 점검합니다.</a:t>
+              <a:t>화면만 보지 말고 topic·frame·파일·parameter를 다시 확인합니다.</a:t>
             </a:r>
           </a:p>
         </p:txBody>
@@ -8685,7 +8847,7 @@
               </a:defRPr>
             </a:pPr>
             <a:r>
-              <a:t>현재 단계 오류 대응    |    현재 폴더 ~/ros2_curri/agv_ws    |    현재 터미널</a:t>
+              <a:t>현재 단계 검증    |    현재 폴더 ~/ros2_curri/agv_ws    |    현재 터미널</a:t>
             </a:r>
           </a:p>
         </p:txBody>
@@ -8698,18 +8860,18 @@
         </p:nvSpPr>
         <p:spPr>
           <a:xfrm>
-            <a:off x="694944" y="1755648"/>
-            <a:ext cx="10972800" cy="1115568"/>
+            <a:off x="658368" y="1755648"/>
+            <a:ext cx="10972800" cy="2148840"/>
           </a:xfrm>
           <a:prstGeom prst="roundRect">
             <a:avLst/>
           </a:prstGeom>
           <a:solidFill>
-            <a:srgbClr val="FFF7F4"/>
+            <a:srgbClr val="1D232D"/>
           </a:solidFill>
           <a:ln>
             <a:solidFill>
-              <a:srgbClr val="EDBEB4"/>
+              <a:srgbClr val="1D232D"/>
             </a:solidFill>
           </a:ln>
         </p:spPr>
@@ -8728,115 +8890,50 @@
           </a:fontRef>
         </p:style>
         <p:txBody>
-          <a:bodyPr rtlCol="0" anchor="ctr"/>
-          <a:lstStyle/>
-          <a:p>
-            <a:pPr algn="ctr"/>
-          </a:p>
-        </p:txBody>
-      </p:sp>
-      <p:sp>
-        <p:nvSpPr>
-          <p:cNvPr id="8" name="TextBox 7"/>
-          <p:cNvSpPr txBox="1"/>
-          <p:nvPr/>
-        </p:nvSpPr>
-        <p:spPr>
-          <a:xfrm>
-            <a:off x="896112" y="1901952"/>
-            <a:ext cx="2926080" cy="274320"/>
-          </a:xfrm>
-          <a:prstGeom prst="rect">
-            <a:avLst/>
-          </a:prstGeom>
-          <a:noFill/>
-        </p:spPr>
-        <p:txBody>
-          <a:bodyPr wrap="square" lIns="73152" rIns="73152" tIns="36576" bIns="36576">
-            <a:spAutoFit/>
-          </a:bodyPr>
+          <a:bodyPr rtlCol="0" anchor="ctr" wrap="square" lIns="73152" rIns="73152" tIns="36576" bIns="36576"/>
           <a:lstStyle/>
           <a:p>
             <a:pPr algn="l">
               <a:spcAft>
                 <a:spcPts val="0"/>
               </a:spcAft>
-              <a:defRPr sz="1800" b="1">
-                <a:solidFill>
-                  <a:srgbClr val="BE3B3B"/>
-                </a:solidFill>
-                <a:latin typeface="Noto Sans CJK KR"/>
-              </a:defRPr>
-            </a:pPr>
-            <a:r>
-              <a:t>증상 1: ROS topic이 생성되지 않음</a:t>
-            </a:r>
-          </a:p>
-        </p:txBody>
-      </p:sp>
-      <p:sp>
-        <p:nvSpPr>
-          <p:cNvPr id="9" name="TextBox 8"/>
-          <p:cNvSpPr txBox="1"/>
-          <p:nvPr/>
-        </p:nvSpPr>
-        <p:spPr>
-          <a:xfrm>
-            <a:off x="3794760" y="1883664"/>
-            <a:ext cx="7543800" cy="621792"/>
-          </a:xfrm>
-          <a:prstGeom prst="rect">
-            <a:avLst/>
-          </a:prstGeom>
-          <a:noFill/>
-        </p:spPr>
-        <p:txBody>
-          <a:bodyPr wrap="square" lIns="73152" rIns="73152" tIns="36576" bIns="36576">
-            <a:spAutoFit/>
-          </a:bodyPr>
-          <a:lstStyle/>
-          <a:p>
-            <a:pPr algn="l">
-              <a:spcAft>
-                <a:spcPts val="0"/>
-              </a:spcAft>
               <a:defRPr sz="1600" b="0">
                 <a:solidFill>
-                  <a:srgbClr val="122C4E"/>
-                </a:solidFill>
-                <a:latin typeface="Noto Sans CJK KR"/>
-              </a:defRPr>
-            </a:pPr>
-            <a:r>
-              <a:t>우선 확인: bridge 프로세스·topic 이름·message type을 확인한다.</a:t>
+                  <a:srgbClr val="FFFFFF"/>
+                </a:solidFill>
+                <a:latin typeface="DejaVu Sans Mono"/>
+              </a:defRPr>
+            </a:pPr>
+            <a:r>
+              <a:t>ros2 topic list | rg '/cmd_vel|/odom|/scan|/imu|/camera|/clock'</a:t>
             </a:r>
             <a:br/>
             <a:r>
-              <a:t>수정 후: ros2 topic list | rg '/cmd_vel|/odom|/scan|/imu|/camera|/clock'</a:t>
-            </a:r>
-          </a:p>
-        </p:txBody>
-      </p:sp>
-      <p:sp>
-        <p:nvSpPr>
-          <p:cNvPr id="10" name="Rounded Rectangle 9"/>
+              <a:t>ros2 topic info /scan</a:t>
+            </a:r>
+          </a:p>
+        </p:txBody>
+      </p:sp>
+      <p:sp>
+        <p:nvSpPr>
+          <p:cNvPr id="8" name="Rounded Rectangle 7"/>
           <p:cNvSpPr/>
           <p:nvPr/>
         </p:nvSpPr>
         <p:spPr>
           <a:xfrm>
-            <a:off x="694944" y="3172968"/>
-            <a:ext cx="10972800" cy="1115568"/>
+            <a:off x="658368" y="4206240"/>
+            <a:ext cx="10972800" cy="1554480"/>
           </a:xfrm>
           <a:prstGeom prst="roundRect">
             <a:avLst/>
           </a:prstGeom>
           <a:solidFill>
-            <a:srgbClr val="FFF7F4"/>
+            <a:srgbClr val="F4F7FB"/>
           </a:solidFill>
           <a:ln>
             <a:solidFill>
-              <a:srgbClr val="EDBEB4"/>
+              <a:srgbClr val="D1DFD5"/>
             </a:solidFill>
           </a:ln>
         </p:spPr>
@@ -8855,23 +8952,48 @@
           </a:fontRef>
         </p:style>
         <p:txBody>
-          <a:bodyPr rtlCol="0" anchor="ctr"/>
-          <a:lstStyle/>
-          <a:p>
-            <a:pPr algn="ctr"/>
-          </a:p>
-        </p:txBody>
-      </p:sp>
-      <p:sp>
-        <p:nvSpPr>
-          <p:cNvPr id="11" name="TextBox 10"/>
+          <a:bodyPr rtlCol="0" anchor="ctr" wrap="square" lIns="73152" rIns="73152" tIns="36576" bIns="36576"/>
+          <a:lstStyle/>
+          <a:p>
+            <a:pPr algn="l">
+              <a:spcAft>
+                <a:spcPts val="0"/>
+              </a:spcAft>
+              <a:defRPr sz="1800" b="1">
+                <a:solidFill>
+                  <a:srgbClr val="2A8B5A"/>
+                </a:solidFill>
+                <a:latin typeface="Noto Sans CJK KR"/>
+              </a:defRPr>
+            </a:pPr>
+            <a:r>
+              <a:t>완료 체크</a:t>
+            </a:r>
+            <a:br/>
+            <a:r>
+              <a:t>□ 명령이 오류 없이 실행된다.</a:t>
+            </a:r>
+            <a:br/>
+            <a:r>
+              <a:t>□ 기대한 파일·topic·frame·parameter 이름이 보인다.</a:t>
+            </a:r>
+            <a:br/>
+            <a:r>
+              <a:t>□ 값의 단위와 방향을 한 문장으로 설명할 수 있다.</a:t>
+            </a:r>
+          </a:p>
+        </p:txBody>
+      </p:sp>
+      <p:sp>
+        <p:nvSpPr>
+          <p:cNvPr id="9" name="TextBox 8"/>
           <p:cNvSpPr txBox="1"/>
           <p:nvPr/>
         </p:nvSpPr>
         <p:spPr>
           <a:xfrm>
-            <a:off x="896112" y="3319272"/>
-            <a:ext cx="2926080" cy="274320"/>
+            <a:off x="731520" y="5989320"/>
+            <a:ext cx="10789920" cy="237744"/>
           </a:xfrm>
           <a:prstGeom prst="rect">
             <a:avLst/>
@@ -8888,46 +9010,7 @@
               <a:spcAft>
                 <a:spcPts val="0"/>
               </a:spcAft>
-              <a:defRPr sz="1800" b="1">
-                <a:solidFill>
-                  <a:srgbClr val="BE3B3B"/>
-                </a:solidFill>
-                <a:latin typeface="Noto Sans CJK KR"/>
-              </a:defRPr>
-            </a:pPr>
-            <a:r>
-              <a:t>증상 2: 한 방향으로만 전달됨</a:t>
-            </a:r>
-          </a:p>
-        </p:txBody>
-      </p:sp>
-      <p:sp>
-        <p:nvSpPr>
-          <p:cNvPr id="12" name="TextBox 11"/>
-          <p:cNvSpPr txBox="1"/>
-          <p:nvPr/>
-        </p:nvSpPr>
-        <p:spPr>
-          <a:xfrm>
-            <a:off x="3794760" y="3300984"/>
-            <a:ext cx="7543800" cy="621792"/>
-          </a:xfrm>
-          <a:prstGeom prst="rect">
-            <a:avLst/>
-          </a:prstGeom>
-          <a:noFill/>
-        </p:spPr>
-        <p:txBody>
-          <a:bodyPr wrap="square" lIns="73152" rIns="73152" tIns="36576" bIns="36576">
-            <a:spAutoFit/>
-          </a:bodyPr>
-          <a:lstStyle/>
-          <a:p>
-            <a:pPr algn="l">
-              <a:spcAft>
-                <a:spcPts val="0"/>
-              </a:spcAft>
-              <a:defRPr sz="1600" b="0">
+              <a:defRPr sz="1500" b="1">
                 <a:solidFill>
                   <a:srgbClr val="122C4E"/>
                 </a:solidFill>
@@ -8935,50 +9018,7 @@
               </a:defRPr>
             </a:pPr>
             <a:r>
-              <a:t>우선 확인: direction ROS_TO_GZ/GZ_TO_ROS 설정을 확인한다.</a:t>
-            </a:r>
-            <a:br/>
-            <a:r>
-              <a:t>수정 후: ros2 topic list | rg '/cmd_vel|/odom|/scan|/imu|/camera|/clock'</a:t>
-            </a:r>
-          </a:p>
-        </p:txBody>
-      </p:sp>
-      <p:sp>
-        <p:nvSpPr>
-          <p:cNvPr id="13" name="TextBox 12"/>
-          <p:cNvSpPr txBox="1"/>
-          <p:nvPr/>
-        </p:nvSpPr>
-        <p:spPr>
-          <a:xfrm>
-            <a:off x="822960" y="5102352"/>
-            <a:ext cx="10607040" cy="402336"/>
-          </a:xfrm>
-          <a:prstGeom prst="rect">
-            <a:avLst/>
-          </a:prstGeom>
-          <a:noFill/>
-        </p:spPr>
-        <p:txBody>
-          <a:bodyPr wrap="square" lIns="73152" rIns="73152" tIns="36576" bIns="36576">
-            <a:spAutoFit/>
-          </a:bodyPr>
-          <a:lstStyle/>
-          <a:p>
-            <a:pPr algn="ctr">
-              <a:spcAft>
-                <a:spcPts val="0"/>
-              </a:spcAft>
-              <a:defRPr sz="1800" b="1">
-                <a:solidFill>
-                  <a:srgbClr val="DB7E22"/>
-                </a:solidFill>
-                <a:latin typeface="Noto Sans CJK KR"/>
-              </a:defRPr>
-            </a:pPr>
-            <a:r>
-              <a:t>공통 순서: ① 현재 폴더 ② source ③ 파일 경로 ④ 이름/타입/단위 ⑤ build·source 후 재실행</a:t>
+              <a:t>완료 조건: /cmd_vel ROS→Gazebo 및 odom/scan/imu/camera/clock Gazebo→ROS 매핑을 확인한다.</a:t>
             </a:r>
           </a:p>
         </p:txBody>
@@ -9035,7 +9075,7 @@
               </a:defRPr>
             </a:pPr>
             <a:r>
-              <a:t>미니 실습: 값 하나를 바꾸고 결과를 비교한다</a:t>
+              <a:t>막히면: 증상 → 우선 확인 → 재검증</a:t>
             </a:r>
           </a:p>
         </p:txBody>
@@ -9074,7 +9114,7 @@
               </a:defRPr>
             </a:pPr>
             <a:r>
-              <a:t>정상 결과를 만든 뒤에는 한 번에 하나의 값만 바꿉니다.</a:t>
+              <a:t>오류 메시지를 숨기지 않고 같은 순서로 점검합니다.</a:t>
             </a:r>
           </a:p>
         </p:txBody>
@@ -9210,7 +9250,7 @@
               </a:defRPr>
             </a:pPr>
             <a:r>
-              <a:t>현재 단계 미니 실습    |    현재 폴더 ~/ros2_curri/agv_ws    |    현재 터미널</a:t>
+              <a:t>현재 단계 오류 대응    |    현재 폴더 ~/ros2_curri/agv_ws    |    현재 터미널</a:t>
             </a:r>
           </a:p>
         </p:txBody>
@@ -9223,18 +9263,18 @@
         </p:nvSpPr>
         <p:spPr>
           <a:xfrm>
-            <a:off x="749808" y="1874519"/>
-            <a:ext cx="10652760" cy="1993392"/>
+            <a:off x="694944" y="1755648"/>
+            <a:ext cx="10972800" cy="1115568"/>
           </a:xfrm>
           <a:prstGeom prst="roundRect">
             <a:avLst/>
           </a:prstGeom>
           <a:solidFill>
-            <a:srgbClr val="FFF8EB"/>
+            <a:srgbClr val="FFF7F4"/>
           </a:solidFill>
           <a:ln>
             <a:solidFill>
-              <a:srgbClr val="ECC680"/>
+              <a:srgbClr val="EDBEB4"/>
             </a:solidFill>
           </a:ln>
         </p:spPr>
@@ -9253,23 +9293,10 @@
           </a:fontRef>
         </p:style>
         <p:txBody>
-          <a:bodyPr rtlCol="0" anchor="ctr" wrap="square" lIns="73152" rIns="73152" tIns="36576" bIns="36576"/>
-          <a:lstStyle/>
-          <a:p>
-            <a:pPr algn="ctr">
-              <a:spcAft>
-                <a:spcPts val="0"/>
-              </a:spcAft>
-              <a:defRPr sz="2300" b="1">
-                <a:solidFill>
-                  <a:srgbClr val="122C4E"/>
-                </a:solidFill>
-                <a:latin typeface="Noto Sans CJK KR"/>
-              </a:defRPr>
-            </a:pPr>
-            <a:r>
-              <a:t>bridge.yaml에서 /scan 항목의 ros_type_name을 읽고 `ros2 interface show sensor_msgs/msg/LaserScan`으로 필드를 확인한다.</a:t>
-            </a:r>
+          <a:bodyPr rtlCol="0" anchor="ctr"/>
+          <a:lstStyle/>
+          <a:p>
+            <a:pPr algn="ctr"/>
           </a:p>
         </p:txBody>
       </p:sp>
@@ -9281,8 +9308,8 @@
         </p:nvSpPr>
         <p:spPr>
           <a:xfrm>
-            <a:off x="877824" y="4590288"/>
-            <a:ext cx="10241280" cy="594360"/>
+            <a:off x="896112" y="1901952"/>
+            <a:ext cx="2926080" cy="274320"/>
           </a:xfrm>
           <a:prstGeom prst="rect">
             <a:avLst/>
@@ -9295,11 +9322,220 @@
           </a:bodyPr>
           <a:lstStyle/>
           <a:p>
+            <a:pPr algn="l">
+              <a:spcAft>
+                <a:spcPts val="0"/>
+              </a:spcAft>
+              <a:defRPr sz="1800" b="1">
+                <a:solidFill>
+                  <a:srgbClr val="BE3B3B"/>
+                </a:solidFill>
+                <a:latin typeface="Noto Sans CJK KR"/>
+              </a:defRPr>
+            </a:pPr>
+            <a:r>
+              <a:t>증상 1: ROS topic이 생성되지 않음</a:t>
+            </a:r>
+          </a:p>
+        </p:txBody>
+      </p:sp>
+      <p:sp>
+        <p:nvSpPr>
+          <p:cNvPr id="9" name="TextBox 8"/>
+          <p:cNvSpPr txBox="1"/>
+          <p:nvPr/>
+        </p:nvSpPr>
+        <p:spPr>
+          <a:xfrm>
+            <a:off x="3794760" y="1883664"/>
+            <a:ext cx="7543800" cy="621792"/>
+          </a:xfrm>
+          <a:prstGeom prst="rect">
+            <a:avLst/>
+          </a:prstGeom>
+          <a:noFill/>
+        </p:spPr>
+        <p:txBody>
+          <a:bodyPr wrap="square" lIns="73152" rIns="73152" tIns="36576" bIns="36576">
+            <a:spAutoFit/>
+          </a:bodyPr>
+          <a:lstStyle/>
+          <a:p>
+            <a:pPr algn="l">
+              <a:spcAft>
+                <a:spcPts val="0"/>
+              </a:spcAft>
+              <a:defRPr sz="1600" b="0">
+                <a:solidFill>
+                  <a:srgbClr val="122C4E"/>
+                </a:solidFill>
+                <a:latin typeface="Noto Sans CJK KR"/>
+              </a:defRPr>
+            </a:pPr>
+            <a:r>
+              <a:t>우선 확인: bridge 프로세스·topic 이름·message type을 확인한다.</a:t>
+            </a:r>
+            <a:br/>
+            <a:r>
+              <a:t>수정 후: ros2 topic list | rg '/cmd_vel|/odom|/scan|/imu|/camera|/clock'</a:t>
+            </a:r>
+          </a:p>
+        </p:txBody>
+      </p:sp>
+      <p:sp>
+        <p:nvSpPr>
+          <p:cNvPr id="10" name="Rounded Rectangle 9"/>
+          <p:cNvSpPr/>
+          <p:nvPr/>
+        </p:nvSpPr>
+        <p:spPr>
+          <a:xfrm>
+            <a:off x="694944" y="3172968"/>
+            <a:ext cx="10972800" cy="1115568"/>
+          </a:xfrm>
+          <a:prstGeom prst="roundRect">
+            <a:avLst/>
+          </a:prstGeom>
+          <a:solidFill>
+            <a:srgbClr val="FFF7F4"/>
+          </a:solidFill>
+          <a:ln>
+            <a:solidFill>
+              <a:srgbClr val="EDBEB4"/>
+            </a:solidFill>
+          </a:ln>
+        </p:spPr>
+        <p:style>
+          <a:lnRef idx="1">
+            <a:schemeClr val="accent1"/>
+          </a:lnRef>
+          <a:fillRef idx="3">
+            <a:schemeClr val="accent1"/>
+          </a:fillRef>
+          <a:effectRef idx="2">
+            <a:schemeClr val="accent1"/>
+          </a:effectRef>
+          <a:fontRef idx="minor">
+            <a:schemeClr val="lt1"/>
+          </a:fontRef>
+        </p:style>
+        <p:txBody>
+          <a:bodyPr rtlCol="0" anchor="ctr"/>
+          <a:lstStyle/>
+          <a:p>
+            <a:pPr algn="ctr"/>
+          </a:p>
+        </p:txBody>
+      </p:sp>
+      <p:sp>
+        <p:nvSpPr>
+          <p:cNvPr id="11" name="TextBox 10"/>
+          <p:cNvSpPr txBox="1"/>
+          <p:nvPr/>
+        </p:nvSpPr>
+        <p:spPr>
+          <a:xfrm>
+            <a:off x="896112" y="3319272"/>
+            <a:ext cx="2926080" cy="274320"/>
+          </a:xfrm>
+          <a:prstGeom prst="rect">
+            <a:avLst/>
+          </a:prstGeom>
+          <a:noFill/>
+        </p:spPr>
+        <p:txBody>
+          <a:bodyPr wrap="square" lIns="73152" rIns="73152" tIns="36576" bIns="36576">
+            <a:spAutoFit/>
+          </a:bodyPr>
+          <a:lstStyle/>
+          <a:p>
+            <a:pPr algn="l">
+              <a:spcAft>
+                <a:spcPts val="0"/>
+              </a:spcAft>
+              <a:defRPr sz="1800" b="1">
+                <a:solidFill>
+                  <a:srgbClr val="BE3B3B"/>
+                </a:solidFill>
+                <a:latin typeface="Noto Sans CJK KR"/>
+              </a:defRPr>
+            </a:pPr>
+            <a:r>
+              <a:t>증상 2: 한 방향으로만 전달됨</a:t>
+            </a:r>
+          </a:p>
+        </p:txBody>
+      </p:sp>
+      <p:sp>
+        <p:nvSpPr>
+          <p:cNvPr id="12" name="TextBox 11"/>
+          <p:cNvSpPr txBox="1"/>
+          <p:nvPr/>
+        </p:nvSpPr>
+        <p:spPr>
+          <a:xfrm>
+            <a:off x="3794760" y="3300984"/>
+            <a:ext cx="7543800" cy="621792"/>
+          </a:xfrm>
+          <a:prstGeom prst="rect">
+            <a:avLst/>
+          </a:prstGeom>
+          <a:noFill/>
+        </p:spPr>
+        <p:txBody>
+          <a:bodyPr wrap="square" lIns="73152" rIns="73152" tIns="36576" bIns="36576">
+            <a:spAutoFit/>
+          </a:bodyPr>
+          <a:lstStyle/>
+          <a:p>
+            <a:pPr algn="l">
+              <a:spcAft>
+                <a:spcPts val="0"/>
+              </a:spcAft>
+              <a:defRPr sz="1600" b="0">
+                <a:solidFill>
+                  <a:srgbClr val="122C4E"/>
+                </a:solidFill>
+                <a:latin typeface="Noto Sans CJK KR"/>
+              </a:defRPr>
+            </a:pPr>
+            <a:r>
+              <a:t>우선 확인: direction ROS_TO_GZ/GZ_TO_ROS 설정을 확인한다.</a:t>
+            </a:r>
+            <a:br/>
+            <a:r>
+              <a:t>수정 후: ros2 topic list | rg '/cmd_vel|/odom|/scan|/imu|/camera|/clock'</a:t>
+            </a:r>
+          </a:p>
+        </p:txBody>
+      </p:sp>
+      <p:sp>
+        <p:nvSpPr>
+          <p:cNvPr id="13" name="TextBox 12"/>
+          <p:cNvSpPr txBox="1"/>
+          <p:nvPr/>
+        </p:nvSpPr>
+        <p:spPr>
+          <a:xfrm>
+            <a:off x="822960" y="5102352"/>
+            <a:ext cx="10607040" cy="402336"/>
+          </a:xfrm>
+          <a:prstGeom prst="rect">
+            <a:avLst/>
+          </a:prstGeom>
+          <a:noFill/>
+        </p:spPr>
+        <p:txBody>
+          <a:bodyPr wrap="square" lIns="73152" rIns="73152" tIns="36576" bIns="36576">
+            <a:spAutoFit/>
+          </a:bodyPr>
+          <a:lstStyle/>
+          <a:p>
             <a:pPr algn="ctr">
               <a:spcAft>
                 <a:spcPts val="0"/>
               </a:spcAft>
-              <a:defRPr sz="1900" b="1">
+              <a:defRPr sz="1800" b="1">
                 <a:solidFill>
                   <a:srgbClr val="DB7E22"/>
                 </a:solidFill>
@@ -9307,7 +9543,7 @@
               </a:defRPr>
             </a:pPr>
             <a:r>
-              <a:t>기록할 것: 바꾼 값(단위) · 기대한 변화 · 실제 출력/화면 · 원래 값으로 되돌린 결과</a:t>
+              <a:t>공통 순서: ① 현재 폴더 ② source ③ 파일 경로 ④ 이름/타입/단위 ⑤ build·source 후 재실행</a:t>
             </a:r>
           </a:p>
         </p:txBody>
@@ -9364,7 +9600,7 @@
               </a:defRPr>
             </a:pPr>
             <a:r>
-              <a:t>체크포인트를 저장하고 다음 모듈로 넘긴다</a:t>
+              <a:t>미니 실습: 값 하나를 바꾸고 결과를 비교한다</a:t>
             </a:r>
           </a:p>
         </p:txBody>
@@ -9403,7 +9639,7 @@
               </a:defRPr>
             </a:pPr>
             <a:r>
-              <a:t>현재 Complete는 다음 Starter의 기준선입니다.</a:t>
+              <a:t>정상 결과를 만든 뒤에는 한 번에 하나의 값만 바꿉니다.</a:t>
             </a:r>
           </a:p>
         </p:txBody>
@@ -9539,7 +9775,7 @@
               </a:defRPr>
             </a:pPr>
             <a:r>
-              <a:t>현재 단계 체크포인트    |    현재 폴더 ~/ros2_curri/agv_ws    |    현재 터미널</a:t>
+              <a:t>현재 단계 미니 실습    |    현재 폴더 ~/ros2_curri/agv_ws    |    현재 터미널</a:t>
             </a:r>
           </a:p>
         </p:txBody>
@@ -9552,18 +9788,18 @@
         </p:nvSpPr>
         <p:spPr>
           <a:xfrm>
-            <a:off x="685800" y="1737360"/>
-            <a:ext cx="10972800" cy="3611880"/>
+            <a:off x="749808" y="1874519"/>
+            <a:ext cx="10652760" cy="1993392"/>
           </a:xfrm>
           <a:prstGeom prst="roundRect">
             <a:avLst/>
           </a:prstGeom>
           <a:solidFill>
-            <a:srgbClr val="F4F7FB"/>
+            <a:srgbClr val="FFF8EB"/>
           </a:solidFill>
           <a:ln>
             <a:solidFill>
-              <a:srgbClr val="D2DCE8"/>
+              <a:srgbClr val="ECC680"/>
             </a:solidFill>
           </a:ln>
         </p:spPr>
@@ -9582,10 +9818,23 @@
           </a:fontRef>
         </p:style>
         <p:txBody>
-          <a:bodyPr rtlCol="0" anchor="ctr"/>
-          <a:lstStyle/>
-          <a:p>
-            <a:pPr algn="ctr"/>
+          <a:bodyPr rtlCol="0" anchor="ctr" wrap="square" lIns="73152" rIns="73152" tIns="36576" bIns="36576"/>
+          <a:lstStyle/>
+          <a:p>
+            <a:pPr algn="ctr">
+              <a:spcAft>
+                <a:spcPts val="0"/>
+              </a:spcAft>
+              <a:defRPr sz="2300" b="1">
+                <a:solidFill>
+                  <a:srgbClr val="122C4E"/>
+                </a:solidFill>
+                <a:latin typeface="Noto Sans CJK KR"/>
+              </a:defRPr>
+            </a:pPr>
+            <a:r>
+              <a:t>bridge.yaml에서 /scan 항목의 ros_type_name을 읽고 `ros2 interface show sensor_msgs/msg/LaserScan`으로 필드를 확인한다.</a:t>
+            </a:r>
           </a:p>
         </p:txBody>
       </p:sp>
@@ -9597,111 +9846,8 @@
         </p:nvSpPr>
         <p:spPr>
           <a:xfrm>
-            <a:off x="896112" y="1993392"/>
-            <a:ext cx="10332720" cy="2971800"/>
-          </a:xfrm>
-          <a:prstGeom prst="rect">
-            <a:avLst/>
-          </a:prstGeom>
-          <a:noFill/>
-        </p:spPr>
-        <p:txBody>
-          <a:bodyPr wrap="square" lIns="109728" rIns="109728">
-            <a:spAutoFit/>
-          </a:bodyPr>
-          <a:lstStyle/>
-          <a:p>
-            <a:pPr>
-              <a:spcAft>
-                <a:spcPts val="800"/>
-              </a:spcAft>
-              <a:defRPr sz="1800">
-                <a:solidFill>
-                  <a:srgbClr val="122C4E"/>
-                </a:solidFill>
-                <a:latin typeface="Noto Sans CJK KR"/>
-              </a:defRPr>
-            </a:pPr>
-            <a:r>
-              <a:t>• □ 완료 화면: /cmd_vel ROS→Gazebo 및 odom/scan/imu/camera/clock Gazebo→ROS 매핑을 확인한다.</a:t>
-            </a:r>
-          </a:p>
-          <a:p>
-            <a:pPr>
-              <a:spcAft>
-                <a:spcPts val="800"/>
-              </a:spcAft>
-              <a:defRPr sz="1800">
-                <a:solidFill>
-                  <a:srgbClr val="122C4E"/>
-                </a:solidFill>
-                <a:latin typeface="Noto Sans CJK KR"/>
-              </a:defRPr>
-            </a:pPr>
-            <a:r>
-              <a:t>• □ Complete 파일: blocks/C_drive_visualization/M10_ros_gz_bridge/complete/</a:t>
-            </a:r>
-          </a:p>
-          <a:p>
-            <a:pPr>
-              <a:spcAft>
-                <a:spcPts val="800"/>
-              </a:spcAft>
-              <a:defRPr sz="1800">
-                <a:solidFill>
-                  <a:srgbClr val="122C4E"/>
-                </a:solidFill>
-                <a:latin typeface="Noto Sans CJK KR"/>
-              </a:defRPr>
-            </a:pPr>
-            <a:r>
-              <a:t>• □ 정상 로그·캡처: logs/validation.log, screenshots/validation_terminal.png</a:t>
-            </a:r>
-          </a:p>
-          <a:p>
-            <a:pPr>
-              <a:spcAft>
-                <a:spcPts val="800"/>
-              </a:spcAft>
-              <a:defRPr sz="1800">
-                <a:solidFill>
-                  <a:srgbClr val="122C4E"/>
-                </a:solidFill>
-                <a:latin typeface="Noto Sans CJK KR"/>
-              </a:defRPr>
-            </a:pPr>
-            <a:r>
-              <a:t>• □ 버전 식별: CHECKSUM_or_TAG.txt의 SHA-256 manifest</a:t>
-            </a:r>
-          </a:p>
-          <a:p>
-            <a:pPr>
-              <a:spcAft>
-                <a:spcPts val="800"/>
-              </a:spcAft>
-              <a:defRPr sz="1800">
-                <a:solidFill>
-                  <a:srgbClr val="122C4E"/>
-                </a:solidFill>
-                <a:latin typeface="Noto Sans CJK KR"/>
-              </a:defRPr>
-            </a:pPr>
-            <a:r>
-              <a:t>• □ 다음 시작 조건: M11 RViz2</a:t>
-            </a:r>
-          </a:p>
-        </p:txBody>
-      </p:sp>
-      <p:sp>
-        <p:nvSpPr>
-          <p:cNvPr id="9" name="TextBox 8"/>
-          <p:cNvSpPr txBox="1"/>
-          <p:nvPr/>
-        </p:nvSpPr>
-        <p:spPr>
-          <a:xfrm>
-            <a:off x="868680" y="5596128"/>
-            <a:ext cx="10515600" cy="338328"/>
+            <a:off x="877824" y="4590288"/>
+            <a:ext cx="10241280" cy="594360"/>
           </a:xfrm>
           <a:prstGeom prst="rect">
             <a:avLst/>
@@ -9718,15 +9864,15 @@
               <a:spcAft>
                 <a:spcPts val="0"/>
               </a:spcAft>
-              <a:defRPr sz="1700" b="1">
-                <a:solidFill>
-                  <a:srgbClr val="2A8B5A"/>
-                </a:solidFill>
-                <a:latin typeface="Noto Sans CJK KR"/>
-              </a:defRPr>
-            </a:pPr>
-            <a:r>
-              <a:t>다음 모듈을 시작하기 전, 이 슬라이드의 Complete와 다음 모듈의 Starter를 비교합니다.</a:t>
+              <a:defRPr sz="1900" b="1">
+                <a:solidFill>
+                  <a:srgbClr val="DB7E22"/>
+                </a:solidFill>
+                <a:latin typeface="Noto Sans CJK KR"/>
+              </a:defRPr>
+            </a:pPr>
+            <a:r>
+              <a:t>기록할 것: 바꾼 값(단위) · 기대한 변화 · 실제 출력/화면 · 원래 값으로 되돌린 결과</a:t>
             </a:r>
           </a:p>
         </p:txBody>
@@ -10244,6 +10390,425 @@
               </a:defRPr>
             </a:pPr>
             <a:r>
+              <a:t>체크포인트를 저장하고 다음 모듈로 넘긴다</a:t>
+            </a:r>
+          </a:p>
+        </p:txBody>
+      </p:sp>
+      <p:sp>
+        <p:nvSpPr>
+          <p:cNvPr id="3" name="TextBox 2"/>
+          <p:cNvSpPr txBox="1"/>
+          <p:nvPr/>
+        </p:nvSpPr>
+        <p:spPr>
+          <a:xfrm>
+            <a:off x="603504" y="859536"/>
+            <a:ext cx="10698480" cy="292608"/>
+          </a:xfrm>
+          <a:prstGeom prst="rect">
+            <a:avLst/>
+          </a:prstGeom>
+          <a:noFill/>
+        </p:spPr>
+        <p:txBody>
+          <a:bodyPr wrap="square" lIns="73152" rIns="73152" tIns="36576" bIns="36576">
+            <a:spAutoFit/>
+          </a:bodyPr>
+          <a:lstStyle/>
+          <a:p>
+            <a:pPr algn="l">
+              <a:spcAft>
+                <a:spcPts val="0"/>
+              </a:spcAft>
+              <a:defRPr sz="1700" b="0">
+                <a:solidFill>
+                  <a:srgbClr val="5C6672"/>
+                </a:solidFill>
+                <a:latin typeface="Noto Sans CJK KR"/>
+              </a:defRPr>
+            </a:pPr>
+            <a:r>
+              <a:t>현재 Complete는 다음 Starter의 기준선입니다.</a:t>
+            </a:r>
+          </a:p>
+        </p:txBody>
+      </p:sp>
+      <p:sp>
+        <p:nvSpPr>
+          <p:cNvPr id="4" name="TextBox 3"/>
+          <p:cNvSpPr txBox="1"/>
+          <p:nvPr/>
+        </p:nvSpPr>
+        <p:spPr>
+          <a:xfrm>
+            <a:off x="530352" y="6510528"/>
+            <a:ext cx="7772400" cy="201168"/>
+          </a:xfrm>
+          <a:prstGeom prst="rect">
+            <a:avLst/>
+          </a:prstGeom>
+          <a:noFill/>
+        </p:spPr>
+        <p:txBody>
+          <a:bodyPr wrap="square" lIns="73152" rIns="73152" tIns="36576" bIns="36576">
+            <a:spAutoFit/>
+          </a:bodyPr>
+          <a:lstStyle/>
+          <a:p>
+            <a:pPr algn="l">
+              <a:spcAft>
+                <a:spcPts val="0"/>
+              </a:spcAft>
+              <a:defRPr sz="1000" b="0">
+                <a:solidFill>
+                  <a:srgbClr val="5C6672"/>
+                </a:solidFill>
+                <a:latin typeface="Noto Sans CJK KR"/>
+              </a:defRPr>
+            </a:pPr>
+            <a:r>
+              <a:t>ROS 2 Jazzy · Gazebo Harmonic · M10 · 따라 하기형 AGV 실습</a:t>
+            </a:r>
+          </a:p>
+        </p:txBody>
+      </p:sp>
+      <p:sp>
+        <p:nvSpPr>
+          <p:cNvPr id="5" name="TextBox 4"/>
+          <p:cNvSpPr txBox="1"/>
+          <p:nvPr/>
+        </p:nvSpPr>
+        <p:spPr>
+          <a:xfrm>
+            <a:off x="9144000" y="6510528"/>
+            <a:ext cx="2468880" cy="201168"/>
+          </a:xfrm>
+          <a:prstGeom prst="rect">
+            <a:avLst/>
+          </a:prstGeom>
+          <a:noFill/>
+        </p:spPr>
+        <p:txBody>
+          <a:bodyPr wrap="square" lIns="73152" rIns="73152" tIns="36576" bIns="36576">
+            <a:spAutoFit/>
+          </a:bodyPr>
+          <a:lstStyle/>
+          <a:p>
+            <a:pPr algn="r">
+              <a:spcAft>
+                <a:spcPts val="0"/>
+              </a:spcAft>
+              <a:defRPr sz="1000" b="0">
+                <a:solidFill>
+                  <a:srgbClr val="5C6672"/>
+                </a:solidFill>
+                <a:latin typeface="Noto Sans CJK KR"/>
+              </a:defRPr>
+            </a:pPr>
+            <a:r>
+              <a:t>명령·파일 경로는 슬라이드에서 복사 가능</a:t>
+            </a:r>
+          </a:p>
+        </p:txBody>
+      </p:sp>
+      <p:sp>
+        <p:nvSpPr>
+          <p:cNvPr id="6" name="Rectangle 5"/>
+          <p:cNvSpPr/>
+          <p:nvPr/>
+        </p:nvSpPr>
+        <p:spPr>
+          <a:xfrm>
+            <a:off x="566928" y="1188720"/>
+            <a:ext cx="11064240" cy="347472"/>
+          </a:xfrm>
+          <a:prstGeom prst="rect">
+            <a:avLst/>
+          </a:prstGeom>
+          <a:solidFill>
+            <a:srgbClr val="F4F7FB"/>
+          </a:solidFill>
+          <a:ln>
+            <a:solidFill>
+              <a:srgbClr val="F4F7FB"/>
+            </a:solidFill>
+          </a:ln>
+        </p:spPr>
+        <p:style>
+          <a:lnRef idx="1">
+            <a:schemeClr val="accent1"/>
+          </a:lnRef>
+          <a:fillRef idx="3">
+            <a:schemeClr val="accent1"/>
+          </a:fillRef>
+          <a:effectRef idx="2">
+            <a:schemeClr val="accent1"/>
+          </a:effectRef>
+          <a:fontRef idx="minor">
+            <a:schemeClr val="lt1"/>
+          </a:fontRef>
+        </p:style>
+        <p:txBody>
+          <a:bodyPr rtlCol="0" anchor="ctr" wrap="square" lIns="73152" rIns="73152" tIns="36576" bIns="36576"/>
+          <a:lstStyle/>
+          <a:p>
+            <a:pPr algn="l">
+              <a:spcAft>
+                <a:spcPts val="0"/>
+              </a:spcAft>
+              <a:defRPr sz="1300" b="1">
+                <a:solidFill>
+                  <a:srgbClr val="122C4E"/>
+                </a:solidFill>
+                <a:latin typeface="Noto Sans CJK KR"/>
+              </a:defRPr>
+            </a:pPr>
+            <a:r>
+              <a:t>현재 단계 체크포인트    |    현재 폴더 ~/ros2_curri/agv_ws    |    현재 터미널</a:t>
+            </a:r>
+          </a:p>
+        </p:txBody>
+      </p:sp>
+      <p:sp>
+        <p:nvSpPr>
+          <p:cNvPr id="7" name="Rounded Rectangle 6"/>
+          <p:cNvSpPr/>
+          <p:nvPr/>
+        </p:nvSpPr>
+        <p:spPr>
+          <a:xfrm>
+            <a:off x="685800" y="1737360"/>
+            <a:ext cx="10972800" cy="3611880"/>
+          </a:xfrm>
+          <a:prstGeom prst="roundRect">
+            <a:avLst/>
+          </a:prstGeom>
+          <a:solidFill>
+            <a:srgbClr val="F4F7FB"/>
+          </a:solidFill>
+          <a:ln>
+            <a:solidFill>
+              <a:srgbClr val="D2DCE8"/>
+            </a:solidFill>
+          </a:ln>
+        </p:spPr>
+        <p:style>
+          <a:lnRef idx="1">
+            <a:schemeClr val="accent1"/>
+          </a:lnRef>
+          <a:fillRef idx="3">
+            <a:schemeClr val="accent1"/>
+          </a:fillRef>
+          <a:effectRef idx="2">
+            <a:schemeClr val="accent1"/>
+          </a:effectRef>
+          <a:fontRef idx="minor">
+            <a:schemeClr val="lt1"/>
+          </a:fontRef>
+        </p:style>
+        <p:txBody>
+          <a:bodyPr rtlCol="0" anchor="ctr"/>
+          <a:lstStyle/>
+          <a:p>
+            <a:pPr algn="ctr"/>
+          </a:p>
+        </p:txBody>
+      </p:sp>
+      <p:sp>
+        <p:nvSpPr>
+          <p:cNvPr id="8" name="TextBox 7"/>
+          <p:cNvSpPr txBox="1"/>
+          <p:nvPr/>
+        </p:nvSpPr>
+        <p:spPr>
+          <a:xfrm>
+            <a:off x="896112" y="1993392"/>
+            <a:ext cx="10332720" cy="2971800"/>
+          </a:xfrm>
+          <a:prstGeom prst="rect">
+            <a:avLst/>
+          </a:prstGeom>
+          <a:noFill/>
+        </p:spPr>
+        <p:txBody>
+          <a:bodyPr wrap="square" lIns="109728" rIns="109728">
+            <a:spAutoFit/>
+          </a:bodyPr>
+          <a:lstStyle/>
+          <a:p>
+            <a:pPr>
+              <a:spcAft>
+                <a:spcPts val="800"/>
+              </a:spcAft>
+              <a:defRPr sz="1800">
+                <a:solidFill>
+                  <a:srgbClr val="122C4E"/>
+                </a:solidFill>
+                <a:latin typeface="Noto Sans CJK KR"/>
+              </a:defRPr>
+            </a:pPr>
+            <a:r>
+              <a:t>• □ 완료 화면: /cmd_vel ROS→Gazebo 및 odom/scan/imu/camera/clock Gazebo→ROS 매핑을 확인한다.</a:t>
+            </a:r>
+          </a:p>
+          <a:p>
+            <a:pPr>
+              <a:spcAft>
+                <a:spcPts val="800"/>
+              </a:spcAft>
+              <a:defRPr sz="1800">
+                <a:solidFill>
+                  <a:srgbClr val="122C4E"/>
+                </a:solidFill>
+                <a:latin typeface="Noto Sans CJK KR"/>
+              </a:defRPr>
+            </a:pPr>
+            <a:r>
+              <a:t>• □ Complete 파일: blocks/C_drive_visualization/M10_ros_gz_bridge/complete/</a:t>
+            </a:r>
+          </a:p>
+          <a:p>
+            <a:pPr>
+              <a:spcAft>
+                <a:spcPts val="800"/>
+              </a:spcAft>
+              <a:defRPr sz="1800">
+                <a:solidFill>
+                  <a:srgbClr val="122C4E"/>
+                </a:solidFill>
+                <a:latin typeface="Noto Sans CJK KR"/>
+              </a:defRPr>
+            </a:pPr>
+            <a:r>
+              <a:t>• □ 정상 로그·캡처: logs/validation.log, screenshots/validation_terminal.png</a:t>
+            </a:r>
+          </a:p>
+          <a:p>
+            <a:pPr>
+              <a:spcAft>
+                <a:spcPts val="800"/>
+              </a:spcAft>
+              <a:defRPr sz="1800">
+                <a:solidFill>
+                  <a:srgbClr val="122C4E"/>
+                </a:solidFill>
+                <a:latin typeface="Noto Sans CJK KR"/>
+              </a:defRPr>
+            </a:pPr>
+            <a:r>
+              <a:t>• □ 버전 식별: CHECKSUM_or_TAG.txt의 SHA-256 manifest</a:t>
+            </a:r>
+          </a:p>
+          <a:p>
+            <a:pPr>
+              <a:spcAft>
+                <a:spcPts val="800"/>
+              </a:spcAft>
+              <a:defRPr sz="1800">
+                <a:solidFill>
+                  <a:srgbClr val="122C4E"/>
+                </a:solidFill>
+                <a:latin typeface="Noto Sans CJK KR"/>
+              </a:defRPr>
+            </a:pPr>
+            <a:r>
+              <a:t>• □ 다음 시작 조건: M11 RViz2</a:t>
+            </a:r>
+          </a:p>
+        </p:txBody>
+      </p:sp>
+      <p:sp>
+        <p:nvSpPr>
+          <p:cNvPr id="9" name="TextBox 8"/>
+          <p:cNvSpPr txBox="1"/>
+          <p:nvPr/>
+        </p:nvSpPr>
+        <p:spPr>
+          <a:xfrm>
+            <a:off x="868680" y="5596128"/>
+            <a:ext cx="10515600" cy="338328"/>
+          </a:xfrm>
+          <a:prstGeom prst="rect">
+            <a:avLst/>
+          </a:prstGeom>
+          <a:noFill/>
+        </p:spPr>
+        <p:txBody>
+          <a:bodyPr wrap="square" lIns="73152" rIns="73152" tIns="36576" bIns="36576">
+            <a:spAutoFit/>
+          </a:bodyPr>
+          <a:lstStyle/>
+          <a:p>
+            <a:pPr algn="ctr">
+              <a:spcAft>
+                <a:spcPts val="0"/>
+              </a:spcAft>
+              <a:defRPr sz="1700" b="1">
+                <a:solidFill>
+                  <a:srgbClr val="2A8B5A"/>
+                </a:solidFill>
+                <a:latin typeface="Noto Sans CJK KR"/>
+              </a:defRPr>
+            </a:pPr>
+            <a:r>
+              <a:t>다음 모듈을 시작하기 전, 이 슬라이드의 Complete와 다음 모듈의 Starter를 비교합니다.</a:t>
+            </a:r>
+          </a:p>
+        </p:txBody>
+      </p:sp>
+    </p:spTree>
+  </p:cSld>
+  <p:clrMapOvr>
+    <a:masterClrMapping/>
+  </p:clrMapOvr>
+</p:sld>
+</file>
+
+<file path=ppt/slides/slide21.xml><?xml version="1.0" encoding="utf-8"?>
+<p:sld xmlns:a="http://schemas.openxmlformats.org/drawingml/2006/main" xmlns:p="http://schemas.openxmlformats.org/presentationml/2006/main" xmlns:r="http://schemas.openxmlformats.org/officeDocument/2006/relationships">
+  <p:cSld>
+    <p:spTree>
+      <p:nvGrpSpPr>
+        <p:cNvPr id="1" name=""/>
+        <p:cNvGrpSpPr/>
+        <p:nvPr/>
+      </p:nvGrpSpPr>
+      <p:grpSpPr/>
+      <p:sp>
+        <p:nvSpPr>
+          <p:cNvPr id="2" name="TextBox 1"/>
+          <p:cNvSpPr txBox="1"/>
+          <p:nvPr/>
+        </p:nvSpPr>
+        <p:spPr>
+          <a:xfrm>
+            <a:off x="566928" y="347472"/>
+            <a:ext cx="10881360" cy="438912"/>
+          </a:xfrm>
+          <a:prstGeom prst="rect">
+            <a:avLst/>
+          </a:prstGeom>
+          <a:noFill/>
+        </p:spPr>
+        <p:txBody>
+          <a:bodyPr wrap="square" lIns="73152" rIns="73152" tIns="36576" bIns="36576">
+            <a:spAutoFit/>
+          </a:bodyPr>
+          <a:lstStyle/>
+          <a:p>
+            <a:pPr algn="l">
+              <a:spcAft>
+                <a:spcPts val="0"/>
+              </a:spcAft>
+              <a:defRPr sz="3200" b="1">
+                <a:solidFill>
+                  <a:srgbClr val="122C4E"/>
+                </a:solidFill>
+                <a:latin typeface="Noto Sans CJK KR"/>
+              </a:defRPr>
+            </a:pPr>
+            <a:r>
               <a:t>공식 참고 자료</a:t>
             </a:r>
           </a:p>
@@ -12271,7 +12836,7 @@
               </a:defRPr>
             </a:pPr>
             <a:r>
-              <a:t>bridge YAML을 작성한다</a:t>
+              <a:t>코드/설정이 실제로 만드는 것 (1/1)</a:t>
             </a:r>
           </a:p>
         </p:txBody>
@@ -12310,7 +12875,7 @@
               </a:defRPr>
             </a:pPr>
             <a:r>
-              <a:t>한 장에는 한 행동만 수행합니다.</a:t>
+              <a:t>파일을 입력하기 전에 ‘무엇을 만들고 어디서 볼지’를 먼저 연결합니다.</a:t>
             </a:r>
           </a:p>
         </p:txBody>
@@ -12446,109 +13011,31 @@
               </a:defRPr>
             </a:pPr>
             <a:r>
-              <a:t>현재 단계 1/2    |    현재 폴더 ~/ros2_curri/agv_ws    |    현재 터미널</a:t>
-            </a:r>
-          </a:p>
-        </p:txBody>
-      </p:sp>
-      <p:sp>
-        <p:nvSpPr>
-          <p:cNvPr id="7" name="TextBox 6"/>
-          <p:cNvSpPr txBox="1"/>
-          <p:nvPr/>
-        </p:nvSpPr>
-        <p:spPr>
-          <a:xfrm>
-            <a:off x="676656" y="1764792"/>
-            <a:ext cx="1828800" cy="347472"/>
-          </a:xfrm>
-          <a:prstGeom prst="rect">
-            <a:avLst/>
-          </a:prstGeom>
-          <a:noFill/>
-        </p:spPr>
-        <p:txBody>
-          <a:bodyPr wrap="square" lIns="73152" rIns="73152" tIns="36576" bIns="36576">
-            <a:spAutoFit/>
-          </a:bodyPr>
-          <a:lstStyle/>
-          <a:p>
-            <a:pPr algn="l">
-              <a:spcAft>
-                <a:spcPts val="0"/>
-              </a:spcAft>
-              <a:defRPr sz="1800" b="1">
-                <a:solidFill>
-                  <a:srgbClr val="225B9B"/>
-                </a:solidFill>
-                <a:latin typeface="Noto Sans CJK KR"/>
-              </a:defRPr>
-            </a:pPr>
-            <a:r>
-              <a:t>왜 하는가</a:t>
-            </a:r>
-          </a:p>
-        </p:txBody>
-      </p:sp>
-      <p:sp>
-        <p:nvSpPr>
-          <p:cNvPr id="8" name="TextBox 7"/>
-          <p:cNvSpPr txBox="1"/>
-          <p:nvPr/>
-        </p:nvSpPr>
-        <p:spPr>
-          <a:xfrm>
-            <a:off x="676656" y="2103120"/>
-            <a:ext cx="10789920" cy="512064"/>
-          </a:xfrm>
-          <a:prstGeom prst="rect">
-            <a:avLst/>
-          </a:prstGeom>
-          <a:noFill/>
-        </p:spPr>
-        <p:txBody>
-          <a:bodyPr wrap="square" lIns="73152" rIns="73152" tIns="36576" bIns="36576">
-            <a:spAutoFit/>
-          </a:bodyPr>
-          <a:lstStyle/>
-          <a:p>
-            <a:pPr algn="l">
-              <a:spcAft>
-                <a:spcPts val="0"/>
-              </a:spcAft>
-              <a:defRPr sz="2000" b="0">
-                <a:solidFill>
-                  <a:srgbClr val="122C4E"/>
-                </a:solidFill>
-                <a:latin typeface="Noto Sans CJK KR"/>
-              </a:defRPr>
-            </a:pPr>
-            <a:r>
-              <a:t>방향과 양쪽 message type을 한 topic마다 정확히 적는다.</a:t>
-            </a:r>
-          </a:p>
-        </p:txBody>
-      </p:sp>
-      <p:sp>
-        <p:nvSpPr>
-          <p:cNvPr id="9" name="Rounded Rectangle 8"/>
+              <a:t>현재 단계 파일 역할    |    현재 폴더 ~/ros2_curri/agv_ws    |    현재 터미널</a:t>
+            </a:r>
+          </a:p>
+        </p:txBody>
+      </p:sp>
+      <p:sp>
+        <p:nvSpPr>
+          <p:cNvPr id="7" name="Rounded Rectangle 6"/>
           <p:cNvSpPr/>
           <p:nvPr/>
         </p:nvSpPr>
         <p:spPr>
           <a:xfrm>
-            <a:off x="676656" y="2871216"/>
-            <a:ext cx="10835640" cy="2331720"/>
+            <a:off x="640080" y="1627632"/>
+            <a:ext cx="10972800" cy="2048256"/>
           </a:xfrm>
           <a:prstGeom prst="roundRect">
             <a:avLst/>
           </a:prstGeom>
           <a:solidFill>
-            <a:srgbClr val="1D232D"/>
+            <a:srgbClr val="F4F7FB"/>
           </a:solidFill>
           <a:ln>
             <a:solidFill>
-              <a:srgbClr val="1D232D"/>
+              <a:srgbClr val="CCDBEB"/>
             </a:solidFill>
           </a:ln>
         </p:spPr>
@@ -12567,40 +13054,23 @@
           </a:fontRef>
         </p:style>
         <p:txBody>
-          <a:bodyPr rtlCol="0" anchor="ctr" wrap="square" lIns="73152" rIns="73152" tIns="36576" bIns="36576"/>
-          <a:lstStyle/>
-          <a:p>
-            <a:pPr algn="l">
-              <a:spcAft>
-                <a:spcPts val="0"/>
-              </a:spcAft>
-              <a:defRPr sz="1600" b="0">
-                <a:solidFill>
-                  <a:srgbClr val="FFFFFF"/>
-                </a:solidFill>
-                <a:latin typeface="DejaVu Sans Mono"/>
-              </a:defRPr>
-            </a:pPr>
-            <a:r>
-              <a:t>cd ~/ros2_curri/agv_ws</a:t>
-            </a:r>
-            <a:br/>
-            <a:r>
-              <a:t>nano src/agv_gazebo/config/bridge.yaml</a:t>
-            </a:r>
-          </a:p>
-        </p:txBody>
-      </p:sp>
-      <p:sp>
-        <p:nvSpPr>
-          <p:cNvPr id="10" name="TextBox 9"/>
+          <a:bodyPr rtlCol="0" anchor="ctr"/>
+          <a:lstStyle/>
+          <a:p>
+            <a:pPr algn="ctr"/>
+          </a:p>
+        </p:txBody>
+      </p:sp>
+      <p:sp>
+        <p:nvSpPr>
+          <p:cNvPr id="8" name="TextBox 7"/>
           <p:cNvSpPr txBox="1"/>
           <p:nvPr/>
         </p:nvSpPr>
         <p:spPr>
           <a:xfrm>
-            <a:off x="768096" y="5468112"/>
-            <a:ext cx="1143000" cy="256032"/>
+            <a:off x="850392" y="1764792"/>
+            <a:ext cx="10424160" cy="256032"/>
           </a:xfrm>
           <a:prstGeom prst="rect">
             <a:avLst/>
@@ -12617,29 +13087,29 @@
               <a:spcAft>
                 <a:spcPts val="0"/>
               </a:spcAft>
-              <a:defRPr sz="1800" b="1">
-                <a:solidFill>
-                  <a:srgbClr val="2A8B5A"/>
-                </a:solidFill>
-                <a:latin typeface="Noto Sans CJK KR"/>
-              </a:defRPr>
-            </a:pPr>
-            <a:r>
-              <a:t>확인</a:t>
-            </a:r>
-          </a:p>
-        </p:txBody>
-      </p:sp>
-      <p:sp>
-        <p:nvSpPr>
-          <p:cNvPr id="11" name="TextBox 10"/>
+              <a:defRPr sz="1300" b="1">
+                <a:solidFill>
+                  <a:srgbClr val="225B9B"/>
+                </a:solidFill>
+                <a:latin typeface="DejaVu Sans Mono"/>
+              </a:defRPr>
+            </a:pPr>
+            <a:r>
+              <a:t>~/ros2_curri/agv_ws/src/agv_gazebo/config/bridge.yaml</a:t>
+            </a:r>
+          </a:p>
+        </p:txBody>
+      </p:sp>
+      <p:sp>
+        <p:nvSpPr>
+          <p:cNvPr id="9" name="TextBox 8"/>
           <p:cNvSpPr txBox="1"/>
           <p:nvPr/>
         </p:nvSpPr>
         <p:spPr>
           <a:xfrm>
-            <a:off x="768096" y="5742432"/>
-            <a:ext cx="10561320" cy="347472"/>
+            <a:off x="868680" y="2130552"/>
+            <a:ext cx="1234440" cy="228600"/>
           </a:xfrm>
           <a:prstGeom prst="rect">
             <a:avLst/>
@@ -12656,7 +13126,46 @@
               <a:spcAft>
                 <a:spcPts val="0"/>
               </a:spcAft>
-              <a:defRPr sz="1800" b="0">
+              <a:defRPr sz="1500" b="1">
+                <a:solidFill>
+                  <a:srgbClr val="2A8B5A"/>
+                </a:solidFill>
+                <a:latin typeface="Noto Sans CJK KR"/>
+              </a:defRPr>
+            </a:pPr>
+            <a:r>
+              <a:t>만드는 것</a:t>
+            </a:r>
+          </a:p>
+        </p:txBody>
+      </p:sp>
+      <p:sp>
+        <p:nvSpPr>
+          <p:cNvPr id="10" name="TextBox 9"/>
+          <p:cNvSpPr txBox="1"/>
+          <p:nvPr/>
+        </p:nvSpPr>
+        <p:spPr>
+          <a:xfrm>
+            <a:off x="1975104" y="2112264"/>
+            <a:ext cx="9189720" cy="274320"/>
+          </a:xfrm>
+          <a:prstGeom prst="rect">
+            <a:avLst/>
+          </a:prstGeom>
+          <a:noFill/>
+        </p:spPr>
+        <p:txBody>
+          <a:bodyPr wrap="square" lIns="73152" rIns="73152" tIns="36576" bIns="36576">
+            <a:spAutoFit/>
+          </a:bodyPr>
+          <a:lstStyle/>
+          <a:p>
+            <a:pPr algn="l">
+              <a:spcAft>
+                <a:spcPts val="0"/>
+              </a:spcAft>
+              <a:defRPr sz="1500" b="0">
                 <a:solidFill>
                   <a:srgbClr val="122C4E"/>
                 </a:solidFill>
@@ -12664,7 +13173,489 @@
               </a:defRPr>
             </a:pPr>
             <a:r>
-              <a:t>명령의 출력에서 topic·frame·파일 이름 또는 성공 메시지를 찾으면 이 단계가 완료됩니다.</a:t>
+              <a:t>Gazebo Transport 메시지와 ROS 2 topic을 방향별로 연결하는 번역표</a:t>
+            </a:r>
+          </a:p>
+        </p:txBody>
+      </p:sp>
+      <p:sp>
+        <p:nvSpPr>
+          <p:cNvPr id="11" name="TextBox 10"/>
+          <p:cNvSpPr txBox="1"/>
+          <p:nvPr/>
+        </p:nvSpPr>
+        <p:spPr>
+          <a:xfrm>
+            <a:off x="868680" y="2505456"/>
+            <a:ext cx="1234440" cy="228600"/>
+          </a:xfrm>
+          <a:prstGeom prst="rect">
+            <a:avLst/>
+          </a:prstGeom>
+          <a:noFill/>
+        </p:spPr>
+        <p:txBody>
+          <a:bodyPr wrap="square" lIns="73152" rIns="73152" tIns="36576" bIns="36576">
+            <a:spAutoFit/>
+          </a:bodyPr>
+          <a:lstStyle/>
+          <a:p>
+            <a:pPr algn="l">
+              <a:spcAft>
+                <a:spcPts val="0"/>
+              </a:spcAft>
+              <a:defRPr sz="1500" b="1">
+                <a:solidFill>
+                  <a:srgbClr val="DB7E22"/>
+                </a:solidFill>
+                <a:latin typeface="Noto Sans CJK KR"/>
+              </a:defRPr>
+            </a:pPr>
+            <a:r>
+              <a:t>코드 읽기</a:t>
+            </a:r>
+          </a:p>
+        </p:txBody>
+      </p:sp>
+      <p:sp>
+        <p:nvSpPr>
+          <p:cNvPr id="12" name="TextBox 11"/>
+          <p:cNvSpPr txBox="1"/>
+          <p:nvPr/>
+        </p:nvSpPr>
+        <p:spPr>
+          <a:xfrm>
+            <a:off x="1975104" y="2487168"/>
+            <a:ext cx="9189720" cy="301752"/>
+          </a:xfrm>
+          <a:prstGeom prst="rect">
+            <a:avLst/>
+          </a:prstGeom>
+          <a:noFill/>
+        </p:spPr>
+        <p:txBody>
+          <a:bodyPr wrap="square" lIns="73152" rIns="73152" tIns="36576" bIns="36576">
+            <a:spAutoFit/>
+          </a:bodyPr>
+          <a:lstStyle/>
+          <a:p>
+            <a:pPr algn="l">
+              <a:spcAft>
+                <a:spcPts val="0"/>
+              </a:spcAft>
+              <a:defRPr sz="1400" b="0">
+                <a:solidFill>
+                  <a:srgbClr val="122C4E"/>
+                </a:solidFill>
+                <a:latin typeface="Noto Sans CJK KR"/>
+              </a:defRPr>
+            </a:pPr>
+            <a:r>
+              <a:t>한 항목에서 ros_topic_name → type → direction을 세 줄씩 비교한다.</a:t>
+            </a:r>
+          </a:p>
+        </p:txBody>
+      </p:sp>
+      <p:sp>
+        <p:nvSpPr>
+          <p:cNvPr id="13" name="TextBox 12"/>
+          <p:cNvSpPr txBox="1"/>
+          <p:nvPr/>
+        </p:nvSpPr>
+        <p:spPr>
+          <a:xfrm>
+            <a:off x="868680" y="2889504"/>
+            <a:ext cx="1234440" cy="228600"/>
+          </a:xfrm>
+          <a:prstGeom prst="rect">
+            <a:avLst/>
+          </a:prstGeom>
+          <a:noFill/>
+        </p:spPr>
+        <p:txBody>
+          <a:bodyPr wrap="square" lIns="73152" rIns="73152" tIns="36576" bIns="36576">
+            <a:spAutoFit/>
+          </a:bodyPr>
+          <a:lstStyle/>
+          <a:p>
+            <a:pPr algn="l">
+              <a:spcAft>
+                <a:spcPts val="0"/>
+              </a:spcAft>
+              <a:defRPr sz="1500" b="1">
+                <a:solidFill>
+                  <a:srgbClr val="225B9B"/>
+                </a:solidFill>
+                <a:latin typeface="Noto Sans CJK KR"/>
+              </a:defRPr>
+            </a:pPr>
+            <a:r>
+              <a:t>사용/확인</a:t>
+            </a:r>
+          </a:p>
+        </p:txBody>
+      </p:sp>
+      <p:sp>
+        <p:nvSpPr>
+          <p:cNvPr id="14" name="TextBox 13"/>
+          <p:cNvSpPr txBox="1"/>
+          <p:nvPr/>
+        </p:nvSpPr>
+        <p:spPr>
+          <a:xfrm>
+            <a:off x="1975104" y="2871216"/>
+            <a:ext cx="9189720" cy="512064"/>
+          </a:xfrm>
+          <a:prstGeom prst="rect">
+            <a:avLst/>
+          </a:prstGeom>
+          <a:noFill/>
+        </p:spPr>
+        <p:txBody>
+          <a:bodyPr wrap="square" lIns="73152" rIns="73152" tIns="36576" bIns="36576">
+            <a:spAutoFit/>
+          </a:bodyPr>
+          <a:lstStyle/>
+          <a:p>
+            <a:pPr algn="l">
+              <a:spcAft>
+                <a:spcPts val="0"/>
+              </a:spcAft>
+              <a:defRPr sz="1300" b="0">
+                <a:solidFill>
+                  <a:srgbClr val="122C4E"/>
+                </a:solidFill>
+                <a:latin typeface="Noto Sans CJK KR"/>
+              </a:defRPr>
+            </a:pPr>
+            <a:r>
+              <a:t>사용: parameter_bridge가 이 YAML을 읽도록 launch한다.</a:t>
+            </a:r>
+            <a:br/>
+            <a:r>
+              <a:t>화면/출력: ros2 topic info에서 보이는 type과 publisher 수</a:t>
+            </a:r>
+          </a:p>
+        </p:txBody>
+      </p:sp>
+      <p:sp>
+        <p:nvSpPr>
+          <p:cNvPr id="15" name="Rounded Rectangle 14"/>
+          <p:cNvSpPr/>
+          <p:nvPr/>
+        </p:nvSpPr>
+        <p:spPr>
+          <a:xfrm>
+            <a:off x="640080" y="3941063"/>
+            <a:ext cx="10972800" cy="2048256"/>
+          </a:xfrm>
+          <a:prstGeom prst="roundRect">
+            <a:avLst/>
+          </a:prstGeom>
+          <a:solidFill>
+            <a:srgbClr val="F4F7FB"/>
+          </a:solidFill>
+          <a:ln>
+            <a:solidFill>
+              <a:srgbClr val="CCDBEB"/>
+            </a:solidFill>
+          </a:ln>
+        </p:spPr>
+        <p:style>
+          <a:lnRef idx="1">
+            <a:schemeClr val="accent1"/>
+          </a:lnRef>
+          <a:fillRef idx="3">
+            <a:schemeClr val="accent1"/>
+          </a:fillRef>
+          <a:effectRef idx="2">
+            <a:schemeClr val="accent1"/>
+          </a:effectRef>
+          <a:fontRef idx="minor">
+            <a:schemeClr val="lt1"/>
+          </a:fontRef>
+        </p:style>
+        <p:txBody>
+          <a:bodyPr rtlCol="0" anchor="ctr"/>
+          <a:lstStyle/>
+          <a:p>
+            <a:pPr algn="ctr"/>
+          </a:p>
+        </p:txBody>
+      </p:sp>
+      <p:sp>
+        <p:nvSpPr>
+          <p:cNvPr id="16" name="TextBox 15"/>
+          <p:cNvSpPr txBox="1"/>
+          <p:nvPr/>
+        </p:nvSpPr>
+        <p:spPr>
+          <a:xfrm>
+            <a:off x="850392" y="4078224"/>
+            <a:ext cx="10424160" cy="256032"/>
+          </a:xfrm>
+          <a:prstGeom prst="rect">
+            <a:avLst/>
+          </a:prstGeom>
+          <a:noFill/>
+        </p:spPr>
+        <p:txBody>
+          <a:bodyPr wrap="square" lIns="73152" rIns="73152" tIns="36576" bIns="36576">
+            <a:spAutoFit/>
+          </a:bodyPr>
+          <a:lstStyle/>
+          <a:p>
+            <a:pPr algn="l">
+              <a:spcAft>
+                <a:spcPts val="0"/>
+              </a:spcAft>
+              <a:defRPr sz="1300" b="1">
+                <a:solidFill>
+                  <a:srgbClr val="225B9B"/>
+                </a:solidFill>
+                <a:latin typeface="DejaVu Sans Mono"/>
+              </a:defRPr>
+            </a:pPr>
+            <a:r>
+              <a:t>~/ros2_curri/agv_ws/src/agv_gazebo/launch/gazebo.launch.py</a:t>
+            </a:r>
+          </a:p>
+        </p:txBody>
+      </p:sp>
+      <p:sp>
+        <p:nvSpPr>
+          <p:cNvPr id="17" name="TextBox 16"/>
+          <p:cNvSpPr txBox="1"/>
+          <p:nvPr/>
+        </p:nvSpPr>
+        <p:spPr>
+          <a:xfrm>
+            <a:off x="868680" y="4443983"/>
+            <a:ext cx="1234440" cy="228600"/>
+          </a:xfrm>
+          <a:prstGeom prst="rect">
+            <a:avLst/>
+          </a:prstGeom>
+          <a:noFill/>
+        </p:spPr>
+        <p:txBody>
+          <a:bodyPr wrap="square" lIns="73152" rIns="73152" tIns="36576" bIns="36576">
+            <a:spAutoFit/>
+          </a:bodyPr>
+          <a:lstStyle/>
+          <a:p>
+            <a:pPr algn="l">
+              <a:spcAft>
+                <a:spcPts val="0"/>
+              </a:spcAft>
+              <a:defRPr sz="1500" b="1">
+                <a:solidFill>
+                  <a:srgbClr val="2A8B5A"/>
+                </a:solidFill>
+                <a:latin typeface="Noto Sans CJK KR"/>
+              </a:defRPr>
+            </a:pPr>
+            <a:r>
+              <a:t>만드는 것</a:t>
+            </a:r>
+          </a:p>
+        </p:txBody>
+      </p:sp>
+      <p:sp>
+        <p:nvSpPr>
+          <p:cNvPr id="18" name="TextBox 17"/>
+          <p:cNvSpPr txBox="1"/>
+          <p:nvPr/>
+        </p:nvSpPr>
+        <p:spPr>
+          <a:xfrm>
+            <a:off x="1975104" y="4425696"/>
+            <a:ext cx="9189720" cy="274320"/>
+          </a:xfrm>
+          <a:prstGeom prst="rect">
+            <a:avLst/>
+          </a:prstGeom>
+          <a:noFill/>
+        </p:spPr>
+        <p:txBody>
+          <a:bodyPr wrap="square" lIns="73152" rIns="73152" tIns="36576" bIns="36576">
+            <a:spAutoFit/>
+          </a:bodyPr>
+          <a:lstStyle/>
+          <a:p>
+            <a:pPr algn="l">
+              <a:spcAft>
+                <a:spcPts val="0"/>
+              </a:spcAft>
+              <a:defRPr sz="1500" b="0">
+                <a:solidFill>
+                  <a:srgbClr val="122C4E"/>
+                </a:solidFill>
+                <a:latin typeface="Noto Sans CJK KR"/>
+              </a:defRPr>
+            </a:pPr>
+            <a:r>
+              <a:t>여러 ROS 2 node를 시작 순서대로 조립하는 launch 파일</a:t>
+            </a:r>
+          </a:p>
+        </p:txBody>
+      </p:sp>
+      <p:sp>
+        <p:nvSpPr>
+          <p:cNvPr id="19" name="TextBox 18"/>
+          <p:cNvSpPr txBox="1"/>
+          <p:nvPr/>
+        </p:nvSpPr>
+        <p:spPr>
+          <a:xfrm>
+            <a:off x="868680" y="4818888"/>
+            <a:ext cx="1234440" cy="228600"/>
+          </a:xfrm>
+          <a:prstGeom prst="rect">
+            <a:avLst/>
+          </a:prstGeom>
+          <a:noFill/>
+        </p:spPr>
+        <p:txBody>
+          <a:bodyPr wrap="square" lIns="73152" rIns="73152" tIns="36576" bIns="36576">
+            <a:spAutoFit/>
+          </a:bodyPr>
+          <a:lstStyle/>
+          <a:p>
+            <a:pPr algn="l">
+              <a:spcAft>
+                <a:spcPts val="0"/>
+              </a:spcAft>
+              <a:defRPr sz="1500" b="1">
+                <a:solidFill>
+                  <a:srgbClr val="DB7E22"/>
+                </a:solidFill>
+                <a:latin typeface="Noto Sans CJK KR"/>
+              </a:defRPr>
+            </a:pPr>
+            <a:r>
+              <a:t>코드 읽기</a:t>
+            </a:r>
+          </a:p>
+        </p:txBody>
+      </p:sp>
+      <p:sp>
+        <p:nvSpPr>
+          <p:cNvPr id="20" name="TextBox 19"/>
+          <p:cNvSpPr txBox="1"/>
+          <p:nvPr/>
+        </p:nvSpPr>
+        <p:spPr>
+          <a:xfrm>
+            <a:off x="1975104" y="4800600"/>
+            <a:ext cx="9189720" cy="301752"/>
+          </a:xfrm>
+          <a:prstGeom prst="rect">
+            <a:avLst/>
+          </a:prstGeom>
+          <a:noFill/>
+        </p:spPr>
+        <p:txBody>
+          <a:bodyPr wrap="square" lIns="73152" rIns="73152" tIns="36576" bIns="36576">
+            <a:spAutoFit/>
+          </a:bodyPr>
+          <a:lstStyle/>
+          <a:p>
+            <a:pPr algn="l">
+              <a:spcAft>
+                <a:spcPts val="0"/>
+              </a:spcAft>
+              <a:defRPr sz="1400" b="0">
+                <a:solidFill>
+                  <a:srgbClr val="122C4E"/>
+                </a:solidFill>
+                <a:latin typeface="Noto Sans CJK KR"/>
+              </a:defRPr>
+            </a:pPr>
+            <a:r>
+              <a:t>launch argument → Node → parameters/config 순서로 읽는다.</a:t>
+            </a:r>
+          </a:p>
+        </p:txBody>
+      </p:sp>
+      <p:sp>
+        <p:nvSpPr>
+          <p:cNvPr id="21" name="TextBox 20"/>
+          <p:cNvSpPr txBox="1"/>
+          <p:nvPr/>
+        </p:nvSpPr>
+        <p:spPr>
+          <a:xfrm>
+            <a:off x="868680" y="5202936"/>
+            <a:ext cx="1234440" cy="228600"/>
+          </a:xfrm>
+          <a:prstGeom prst="rect">
+            <a:avLst/>
+          </a:prstGeom>
+          <a:noFill/>
+        </p:spPr>
+        <p:txBody>
+          <a:bodyPr wrap="square" lIns="73152" rIns="73152" tIns="36576" bIns="36576">
+            <a:spAutoFit/>
+          </a:bodyPr>
+          <a:lstStyle/>
+          <a:p>
+            <a:pPr algn="l">
+              <a:spcAft>
+                <a:spcPts val="0"/>
+              </a:spcAft>
+              <a:defRPr sz="1500" b="1">
+                <a:solidFill>
+                  <a:srgbClr val="225B9B"/>
+                </a:solidFill>
+                <a:latin typeface="Noto Sans CJK KR"/>
+              </a:defRPr>
+            </a:pPr>
+            <a:r>
+              <a:t>사용/확인</a:t>
+            </a:r>
+          </a:p>
+        </p:txBody>
+      </p:sp>
+      <p:sp>
+        <p:nvSpPr>
+          <p:cNvPr id="22" name="TextBox 21"/>
+          <p:cNvSpPr txBox="1"/>
+          <p:nvPr/>
+        </p:nvSpPr>
+        <p:spPr>
+          <a:xfrm>
+            <a:off x="1975104" y="5184648"/>
+            <a:ext cx="9189720" cy="512064"/>
+          </a:xfrm>
+          <a:prstGeom prst="rect">
+            <a:avLst/>
+          </a:prstGeom>
+          <a:noFill/>
+        </p:spPr>
+        <p:txBody>
+          <a:bodyPr wrap="square" lIns="73152" rIns="73152" tIns="36576" bIns="36576">
+            <a:spAutoFit/>
+          </a:bodyPr>
+          <a:lstStyle/>
+          <a:p>
+            <a:pPr algn="l">
+              <a:spcAft>
+                <a:spcPts val="0"/>
+              </a:spcAft>
+              <a:defRPr sz="1300" b="0">
+                <a:solidFill>
+                  <a:srgbClr val="122C4E"/>
+                </a:solidFill>
+                <a:latin typeface="Noto Sans CJK KR"/>
+              </a:defRPr>
+            </a:pPr>
+            <a:r>
+              <a:t>사용: ros2 launch로 실행한다.</a:t>
+            </a:r>
+            <a:br/>
+            <a:r>
+              <a:t>화면/출력: terminal의 실행 node와 topic</a:t>
             </a:r>
           </a:p>
         </p:txBody>
@@ -12721,7 +13712,7 @@
               </a:defRPr>
             </a:pPr>
             <a:r>
-              <a:t>launch가 YAML을 읽게 한다</a:t>
+              <a:t>bridge YAML을 작성한다</a:t>
             </a:r>
           </a:p>
         </p:txBody>
@@ -12896,7 +13887,7 @@
               </a:defRPr>
             </a:pPr>
             <a:r>
-              <a:t>현재 단계 2/2    |    현재 폴더 ~/ros2_curri/agv_ws    |    현재 터미널</a:t>
+              <a:t>현재 단계 1/2    |    현재 폴더 ~/ros2_curri/agv_ws    |    현재 터미널</a:t>
             </a:r>
           </a:p>
         </p:txBody>
@@ -12974,7 +13965,7 @@
               </a:defRPr>
             </a:pPr>
             <a:r>
-              <a:t>config_file은 package share 경로에서 찾도록 launch에 넣는다.</a:t>
+              <a:t>방향과 양쪽 message type을 한 topic마다 정확히 적는다.</a:t>
             </a:r>
           </a:p>
         </p:txBody>
@@ -13032,15 +14023,11 @@
               </a:defRPr>
             </a:pPr>
             <a:r>
-              <a:t>colcon build --symlink-install --packages-select agv_gazebo</a:t>
+              <a:t>cd ~/ros2_curri/agv_ws</a:t>
             </a:r>
             <a:br/>
             <a:r>
-              <a:t>source install/setup.bash</a:t>
-            </a:r>
-            <a:br/>
-            <a:r>
-              <a:t>ros2 launch agv_gazebo gazebo.launch.py</a:t>
+              <a:t>nano src/agv_gazebo/config/bridge.yaml</a:t>
             </a:r>
           </a:p>
         </p:txBody>
@@ -13175,7 +14162,7 @@
               </a:defRPr>
             </a:pPr>
             <a:r>
-              <a:t>파일을 새로 만들고 저장한다 (1/3)</a:t>
+              <a:t>launch가 YAML을 읽게 한다</a:t>
             </a:r>
           </a:p>
         </p:txBody>
@@ -13214,7 +14201,7 @@
               </a:defRPr>
             </a:pPr>
             <a:r>
-              <a:t>~/ros2_curri/agv_ws/src/agv_gazebo/config/bridge.yaml</a:t>
+              <a:t>한 장에는 한 행동만 수행합니다.</a:t>
             </a:r>
           </a:p>
         </p:txBody>
@@ -13350,7 +14337,7 @@
               </a:defRPr>
             </a:pPr>
             <a:r>
-              <a:t>현재 단계 3/6    |    현재 폴더 ~/ros2_curri/agv_ws    |    현재 터미널</a:t>
+              <a:t>현재 단계 2/2    |    현재 폴더 ~/ros2_curri/agv_ws    |    현재 터미널</a:t>
             </a:r>
           </a:p>
         </p:txBody>
@@ -13363,8 +14350,8 @@
         </p:nvSpPr>
         <p:spPr>
           <a:xfrm>
-            <a:off x="658368" y="1627632"/>
-            <a:ext cx="10972800" cy="256032"/>
+            <a:off x="676656" y="1764792"/>
+            <a:ext cx="1828800" cy="347472"/>
           </a:xfrm>
           <a:prstGeom prst="rect">
             <a:avLst/>
@@ -13381,7 +14368,46 @@
               <a:spcAft>
                 <a:spcPts val="0"/>
               </a:spcAft>
-              <a:defRPr sz="1500" b="1">
+              <a:defRPr sz="1800" b="1">
+                <a:solidFill>
+                  <a:srgbClr val="225B9B"/>
+                </a:solidFill>
+                <a:latin typeface="Noto Sans CJK KR"/>
+              </a:defRPr>
+            </a:pPr>
+            <a:r>
+              <a:t>왜 하는가</a:t>
+            </a:r>
+          </a:p>
+        </p:txBody>
+      </p:sp>
+      <p:sp>
+        <p:nvSpPr>
+          <p:cNvPr id="8" name="TextBox 7"/>
+          <p:cNvSpPr txBox="1"/>
+          <p:nvPr/>
+        </p:nvSpPr>
+        <p:spPr>
+          <a:xfrm>
+            <a:off x="676656" y="2103120"/>
+            <a:ext cx="10789920" cy="512064"/>
+          </a:xfrm>
+          <a:prstGeom prst="rect">
+            <a:avLst/>
+          </a:prstGeom>
+          <a:noFill/>
+        </p:spPr>
+        <p:txBody>
+          <a:bodyPr wrap="square" lIns="73152" rIns="73152" tIns="36576" bIns="36576">
+            <a:spAutoFit/>
+          </a:bodyPr>
+          <a:lstStyle/>
+          <a:p>
+            <a:pPr algn="l">
+              <a:spcAft>
+                <a:spcPts val="0"/>
+              </a:spcAft>
+              <a:defRPr sz="2000" b="0">
                 <a:solidFill>
                   <a:srgbClr val="122C4E"/>
                 </a:solidFill>
@@ -13389,85 +14415,23 @@
               </a:defRPr>
             </a:pPr>
             <a:r>
-              <a:t>이번 단계: 파일의 전체 내용을 중간 생략 없이 작성합니다. 아래 줄 범위를 끝까지 입력하세요.</a:t>
-            </a:r>
-          </a:p>
-        </p:txBody>
-      </p:sp>
-      <p:sp>
-        <p:nvSpPr>
-          <p:cNvPr id="8" name="Rectangle 7"/>
+              <a:t>config_file은 package share 경로에서 찾도록 launch에 넣는다.</a:t>
+            </a:r>
+          </a:p>
+        </p:txBody>
+      </p:sp>
+      <p:sp>
+        <p:nvSpPr>
+          <p:cNvPr id="9" name="Rounded Rectangle 8"/>
           <p:cNvSpPr/>
           <p:nvPr/>
         </p:nvSpPr>
         <p:spPr>
           <a:xfrm>
-            <a:off x="658368" y="1956816"/>
-            <a:ext cx="10972800" cy="603504"/>
-          </a:xfrm>
-          <a:prstGeom prst="rect">
-            <a:avLst/>
-          </a:prstGeom>
-          <a:solidFill>
-            <a:srgbClr val="F4F7FB"/>
-          </a:solidFill>
-          <a:ln>
-            <a:solidFill>
-              <a:srgbClr val="F4F7FB"/>
-            </a:solidFill>
-          </a:ln>
-        </p:spPr>
-        <p:style>
-          <a:lnRef idx="1">
-            <a:schemeClr val="accent1"/>
-          </a:lnRef>
-          <a:fillRef idx="3">
-            <a:schemeClr val="accent1"/>
-          </a:fillRef>
-          <a:effectRef idx="2">
-            <a:schemeClr val="accent1"/>
-          </a:effectRef>
-          <a:fontRef idx="minor">
-            <a:schemeClr val="lt1"/>
-          </a:fontRef>
-        </p:style>
-        <p:txBody>
-          <a:bodyPr rtlCol="0" anchor="ctr" wrap="square" lIns="73152" rIns="73152" tIns="36576" bIns="36576"/>
-          <a:lstStyle/>
-          <a:p>
-            <a:pPr algn="l">
-              <a:spcAft>
-                <a:spcPts val="0"/>
-              </a:spcAft>
-              <a:defRPr sz="1400" b="0">
-                <a:solidFill>
-                  <a:srgbClr val="122C4E"/>
-                </a:solidFill>
-                <a:latin typeface="DejaVu Sans Mono"/>
-              </a:defRPr>
-            </a:pPr>
-            <a:r>
-              <a:t>파일 생성: mkdir -p ~/ros2_curri/agv_ws/src/agv_gazebo/config</a:t>
-            </a:r>
-            <a:br/>
-            <a:r>
-              <a:t>파일 열기: nano ~/ros2_curri/agv_ws/src/agv_gazebo/config/bridge.yaml</a:t>
-            </a:r>
-          </a:p>
-        </p:txBody>
-      </p:sp>
-      <p:sp>
-        <p:nvSpPr>
-          <p:cNvPr id="9" name="Rectangle 8"/>
-          <p:cNvSpPr/>
-          <p:nvPr/>
-        </p:nvSpPr>
-        <p:spPr>
-          <a:xfrm>
-            <a:off x="658368" y="2706624"/>
-            <a:ext cx="10972800" cy="3364992"/>
-          </a:xfrm>
-          <a:prstGeom prst="rect">
+            <a:off x="676656" y="2871216"/>
+            <a:ext cx="10835640" cy="2331720"/>
+          </a:xfrm>
+          <a:prstGeom prst="roundRect">
             <a:avLst/>
           </a:prstGeom>
           <a:solidFill>
@@ -13494,14 +14458,14 @@
           </a:fontRef>
         </p:style>
         <p:txBody>
-          <a:bodyPr rtlCol="0" anchor="ctr" wrap="square" lIns="164592" rIns="164592" tIns="109728" bIns="36576"/>
+          <a:bodyPr rtlCol="0" anchor="ctr" wrap="square" lIns="73152" rIns="73152" tIns="36576" bIns="36576"/>
           <a:lstStyle/>
           <a:p>
             <a:pPr algn="l">
               <a:spcAft>
                 <a:spcPts val="0"/>
               </a:spcAft>
-              <a:defRPr sz="1400" b="0">
+              <a:defRPr sz="1600" b="0">
                 <a:solidFill>
                   <a:srgbClr val="FFFFFF"/>
                 </a:solidFill>
@@ -13509,51 +14473,15 @@
               </a:defRPr>
             </a:pPr>
             <a:r>
-              <a:t>- ros_topic_name: "/cmd_vel"</a:t>
+              <a:t>colcon build --symlink-install --packages-select agv_gazebo</a:t>
             </a:r>
             <a:br/>
             <a:r>
-              <a:t>  gz_topic_name: "/cmd_vel"</a:t>
+              <a:t>source install/setup.bash</a:t>
             </a:r>
             <a:br/>
             <a:r>
-              <a:t>  ros_type_name: "geometry_msgs/msg/Twist"</a:t>
-            </a:r>
-            <a:br/>
-            <a:r>
-              <a:t>  gz_type_name: "gz.msgs.Twist"</a:t>
-            </a:r>
-            <a:br/>
-            <a:r>
-              <a:t>  direction: ROS_TO_GZ</a:t>
-            </a:r>
-            <a:br/>
-            <a:r>
-              <a:t>- ros_topic_name: "/odom"</a:t>
-            </a:r>
-            <a:br/>
-            <a:r>
-              <a:t>  gz_topic_name: "/odom"</a:t>
-            </a:r>
-            <a:br/>
-            <a:r>
-              <a:t>  ros_type_name: "nav_msgs/msg/Odometry"</a:t>
-            </a:r>
-            <a:br/>
-            <a:r>
-              <a:t>  gz_type_name: "gz.msgs.Odometry"</a:t>
-            </a:r>
-            <a:br/>
-            <a:r>
-              <a:t>  direction: GZ_TO_ROS</a:t>
-            </a:r>
-            <a:br/>
-            <a:r>
-              <a:t>- ros_topic_name: "/scan"</a:t>
-            </a:r>
-            <a:br/>
-            <a:r>
-              <a:t>  gz_topic_name: "/scan"</a:t>
+              <a:t>ros2 launch agv_gazebo gazebo.launch.py</a:t>
             </a:r>
           </a:p>
         </p:txBody>
@@ -13566,8 +14494,8 @@
         </p:nvSpPr>
         <p:spPr>
           <a:xfrm>
-            <a:off x="749808" y="6181344"/>
-            <a:ext cx="10789920" cy="201168"/>
+            <a:off x="768096" y="5468112"/>
+            <a:ext cx="1143000" cy="256032"/>
           </a:xfrm>
           <a:prstGeom prst="rect">
             <a:avLst/>
@@ -13584,15 +14512,54 @@
               <a:spcAft>
                 <a:spcPts val="0"/>
               </a:spcAft>
-              <a:defRPr sz="1000" b="0">
-                <a:solidFill>
-                  <a:srgbClr val="5C6672"/>
-                </a:solidFill>
-                <a:latin typeface="Noto Sans CJK KR"/>
-              </a:defRPr>
-            </a:pPr>
-            <a:r>
-              <a:t>파일 전체 1/3 · 이 슬라이드 다음에 같은 파일의 나머지 줄이 이어집니다.</a:t>
+              <a:defRPr sz="1800" b="1">
+                <a:solidFill>
+                  <a:srgbClr val="2A8B5A"/>
+                </a:solidFill>
+                <a:latin typeface="Noto Sans CJK KR"/>
+              </a:defRPr>
+            </a:pPr>
+            <a:r>
+              <a:t>확인</a:t>
+            </a:r>
+          </a:p>
+        </p:txBody>
+      </p:sp>
+      <p:sp>
+        <p:nvSpPr>
+          <p:cNvPr id="11" name="TextBox 10"/>
+          <p:cNvSpPr txBox="1"/>
+          <p:nvPr/>
+        </p:nvSpPr>
+        <p:spPr>
+          <a:xfrm>
+            <a:off x="768096" y="5742432"/>
+            <a:ext cx="10561320" cy="347472"/>
+          </a:xfrm>
+          <a:prstGeom prst="rect">
+            <a:avLst/>
+          </a:prstGeom>
+          <a:noFill/>
+        </p:spPr>
+        <p:txBody>
+          <a:bodyPr wrap="square" lIns="73152" rIns="73152" tIns="36576" bIns="36576">
+            <a:spAutoFit/>
+          </a:bodyPr>
+          <a:lstStyle/>
+          <a:p>
+            <a:pPr algn="l">
+              <a:spcAft>
+                <a:spcPts val="0"/>
+              </a:spcAft>
+              <a:defRPr sz="1800" b="0">
+                <a:solidFill>
+                  <a:srgbClr val="122C4E"/>
+                </a:solidFill>
+                <a:latin typeface="Noto Sans CJK KR"/>
+              </a:defRPr>
+            </a:pPr>
+            <a:r>
+              <a:t>명령의 출력에서 topic·frame·파일 이름 또는 성공 메시지를 찾으면 이 단계가 완료됩니다.</a:t>
             </a:r>
           </a:p>
         </p:txBody>

--- a/blocks/C_drive_visualization/M10_ros_gz_bridge/M10_ros_gz_bridge_ROS2_Gazebo_연결.pptx
+++ b/blocks/C_drive_visualization/M10_ros_gz_bridge/M10_ros_gz_bridge_ROS2_Gazebo_연결.pptx
@@ -26,6 +26,10 @@
     <p:sldId id="274" r:id="rId26"/>
     <p:sldId id="275" r:id="rId27"/>
     <p:sldId id="276" r:id="rId28"/>
+    <p:sldId id="277" r:id="rId29"/>
+    <p:sldId id="278" r:id="rId30"/>
+    <p:sldId id="279" r:id="rId31"/>
+    <p:sldId id="280" r:id="rId32"/>
   </p:sldIdLst>
   <p:sldSz cx="12191999" cy="6858000" type="screen4x3"/>
   <p:notesSz cx="6858000" cy="9144000"/>
@@ -612,17 +616,17 @@
           <a:lstStyle/>
           <a:p>
             <a:r>
-              <a:t>[설명] ~/ros2_curri/agv_ws/src/agv_gazebo/config/bridge.yaml의 전체 파일을 1/3 구간으로 작성한다.</a:t>
-            </a:r>
-          </a:p>
-          <a:p>
-            <a:r>
-              <a:t>[실행] nano ~/ros2_curri/agv_ws/src/agv_gazebo/config/bridge.yaml</a:t>
-            </a:r>
-          </a:p>
-          <a:p>
-            <a:r>
-              <a:t>[확인] 코드를 저장하고 다음 코드 슬라이드 또는 build 단계로 이동한다.</a:t>
+              <a:t>[설명] ~/ros2_curri/my_agv_ws/src/agv_gazebo/config/bridge.yaml의 1/3 구현 블록을 직접 입력한다.</a:t>
+            </a:r>
+          </a:p>
+          <a:p>
+            <a:r>
+              <a:t>[실행] nano ~/ros2_curri/my_agv_ws/src/agv_gazebo/config/bridge.yaml</a:t>
+            </a:r>
+          </a:p>
+          <a:p>
+            <a:r>
+              <a:t>[확인] 저장 뒤 다음 구현 블록으로 이동한다.</a:t>
             </a:r>
           </a:p>
           <a:p>
@@ -702,17 +706,17 @@
           <a:lstStyle/>
           <a:p>
             <a:r>
-              <a:t>[설명] ~/ros2_curri/agv_ws/src/agv_gazebo/config/bridge.yaml의 전체 파일을 2/3 구간으로 작성한다.</a:t>
-            </a:r>
-          </a:p>
-          <a:p>
-            <a:r>
-              <a:t>[실행] nano ~/ros2_curri/agv_ws/src/agv_gazebo/config/bridge.yaml</a:t>
-            </a:r>
-          </a:p>
-          <a:p>
-            <a:r>
-              <a:t>[확인] 코드를 저장하고 다음 코드 슬라이드 또는 build 단계로 이동한다.</a:t>
+              <a:t>[설명] ~/ros2_curri/my_agv_ws/src/agv_gazebo/config/bridge.yaml의 2/3 구현 블록을 직접 입력한다.</a:t>
+            </a:r>
+          </a:p>
+          <a:p>
+            <a:r>
+              <a:t>[실행] nano ~/ros2_curri/my_agv_ws/src/agv_gazebo/config/bridge.yaml</a:t>
+            </a:r>
+          </a:p>
+          <a:p>
+            <a:r>
+              <a:t>[확인] 저장 뒤 다음 구현 블록으로 이동한다.</a:t>
             </a:r>
           </a:p>
           <a:p>
@@ -792,17 +796,17 @@
           <a:lstStyle/>
           <a:p>
             <a:r>
-              <a:t>[설명] ~/ros2_curri/agv_ws/src/agv_gazebo/config/bridge.yaml의 전체 파일을 3/3 구간으로 작성한다.</a:t>
-            </a:r>
-          </a:p>
-          <a:p>
-            <a:r>
-              <a:t>[실행] nano ~/ros2_curri/agv_ws/src/agv_gazebo/config/bridge.yaml</a:t>
-            </a:r>
-          </a:p>
-          <a:p>
-            <a:r>
-              <a:t>[확인] 코드를 저장하고 다음 코드 슬라이드 또는 build 단계로 이동한다.</a:t>
+              <a:t>[설명] ~/ros2_curri/my_agv_ws/src/agv_gazebo/config/bridge.yaml의 3/3 구현 블록을 직접 입력한다.</a:t>
+            </a:r>
+          </a:p>
+          <a:p>
+            <a:r>
+              <a:t>[실행] nano ~/ros2_curri/my_agv_ws/src/agv_gazebo/config/bridge.yaml</a:t>
+            </a:r>
+          </a:p>
+          <a:p>
+            <a:r>
+              <a:t>[확인] 저장 뒤 다음 구현 블록으로 이동한다.</a:t>
             </a:r>
           </a:p>
           <a:p>
@@ -882,17 +886,22 @@
           <a:lstStyle/>
           <a:p>
             <a:r>
-              <a:t>[설명] ~/ros2_curri/agv_ws/src/agv_gazebo/launch/gazebo.launch.py의 전체 파일을 1/2 구간으로 작성한다.</a:t>
-            </a:r>
-          </a:p>
-          <a:p>
-            <a:r>
-              <a:t>[실행] nano ~/ros2_curri/agv_ws/src/agv_gazebo/launch/gazebo.launch.py</a:t>
-            </a:r>
-          </a:p>
-          <a:p>
-            <a:r>
-              <a:t>[확인] 코드를 저장하고 다음 코드 슬라이드 또는 build 단계로 이동한다.</a:t>
+              <a:t>[설명] 여러 ROS 2 node를 시작 순서대로 조립하는 launch 파일</a:t>
+            </a:r>
+          </a:p>
+          <a:p>
+            <a:r>
+              <a:t>[실행] mkdir -p ~/ros2_curri/my_agv_ws/src/agv_gazebo/launch</a:t>
+            </a:r>
+          </a:p>
+          <a:p>
+            <a:r>
+              <a:t>nano ~/ros2_curri/my_agv_ws/src/agv_gazebo/launch/gazebo.launch.py</a:t>
+            </a:r>
+          </a:p>
+          <a:p>
+            <a:r>
+              <a:t>[확인] 빈 파일을 연 뒤 다음 코드 입력 슬라이드로 간다.</a:t>
             </a:r>
           </a:p>
           <a:p>
@@ -902,7 +911,7 @@
           </a:p>
           <a:p>
             <a:r>
-              <a:t>[오류] 들여쓰기·XML 태그·따옴표가 슬라이드와 정확히 같은지 확인한다.</a:t>
+              <a:t>[오류] 오류가 나면 현재 폴더, source, 파일 경로를 먼저 확인한다.</a:t>
             </a:r>
           </a:p>
         </p:txBody>
@@ -972,17 +981,17 @@
           <a:lstStyle/>
           <a:p>
             <a:r>
-              <a:t>[설명] ~/ros2_curri/agv_ws/src/agv_gazebo/launch/gazebo.launch.py의 전체 파일을 2/2 구간으로 작성한다.</a:t>
-            </a:r>
-          </a:p>
-          <a:p>
-            <a:r>
-              <a:t>[실행] nano ~/ros2_curri/agv_ws/src/agv_gazebo/launch/gazebo.launch.py</a:t>
-            </a:r>
-          </a:p>
-          <a:p>
-            <a:r>
-              <a:t>[확인] 코드를 저장하고 다음 코드 슬라이드 또는 build 단계로 이동한다.</a:t>
+              <a:t>[설명] ~/ros2_curri/my_agv_ws/src/agv_gazebo/launch/gazebo.launch.py의 1/2 구현 블록을 직접 입력한다.</a:t>
+            </a:r>
+          </a:p>
+          <a:p>
+            <a:r>
+              <a:t>[실행] nano ~/ros2_curri/my_agv_ws/src/agv_gazebo/launch/gazebo.launch.py</a:t>
+            </a:r>
+          </a:p>
+          <a:p>
+            <a:r>
+              <a:t>[확인] 저장 뒤 다음 구현 블록으로 이동한다.</a:t>
             </a:r>
           </a:p>
           <a:p>
@@ -1062,22 +1071,17 @@
           <a:lstStyle/>
           <a:p>
             <a:r>
-              <a:t>[설명] build/source/run을 생략 없이 실행한다.</a:t>
-            </a:r>
-          </a:p>
-          <a:p>
-            <a:r>
-              <a:t>[실행] source ~/ros2_curri/agv_ws/install/setup.bash</a:t>
-            </a:r>
-          </a:p>
-          <a:p>
-            <a:r>
-              <a:t>ros2 launch agv_gazebo gazebo.launch.py</a:t>
-            </a:r>
-          </a:p>
-          <a:p>
-            <a:r>
-              <a:t>[확인] /cmd_vel ROS→Gazebo 및 odom/scan/imu/camera/clock Gazebo→ROS 매핑을 확인한다.</a:t>
+              <a:t>[설명] ~/ros2_curri/my_agv_ws/src/agv_gazebo/launch/gazebo.launch.py의 2/2 구현 블록을 직접 입력한다.</a:t>
+            </a:r>
+          </a:p>
+          <a:p>
+            <a:r>
+              <a:t>[실행] nano ~/ros2_curri/my_agv_ws/src/agv_gazebo/launch/gazebo.launch.py</a:t>
+            </a:r>
+          </a:p>
+          <a:p>
+            <a:r>
+              <a:t>[확인] 저장 뒤 다음 구현 블록으로 이동한다.</a:t>
             </a:r>
           </a:p>
           <a:p>
@@ -1087,7 +1091,7 @@
           </a:p>
           <a:p>
             <a:r>
-              <a:t>[오류] 오류가 나면 현재 폴더, source, 파일 경로를 먼저 확인한다.</a:t>
+              <a:t>[오류] 들여쓰기·XML 태그·따옴표가 슬라이드와 정확히 같은지 확인한다.</a:t>
             </a:r>
           </a:p>
         </p:txBody>
@@ -1157,17 +1161,22 @@
           <a:lstStyle/>
           <a:p>
             <a:r>
-              <a:t>[설명] 실제 Ubuntu/ROS 2 환경에서 생성한 검증 화면이다.</a:t>
-            </a:r>
-          </a:p>
-          <a:p>
-            <a:r>
-              <a:t>[실행] 슬라이드의 명령 또는 파일 작성 단계를 진행한다.</a:t>
-            </a:r>
-          </a:p>
-          <a:p>
-            <a:r>
-              <a:t>[확인] ① 명령/설정  ② 정상 출력 또는 화면  ③ 다음 검증 명령으로 재확인</a:t>
+              <a:t>[설명] 방향과 양쪽 message type을 한 topic마다 정확히 적는다.</a:t>
+            </a:r>
+          </a:p>
+          <a:p>
+            <a:r>
+              <a:t>[실행] cd ~/ros2_curri/my_agv_ws</a:t>
+            </a:r>
+          </a:p>
+          <a:p>
+            <a:r>
+              <a:t>nano src/agv_gazebo/config/bridge.yaml</a:t>
+            </a:r>
+          </a:p>
+          <a:p>
+            <a:r>
+              <a:t>[확인] 명령 출력에서 슬라이드의 확인 항목을 찾는다.</a:t>
             </a:r>
           </a:p>
           <a:p>
@@ -1247,22 +1256,27 @@
           <a:lstStyle/>
           <a:p>
             <a:r>
-              <a:t>[설명] 검증 명령은 GUI 결과와 별도로 실행해 재현 가능한 완료 기준을 만든다.</a:t>
-            </a:r>
-          </a:p>
-          <a:p>
-            <a:r>
-              <a:t>[실행] ros2 topic list | rg '/cmd_vel|/odom|/scan|/imu|/camera|/clock'</a:t>
-            </a:r>
-          </a:p>
-          <a:p>
-            <a:r>
-              <a:t>ros2 topic info /scan</a:t>
-            </a:r>
-          </a:p>
-          <a:p>
-            <a:r>
-              <a:t>[확인] /cmd_vel ROS→Gazebo 및 odom/scan/imu/camera/clock Gazebo→ROS 매핑을 확인한다.</a:t>
+              <a:t>[설명] config_file은 package share 경로에서 찾도록 launch에 넣는다.</a:t>
+            </a:r>
+          </a:p>
+          <a:p>
+            <a:r>
+              <a:t>[실행] colcon build --symlink-install --packages-select agv_gazebo</a:t>
+            </a:r>
+          </a:p>
+          <a:p>
+            <a:r>
+              <a:t>source install/setup.bash</a:t>
+            </a:r>
+          </a:p>
+          <a:p>
+            <a:r>
+              <a:t>ros2 launch agv_gazebo gazebo.launch.py</a:t>
+            </a:r>
+          </a:p>
+          <a:p>
+            <a:r>
+              <a:t>[확인] 명령 출력에서 슬라이드의 확인 항목을 찾는다.</a:t>
             </a:r>
           </a:p>
           <a:p>
@@ -1342,17 +1356,22 @@
           <a:lstStyle/>
           <a:p>
             <a:r>
-              <a:t>[설명] 오류를 대신 해결하지 말고 증상부터 우선 확인 순서대로 교육생이 실행하게 한다.</a:t>
-            </a:r>
-          </a:p>
-          <a:p>
-            <a:r>
-              <a:t>[실행] 슬라이드의 명령 또는 파일 작성 단계를 진행한다.</a:t>
-            </a:r>
-          </a:p>
-          <a:p>
-            <a:r>
-              <a:t>[확인] 수정 뒤 첫 검증 명령을 다시 실행한다.</a:t>
+              <a:t>[설명] build/source/run을 생략 없이 실행한다.</a:t>
+            </a:r>
+          </a:p>
+          <a:p>
+            <a:r>
+              <a:t>[실행] source ~/ros2_curri/my_agv_ws/install/setup.bash</a:t>
+            </a:r>
+          </a:p>
+          <a:p>
+            <a:r>
+              <a:t>ros2 launch agv_gazebo gazebo.launch.py</a:t>
+            </a:r>
+          </a:p>
+          <a:p>
+            <a:r>
+              <a:t>[확인] /cmd_vel ROS→Gazebo 및 odom/scan/imu/camera/clock Gazebo→ROS 매핑을 확인한다.</a:t>
             </a:r>
           </a:p>
           <a:p>
@@ -1362,7 +1381,7 @@
           </a:p>
           <a:p>
             <a:r>
-              <a:t>[오류] 슬라이드의 두 대표 오류를 먼저 사용한다.</a:t>
+              <a:t>[오류] 오류가 나면 현재 폴더, source, 파일 경로를 먼저 확인한다.</a:t>
             </a:r>
           </a:p>
         </p:txBody>
@@ -1432,7 +1451,7 @@
           <a:lstStyle/>
           <a:p>
             <a:r>
-              <a:t>[설명] 교육생이 직접 한 값만 바꿔 원인과 결과를 연결하게 한다.</a:t>
+              <a:t>[설명] 실제 Ubuntu/ROS 2 환경에서 생성한 검증 화면이다.</a:t>
             </a:r>
           </a:p>
           <a:p>
@@ -1442,7 +1461,7 @@
           </a:p>
           <a:p>
             <a:r>
-              <a:t>[확인] 원래 값과 변경 값을 모두 기록한다.</a:t>
+              <a:t>[확인] ① 명령/설정  ② 정상 출력 또는 화면  ③ 다음 검증 명령으로 재확인</a:t>
             </a:r>
           </a:p>
           <a:p>
@@ -1612,17 +1631,22 @@
           <a:lstStyle/>
           <a:p>
             <a:r>
-              <a:t>[설명] 교육생이 Complete·캡처·로그를 저장했는지 확인하고 다음 모듈의 시작 상태를 읽는다.</a:t>
-            </a:r>
-          </a:p>
-          <a:p>
-            <a:r>
-              <a:t>[실행] 슬라이드의 명령 또는 파일 작성 단계를 진행한다.</a:t>
-            </a:r>
-          </a:p>
-          <a:p>
-            <a:r>
-              <a:t>[확인] M11 RViz2 시작 조건을 말할 수 있다.</a:t>
+              <a:t>[설명] 검증 명령은 GUI 결과와 별도로 실행해 재현 가능한 완료 기준을 만든다.</a:t>
+            </a:r>
+          </a:p>
+          <a:p>
+            <a:r>
+              <a:t>[실행] ros2 topic list | rg '/cmd_vel|/odom|/scan|/imu|/camera|/clock'</a:t>
+            </a:r>
+          </a:p>
+          <a:p>
+            <a:r>
+              <a:t>ros2 topic info /scan</a:t>
+            </a:r>
+          </a:p>
+          <a:p>
+            <a:r>
+              <a:t>[확인] /cmd_vel ROS→Gazebo 및 odom/scan/imu/camera/clock Gazebo→ROS 매핑을 확인한다.</a:t>
             </a:r>
           </a:p>
           <a:p>
@@ -1702,6 +1726,386 @@
           <a:lstStyle/>
           <a:p>
             <a:r>
+              <a:t>[설명] 오류를 대신 해결하지 말고 증상부터 우선 확인 순서대로 교육생이 실행하게 한다.</a:t>
+            </a:r>
+          </a:p>
+          <a:p>
+            <a:r>
+              <a:t>[실행] 슬라이드의 명령 또는 파일 작성 단계를 진행한다.</a:t>
+            </a:r>
+          </a:p>
+          <a:p>
+            <a:r>
+              <a:t>[확인] 수정 뒤 첫 검증 명령을 다시 실행한다.</a:t>
+            </a:r>
+          </a:p>
+          <a:p>
+            <a:r>
+              <a:t>[멈춤] 교육생이 현재 체크포인트를 통과할 때까지 기다린다.</a:t>
+            </a:r>
+          </a:p>
+          <a:p>
+            <a:r>
+              <a:t>[오류] 슬라이드의 두 대표 오류를 먼저 사용한다.</a:t>
+            </a:r>
+          </a:p>
+        </p:txBody>
+      </p:sp>
+      <p:sp>
+        <p:nvSpPr>
+          <p:cNvPr id="4" name="Slide Number Placeholder 3"/>
+          <p:cNvSpPr>
+            <a:spLocks noGrp="1"/>
+          </p:cNvSpPr>
+          <p:nvPr>
+            <p:ph type="sldNum" idx="5" sz="quarter"/>
+          </p:nvPr>
+        </p:nvSpPr>
+        <p:spPr/>
+      </p:sp>
+    </p:spTree>
+  </p:cSld>
+  <p:clrMapOvr>
+    <a:masterClrMapping/>
+  </p:clrMapOvr>
+</p:notes>
+</file>
+
+<file path=ppt/notesSlides/notesSlide22.xml><?xml version="1.0" encoding="utf-8"?>
+<p:notes xmlns:a="http://schemas.openxmlformats.org/drawingml/2006/main" xmlns:p="http://schemas.openxmlformats.org/presentationml/2006/main" xmlns:r="http://schemas.openxmlformats.org/officeDocument/2006/relationships">
+  <p:cSld>
+    <p:spTree>
+      <p:nvGrpSpPr>
+        <p:cNvPr id="1" name=""/>
+        <p:cNvGrpSpPr/>
+        <p:nvPr/>
+      </p:nvGrpSpPr>
+      <p:grpSpPr>
+        <a:xfrm>
+          <a:off x="0" y="0"/>
+          <a:ext cx="0" cy="0"/>
+          <a:chOff x="0" y="0"/>
+          <a:chExt cx="0" cy="0"/>
+        </a:xfrm>
+      </p:grpSpPr>
+      <p:sp>
+        <p:nvSpPr>
+          <p:cNvPr id="2" name="Slide Image Placeholder 1"/>
+          <p:cNvSpPr>
+            <a:spLocks noGrp="1"/>
+          </p:cNvSpPr>
+          <p:nvPr>
+            <p:ph type="sldImg" idx="2"/>
+          </p:nvPr>
+        </p:nvSpPr>
+        <p:spPr/>
+      </p:sp>
+      <p:sp>
+        <p:nvSpPr>
+          <p:cNvPr id="3" name="Notes Placeholder 2"/>
+          <p:cNvSpPr>
+            <a:spLocks noGrp="1"/>
+          </p:cNvSpPr>
+          <p:nvPr>
+            <p:ph type="body" idx="3" sz="quarter"/>
+          </p:nvPr>
+        </p:nvSpPr>
+        <p:spPr/>
+        <p:txBody>
+          <a:bodyPr/>
+          <a:lstStyle/>
+          <a:p>
+            <a:r>
+              <a:t>[설명] Complete는 정답 복사본이 아니라 막혔을 때 비교·복구하는 안전망이다.</a:t>
+            </a:r>
+          </a:p>
+          <a:p>
+            <a:r>
+              <a:t>[실행] cd ~/ros2_curri</a:t>
+            </a:r>
+          </a:p>
+          <a:p>
+            <a:r>
+              <a:t>diff -ru my_agv_ws/src blocks/C_drive_visualization/M10_ros_gz_bridge/complete/agv_ws/src || true</a:t>
+            </a:r>
+          </a:p>
+          <a:p>
+            <a:r>
+              <a:t>cp -a my_agv_ws/src my_agv_ws/src_before_M10</a:t>
+            </a:r>
+          </a:p>
+          <a:p>
+            <a:r>
+              <a:t>cp -a blocks/C_drive_visualization/M10_ros_gz_bridge/complete/agv_ws/src/. my_agv_ws/src/</a:t>
+            </a:r>
+          </a:p>
+          <a:p>
+            <a:r>
+              <a:t>cd my_agv_ws &amp;&amp; colcon build --symlink-install &amp;&amp; source install/setup.bash</a:t>
+            </a:r>
+          </a:p>
+          <a:p>
+            <a:r>
+              <a:t>[확인] diff에서 내 파일과 Complete의 차이를 설명할 수 있다.</a:t>
+            </a:r>
+          </a:p>
+          <a:p>
+            <a:r>
+              <a:t>[멈춤] 교육생이 현재 체크포인트를 통과할 때까지 기다린다.</a:t>
+            </a:r>
+          </a:p>
+          <a:p>
+            <a:r>
+              <a:t>[오류] 오류가 나면 현재 폴더, source, 파일 경로를 먼저 확인한다.</a:t>
+            </a:r>
+          </a:p>
+        </p:txBody>
+      </p:sp>
+      <p:sp>
+        <p:nvSpPr>
+          <p:cNvPr id="4" name="Slide Number Placeholder 3"/>
+          <p:cNvSpPr>
+            <a:spLocks noGrp="1"/>
+          </p:cNvSpPr>
+          <p:nvPr>
+            <p:ph type="sldNum" idx="5" sz="quarter"/>
+          </p:nvPr>
+        </p:nvSpPr>
+        <p:spPr/>
+      </p:sp>
+    </p:spTree>
+  </p:cSld>
+  <p:clrMapOvr>
+    <a:masterClrMapping/>
+  </p:clrMapOvr>
+</p:notes>
+</file>
+
+<file path=ppt/notesSlides/notesSlide23.xml><?xml version="1.0" encoding="utf-8"?>
+<p:notes xmlns:a="http://schemas.openxmlformats.org/drawingml/2006/main" xmlns:p="http://schemas.openxmlformats.org/presentationml/2006/main" xmlns:r="http://schemas.openxmlformats.org/officeDocument/2006/relationships">
+  <p:cSld>
+    <p:spTree>
+      <p:nvGrpSpPr>
+        <p:cNvPr id="1" name=""/>
+        <p:cNvGrpSpPr/>
+        <p:nvPr/>
+      </p:nvGrpSpPr>
+      <p:grpSpPr>
+        <a:xfrm>
+          <a:off x="0" y="0"/>
+          <a:ext cx="0" cy="0"/>
+          <a:chOff x="0" y="0"/>
+          <a:chExt cx="0" cy="0"/>
+        </a:xfrm>
+      </p:grpSpPr>
+      <p:sp>
+        <p:nvSpPr>
+          <p:cNvPr id="2" name="Slide Image Placeholder 1"/>
+          <p:cNvSpPr>
+            <a:spLocks noGrp="1"/>
+          </p:cNvSpPr>
+          <p:nvPr>
+            <p:ph type="sldImg" idx="2"/>
+          </p:nvPr>
+        </p:nvSpPr>
+        <p:spPr/>
+      </p:sp>
+      <p:sp>
+        <p:nvSpPr>
+          <p:cNvPr id="3" name="Notes Placeholder 2"/>
+          <p:cNvSpPr>
+            <a:spLocks noGrp="1"/>
+          </p:cNvSpPr>
+          <p:nvPr>
+            <p:ph type="body" idx="3" sz="quarter"/>
+          </p:nvPr>
+        </p:nvSpPr>
+        <p:spPr/>
+        <p:txBody>
+          <a:bodyPr/>
+          <a:lstStyle/>
+          <a:p>
+            <a:r>
+              <a:t>[설명] 교육생이 직접 한 값만 바꿔 원인과 결과를 연결하게 한다.</a:t>
+            </a:r>
+          </a:p>
+          <a:p>
+            <a:r>
+              <a:t>[실행] 슬라이드의 명령 또는 파일 작성 단계를 진행한다.</a:t>
+            </a:r>
+          </a:p>
+          <a:p>
+            <a:r>
+              <a:t>[확인] 원래 값과 변경 값을 모두 기록한다.</a:t>
+            </a:r>
+          </a:p>
+          <a:p>
+            <a:r>
+              <a:t>[멈춤] 교육생이 현재 체크포인트를 통과할 때까지 기다린다.</a:t>
+            </a:r>
+          </a:p>
+          <a:p>
+            <a:r>
+              <a:t>[오류] 오류가 나면 현재 폴더, source, 파일 경로를 먼저 확인한다.</a:t>
+            </a:r>
+          </a:p>
+        </p:txBody>
+      </p:sp>
+      <p:sp>
+        <p:nvSpPr>
+          <p:cNvPr id="4" name="Slide Number Placeholder 3"/>
+          <p:cNvSpPr>
+            <a:spLocks noGrp="1"/>
+          </p:cNvSpPr>
+          <p:nvPr>
+            <p:ph type="sldNum" idx="5" sz="quarter"/>
+          </p:nvPr>
+        </p:nvSpPr>
+        <p:spPr/>
+      </p:sp>
+    </p:spTree>
+  </p:cSld>
+  <p:clrMapOvr>
+    <a:masterClrMapping/>
+  </p:clrMapOvr>
+</p:notes>
+</file>
+
+<file path=ppt/notesSlides/notesSlide24.xml><?xml version="1.0" encoding="utf-8"?>
+<p:notes xmlns:a="http://schemas.openxmlformats.org/drawingml/2006/main" xmlns:p="http://schemas.openxmlformats.org/presentationml/2006/main" xmlns:r="http://schemas.openxmlformats.org/officeDocument/2006/relationships">
+  <p:cSld>
+    <p:spTree>
+      <p:nvGrpSpPr>
+        <p:cNvPr id="1" name=""/>
+        <p:cNvGrpSpPr/>
+        <p:nvPr/>
+      </p:nvGrpSpPr>
+      <p:grpSpPr>
+        <a:xfrm>
+          <a:off x="0" y="0"/>
+          <a:ext cx="0" cy="0"/>
+          <a:chOff x="0" y="0"/>
+          <a:chExt cx="0" cy="0"/>
+        </a:xfrm>
+      </p:grpSpPr>
+      <p:sp>
+        <p:nvSpPr>
+          <p:cNvPr id="2" name="Slide Image Placeholder 1"/>
+          <p:cNvSpPr>
+            <a:spLocks noGrp="1"/>
+          </p:cNvSpPr>
+          <p:nvPr>
+            <p:ph type="sldImg" idx="2"/>
+          </p:nvPr>
+        </p:nvSpPr>
+        <p:spPr/>
+      </p:sp>
+      <p:sp>
+        <p:nvSpPr>
+          <p:cNvPr id="3" name="Notes Placeholder 2"/>
+          <p:cNvSpPr>
+            <a:spLocks noGrp="1"/>
+          </p:cNvSpPr>
+          <p:nvPr>
+            <p:ph type="body" idx="3" sz="quarter"/>
+          </p:nvPr>
+        </p:nvSpPr>
+        <p:spPr/>
+        <p:txBody>
+          <a:bodyPr/>
+          <a:lstStyle/>
+          <a:p>
+            <a:r>
+              <a:t>[설명] 교육생이 자신의 workspace·캡처·로그를 저장했는지 확인하고 다음 모듈의 시작 상태를 읽는다.</a:t>
+            </a:r>
+          </a:p>
+          <a:p>
+            <a:r>
+              <a:t>[실행] 슬라이드의 명령 또는 파일 작성 단계를 진행한다.</a:t>
+            </a:r>
+          </a:p>
+          <a:p>
+            <a:r>
+              <a:t>[확인] M11 RViz2 시작 조건을 말할 수 있다.</a:t>
+            </a:r>
+          </a:p>
+          <a:p>
+            <a:r>
+              <a:t>[멈춤] 교육생이 현재 체크포인트를 통과할 때까지 기다린다.</a:t>
+            </a:r>
+          </a:p>
+          <a:p>
+            <a:r>
+              <a:t>[오류] 오류가 나면 현재 폴더, source, 파일 경로를 먼저 확인한다.</a:t>
+            </a:r>
+          </a:p>
+        </p:txBody>
+      </p:sp>
+      <p:sp>
+        <p:nvSpPr>
+          <p:cNvPr id="4" name="Slide Number Placeholder 3"/>
+          <p:cNvSpPr>
+            <a:spLocks noGrp="1"/>
+          </p:cNvSpPr>
+          <p:nvPr>
+            <p:ph type="sldNum" idx="5" sz="quarter"/>
+          </p:nvPr>
+        </p:nvSpPr>
+        <p:spPr/>
+      </p:sp>
+    </p:spTree>
+  </p:cSld>
+  <p:clrMapOvr>
+    <a:masterClrMapping/>
+  </p:clrMapOvr>
+</p:notes>
+</file>
+
+<file path=ppt/notesSlides/notesSlide25.xml><?xml version="1.0" encoding="utf-8"?>
+<p:notes xmlns:a="http://schemas.openxmlformats.org/drawingml/2006/main" xmlns:p="http://schemas.openxmlformats.org/presentationml/2006/main" xmlns:r="http://schemas.openxmlformats.org/officeDocument/2006/relationships">
+  <p:cSld>
+    <p:spTree>
+      <p:nvGrpSpPr>
+        <p:cNvPr id="1" name=""/>
+        <p:cNvGrpSpPr/>
+        <p:nvPr/>
+      </p:nvGrpSpPr>
+      <p:grpSpPr>
+        <a:xfrm>
+          <a:off x="0" y="0"/>
+          <a:ext cx="0" cy="0"/>
+          <a:chOff x="0" y="0"/>
+          <a:chExt cx="0" cy="0"/>
+        </a:xfrm>
+      </p:grpSpPr>
+      <p:sp>
+        <p:nvSpPr>
+          <p:cNvPr id="2" name="Slide Image Placeholder 1"/>
+          <p:cNvSpPr>
+            <a:spLocks noGrp="1"/>
+          </p:cNvSpPr>
+          <p:nvPr>
+            <p:ph type="sldImg" idx="2"/>
+          </p:nvPr>
+        </p:nvSpPr>
+        <p:spPr/>
+      </p:sp>
+      <p:sp>
+        <p:nvSpPr>
+          <p:cNvPr id="3" name="Notes Placeholder 2"/>
+          <p:cNvSpPr>
+            <a:spLocks noGrp="1"/>
+          </p:cNvSpPr>
+          <p:nvPr>
+            <p:ph type="body" idx="3" sz="quarter"/>
+          </p:nvPr>
+        </p:nvSpPr>
+        <p:spPr/>
+        <p:txBody>
+          <a:bodyPr/>
+          <a:lstStyle/>
+          <a:p>
+            <a:r>
               <a:t>[설명] 공식 문서는 버전 차이와 확장 학습을 확인할 때 사용한다.</a:t>
             </a:r>
           </a:p>
@@ -1797,7 +2201,7 @@
           </a:p>
           <a:p>
             <a:r>
-              <a:t>[실행] pwd; source /opt/ros/jazzy/setup.bash; source ~/ros2_curri/agv_ws/install/setup.bash</a:t>
+              <a:t>[실행] pwd; source /opt/ros/jazzy/setup.bash; source ~/ros2_curri/my_agv_ws/install/setup.bash</a:t>
             </a:r>
           </a:p>
           <a:p>
@@ -1972,7 +2376,7 @@
           <a:lstStyle/>
           <a:p>
             <a:r>
-              <a:t>[설명] 도식의 각 상자가 무엇을 만들고 화살표가 어떤 방향으로 데이터를 보내는지 설명한다.</a:t>
+              <a:t>[설명] 이 모듈이 전체 AGV 프로젝트에 추가하는 기능을 먼저 선언한다.</a:t>
             </a:r>
           </a:p>
           <a:p>
@@ -1982,7 +2386,7 @@
           </a:p>
           <a:p>
             <a:r>
-              <a:t>[확인] 교육생이 왼쪽에서 오른쪽(또는 제어 방향)으로 흐름을 말할 수 있다.</a:t>
+              <a:t>[확인] /cmd_vel ROS→Gazebo 및 odom/scan/imu/camera/clock Gazebo→ROS 매핑을 확인한다.</a:t>
             </a:r>
           </a:p>
           <a:p>
@@ -2062,7 +2466,7 @@
           <a:lstStyle/>
           <a:p>
             <a:r>
-              <a:t>[설명] 실제 파일 경로를 보여 주고 어떤 package의 책임인지 설명한다.</a:t>
+              <a:t>[설명] 도식의 각 상자가 무엇을 만들고 화살표가 어떤 방향으로 데이터를 보내는지 설명한다.</a:t>
             </a:r>
           </a:p>
           <a:p>
@@ -2072,7 +2476,7 @@
           </a:p>
           <a:p>
             <a:r>
-              <a:t>[확인] 교육생이 파일의 부모 package를 찾을 수 있다.</a:t>
+              <a:t>[확인] 교육생이 왼쪽에서 오른쪽(또는 제어 방향)으로 흐름을 말할 수 있다.</a:t>
             </a:r>
           </a:p>
           <a:p>
@@ -2152,7 +2556,7 @@
           <a:lstStyle/>
           <a:p>
             <a:r>
-              <a:t>[설명] 파일을 코드 문법보다 먼저 역할·사용법·확인 화면으로 설명한다.</a:t>
+              <a:t>[설명] 실제 파일 경로를 보여 주고 어떤 package의 책임인지 설명한다.</a:t>
             </a:r>
           </a:p>
           <a:p>
@@ -2162,7 +2566,7 @@
           </a:p>
           <a:p>
             <a:r>
-              <a:t>[확인] 교육생이 각 파일의 산출물과 확인 위치를 말할 수 있다.</a:t>
+              <a:t>[확인] 교육생이 파일의 부모 package를 찾을 수 있다.</a:t>
             </a:r>
           </a:p>
           <a:p>
@@ -2242,22 +2646,17 @@
           <a:lstStyle/>
           <a:p>
             <a:r>
-              <a:t>[설명] 방향과 양쪽 message type을 한 topic마다 정확히 적는다.</a:t>
-            </a:r>
-          </a:p>
-          <a:p>
-            <a:r>
-              <a:t>[실행] cd ~/ros2_curri/agv_ws</a:t>
-            </a:r>
-          </a:p>
-          <a:p>
-            <a:r>
-              <a:t>nano src/agv_gazebo/config/bridge.yaml</a:t>
-            </a:r>
-          </a:p>
-          <a:p>
-            <a:r>
-              <a:t>[확인] 명령 출력에서 슬라이드의 확인 항목을 찾는다.</a:t>
+              <a:t>[설명] 파일을 코드 문법보다 먼저 역할·사용법·확인 화면으로 설명한다.</a:t>
+            </a:r>
+          </a:p>
+          <a:p>
+            <a:r>
+              <a:t>[실행] 슬라이드의 명령 또는 파일 작성 단계를 진행한다.</a:t>
+            </a:r>
+          </a:p>
+          <a:p>
+            <a:r>
+              <a:t>[확인] 교육생이 각 파일의 산출물과 확인 위치를 말할 수 있다.</a:t>
             </a:r>
           </a:p>
           <a:p>
@@ -2337,27 +2736,22 @@
           <a:lstStyle/>
           <a:p>
             <a:r>
-              <a:t>[설명] config_file은 package share 경로에서 찾도록 launch에 넣는다.</a:t>
-            </a:r>
-          </a:p>
-          <a:p>
-            <a:r>
-              <a:t>[실행] colcon build --symlink-install --packages-select agv_gazebo</a:t>
-            </a:r>
-          </a:p>
-          <a:p>
-            <a:r>
-              <a:t>source install/setup.bash</a:t>
-            </a:r>
-          </a:p>
-          <a:p>
-            <a:r>
-              <a:t>ros2 launch agv_gazebo gazebo.launch.py</a:t>
-            </a:r>
-          </a:p>
-          <a:p>
-            <a:r>
-              <a:t>[확인] 명령 출력에서 슬라이드의 확인 항목을 찾는다.</a:t>
+              <a:t>[설명] Gazebo Transport 메시지와 ROS 2 topic을 방향별로 연결하는 번역표</a:t>
+            </a:r>
+          </a:p>
+          <a:p>
+            <a:r>
+              <a:t>[실행] mkdir -p ~/ros2_curri/my_agv_ws/src/agv_gazebo/config</a:t>
+            </a:r>
+          </a:p>
+          <a:p>
+            <a:r>
+              <a:t>nano ~/ros2_curri/my_agv_ws/src/agv_gazebo/config/bridge.yaml</a:t>
+            </a:r>
+          </a:p>
+          <a:p>
+            <a:r>
+              <a:t>[확인] 빈 파일을 연 뒤 다음 코드 입력 슬라이드로 간다.</a:t>
             </a:r>
           </a:p>
           <a:p>
@@ -5605,7 +5999,7 @@
               </a:defRPr>
             </a:pPr>
             <a:r>
-              <a:t>이 PPT만 보고 시작 상태 → 파일 작성 → build/run → 검증 → 오류 대응 → checkpoint를 순서대로 수행합니다.</a:t>
+              <a:t>이 PPT에서 폴더 생성 → 빈 파일 열기 → 코드 입력·저장 → build/run → 검증을 직접 반복합니다.</a:t>
             </a:r>
           </a:p>
         </p:txBody>
@@ -5740,7 +6134,7 @@
               </a:defRPr>
             </a:pPr>
             <a:r>
-              <a:t>파일을 새로 만들고 저장한다 (1/3)</a:t>
+              <a:t>구현 1/2: 코드 입력 (1/3)</a:t>
             </a:r>
           </a:p>
         </p:txBody>
@@ -5779,7 +6173,7 @@
               </a:defRPr>
             </a:pPr>
             <a:r>
-              <a:t>~/ros2_curri/agv_ws/src/agv_gazebo/config/bridge.yaml</a:t>
+              <a:t>~/ros2_curri/my_agv_ws/src/agv_gazebo/config/bridge.yaml</a:t>
             </a:r>
           </a:p>
         </p:txBody>
@@ -5915,7 +6309,7 @@
               </a:defRPr>
             </a:pPr>
             <a:r>
-              <a:t>현재 단계 3/6    |    현재 폴더 ~/ros2_curri/agv_ws    |    현재 터미널</a:t>
+              <a:t>현재 단계 파일 1/2 · 입력 1/3    |    현재 폴더 ~/ros2_curri/my_agv_ws    |    현재 터미널</a:t>
             </a:r>
           </a:p>
         </p:txBody>
@@ -5928,8 +6322,8 @@
         </p:nvSpPr>
         <p:spPr>
           <a:xfrm>
-            <a:off x="658368" y="1627632"/>
-            <a:ext cx="10972800" cy="256032"/>
+            <a:off x="658368" y="1609344"/>
+            <a:ext cx="10972800" cy="384048"/>
           </a:xfrm>
           <a:prstGeom prst="rect">
             <a:avLst/>
@@ -5946,7 +6340,7 @@
               <a:spcAft>
                 <a:spcPts val="0"/>
               </a:spcAft>
-              <a:defRPr sz="1500" b="1">
+              <a:defRPr sz="1400" b="1">
                 <a:solidFill>
                   <a:srgbClr val="122C4E"/>
                 </a:solidFill>
@@ -5954,7 +6348,7 @@
               </a:defRPr>
             </a:pPr>
             <a:r>
-              <a:t>이번 단계: 파일의 전체 내용을 중간 생략 없이 작성합니다. 아래 줄 범위를 끝까지 입력하세요.</a:t>
+              <a:t>이 블록이 하는 일: 들여쓰기와 key 이름을 그대로 입력합니다. 설정 이름은 launch·코드가 찾는 이름과 같아야 합니다.</a:t>
             </a:r>
           </a:p>
         </p:txBody>
@@ -6004,7 +6398,7 @@
               <a:spcAft>
                 <a:spcPts val="0"/>
               </a:spcAft>
-              <a:defRPr sz="1400" b="0">
+              <a:defRPr sz="1300" b="0">
                 <a:solidFill>
                   <a:srgbClr val="122C4E"/>
                 </a:solidFill>
@@ -6012,11 +6406,11 @@
               </a:defRPr>
             </a:pPr>
             <a:r>
-              <a:t>파일 생성: mkdir -p ~/ros2_curri/agv_ws/src/agv_gazebo/config</a:t>
+              <a:t>현재 열린 파일: ~/ros2_curri/my_agv_ws/src/agv_gazebo/config/bridge.yaml</a:t>
             </a:r>
             <a:br/>
             <a:r>
-              <a:t>파일 열기: nano ~/ros2_curri/agv_ws/src/agv_gazebo/config/bridge.yaml</a:t>
+              <a:t>아래 코드만 입력 → Ctrl+O → Enter로 저장 → 다음 블록으로 이동</a:t>
             </a:r>
           </a:p>
         </p:txBody>
@@ -6157,7 +6551,7 @@
               </a:defRPr>
             </a:pPr>
             <a:r>
-              <a:t>파일 전체 1/3 · 이 슬라이드 다음에 같은 파일의 나머지 줄이 이어집니다.</a:t>
+              <a:t>입력 1/3 · 이 파일의 다음 코드 블록이 바로 다음 슬라이드에 이어집니다.</a:t>
             </a:r>
           </a:p>
         </p:txBody>
@@ -6214,7 +6608,7 @@
               </a:defRPr>
             </a:pPr>
             <a:r>
-              <a:t>파일을 계속 작성하고 저장한다 (2/3)</a:t>
+              <a:t>구현 1/2: 코드 입력 (2/3)</a:t>
             </a:r>
           </a:p>
         </p:txBody>
@@ -6253,7 +6647,7 @@
               </a:defRPr>
             </a:pPr>
             <a:r>
-              <a:t>~/ros2_curri/agv_ws/src/agv_gazebo/config/bridge.yaml</a:t>
+              <a:t>~/ros2_curri/my_agv_ws/src/agv_gazebo/config/bridge.yaml</a:t>
             </a:r>
           </a:p>
         </p:txBody>
@@ -6389,7 +6783,7 @@
               </a:defRPr>
             </a:pPr>
             <a:r>
-              <a:t>현재 단계 4/6    |    현재 폴더 ~/ros2_curri/agv_ws    |    현재 터미널</a:t>
+              <a:t>현재 단계 파일 1/2 · 입력 2/3    |    현재 폴더 ~/ros2_curri/my_agv_ws    |    현재 터미널</a:t>
             </a:r>
           </a:p>
         </p:txBody>
@@ -6402,8 +6796,8 @@
         </p:nvSpPr>
         <p:spPr>
           <a:xfrm>
-            <a:off x="658368" y="1627632"/>
-            <a:ext cx="10972800" cy="256032"/>
+            <a:off x="658368" y="1609344"/>
+            <a:ext cx="10972800" cy="384048"/>
           </a:xfrm>
           <a:prstGeom prst="rect">
             <a:avLst/>
@@ -6420,7 +6814,7 @@
               <a:spcAft>
                 <a:spcPts val="0"/>
               </a:spcAft>
-              <a:defRPr sz="1500" b="1">
+              <a:defRPr sz="1400" b="1">
                 <a:solidFill>
                   <a:srgbClr val="122C4E"/>
                 </a:solidFill>
@@ -6428,7 +6822,7 @@
               </a:defRPr>
             </a:pPr>
             <a:r>
-              <a:t>이번 단계: 파일의 전체 내용을 중간 생략 없이 작성합니다. 아래 줄 범위를 끝까지 입력하세요.</a:t>
+              <a:t>이 블록이 하는 일: 들여쓰기와 key 이름을 그대로 입력합니다. 설정 이름은 launch·코드가 찾는 이름과 같아야 합니다.</a:t>
             </a:r>
           </a:p>
         </p:txBody>
@@ -6478,7 +6872,7 @@
               <a:spcAft>
                 <a:spcPts val="0"/>
               </a:spcAft>
-              <a:defRPr sz="1400" b="0">
+              <a:defRPr sz="1300" b="0">
                 <a:solidFill>
                   <a:srgbClr val="122C4E"/>
                 </a:solidFill>
@@ -6486,11 +6880,11 @@
               </a:defRPr>
             </a:pPr>
             <a:r>
-              <a:t>파일 생성: mkdir -p ~/ros2_curri/agv_ws/src/agv_gazebo/config</a:t>
+              <a:t>현재 열린 파일: ~/ros2_curri/my_agv_ws/src/agv_gazebo/config/bridge.yaml</a:t>
             </a:r>
             <a:br/>
             <a:r>
-              <a:t>파일 열기: nano ~/ros2_curri/agv_ws/src/agv_gazebo/config/bridge.yaml</a:t>
+              <a:t>아래 코드만 입력 → Ctrl+O → Enter로 저장 → 다음 블록으로 이동</a:t>
             </a:r>
           </a:p>
         </p:txBody>
@@ -6631,7 +7025,7 @@
               </a:defRPr>
             </a:pPr>
             <a:r>
-              <a:t>파일 전체 2/3 · 이 슬라이드 다음에 같은 파일의 나머지 줄이 이어집니다.</a:t>
+              <a:t>입력 2/3 · 이 파일의 다음 코드 블록이 바로 다음 슬라이드에 이어집니다.</a:t>
             </a:r>
           </a:p>
         </p:txBody>
@@ -6688,7 +7082,7 @@
               </a:defRPr>
             </a:pPr>
             <a:r>
-              <a:t>파일을 계속 작성하고 저장한다 (3/3)</a:t>
+              <a:t>구현 1/2: 코드 입력 (3/3)</a:t>
             </a:r>
           </a:p>
         </p:txBody>
@@ -6727,7 +7121,7 @@
               </a:defRPr>
             </a:pPr>
             <a:r>
-              <a:t>~/ros2_curri/agv_ws/src/agv_gazebo/config/bridge.yaml</a:t>
+              <a:t>~/ros2_curri/my_agv_ws/src/agv_gazebo/config/bridge.yaml</a:t>
             </a:r>
           </a:p>
         </p:txBody>
@@ -6863,7 +7257,7 @@
               </a:defRPr>
             </a:pPr>
             <a:r>
-              <a:t>현재 단계 5/6    |    현재 폴더 ~/ros2_curri/agv_ws    |    현재 터미널</a:t>
+              <a:t>현재 단계 파일 1/2 · 입력 3/3    |    현재 폴더 ~/ros2_curri/my_agv_ws    |    현재 터미널</a:t>
             </a:r>
           </a:p>
         </p:txBody>
@@ -6876,8 +7270,8 @@
         </p:nvSpPr>
         <p:spPr>
           <a:xfrm>
-            <a:off x="658368" y="1627632"/>
-            <a:ext cx="10972800" cy="256032"/>
+            <a:off x="658368" y="1609344"/>
+            <a:ext cx="10972800" cy="384048"/>
           </a:xfrm>
           <a:prstGeom prst="rect">
             <a:avLst/>
@@ -6894,7 +7288,7 @@
               <a:spcAft>
                 <a:spcPts val="0"/>
               </a:spcAft>
-              <a:defRPr sz="1500" b="1">
+              <a:defRPr sz="1400" b="1">
                 <a:solidFill>
                   <a:srgbClr val="122C4E"/>
                 </a:solidFill>
@@ -6902,7 +7296,7 @@
               </a:defRPr>
             </a:pPr>
             <a:r>
-              <a:t>이번 단계: 파일의 전체 내용을 중간 생략 없이 작성합니다. 아래 줄 범위를 끝까지 입력하세요.</a:t>
+              <a:t>이 블록이 하는 일: 들여쓰기와 key 이름을 그대로 입력합니다. 설정 이름은 launch·코드가 찾는 이름과 같아야 합니다.</a:t>
             </a:r>
           </a:p>
         </p:txBody>
@@ -6952,7 +7346,7 @@
               <a:spcAft>
                 <a:spcPts val="0"/>
               </a:spcAft>
-              <a:defRPr sz="1400" b="0">
+              <a:defRPr sz="1300" b="0">
                 <a:solidFill>
                   <a:srgbClr val="122C4E"/>
                 </a:solidFill>
@@ -6960,11 +7354,11 @@
               </a:defRPr>
             </a:pPr>
             <a:r>
-              <a:t>파일 생성: mkdir -p ~/ros2_curri/agv_ws/src/agv_gazebo/config</a:t>
+              <a:t>현재 열린 파일: ~/ros2_curri/my_agv_ws/src/agv_gazebo/config/bridge.yaml</a:t>
             </a:r>
             <a:br/>
             <a:r>
-              <a:t>파일 열기: nano ~/ros2_curri/agv_ws/src/agv_gazebo/config/bridge.yaml</a:t>
+              <a:t>아래 코드만 입력 → Ctrl+O → Enter로 저장 → 다음 블록으로 이동</a:t>
             </a:r>
           </a:p>
         </p:txBody>
@@ -7081,7 +7475,7 @@
               </a:defRPr>
             </a:pPr>
             <a:r>
-              <a:t>파일 전체 3/3 · 이 슬라이드 다음에 같은 파일의 나머지 줄이 이어집니다.</a:t>
+              <a:t>입력 3/3 · 이 파일의 다음 코드 블록이 바로 다음 슬라이드에 이어집니다.</a:t>
             </a:r>
           </a:p>
         </p:txBody>
@@ -7138,7 +7532,7 @@
               </a:defRPr>
             </a:pPr>
             <a:r>
-              <a:t>파일을 새로 만들고 저장한다 (1/2)</a:t>
+              <a:t>구현 2/2: 폴더를 만들고 빈 파일을 연다</a:t>
             </a:r>
           </a:p>
         </p:txBody>
@@ -7177,7 +7571,7 @@
               </a:defRPr>
             </a:pPr>
             <a:r>
-              <a:t>~/ros2_curri/agv_ws/src/agv_gazebo/launch/gazebo.launch.py</a:t>
+              <a:t>파일을 먼저 만든 뒤, 다음 슬라이드의 코드 블록을 위에서 아래로 직접 입력합니다.</a:t>
             </a:r>
           </a:p>
         </p:txBody>
@@ -7313,7 +7707,7 @@
               </a:defRPr>
             </a:pPr>
             <a:r>
-              <a:t>현재 단계 6/8    |    현재 폴더 ~/ros2_curri/agv_ws    |    현재 터미널</a:t>
+              <a:t>현재 단계 파일 생성 2/2    |    현재 폴더 ~/ros2_curri/my_agv_ws    |    현재 터미널</a:t>
             </a:r>
           </a:p>
         </p:txBody>
@@ -7326,8 +7720,8 @@
         </p:nvSpPr>
         <p:spPr>
           <a:xfrm>
-            <a:off x="658368" y="1627632"/>
-            <a:ext cx="10972800" cy="256032"/>
+            <a:off x="685800" y="1719072"/>
+            <a:ext cx="1417320" cy="256032"/>
           </a:xfrm>
           <a:prstGeom prst="rect">
             <a:avLst/>
@@ -7344,93 +7738,148 @@
               <a:spcAft>
                 <a:spcPts val="0"/>
               </a:spcAft>
-              <a:defRPr sz="1500" b="1">
+              <a:defRPr sz="1800" b="1">
+                <a:solidFill>
+                  <a:srgbClr val="225B9B"/>
+                </a:solidFill>
+                <a:latin typeface="Noto Sans CJK KR"/>
+              </a:defRPr>
+            </a:pPr>
+            <a:r>
+              <a:t>이번 파일</a:t>
+            </a:r>
+          </a:p>
+        </p:txBody>
+      </p:sp>
+      <p:sp>
+        <p:nvSpPr>
+          <p:cNvPr id="8" name="TextBox 7"/>
+          <p:cNvSpPr txBox="1"/>
+          <p:nvPr/>
+        </p:nvSpPr>
+        <p:spPr>
+          <a:xfrm>
+            <a:off x="1920240" y="1719072"/>
+            <a:ext cx="9235440" cy="274320"/>
+          </a:xfrm>
+          <a:prstGeom prst="rect">
+            <a:avLst/>
+          </a:prstGeom>
+          <a:noFill/>
+        </p:spPr>
+        <p:txBody>
+          <a:bodyPr wrap="square" lIns="73152" rIns="73152" tIns="36576" bIns="36576">
+            <a:spAutoFit/>
+          </a:bodyPr>
+          <a:lstStyle/>
+          <a:p>
+            <a:pPr algn="l">
+              <a:spcAft>
+                <a:spcPts val="0"/>
+              </a:spcAft>
+              <a:defRPr sz="1400" b="1">
                 <a:solidFill>
                   <a:srgbClr val="122C4E"/>
                 </a:solidFill>
-                <a:latin typeface="Noto Sans CJK KR"/>
-              </a:defRPr>
-            </a:pPr>
-            <a:r>
-              <a:t>이번 단계: 파일의 전체 내용을 중간 생략 없이 작성합니다. 아래 줄 범위를 끝까지 입력하세요.</a:t>
-            </a:r>
-          </a:p>
-        </p:txBody>
-      </p:sp>
-      <p:sp>
-        <p:nvSpPr>
-          <p:cNvPr id="8" name="Rectangle 7"/>
+                <a:latin typeface="DejaVu Sans Mono"/>
+              </a:defRPr>
+            </a:pPr>
+            <a:r>
+              <a:t>~/ros2_curri/my_agv_ws/src/agv_gazebo/launch/gazebo.launch.py</a:t>
+            </a:r>
+          </a:p>
+        </p:txBody>
+      </p:sp>
+      <p:sp>
+        <p:nvSpPr>
+          <p:cNvPr id="9" name="TextBox 8"/>
+          <p:cNvSpPr txBox="1"/>
+          <p:nvPr/>
+        </p:nvSpPr>
+        <p:spPr>
+          <a:xfrm>
+            <a:off x="685800" y="2103120"/>
+            <a:ext cx="1417320" cy="256032"/>
+          </a:xfrm>
+          <a:prstGeom prst="rect">
+            <a:avLst/>
+          </a:prstGeom>
+          <a:noFill/>
+        </p:spPr>
+        <p:txBody>
+          <a:bodyPr wrap="square" lIns="73152" rIns="73152" tIns="36576" bIns="36576">
+            <a:spAutoFit/>
+          </a:bodyPr>
+          <a:lstStyle/>
+          <a:p>
+            <a:pPr algn="l">
+              <a:spcAft>
+                <a:spcPts val="0"/>
+              </a:spcAft>
+              <a:defRPr sz="1800" b="1">
+                <a:solidFill>
+                  <a:srgbClr val="2A8B5A"/>
+                </a:solidFill>
+                <a:latin typeface="Noto Sans CJK KR"/>
+              </a:defRPr>
+            </a:pPr>
+            <a:r>
+              <a:t>만드는 것</a:t>
+            </a:r>
+          </a:p>
+        </p:txBody>
+      </p:sp>
+      <p:sp>
+        <p:nvSpPr>
+          <p:cNvPr id="10" name="TextBox 9"/>
+          <p:cNvSpPr txBox="1"/>
+          <p:nvPr/>
+        </p:nvSpPr>
+        <p:spPr>
+          <a:xfrm>
+            <a:off x="1920240" y="2103120"/>
+            <a:ext cx="9235440" cy="438912"/>
+          </a:xfrm>
+          <a:prstGeom prst="rect">
+            <a:avLst/>
+          </a:prstGeom>
+          <a:noFill/>
+        </p:spPr>
+        <p:txBody>
+          <a:bodyPr wrap="square" lIns="73152" rIns="73152" tIns="36576" bIns="36576">
+            <a:spAutoFit/>
+          </a:bodyPr>
+          <a:lstStyle/>
+          <a:p>
+            <a:pPr algn="l">
+              <a:spcAft>
+                <a:spcPts val="0"/>
+              </a:spcAft>
+              <a:defRPr sz="1700" b="0">
+                <a:solidFill>
+                  <a:srgbClr val="122C4E"/>
+                </a:solidFill>
+                <a:latin typeface="Noto Sans CJK KR"/>
+              </a:defRPr>
+            </a:pPr>
+            <a:r>
+              <a:t>여러 ROS 2 node를 시작 순서대로 조립하는 launch 파일</a:t>
+            </a:r>
+          </a:p>
+        </p:txBody>
+      </p:sp>
+      <p:sp>
+        <p:nvSpPr>
+          <p:cNvPr id="11" name="Rounded Rectangle 10"/>
           <p:cNvSpPr/>
           <p:nvPr/>
         </p:nvSpPr>
         <p:spPr>
           <a:xfrm>
-            <a:off x="658368" y="1956816"/>
-            <a:ext cx="10972800" cy="603504"/>
-          </a:xfrm>
-          <a:prstGeom prst="rect">
-            <a:avLst/>
-          </a:prstGeom>
-          <a:solidFill>
-            <a:srgbClr val="F4F7FB"/>
-          </a:solidFill>
-          <a:ln>
-            <a:solidFill>
-              <a:srgbClr val="F4F7FB"/>
-            </a:solidFill>
-          </a:ln>
-        </p:spPr>
-        <p:style>
-          <a:lnRef idx="1">
-            <a:schemeClr val="accent1"/>
-          </a:lnRef>
-          <a:fillRef idx="3">
-            <a:schemeClr val="accent1"/>
-          </a:fillRef>
-          <a:effectRef idx="2">
-            <a:schemeClr val="accent1"/>
-          </a:effectRef>
-          <a:fontRef idx="minor">
-            <a:schemeClr val="lt1"/>
-          </a:fontRef>
-        </p:style>
-        <p:txBody>
-          <a:bodyPr rtlCol="0" anchor="ctr" wrap="square" lIns="73152" rIns="73152" tIns="36576" bIns="36576"/>
-          <a:lstStyle/>
-          <a:p>
-            <a:pPr algn="l">
-              <a:spcAft>
-                <a:spcPts val="0"/>
-              </a:spcAft>
-              <a:defRPr sz="1400" b="0">
-                <a:solidFill>
-                  <a:srgbClr val="122C4E"/>
-                </a:solidFill>
-                <a:latin typeface="DejaVu Sans Mono"/>
-              </a:defRPr>
-            </a:pPr>
-            <a:r>
-              <a:t>파일 생성: mkdir -p ~/ros2_curri/agv_ws/src/agv_gazebo/launch</a:t>
-            </a:r>
-            <a:br/>
-            <a:r>
-              <a:t>파일 열기: nano ~/ros2_curri/agv_ws/src/agv_gazebo/launch/gazebo.launch.py</a:t>
-            </a:r>
-          </a:p>
-        </p:txBody>
-      </p:sp>
-      <p:sp>
-        <p:nvSpPr>
-          <p:cNvPr id="9" name="Rectangle 8"/>
-          <p:cNvSpPr/>
-          <p:nvPr/>
-        </p:nvSpPr>
-        <p:spPr>
-          <a:xfrm>
-            <a:off x="658368" y="2706624"/>
-            <a:ext cx="10972800" cy="3364992"/>
-          </a:xfrm>
-          <a:prstGeom prst="rect">
+            <a:off x="676656" y="2852928"/>
+            <a:ext cx="10881360" cy="1682496"/>
+          </a:xfrm>
+          <a:prstGeom prst="roundRect">
             <a:avLst/>
           </a:prstGeom>
           <a:solidFill>
@@ -7457,14 +7906,14 @@
           </a:fontRef>
         </p:style>
         <p:txBody>
-          <a:bodyPr rtlCol="0" anchor="ctr" wrap="square" lIns="164592" rIns="164592" tIns="109728" bIns="36576"/>
+          <a:bodyPr rtlCol="0" anchor="ctr" wrap="square" lIns="73152" rIns="73152" tIns="36576" bIns="36576"/>
           <a:lstStyle/>
           <a:p>
             <a:pPr algn="l">
               <a:spcAft>
                 <a:spcPts val="0"/>
               </a:spcAft>
-              <a:defRPr sz="1400" b="0">
+              <a:defRPr sz="1600" b="0">
                 <a:solidFill>
                   <a:srgbClr val="FFFFFF"/>
                 </a:solidFill>
@@ -7472,87 +7921,89 @@
               </a:defRPr>
             </a:pPr>
             <a:r>
-              <a:t>import os</a:t>
+              <a:t>mkdir -p ~/ros2_curri/my_agv_ws/src/agv_gazebo/launch</a:t>
             </a:r>
             <a:br/>
             <a:r>
-              <a:t>from ament_index_python.packages import get_package_share_directory</a:t>
-            </a:r>
-            <a:br/>
-            <a:r>
-              <a:t>from launch import LaunchDescription</a:t>
-            </a:r>
-            <a:br/>
-            <a:r>
-              <a:t>from launch.actions import IncludeLaunchDescription, SetEnvironmentVariable</a:t>
-            </a:r>
-            <a:br/>
-            <a:r>
-              <a:t>from launch.launch_description_sources import PythonLaunchDescriptionSource</a:t>
-            </a:r>
-            <a:br/>
-            <a:r>
-              <a:t>from launch_ros.actions import Node</a:t>
-            </a:r>
-            <a:br/>
-            <a:br/>
-            <a:r>
-              <a:t>def generate_launch_description():</a:t>
-            </a:r>
-            <a:br/>
-            <a:r>
-              <a:t>    share = get_package_share_directory('agv_gazebo')</a:t>
-            </a:r>
-            <a:br/>
-            <a:r>
-              <a:t>    world = os.path.join(share, 'worlds', 'warehouse.sdf')</a:t>
-            </a:r>
-            <a:br/>
-            <a:r>
-              <a:t>    models = os.path.join(share, 'models')</a:t>
-            </a:r>
-            <a:br/>
-            <a:r>
-              <a:t>    previous = os.environ.get('GZ_SIM_RESOURCE_PATH', '')</a:t>
-            </a:r>
-          </a:p>
-        </p:txBody>
-      </p:sp>
-      <p:sp>
-        <p:nvSpPr>
-          <p:cNvPr id="10" name="TextBox 9"/>
-          <p:cNvSpPr txBox="1"/>
-          <p:nvPr/>
-        </p:nvSpPr>
-        <p:spPr>
-          <a:xfrm>
-            <a:off x="749808" y="6181344"/>
-            <a:ext cx="10789920" cy="201168"/>
-          </a:xfrm>
-          <a:prstGeom prst="rect">
-            <a:avLst/>
-          </a:prstGeom>
-          <a:noFill/>
-        </p:spPr>
-        <p:txBody>
-          <a:bodyPr wrap="square" lIns="73152" rIns="73152" tIns="36576" bIns="36576">
-            <a:spAutoFit/>
-          </a:bodyPr>
-          <a:lstStyle/>
-          <a:p>
-            <a:pPr algn="l">
-              <a:spcAft>
-                <a:spcPts val="0"/>
-              </a:spcAft>
-              <a:defRPr sz="1000" b="0">
-                <a:solidFill>
-                  <a:srgbClr val="5C6672"/>
-                </a:solidFill>
-                <a:latin typeface="Noto Sans CJK KR"/>
-              </a:defRPr>
-            </a:pPr>
-            <a:r>
-              <a:t>파일 전체 1/2 · 이 슬라이드 다음에 같은 파일의 나머지 줄이 이어집니다.</a:t>
+              <a:t>nano ~/ros2_curri/my_agv_ws/src/agv_gazebo/launch/gazebo.launch.py</a:t>
+            </a:r>
+          </a:p>
+        </p:txBody>
+      </p:sp>
+      <p:sp>
+        <p:nvSpPr>
+          <p:cNvPr id="12" name="TextBox 11"/>
+          <p:cNvSpPr txBox="1"/>
+          <p:nvPr/>
+        </p:nvSpPr>
+        <p:spPr>
+          <a:xfrm>
+            <a:off x="804672" y="4901184"/>
+            <a:ext cx="10241280" cy="329184"/>
+          </a:xfrm>
+          <a:prstGeom prst="rect">
+            <a:avLst/>
+          </a:prstGeom>
+          <a:noFill/>
+        </p:spPr>
+        <p:txBody>
+          <a:bodyPr wrap="square" lIns="73152" rIns="73152" tIns="36576" bIns="36576">
+            <a:spAutoFit/>
+          </a:bodyPr>
+          <a:lstStyle/>
+          <a:p>
+            <a:pPr algn="ctr">
+              <a:spcAft>
+                <a:spcPts val="0"/>
+              </a:spcAft>
+              <a:defRPr sz="1600" b="1">
+                <a:solidFill>
+                  <a:srgbClr val="DB7E22"/>
+                </a:solidFill>
+                <a:latin typeface="Noto Sans CJK KR"/>
+              </a:defRPr>
+            </a:pPr>
+            <a:r>
+              <a:t>nano 저장: Ctrl+O → Enter → Ctrl+X  |  파일이 열리면 아직 비어 있는 것이 정상입니다.</a:t>
+            </a:r>
+          </a:p>
+        </p:txBody>
+      </p:sp>
+      <p:sp>
+        <p:nvSpPr>
+          <p:cNvPr id="13" name="TextBox 12"/>
+          <p:cNvSpPr txBox="1"/>
+          <p:nvPr/>
+        </p:nvSpPr>
+        <p:spPr>
+          <a:xfrm>
+            <a:off x="804672" y="5504688"/>
+            <a:ext cx="10241280" cy="329184"/>
+          </a:xfrm>
+          <a:prstGeom prst="rect">
+            <a:avLst/>
+          </a:prstGeom>
+          <a:noFill/>
+        </p:spPr>
+        <p:txBody>
+          <a:bodyPr wrap="square" lIns="73152" rIns="73152" tIns="36576" bIns="36576">
+            <a:spAutoFit/>
+          </a:bodyPr>
+          <a:lstStyle/>
+          <a:p>
+            <a:pPr algn="ctr">
+              <a:spcAft>
+                <a:spcPts val="0"/>
+              </a:spcAft>
+              <a:defRPr sz="1500" b="1">
+                <a:solidFill>
+                  <a:srgbClr val="2A8B5A"/>
+                </a:solidFill>
+                <a:latin typeface="Noto Sans CJK KR"/>
+              </a:defRPr>
+            </a:pPr>
+            <a:r>
+              <a:t>다음 단계의 확인 화면: terminal의 실행 node와 topic</a:t>
             </a:r>
           </a:p>
         </p:txBody>
@@ -7609,7 +8060,7 @@
               </a:defRPr>
             </a:pPr>
             <a:r>
-              <a:t>파일을 계속 작성하고 저장한다 (2/2)</a:t>
+              <a:t>구현 2/2: 코드 입력 (1/2)</a:t>
             </a:r>
           </a:p>
         </p:txBody>
@@ -7648,7 +8099,7 @@
               </a:defRPr>
             </a:pPr>
             <a:r>
-              <a:t>~/ros2_curri/agv_ws/src/agv_gazebo/launch/gazebo.launch.py</a:t>
+              <a:t>~/ros2_curri/my_agv_ws/src/agv_gazebo/launch/gazebo.launch.py</a:t>
             </a:r>
           </a:p>
         </p:txBody>
@@ -7784,7 +8235,7 @@
               </a:defRPr>
             </a:pPr>
             <a:r>
-              <a:t>현재 단계 7/8    |    현재 폴더 ~/ros2_curri/agv_ws    |    현재 터미널</a:t>
+              <a:t>현재 단계 파일 2/2 · 입력 1/2    |    현재 폴더 ~/ros2_curri/my_agv_ws    |    현재 터미널</a:t>
             </a:r>
           </a:p>
         </p:txBody>
@@ -7797,8 +8248,8 @@
         </p:nvSpPr>
         <p:spPr>
           <a:xfrm>
-            <a:off x="658368" y="1627632"/>
-            <a:ext cx="10972800" cy="256032"/>
+            <a:off x="658368" y="1609344"/>
+            <a:ext cx="10972800" cy="384048"/>
           </a:xfrm>
           <a:prstGeom prst="rect">
             <a:avLst/>
@@ -7815,7 +8266,7 @@
               <a:spcAft>
                 <a:spcPts val="0"/>
               </a:spcAft>
-              <a:defRPr sz="1500" b="1">
+              <a:defRPr sz="1400" b="1">
                 <a:solidFill>
                   <a:srgbClr val="122C4E"/>
                 </a:solidFill>
@@ -7823,7 +8274,7 @@
               </a:defRPr>
             </a:pPr>
             <a:r>
-              <a:t>이번 단계: 파일의 전체 내용을 중간 생략 없이 작성합니다. 아래 줄 범위를 끝까지 입력하세요.</a:t>
+              <a:t>이 블록이 하는 일: launch argument와 Node 구성을 입력합니다. package·executable·parameter 경로가 실제 이름과 같아야 합니다.</a:t>
             </a:r>
           </a:p>
         </p:txBody>
@@ -7873,7 +8324,7 @@
               <a:spcAft>
                 <a:spcPts val="0"/>
               </a:spcAft>
-              <a:defRPr sz="1400" b="0">
+              <a:defRPr sz="1300" b="0">
                 <a:solidFill>
                   <a:srgbClr val="122C4E"/>
                 </a:solidFill>
@@ -7881,11 +8332,11 @@
               </a:defRPr>
             </a:pPr>
             <a:r>
-              <a:t>파일 생성: mkdir -p ~/ros2_curri/agv_ws/src/agv_gazebo/launch</a:t>
+              <a:t>현재 열린 파일: ~/ros2_curri/my_agv_ws/src/agv_gazebo/launch/gazebo.launch.py</a:t>
             </a:r>
             <a:br/>
             <a:r>
-              <a:t>파일 열기: nano ~/ros2_curri/agv_ws/src/agv_gazebo/launch/gazebo.launch.py</a:t>
+              <a:t>아래 코드만 입력 → Ctrl+O → Enter로 저장 → 다음 블록으로 이동</a:t>
             </a:r>
           </a:p>
         </p:txBody>
@@ -7943,31 +8394,48 @@
               </a:defRPr>
             </a:pPr>
             <a:r>
-              <a:t>    gz_launch = os.path.join(get_package_share_directory('ros_gz_sim'), 'launch', 'gz_sim.launch.py')</a:t>
+              <a:t>import os</a:t>
             </a:r>
             <a:br/>
             <a:r>
-              <a:t>    return LaunchDescription([SetEnvironmentVariable('GZ_SIM_RESOURCE_PATH',</a:t>
+              <a:t>from ament_index_python.packages import get_package_share_directory</a:t>
             </a:r>
             <a:br/>
             <a:r>
-              <a:t>        models + (':' + previous if previous else '')),</a:t>
+              <a:t>from launch import LaunchDescription</a:t>
             </a:r>
             <a:br/>
             <a:r>
-              <a:t>        IncludeLaunchDescription(PythonLaunchDescriptionSource(gz_launch),</a:t>
+              <a:t>from launch.actions import IncludeLaunchDescription, SetEnvironmentVariable</a:t>
             </a:r>
             <a:br/>
             <a:r>
-              <a:t>        launch_arguments={'gz_args': '-r ' + world}.items()), Node(package='ros_gz_bridge',</a:t>
+              <a:t>from launch.launch_description_sources import PythonLaunchDescriptionSource</a:t>
             </a:r>
             <a:br/>
             <a:r>
-              <a:t>         executable='parameter_bridge', parameters=[{'config_file': os.path.join(share,</a:t>
+              <a:t>from launch_ros.actions import Node</a:t>
             </a:r>
             <a:br/>
-            <a:r>
-              <a:t>        'config', 'bridge.yaml')}], output='screen')])</a:t>
+            <a:br/>
+            <a:r>
+              <a:t>def generate_launch_description():</a:t>
+            </a:r>
+            <a:br/>
+            <a:r>
+              <a:t>    share = get_package_share_directory('agv_gazebo')</a:t>
+            </a:r>
+            <a:br/>
+            <a:r>
+              <a:t>    world = os.path.join(share, 'worlds', 'warehouse.sdf')</a:t>
+            </a:r>
+            <a:br/>
+            <a:r>
+              <a:t>    models = os.path.join(share, 'models')</a:t>
+            </a:r>
+            <a:br/>
+            <a:r>
+              <a:t>    previous = os.environ.get('GZ_SIM_RESOURCE_PATH', '')</a:t>
             </a:r>
           </a:p>
         </p:txBody>
@@ -8006,7 +8474,7 @@
               </a:defRPr>
             </a:pPr>
             <a:r>
-              <a:t>파일 전체 2/2 · 이 슬라이드 다음에 같은 파일의 나머지 줄이 이어집니다.</a:t>
+              <a:t>입력 1/2 · 이 파일의 다음 코드 블록이 바로 다음 슬라이드에 이어집니다.</a:t>
             </a:r>
           </a:p>
         </p:txBody>
@@ -8063,7 +8531,7 @@
               </a:defRPr>
             </a:pPr>
             <a:r>
-              <a:t>build → source → run 순서로 실행한다</a:t>
+              <a:t>구현 2/2: 코드 입력 (2/2)</a:t>
             </a:r>
           </a:p>
         </p:txBody>
@@ -8102,7 +8570,7 @@
               </a:defRPr>
             </a:pPr>
             <a:r>
-              <a:t>새 파일 또는 수정 파일은 build와 source 뒤에만 실행 이름·설정에 반영됩니다.</a:t>
+              <a:t>~/ros2_curri/my_agv_ws/src/agv_gazebo/launch/gazebo.launch.py</a:t>
             </a:r>
           </a:p>
         </p:txBody>
@@ -8238,23 +8706,124 @@
               </a:defRPr>
             </a:pPr>
             <a:r>
-              <a:t>현재 단계 실행    |    현재 폴더 ~/ros2_curri/agv_ws    |    현재 터미널</a:t>
-            </a:r>
-          </a:p>
-        </p:txBody>
-      </p:sp>
-      <p:sp>
-        <p:nvSpPr>
-          <p:cNvPr id="7" name="Rounded Rectangle 6"/>
+              <a:t>현재 단계 파일 2/2 · 입력 2/2    |    현재 폴더 ~/ros2_curri/my_agv_ws    |    현재 터미널</a:t>
+            </a:r>
+          </a:p>
+        </p:txBody>
+      </p:sp>
+      <p:sp>
+        <p:nvSpPr>
+          <p:cNvPr id="7" name="TextBox 6"/>
+          <p:cNvSpPr txBox="1"/>
+          <p:nvPr/>
+        </p:nvSpPr>
+        <p:spPr>
+          <a:xfrm>
+            <a:off x="658368" y="1609344"/>
+            <a:ext cx="10972800" cy="384048"/>
+          </a:xfrm>
+          <a:prstGeom prst="rect">
+            <a:avLst/>
+          </a:prstGeom>
+          <a:noFill/>
+        </p:spPr>
+        <p:txBody>
+          <a:bodyPr wrap="square" lIns="73152" rIns="73152" tIns="36576" bIns="36576">
+            <a:spAutoFit/>
+          </a:bodyPr>
+          <a:lstStyle/>
+          <a:p>
+            <a:pPr algn="l">
+              <a:spcAft>
+                <a:spcPts val="0"/>
+              </a:spcAft>
+              <a:defRPr sz="1400" b="1">
+                <a:solidFill>
+                  <a:srgbClr val="122C4E"/>
+                </a:solidFill>
+                <a:latin typeface="Noto Sans CJK KR"/>
+              </a:defRPr>
+            </a:pPr>
+            <a:r>
+              <a:t>이 블록이 하는 일: launch argument와 Node 구성을 입력합니다. package·executable·parameter 경로가 실제 이름과 같아야 합니다.</a:t>
+            </a:r>
+          </a:p>
+        </p:txBody>
+      </p:sp>
+      <p:sp>
+        <p:nvSpPr>
+          <p:cNvPr id="8" name="Rectangle 7"/>
           <p:cNvSpPr/>
           <p:nvPr/>
         </p:nvSpPr>
         <p:spPr>
           <a:xfrm>
-            <a:off x="658368" y="1700784"/>
-            <a:ext cx="10972800" cy="3182112"/>
-          </a:xfrm>
-          <a:prstGeom prst="roundRect">
+            <a:off x="658368" y="1956816"/>
+            <a:ext cx="10972800" cy="603504"/>
+          </a:xfrm>
+          <a:prstGeom prst="rect">
+            <a:avLst/>
+          </a:prstGeom>
+          <a:solidFill>
+            <a:srgbClr val="F4F7FB"/>
+          </a:solidFill>
+          <a:ln>
+            <a:solidFill>
+              <a:srgbClr val="F4F7FB"/>
+            </a:solidFill>
+          </a:ln>
+        </p:spPr>
+        <p:style>
+          <a:lnRef idx="1">
+            <a:schemeClr val="accent1"/>
+          </a:lnRef>
+          <a:fillRef idx="3">
+            <a:schemeClr val="accent1"/>
+          </a:fillRef>
+          <a:effectRef idx="2">
+            <a:schemeClr val="accent1"/>
+          </a:effectRef>
+          <a:fontRef idx="minor">
+            <a:schemeClr val="lt1"/>
+          </a:fontRef>
+        </p:style>
+        <p:txBody>
+          <a:bodyPr rtlCol="0" anchor="ctr" wrap="square" lIns="73152" rIns="73152" tIns="36576" bIns="36576"/>
+          <a:lstStyle/>
+          <a:p>
+            <a:pPr algn="l">
+              <a:spcAft>
+                <a:spcPts val="0"/>
+              </a:spcAft>
+              <a:defRPr sz="1300" b="0">
+                <a:solidFill>
+                  <a:srgbClr val="122C4E"/>
+                </a:solidFill>
+                <a:latin typeface="DejaVu Sans Mono"/>
+              </a:defRPr>
+            </a:pPr>
+            <a:r>
+              <a:t>현재 열린 파일: ~/ros2_curri/my_agv_ws/src/agv_gazebo/launch/gazebo.launch.py</a:t>
+            </a:r>
+            <a:br/>
+            <a:r>
+              <a:t>아래 코드만 입력 → Ctrl+O → Enter로 저장 → 다음 블록으로 이동</a:t>
+            </a:r>
+          </a:p>
+        </p:txBody>
+      </p:sp>
+      <p:sp>
+        <p:nvSpPr>
+          <p:cNvPr id="9" name="Rectangle 8"/>
+          <p:cNvSpPr/>
+          <p:nvPr/>
+        </p:nvSpPr>
+        <p:spPr>
+          <a:xfrm>
+            <a:off x="658368" y="2706624"/>
+            <a:ext cx="10972800" cy="3364992"/>
+          </a:xfrm>
+          <a:prstGeom prst="rect">
             <a:avLst/>
           </a:prstGeom>
           <a:solidFill>
@@ -8281,14 +8850,14 @@
           </a:fontRef>
         </p:style>
         <p:txBody>
-          <a:bodyPr rtlCol="0" anchor="ctr" wrap="square" lIns="73152" rIns="73152" tIns="36576" bIns="36576"/>
+          <a:bodyPr rtlCol="0" anchor="ctr" wrap="square" lIns="164592" rIns="164592" tIns="109728" bIns="36576"/>
           <a:lstStyle/>
           <a:p>
             <a:pPr algn="l">
               <a:spcAft>
                 <a:spcPts val="0"/>
               </a:spcAft>
-              <a:defRPr sz="1600" b="0">
+              <a:defRPr sz="1400" b="0">
                 <a:solidFill>
                   <a:srgbClr val="FFFFFF"/>
                 </a:solidFill>
@@ -8296,25 +8865,45 @@
               </a:defRPr>
             </a:pPr>
             <a:r>
-              <a:t>source ~/ros2_curri/agv_ws/install/setup.bash</a:t>
+              <a:t>    gz_launch = os.path.join(get_package_share_directory('ros_gz_sim'), 'launch', 'gz_sim.launch.py')</a:t>
             </a:r>
             <a:br/>
             <a:r>
-              <a:t>ros2 launch agv_gazebo gazebo.launch.py</a:t>
-            </a:r>
-          </a:p>
-        </p:txBody>
-      </p:sp>
-      <p:sp>
-        <p:nvSpPr>
-          <p:cNvPr id="8" name="TextBox 7"/>
-          <p:cNvSpPr txBox="1"/>
-          <p:nvPr/>
-        </p:nvSpPr>
-        <p:spPr>
-          <a:xfrm>
-            <a:off x="786384" y="5239512"/>
-            <a:ext cx="1261872" cy="237744"/>
+              <a:t>    return LaunchDescription([SetEnvironmentVariable('GZ_SIM_RESOURCE_PATH',</a:t>
+            </a:r>
+            <a:br/>
+            <a:r>
+              <a:t>        models + (':' + previous if previous else '')),</a:t>
+            </a:r>
+            <a:br/>
+            <a:r>
+              <a:t>        IncludeLaunchDescription(PythonLaunchDescriptionSource(gz_launch),</a:t>
+            </a:r>
+            <a:br/>
+            <a:r>
+              <a:t>        launch_arguments={'gz_args': '-r ' + world}.items()), Node(package='ros_gz_bridge',</a:t>
+            </a:r>
+            <a:br/>
+            <a:r>
+              <a:t>         executable='parameter_bridge', parameters=[{'config_file': os.path.join(share,</a:t>
+            </a:r>
+            <a:br/>
+            <a:r>
+              <a:t>        'config', 'bridge.yaml')}], output='screen')])</a:t>
+            </a:r>
+          </a:p>
+        </p:txBody>
+      </p:sp>
+      <p:sp>
+        <p:nvSpPr>
+          <p:cNvPr id="10" name="TextBox 9"/>
+          <p:cNvSpPr txBox="1"/>
+          <p:nvPr/>
+        </p:nvSpPr>
+        <p:spPr>
+          <a:xfrm>
+            <a:off x="749808" y="6181344"/>
+            <a:ext cx="10789920" cy="201168"/>
           </a:xfrm>
           <a:prstGeom prst="rect">
             <a:avLst/>
@@ -8331,54 +8920,15 @@
               <a:spcAft>
                 <a:spcPts val="0"/>
               </a:spcAft>
-              <a:defRPr sz="1800" b="1">
-                <a:solidFill>
-                  <a:srgbClr val="2A8B5A"/>
-                </a:solidFill>
-                <a:latin typeface="Noto Sans CJK KR"/>
-              </a:defRPr>
-            </a:pPr>
-            <a:r>
-              <a:t>확인 기준</a:t>
-            </a:r>
-          </a:p>
-        </p:txBody>
-      </p:sp>
-      <p:sp>
-        <p:nvSpPr>
-          <p:cNvPr id="9" name="TextBox 8"/>
-          <p:cNvSpPr txBox="1"/>
-          <p:nvPr/>
-        </p:nvSpPr>
-        <p:spPr>
-          <a:xfrm>
-            <a:off x="786384" y="5532120"/>
-            <a:ext cx="10469880" cy="420624"/>
-          </a:xfrm>
-          <a:prstGeom prst="rect">
-            <a:avLst/>
-          </a:prstGeom>
-          <a:noFill/>
-        </p:spPr>
-        <p:txBody>
-          <a:bodyPr wrap="square" lIns="73152" rIns="73152" tIns="36576" bIns="36576">
-            <a:spAutoFit/>
-          </a:bodyPr>
-          <a:lstStyle/>
-          <a:p>
-            <a:pPr algn="l">
-              <a:spcAft>
-                <a:spcPts val="0"/>
-              </a:spcAft>
-              <a:defRPr sz="1800" b="0">
-                <a:solidFill>
-                  <a:srgbClr val="122C4E"/>
-                </a:solidFill>
-                <a:latin typeface="Noto Sans CJK KR"/>
-              </a:defRPr>
-            </a:pPr>
-            <a:r>
-              <a:t>/cmd_vel ROS→Gazebo 및 odom/scan/imu/camera/clock Gazebo→ROS 매핑을 확인한다.</a:t>
+              <a:defRPr sz="1000" b="0">
+                <a:solidFill>
+                  <a:srgbClr val="5C6672"/>
+                </a:solidFill>
+                <a:latin typeface="Noto Sans CJK KR"/>
+              </a:defRPr>
+            </a:pPr>
+            <a:r>
+              <a:t>입력 2/2 · 이 파일의 다음 코드 블록이 바로 다음 슬라이드에 이어집니다.</a:t>
             </a:r>
           </a:p>
         </p:txBody>
@@ -8435,7 +8985,7 @@
               </a:defRPr>
             </a:pPr>
             <a:r>
-              <a:t>정상 결과: 실제 환경에서 확인한 출력</a:t>
+              <a:t>구현 뒤 실행 1/2: bridge YAML을 작성한다</a:t>
             </a:r>
           </a:p>
         </p:txBody>
@@ -8474,7 +9024,7 @@
               </a:defRPr>
             </a:pPr>
             <a:r>
-              <a:t>실제 ROS 2 환경의 파일·패키지·구성 검증 로그</a:t>
+              <a:t>방금 직접 만든 파일을 실행·검사하며 다음 파일로 넘어갈 기준을 만듭니다.</a:t>
             </a:r>
           </a:p>
         </p:txBody>
@@ -8557,30 +9107,64 @@
           </a:p>
         </p:txBody>
       </p:sp>
-      <p:pic>
-        <p:nvPicPr>
-          <p:cNvPr id="6" name="Picture 5" descr="validation_terminal.png"/>
-          <p:cNvPicPr>
-            <a:picLocks noChangeAspect="1"/>
-          </p:cNvPicPr>
-          <p:nvPr/>
-        </p:nvPicPr>
-        <p:blipFill>
-          <a:blip r:embed="rId2"/>
-          <a:stretch>
-            <a:fillRect/>
-          </a:stretch>
-        </p:blipFill>
-        <p:spPr>
-          <a:xfrm>
-            <a:off x="2855133" y="1353312"/>
-            <a:ext cx="6478685" cy="4800600"/>
-          </a:xfrm>
-          <a:prstGeom prst="rect">
-            <a:avLst/>
-          </a:prstGeom>
-        </p:spPr>
-      </p:pic>
+      <p:sp>
+        <p:nvSpPr>
+          <p:cNvPr id="6" name="Rectangle 5"/>
+          <p:cNvSpPr/>
+          <p:nvPr/>
+        </p:nvSpPr>
+        <p:spPr>
+          <a:xfrm>
+            <a:off x="566928" y="1188720"/>
+            <a:ext cx="11064240" cy="347472"/>
+          </a:xfrm>
+          <a:prstGeom prst="rect">
+            <a:avLst/>
+          </a:prstGeom>
+          <a:solidFill>
+            <a:srgbClr val="F4F7FB"/>
+          </a:solidFill>
+          <a:ln>
+            <a:solidFill>
+              <a:srgbClr val="F4F7FB"/>
+            </a:solidFill>
+          </a:ln>
+        </p:spPr>
+        <p:style>
+          <a:lnRef idx="1">
+            <a:schemeClr val="accent1"/>
+          </a:lnRef>
+          <a:fillRef idx="3">
+            <a:schemeClr val="accent1"/>
+          </a:fillRef>
+          <a:effectRef idx="2">
+            <a:schemeClr val="accent1"/>
+          </a:effectRef>
+          <a:fontRef idx="minor">
+            <a:schemeClr val="lt1"/>
+          </a:fontRef>
+        </p:style>
+        <p:txBody>
+          <a:bodyPr rtlCol="0" anchor="ctr" wrap="square" lIns="73152" rIns="73152" tIns="36576" bIns="36576"/>
+          <a:lstStyle/>
+          <a:p>
+            <a:pPr algn="l">
+              <a:spcAft>
+                <a:spcPts val="0"/>
+              </a:spcAft>
+              <a:defRPr sz="1300" b="1">
+                <a:solidFill>
+                  <a:srgbClr val="122C4E"/>
+                </a:solidFill>
+                <a:latin typeface="Noto Sans CJK KR"/>
+              </a:defRPr>
+            </a:pPr>
+            <a:r>
+              <a:t>현재 단계 실행 1/2    |    현재 폴더 ~/ros2_curri/my_agv_ws    |    현재 터미널</a:t>
+            </a:r>
+          </a:p>
+        </p:txBody>
+      </p:sp>
       <p:sp>
         <p:nvSpPr>
           <p:cNvPr id="7" name="TextBox 6"/>
@@ -8589,25 +9173,165 @@
         </p:nvSpPr>
         <p:spPr>
           <a:xfrm>
-            <a:off x="777240" y="6144768"/>
-            <a:ext cx="10607040" cy="310896"/>
-          </a:xfrm>
-          <a:prstGeom prst="rect">
-            <a:avLst/>
-          </a:prstGeom>
-          <a:noFill/>
-        </p:spPr>
-        <p:txBody>
-          <a:bodyPr wrap="square" lIns="73152" rIns="73152" tIns="36576" bIns="36576">
-            <a:spAutoFit/>
-          </a:bodyPr>
-          <a:lstStyle/>
-          <a:p>
-            <a:pPr algn="ctr">
-              <a:spcAft>
-                <a:spcPts val="0"/>
-              </a:spcAft>
-              <a:defRPr sz="1100" b="1">
+            <a:off x="676656" y="1764792"/>
+            <a:ext cx="1828800" cy="347472"/>
+          </a:xfrm>
+          <a:prstGeom prst="rect">
+            <a:avLst/>
+          </a:prstGeom>
+          <a:noFill/>
+        </p:spPr>
+        <p:txBody>
+          <a:bodyPr wrap="square" lIns="73152" rIns="73152" tIns="36576" bIns="36576">
+            <a:spAutoFit/>
+          </a:bodyPr>
+          <a:lstStyle/>
+          <a:p>
+            <a:pPr algn="l">
+              <a:spcAft>
+                <a:spcPts val="0"/>
+              </a:spcAft>
+              <a:defRPr sz="1800" b="1">
+                <a:solidFill>
+                  <a:srgbClr val="225B9B"/>
+                </a:solidFill>
+                <a:latin typeface="Noto Sans CJK KR"/>
+              </a:defRPr>
+            </a:pPr>
+            <a:r>
+              <a:t>왜 하는가</a:t>
+            </a:r>
+          </a:p>
+        </p:txBody>
+      </p:sp>
+      <p:sp>
+        <p:nvSpPr>
+          <p:cNvPr id="8" name="TextBox 7"/>
+          <p:cNvSpPr txBox="1"/>
+          <p:nvPr/>
+        </p:nvSpPr>
+        <p:spPr>
+          <a:xfrm>
+            <a:off x="676656" y="2103120"/>
+            <a:ext cx="10789920" cy="512064"/>
+          </a:xfrm>
+          <a:prstGeom prst="rect">
+            <a:avLst/>
+          </a:prstGeom>
+          <a:noFill/>
+        </p:spPr>
+        <p:txBody>
+          <a:bodyPr wrap="square" lIns="73152" rIns="73152" tIns="36576" bIns="36576">
+            <a:spAutoFit/>
+          </a:bodyPr>
+          <a:lstStyle/>
+          <a:p>
+            <a:pPr algn="l">
+              <a:spcAft>
+                <a:spcPts val="0"/>
+              </a:spcAft>
+              <a:defRPr sz="2000" b="0">
+                <a:solidFill>
+                  <a:srgbClr val="122C4E"/>
+                </a:solidFill>
+                <a:latin typeface="Noto Sans CJK KR"/>
+              </a:defRPr>
+            </a:pPr>
+            <a:r>
+              <a:t>방향과 양쪽 message type을 한 topic마다 정확히 적는다.</a:t>
+            </a:r>
+          </a:p>
+        </p:txBody>
+      </p:sp>
+      <p:sp>
+        <p:nvSpPr>
+          <p:cNvPr id="9" name="Rounded Rectangle 8"/>
+          <p:cNvSpPr/>
+          <p:nvPr/>
+        </p:nvSpPr>
+        <p:spPr>
+          <a:xfrm>
+            <a:off x="676656" y="2871216"/>
+            <a:ext cx="10835640" cy="2331720"/>
+          </a:xfrm>
+          <a:prstGeom prst="roundRect">
+            <a:avLst/>
+          </a:prstGeom>
+          <a:solidFill>
+            <a:srgbClr val="1D232D"/>
+          </a:solidFill>
+          <a:ln>
+            <a:solidFill>
+              <a:srgbClr val="1D232D"/>
+            </a:solidFill>
+          </a:ln>
+        </p:spPr>
+        <p:style>
+          <a:lnRef idx="1">
+            <a:schemeClr val="accent1"/>
+          </a:lnRef>
+          <a:fillRef idx="3">
+            <a:schemeClr val="accent1"/>
+          </a:fillRef>
+          <a:effectRef idx="2">
+            <a:schemeClr val="accent1"/>
+          </a:effectRef>
+          <a:fontRef idx="minor">
+            <a:schemeClr val="lt1"/>
+          </a:fontRef>
+        </p:style>
+        <p:txBody>
+          <a:bodyPr rtlCol="0" anchor="ctr" wrap="square" lIns="73152" rIns="73152" tIns="36576" bIns="36576"/>
+          <a:lstStyle/>
+          <a:p>
+            <a:pPr algn="l">
+              <a:spcAft>
+                <a:spcPts val="0"/>
+              </a:spcAft>
+              <a:defRPr sz="1600" b="0">
+                <a:solidFill>
+                  <a:srgbClr val="FFFFFF"/>
+                </a:solidFill>
+                <a:latin typeface="DejaVu Sans Mono"/>
+              </a:defRPr>
+            </a:pPr>
+            <a:r>
+              <a:t>cd ~/ros2_curri/my_agv_ws</a:t>
+            </a:r>
+            <a:br/>
+            <a:r>
+              <a:t>nano src/agv_gazebo/config/bridge.yaml</a:t>
+            </a:r>
+          </a:p>
+        </p:txBody>
+      </p:sp>
+      <p:sp>
+        <p:nvSpPr>
+          <p:cNvPr id="10" name="TextBox 9"/>
+          <p:cNvSpPr txBox="1"/>
+          <p:nvPr/>
+        </p:nvSpPr>
+        <p:spPr>
+          <a:xfrm>
+            <a:off x="768096" y="5468112"/>
+            <a:ext cx="1143000" cy="256032"/>
+          </a:xfrm>
+          <a:prstGeom prst="rect">
+            <a:avLst/>
+          </a:prstGeom>
+          <a:noFill/>
+        </p:spPr>
+        <p:txBody>
+          <a:bodyPr wrap="square" lIns="73152" rIns="73152" tIns="36576" bIns="36576">
+            <a:spAutoFit/>
+          </a:bodyPr>
+          <a:lstStyle/>
+          <a:p>
+            <a:pPr algn="l">
+              <a:spcAft>
+                <a:spcPts val="0"/>
+              </a:spcAft>
+              <a:defRPr sz="1800" b="1">
                 <a:solidFill>
                   <a:srgbClr val="2A8B5A"/>
                 </a:solidFill>
@@ -8615,7 +9339,46 @@
               </a:defRPr>
             </a:pPr>
             <a:r>
-              <a:t>화면에서 확인: ① 명령/설정  ② 정상 출력 또는 화면  ③ 다음 검증 명령으로 재확인</a:t>
+              <a:t>확인</a:t>
+            </a:r>
+          </a:p>
+        </p:txBody>
+      </p:sp>
+      <p:sp>
+        <p:nvSpPr>
+          <p:cNvPr id="11" name="TextBox 10"/>
+          <p:cNvSpPr txBox="1"/>
+          <p:nvPr/>
+        </p:nvSpPr>
+        <p:spPr>
+          <a:xfrm>
+            <a:off x="768096" y="5742432"/>
+            <a:ext cx="10561320" cy="347472"/>
+          </a:xfrm>
+          <a:prstGeom prst="rect">
+            <a:avLst/>
+          </a:prstGeom>
+          <a:noFill/>
+        </p:spPr>
+        <p:txBody>
+          <a:bodyPr wrap="square" lIns="73152" rIns="73152" tIns="36576" bIns="36576">
+            <a:spAutoFit/>
+          </a:bodyPr>
+          <a:lstStyle/>
+          <a:p>
+            <a:pPr algn="l">
+              <a:spcAft>
+                <a:spcPts val="0"/>
+              </a:spcAft>
+              <a:defRPr sz="1800" b="0">
+                <a:solidFill>
+                  <a:srgbClr val="122C4E"/>
+                </a:solidFill>
+                <a:latin typeface="Noto Sans CJK KR"/>
+              </a:defRPr>
+            </a:pPr>
+            <a:r>
+              <a:t>출력에서 topic·frame·파일 이름 또는 성공 메시지를 찾고, 맞지 않으면 다음 파일로 가지 않습니다.</a:t>
             </a:r>
           </a:p>
         </p:txBody>
@@ -8672,7 +9435,7 @@
               </a:defRPr>
             </a:pPr>
             <a:r>
-              <a:t>객관적 검증 명령으로 완료를 확인한다</a:t>
+              <a:t>구현 뒤 실행 2/2: launch가 YAML을 읽게 한다</a:t>
             </a:r>
           </a:p>
         </p:txBody>
@@ -8711,7 +9474,7 @@
               </a:defRPr>
             </a:pPr>
             <a:r>
-              <a:t>화면만 보지 말고 topic·frame·파일·parameter를 다시 확인합니다.</a:t>
+              <a:t>방금 직접 만든 파일을 실행·검사하며 다음 파일로 넘어갈 기준을 만듭니다.</a:t>
             </a:r>
           </a:p>
         </p:txBody>
@@ -8847,21 +9610,99 @@
               </a:defRPr>
             </a:pPr>
             <a:r>
-              <a:t>현재 단계 검증    |    현재 폴더 ~/ros2_curri/agv_ws    |    현재 터미널</a:t>
-            </a:r>
-          </a:p>
-        </p:txBody>
-      </p:sp>
-      <p:sp>
-        <p:nvSpPr>
-          <p:cNvPr id="7" name="Rounded Rectangle 6"/>
+              <a:t>현재 단계 실행 2/2    |    현재 폴더 ~/ros2_curri/my_agv_ws    |    현재 터미널</a:t>
+            </a:r>
+          </a:p>
+        </p:txBody>
+      </p:sp>
+      <p:sp>
+        <p:nvSpPr>
+          <p:cNvPr id="7" name="TextBox 6"/>
+          <p:cNvSpPr txBox="1"/>
+          <p:nvPr/>
+        </p:nvSpPr>
+        <p:spPr>
+          <a:xfrm>
+            <a:off x="676656" y="1764792"/>
+            <a:ext cx="1828800" cy="347472"/>
+          </a:xfrm>
+          <a:prstGeom prst="rect">
+            <a:avLst/>
+          </a:prstGeom>
+          <a:noFill/>
+        </p:spPr>
+        <p:txBody>
+          <a:bodyPr wrap="square" lIns="73152" rIns="73152" tIns="36576" bIns="36576">
+            <a:spAutoFit/>
+          </a:bodyPr>
+          <a:lstStyle/>
+          <a:p>
+            <a:pPr algn="l">
+              <a:spcAft>
+                <a:spcPts val="0"/>
+              </a:spcAft>
+              <a:defRPr sz="1800" b="1">
+                <a:solidFill>
+                  <a:srgbClr val="225B9B"/>
+                </a:solidFill>
+                <a:latin typeface="Noto Sans CJK KR"/>
+              </a:defRPr>
+            </a:pPr>
+            <a:r>
+              <a:t>왜 하는가</a:t>
+            </a:r>
+          </a:p>
+        </p:txBody>
+      </p:sp>
+      <p:sp>
+        <p:nvSpPr>
+          <p:cNvPr id="8" name="TextBox 7"/>
+          <p:cNvSpPr txBox="1"/>
+          <p:nvPr/>
+        </p:nvSpPr>
+        <p:spPr>
+          <a:xfrm>
+            <a:off x="676656" y="2103120"/>
+            <a:ext cx="10789920" cy="512064"/>
+          </a:xfrm>
+          <a:prstGeom prst="rect">
+            <a:avLst/>
+          </a:prstGeom>
+          <a:noFill/>
+        </p:spPr>
+        <p:txBody>
+          <a:bodyPr wrap="square" lIns="73152" rIns="73152" tIns="36576" bIns="36576">
+            <a:spAutoFit/>
+          </a:bodyPr>
+          <a:lstStyle/>
+          <a:p>
+            <a:pPr algn="l">
+              <a:spcAft>
+                <a:spcPts val="0"/>
+              </a:spcAft>
+              <a:defRPr sz="2000" b="0">
+                <a:solidFill>
+                  <a:srgbClr val="122C4E"/>
+                </a:solidFill>
+                <a:latin typeface="Noto Sans CJK KR"/>
+              </a:defRPr>
+            </a:pPr>
+            <a:r>
+              <a:t>config_file은 package share 경로에서 찾도록 launch에 넣는다.</a:t>
+            </a:r>
+          </a:p>
+        </p:txBody>
+      </p:sp>
+      <p:sp>
+        <p:nvSpPr>
+          <p:cNvPr id="9" name="Rounded Rectangle 8"/>
           <p:cNvSpPr/>
           <p:nvPr/>
         </p:nvSpPr>
         <p:spPr>
           <a:xfrm>
-            <a:off x="658368" y="1755648"/>
-            <a:ext cx="10972800" cy="2148840"/>
+            <a:off x="676656" y="2871216"/>
+            <a:ext cx="10835640" cy="2331720"/>
           </a:xfrm>
           <a:prstGeom prst="roundRect">
             <a:avLst/>
@@ -8905,54 +9746,39 @@
               </a:defRPr>
             </a:pPr>
             <a:r>
-              <a:t>ros2 topic list | rg '/cmd_vel|/odom|/scan|/imu|/camera|/clock'</a:t>
+              <a:t>colcon build --symlink-install --packages-select agv_gazebo</a:t>
             </a:r>
             <a:br/>
             <a:r>
-              <a:t>ros2 topic info /scan</a:t>
-            </a:r>
-          </a:p>
-        </p:txBody>
-      </p:sp>
-      <p:sp>
-        <p:nvSpPr>
-          <p:cNvPr id="8" name="Rounded Rectangle 7"/>
-          <p:cNvSpPr/>
-          <p:nvPr/>
-        </p:nvSpPr>
-        <p:spPr>
-          <a:xfrm>
-            <a:off x="658368" y="4206240"/>
-            <a:ext cx="10972800" cy="1554480"/>
-          </a:xfrm>
-          <a:prstGeom prst="roundRect">
-            <a:avLst/>
-          </a:prstGeom>
-          <a:solidFill>
-            <a:srgbClr val="F4F7FB"/>
-          </a:solidFill>
-          <a:ln>
-            <a:solidFill>
-              <a:srgbClr val="D1DFD5"/>
-            </a:solidFill>
-          </a:ln>
-        </p:spPr>
-        <p:style>
-          <a:lnRef idx="1">
-            <a:schemeClr val="accent1"/>
-          </a:lnRef>
-          <a:fillRef idx="3">
-            <a:schemeClr val="accent1"/>
-          </a:fillRef>
-          <a:effectRef idx="2">
-            <a:schemeClr val="accent1"/>
-          </a:effectRef>
-          <a:fontRef idx="minor">
-            <a:schemeClr val="lt1"/>
-          </a:fontRef>
-        </p:style>
-        <p:txBody>
-          <a:bodyPr rtlCol="0" anchor="ctr" wrap="square" lIns="73152" rIns="73152" tIns="36576" bIns="36576"/>
+              <a:t>source install/setup.bash</a:t>
+            </a:r>
+            <a:br/>
+            <a:r>
+              <a:t>ros2 launch agv_gazebo gazebo.launch.py</a:t>
+            </a:r>
+          </a:p>
+        </p:txBody>
+      </p:sp>
+      <p:sp>
+        <p:nvSpPr>
+          <p:cNvPr id="10" name="TextBox 9"/>
+          <p:cNvSpPr txBox="1"/>
+          <p:nvPr/>
+        </p:nvSpPr>
+        <p:spPr>
+          <a:xfrm>
+            <a:off x="768096" y="5468112"/>
+            <a:ext cx="1143000" cy="256032"/>
+          </a:xfrm>
+          <a:prstGeom prst="rect">
+            <a:avLst/>
+          </a:prstGeom>
+          <a:noFill/>
+        </p:spPr>
+        <p:txBody>
+          <a:bodyPr wrap="square" lIns="73152" rIns="73152" tIns="36576" bIns="36576">
+            <a:spAutoFit/>
+          </a:bodyPr>
           <a:lstStyle/>
           <a:p>
             <a:pPr algn="l">
@@ -8967,33 +9793,21 @@
               </a:defRPr>
             </a:pPr>
             <a:r>
-              <a:t>완료 체크</a:t>
-            </a:r>
-            <a:br/>
-            <a:r>
-              <a:t>□ 명령이 오류 없이 실행된다.</a:t>
-            </a:r>
-            <a:br/>
-            <a:r>
-              <a:t>□ 기대한 파일·topic·frame·parameter 이름이 보인다.</a:t>
-            </a:r>
-            <a:br/>
-            <a:r>
-              <a:t>□ 값의 단위와 방향을 한 문장으로 설명할 수 있다.</a:t>
-            </a:r>
-          </a:p>
-        </p:txBody>
-      </p:sp>
-      <p:sp>
-        <p:nvSpPr>
-          <p:cNvPr id="9" name="TextBox 8"/>
-          <p:cNvSpPr txBox="1"/>
-          <p:nvPr/>
-        </p:nvSpPr>
-        <p:spPr>
-          <a:xfrm>
-            <a:off x="731520" y="5989320"/>
-            <a:ext cx="10789920" cy="237744"/>
+              <a:t>확인</a:t>
+            </a:r>
+          </a:p>
+        </p:txBody>
+      </p:sp>
+      <p:sp>
+        <p:nvSpPr>
+          <p:cNvPr id="11" name="TextBox 10"/>
+          <p:cNvSpPr txBox="1"/>
+          <p:nvPr/>
+        </p:nvSpPr>
+        <p:spPr>
+          <a:xfrm>
+            <a:off x="768096" y="5742432"/>
+            <a:ext cx="10561320" cy="347472"/>
           </a:xfrm>
           <a:prstGeom prst="rect">
             <a:avLst/>
@@ -9010,7 +9824,7 @@
               <a:spcAft>
                 <a:spcPts val="0"/>
               </a:spcAft>
-              <a:defRPr sz="1500" b="1">
+              <a:defRPr sz="1800" b="0">
                 <a:solidFill>
                   <a:srgbClr val="122C4E"/>
                 </a:solidFill>
@@ -9018,7 +9832,7 @@
               </a:defRPr>
             </a:pPr>
             <a:r>
-              <a:t>완료 조건: /cmd_vel ROS→Gazebo 및 odom/scan/imu/camera/clock Gazebo→ROS 매핑을 확인한다.</a:t>
+              <a:t>출력에서 topic·frame·파일 이름 또는 성공 메시지를 찾고, 맞지 않으면 다음 파일로 가지 않습니다.</a:t>
             </a:r>
           </a:p>
         </p:txBody>
@@ -9075,7 +9889,7 @@
               </a:defRPr>
             </a:pPr>
             <a:r>
-              <a:t>막히면: 증상 → 우선 확인 → 재검증</a:t>
+              <a:t>build → source → run 순서로 실행한다</a:t>
             </a:r>
           </a:p>
         </p:txBody>
@@ -9114,7 +9928,7 @@
               </a:defRPr>
             </a:pPr>
             <a:r>
-              <a:t>오류 메시지를 숨기지 않고 같은 순서로 점검합니다.</a:t>
+              <a:t>새 파일 또는 수정 파일은 build와 source 뒤에만 실행 이름·설정에 반영됩니다.</a:t>
             </a:r>
           </a:p>
         </p:txBody>
@@ -9250,7 +10064,7 @@
               </a:defRPr>
             </a:pPr>
             <a:r>
-              <a:t>현재 단계 오류 대응    |    현재 폴더 ~/ros2_curri/agv_ws    |    현재 터미널</a:t>
+              <a:t>현재 단계 실행    |    현재 폴더 ~/ros2_curri/my_agv_ws    |    현재 터미널</a:t>
             </a:r>
           </a:p>
         </p:txBody>
@@ -9263,18 +10077,18 @@
         </p:nvSpPr>
         <p:spPr>
           <a:xfrm>
-            <a:off x="694944" y="1755648"/>
-            <a:ext cx="10972800" cy="1115568"/>
+            <a:off x="658368" y="1700784"/>
+            <a:ext cx="10972800" cy="3182112"/>
           </a:xfrm>
           <a:prstGeom prst="roundRect">
             <a:avLst/>
           </a:prstGeom>
           <a:solidFill>
-            <a:srgbClr val="FFF7F4"/>
+            <a:srgbClr val="1D232D"/>
           </a:solidFill>
           <a:ln>
             <a:solidFill>
-              <a:srgbClr val="EDBEB4"/>
+              <a:srgbClr val="1D232D"/>
             </a:solidFill>
           </a:ln>
         </p:spPr>
@@ -9293,10 +10107,27 @@
           </a:fontRef>
         </p:style>
         <p:txBody>
-          <a:bodyPr rtlCol="0" anchor="ctr"/>
-          <a:lstStyle/>
-          <a:p>
-            <a:pPr algn="ctr"/>
+          <a:bodyPr rtlCol="0" anchor="ctr" wrap="square" lIns="73152" rIns="73152" tIns="36576" bIns="36576"/>
+          <a:lstStyle/>
+          <a:p>
+            <a:pPr algn="l">
+              <a:spcAft>
+                <a:spcPts val="0"/>
+              </a:spcAft>
+              <a:defRPr sz="1600" b="0">
+                <a:solidFill>
+                  <a:srgbClr val="FFFFFF"/>
+                </a:solidFill>
+                <a:latin typeface="DejaVu Sans Mono"/>
+              </a:defRPr>
+            </a:pPr>
+            <a:r>
+              <a:t>source ~/ros2_curri/my_agv_ws/install/setup.bash</a:t>
+            </a:r>
+            <a:br/>
+            <a:r>
+              <a:t>ros2 launch agv_gazebo gazebo.launch.py</a:t>
+            </a:r>
           </a:p>
         </p:txBody>
       </p:sp>
@@ -9308,8 +10139,8 @@
         </p:nvSpPr>
         <p:spPr>
           <a:xfrm>
-            <a:off x="896112" y="1901952"/>
-            <a:ext cx="2926080" cy="274320"/>
+            <a:off x="786384" y="5239512"/>
+            <a:ext cx="1261872" cy="237744"/>
           </a:xfrm>
           <a:prstGeom prst="rect">
             <a:avLst/>
@@ -9328,13 +10159,13 @@
               </a:spcAft>
               <a:defRPr sz="1800" b="1">
                 <a:solidFill>
-                  <a:srgbClr val="BE3B3B"/>
-                </a:solidFill>
-                <a:latin typeface="Noto Sans CJK KR"/>
-              </a:defRPr>
-            </a:pPr>
-            <a:r>
-              <a:t>증상 1: ROS topic이 생성되지 않음</a:t>
+                  <a:srgbClr val="2A8B5A"/>
+                </a:solidFill>
+                <a:latin typeface="Noto Sans CJK KR"/>
+              </a:defRPr>
+            </a:pPr>
+            <a:r>
+              <a:t>확인 기준</a:t>
             </a:r>
           </a:p>
         </p:txBody>
@@ -9347,8 +10178,8 @@
         </p:nvSpPr>
         <p:spPr>
           <a:xfrm>
-            <a:off x="3794760" y="1883664"/>
-            <a:ext cx="7543800" cy="621792"/>
+            <a:off x="786384" y="5532120"/>
+            <a:ext cx="10469880" cy="420624"/>
           </a:xfrm>
           <a:prstGeom prst="rect">
             <a:avLst/>
@@ -9365,7 +10196,7 @@
               <a:spcAft>
                 <a:spcPts val="0"/>
               </a:spcAft>
-              <a:defRPr sz="1600" b="0">
+              <a:defRPr sz="1800" b="0">
                 <a:solidFill>
                   <a:srgbClr val="122C4E"/>
                 </a:solidFill>
@@ -9373,177 +10204,7 @@
               </a:defRPr>
             </a:pPr>
             <a:r>
-              <a:t>우선 확인: bridge 프로세스·topic 이름·message type을 확인한다.</a:t>
-            </a:r>
-            <a:br/>
-            <a:r>
-              <a:t>수정 후: ros2 topic list | rg '/cmd_vel|/odom|/scan|/imu|/camera|/clock'</a:t>
-            </a:r>
-          </a:p>
-        </p:txBody>
-      </p:sp>
-      <p:sp>
-        <p:nvSpPr>
-          <p:cNvPr id="10" name="Rounded Rectangle 9"/>
-          <p:cNvSpPr/>
-          <p:nvPr/>
-        </p:nvSpPr>
-        <p:spPr>
-          <a:xfrm>
-            <a:off x="694944" y="3172968"/>
-            <a:ext cx="10972800" cy="1115568"/>
-          </a:xfrm>
-          <a:prstGeom prst="roundRect">
-            <a:avLst/>
-          </a:prstGeom>
-          <a:solidFill>
-            <a:srgbClr val="FFF7F4"/>
-          </a:solidFill>
-          <a:ln>
-            <a:solidFill>
-              <a:srgbClr val="EDBEB4"/>
-            </a:solidFill>
-          </a:ln>
-        </p:spPr>
-        <p:style>
-          <a:lnRef idx="1">
-            <a:schemeClr val="accent1"/>
-          </a:lnRef>
-          <a:fillRef idx="3">
-            <a:schemeClr val="accent1"/>
-          </a:fillRef>
-          <a:effectRef idx="2">
-            <a:schemeClr val="accent1"/>
-          </a:effectRef>
-          <a:fontRef idx="minor">
-            <a:schemeClr val="lt1"/>
-          </a:fontRef>
-        </p:style>
-        <p:txBody>
-          <a:bodyPr rtlCol="0" anchor="ctr"/>
-          <a:lstStyle/>
-          <a:p>
-            <a:pPr algn="ctr"/>
-          </a:p>
-        </p:txBody>
-      </p:sp>
-      <p:sp>
-        <p:nvSpPr>
-          <p:cNvPr id="11" name="TextBox 10"/>
-          <p:cNvSpPr txBox="1"/>
-          <p:nvPr/>
-        </p:nvSpPr>
-        <p:spPr>
-          <a:xfrm>
-            <a:off x="896112" y="3319272"/>
-            <a:ext cx="2926080" cy="274320"/>
-          </a:xfrm>
-          <a:prstGeom prst="rect">
-            <a:avLst/>
-          </a:prstGeom>
-          <a:noFill/>
-        </p:spPr>
-        <p:txBody>
-          <a:bodyPr wrap="square" lIns="73152" rIns="73152" tIns="36576" bIns="36576">
-            <a:spAutoFit/>
-          </a:bodyPr>
-          <a:lstStyle/>
-          <a:p>
-            <a:pPr algn="l">
-              <a:spcAft>
-                <a:spcPts val="0"/>
-              </a:spcAft>
-              <a:defRPr sz="1800" b="1">
-                <a:solidFill>
-                  <a:srgbClr val="BE3B3B"/>
-                </a:solidFill>
-                <a:latin typeface="Noto Sans CJK KR"/>
-              </a:defRPr>
-            </a:pPr>
-            <a:r>
-              <a:t>증상 2: 한 방향으로만 전달됨</a:t>
-            </a:r>
-          </a:p>
-        </p:txBody>
-      </p:sp>
-      <p:sp>
-        <p:nvSpPr>
-          <p:cNvPr id="12" name="TextBox 11"/>
-          <p:cNvSpPr txBox="1"/>
-          <p:nvPr/>
-        </p:nvSpPr>
-        <p:spPr>
-          <a:xfrm>
-            <a:off x="3794760" y="3300984"/>
-            <a:ext cx="7543800" cy="621792"/>
-          </a:xfrm>
-          <a:prstGeom prst="rect">
-            <a:avLst/>
-          </a:prstGeom>
-          <a:noFill/>
-        </p:spPr>
-        <p:txBody>
-          <a:bodyPr wrap="square" lIns="73152" rIns="73152" tIns="36576" bIns="36576">
-            <a:spAutoFit/>
-          </a:bodyPr>
-          <a:lstStyle/>
-          <a:p>
-            <a:pPr algn="l">
-              <a:spcAft>
-                <a:spcPts val="0"/>
-              </a:spcAft>
-              <a:defRPr sz="1600" b="0">
-                <a:solidFill>
-                  <a:srgbClr val="122C4E"/>
-                </a:solidFill>
-                <a:latin typeface="Noto Sans CJK KR"/>
-              </a:defRPr>
-            </a:pPr>
-            <a:r>
-              <a:t>우선 확인: direction ROS_TO_GZ/GZ_TO_ROS 설정을 확인한다.</a:t>
-            </a:r>
-            <a:br/>
-            <a:r>
-              <a:t>수정 후: ros2 topic list | rg '/cmd_vel|/odom|/scan|/imu|/camera|/clock'</a:t>
-            </a:r>
-          </a:p>
-        </p:txBody>
-      </p:sp>
-      <p:sp>
-        <p:nvSpPr>
-          <p:cNvPr id="13" name="TextBox 12"/>
-          <p:cNvSpPr txBox="1"/>
-          <p:nvPr/>
-        </p:nvSpPr>
-        <p:spPr>
-          <a:xfrm>
-            <a:off x="822960" y="5102352"/>
-            <a:ext cx="10607040" cy="402336"/>
-          </a:xfrm>
-          <a:prstGeom prst="rect">
-            <a:avLst/>
-          </a:prstGeom>
-          <a:noFill/>
-        </p:spPr>
-        <p:txBody>
-          <a:bodyPr wrap="square" lIns="73152" rIns="73152" tIns="36576" bIns="36576">
-            <a:spAutoFit/>
-          </a:bodyPr>
-          <a:lstStyle/>
-          <a:p>
-            <a:pPr algn="ctr">
-              <a:spcAft>
-                <a:spcPts val="0"/>
-              </a:spcAft>
-              <a:defRPr sz="1800" b="1">
-                <a:solidFill>
-                  <a:srgbClr val="DB7E22"/>
-                </a:solidFill>
-                <a:latin typeface="Noto Sans CJK KR"/>
-              </a:defRPr>
-            </a:pPr>
-            <a:r>
-              <a:t>공통 순서: ① 현재 폴더 ② source ③ 파일 경로 ④ 이름/타입/단위 ⑤ build·source 후 재실행</a:t>
+              <a:t>/cmd_vel ROS→Gazebo 및 odom/scan/imu/camera/clock Gazebo→ROS 매핑을 확인한다.</a:t>
             </a:r>
           </a:p>
         </p:txBody>
@@ -9600,7 +10261,7 @@
               </a:defRPr>
             </a:pPr>
             <a:r>
-              <a:t>미니 실습: 값 하나를 바꾸고 결과를 비교한다</a:t>
+              <a:t>정상 결과: 실제 환경에서 확인한 출력</a:t>
             </a:r>
           </a:p>
         </p:txBody>
@@ -9639,7 +10300,7 @@
               </a:defRPr>
             </a:pPr>
             <a:r>
-              <a:t>정상 결과를 만든 뒤에는 한 번에 하나의 값만 바꿉니다.</a:t>
+              <a:t>실제 ROS 2 환경의 파일·패키지·구성 검증 로그</a:t>
             </a:r>
           </a:p>
         </p:txBody>
@@ -9722,157 +10383,65 @@
           </a:p>
         </p:txBody>
       </p:sp>
-      <p:sp>
-        <p:nvSpPr>
-          <p:cNvPr id="6" name="Rectangle 5"/>
-          <p:cNvSpPr/>
-          <p:nvPr/>
-        </p:nvSpPr>
-        <p:spPr>
-          <a:xfrm>
-            <a:off x="566928" y="1188720"/>
-            <a:ext cx="11064240" cy="347472"/>
-          </a:xfrm>
-          <a:prstGeom prst="rect">
-            <a:avLst/>
-          </a:prstGeom>
-          <a:solidFill>
-            <a:srgbClr val="F4F7FB"/>
-          </a:solidFill>
-          <a:ln>
-            <a:solidFill>
-              <a:srgbClr val="F4F7FB"/>
-            </a:solidFill>
-          </a:ln>
-        </p:spPr>
-        <p:style>
-          <a:lnRef idx="1">
-            <a:schemeClr val="accent1"/>
-          </a:lnRef>
-          <a:fillRef idx="3">
-            <a:schemeClr val="accent1"/>
-          </a:fillRef>
-          <a:effectRef idx="2">
-            <a:schemeClr val="accent1"/>
-          </a:effectRef>
-          <a:fontRef idx="minor">
-            <a:schemeClr val="lt1"/>
-          </a:fontRef>
-        </p:style>
-        <p:txBody>
-          <a:bodyPr rtlCol="0" anchor="ctr" wrap="square" lIns="73152" rIns="73152" tIns="36576" bIns="36576"/>
-          <a:lstStyle/>
-          <a:p>
-            <a:pPr algn="l">
-              <a:spcAft>
-                <a:spcPts val="0"/>
-              </a:spcAft>
-              <a:defRPr sz="1300" b="1">
-                <a:solidFill>
-                  <a:srgbClr val="122C4E"/>
-                </a:solidFill>
-                <a:latin typeface="Noto Sans CJK KR"/>
-              </a:defRPr>
-            </a:pPr>
-            <a:r>
-              <a:t>현재 단계 미니 실습    |    현재 폴더 ~/ros2_curri/agv_ws    |    현재 터미널</a:t>
-            </a:r>
-          </a:p>
-        </p:txBody>
-      </p:sp>
-      <p:sp>
-        <p:nvSpPr>
-          <p:cNvPr id="7" name="Rounded Rectangle 6"/>
-          <p:cNvSpPr/>
-          <p:nvPr/>
-        </p:nvSpPr>
-        <p:spPr>
-          <a:xfrm>
-            <a:off x="749808" y="1874519"/>
-            <a:ext cx="10652760" cy="1993392"/>
-          </a:xfrm>
-          <a:prstGeom prst="roundRect">
-            <a:avLst/>
-          </a:prstGeom>
-          <a:solidFill>
-            <a:srgbClr val="FFF8EB"/>
-          </a:solidFill>
-          <a:ln>
-            <a:solidFill>
-              <a:srgbClr val="ECC680"/>
-            </a:solidFill>
-          </a:ln>
-        </p:spPr>
-        <p:style>
-          <a:lnRef idx="1">
-            <a:schemeClr val="accent1"/>
-          </a:lnRef>
-          <a:fillRef idx="3">
-            <a:schemeClr val="accent1"/>
-          </a:fillRef>
-          <a:effectRef idx="2">
-            <a:schemeClr val="accent1"/>
-          </a:effectRef>
-          <a:fontRef idx="minor">
-            <a:schemeClr val="lt1"/>
-          </a:fontRef>
-        </p:style>
-        <p:txBody>
-          <a:bodyPr rtlCol="0" anchor="ctr" wrap="square" lIns="73152" rIns="73152" tIns="36576" bIns="36576"/>
+      <p:pic>
+        <p:nvPicPr>
+          <p:cNvPr id="6" name="Picture 5" descr="validation_terminal.png"/>
+          <p:cNvPicPr>
+            <a:picLocks noChangeAspect="1"/>
+          </p:cNvPicPr>
+          <p:nvPr/>
+        </p:nvPicPr>
+        <p:blipFill>
+          <a:blip r:embed="rId2"/>
+          <a:stretch>
+            <a:fillRect/>
+          </a:stretch>
+        </p:blipFill>
+        <p:spPr>
+          <a:xfrm>
+            <a:off x="2855133" y="1353312"/>
+            <a:ext cx="6478685" cy="4800600"/>
+          </a:xfrm>
+          <a:prstGeom prst="rect">
+            <a:avLst/>
+          </a:prstGeom>
+        </p:spPr>
+      </p:pic>
+      <p:sp>
+        <p:nvSpPr>
+          <p:cNvPr id="7" name="TextBox 6"/>
+          <p:cNvSpPr txBox="1"/>
+          <p:nvPr/>
+        </p:nvSpPr>
+        <p:spPr>
+          <a:xfrm>
+            <a:off x="777240" y="6144768"/>
+            <a:ext cx="10607040" cy="310896"/>
+          </a:xfrm>
+          <a:prstGeom prst="rect">
+            <a:avLst/>
+          </a:prstGeom>
+          <a:noFill/>
+        </p:spPr>
+        <p:txBody>
+          <a:bodyPr wrap="square" lIns="73152" rIns="73152" tIns="36576" bIns="36576">
+            <a:spAutoFit/>
+          </a:bodyPr>
           <a:lstStyle/>
           <a:p>
             <a:pPr algn="ctr">
               <a:spcAft>
                 <a:spcPts val="0"/>
               </a:spcAft>
-              <a:defRPr sz="2300" b="1">
-                <a:solidFill>
-                  <a:srgbClr val="122C4E"/>
-                </a:solidFill>
-                <a:latin typeface="Noto Sans CJK KR"/>
-              </a:defRPr>
-            </a:pPr>
-            <a:r>
-              <a:t>bridge.yaml에서 /scan 항목의 ros_type_name을 읽고 `ros2 interface show sensor_msgs/msg/LaserScan`으로 필드를 확인한다.</a:t>
-            </a:r>
-          </a:p>
-        </p:txBody>
-      </p:sp>
-      <p:sp>
-        <p:nvSpPr>
-          <p:cNvPr id="8" name="TextBox 7"/>
-          <p:cNvSpPr txBox="1"/>
-          <p:nvPr/>
-        </p:nvSpPr>
-        <p:spPr>
-          <a:xfrm>
-            <a:off x="877824" y="4590288"/>
-            <a:ext cx="10241280" cy="594360"/>
-          </a:xfrm>
-          <a:prstGeom prst="rect">
-            <a:avLst/>
-          </a:prstGeom>
-          <a:noFill/>
-        </p:spPr>
-        <p:txBody>
-          <a:bodyPr wrap="square" lIns="73152" rIns="73152" tIns="36576" bIns="36576">
-            <a:spAutoFit/>
-          </a:bodyPr>
-          <a:lstStyle/>
-          <a:p>
-            <a:pPr algn="ctr">
-              <a:spcAft>
-                <a:spcPts val="0"/>
-              </a:spcAft>
-              <a:defRPr sz="1900" b="1">
-                <a:solidFill>
-                  <a:srgbClr val="DB7E22"/>
-                </a:solidFill>
-                <a:latin typeface="Noto Sans CJK KR"/>
-              </a:defRPr>
-            </a:pPr>
-            <a:r>
-              <a:t>기록할 것: 바꾼 값(단위) · 기대한 변화 · 실제 출력/화면 · 원래 값으로 되돌린 결과</a:t>
+              <a:defRPr sz="1100" b="1">
+                <a:solidFill>
+                  <a:srgbClr val="2A8B5A"/>
+                </a:solidFill>
+                <a:latin typeface="Noto Sans CJK KR"/>
+              </a:defRPr>
+            </a:pPr>
+            <a:r>
+              <a:t>화면에서 확인: ① 명령/설정  ② 정상 출력 또는 화면  ③ 다음 검증 명령으로 재확인</a:t>
             </a:r>
           </a:p>
         </p:txBody>
@@ -10390,7 +10959,7 @@
               </a:defRPr>
             </a:pPr>
             <a:r>
-              <a:t>체크포인트를 저장하고 다음 모듈로 넘긴다</a:t>
+              <a:t>객관적 검증 명령으로 완료를 확인한다</a:t>
             </a:r>
           </a:p>
         </p:txBody>
@@ -10429,7 +10998,7 @@
               </a:defRPr>
             </a:pPr>
             <a:r>
-              <a:t>현재 Complete는 다음 Starter의 기준선입니다.</a:t>
+              <a:t>화면만 보지 말고 topic·frame·파일·parameter를 다시 확인합니다.</a:t>
             </a:r>
           </a:p>
         </p:txBody>
@@ -10565,7 +11134,7 @@
               </a:defRPr>
             </a:pPr>
             <a:r>
-              <a:t>현재 단계 체크포인트    |    현재 폴더 ~/ros2_curri/agv_ws    |    현재 터미널</a:t>
+              <a:t>현재 단계 검증    |    현재 폴더 ~/ros2_curri/my_agv_ws    |    현재 터미널</a:t>
             </a:r>
           </a:p>
         </p:txBody>
@@ -10578,8 +11147,70 @@
         </p:nvSpPr>
         <p:spPr>
           <a:xfrm>
-            <a:off x="685800" y="1737360"/>
-            <a:ext cx="10972800" cy="3611880"/>
+            <a:off x="658368" y="1755648"/>
+            <a:ext cx="10972800" cy="2148840"/>
+          </a:xfrm>
+          <a:prstGeom prst="roundRect">
+            <a:avLst/>
+          </a:prstGeom>
+          <a:solidFill>
+            <a:srgbClr val="1D232D"/>
+          </a:solidFill>
+          <a:ln>
+            <a:solidFill>
+              <a:srgbClr val="1D232D"/>
+            </a:solidFill>
+          </a:ln>
+        </p:spPr>
+        <p:style>
+          <a:lnRef idx="1">
+            <a:schemeClr val="accent1"/>
+          </a:lnRef>
+          <a:fillRef idx="3">
+            <a:schemeClr val="accent1"/>
+          </a:fillRef>
+          <a:effectRef idx="2">
+            <a:schemeClr val="accent1"/>
+          </a:effectRef>
+          <a:fontRef idx="minor">
+            <a:schemeClr val="lt1"/>
+          </a:fontRef>
+        </p:style>
+        <p:txBody>
+          <a:bodyPr rtlCol="0" anchor="ctr" wrap="square" lIns="73152" rIns="73152" tIns="36576" bIns="36576"/>
+          <a:lstStyle/>
+          <a:p>
+            <a:pPr algn="l">
+              <a:spcAft>
+                <a:spcPts val="0"/>
+              </a:spcAft>
+              <a:defRPr sz="1600" b="0">
+                <a:solidFill>
+                  <a:srgbClr val="FFFFFF"/>
+                </a:solidFill>
+                <a:latin typeface="DejaVu Sans Mono"/>
+              </a:defRPr>
+            </a:pPr>
+            <a:r>
+              <a:t>ros2 topic list | rg '/cmd_vel|/odom|/scan|/imu|/camera|/clock'</a:t>
+            </a:r>
+            <a:br/>
+            <a:r>
+              <a:t>ros2 topic info /scan</a:t>
+            </a:r>
+          </a:p>
+        </p:txBody>
+      </p:sp>
+      <p:sp>
+        <p:nvSpPr>
+          <p:cNvPr id="8" name="Rounded Rectangle 7"/>
+          <p:cNvSpPr/>
+          <p:nvPr/>
+        </p:nvSpPr>
+        <p:spPr>
+          <a:xfrm>
+            <a:off x="658368" y="4206240"/>
+            <a:ext cx="10972800" cy="1554480"/>
           </a:xfrm>
           <a:prstGeom prst="roundRect">
             <a:avLst/>
@@ -10589,7 +11220,7 @@
           </a:solidFill>
           <a:ln>
             <a:solidFill>
-              <a:srgbClr val="D2DCE8"/>
+              <a:srgbClr val="D1DFD5"/>
             </a:solidFill>
           </a:ln>
         </p:spPr>
@@ -10608,40 +11239,65 @@
           </a:fontRef>
         </p:style>
         <p:txBody>
-          <a:bodyPr rtlCol="0" anchor="ctr"/>
-          <a:lstStyle/>
-          <a:p>
-            <a:pPr algn="ctr"/>
-          </a:p>
-        </p:txBody>
-      </p:sp>
-      <p:sp>
-        <p:nvSpPr>
-          <p:cNvPr id="8" name="TextBox 7"/>
-          <p:cNvSpPr txBox="1"/>
-          <p:nvPr/>
-        </p:nvSpPr>
-        <p:spPr>
-          <a:xfrm>
-            <a:off x="896112" y="1993392"/>
-            <a:ext cx="10332720" cy="2971800"/>
-          </a:xfrm>
-          <a:prstGeom prst="rect">
-            <a:avLst/>
-          </a:prstGeom>
-          <a:noFill/>
-        </p:spPr>
-        <p:txBody>
-          <a:bodyPr wrap="square" lIns="109728" rIns="109728">
-            <a:spAutoFit/>
-          </a:bodyPr>
-          <a:lstStyle/>
-          <a:p>
-            <a:pPr>
-              <a:spcAft>
-                <a:spcPts val="800"/>
-              </a:spcAft>
-              <a:defRPr sz="1800">
+          <a:bodyPr rtlCol="0" anchor="ctr" wrap="square" lIns="73152" rIns="73152" tIns="36576" bIns="36576"/>
+          <a:lstStyle/>
+          <a:p>
+            <a:pPr algn="l">
+              <a:spcAft>
+                <a:spcPts val="0"/>
+              </a:spcAft>
+              <a:defRPr sz="1800" b="1">
+                <a:solidFill>
+                  <a:srgbClr val="2A8B5A"/>
+                </a:solidFill>
+                <a:latin typeface="Noto Sans CJK KR"/>
+              </a:defRPr>
+            </a:pPr>
+            <a:r>
+              <a:t>완료 체크</a:t>
+            </a:r>
+            <a:br/>
+            <a:r>
+              <a:t>□ 명령이 오류 없이 실행된다.</a:t>
+            </a:r>
+            <a:br/>
+            <a:r>
+              <a:t>□ 기대한 파일·topic·frame·parameter 이름이 보인다.</a:t>
+            </a:r>
+            <a:br/>
+            <a:r>
+              <a:t>□ 값의 단위와 방향을 한 문장으로 설명할 수 있다.</a:t>
+            </a:r>
+          </a:p>
+        </p:txBody>
+      </p:sp>
+      <p:sp>
+        <p:nvSpPr>
+          <p:cNvPr id="9" name="TextBox 8"/>
+          <p:cNvSpPr txBox="1"/>
+          <p:nvPr/>
+        </p:nvSpPr>
+        <p:spPr>
+          <a:xfrm>
+            <a:off x="731520" y="5989320"/>
+            <a:ext cx="10789920" cy="237744"/>
+          </a:xfrm>
+          <a:prstGeom prst="rect">
+            <a:avLst/>
+          </a:prstGeom>
+          <a:noFill/>
+        </p:spPr>
+        <p:txBody>
+          <a:bodyPr wrap="square" lIns="73152" rIns="73152" tIns="36576" bIns="36576">
+            <a:spAutoFit/>
+          </a:bodyPr>
+          <a:lstStyle/>
+          <a:p>
+            <a:pPr algn="l">
+              <a:spcAft>
+                <a:spcPts val="0"/>
+              </a:spcAft>
+              <a:defRPr sz="1500" b="1">
                 <a:solidFill>
                   <a:srgbClr val="122C4E"/>
                 </a:solidFill>
@@ -10649,110 +11305,7 @@
               </a:defRPr>
             </a:pPr>
             <a:r>
-              <a:t>• □ 완료 화면: /cmd_vel ROS→Gazebo 및 odom/scan/imu/camera/clock Gazebo→ROS 매핑을 확인한다.</a:t>
-            </a:r>
-          </a:p>
-          <a:p>
-            <a:pPr>
-              <a:spcAft>
-                <a:spcPts val="800"/>
-              </a:spcAft>
-              <a:defRPr sz="1800">
-                <a:solidFill>
-                  <a:srgbClr val="122C4E"/>
-                </a:solidFill>
-                <a:latin typeface="Noto Sans CJK KR"/>
-              </a:defRPr>
-            </a:pPr>
-            <a:r>
-              <a:t>• □ Complete 파일: blocks/C_drive_visualization/M10_ros_gz_bridge/complete/</a:t>
-            </a:r>
-          </a:p>
-          <a:p>
-            <a:pPr>
-              <a:spcAft>
-                <a:spcPts val="800"/>
-              </a:spcAft>
-              <a:defRPr sz="1800">
-                <a:solidFill>
-                  <a:srgbClr val="122C4E"/>
-                </a:solidFill>
-                <a:latin typeface="Noto Sans CJK KR"/>
-              </a:defRPr>
-            </a:pPr>
-            <a:r>
-              <a:t>• □ 정상 로그·캡처: logs/validation.log, screenshots/validation_terminal.png</a:t>
-            </a:r>
-          </a:p>
-          <a:p>
-            <a:pPr>
-              <a:spcAft>
-                <a:spcPts val="800"/>
-              </a:spcAft>
-              <a:defRPr sz="1800">
-                <a:solidFill>
-                  <a:srgbClr val="122C4E"/>
-                </a:solidFill>
-                <a:latin typeface="Noto Sans CJK KR"/>
-              </a:defRPr>
-            </a:pPr>
-            <a:r>
-              <a:t>• □ 버전 식별: CHECKSUM_or_TAG.txt의 SHA-256 manifest</a:t>
-            </a:r>
-          </a:p>
-          <a:p>
-            <a:pPr>
-              <a:spcAft>
-                <a:spcPts val="800"/>
-              </a:spcAft>
-              <a:defRPr sz="1800">
-                <a:solidFill>
-                  <a:srgbClr val="122C4E"/>
-                </a:solidFill>
-                <a:latin typeface="Noto Sans CJK KR"/>
-              </a:defRPr>
-            </a:pPr>
-            <a:r>
-              <a:t>• □ 다음 시작 조건: M11 RViz2</a:t>
-            </a:r>
-          </a:p>
-        </p:txBody>
-      </p:sp>
-      <p:sp>
-        <p:nvSpPr>
-          <p:cNvPr id="9" name="TextBox 8"/>
-          <p:cNvSpPr txBox="1"/>
-          <p:nvPr/>
-        </p:nvSpPr>
-        <p:spPr>
-          <a:xfrm>
-            <a:off x="868680" y="5596128"/>
-            <a:ext cx="10515600" cy="338328"/>
-          </a:xfrm>
-          <a:prstGeom prst="rect">
-            <a:avLst/>
-          </a:prstGeom>
-          <a:noFill/>
-        </p:spPr>
-        <p:txBody>
-          <a:bodyPr wrap="square" lIns="73152" rIns="73152" tIns="36576" bIns="36576">
-            <a:spAutoFit/>
-          </a:bodyPr>
-          <a:lstStyle/>
-          <a:p>
-            <a:pPr algn="ctr">
-              <a:spcAft>
-                <a:spcPts val="0"/>
-              </a:spcAft>
-              <a:defRPr sz="1700" b="1">
-                <a:solidFill>
-                  <a:srgbClr val="2A8B5A"/>
-                </a:solidFill>
-                <a:latin typeface="Noto Sans CJK KR"/>
-              </a:defRPr>
-            </a:pPr>
-            <a:r>
-              <a:t>다음 모듈을 시작하기 전, 이 슬라이드의 Complete와 다음 모듈의 Starter를 비교합니다.</a:t>
+              <a:t>완료 조건: /cmd_vel ROS→Gazebo 및 odom/scan/imu/camera/clock Gazebo→ROS 매핑을 확인한다.</a:t>
             </a:r>
           </a:p>
         </p:txBody>
@@ -10809,6 +11362,1663 @@
               </a:defRPr>
             </a:pPr>
             <a:r>
+              <a:t>막히면: 증상 → 우선 확인 → 재검증</a:t>
+            </a:r>
+          </a:p>
+        </p:txBody>
+      </p:sp>
+      <p:sp>
+        <p:nvSpPr>
+          <p:cNvPr id="3" name="TextBox 2"/>
+          <p:cNvSpPr txBox="1"/>
+          <p:nvPr/>
+        </p:nvSpPr>
+        <p:spPr>
+          <a:xfrm>
+            <a:off x="603504" y="859536"/>
+            <a:ext cx="10698480" cy="292608"/>
+          </a:xfrm>
+          <a:prstGeom prst="rect">
+            <a:avLst/>
+          </a:prstGeom>
+          <a:noFill/>
+        </p:spPr>
+        <p:txBody>
+          <a:bodyPr wrap="square" lIns="73152" rIns="73152" tIns="36576" bIns="36576">
+            <a:spAutoFit/>
+          </a:bodyPr>
+          <a:lstStyle/>
+          <a:p>
+            <a:pPr algn="l">
+              <a:spcAft>
+                <a:spcPts val="0"/>
+              </a:spcAft>
+              <a:defRPr sz="1700" b="0">
+                <a:solidFill>
+                  <a:srgbClr val="5C6672"/>
+                </a:solidFill>
+                <a:latin typeface="Noto Sans CJK KR"/>
+              </a:defRPr>
+            </a:pPr>
+            <a:r>
+              <a:t>오류 메시지를 숨기지 않고 같은 순서로 점검합니다.</a:t>
+            </a:r>
+          </a:p>
+        </p:txBody>
+      </p:sp>
+      <p:sp>
+        <p:nvSpPr>
+          <p:cNvPr id="4" name="TextBox 3"/>
+          <p:cNvSpPr txBox="1"/>
+          <p:nvPr/>
+        </p:nvSpPr>
+        <p:spPr>
+          <a:xfrm>
+            <a:off x="530352" y="6510528"/>
+            <a:ext cx="7772400" cy="201168"/>
+          </a:xfrm>
+          <a:prstGeom prst="rect">
+            <a:avLst/>
+          </a:prstGeom>
+          <a:noFill/>
+        </p:spPr>
+        <p:txBody>
+          <a:bodyPr wrap="square" lIns="73152" rIns="73152" tIns="36576" bIns="36576">
+            <a:spAutoFit/>
+          </a:bodyPr>
+          <a:lstStyle/>
+          <a:p>
+            <a:pPr algn="l">
+              <a:spcAft>
+                <a:spcPts val="0"/>
+              </a:spcAft>
+              <a:defRPr sz="1000" b="0">
+                <a:solidFill>
+                  <a:srgbClr val="5C6672"/>
+                </a:solidFill>
+                <a:latin typeface="Noto Sans CJK KR"/>
+              </a:defRPr>
+            </a:pPr>
+            <a:r>
+              <a:t>ROS 2 Jazzy · Gazebo Harmonic · M10 · 따라 하기형 AGV 실습</a:t>
+            </a:r>
+          </a:p>
+        </p:txBody>
+      </p:sp>
+      <p:sp>
+        <p:nvSpPr>
+          <p:cNvPr id="5" name="TextBox 4"/>
+          <p:cNvSpPr txBox="1"/>
+          <p:nvPr/>
+        </p:nvSpPr>
+        <p:spPr>
+          <a:xfrm>
+            <a:off x="9144000" y="6510528"/>
+            <a:ext cx="2468880" cy="201168"/>
+          </a:xfrm>
+          <a:prstGeom prst="rect">
+            <a:avLst/>
+          </a:prstGeom>
+          <a:noFill/>
+        </p:spPr>
+        <p:txBody>
+          <a:bodyPr wrap="square" lIns="73152" rIns="73152" tIns="36576" bIns="36576">
+            <a:spAutoFit/>
+          </a:bodyPr>
+          <a:lstStyle/>
+          <a:p>
+            <a:pPr algn="r">
+              <a:spcAft>
+                <a:spcPts val="0"/>
+              </a:spcAft>
+              <a:defRPr sz="1000" b="0">
+                <a:solidFill>
+                  <a:srgbClr val="5C6672"/>
+                </a:solidFill>
+                <a:latin typeface="Noto Sans CJK KR"/>
+              </a:defRPr>
+            </a:pPr>
+            <a:r>
+              <a:t>명령·파일 경로는 슬라이드에서 복사 가능</a:t>
+            </a:r>
+          </a:p>
+        </p:txBody>
+      </p:sp>
+      <p:sp>
+        <p:nvSpPr>
+          <p:cNvPr id="6" name="Rectangle 5"/>
+          <p:cNvSpPr/>
+          <p:nvPr/>
+        </p:nvSpPr>
+        <p:spPr>
+          <a:xfrm>
+            <a:off x="566928" y="1188720"/>
+            <a:ext cx="11064240" cy="347472"/>
+          </a:xfrm>
+          <a:prstGeom prst="rect">
+            <a:avLst/>
+          </a:prstGeom>
+          <a:solidFill>
+            <a:srgbClr val="F4F7FB"/>
+          </a:solidFill>
+          <a:ln>
+            <a:solidFill>
+              <a:srgbClr val="F4F7FB"/>
+            </a:solidFill>
+          </a:ln>
+        </p:spPr>
+        <p:style>
+          <a:lnRef idx="1">
+            <a:schemeClr val="accent1"/>
+          </a:lnRef>
+          <a:fillRef idx="3">
+            <a:schemeClr val="accent1"/>
+          </a:fillRef>
+          <a:effectRef idx="2">
+            <a:schemeClr val="accent1"/>
+          </a:effectRef>
+          <a:fontRef idx="minor">
+            <a:schemeClr val="lt1"/>
+          </a:fontRef>
+        </p:style>
+        <p:txBody>
+          <a:bodyPr rtlCol="0" anchor="ctr" wrap="square" lIns="73152" rIns="73152" tIns="36576" bIns="36576"/>
+          <a:lstStyle/>
+          <a:p>
+            <a:pPr algn="l">
+              <a:spcAft>
+                <a:spcPts val="0"/>
+              </a:spcAft>
+              <a:defRPr sz="1300" b="1">
+                <a:solidFill>
+                  <a:srgbClr val="122C4E"/>
+                </a:solidFill>
+                <a:latin typeface="Noto Sans CJK KR"/>
+              </a:defRPr>
+            </a:pPr>
+            <a:r>
+              <a:t>현재 단계 오류 대응    |    현재 폴더 ~/ros2_curri/my_agv_ws    |    현재 터미널</a:t>
+            </a:r>
+          </a:p>
+        </p:txBody>
+      </p:sp>
+      <p:sp>
+        <p:nvSpPr>
+          <p:cNvPr id="7" name="Rounded Rectangle 6"/>
+          <p:cNvSpPr/>
+          <p:nvPr/>
+        </p:nvSpPr>
+        <p:spPr>
+          <a:xfrm>
+            <a:off x="694944" y="1755648"/>
+            <a:ext cx="10972800" cy="1115568"/>
+          </a:xfrm>
+          <a:prstGeom prst="roundRect">
+            <a:avLst/>
+          </a:prstGeom>
+          <a:solidFill>
+            <a:srgbClr val="FFF7F4"/>
+          </a:solidFill>
+          <a:ln>
+            <a:solidFill>
+              <a:srgbClr val="EDBEB4"/>
+            </a:solidFill>
+          </a:ln>
+        </p:spPr>
+        <p:style>
+          <a:lnRef idx="1">
+            <a:schemeClr val="accent1"/>
+          </a:lnRef>
+          <a:fillRef idx="3">
+            <a:schemeClr val="accent1"/>
+          </a:fillRef>
+          <a:effectRef idx="2">
+            <a:schemeClr val="accent1"/>
+          </a:effectRef>
+          <a:fontRef idx="minor">
+            <a:schemeClr val="lt1"/>
+          </a:fontRef>
+        </p:style>
+        <p:txBody>
+          <a:bodyPr rtlCol="0" anchor="ctr"/>
+          <a:lstStyle/>
+          <a:p>
+            <a:pPr algn="ctr"/>
+          </a:p>
+        </p:txBody>
+      </p:sp>
+      <p:sp>
+        <p:nvSpPr>
+          <p:cNvPr id="8" name="TextBox 7"/>
+          <p:cNvSpPr txBox="1"/>
+          <p:nvPr/>
+        </p:nvSpPr>
+        <p:spPr>
+          <a:xfrm>
+            <a:off x="896112" y="1901952"/>
+            <a:ext cx="2926080" cy="274320"/>
+          </a:xfrm>
+          <a:prstGeom prst="rect">
+            <a:avLst/>
+          </a:prstGeom>
+          <a:noFill/>
+        </p:spPr>
+        <p:txBody>
+          <a:bodyPr wrap="square" lIns="73152" rIns="73152" tIns="36576" bIns="36576">
+            <a:spAutoFit/>
+          </a:bodyPr>
+          <a:lstStyle/>
+          <a:p>
+            <a:pPr algn="l">
+              <a:spcAft>
+                <a:spcPts val="0"/>
+              </a:spcAft>
+              <a:defRPr sz="1800" b="1">
+                <a:solidFill>
+                  <a:srgbClr val="BE3B3B"/>
+                </a:solidFill>
+                <a:latin typeface="Noto Sans CJK KR"/>
+              </a:defRPr>
+            </a:pPr>
+            <a:r>
+              <a:t>증상 1: ROS topic이 생성되지 않음</a:t>
+            </a:r>
+          </a:p>
+        </p:txBody>
+      </p:sp>
+      <p:sp>
+        <p:nvSpPr>
+          <p:cNvPr id="9" name="TextBox 8"/>
+          <p:cNvSpPr txBox="1"/>
+          <p:nvPr/>
+        </p:nvSpPr>
+        <p:spPr>
+          <a:xfrm>
+            <a:off x="3794760" y="1883664"/>
+            <a:ext cx="7543800" cy="621792"/>
+          </a:xfrm>
+          <a:prstGeom prst="rect">
+            <a:avLst/>
+          </a:prstGeom>
+          <a:noFill/>
+        </p:spPr>
+        <p:txBody>
+          <a:bodyPr wrap="square" lIns="73152" rIns="73152" tIns="36576" bIns="36576">
+            <a:spAutoFit/>
+          </a:bodyPr>
+          <a:lstStyle/>
+          <a:p>
+            <a:pPr algn="l">
+              <a:spcAft>
+                <a:spcPts val="0"/>
+              </a:spcAft>
+              <a:defRPr sz="1600" b="0">
+                <a:solidFill>
+                  <a:srgbClr val="122C4E"/>
+                </a:solidFill>
+                <a:latin typeface="Noto Sans CJK KR"/>
+              </a:defRPr>
+            </a:pPr>
+            <a:r>
+              <a:t>우선 확인: bridge 프로세스·topic 이름·message type을 확인한다.</a:t>
+            </a:r>
+            <a:br/>
+            <a:r>
+              <a:t>수정 후: ros2 topic list | rg '/cmd_vel|/odom|/scan|/imu|/camera|/clock'</a:t>
+            </a:r>
+          </a:p>
+        </p:txBody>
+      </p:sp>
+      <p:sp>
+        <p:nvSpPr>
+          <p:cNvPr id="10" name="Rounded Rectangle 9"/>
+          <p:cNvSpPr/>
+          <p:nvPr/>
+        </p:nvSpPr>
+        <p:spPr>
+          <a:xfrm>
+            <a:off x="694944" y="3172968"/>
+            <a:ext cx="10972800" cy="1115568"/>
+          </a:xfrm>
+          <a:prstGeom prst="roundRect">
+            <a:avLst/>
+          </a:prstGeom>
+          <a:solidFill>
+            <a:srgbClr val="FFF7F4"/>
+          </a:solidFill>
+          <a:ln>
+            <a:solidFill>
+              <a:srgbClr val="EDBEB4"/>
+            </a:solidFill>
+          </a:ln>
+        </p:spPr>
+        <p:style>
+          <a:lnRef idx="1">
+            <a:schemeClr val="accent1"/>
+          </a:lnRef>
+          <a:fillRef idx="3">
+            <a:schemeClr val="accent1"/>
+          </a:fillRef>
+          <a:effectRef idx="2">
+            <a:schemeClr val="accent1"/>
+          </a:effectRef>
+          <a:fontRef idx="minor">
+            <a:schemeClr val="lt1"/>
+          </a:fontRef>
+        </p:style>
+        <p:txBody>
+          <a:bodyPr rtlCol="0" anchor="ctr"/>
+          <a:lstStyle/>
+          <a:p>
+            <a:pPr algn="ctr"/>
+          </a:p>
+        </p:txBody>
+      </p:sp>
+      <p:sp>
+        <p:nvSpPr>
+          <p:cNvPr id="11" name="TextBox 10"/>
+          <p:cNvSpPr txBox="1"/>
+          <p:nvPr/>
+        </p:nvSpPr>
+        <p:spPr>
+          <a:xfrm>
+            <a:off x="896112" y="3319272"/>
+            <a:ext cx="2926080" cy="274320"/>
+          </a:xfrm>
+          <a:prstGeom prst="rect">
+            <a:avLst/>
+          </a:prstGeom>
+          <a:noFill/>
+        </p:spPr>
+        <p:txBody>
+          <a:bodyPr wrap="square" lIns="73152" rIns="73152" tIns="36576" bIns="36576">
+            <a:spAutoFit/>
+          </a:bodyPr>
+          <a:lstStyle/>
+          <a:p>
+            <a:pPr algn="l">
+              <a:spcAft>
+                <a:spcPts val="0"/>
+              </a:spcAft>
+              <a:defRPr sz="1800" b="1">
+                <a:solidFill>
+                  <a:srgbClr val="BE3B3B"/>
+                </a:solidFill>
+                <a:latin typeface="Noto Sans CJK KR"/>
+              </a:defRPr>
+            </a:pPr>
+            <a:r>
+              <a:t>증상 2: 한 방향으로만 전달됨</a:t>
+            </a:r>
+          </a:p>
+        </p:txBody>
+      </p:sp>
+      <p:sp>
+        <p:nvSpPr>
+          <p:cNvPr id="12" name="TextBox 11"/>
+          <p:cNvSpPr txBox="1"/>
+          <p:nvPr/>
+        </p:nvSpPr>
+        <p:spPr>
+          <a:xfrm>
+            <a:off x="3794760" y="3300984"/>
+            <a:ext cx="7543800" cy="621792"/>
+          </a:xfrm>
+          <a:prstGeom prst="rect">
+            <a:avLst/>
+          </a:prstGeom>
+          <a:noFill/>
+        </p:spPr>
+        <p:txBody>
+          <a:bodyPr wrap="square" lIns="73152" rIns="73152" tIns="36576" bIns="36576">
+            <a:spAutoFit/>
+          </a:bodyPr>
+          <a:lstStyle/>
+          <a:p>
+            <a:pPr algn="l">
+              <a:spcAft>
+                <a:spcPts val="0"/>
+              </a:spcAft>
+              <a:defRPr sz="1600" b="0">
+                <a:solidFill>
+                  <a:srgbClr val="122C4E"/>
+                </a:solidFill>
+                <a:latin typeface="Noto Sans CJK KR"/>
+              </a:defRPr>
+            </a:pPr>
+            <a:r>
+              <a:t>우선 확인: direction ROS_TO_GZ/GZ_TO_ROS 설정을 확인한다.</a:t>
+            </a:r>
+            <a:br/>
+            <a:r>
+              <a:t>수정 후: ros2 topic list | rg '/cmd_vel|/odom|/scan|/imu|/camera|/clock'</a:t>
+            </a:r>
+          </a:p>
+        </p:txBody>
+      </p:sp>
+      <p:sp>
+        <p:nvSpPr>
+          <p:cNvPr id="13" name="TextBox 12"/>
+          <p:cNvSpPr txBox="1"/>
+          <p:nvPr/>
+        </p:nvSpPr>
+        <p:spPr>
+          <a:xfrm>
+            <a:off x="822960" y="5102352"/>
+            <a:ext cx="10607040" cy="402336"/>
+          </a:xfrm>
+          <a:prstGeom prst="rect">
+            <a:avLst/>
+          </a:prstGeom>
+          <a:noFill/>
+        </p:spPr>
+        <p:txBody>
+          <a:bodyPr wrap="square" lIns="73152" rIns="73152" tIns="36576" bIns="36576">
+            <a:spAutoFit/>
+          </a:bodyPr>
+          <a:lstStyle/>
+          <a:p>
+            <a:pPr algn="ctr">
+              <a:spcAft>
+                <a:spcPts val="0"/>
+              </a:spcAft>
+              <a:defRPr sz="1800" b="1">
+                <a:solidFill>
+                  <a:srgbClr val="DB7E22"/>
+                </a:solidFill>
+                <a:latin typeface="Noto Sans CJK KR"/>
+              </a:defRPr>
+            </a:pPr>
+            <a:r>
+              <a:t>공통 순서: ① 현재 폴더 ② source ③ 파일 경로 ④ 이름/타입/단위 ⑤ build·source 후 재실행</a:t>
+            </a:r>
+          </a:p>
+        </p:txBody>
+      </p:sp>
+    </p:spTree>
+  </p:cSld>
+  <p:clrMapOvr>
+    <a:masterClrMapping/>
+  </p:clrMapOvr>
+</p:sld>
+</file>
+
+<file path=ppt/slides/slide22.xml><?xml version="1.0" encoding="utf-8"?>
+<p:sld xmlns:a="http://schemas.openxmlformats.org/drawingml/2006/main" xmlns:p="http://schemas.openxmlformats.org/presentationml/2006/main" xmlns:r="http://schemas.openxmlformats.org/officeDocument/2006/relationships">
+  <p:cSld>
+    <p:spTree>
+      <p:nvGrpSpPr>
+        <p:cNvPr id="1" name=""/>
+        <p:cNvGrpSpPr/>
+        <p:nvPr/>
+      </p:nvGrpSpPr>
+      <p:grpSpPr/>
+      <p:sp>
+        <p:nvSpPr>
+          <p:cNvPr id="2" name="TextBox 1"/>
+          <p:cNvSpPr txBox="1"/>
+          <p:nvPr/>
+        </p:nvSpPr>
+        <p:spPr>
+          <a:xfrm>
+            <a:off x="566928" y="347472"/>
+            <a:ext cx="10881360" cy="438912"/>
+          </a:xfrm>
+          <a:prstGeom prst="rect">
+            <a:avLst/>
+          </a:prstGeom>
+          <a:noFill/>
+        </p:spPr>
+        <p:txBody>
+          <a:bodyPr wrap="square" lIns="73152" rIns="73152" tIns="36576" bIns="36576">
+            <a:spAutoFit/>
+          </a:bodyPr>
+          <a:lstStyle/>
+          <a:p>
+            <a:pPr algn="l">
+              <a:spcAft>
+                <a:spcPts val="0"/>
+              </a:spcAft>
+              <a:defRPr sz="3200" b="1">
+                <a:solidFill>
+                  <a:srgbClr val="122C4E"/>
+                </a:solidFill>
+                <a:latin typeface="Noto Sans CJK KR"/>
+              </a:defRPr>
+            </a:pPr>
+            <a:r>
+              <a:t>막혔을 때만: Complete를 복구용으로 사용한다</a:t>
+            </a:r>
+          </a:p>
+        </p:txBody>
+      </p:sp>
+      <p:sp>
+        <p:nvSpPr>
+          <p:cNvPr id="3" name="TextBox 2"/>
+          <p:cNvSpPr txBox="1"/>
+          <p:nvPr/>
+        </p:nvSpPr>
+        <p:spPr>
+          <a:xfrm>
+            <a:off x="603504" y="859536"/>
+            <a:ext cx="10698480" cy="292608"/>
+          </a:xfrm>
+          <a:prstGeom prst="rect">
+            <a:avLst/>
+          </a:prstGeom>
+          <a:noFill/>
+        </p:spPr>
+        <p:txBody>
+          <a:bodyPr wrap="square" lIns="73152" rIns="73152" tIns="36576" bIns="36576">
+            <a:spAutoFit/>
+          </a:bodyPr>
+          <a:lstStyle/>
+          <a:p>
+            <a:pPr algn="l">
+              <a:spcAft>
+                <a:spcPts val="0"/>
+              </a:spcAft>
+              <a:defRPr sz="1700" b="0">
+                <a:solidFill>
+                  <a:srgbClr val="5C6672"/>
+                </a:solidFill>
+                <a:latin typeface="Noto Sans CJK KR"/>
+              </a:defRPr>
+            </a:pPr>
+            <a:r>
+              <a:t>이 슬라이드가 먼저가 아닙니다. 직접 입력·실행을 시도한 뒤에만 내 파일과 Complete를 비교합니다.</a:t>
+            </a:r>
+          </a:p>
+        </p:txBody>
+      </p:sp>
+      <p:sp>
+        <p:nvSpPr>
+          <p:cNvPr id="4" name="TextBox 3"/>
+          <p:cNvSpPr txBox="1"/>
+          <p:nvPr/>
+        </p:nvSpPr>
+        <p:spPr>
+          <a:xfrm>
+            <a:off x="530352" y="6510528"/>
+            <a:ext cx="7772400" cy="201168"/>
+          </a:xfrm>
+          <a:prstGeom prst="rect">
+            <a:avLst/>
+          </a:prstGeom>
+          <a:noFill/>
+        </p:spPr>
+        <p:txBody>
+          <a:bodyPr wrap="square" lIns="73152" rIns="73152" tIns="36576" bIns="36576">
+            <a:spAutoFit/>
+          </a:bodyPr>
+          <a:lstStyle/>
+          <a:p>
+            <a:pPr algn="l">
+              <a:spcAft>
+                <a:spcPts val="0"/>
+              </a:spcAft>
+              <a:defRPr sz="1000" b="0">
+                <a:solidFill>
+                  <a:srgbClr val="5C6672"/>
+                </a:solidFill>
+                <a:latin typeface="Noto Sans CJK KR"/>
+              </a:defRPr>
+            </a:pPr>
+            <a:r>
+              <a:t>ROS 2 Jazzy · Gazebo Harmonic · M10 · 따라 하기형 AGV 실습</a:t>
+            </a:r>
+          </a:p>
+        </p:txBody>
+      </p:sp>
+      <p:sp>
+        <p:nvSpPr>
+          <p:cNvPr id="5" name="TextBox 4"/>
+          <p:cNvSpPr txBox="1"/>
+          <p:nvPr/>
+        </p:nvSpPr>
+        <p:spPr>
+          <a:xfrm>
+            <a:off x="9144000" y="6510528"/>
+            <a:ext cx="2468880" cy="201168"/>
+          </a:xfrm>
+          <a:prstGeom prst="rect">
+            <a:avLst/>
+          </a:prstGeom>
+          <a:noFill/>
+        </p:spPr>
+        <p:txBody>
+          <a:bodyPr wrap="square" lIns="73152" rIns="73152" tIns="36576" bIns="36576">
+            <a:spAutoFit/>
+          </a:bodyPr>
+          <a:lstStyle/>
+          <a:p>
+            <a:pPr algn="r">
+              <a:spcAft>
+                <a:spcPts val="0"/>
+              </a:spcAft>
+              <a:defRPr sz="1000" b="0">
+                <a:solidFill>
+                  <a:srgbClr val="5C6672"/>
+                </a:solidFill>
+                <a:latin typeface="Noto Sans CJK KR"/>
+              </a:defRPr>
+            </a:pPr>
+            <a:r>
+              <a:t>명령·파일 경로는 슬라이드에서 복사 가능</a:t>
+            </a:r>
+          </a:p>
+        </p:txBody>
+      </p:sp>
+      <p:sp>
+        <p:nvSpPr>
+          <p:cNvPr id="6" name="Rectangle 5"/>
+          <p:cNvSpPr/>
+          <p:nvPr/>
+        </p:nvSpPr>
+        <p:spPr>
+          <a:xfrm>
+            <a:off x="566928" y="1188720"/>
+            <a:ext cx="11064240" cy="347472"/>
+          </a:xfrm>
+          <a:prstGeom prst="rect">
+            <a:avLst/>
+          </a:prstGeom>
+          <a:solidFill>
+            <a:srgbClr val="F4F7FB"/>
+          </a:solidFill>
+          <a:ln>
+            <a:solidFill>
+              <a:srgbClr val="F4F7FB"/>
+            </a:solidFill>
+          </a:ln>
+        </p:spPr>
+        <p:style>
+          <a:lnRef idx="1">
+            <a:schemeClr val="accent1"/>
+          </a:lnRef>
+          <a:fillRef idx="3">
+            <a:schemeClr val="accent1"/>
+          </a:fillRef>
+          <a:effectRef idx="2">
+            <a:schemeClr val="accent1"/>
+          </a:effectRef>
+          <a:fontRef idx="minor">
+            <a:schemeClr val="lt1"/>
+          </a:fontRef>
+        </p:style>
+        <p:txBody>
+          <a:bodyPr rtlCol="0" anchor="ctr" wrap="square" lIns="73152" rIns="73152" tIns="36576" bIns="36576"/>
+          <a:lstStyle/>
+          <a:p>
+            <a:pPr algn="l">
+              <a:spcAft>
+                <a:spcPts val="0"/>
+              </a:spcAft>
+              <a:defRPr sz="1300" b="1">
+                <a:solidFill>
+                  <a:srgbClr val="122C4E"/>
+                </a:solidFill>
+                <a:latin typeface="Noto Sans CJK KR"/>
+              </a:defRPr>
+            </a:pPr>
+            <a:r>
+              <a:t>현재 단계 복구용 Complete    |    현재 폴더 ~/ros2_curri    |    현재 터미널</a:t>
+            </a:r>
+          </a:p>
+        </p:txBody>
+      </p:sp>
+      <p:sp>
+        <p:nvSpPr>
+          <p:cNvPr id="7" name="TextBox 6"/>
+          <p:cNvSpPr txBox="1"/>
+          <p:nvPr/>
+        </p:nvSpPr>
+        <p:spPr>
+          <a:xfrm>
+            <a:off x="713232" y="1664208"/>
+            <a:ext cx="10698480" cy="402336"/>
+          </a:xfrm>
+          <a:prstGeom prst="rect">
+            <a:avLst/>
+          </a:prstGeom>
+          <a:noFill/>
+        </p:spPr>
+        <p:txBody>
+          <a:bodyPr wrap="square" lIns="73152" rIns="73152" tIns="36576" bIns="36576">
+            <a:spAutoFit/>
+          </a:bodyPr>
+          <a:lstStyle/>
+          <a:p>
+            <a:pPr algn="ctr">
+              <a:spcAft>
+                <a:spcPts val="0"/>
+              </a:spcAft>
+              <a:defRPr sz="1800" b="1">
+                <a:solidFill>
+                  <a:srgbClr val="DB7E22"/>
+                </a:solidFill>
+                <a:latin typeface="Noto Sans CJK KR"/>
+              </a:defRPr>
+            </a:pPr>
+            <a:r>
+              <a:t>권장 순서: ① 내 오류를 확인  ② Complete와 diff  ③ 꼭 필요할 때만 backup 후 복사</a:t>
+            </a:r>
+          </a:p>
+        </p:txBody>
+      </p:sp>
+      <p:sp>
+        <p:nvSpPr>
+          <p:cNvPr id="8" name="Rounded Rectangle 7"/>
+          <p:cNvSpPr/>
+          <p:nvPr/>
+        </p:nvSpPr>
+        <p:spPr>
+          <a:xfrm>
+            <a:off x="676656" y="2423160"/>
+            <a:ext cx="10881360" cy="2606040"/>
+          </a:xfrm>
+          <a:prstGeom prst="roundRect">
+            <a:avLst/>
+          </a:prstGeom>
+          <a:solidFill>
+            <a:srgbClr val="1D232D"/>
+          </a:solidFill>
+          <a:ln>
+            <a:solidFill>
+              <a:srgbClr val="1D232D"/>
+            </a:solidFill>
+          </a:ln>
+        </p:spPr>
+        <p:style>
+          <a:lnRef idx="1">
+            <a:schemeClr val="accent1"/>
+          </a:lnRef>
+          <a:fillRef idx="3">
+            <a:schemeClr val="accent1"/>
+          </a:fillRef>
+          <a:effectRef idx="2">
+            <a:schemeClr val="accent1"/>
+          </a:effectRef>
+          <a:fontRef idx="minor">
+            <a:schemeClr val="lt1"/>
+          </a:fontRef>
+        </p:style>
+        <p:txBody>
+          <a:bodyPr rtlCol="0" anchor="ctr" wrap="square" lIns="73152" rIns="73152" tIns="36576" bIns="36576"/>
+          <a:lstStyle/>
+          <a:p>
+            <a:pPr algn="l">
+              <a:spcAft>
+                <a:spcPts val="0"/>
+              </a:spcAft>
+              <a:defRPr sz="1400" b="0">
+                <a:solidFill>
+                  <a:srgbClr val="FFFFFF"/>
+                </a:solidFill>
+                <a:latin typeface="DejaVu Sans Mono"/>
+              </a:defRPr>
+            </a:pPr>
+            <a:r>
+              <a:t>cd ~/ros2_curri</a:t>
+            </a:r>
+            <a:br/>
+            <a:r>
+              <a:t>diff -ru my_agv_ws/src blocks/C_drive_visualization/M10_ros_gz_bridge/complete/agv_ws/src || true</a:t>
+            </a:r>
+            <a:br/>
+            <a:r>
+              <a:t>cp -a my_agv_ws/src my_agv_ws/src_before_M10</a:t>
+            </a:r>
+            <a:br/>
+            <a:r>
+              <a:t>cp -a blocks/C_drive_visualization/M10_ros_gz_bridge/complete/agv_ws/src/. my_agv_ws/src/</a:t>
+            </a:r>
+            <a:br/>
+            <a:r>
+              <a:t>cd my_agv_ws &amp;&amp; colcon build --symlink-install &amp;&amp; source install/setup.bash</a:t>
+            </a:r>
+          </a:p>
+        </p:txBody>
+      </p:sp>
+      <p:sp>
+        <p:nvSpPr>
+          <p:cNvPr id="9" name="TextBox 8"/>
+          <p:cNvSpPr txBox="1"/>
+          <p:nvPr/>
+        </p:nvSpPr>
+        <p:spPr>
+          <a:xfrm>
+            <a:off x="786384" y="5413248"/>
+            <a:ext cx="10424160" cy="429768"/>
+          </a:xfrm>
+          <a:prstGeom prst="rect">
+            <a:avLst/>
+          </a:prstGeom>
+          <a:noFill/>
+        </p:spPr>
+        <p:txBody>
+          <a:bodyPr wrap="square" lIns="73152" rIns="73152" tIns="36576" bIns="36576">
+            <a:spAutoFit/>
+          </a:bodyPr>
+          <a:lstStyle/>
+          <a:p>
+            <a:pPr algn="ctr">
+              <a:spcAft>
+                <a:spcPts val="0"/>
+              </a:spcAft>
+              <a:defRPr sz="1700" b="1">
+                <a:solidFill>
+                  <a:srgbClr val="2A8B5A"/>
+                </a:solidFill>
+                <a:latin typeface="Noto Sans CJK KR"/>
+              </a:defRPr>
+            </a:pPr>
+            <a:r>
+              <a:t>복구 뒤에는 끝내지 말고, 내 파일과 Complete의 차이를 한 줄씩 설명한 뒤 다시 직접 입력해 봅니다.</a:t>
+            </a:r>
+          </a:p>
+        </p:txBody>
+      </p:sp>
+    </p:spTree>
+  </p:cSld>
+  <p:clrMapOvr>
+    <a:masterClrMapping/>
+  </p:clrMapOvr>
+</p:sld>
+</file>
+
+<file path=ppt/slides/slide23.xml><?xml version="1.0" encoding="utf-8"?>
+<p:sld xmlns:a="http://schemas.openxmlformats.org/drawingml/2006/main" xmlns:p="http://schemas.openxmlformats.org/presentationml/2006/main" xmlns:r="http://schemas.openxmlformats.org/officeDocument/2006/relationships">
+  <p:cSld>
+    <p:spTree>
+      <p:nvGrpSpPr>
+        <p:cNvPr id="1" name=""/>
+        <p:cNvGrpSpPr/>
+        <p:nvPr/>
+      </p:nvGrpSpPr>
+      <p:grpSpPr/>
+      <p:sp>
+        <p:nvSpPr>
+          <p:cNvPr id="2" name="TextBox 1"/>
+          <p:cNvSpPr txBox="1"/>
+          <p:nvPr/>
+        </p:nvSpPr>
+        <p:spPr>
+          <a:xfrm>
+            <a:off x="566928" y="347472"/>
+            <a:ext cx="10881360" cy="438912"/>
+          </a:xfrm>
+          <a:prstGeom prst="rect">
+            <a:avLst/>
+          </a:prstGeom>
+          <a:noFill/>
+        </p:spPr>
+        <p:txBody>
+          <a:bodyPr wrap="square" lIns="73152" rIns="73152" tIns="36576" bIns="36576">
+            <a:spAutoFit/>
+          </a:bodyPr>
+          <a:lstStyle/>
+          <a:p>
+            <a:pPr algn="l">
+              <a:spcAft>
+                <a:spcPts val="0"/>
+              </a:spcAft>
+              <a:defRPr sz="3200" b="1">
+                <a:solidFill>
+                  <a:srgbClr val="122C4E"/>
+                </a:solidFill>
+                <a:latin typeface="Noto Sans CJK KR"/>
+              </a:defRPr>
+            </a:pPr>
+            <a:r>
+              <a:t>미니 실습: 값 하나를 바꾸고 결과를 비교한다</a:t>
+            </a:r>
+          </a:p>
+        </p:txBody>
+      </p:sp>
+      <p:sp>
+        <p:nvSpPr>
+          <p:cNvPr id="3" name="TextBox 2"/>
+          <p:cNvSpPr txBox="1"/>
+          <p:nvPr/>
+        </p:nvSpPr>
+        <p:spPr>
+          <a:xfrm>
+            <a:off x="603504" y="859536"/>
+            <a:ext cx="10698480" cy="292608"/>
+          </a:xfrm>
+          <a:prstGeom prst="rect">
+            <a:avLst/>
+          </a:prstGeom>
+          <a:noFill/>
+        </p:spPr>
+        <p:txBody>
+          <a:bodyPr wrap="square" lIns="73152" rIns="73152" tIns="36576" bIns="36576">
+            <a:spAutoFit/>
+          </a:bodyPr>
+          <a:lstStyle/>
+          <a:p>
+            <a:pPr algn="l">
+              <a:spcAft>
+                <a:spcPts val="0"/>
+              </a:spcAft>
+              <a:defRPr sz="1700" b="0">
+                <a:solidFill>
+                  <a:srgbClr val="5C6672"/>
+                </a:solidFill>
+                <a:latin typeface="Noto Sans CJK KR"/>
+              </a:defRPr>
+            </a:pPr>
+            <a:r>
+              <a:t>정상 결과를 만든 뒤에는 한 번에 하나의 값만 바꿉니다.</a:t>
+            </a:r>
+          </a:p>
+        </p:txBody>
+      </p:sp>
+      <p:sp>
+        <p:nvSpPr>
+          <p:cNvPr id="4" name="TextBox 3"/>
+          <p:cNvSpPr txBox="1"/>
+          <p:nvPr/>
+        </p:nvSpPr>
+        <p:spPr>
+          <a:xfrm>
+            <a:off x="530352" y="6510528"/>
+            <a:ext cx="7772400" cy="201168"/>
+          </a:xfrm>
+          <a:prstGeom prst="rect">
+            <a:avLst/>
+          </a:prstGeom>
+          <a:noFill/>
+        </p:spPr>
+        <p:txBody>
+          <a:bodyPr wrap="square" lIns="73152" rIns="73152" tIns="36576" bIns="36576">
+            <a:spAutoFit/>
+          </a:bodyPr>
+          <a:lstStyle/>
+          <a:p>
+            <a:pPr algn="l">
+              <a:spcAft>
+                <a:spcPts val="0"/>
+              </a:spcAft>
+              <a:defRPr sz="1000" b="0">
+                <a:solidFill>
+                  <a:srgbClr val="5C6672"/>
+                </a:solidFill>
+                <a:latin typeface="Noto Sans CJK KR"/>
+              </a:defRPr>
+            </a:pPr>
+            <a:r>
+              <a:t>ROS 2 Jazzy · Gazebo Harmonic · M10 · 따라 하기형 AGV 실습</a:t>
+            </a:r>
+          </a:p>
+        </p:txBody>
+      </p:sp>
+      <p:sp>
+        <p:nvSpPr>
+          <p:cNvPr id="5" name="TextBox 4"/>
+          <p:cNvSpPr txBox="1"/>
+          <p:nvPr/>
+        </p:nvSpPr>
+        <p:spPr>
+          <a:xfrm>
+            <a:off x="9144000" y="6510528"/>
+            <a:ext cx="2468880" cy="201168"/>
+          </a:xfrm>
+          <a:prstGeom prst="rect">
+            <a:avLst/>
+          </a:prstGeom>
+          <a:noFill/>
+        </p:spPr>
+        <p:txBody>
+          <a:bodyPr wrap="square" lIns="73152" rIns="73152" tIns="36576" bIns="36576">
+            <a:spAutoFit/>
+          </a:bodyPr>
+          <a:lstStyle/>
+          <a:p>
+            <a:pPr algn="r">
+              <a:spcAft>
+                <a:spcPts val="0"/>
+              </a:spcAft>
+              <a:defRPr sz="1000" b="0">
+                <a:solidFill>
+                  <a:srgbClr val="5C6672"/>
+                </a:solidFill>
+                <a:latin typeface="Noto Sans CJK KR"/>
+              </a:defRPr>
+            </a:pPr>
+            <a:r>
+              <a:t>명령·파일 경로는 슬라이드에서 복사 가능</a:t>
+            </a:r>
+          </a:p>
+        </p:txBody>
+      </p:sp>
+      <p:sp>
+        <p:nvSpPr>
+          <p:cNvPr id="6" name="Rectangle 5"/>
+          <p:cNvSpPr/>
+          <p:nvPr/>
+        </p:nvSpPr>
+        <p:spPr>
+          <a:xfrm>
+            <a:off x="566928" y="1188720"/>
+            <a:ext cx="11064240" cy="347472"/>
+          </a:xfrm>
+          <a:prstGeom prst="rect">
+            <a:avLst/>
+          </a:prstGeom>
+          <a:solidFill>
+            <a:srgbClr val="F4F7FB"/>
+          </a:solidFill>
+          <a:ln>
+            <a:solidFill>
+              <a:srgbClr val="F4F7FB"/>
+            </a:solidFill>
+          </a:ln>
+        </p:spPr>
+        <p:style>
+          <a:lnRef idx="1">
+            <a:schemeClr val="accent1"/>
+          </a:lnRef>
+          <a:fillRef idx="3">
+            <a:schemeClr val="accent1"/>
+          </a:fillRef>
+          <a:effectRef idx="2">
+            <a:schemeClr val="accent1"/>
+          </a:effectRef>
+          <a:fontRef idx="minor">
+            <a:schemeClr val="lt1"/>
+          </a:fontRef>
+        </p:style>
+        <p:txBody>
+          <a:bodyPr rtlCol="0" anchor="ctr" wrap="square" lIns="73152" rIns="73152" tIns="36576" bIns="36576"/>
+          <a:lstStyle/>
+          <a:p>
+            <a:pPr algn="l">
+              <a:spcAft>
+                <a:spcPts val="0"/>
+              </a:spcAft>
+              <a:defRPr sz="1300" b="1">
+                <a:solidFill>
+                  <a:srgbClr val="122C4E"/>
+                </a:solidFill>
+                <a:latin typeface="Noto Sans CJK KR"/>
+              </a:defRPr>
+            </a:pPr>
+            <a:r>
+              <a:t>현재 단계 미니 실습    |    현재 폴더 ~/ros2_curri/my_agv_ws    |    현재 터미널</a:t>
+            </a:r>
+          </a:p>
+        </p:txBody>
+      </p:sp>
+      <p:sp>
+        <p:nvSpPr>
+          <p:cNvPr id="7" name="Rounded Rectangle 6"/>
+          <p:cNvSpPr/>
+          <p:nvPr/>
+        </p:nvSpPr>
+        <p:spPr>
+          <a:xfrm>
+            <a:off x="749808" y="1874519"/>
+            <a:ext cx="10652760" cy="1993392"/>
+          </a:xfrm>
+          <a:prstGeom prst="roundRect">
+            <a:avLst/>
+          </a:prstGeom>
+          <a:solidFill>
+            <a:srgbClr val="FFF8EB"/>
+          </a:solidFill>
+          <a:ln>
+            <a:solidFill>
+              <a:srgbClr val="ECC680"/>
+            </a:solidFill>
+          </a:ln>
+        </p:spPr>
+        <p:style>
+          <a:lnRef idx="1">
+            <a:schemeClr val="accent1"/>
+          </a:lnRef>
+          <a:fillRef idx="3">
+            <a:schemeClr val="accent1"/>
+          </a:fillRef>
+          <a:effectRef idx="2">
+            <a:schemeClr val="accent1"/>
+          </a:effectRef>
+          <a:fontRef idx="minor">
+            <a:schemeClr val="lt1"/>
+          </a:fontRef>
+        </p:style>
+        <p:txBody>
+          <a:bodyPr rtlCol="0" anchor="ctr" wrap="square" lIns="73152" rIns="73152" tIns="36576" bIns="36576"/>
+          <a:lstStyle/>
+          <a:p>
+            <a:pPr algn="ctr">
+              <a:spcAft>
+                <a:spcPts val="0"/>
+              </a:spcAft>
+              <a:defRPr sz="2300" b="1">
+                <a:solidFill>
+                  <a:srgbClr val="122C4E"/>
+                </a:solidFill>
+                <a:latin typeface="Noto Sans CJK KR"/>
+              </a:defRPr>
+            </a:pPr>
+            <a:r>
+              <a:t>bridge.yaml에서 /scan 항목의 ros_type_name을 읽고 `ros2 interface show sensor_msgs/msg/LaserScan`으로 필드를 확인한다.</a:t>
+            </a:r>
+          </a:p>
+        </p:txBody>
+      </p:sp>
+      <p:sp>
+        <p:nvSpPr>
+          <p:cNvPr id="8" name="TextBox 7"/>
+          <p:cNvSpPr txBox="1"/>
+          <p:nvPr/>
+        </p:nvSpPr>
+        <p:spPr>
+          <a:xfrm>
+            <a:off x="877824" y="4590288"/>
+            <a:ext cx="10241280" cy="594360"/>
+          </a:xfrm>
+          <a:prstGeom prst="rect">
+            <a:avLst/>
+          </a:prstGeom>
+          <a:noFill/>
+        </p:spPr>
+        <p:txBody>
+          <a:bodyPr wrap="square" lIns="73152" rIns="73152" tIns="36576" bIns="36576">
+            <a:spAutoFit/>
+          </a:bodyPr>
+          <a:lstStyle/>
+          <a:p>
+            <a:pPr algn="ctr">
+              <a:spcAft>
+                <a:spcPts val="0"/>
+              </a:spcAft>
+              <a:defRPr sz="1900" b="1">
+                <a:solidFill>
+                  <a:srgbClr val="DB7E22"/>
+                </a:solidFill>
+                <a:latin typeface="Noto Sans CJK KR"/>
+              </a:defRPr>
+            </a:pPr>
+            <a:r>
+              <a:t>기록할 것: 바꾼 값(단위) · 기대한 변화 · 실제 출력/화면 · 원래 값으로 되돌린 결과</a:t>
+            </a:r>
+          </a:p>
+        </p:txBody>
+      </p:sp>
+    </p:spTree>
+  </p:cSld>
+  <p:clrMapOvr>
+    <a:masterClrMapping/>
+  </p:clrMapOvr>
+</p:sld>
+</file>
+
+<file path=ppt/slides/slide24.xml><?xml version="1.0" encoding="utf-8"?>
+<p:sld xmlns:a="http://schemas.openxmlformats.org/drawingml/2006/main" xmlns:p="http://schemas.openxmlformats.org/presentationml/2006/main" xmlns:r="http://schemas.openxmlformats.org/officeDocument/2006/relationships">
+  <p:cSld>
+    <p:spTree>
+      <p:nvGrpSpPr>
+        <p:cNvPr id="1" name=""/>
+        <p:cNvGrpSpPr/>
+        <p:nvPr/>
+      </p:nvGrpSpPr>
+      <p:grpSpPr/>
+      <p:sp>
+        <p:nvSpPr>
+          <p:cNvPr id="2" name="TextBox 1"/>
+          <p:cNvSpPr txBox="1"/>
+          <p:nvPr/>
+        </p:nvSpPr>
+        <p:spPr>
+          <a:xfrm>
+            <a:off x="566928" y="347472"/>
+            <a:ext cx="10881360" cy="438912"/>
+          </a:xfrm>
+          <a:prstGeom prst="rect">
+            <a:avLst/>
+          </a:prstGeom>
+          <a:noFill/>
+        </p:spPr>
+        <p:txBody>
+          <a:bodyPr wrap="square" lIns="73152" rIns="73152" tIns="36576" bIns="36576">
+            <a:spAutoFit/>
+          </a:bodyPr>
+          <a:lstStyle/>
+          <a:p>
+            <a:pPr algn="l">
+              <a:spcAft>
+                <a:spcPts val="0"/>
+              </a:spcAft>
+              <a:defRPr sz="3200" b="1">
+                <a:solidFill>
+                  <a:srgbClr val="122C4E"/>
+                </a:solidFill>
+                <a:latin typeface="Noto Sans CJK KR"/>
+              </a:defRPr>
+            </a:pPr>
+            <a:r>
+              <a:t>내 프로젝트 체크포인트를 저장하고 다음 모듈로 넘긴다</a:t>
+            </a:r>
+          </a:p>
+        </p:txBody>
+      </p:sp>
+      <p:sp>
+        <p:nvSpPr>
+          <p:cNvPr id="3" name="TextBox 2"/>
+          <p:cNvSpPr txBox="1"/>
+          <p:nvPr/>
+        </p:nvSpPr>
+        <p:spPr>
+          <a:xfrm>
+            <a:off x="603504" y="859536"/>
+            <a:ext cx="10698480" cy="292608"/>
+          </a:xfrm>
+          <a:prstGeom prst="rect">
+            <a:avLst/>
+          </a:prstGeom>
+          <a:noFill/>
+        </p:spPr>
+        <p:txBody>
+          <a:bodyPr wrap="square" lIns="73152" rIns="73152" tIns="36576" bIns="36576">
+            <a:spAutoFit/>
+          </a:bodyPr>
+          <a:lstStyle/>
+          <a:p>
+            <a:pPr algn="l">
+              <a:spcAft>
+                <a:spcPts val="0"/>
+              </a:spcAft>
+              <a:defRPr sz="1700" b="0">
+                <a:solidFill>
+                  <a:srgbClr val="5C6672"/>
+                </a:solidFill>
+                <a:latin typeface="Noto Sans CJK KR"/>
+              </a:defRPr>
+            </a:pPr>
+            <a:r>
+              <a:t>Complete는 복구용 비교 기준이고, 다음 단계는 내가 직접 만든 workspace에서 계속합니다.</a:t>
+            </a:r>
+          </a:p>
+        </p:txBody>
+      </p:sp>
+      <p:sp>
+        <p:nvSpPr>
+          <p:cNvPr id="4" name="TextBox 3"/>
+          <p:cNvSpPr txBox="1"/>
+          <p:nvPr/>
+        </p:nvSpPr>
+        <p:spPr>
+          <a:xfrm>
+            <a:off x="530352" y="6510528"/>
+            <a:ext cx="7772400" cy="201168"/>
+          </a:xfrm>
+          <a:prstGeom prst="rect">
+            <a:avLst/>
+          </a:prstGeom>
+          <a:noFill/>
+        </p:spPr>
+        <p:txBody>
+          <a:bodyPr wrap="square" lIns="73152" rIns="73152" tIns="36576" bIns="36576">
+            <a:spAutoFit/>
+          </a:bodyPr>
+          <a:lstStyle/>
+          <a:p>
+            <a:pPr algn="l">
+              <a:spcAft>
+                <a:spcPts val="0"/>
+              </a:spcAft>
+              <a:defRPr sz="1000" b="0">
+                <a:solidFill>
+                  <a:srgbClr val="5C6672"/>
+                </a:solidFill>
+                <a:latin typeface="Noto Sans CJK KR"/>
+              </a:defRPr>
+            </a:pPr>
+            <a:r>
+              <a:t>ROS 2 Jazzy · Gazebo Harmonic · M10 · 따라 하기형 AGV 실습</a:t>
+            </a:r>
+          </a:p>
+        </p:txBody>
+      </p:sp>
+      <p:sp>
+        <p:nvSpPr>
+          <p:cNvPr id="5" name="TextBox 4"/>
+          <p:cNvSpPr txBox="1"/>
+          <p:nvPr/>
+        </p:nvSpPr>
+        <p:spPr>
+          <a:xfrm>
+            <a:off x="9144000" y="6510528"/>
+            <a:ext cx="2468880" cy="201168"/>
+          </a:xfrm>
+          <a:prstGeom prst="rect">
+            <a:avLst/>
+          </a:prstGeom>
+          <a:noFill/>
+        </p:spPr>
+        <p:txBody>
+          <a:bodyPr wrap="square" lIns="73152" rIns="73152" tIns="36576" bIns="36576">
+            <a:spAutoFit/>
+          </a:bodyPr>
+          <a:lstStyle/>
+          <a:p>
+            <a:pPr algn="r">
+              <a:spcAft>
+                <a:spcPts val="0"/>
+              </a:spcAft>
+              <a:defRPr sz="1000" b="0">
+                <a:solidFill>
+                  <a:srgbClr val="5C6672"/>
+                </a:solidFill>
+                <a:latin typeface="Noto Sans CJK KR"/>
+              </a:defRPr>
+            </a:pPr>
+            <a:r>
+              <a:t>명령·파일 경로는 슬라이드에서 복사 가능</a:t>
+            </a:r>
+          </a:p>
+        </p:txBody>
+      </p:sp>
+      <p:sp>
+        <p:nvSpPr>
+          <p:cNvPr id="6" name="Rectangle 5"/>
+          <p:cNvSpPr/>
+          <p:nvPr/>
+        </p:nvSpPr>
+        <p:spPr>
+          <a:xfrm>
+            <a:off x="566928" y="1188720"/>
+            <a:ext cx="11064240" cy="347472"/>
+          </a:xfrm>
+          <a:prstGeom prst="rect">
+            <a:avLst/>
+          </a:prstGeom>
+          <a:solidFill>
+            <a:srgbClr val="F4F7FB"/>
+          </a:solidFill>
+          <a:ln>
+            <a:solidFill>
+              <a:srgbClr val="F4F7FB"/>
+            </a:solidFill>
+          </a:ln>
+        </p:spPr>
+        <p:style>
+          <a:lnRef idx="1">
+            <a:schemeClr val="accent1"/>
+          </a:lnRef>
+          <a:fillRef idx="3">
+            <a:schemeClr val="accent1"/>
+          </a:fillRef>
+          <a:effectRef idx="2">
+            <a:schemeClr val="accent1"/>
+          </a:effectRef>
+          <a:fontRef idx="minor">
+            <a:schemeClr val="lt1"/>
+          </a:fontRef>
+        </p:style>
+        <p:txBody>
+          <a:bodyPr rtlCol="0" anchor="ctr" wrap="square" lIns="73152" rIns="73152" tIns="36576" bIns="36576"/>
+          <a:lstStyle/>
+          <a:p>
+            <a:pPr algn="l">
+              <a:spcAft>
+                <a:spcPts val="0"/>
+              </a:spcAft>
+              <a:defRPr sz="1300" b="1">
+                <a:solidFill>
+                  <a:srgbClr val="122C4E"/>
+                </a:solidFill>
+                <a:latin typeface="Noto Sans CJK KR"/>
+              </a:defRPr>
+            </a:pPr>
+            <a:r>
+              <a:t>현재 단계 체크포인트    |    현재 폴더 ~/ros2_curri/my_agv_ws    |    현재 터미널</a:t>
+            </a:r>
+          </a:p>
+        </p:txBody>
+      </p:sp>
+      <p:sp>
+        <p:nvSpPr>
+          <p:cNvPr id="7" name="Rounded Rectangle 6"/>
+          <p:cNvSpPr/>
+          <p:nvPr/>
+        </p:nvSpPr>
+        <p:spPr>
+          <a:xfrm>
+            <a:off x="685800" y="1737360"/>
+            <a:ext cx="10972800" cy="3611880"/>
+          </a:xfrm>
+          <a:prstGeom prst="roundRect">
+            <a:avLst/>
+          </a:prstGeom>
+          <a:solidFill>
+            <a:srgbClr val="F4F7FB"/>
+          </a:solidFill>
+          <a:ln>
+            <a:solidFill>
+              <a:srgbClr val="D2DCE8"/>
+            </a:solidFill>
+          </a:ln>
+        </p:spPr>
+        <p:style>
+          <a:lnRef idx="1">
+            <a:schemeClr val="accent1"/>
+          </a:lnRef>
+          <a:fillRef idx="3">
+            <a:schemeClr val="accent1"/>
+          </a:fillRef>
+          <a:effectRef idx="2">
+            <a:schemeClr val="accent1"/>
+          </a:effectRef>
+          <a:fontRef idx="minor">
+            <a:schemeClr val="lt1"/>
+          </a:fontRef>
+        </p:style>
+        <p:txBody>
+          <a:bodyPr rtlCol="0" anchor="ctr"/>
+          <a:lstStyle/>
+          <a:p>
+            <a:pPr algn="ctr"/>
+          </a:p>
+        </p:txBody>
+      </p:sp>
+      <p:sp>
+        <p:nvSpPr>
+          <p:cNvPr id="8" name="TextBox 7"/>
+          <p:cNvSpPr txBox="1"/>
+          <p:nvPr/>
+        </p:nvSpPr>
+        <p:spPr>
+          <a:xfrm>
+            <a:off x="896112" y="1993392"/>
+            <a:ext cx="10332720" cy="2971800"/>
+          </a:xfrm>
+          <a:prstGeom prst="rect">
+            <a:avLst/>
+          </a:prstGeom>
+          <a:noFill/>
+        </p:spPr>
+        <p:txBody>
+          <a:bodyPr wrap="square" lIns="109728" rIns="109728">
+            <a:spAutoFit/>
+          </a:bodyPr>
+          <a:lstStyle/>
+          <a:p>
+            <a:pPr>
+              <a:spcAft>
+                <a:spcPts val="800"/>
+              </a:spcAft>
+              <a:defRPr sz="1800">
+                <a:solidFill>
+                  <a:srgbClr val="122C4E"/>
+                </a:solidFill>
+                <a:latin typeface="Noto Sans CJK KR"/>
+              </a:defRPr>
+            </a:pPr>
+            <a:r>
+              <a:t>• □ 완료 화면: /cmd_vel ROS→Gazebo 및 odom/scan/imu/camera/clock Gazebo→ROS 매핑을 확인한다.</a:t>
+            </a:r>
+          </a:p>
+          <a:p>
+            <a:pPr>
+              <a:spcAft>
+                <a:spcPts val="800"/>
+              </a:spcAft>
+              <a:defRPr sz="1800">
+                <a:solidFill>
+                  <a:srgbClr val="122C4E"/>
+                </a:solidFill>
+                <a:latin typeface="Noto Sans CJK KR"/>
+              </a:defRPr>
+            </a:pPr>
+            <a:r>
+              <a:t>• □ 막혔을 때 비교할 Complete: blocks/C_drive_visualization/M10_ros_gz_bridge/complete/</a:t>
+            </a:r>
+          </a:p>
+          <a:p>
+            <a:pPr>
+              <a:spcAft>
+                <a:spcPts val="800"/>
+              </a:spcAft>
+              <a:defRPr sz="1800">
+                <a:solidFill>
+                  <a:srgbClr val="122C4E"/>
+                </a:solidFill>
+                <a:latin typeface="Noto Sans CJK KR"/>
+              </a:defRPr>
+            </a:pPr>
+            <a:r>
+              <a:t>• □ 정상 로그·캡처: logs/validation.log, screenshots/validation_terminal.png</a:t>
+            </a:r>
+          </a:p>
+          <a:p>
+            <a:pPr>
+              <a:spcAft>
+                <a:spcPts val="800"/>
+              </a:spcAft>
+              <a:defRPr sz="1800">
+                <a:solidFill>
+                  <a:srgbClr val="122C4E"/>
+                </a:solidFill>
+                <a:latin typeface="Noto Sans CJK KR"/>
+              </a:defRPr>
+            </a:pPr>
+            <a:r>
+              <a:t>• □ 버전 식별: CHECKSUM_or_TAG.txt의 SHA-256 manifest</a:t>
+            </a:r>
+          </a:p>
+          <a:p>
+            <a:pPr>
+              <a:spcAft>
+                <a:spcPts val="800"/>
+              </a:spcAft>
+              <a:defRPr sz="1800">
+                <a:solidFill>
+                  <a:srgbClr val="122C4E"/>
+                </a:solidFill>
+                <a:latin typeface="Noto Sans CJK KR"/>
+              </a:defRPr>
+            </a:pPr>
+            <a:r>
+              <a:t>• □ 다음 시작 조건: M11 RViz2</a:t>
+            </a:r>
+          </a:p>
+        </p:txBody>
+      </p:sp>
+      <p:sp>
+        <p:nvSpPr>
+          <p:cNvPr id="9" name="TextBox 8"/>
+          <p:cNvSpPr txBox="1"/>
+          <p:nvPr/>
+        </p:nvSpPr>
+        <p:spPr>
+          <a:xfrm>
+            <a:off x="868680" y="5596128"/>
+            <a:ext cx="10515600" cy="338328"/>
+          </a:xfrm>
+          <a:prstGeom prst="rect">
+            <a:avLst/>
+          </a:prstGeom>
+          <a:noFill/>
+        </p:spPr>
+        <p:txBody>
+          <a:bodyPr wrap="square" lIns="73152" rIns="73152" tIns="36576" bIns="36576">
+            <a:spAutoFit/>
+          </a:bodyPr>
+          <a:lstStyle/>
+          <a:p>
+            <a:pPr algn="ctr">
+              <a:spcAft>
+                <a:spcPts val="0"/>
+              </a:spcAft>
+              <a:defRPr sz="1700" b="1">
+                <a:solidFill>
+                  <a:srgbClr val="2A8B5A"/>
+                </a:solidFill>
+                <a:latin typeface="Noto Sans CJK KR"/>
+              </a:defRPr>
+            </a:pPr>
+            <a:r>
+              <a:t>다음 모듈을 시작하기 전, 내 src의 변경사항을 저장하고 현재 완료 조건을 다시 확인합니다.</a:t>
+            </a:r>
+          </a:p>
+        </p:txBody>
+      </p:sp>
+    </p:spTree>
+  </p:cSld>
+  <p:clrMapOvr>
+    <a:masterClrMapping/>
+  </p:clrMapOvr>
+</p:sld>
+</file>
+
+<file path=ppt/slides/slide25.xml><?xml version="1.0" encoding="utf-8"?>
+<p:sld xmlns:a="http://schemas.openxmlformats.org/drawingml/2006/main" xmlns:p="http://schemas.openxmlformats.org/presentationml/2006/main" xmlns:r="http://schemas.openxmlformats.org/officeDocument/2006/relationships">
+  <p:cSld>
+    <p:spTree>
+      <p:nvGrpSpPr>
+        <p:cNvPr id="1" name=""/>
+        <p:cNvGrpSpPr/>
+        <p:nvPr/>
+      </p:nvGrpSpPr>
+      <p:grpSpPr/>
+      <p:sp>
+        <p:nvSpPr>
+          <p:cNvPr id="2" name="TextBox 1"/>
+          <p:cNvSpPr txBox="1"/>
+          <p:nvPr/>
+        </p:nvSpPr>
+        <p:spPr>
+          <a:xfrm>
+            <a:off x="566928" y="347472"/>
+            <a:ext cx="10881360" cy="438912"/>
+          </a:xfrm>
+          <a:prstGeom prst="rect">
+            <a:avLst/>
+          </a:prstGeom>
+          <a:noFill/>
+        </p:spPr>
+        <p:txBody>
+          <a:bodyPr wrap="square" lIns="73152" rIns="73152" tIns="36576" bIns="36576">
+            <a:spAutoFit/>
+          </a:bodyPr>
+          <a:lstStyle/>
+          <a:p>
+            <a:pPr algn="l">
+              <a:spcAft>
+                <a:spcPts val="0"/>
+              </a:spcAft>
+              <a:defRPr sz="3200" b="1">
+                <a:solidFill>
+                  <a:srgbClr val="122C4E"/>
+                </a:solidFill>
+                <a:latin typeface="Noto Sans CJK KR"/>
+              </a:defRPr>
+            </a:pPr>
+            <a:r>
               <a:t>공식 참고 자료</a:t>
             </a:r>
           </a:p>
@@ -11515,7 +13725,7 @@
               </a:defRPr>
             </a:pPr>
             <a:r>
-              <a:t>현재 단계 시작    |    현재 폴더 ~/ros2_curri/agv_ws    |    현재 터미널</a:t>
+              <a:t>현재 단계 시작    |    현재 폴더 ~/ros2_curri/my_agv_ws    |    현재 터미널</a:t>
             </a:r>
           </a:p>
         </p:txBody>
@@ -11631,7 +13841,7 @@
               </a:defRPr>
             </a:pPr>
             <a:r>
-              <a:t>• 현재 폴더: ~/ros2_curri/agv_ws</a:t>
+              <a:t>• 현재 폴더: ~/ros2_curri/my_agv_ws</a:t>
             </a:r>
           </a:p>
           <a:p>
@@ -11702,7 +13912,7 @@
               </a:defRPr>
             </a:pPr>
             <a:r>
-              <a:t>확인: pwd가 ~/ros2_curri/agv_ws이고, 이전 모듈의 완료 조건을 한 문장으로 설명할 수 있으면 시작합니다.</a:t>
+              <a:t>확인: pwd가 ~/ros2_curri/my_agv_ws이고, 이전 모듈의 완료 조건을 한 문장으로 설명할 수 있으면 시작합니다.</a:t>
             </a:r>
           </a:p>
         </p:txBody>
@@ -12092,7 +14302,7 @@
               </a:defRPr>
             </a:pPr>
             <a:r>
-              <a:t>핵심 흐름을 한 장으로 이해하기</a:t>
+              <a:t>프로젝트에 이번 기능을 직접 추가한다</a:t>
             </a:r>
           </a:p>
         </p:txBody>
@@ -12131,7 +14341,7 @@
               </a:defRPr>
             </a:pPr>
             <a:r>
-              <a:t>상자와 화살표의 방향을 따라 데이터 또는 제어의 흐름을 읽습니다.</a:t>
+              <a:t>완성본을 먼저 복사하지 않습니다. 빈 workspace에 지금 필요한 폴더와 파일을 하나씩 만듭니다.</a:t>
             </a:r>
           </a:p>
         </p:txBody>
@@ -12216,20 +14426,201 @@
       </p:sp>
       <p:sp>
         <p:nvSpPr>
-          <p:cNvPr id="6" name="Rounded Rectangle 5"/>
+          <p:cNvPr id="6" name="Rectangle 5"/>
           <p:cNvSpPr/>
           <p:nvPr/>
         </p:nvSpPr>
         <p:spPr>
           <a:xfrm>
-            <a:off x="2738628" y="2743200"/>
-            <a:ext cx="2029968" cy="1051560"/>
+            <a:off x="566928" y="1188720"/>
+            <a:ext cx="11064240" cy="347472"/>
+          </a:xfrm>
+          <a:prstGeom prst="rect">
+            <a:avLst/>
+          </a:prstGeom>
+          <a:solidFill>
+            <a:srgbClr val="F4F7FB"/>
+          </a:solidFill>
+          <a:ln>
+            <a:solidFill>
+              <a:srgbClr val="F4F7FB"/>
+            </a:solidFill>
+          </a:ln>
+        </p:spPr>
+        <p:style>
+          <a:lnRef idx="1">
+            <a:schemeClr val="accent1"/>
+          </a:lnRef>
+          <a:fillRef idx="3">
+            <a:schemeClr val="accent1"/>
+          </a:fillRef>
+          <a:effectRef idx="2">
+            <a:schemeClr val="accent1"/>
+          </a:effectRef>
+          <a:fontRef idx="minor">
+            <a:schemeClr val="lt1"/>
+          </a:fontRef>
+        </p:style>
+        <p:txBody>
+          <a:bodyPr rtlCol="0" anchor="ctr" wrap="square" lIns="73152" rIns="73152" tIns="36576" bIns="36576"/>
+          <a:lstStyle/>
+          <a:p>
+            <a:pPr algn="l">
+              <a:spcAft>
+                <a:spcPts val="0"/>
+              </a:spcAft>
+              <a:defRPr sz="1300" b="1">
+                <a:solidFill>
+                  <a:srgbClr val="122C4E"/>
+                </a:solidFill>
+                <a:latin typeface="Noto Sans CJK KR"/>
+              </a:defRPr>
+            </a:pPr>
+            <a:r>
+              <a:t>현재 단계 프로젝트 조립    |    현재 폴더 ~/ros2_curri/my_agv_ws    |    현재 터미널</a:t>
+            </a:r>
+          </a:p>
+        </p:txBody>
+      </p:sp>
+      <p:sp>
+        <p:nvSpPr>
+          <p:cNvPr id="7" name="Rounded Rectangle 6"/>
+          <p:cNvSpPr/>
+          <p:nvPr/>
+        </p:nvSpPr>
+        <p:spPr>
+          <a:xfrm>
+            <a:off x="731520" y="1755648"/>
+            <a:ext cx="10835640" cy="1033271"/>
           </a:xfrm>
           <a:prstGeom prst="roundRect">
             <a:avLst/>
           </a:prstGeom>
           <a:solidFill>
-            <a:srgbClr val="FFFFFF"/>
+            <a:srgbClr val="F4F7FB"/>
+          </a:solidFill>
+          <a:ln>
+            <a:solidFill>
+              <a:srgbClr val="5C6672"/>
+            </a:solidFill>
+          </a:ln>
+        </p:spPr>
+        <p:style>
+          <a:lnRef idx="1">
+            <a:schemeClr val="accent1"/>
+          </a:lnRef>
+          <a:fillRef idx="3">
+            <a:schemeClr val="accent1"/>
+          </a:fillRef>
+          <a:effectRef idx="2">
+            <a:schemeClr val="accent1"/>
+          </a:effectRef>
+          <a:fontRef idx="minor">
+            <a:schemeClr val="lt1"/>
+          </a:fontRef>
+        </p:style>
+        <p:txBody>
+          <a:bodyPr rtlCol="0" anchor="ctr"/>
+          <a:lstStyle/>
+          <a:p>
+            <a:pPr algn="ctr"/>
+          </a:p>
+        </p:txBody>
+      </p:sp>
+      <p:sp>
+        <p:nvSpPr>
+          <p:cNvPr id="8" name="TextBox 7"/>
+          <p:cNvSpPr txBox="1"/>
+          <p:nvPr/>
+        </p:nvSpPr>
+        <p:spPr>
+          <a:xfrm>
+            <a:off x="960120" y="1911095"/>
+            <a:ext cx="1920240" cy="228600"/>
+          </a:xfrm>
+          <a:prstGeom prst="rect">
+            <a:avLst/>
+          </a:prstGeom>
+          <a:noFill/>
+        </p:spPr>
+        <p:txBody>
+          <a:bodyPr wrap="square" lIns="73152" rIns="73152" tIns="36576" bIns="36576">
+            <a:spAutoFit/>
+          </a:bodyPr>
+          <a:lstStyle/>
+          <a:p>
+            <a:pPr algn="l">
+              <a:spcAft>
+                <a:spcPts val="0"/>
+              </a:spcAft>
+              <a:defRPr sz="1700" b="1">
+                <a:solidFill>
+                  <a:srgbClr val="5C6672"/>
+                </a:solidFill>
+                <a:latin typeface="Noto Sans CJK KR"/>
+              </a:defRPr>
+            </a:pPr>
+            <a:r>
+              <a:t>이미 있는 것</a:t>
+            </a:r>
+          </a:p>
+        </p:txBody>
+      </p:sp>
+      <p:sp>
+        <p:nvSpPr>
+          <p:cNvPr id="9" name="TextBox 8"/>
+          <p:cNvSpPr txBox="1"/>
+          <p:nvPr/>
+        </p:nvSpPr>
+        <p:spPr>
+          <a:xfrm>
+            <a:off x="2788920" y="1892807"/>
+            <a:ext cx="8229600" cy="566928"/>
+          </a:xfrm>
+          <a:prstGeom prst="rect">
+            <a:avLst/>
+          </a:prstGeom>
+          <a:noFill/>
+        </p:spPr>
+        <p:txBody>
+          <a:bodyPr wrap="square" lIns="73152" rIns="73152" tIns="36576" bIns="36576">
+            <a:spAutoFit/>
+          </a:bodyPr>
+          <a:lstStyle/>
+          <a:p>
+            <a:pPr algn="l">
+              <a:spcAft>
+                <a:spcPts val="0"/>
+              </a:spcAft>
+              <a:defRPr sz="1700" b="0">
+                <a:solidFill>
+                  <a:srgbClr val="122C4E"/>
+                </a:solidFill>
+                <a:latin typeface="Noto Sans CJK KR"/>
+              </a:defRPr>
+            </a:pPr>
+            <a:r>
+              <a:t>M09 /cmd_vel</a:t>
+            </a:r>
+          </a:p>
+        </p:txBody>
+      </p:sp>
+      <p:sp>
+        <p:nvSpPr>
+          <p:cNvPr id="10" name="Rounded Rectangle 9"/>
+          <p:cNvSpPr/>
+          <p:nvPr/>
+        </p:nvSpPr>
+        <p:spPr>
+          <a:xfrm>
+            <a:off x="731520" y="3081528"/>
+            <a:ext cx="10835640" cy="1033271"/>
+          </a:xfrm>
+          <a:prstGeom prst="roundRect">
+            <a:avLst/>
+          </a:prstGeom>
+          <a:solidFill>
+            <a:srgbClr val="F4F7FB"/>
           </a:solidFill>
           <a:ln>
             <a:solidFill>
@@ -12252,14 +14643,79 @@
           </a:fontRef>
         </p:style>
         <p:txBody>
-          <a:bodyPr rtlCol="0" anchor="ctr" wrap="square" lIns="73152" rIns="73152" tIns="36576" bIns="36576"/>
-          <a:lstStyle/>
-          <a:p>
-            <a:pPr algn="ctr">
-              <a:spcAft>
-                <a:spcPts val="0"/>
-              </a:spcAft>
-              <a:defRPr sz="1900" b="1">
+          <a:bodyPr rtlCol="0" anchor="ctr"/>
+          <a:lstStyle/>
+          <a:p>
+            <a:pPr algn="ctr"/>
+          </a:p>
+        </p:txBody>
+      </p:sp>
+      <p:sp>
+        <p:nvSpPr>
+          <p:cNvPr id="11" name="TextBox 10"/>
+          <p:cNvSpPr txBox="1"/>
+          <p:nvPr/>
+        </p:nvSpPr>
+        <p:spPr>
+          <a:xfrm>
+            <a:off x="960120" y="3236976"/>
+            <a:ext cx="1920240" cy="228600"/>
+          </a:xfrm>
+          <a:prstGeom prst="rect">
+            <a:avLst/>
+          </a:prstGeom>
+          <a:noFill/>
+        </p:spPr>
+        <p:txBody>
+          <a:bodyPr wrap="square" lIns="73152" rIns="73152" tIns="36576" bIns="36576">
+            <a:spAutoFit/>
+          </a:bodyPr>
+          <a:lstStyle/>
+          <a:p>
+            <a:pPr algn="l">
+              <a:spcAft>
+                <a:spcPts val="0"/>
+              </a:spcAft>
+              <a:defRPr sz="1700" b="1">
+                <a:solidFill>
+                  <a:srgbClr val="225B9B"/>
+                </a:solidFill>
+                <a:latin typeface="Noto Sans CJK KR"/>
+              </a:defRPr>
+            </a:pPr>
+            <a:r>
+              <a:t>이번에 직접 만들 것</a:t>
+            </a:r>
+          </a:p>
+        </p:txBody>
+      </p:sp>
+      <p:sp>
+        <p:nvSpPr>
+          <p:cNvPr id="12" name="TextBox 11"/>
+          <p:cNvSpPr txBox="1"/>
+          <p:nvPr/>
+        </p:nvSpPr>
+        <p:spPr>
+          <a:xfrm>
+            <a:off x="2788920" y="3218688"/>
+            <a:ext cx="8229600" cy="566928"/>
+          </a:xfrm>
+          <a:prstGeom prst="rect">
+            <a:avLst/>
+          </a:prstGeom>
+          <a:noFill/>
+        </p:spPr>
+        <p:txBody>
+          <a:bodyPr wrap="square" lIns="73152" rIns="73152" tIns="36576" bIns="36576">
+            <a:spAutoFit/>
+          </a:bodyPr>
+          <a:lstStyle/>
+          <a:p>
+            <a:pPr algn="l">
+              <a:spcAft>
+                <a:spcPts val="0"/>
+              </a:spcAft>
+              <a:defRPr sz="1700" b="0">
                 <a:solidFill>
                   <a:srgbClr val="122C4E"/>
                 </a:solidFill>
@@ -12267,70 +14723,31 @@
               </a:defRPr>
             </a:pPr>
             <a:r>
-              <a:t>ROS 2</a:t>
-            </a:r>
-            <a:br/>
-            <a:r>
-              <a:t>/cmd_vel</a:t>
-            </a:r>
-          </a:p>
-        </p:txBody>
-      </p:sp>
-      <p:cxnSp>
-        <p:nvCxnSpPr>
-          <p:cNvPr id="7" name="Connector 6"/>
-          <p:cNvCxnSpPr/>
-          <p:nvPr/>
-        </p:nvCxnSpPr>
-        <p:spPr>
-          <a:xfrm>
-            <a:off x="4768596" y="3264408"/>
-            <a:ext cx="283463" cy="0"/>
-          </a:xfrm>
-          <a:prstGeom prst="line">
-            <a:avLst/>
-          </a:prstGeom>
-          <a:ln w="31750">
-            <a:solidFill>
-              <a:srgbClr val="225B9B"/>
-            </a:solidFill>
-          </a:ln>
-        </p:spPr>
-        <p:style>
-          <a:lnRef idx="2">
-            <a:schemeClr val="accent1"/>
-          </a:lnRef>
-          <a:fillRef idx="0">
-            <a:schemeClr val="accent1"/>
-          </a:fillRef>
-          <a:effectRef idx="1">
-            <a:schemeClr val="accent1"/>
-          </a:effectRef>
-          <a:fontRef idx="minor">
-            <a:schemeClr val="tx1"/>
-          </a:fontRef>
-        </p:style>
-      </p:cxnSp>
-      <p:sp>
-        <p:nvSpPr>
-          <p:cNvPr id="8" name="Rounded Rectangle 7"/>
+              <a:t>ROS 2 message와 Gazebo Transport message 사이의 방향·타입·이름 매핑을 만든다.</a:t>
+            </a:r>
+          </a:p>
+        </p:txBody>
+      </p:sp>
+      <p:sp>
+        <p:nvSpPr>
+          <p:cNvPr id="13" name="Rounded Rectangle 12"/>
           <p:cNvSpPr/>
           <p:nvPr/>
         </p:nvSpPr>
         <p:spPr>
           <a:xfrm>
-            <a:off x="5079492" y="2743200"/>
-            <a:ext cx="2029968" cy="1051560"/>
+            <a:off x="731520" y="4407408"/>
+            <a:ext cx="10835640" cy="1033271"/>
           </a:xfrm>
           <a:prstGeom prst="roundRect">
             <a:avLst/>
           </a:prstGeom>
           <a:solidFill>
-            <a:srgbClr val="FFFFFF"/>
+            <a:srgbClr val="F4F7FB"/>
           </a:solidFill>
           <a:ln>
             <a:solidFill>
-              <a:srgbClr val="225B9B"/>
+              <a:srgbClr val="2A8B5A"/>
             </a:solidFill>
           </a:ln>
         </p:spPr>
@@ -12349,158 +14766,126 @@
           </a:fontRef>
         </p:style>
         <p:txBody>
-          <a:bodyPr rtlCol="0" anchor="ctr" wrap="square" lIns="73152" rIns="73152" tIns="36576" bIns="36576"/>
+          <a:bodyPr rtlCol="0" anchor="ctr"/>
+          <a:lstStyle/>
+          <a:p>
+            <a:pPr algn="ctr"/>
+          </a:p>
+        </p:txBody>
+      </p:sp>
+      <p:sp>
+        <p:nvSpPr>
+          <p:cNvPr id="14" name="TextBox 13"/>
+          <p:cNvSpPr txBox="1"/>
+          <p:nvPr/>
+        </p:nvSpPr>
+        <p:spPr>
+          <a:xfrm>
+            <a:off x="960120" y="4562856"/>
+            <a:ext cx="1920240" cy="228600"/>
+          </a:xfrm>
+          <a:prstGeom prst="rect">
+            <a:avLst/>
+          </a:prstGeom>
+          <a:noFill/>
+        </p:spPr>
+        <p:txBody>
+          <a:bodyPr wrap="square" lIns="73152" rIns="73152" tIns="36576" bIns="36576">
+            <a:spAutoFit/>
+          </a:bodyPr>
+          <a:lstStyle/>
+          <a:p>
+            <a:pPr algn="l">
+              <a:spcAft>
+                <a:spcPts val="0"/>
+              </a:spcAft>
+              <a:defRPr sz="1700" b="1">
+                <a:solidFill>
+                  <a:srgbClr val="2A8B5A"/>
+                </a:solidFill>
+                <a:latin typeface="Noto Sans CJK KR"/>
+              </a:defRPr>
+            </a:pPr>
+            <a:r>
+              <a:t>만들고 나서 확인할 것</a:t>
+            </a:r>
+          </a:p>
+        </p:txBody>
+      </p:sp>
+      <p:sp>
+        <p:nvSpPr>
+          <p:cNvPr id="15" name="TextBox 14"/>
+          <p:cNvSpPr txBox="1"/>
+          <p:nvPr/>
+        </p:nvSpPr>
+        <p:spPr>
+          <a:xfrm>
+            <a:off x="2788920" y="4544568"/>
+            <a:ext cx="8229600" cy="566928"/>
+          </a:xfrm>
+          <a:prstGeom prst="rect">
+            <a:avLst/>
+          </a:prstGeom>
+          <a:noFill/>
+        </p:spPr>
+        <p:txBody>
+          <a:bodyPr wrap="square" lIns="73152" rIns="73152" tIns="36576" bIns="36576">
+            <a:spAutoFit/>
+          </a:bodyPr>
+          <a:lstStyle/>
+          <a:p>
+            <a:pPr algn="l">
+              <a:spcAft>
+                <a:spcPts val="0"/>
+              </a:spcAft>
+              <a:defRPr sz="1700" b="0">
+                <a:solidFill>
+                  <a:srgbClr val="122C4E"/>
+                </a:solidFill>
+                <a:latin typeface="Noto Sans CJK KR"/>
+              </a:defRPr>
+            </a:pPr>
+            <a:r>
+              <a:t>/cmd_vel ROS→Gazebo 및 odom/scan/imu/camera/clock Gazebo→ROS 매핑을 확인한다.</a:t>
+            </a:r>
+          </a:p>
+        </p:txBody>
+      </p:sp>
+      <p:sp>
+        <p:nvSpPr>
+          <p:cNvPr id="16" name="TextBox 15"/>
+          <p:cNvSpPr txBox="1"/>
+          <p:nvPr/>
+        </p:nvSpPr>
+        <p:spPr>
+          <a:xfrm>
+            <a:off x="841248" y="5833872"/>
+            <a:ext cx="10561320" cy="365760"/>
+          </a:xfrm>
+          <a:prstGeom prst="rect">
+            <a:avLst/>
+          </a:prstGeom>
+          <a:noFill/>
+        </p:spPr>
+        <p:txBody>
+          <a:bodyPr wrap="square" lIns="73152" rIns="73152" tIns="36576" bIns="36576">
+            <a:spAutoFit/>
+          </a:bodyPr>
           <a:lstStyle/>
           <a:p>
             <a:pPr algn="ctr">
               <a:spcAft>
                 <a:spcPts val="0"/>
               </a:spcAft>
-              <a:defRPr sz="1900" b="1">
-                <a:solidFill>
-                  <a:srgbClr val="122C4E"/>
-                </a:solidFill>
-                <a:latin typeface="Noto Sans CJK KR"/>
-              </a:defRPr>
-            </a:pPr>
-            <a:r>
-              <a:t>ros_gz_bridge</a:t>
-            </a:r>
-          </a:p>
-        </p:txBody>
-      </p:sp>
-      <p:cxnSp>
-        <p:nvCxnSpPr>
-          <p:cNvPr id="9" name="Connector 8"/>
-          <p:cNvCxnSpPr/>
-          <p:nvPr/>
-        </p:nvCxnSpPr>
-        <p:spPr>
-          <a:xfrm>
-            <a:off x="7109460" y="3264408"/>
-            <a:ext cx="283464" cy="0"/>
-          </a:xfrm>
-          <a:prstGeom prst="line">
-            <a:avLst/>
-          </a:prstGeom>
-          <a:ln w="31750">
-            <a:solidFill>
-              <a:srgbClr val="225B9B"/>
-            </a:solidFill>
-          </a:ln>
-        </p:spPr>
-        <p:style>
-          <a:lnRef idx="2">
-            <a:schemeClr val="accent1"/>
-          </a:lnRef>
-          <a:fillRef idx="0">
-            <a:schemeClr val="accent1"/>
-          </a:fillRef>
-          <a:effectRef idx="1">
-            <a:schemeClr val="accent1"/>
-          </a:effectRef>
-          <a:fontRef idx="minor">
-            <a:schemeClr val="tx1"/>
-          </a:fontRef>
-        </p:style>
-      </p:cxnSp>
-      <p:sp>
-        <p:nvSpPr>
-          <p:cNvPr id="10" name="Rounded Rectangle 9"/>
-          <p:cNvSpPr/>
-          <p:nvPr/>
-        </p:nvSpPr>
-        <p:spPr>
-          <a:xfrm>
-            <a:off x="7420356" y="2743200"/>
-            <a:ext cx="2029968" cy="1051560"/>
-          </a:xfrm>
-          <a:prstGeom prst="roundRect">
-            <a:avLst/>
-          </a:prstGeom>
-          <a:solidFill>
-            <a:srgbClr val="FFFFFF"/>
-          </a:solidFill>
-          <a:ln>
-            <a:solidFill>
-              <a:srgbClr val="225B9B"/>
-            </a:solidFill>
-          </a:ln>
-        </p:spPr>
-        <p:style>
-          <a:lnRef idx="1">
-            <a:schemeClr val="accent1"/>
-          </a:lnRef>
-          <a:fillRef idx="3">
-            <a:schemeClr val="accent1"/>
-          </a:fillRef>
-          <a:effectRef idx="2">
-            <a:schemeClr val="accent1"/>
-          </a:effectRef>
-          <a:fontRef idx="minor">
-            <a:schemeClr val="lt1"/>
-          </a:fontRef>
-        </p:style>
-        <p:txBody>
-          <a:bodyPr rtlCol="0" anchor="ctr" wrap="square" lIns="73152" rIns="73152" tIns="36576" bIns="36576"/>
-          <a:lstStyle/>
-          <a:p>
-            <a:pPr algn="ctr">
-              <a:spcAft>
-                <a:spcPts val="0"/>
-              </a:spcAft>
-              <a:defRPr sz="1900" b="1">
-                <a:solidFill>
-                  <a:srgbClr val="122C4E"/>
-                </a:solidFill>
-                <a:latin typeface="Noto Sans CJK KR"/>
-              </a:defRPr>
-            </a:pPr>
-            <a:r>
-              <a:t>Gazebo</a:t>
-            </a:r>
-            <a:br/>
-            <a:r>
-              <a:t>DiffDrive</a:t>
-            </a:r>
-          </a:p>
-        </p:txBody>
-      </p:sp>
-      <p:sp>
-        <p:nvSpPr>
-          <p:cNvPr id="11" name="TextBox 10"/>
-          <p:cNvSpPr txBox="1"/>
-          <p:nvPr/>
-        </p:nvSpPr>
-        <p:spPr>
-          <a:xfrm>
-            <a:off x="914400" y="4800600"/>
-            <a:ext cx="10332720" cy="502920"/>
-          </a:xfrm>
-          <a:prstGeom prst="rect">
-            <a:avLst/>
-          </a:prstGeom>
-          <a:noFill/>
-        </p:spPr>
-        <p:txBody>
-          <a:bodyPr wrap="square" lIns="73152" rIns="73152" tIns="36576" bIns="36576">
-            <a:spAutoFit/>
-          </a:bodyPr>
-          <a:lstStyle/>
-          <a:p>
-            <a:pPr algn="ctr">
-              <a:spcAft>
-                <a:spcPts val="0"/>
-              </a:spcAft>
-              <a:defRPr sz="2000" b="1">
-                <a:solidFill>
-                  <a:srgbClr val="225B9B"/>
-                </a:solidFill>
-                <a:latin typeface="Noto Sans CJK KR"/>
-              </a:defRPr>
-            </a:pPr>
-            <a:r>
-              <a:t>기억할 한 문장: 앞 단계의 출력이 다음 단계의 입력이 되도록 topic·frame·파일 이름을 끝까지 유지합니다.</a:t>
+              <a:defRPr sz="1500" b="1">
+                <a:solidFill>
+                  <a:srgbClr val="DB7E22"/>
+                </a:solidFill>
+                <a:latin typeface="Noto Sans CJK KR"/>
+              </a:defRPr>
+            </a:pPr>
+            <a:r>
+              <a:t>이번 모듈에서는 2개 파일을 빈 상태에서 직접 만듭니다. 다음 슬라이드의 명령을 입력한 뒤에만 코드를 작성합니다.</a:t>
             </a:r>
           </a:p>
         </p:txBody>
@@ -12557,7 +14942,7 @@
               </a:defRPr>
             </a:pPr>
             <a:r>
-              <a:t>이번 모듈에서 생성·수정하는 파일</a:t>
+              <a:t>핵심 흐름을 한 장으로 이해하기</a:t>
             </a:r>
           </a:p>
         </p:txBody>
@@ -12596,7 +14981,7 @@
               </a:defRPr>
             </a:pPr>
             <a:r>
-              <a:t>파일명과 package 경로를 끝까지 동일하게 사용합니다.</a:t>
+              <a:t>상자와 화살표의 방향을 따라 데이터 또는 제어의 흐름을 읽습니다.</a:t>
             </a:r>
           </a:p>
         </p:txBody>
@@ -12687,18 +15072,18 @@
         </p:nvSpPr>
         <p:spPr>
           <a:xfrm>
-            <a:off x="777240" y="1600200"/>
-            <a:ext cx="10789920" cy="4407408"/>
+            <a:off x="2738628" y="2743200"/>
+            <a:ext cx="2029968" cy="1051560"/>
           </a:xfrm>
           <a:prstGeom prst="roundRect">
             <a:avLst/>
           </a:prstGeom>
           <a:solidFill>
-            <a:srgbClr val="1D232D"/>
+            <a:srgbClr val="FFFFFF"/>
           </a:solidFill>
           <a:ln>
             <a:solidFill>
-              <a:srgbClr val="1D232D"/>
+              <a:srgbClr val="225B9B"/>
             </a:solidFill>
           </a:ln>
         </p:spPr>
@@ -12720,41 +15105,227 @@
           <a:bodyPr rtlCol="0" anchor="ctr" wrap="square" lIns="73152" rIns="73152" tIns="36576" bIns="36576"/>
           <a:lstStyle/>
           <a:p>
-            <a:pPr algn="l">
-              <a:spcAft>
-                <a:spcPts val="0"/>
-              </a:spcAft>
-              <a:defRPr sz="1600" b="0">
-                <a:solidFill>
-                  <a:srgbClr val="FFFFFF"/>
-                </a:solidFill>
-                <a:latin typeface="DejaVu Sans Mono"/>
-              </a:defRPr>
-            </a:pPr>
-            <a:r>
-              <a:t>~/ros2_curri/agv_ws/src/</a:t>
+            <a:pPr algn="ctr">
+              <a:spcAft>
+                <a:spcPts val="0"/>
+              </a:spcAft>
+              <a:defRPr sz="1900" b="1">
+                <a:solidFill>
+                  <a:srgbClr val="122C4E"/>
+                </a:solidFill>
+                <a:latin typeface="Noto Sans CJK KR"/>
+              </a:defRPr>
+            </a:pPr>
+            <a:r>
+              <a:t>ROS 2</a:t>
             </a:r>
             <a:br/>
             <a:r>
-              <a:t>└── agv_gazebo/config/bridge.yaml</a:t>
+              <a:t>/cmd_vel</a:t>
+            </a:r>
+          </a:p>
+        </p:txBody>
+      </p:sp>
+      <p:cxnSp>
+        <p:nvCxnSpPr>
+          <p:cNvPr id="7" name="Connector 6"/>
+          <p:cNvCxnSpPr/>
+          <p:nvPr/>
+        </p:nvCxnSpPr>
+        <p:spPr>
+          <a:xfrm>
+            <a:off x="4768596" y="3264408"/>
+            <a:ext cx="283463" cy="0"/>
+          </a:xfrm>
+          <a:prstGeom prst="line">
+            <a:avLst/>
+          </a:prstGeom>
+          <a:ln w="31750">
+            <a:solidFill>
+              <a:srgbClr val="225B9B"/>
+            </a:solidFill>
+          </a:ln>
+        </p:spPr>
+        <p:style>
+          <a:lnRef idx="2">
+            <a:schemeClr val="accent1"/>
+          </a:lnRef>
+          <a:fillRef idx="0">
+            <a:schemeClr val="accent1"/>
+          </a:fillRef>
+          <a:effectRef idx="1">
+            <a:schemeClr val="accent1"/>
+          </a:effectRef>
+          <a:fontRef idx="minor">
+            <a:schemeClr val="tx1"/>
+          </a:fontRef>
+        </p:style>
+      </p:cxnSp>
+      <p:sp>
+        <p:nvSpPr>
+          <p:cNvPr id="8" name="Rounded Rectangle 7"/>
+          <p:cNvSpPr/>
+          <p:nvPr/>
+        </p:nvSpPr>
+        <p:spPr>
+          <a:xfrm>
+            <a:off x="5079492" y="2743200"/>
+            <a:ext cx="2029968" cy="1051560"/>
+          </a:xfrm>
+          <a:prstGeom prst="roundRect">
+            <a:avLst/>
+          </a:prstGeom>
+          <a:solidFill>
+            <a:srgbClr val="FFFFFF"/>
+          </a:solidFill>
+          <a:ln>
+            <a:solidFill>
+              <a:srgbClr val="225B9B"/>
+            </a:solidFill>
+          </a:ln>
+        </p:spPr>
+        <p:style>
+          <a:lnRef idx="1">
+            <a:schemeClr val="accent1"/>
+          </a:lnRef>
+          <a:fillRef idx="3">
+            <a:schemeClr val="accent1"/>
+          </a:fillRef>
+          <a:effectRef idx="2">
+            <a:schemeClr val="accent1"/>
+          </a:effectRef>
+          <a:fontRef idx="minor">
+            <a:schemeClr val="lt1"/>
+          </a:fontRef>
+        </p:style>
+        <p:txBody>
+          <a:bodyPr rtlCol="0" anchor="ctr" wrap="square" lIns="73152" rIns="73152" tIns="36576" bIns="36576"/>
+          <a:lstStyle/>
+          <a:p>
+            <a:pPr algn="ctr">
+              <a:spcAft>
+                <a:spcPts val="0"/>
+              </a:spcAft>
+              <a:defRPr sz="1900" b="1">
+                <a:solidFill>
+                  <a:srgbClr val="122C4E"/>
+                </a:solidFill>
+                <a:latin typeface="Noto Sans CJK KR"/>
+              </a:defRPr>
+            </a:pPr>
+            <a:r>
+              <a:t>ros_gz_bridge</a:t>
+            </a:r>
+          </a:p>
+        </p:txBody>
+      </p:sp>
+      <p:cxnSp>
+        <p:nvCxnSpPr>
+          <p:cNvPr id="9" name="Connector 8"/>
+          <p:cNvCxnSpPr/>
+          <p:nvPr/>
+        </p:nvCxnSpPr>
+        <p:spPr>
+          <a:xfrm>
+            <a:off x="7109460" y="3264408"/>
+            <a:ext cx="283464" cy="0"/>
+          </a:xfrm>
+          <a:prstGeom prst="line">
+            <a:avLst/>
+          </a:prstGeom>
+          <a:ln w="31750">
+            <a:solidFill>
+              <a:srgbClr val="225B9B"/>
+            </a:solidFill>
+          </a:ln>
+        </p:spPr>
+        <p:style>
+          <a:lnRef idx="2">
+            <a:schemeClr val="accent1"/>
+          </a:lnRef>
+          <a:fillRef idx="0">
+            <a:schemeClr val="accent1"/>
+          </a:fillRef>
+          <a:effectRef idx="1">
+            <a:schemeClr val="accent1"/>
+          </a:effectRef>
+          <a:fontRef idx="minor">
+            <a:schemeClr val="tx1"/>
+          </a:fontRef>
+        </p:style>
+      </p:cxnSp>
+      <p:sp>
+        <p:nvSpPr>
+          <p:cNvPr id="10" name="Rounded Rectangle 9"/>
+          <p:cNvSpPr/>
+          <p:nvPr/>
+        </p:nvSpPr>
+        <p:spPr>
+          <a:xfrm>
+            <a:off x="7420356" y="2743200"/>
+            <a:ext cx="2029968" cy="1051560"/>
+          </a:xfrm>
+          <a:prstGeom prst="roundRect">
+            <a:avLst/>
+          </a:prstGeom>
+          <a:solidFill>
+            <a:srgbClr val="FFFFFF"/>
+          </a:solidFill>
+          <a:ln>
+            <a:solidFill>
+              <a:srgbClr val="225B9B"/>
+            </a:solidFill>
+          </a:ln>
+        </p:spPr>
+        <p:style>
+          <a:lnRef idx="1">
+            <a:schemeClr val="accent1"/>
+          </a:lnRef>
+          <a:fillRef idx="3">
+            <a:schemeClr val="accent1"/>
+          </a:fillRef>
+          <a:effectRef idx="2">
+            <a:schemeClr val="accent1"/>
+          </a:effectRef>
+          <a:fontRef idx="minor">
+            <a:schemeClr val="lt1"/>
+          </a:fontRef>
+        </p:style>
+        <p:txBody>
+          <a:bodyPr rtlCol="0" anchor="ctr" wrap="square" lIns="73152" rIns="73152" tIns="36576" bIns="36576"/>
+          <a:lstStyle/>
+          <a:p>
+            <a:pPr algn="ctr">
+              <a:spcAft>
+                <a:spcPts val="0"/>
+              </a:spcAft>
+              <a:defRPr sz="1900" b="1">
+                <a:solidFill>
+                  <a:srgbClr val="122C4E"/>
+                </a:solidFill>
+                <a:latin typeface="Noto Sans CJK KR"/>
+              </a:defRPr>
+            </a:pPr>
+            <a:r>
+              <a:t>Gazebo</a:t>
             </a:r>
             <a:br/>
             <a:r>
-              <a:t>└── agv_gazebo/launch/gazebo.launch.py</a:t>
-            </a:r>
-          </a:p>
-        </p:txBody>
-      </p:sp>
-      <p:sp>
-        <p:nvSpPr>
-          <p:cNvPr id="7" name="TextBox 6"/>
-          <p:cNvSpPr txBox="1"/>
-          <p:nvPr/>
-        </p:nvSpPr>
-        <p:spPr>
-          <a:xfrm>
-            <a:off x="877824" y="6144768"/>
-            <a:ext cx="10332720" cy="201168"/>
+              <a:t>DiffDrive</a:t>
+            </a:r>
+          </a:p>
+        </p:txBody>
+      </p:sp>
+      <p:sp>
+        <p:nvSpPr>
+          <p:cNvPr id="11" name="TextBox 10"/>
+          <p:cNvSpPr txBox="1"/>
+          <p:nvPr/>
+        </p:nvSpPr>
+        <p:spPr>
+          <a:xfrm>
+            <a:off x="914400" y="4800600"/>
+            <a:ext cx="10332720" cy="502920"/>
           </a:xfrm>
           <a:prstGeom prst="rect">
             <a:avLst/>
@@ -12771,15 +15342,15 @@
               <a:spcAft>
                 <a:spcPts val="0"/>
               </a:spcAft>
-              <a:defRPr sz="1100" b="0">
-                <a:solidFill>
-                  <a:srgbClr val="5C6672"/>
-                </a:solidFill>
-                <a:latin typeface="Noto Sans CJK KR"/>
-              </a:defRPr>
-            </a:pPr>
-            <a:r>
-              <a:t>파일 전체 코드는 다음 슬라이드에 이어집니다. 중간 줄을 빼지 않고 끝까지 제공합니다.</a:t>
+              <a:defRPr sz="2000" b="1">
+                <a:solidFill>
+                  <a:srgbClr val="225B9B"/>
+                </a:solidFill>
+                <a:latin typeface="Noto Sans CJK KR"/>
+              </a:defRPr>
+            </a:pPr>
+            <a:r>
+              <a:t>기억할 한 문장: 앞 단계의 출력이 다음 단계의 입력이 되도록 topic·frame·파일 이름을 끝까지 유지합니다.</a:t>
             </a:r>
           </a:p>
         </p:txBody>
@@ -12836,7 +15407,7 @@
               </a:defRPr>
             </a:pPr>
             <a:r>
-              <a:t>코드/설정이 실제로 만드는 것 (1/1)</a:t>
+              <a:t>이번에 프로젝트 안에 새로 만드는 파일</a:t>
             </a:r>
           </a:p>
         </p:txBody>
@@ -12875,7 +15446,7 @@
               </a:defRPr>
             </a:pPr>
             <a:r>
-              <a:t>파일을 입력하기 전에 ‘무엇을 만들고 어디서 볼지’를 먼저 연결합니다.</a:t>
+              <a:t>아래 파일은 완성본을 복사하지 않고, 다음 슬라이드에서 폴더·빈 파일부터 직접 만듭니다.</a:t>
             </a:r>
           </a:p>
         </p:txBody>
@@ -12960,24 +15531,24 @@
       </p:sp>
       <p:sp>
         <p:nvSpPr>
-          <p:cNvPr id="6" name="Rectangle 5"/>
+          <p:cNvPr id="6" name="Rounded Rectangle 5"/>
           <p:cNvSpPr/>
           <p:nvPr/>
         </p:nvSpPr>
         <p:spPr>
           <a:xfrm>
-            <a:off x="566928" y="1188720"/>
-            <a:ext cx="11064240" cy="347472"/>
-          </a:xfrm>
-          <a:prstGeom prst="rect">
+            <a:off x="777240" y="1600200"/>
+            <a:ext cx="10789920" cy="4407408"/>
+          </a:xfrm>
+          <a:prstGeom prst="roundRect">
             <a:avLst/>
           </a:prstGeom>
           <a:solidFill>
-            <a:srgbClr val="F4F7FB"/>
+            <a:srgbClr val="1D232D"/>
           </a:solidFill>
           <a:ln>
             <a:solidFill>
-              <a:srgbClr val="F4F7FB"/>
+              <a:srgbClr val="1D232D"/>
             </a:solidFill>
           </a:ln>
         </p:spPr>
@@ -13003,659 +15574,62 @@
               <a:spcAft>
                 <a:spcPts val="0"/>
               </a:spcAft>
-              <a:defRPr sz="1300" b="1">
-                <a:solidFill>
-                  <a:srgbClr val="122C4E"/>
-                </a:solidFill>
-                <a:latin typeface="Noto Sans CJK KR"/>
-              </a:defRPr>
-            </a:pPr>
-            <a:r>
-              <a:t>현재 단계 파일 역할    |    현재 폴더 ~/ros2_curri/agv_ws    |    현재 터미널</a:t>
-            </a:r>
-          </a:p>
-        </p:txBody>
-      </p:sp>
-      <p:sp>
-        <p:nvSpPr>
-          <p:cNvPr id="7" name="Rounded Rectangle 6"/>
-          <p:cNvSpPr/>
-          <p:nvPr/>
-        </p:nvSpPr>
-        <p:spPr>
-          <a:xfrm>
-            <a:off x="640080" y="1627632"/>
-            <a:ext cx="10972800" cy="2048256"/>
-          </a:xfrm>
-          <a:prstGeom prst="roundRect">
-            <a:avLst/>
-          </a:prstGeom>
-          <a:solidFill>
-            <a:srgbClr val="F4F7FB"/>
-          </a:solidFill>
-          <a:ln>
-            <a:solidFill>
-              <a:srgbClr val="CCDBEB"/>
-            </a:solidFill>
-          </a:ln>
-        </p:spPr>
-        <p:style>
-          <a:lnRef idx="1">
-            <a:schemeClr val="accent1"/>
-          </a:lnRef>
-          <a:fillRef idx="3">
-            <a:schemeClr val="accent1"/>
-          </a:fillRef>
-          <a:effectRef idx="2">
-            <a:schemeClr val="accent1"/>
-          </a:effectRef>
-          <a:fontRef idx="minor">
-            <a:schemeClr val="lt1"/>
-          </a:fontRef>
-        </p:style>
-        <p:txBody>
-          <a:bodyPr rtlCol="0" anchor="ctr"/>
-          <a:lstStyle/>
-          <a:p>
-            <a:pPr algn="ctr"/>
-          </a:p>
-        </p:txBody>
-      </p:sp>
-      <p:sp>
-        <p:nvSpPr>
-          <p:cNvPr id="8" name="TextBox 7"/>
-          <p:cNvSpPr txBox="1"/>
-          <p:nvPr/>
-        </p:nvSpPr>
-        <p:spPr>
-          <a:xfrm>
-            <a:off x="850392" y="1764792"/>
-            <a:ext cx="10424160" cy="256032"/>
-          </a:xfrm>
-          <a:prstGeom prst="rect">
-            <a:avLst/>
-          </a:prstGeom>
-          <a:noFill/>
-        </p:spPr>
-        <p:txBody>
-          <a:bodyPr wrap="square" lIns="73152" rIns="73152" tIns="36576" bIns="36576">
-            <a:spAutoFit/>
-          </a:bodyPr>
-          <a:lstStyle/>
-          <a:p>
-            <a:pPr algn="l">
-              <a:spcAft>
-                <a:spcPts val="0"/>
-              </a:spcAft>
-              <a:defRPr sz="1300" b="1">
-                <a:solidFill>
-                  <a:srgbClr val="225B9B"/>
+              <a:defRPr sz="1600" b="0">
+                <a:solidFill>
+                  <a:srgbClr val="FFFFFF"/>
                 </a:solidFill>
                 <a:latin typeface="DejaVu Sans Mono"/>
               </a:defRPr>
             </a:pPr>
             <a:r>
-              <a:t>~/ros2_curri/agv_ws/src/agv_gazebo/config/bridge.yaml</a:t>
-            </a:r>
-          </a:p>
-        </p:txBody>
-      </p:sp>
-      <p:sp>
-        <p:nvSpPr>
-          <p:cNvPr id="9" name="TextBox 8"/>
-          <p:cNvSpPr txBox="1"/>
-          <p:nvPr/>
-        </p:nvSpPr>
-        <p:spPr>
-          <a:xfrm>
-            <a:off x="868680" y="2130552"/>
-            <a:ext cx="1234440" cy="228600"/>
-          </a:xfrm>
-          <a:prstGeom prst="rect">
-            <a:avLst/>
-          </a:prstGeom>
-          <a:noFill/>
-        </p:spPr>
-        <p:txBody>
-          <a:bodyPr wrap="square" lIns="73152" rIns="73152" tIns="36576" bIns="36576">
-            <a:spAutoFit/>
-          </a:bodyPr>
-          <a:lstStyle/>
-          <a:p>
-            <a:pPr algn="l">
-              <a:spcAft>
-                <a:spcPts val="0"/>
-              </a:spcAft>
-              <a:defRPr sz="1500" b="1">
-                <a:solidFill>
-                  <a:srgbClr val="2A8B5A"/>
-                </a:solidFill>
-                <a:latin typeface="Noto Sans CJK KR"/>
-              </a:defRPr>
-            </a:pPr>
-            <a:r>
-              <a:t>만드는 것</a:t>
-            </a:r>
-          </a:p>
-        </p:txBody>
-      </p:sp>
-      <p:sp>
-        <p:nvSpPr>
-          <p:cNvPr id="10" name="TextBox 9"/>
-          <p:cNvSpPr txBox="1"/>
-          <p:nvPr/>
-        </p:nvSpPr>
-        <p:spPr>
-          <a:xfrm>
-            <a:off x="1975104" y="2112264"/>
-            <a:ext cx="9189720" cy="274320"/>
-          </a:xfrm>
-          <a:prstGeom prst="rect">
-            <a:avLst/>
-          </a:prstGeom>
-          <a:noFill/>
-        </p:spPr>
-        <p:txBody>
-          <a:bodyPr wrap="square" lIns="73152" rIns="73152" tIns="36576" bIns="36576">
-            <a:spAutoFit/>
-          </a:bodyPr>
-          <a:lstStyle/>
-          <a:p>
-            <a:pPr algn="l">
-              <a:spcAft>
-                <a:spcPts val="0"/>
-              </a:spcAft>
-              <a:defRPr sz="1500" b="0">
-                <a:solidFill>
-                  <a:srgbClr val="122C4E"/>
-                </a:solidFill>
-                <a:latin typeface="Noto Sans CJK KR"/>
-              </a:defRPr>
-            </a:pPr>
-            <a:r>
-              <a:t>Gazebo Transport 메시지와 ROS 2 topic을 방향별로 연결하는 번역표</a:t>
-            </a:r>
-          </a:p>
-        </p:txBody>
-      </p:sp>
-      <p:sp>
-        <p:nvSpPr>
-          <p:cNvPr id="11" name="TextBox 10"/>
-          <p:cNvSpPr txBox="1"/>
-          <p:nvPr/>
-        </p:nvSpPr>
-        <p:spPr>
-          <a:xfrm>
-            <a:off x="868680" y="2505456"/>
-            <a:ext cx="1234440" cy="228600"/>
-          </a:xfrm>
-          <a:prstGeom prst="rect">
-            <a:avLst/>
-          </a:prstGeom>
-          <a:noFill/>
-        </p:spPr>
-        <p:txBody>
-          <a:bodyPr wrap="square" lIns="73152" rIns="73152" tIns="36576" bIns="36576">
-            <a:spAutoFit/>
-          </a:bodyPr>
-          <a:lstStyle/>
-          <a:p>
-            <a:pPr algn="l">
-              <a:spcAft>
-                <a:spcPts val="0"/>
-              </a:spcAft>
-              <a:defRPr sz="1500" b="1">
-                <a:solidFill>
-                  <a:srgbClr val="DB7E22"/>
-                </a:solidFill>
-                <a:latin typeface="Noto Sans CJK KR"/>
-              </a:defRPr>
-            </a:pPr>
-            <a:r>
-              <a:t>코드 읽기</a:t>
-            </a:r>
-          </a:p>
-        </p:txBody>
-      </p:sp>
-      <p:sp>
-        <p:nvSpPr>
-          <p:cNvPr id="12" name="TextBox 11"/>
-          <p:cNvSpPr txBox="1"/>
-          <p:nvPr/>
-        </p:nvSpPr>
-        <p:spPr>
-          <a:xfrm>
-            <a:off x="1975104" y="2487168"/>
-            <a:ext cx="9189720" cy="301752"/>
-          </a:xfrm>
-          <a:prstGeom prst="rect">
-            <a:avLst/>
-          </a:prstGeom>
-          <a:noFill/>
-        </p:spPr>
-        <p:txBody>
-          <a:bodyPr wrap="square" lIns="73152" rIns="73152" tIns="36576" bIns="36576">
-            <a:spAutoFit/>
-          </a:bodyPr>
-          <a:lstStyle/>
-          <a:p>
-            <a:pPr algn="l">
-              <a:spcAft>
-                <a:spcPts val="0"/>
-              </a:spcAft>
-              <a:defRPr sz="1400" b="0">
-                <a:solidFill>
-                  <a:srgbClr val="122C4E"/>
-                </a:solidFill>
-                <a:latin typeface="Noto Sans CJK KR"/>
-              </a:defRPr>
-            </a:pPr>
-            <a:r>
-              <a:t>한 항목에서 ros_topic_name → type → direction을 세 줄씩 비교한다.</a:t>
-            </a:r>
-          </a:p>
-        </p:txBody>
-      </p:sp>
-      <p:sp>
-        <p:nvSpPr>
-          <p:cNvPr id="13" name="TextBox 12"/>
-          <p:cNvSpPr txBox="1"/>
-          <p:nvPr/>
-        </p:nvSpPr>
-        <p:spPr>
-          <a:xfrm>
-            <a:off x="868680" y="2889504"/>
-            <a:ext cx="1234440" cy="228600"/>
-          </a:xfrm>
-          <a:prstGeom prst="rect">
-            <a:avLst/>
-          </a:prstGeom>
-          <a:noFill/>
-        </p:spPr>
-        <p:txBody>
-          <a:bodyPr wrap="square" lIns="73152" rIns="73152" tIns="36576" bIns="36576">
-            <a:spAutoFit/>
-          </a:bodyPr>
-          <a:lstStyle/>
-          <a:p>
-            <a:pPr algn="l">
-              <a:spcAft>
-                <a:spcPts val="0"/>
-              </a:spcAft>
-              <a:defRPr sz="1500" b="1">
-                <a:solidFill>
-                  <a:srgbClr val="225B9B"/>
-                </a:solidFill>
-                <a:latin typeface="Noto Sans CJK KR"/>
-              </a:defRPr>
-            </a:pPr>
-            <a:r>
-              <a:t>사용/확인</a:t>
-            </a:r>
-          </a:p>
-        </p:txBody>
-      </p:sp>
-      <p:sp>
-        <p:nvSpPr>
-          <p:cNvPr id="14" name="TextBox 13"/>
-          <p:cNvSpPr txBox="1"/>
-          <p:nvPr/>
-        </p:nvSpPr>
-        <p:spPr>
-          <a:xfrm>
-            <a:off x="1975104" y="2871216"/>
-            <a:ext cx="9189720" cy="512064"/>
-          </a:xfrm>
-          <a:prstGeom prst="rect">
-            <a:avLst/>
-          </a:prstGeom>
-          <a:noFill/>
-        </p:spPr>
-        <p:txBody>
-          <a:bodyPr wrap="square" lIns="73152" rIns="73152" tIns="36576" bIns="36576">
-            <a:spAutoFit/>
-          </a:bodyPr>
-          <a:lstStyle/>
-          <a:p>
-            <a:pPr algn="l">
-              <a:spcAft>
-                <a:spcPts val="0"/>
-              </a:spcAft>
-              <a:defRPr sz="1300" b="0">
-                <a:solidFill>
-                  <a:srgbClr val="122C4E"/>
-                </a:solidFill>
-                <a:latin typeface="Noto Sans CJK KR"/>
-              </a:defRPr>
-            </a:pPr>
-            <a:r>
-              <a:t>사용: parameter_bridge가 이 YAML을 읽도록 launch한다.</a:t>
+              <a:t>~/ros2_curri/my_agv_ws/src/</a:t>
             </a:r>
             <a:br/>
             <a:r>
-              <a:t>화면/출력: ros2 topic info에서 보이는 type과 publisher 수</a:t>
-            </a:r>
-          </a:p>
-        </p:txBody>
-      </p:sp>
-      <p:sp>
-        <p:nvSpPr>
-          <p:cNvPr id="15" name="Rounded Rectangle 14"/>
-          <p:cNvSpPr/>
-          <p:nvPr/>
-        </p:nvSpPr>
-        <p:spPr>
-          <a:xfrm>
-            <a:off x="640080" y="3941063"/>
-            <a:ext cx="10972800" cy="2048256"/>
-          </a:xfrm>
-          <a:prstGeom prst="roundRect">
-            <a:avLst/>
-          </a:prstGeom>
-          <a:solidFill>
-            <a:srgbClr val="F4F7FB"/>
-          </a:solidFill>
-          <a:ln>
-            <a:solidFill>
-              <a:srgbClr val="CCDBEB"/>
-            </a:solidFill>
-          </a:ln>
-        </p:spPr>
-        <p:style>
-          <a:lnRef idx="1">
-            <a:schemeClr val="accent1"/>
-          </a:lnRef>
-          <a:fillRef idx="3">
-            <a:schemeClr val="accent1"/>
-          </a:fillRef>
-          <a:effectRef idx="2">
-            <a:schemeClr val="accent1"/>
-          </a:effectRef>
-          <a:fontRef idx="minor">
-            <a:schemeClr val="lt1"/>
-          </a:fontRef>
-        </p:style>
-        <p:txBody>
-          <a:bodyPr rtlCol="0" anchor="ctr"/>
-          <a:lstStyle/>
-          <a:p>
-            <a:pPr algn="ctr"/>
-          </a:p>
-        </p:txBody>
-      </p:sp>
-      <p:sp>
-        <p:nvSpPr>
-          <p:cNvPr id="16" name="TextBox 15"/>
-          <p:cNvSpPr txBox="1"/>
-          <p:nvPr/>
-        </p:nvSpPr>
-        <p:spPr>
-          <a:xfrm>
-            <a:off x="850392" y="4078224"/>
-            <a:ext cx="10424160" cy="256032"/>
-          </a:xfrm>
-          <a:prstGeom prst="rect">
-            <a:avLst/>
-          </a:prstGeom>
-          <a:noFill/>
-        </p:spPr>
-        <p:txBody>
-          <a:bodyPr wrap="square" lIns="73152" rIns="73152" tIns="36576" bIns="36576">
-            <a:spAutoFit/>
-          </a:bodyPr>
-          <a:lstStyle/>
-          <a:p>
-            <a:pPr algn="l">
-              <a:spcAft>
-                <a:spcPts val="0"/>
-              </a:spcAft>
-              <a:defRPr sz="1300" b="1">
-                <a:solidFill>
-                  <a:srgbClr val="225B9B"/>
-                </a:solidFill>
-                <a:latin typeface="DejaVu Sans Mono"/>
-              </a:defRPr>
-            </a:pPr>
-            <a:r>
-              <a:t>~/ros2_curri/agv_ws/src/agv_gazebo/launch/gazebo.launch.py</a:t>
-            </a:r>
-          </a:p>
-        </p:txBody>
-      </p:sp>
-      <p:sp>
-        <p:nvSpPr>
-          <p:cNvPr id="17" name="TextBox 16"/>
-          <p:cNvSpPr txBox="1"/>
-          <p:nvPr/>
-        </p:nvSpPr>
-        <p:spPr>
-          <a:xfrm>
-            <a:off x="868680" y="4443983"/>
-            <a:ext cx="1234440" cy="228600"/>
-          </a:xfrm>
-          <a:prstGeom prst="rect">
-            <a:avLst/>
-          </a:prstGeom>
-          <a:noFill/>
-        </p:spPr>
-        <p:txBody>
-          <a:bodyPr wrap="square" lIns="73152" rIns="73152" tIns="36576" bIns="36576">
-            <a:spAutoFit/>
-          </a:bodyPr>
-          <a:lstStyle/>
-          <a:p>
-            <a:pPr algn="l">
-              <a:spcAft>
-                <a:spcPts val="0"/>
-              </a:spcAft>
-              <a:defRPr sz="1500" b="1">
-                <a:solidFill>
-                  <a:srgbClr val="2A8B5A"/>
-                </a:solidFill>
-                <a:latin typeface="Noto Sans CJK KR"/>
-              </a:defRPr>
-            </a:pPr>
-            <a:r>
-              <a:t>만드는 것</a:t>
-            </a:r>
-          </a:p>
-        </p:txBody>
-      </p:sp>
-      <p:sp>
-        <p:nvSpPr>
-          <p:cNvPr id="18" name="TextBox 17"/>
-          <p:cNvSpPr txBox="1"/>
-          <p:nvPr/>
-        </p:nvSpPr>
-        <p:spPr>
-          <a:xfrm>
-            <a:off x="1975104" y="4425696"/>
-            <a:ext cx="9189720" cy="274320"/>
-          </a:xfrm>
-          <a:prstGeom prst="rect">
-            <a:avLst/>
-          </a:prstGeom>
-          <a:noFill/>
-        </p:spPr>
-        <p:txBody>
-          <a:bodyPr wrap="square" lIns="73152" rIns="73152" tIns="36576" bIns="36576">
-            <a:spAutoFit/>
-          </a:bodyPr>
-          <a:lstStyle/>
-          <a:p>
-            <a:pPr algn="l">
-              <a:spcAft>
-                <a:spcPts val="0"/>
-              </a:spcAft>
-              <a:defRPr sz="1500" b="0">
-                <a:solidFill>
-                  <a:srgbClr val="122C4E"/>
-                </a:solidFill>
-                <a:latin typeface="Noto Sans CJK KR"/>
-              </a:defRPr>
-            </a:pPr>
-            <a:r>
-              <a:t>여러 ROS 2 node를 시작 순서대로 조립하는 launch 파일</a:t>
-            </a:r>
-          </a:p>
-        </p:txBody>
-      </p:sp>
-      <p:sp>
-        <p:nvSpPr>
-          <p:cNvPr id="19" name="TextBox 18"/>
-          <p:cNvSpPr txBox="1"/>
-          <p:nvPr/>
-        </p:nvSpPr>
-        <p:spPr>
-          <a:xfrm>
-            <a:off x="868680" y="4818888"/>
-            <a:ext cx="1234440" cy="228600"/>
-          </a:xfrm>
-          <a:prstGeom prst="rect">
-            <a:avLst/>
-          </a:prstGeom>
-          <a:noFill/>
-        </p:spPr>
-        <p:txBody>
-          <a:bodyPr wrap="square" lIns="73152" rIns="73152" tIns="36576" bIns="36576">
-            <a:spAutoFit/>
-          </a:bodyPr>
-          <a:lstStyle/>
-          <a:p>
-            <a:pPr algn="l">
-              <a:spcAft>
-                <a:spcPts val="0"/>
-              </a:spcAft>
-              <a:defRPr sz="1500" b="1">
-                <a:solidFill>
-                  <a:srgbClr val="DB7E22"/>
-                </a:solidFill>
-                <a:latin typeface="Noto Sans CJK KR"/>
-              </a:defRPr>
-            </a:pPr>
-            <a:r>
-              <a:t>코드 읽기</a:t>
-            </a:r>
-          </a:p>
-        </p:txBody>
-      </p:sp>
-      <p:sp>
-        <p:nvSpPr>
-          <p:cNvPr id="20" name="TextBox 19"/>
-          <p:cNvSpPr txBox="1"/>
-          <p:nvPr/>
-        </p:nvSpPr>
-        <p:spPr>
-          <a:xfrm>
-            <a:off x="1975104" y="4800600"/>
-            <a:ext cx="9189720" cy="301752"/>
-          </a:xfrm>
-          <a:prstGeom prst="rect">
-            <a:avLst/>
-          </a:prstGeom>
-          <a:noFill/>
-        </p:spPr>
-        <p:txBody>
-          <a:bodyPr wrap="square" lIns="73152" rIns="73152" tIns="36576" bIns="36576">
-            <a:spAutoFit/>
-          </a:bodyPr>
-          <a:lstStyle/>
-          <a:p>
-            <a:pPr algn="l">
-              <a:spcAft>
-                <a:spcPts val="0"/>
-              </a:spcAft>
-              <a:defRPr sz="1400" b="0">
-                <a:solidFill>
-                  <a:srgbClr val="122C4E"/>
-                </a:solidFill>
-                <a:latin typeface="Noto Sans CJK KR"/>
-              </a:defRPr>
-            </a:pPr>
-            <a:r>
-              <a:t>launch argument → Node → parameters/config 순서로 읽는다.</a:t>
-            </a:r>
-          </a:p>
-        </p:txBody>
-      </p:sp>
-      <p:sp>
-        <p:nvSpPr>
-          <p:cNvPr id="21" name="TextBox 20"/>
-          <p:cNvSpPr txBox="1"/>
-          <p:nvPr/>
-        </p:nvSpPr>
-        <p:spPr>
-          <a:xfrm>
-            <a:off x="868680" y="5202936"/>
-            <a:ext cx="1234440" cy="228600"/>
-          </a:xfrm>
-          <a:prstGeom prst="rect">
-            <a:avLst/>
-          </a:prstGeom>
-          <a:noFill/>
-        </p:spPr>
-        <p:txBody>
-          <a:bodyPr wrap="square" lIns="73152" rIns="73152" tIns="36576" bIns="36576">
-            <a:spAutoFit/>
-          </a:bodyPr>
-          <a:lstStyle/>
-          <a:p>
-            <a:pPr algn="l">
-              <a:spcAft>
-                <a:spcPts val="0"/>
-              </a:spcAft>
-              <a:defRPr sz="1500" b="1">
-                <a:solidFill>
-                  <a:srgbClr val="225B9B"/>
-                </a:solidFill>
-                <a:latin typeface="Noto Sans CJK KR"/>
-              </a:defRPr>
-            </a:pPr>
-            <a:r>
-              <a:t>사용/확인</a:t>
-            </a:r>
-          </a:p>
-        </p:txBody>
-      </p:sp>
-      <p:sp>
-        <p:nvSpPr>
-          <p:cNvPr id="22" name="TextBox 21"/>
-          <p:cNvSpPr txBox="1"/>
-          <p:nvPr/>
-        </p:nvSpPr>
-        <p:spPr>
-          <a:xfrm>
-            <a:off x="1975104" y="5184648"/>
-            <a:ext cx="9189720" cy="512064"/>
-          </a:xfrm>
-          <a:prstGeom prst="rect">
-            <a:avLst/>
-          </a:prstGeom>
-          <a:noFill/>
-        </p:spPr>
-        <p:txBody>
-          <a:bodyPr wrap="square" lIns="73152" rIns="73152" tIns="36576" bIns="36576">
-            <a:spAutoFit/>
-          </a:bodyPr>
-          <a:lstStyle/>
-          <a:p>
-            <a:pPr algn="l">
-              <a:spcAft>
-                <a:spcPts val="0"/>
-              </a:spcAft>
-              <a:defRPr sz="1300" b="0">
-                <a:solidFill>
-                  <a:srgbClr val="122C4E"/>
-                </a:solidFill>
-                <a:latin typeface="Noto Sans CJK KR"/>
-              </a:defRPr>
-            </a:pPr>
-            <a:r>
-              <a:t>사용: ros2 launch로 실행한다.</a:t>
+              <a:t>└── agv_gazebo/config/bridge.yaml</a:t>
             </a:r>
             <a:br/>
             <a:r>
-              <a:t>화면/출력: terminal의 실행 node와 topic</a:t>
+              <a:t>└── agv_gazebo/launch/gazebo.launch.py</a:t>
+            </a:r>
+          </a:p>
+        </p:txBody>
+      </p:sp>
+      <p:sp>
+        <p:nvSpPr>
+          <p:cNvPr id="7" name="TextBox 6"/>
+          <p:cNvSpPr txBox="1"/>
+          <p:nvPr/>
+        </p:nvSpPr>
+        <p:spPr>
+          <a:xfrm>
+            <a:off x="877824" y="6144768"/>
+            <a:ext cx="10332720" cy="201168"/>
+          </a:xfrm>
+          <a:prstGeom prst="rect">
+            <a:avLst/>
+          </a:prstGeom>
+          <a:noFill/>
+        </p:spPr>
+        <p:txBody>
+          <a:bodyPr wrap="square" lIns="73152" rIns="73152" tIns="36576" bIns="36576">
+            <a:spAutoFit/>
+          </a:bodyPr>
+          <a:lstStyle/>
+          <a:p>
+            <a:pPr algn="ctr">
+              <a:spcAft>
+                <a:spcPts val="0"/>
+              </a:spcAft>
+              <a:defRPr sz="1100" b="0">
+                <a:solidFill>
+                  <a:srgbClr val="5C6672"/>
+                </a:solidFill>
+                <a:latin typeface="Noto Sans CJK KR"/>
+              </a:defRPr>
+            </a:pPr>
+            <a:r>
+              <a:t>파일 하나를 만들고 저장한 뒤에만 다음 파일로 넘어갑니다. Complete는 오류가 풀리지 않을 때만 비교합니다.</a:t>
             </a:r>
           </a:p>
         </p:txBody>
@@ -13712,7 +15686,7 @@
               </a:defRPr>
             </a:pPr>
             <a:r>
-              <a:t>bridge YAML을 작성한다</a:t>
+              <a:t>코드/설정이 실제로 만드는 것 (1/1)</a:t>
             </a:r>
           </a:p>
         </p:txBody>
@@ -13751,7 +15725,7 @@
               </a:defRPr>
             </a:pPr>
             <a:r>
-              <a:t>한 장에는 한 행동만 수행합니다.</a:t>
+              <a:t>파일을 입력하기 전에 ‘무엇을 만들고 어디서 볼지’를 먼저 연결합니다.</a:t>
             </a:r>
           </a:p>
         </p:txBody>
@@ -13887,109 +15861,31 @@
               </a:defRPr>
             </a:pPr>
             <a:r>
-              <a:t>현재 단계 1/2    |    현재 폴더 ~/ros2_curri/agv_ws    |    현재 터미널</a:t>
-            </a:r>
-          </a:p>
-        </p:txBody>
-      </p:sp>
-      <p:sp>
-        <p:nvSpPr>
-          <p:cNvPr id="7" name="TextBox 6"/>
-          <p:cNvSpPr txBox="1"/>
-          <p:nvPr/>
-        </p:nvSpPr>
-        <p:spPr>
-          <a:xfrm>
-            <a:off x="676656" y="1764792"/>
-            <a:ext cx="1828800" cy="347472"/>
-          </a:xfrm>
-          <a:prstGeom prst="rect">
-            <a:avLst/>
-          </a:prstGeom>
-          <a:noFill/>
-        </p:spPr>
-        <p:txBody>
-          <a:bodyPr wrap="square" lIns="73152" rIns="73152" tIns="36576" bIns="36576">
-            <a:spAutoFit/>
-          </a:bodyPr>
-          <a:lstStyle/>
-          <a:p>
-            <a:pPr algn="l">
-              <a:spcAft>
-                <a:spcPts val="0"/>
-              </a:spcAft>
-              <a:defRPr sz="1800" b="1">
-                <a:solidFill>
-                  <a:srgbClr val="225B9B"/>
-                </a:solidFill>
-                <a:latin typeface="Noto Sans CJK KR"/>
-              </a:defRPr>
-            </a:pPr>
-            <a:r>
-              <a:t>왜 하는가</a:t>
-            </a:r>
-          </a:p>
-        </p:txBody>
-      </p:sp>
-      <p:sp>
-        <p:nvSpPr>
-          <p:cNvPr id="8" name="TextBox 7"/>
-          <p:cNvSpPr txBox="1"/>
-          <p:nvPr/>
-        </p:nvSpPr>
-        <p:spPr>
-          <a:xfrm>
-            <a:off x="676656" y="2103120"/>
-            <a:ext cx="10789920" cy="512064"/>
-          </a:xfrm>
-          <a:prstGeom prst="rect">
-            <a:avLst/>
-          </a:prstGeom>
-          <a:noFill/>
-        </p:spPr>
-        <p:txBody>
-          <a:bodyPr wrap="square" lIns="73152" rIns="73152" tIns="36576" bIns="36576">
-            <a:spAutoFit/>
-          </a:bodyPr>
-          <a:lstStyle/>
-          <a:p>
-            <a:pPr algn="l">
-              <a:spcAft>
-                <a:spcPts val="0"/>
-              </a:spcAft>
-              <a:defRPr sz="2000" b="0">
-                <a:solidFill>
-                  <a:srgbClr val="122C4E"/>
-                </a:solidFill>
-                <a:latin typeface="Noto Sans CJK KR"/>
-              </a:defRPr>
-            </a:pPr>
-            <a:r>
-              <a:t>방향과 양쪽 message type을 한 topic마다 정확히 적는다.</a:t>
-            </a:r>
-          </a:p>
-        </p:txBody>
-      </p:sp>
-      <p:sp>
-        <p:nvSpPr>
-          <p:cNvPr id="9" name="Rounded Rectangle 8"/>
+              <a:t>현재 단계 파일 역할    |    현재 폴더 ~/ros2_curri/my_agv_ws    |    현재 터미널</a:t>
+            </a:r>
+          </a:p>
+        </p:txBody>
+      </p:sp>
+      <p:sp>
+        <p:nvSpPr>
+          <p:cNvPr id="7" name="Rounded Rectangle 6"/>
           <p:cNvSpPr/>
           <p:nvPr/>
         </p:nvSpPr>
         <p:spPr>
           <a:xfrm>
-            <a:off x="676656" y="2871216"/>
-            <a:ext cx="10835640" cy="2331720"/>
+            <a:off x="640080" y="1627632"/>
+            <a:ext cx="10972800" cy="2048256"/>
           </a:xfrm>
           <a:prstGeom prst="roundRect">
             <a:avLst/>
           </a:prstGeom>
           <a:solidFill>
-            <a:srgbClr val="1D232D"/>
+            <a:srgbClr val="F4F7FB"/>
           </a:solidFill>
           <a:ln>
             <a:solidFill>
-              <a:srgbClr val="1D232D"/>
+              <a:srgbClr val="CCDBEB"/>
             </a:solidFill>
           </a:ln>
         </p:spPr>
@@ -14008,40 +15904,345 @@
           </a:fontRef>
         </p:style>
         <p:txBody>
-          <a:bodyPr rtlCol="0" anchor="ctr" wrap="square" lIns="73152" rIns="73152" tIns="36576" bIns="36576"/>
+          <a:bodyPr rtlCol="0" anchor="ctr"/>
+          <a:lstStyle/>
+          <a:p>
+            <a:pPr algn="ctr"/>
+          </a:p>
+        </p:txBody>
+      </p:sp>
+      <p:sp>
+        <p:nvSpPr>
+          <p:cNvPr id="8" name="TextBox 7"/>
+          <p:cNvSpPr txBox="1"/>
+          <p:nvPr/>
+        </p:nvSpPr>
+        <p:spPr>
+          <a:xfrm>
+            <a:off x="850392" y="1764792"/>
+            <a:ext cx="10424160" cy="256032"/>
+          </a:xfrm>
+          <a:prstGeom prst="rect">
+            <a:avLst/>
+          </a:prstGeom>
+          <a:noFill/>
+        </p:spPr>
+        <p:txBody>
+          <a:bodyPr wrap="square" lIns="73152" rIns="73152" tIns="36576" bIns="36576">
+            <a:spAutoFit/>
+          </a:bodyPr>
           <a:lstStyle/>
           <a:p>
             <a:pPr algn="l">
               <a:spcAft>
                 <a:spcPts val="0"/>
               </a:spcAft>
-              <a:defRPr sz="1600" b="0">
-                <a:solidFill>
-                  <a:srgbClr val="FFFFFF"/>
+              <a:defRPr sz="1300" b="1">
+                <a:solidFill>
+                  <a:srgbClr val="225B9B"/>
                 </a:solidFill>
                 <a:latin typeface="DejaVu Sans Mono"/>
               </a:defRPr>
             </a:pPr>
             <a:r>
-              <a:t>cd ~/ros2_curri/agv_ws</a:t>
+              <a:t>~/ros2_curri/my_agv_ws/src/agv_gazebo/config/bridge.yaml</a:t>
+            </a:r>
+          </a:p>
+        </p:txBody>
+      </p:sp>
+      <p:sp>
+        <p:nvSpPr>
+          <p:cNvPr id="9" name="TextBox 8"/>
+          <p:cNvSpPr txBox="1"/>
+          <p:nvPr/>
+        </p:nvSpPr>
+        <p:spPr>
+          <a:xfrm>
+            <a:off x="868680" y="2130552"/>
+            <a:ext cx="1234440" cy="228600"/>
+          </a:xfrm>
+          <a:prstGeom prst="rect">
+            <a:avLst/>
+          </a:prstGeom>
+          <a:noFill/>
+        </p:spPr>
+        <p:txBody>
+          <a:bodyPr wrap="square" lIns="73152" rIns="73152" tIns="36576" bIns="36576">
+            <a:spAutoFit/>
+          </a:bodyPr>
+          <a:lstStyle/>
+          <a:p>
+            <a:pPr algn="l">
+              <a:spcAft>
+                <a:spcPts val="0"/>
+              </a:spcAft>
+              <a:defRPr sz="1500" b="1">
+                <a:solidFill>
+                  <a:srgbClr val="2A8B5A"/>
+                </a:solidFill>
+                <a:latin typeface="Noto Sans CJK KR"/>
+              </a:defRPr>
+            </a:pPr>
+            <a:r>
+              <a:t>만드는 것</a:t>
+            </a:r>
+          </a:p>
+        </p:txBody>
+      </p:sp>
+      <p:sp>
+        <p:nvSpPr>
+          <p:cNvPr id="10" name="TextBox 9"/>
+          <p:cNvSpPr txBox="1"/>
+          <p:nvPr/>
+        </p:nvSpPr>
+        <p:spPr>
+          <a:xfrm>
+            <a:off x="1975104" y="2112264"/>
+            <a:ext cx="9189720" cy="274320"/>
+          </a:xfrm>
+          <a:prstGeom prst="rect">
+            <a:avLst/>
+          </a:prstGeom>
+          <a:noFill/>
+        </p:spPr>
+        <p:txBody>
+          <a:bodyPr wrap="square" lIns="73152" rIns="73152" tIns="36576" bIns="36576">
+            <a:spAutoFit/>
+          </a:bodyPr>
+          <a:lstStyle/>
+          <a:p>
+            <a:pPr algn="l">
+              <a:spcAft>
+                <a:spcPts val="0"/>
+              </a:spcAft>
+              <a:defRPr sz="1500" b="0">
+                <a:solidFill>
+                  <a:srgbClr val="122C4E"/>
+                </a:solidFill>
+                <a:latin typeface="Noto Sans CJK KR"/>
+              </a:defRPr>
+            </a:pPr>
+            <a:r>
+              <a:t>Gazebo Transport 메시지와 ROS 2 topic을 방향별로 연결하는 번역표</a:t>
+            </a:r>
+          </a:p>
+        </p:txBody>
+      </p:sp>
+      <p:sp>
+        <p:nvSpPr>
+          <p:cNvPr id="11" name="TextBox 10"/>
+          <p:cNvSpPr txBox="1"/>
+          <p:nvPr/>
+        </p:nvSpPr>
+        <p:spPr>
+          <a:xfrm>
+            <a:off x="868680" y="2505456"/>
+            <a:ext cx="1234440" cy="228600"/>
+          </a:xfrm>
+          <a:prstGeom prst="rect">
+            <a:avLst/>
+          </a:prstGeom>
+          <a:noFill/>
+        </p:spPr>
+        <p:txBody>
+          <a:bodyPr wrap="square" lIns="73152" rIns="73152" tIns="36576" bIns="36576">
+            <a:spAutoFit/>
+          </a:bodyPr>
+          <a:lstStyle/>
+          <a:p>
+            <a:pPr algn="l">
+              <a:spcAft>
+                <a:spcPts val="0"/>
+              </a:spcAft>
+              <a:defRPr sz="1500" b="1">
+                <a:solidFill>
+                  <a:srgbClr val="DB7E22"/>
+                </a:solidFill>
+                <a:latin typeface="Noto Sans CJK KR"/>
+              </a:defRPr>
+            </a:pPr>
+            <a:r>
+              <a:t>코드 읽기</a:t>
+            </a:r>
+          </a:p>
+        </p:txBody>
+      </p:sp>
+      <p:sp>
+        <p:nvSpPr>
+          <p:cNvPr id="12" name="TextBox 11"/>
+          <p:cNvSpPr txBox="1"/>
+          <p:nvPr/>
+        </p:nvSpPr>
+        <p:spPr>
+          <a:xfrm>
+            <a:off x="1975104" y="2487168"/>
+            <a:ext cx="9189720" cy="301752"/>
+          </a:xfrm>
+          <a:prstGeom prst="rect">
+            <a:avLst/>
+          </a:prstGeom>
+          <a:noFill/>
+        </p:spPr>
+        <p:txBody>
+          <a:bodyPr wrap="square" lIns="73152" rIns="73152" tIns="36576" bIns="36576">
+            <a:spAutoFit/>
+          </a:bodyPr>
+          <a:lstStyle/>
+          <a:p>
+            <a:pPr algn="l">
+              <a:spcAft>
+                <a:spcPts val="0"/>
+              </a:spcAft>
+              <a:defRPr sz="1400" b="0">
+                <a:solidFill>
+                  <a:srgbClr val="122C4E"/>
+                </a:solidFill>
+                <a:latin typeface="Noto Sans CJK KR"/>
+              </a:defRPr>
+            </a:pPr>
+            <a:r>
+              <a:t>한 항목에서 ros_topic_name → type → direction을 세 줄씩 비교한다.</a:t>
+            </a:r>
+          </a:p>
+        </p:txBody>
+      </p:sp>
+      <p:sp>
+        <p:nvSpPr>
+          <p:cNvPr id="13" name="TextBox 12"/>
+          <p:cNvSpPr txBox="1"/>
+          <p:nvPr/>
+        </p:nvSpPr>
+        <p:spPr>
+          <a:xfrm>
+            <a:off x="868680" y="2889504"/>
+            <a:ext cx="1234440" cy="228600"/>
+          </a:xfrm>
+          <a:prstGeom prst="rect">
+            <a:avLst/>
+          </a:prstGeom>
+          <a:noFill/>
+        </p:spPr>
+        <p:txBody>
+          <a:bodyPr wrap="square" lIns="73152" rIns="73152" tIns="36576" bIns="36576">
+            <a:spAutoFit/>
+          </a:bodyPr>
+          <a:lstStyle/>
+          <a:p>
+            <a:pPr algn="l">
+              <a:spcAft>
+                <a:spcPts val="0"/>
+              </a:spcAft>
+              <a:defRPr sz="1500" b="1">
+                <a:solidFill>
+                  <a:srgbClr val="225B9B"/>
+                </a:solidFill>
+                <a:latin typeface="Noto Sans CJK KR"/>
+              </a:defRPr>
+            </a:pPr>
+            <a:r>
+              <a:t>사용/확인</a:t>
+            </a:r>
+          </a:p>
+        </p:txBody>
+      </p:sp>
+      <p:sp>
+        <p:nvSpPr>
+          <p:cNvPr id="14" name="TextBox 13"/>
+          <p:cNvSpPr txBox="1"/>
+          <p:nvPr/>
+        </p:nvSpPr>
+        <p:spPr>
+          <a:xfrm>
+            <a:off x="1975104" y="2871216"/>
+            <a:ext cx="9189720" cy="512064"/>
+          </a:xfrm>
+          <a:prstGeom prst="rect">
+            <a:avLst/>
+          </a:prstGeom>
+          <a:noFill/>
+        </p:spPr>
+        <p:txBody>
+          <a:bodyPr wrap="square" lIns="73152" rIns="73152" tIns="36576" bIns="36576">
+            <a:spAutoFit/>
+          </a:bodyPr>
+          <a:lstStyle/>
+          <a:p>
+            <a:pPr algn="l">
+              <a:spcAft>
+                <a:spcPts val="0"/>
+              </a:spcAft>
+              <a:defRPr sz="1300" b="0">
+                <a:solidFill>
+                  <a:srgbClr val="122C4E"/>
+                </a:solidFill>
+                <a:latin typeface="Noto Sans CJK KR"/>
+              </a:defRPr>
+            </a:pPr>
+            <a:r>
+              <a:t>사용: parameter_bridge가 이 YAML을 읽도록 launch한다.</a:t>
             </a:r>
             <a:br/>
             <a:r>
-              <a:t>nano src/agv_gazebo/config/bridge.yaml</a:t>
-            </a:r>
-          </a:p>
-        </p:txBody>
-      </p:sp>
-      <p:sp>
-        <p:nvSpPr>
-          <p:cNvPr id="10" name="TextBox 9"/>
-          <p:cNvSpPr txBox="1"/>
-          <p:nvPr/>
-        </p:nvSpPr>
-        <p:spPr>
-          <a:xfrm>
-            <a:off x="768096" y="5468112"/>
-            <a:ext cx="1143000" cy="256032"/>
+              <a:t>화면/출력: ros2 topic info에서 보이는 type과 publisher 수</a:t>
+            </a:r>
+          </a:p>
+        </p:txBody>
+      </p:sp>
+      <p:sp>
+        <p:nvSpPr>
+          <p:cNvPr id="15" name="Rounded Rectangle 14"/>
+          <p:cNvSpPr/>
+          <p:nvPr/>
+        </p:nvSpPr>
+        <p:spPr>
+          <a:xfrm>
+            <a:off x="640080" y="3941063"/>
+            <a:ext cx="10972800" cy="2048256"/>
+          </a:xfrm>
+          <a:prstGeom prst="roundRect">
+            <a:avLst/>
+          </a:prstGeom>
+          <a:solidFill>
+            <a:srgbClr val="F4F7FB"/>
+          </a:solidFill>
+          <a:ln>
+            <a:solidFill>
+              <a:srgbClr val="CCDBEB"/>
+            </a:solidFill>
+          </a:ln>
+        </p:spPr>
+        <p:style>
+          <a:lnRef idx="1">
+            <a:schemeClr val="accent1"/>
+          </a:lnRef>
+          <a:fillRef idx="3">
+            <a:schemeClr val="accent1"/>
+          </a:fillRef>
+          <a:effectRef idx="2">
+            <a:schemeClr val="accent1"/>
+          </a:effectRef>
+          <a:fontRef idx="minor">
+            <a:schemeClr val="lt1"/>
+          </a:fontRef>
+        </p:style>
+        <p:txBody>
+          <a:bodyPr rtlCol="0" anchor="ctr"/>
+          <a:lstStyle/>
+          <a:p>
+            <a:pPr algn="ctr"/>
+          </a:p>
+        </p:txBody>
+      </p:sp>
+      <p:sp>
+        <p:nvSpPr>
+          <p:cNvPr id="16" name="TextBox 15"/>
+          <p:cNvSpPr txBox="1"/>
+          <p:nvPr/>
+        </p:nvSpPr>
+        <p:spPr>
+          <a:xfrm>
+            <a:off x="850392" y="4078224"/>
+            <a:ext cx="10424160" cy="256032"/>
           </a:xfrm>
           <a:prstGeom prst="rect">
             <a:avLst/>
@@ -14058,7 +16259,46 @@
               <a:spcAft>
                 <a:spcPts val="0"/>
               </a:spcAft>
-              <a:defRPr sz="1800" b="1">
+              <a:defRPr sz="1300" b="1">
+                <a:solidFill>
+                  <a:srgbClr val="225B9B"/>
+                </a:solidFill>
+                <a:latin typeface="DejaVu Sans Mono"/>
+              </a:defRPr>
+            </a:pPr>
+            <a:r>
+              <a:t>~/ros2_curri/my_agv_ws/src/agv_gazebo/launch/gazebo.launch.py</a:t>
+            </a:r>
+          </a:p>
+        </p:txBody>
+      </p:sp>
+      <p:sp>
+        <p:nvSpPr>
+          <p:cNvPr id="17" name="TextBox 16"/>
+          <p:cNvSpPr txBox="1"/>
+          <p:nvPr/>
+        </p:nvSpPr>
+        <p:spPr>
+          <a:xfrm>
+            <a:off x="868680" y="4443983"/>
+            <a:ext cx="1234440" cy="228600"/>
+          </a:xfrm>
+          <a:prstGeom prst="rect">
+            <a:avLst/>
+          </a:prstGeom>
+          <a:noFill/>
+        </p:spPr>
+        <p:txBody>
+          <a:bodyPr wrap="square" lIns="73152" rIns="73152" tIns="36576" bIns="36576">
+            <a:spAutoFit/>
+          </a:bodyPr>
+          <a:lstStyle/>
+          <a:p>
+            <a:pPr algn="l">
+              <a:spcAft>
+                <a:spcPts val="0"/>
+              </a:spcAft>
+              <a:defRPr sz="1500" b="1">
                 <a:solidFill>
                   <a:srgbClr val="2A8B5A"/>
                 </a:solidFill>
@@ -14066,21 +16306,21 @@
               </a:defRPr>
             </a:pPr>
             <a:r>
-              <a:t>확인</a:t>
-            </a:r>
-          </a:p>
-        </p:txBody>
-      </p:sp>
-      <p:sp>
-        <p:nvSpPr>
-          <p:cNvPr id="11" name="TextBox 10"/>
-          <p:cNvSpPr txBox="1"/>
-          <p:nvPr/>
-        </p:nvSpPr>
-        <p:spPr>
-          <a:xfrm>
-            <a:off x="768096" y="5742432"/>
-            <a:ext cx="10561320" cy="347472"/>
+              <a:t>만드는 것</a:t>
+            </a:r>
+          </a:p>
+        </p:txBody>
+      </p:sp>
+      <p:sp>
+        <p:nvSpPr>
+          <p:cNvPr id="18" name="TextBox 17"/>
+          <p:cNvSpPr txBox="1"/>
+          <p:nvPr/>
+        </p:nvSpPr>
+        <p:spPr>
+          <a:xfrm>
+            <a:off x="1975104" y="4425696"/>
+            <a:ext cx="9189720" cy="274320"/>
           </a:xfrm>
           <a:prstGeom prst="rect">
             <a:avLst/>
@@ -14097,7 +16337,7 @@
               <a:spcAft>
                 <a:spcPts val="0"/>
               </a:spcAft>
-              <a:defRPr sz="1800" b="0">
+              <a:defRPr sz="1500" b="0">
                 <a:solidFill>
                   <a:srgbClr val="122C4E"/>
                 </a:solidFill>
@@ -14105,7 +16345,167 @@
               </a:defRPr>
             </a:pPr>
             <a:r>
-              <a:t>명령의 출력에서 topic·frame·파일 이름 또는 성공 메시지를 찾으면 이 단계가 완료됩니다.</a:t>
+              <a:t>여러 ROS 2 node를 시작 순서대로 조립하는 launch 파일</a:t>
+            </a:r>
+          </a:p>
+        </p:txBody>
+      </p:sp>
+      <p:sp>
+        <p:nvSpPr>
+          <p:cNvPr id="19" name="TextBox 18"/>
+          <p:cNvSpPr txBox="1"/>
+          <p:nvPr/>
+        </p:nvSpPr>
+        <p:spPr>
+          <a:xfrm>
+            <a:off x="868680" y="4818888"/>
+            <a:ext cx="1234440" cy="228600"/>
+          </a:xfrm>
+          <a:prstGeom prst="rect">
+            <a:avLst/>
+          </a:prstGeom>
+          <a:noFill/>
+        </p:spPr>
+        <p:txBody>
+          <a:bodyPr wrap="square" lIns="73152" rIns="73152" tIns="36576" bIns="36576">
+            <a:spAutoFit/>
+          </a:bodyPr>
+          <a:lstStyle/>
+          <a:p>
+            <a:pPr algn="l">
+              <a:spcAft>
+                <a:spcPts val="0"/>
+              </a:spcAft>
+              <a:defRPr sz="1500" b="1">
+                <a:solidFill>
+                  <a:srgbClr val="DB7E22"/>
+                </a:solidFill>
+                <a:latin typeface="Noto Sans CJK KR"/>
+              </a:defRPr>
+            </a:pPr>
+            <a:r>
+              <a:t>코드 읽기</a:t>
+            </a:r>
+          </a:p>
+        </p:txBody>
+      </p:sp>
+      <p:sp>
+        <p:nvSpPr>
+          <p:cNvPr id="20" name="TextBox 19"/>
+          <p:cNvSpPr txBox="1"/>
+          <p:nvPr/>
+        </p:nvSpPr>
+        <p:spPr>
+          <a:xfrm>
+            <a:off x="1975104" y="4800600"/>
+            <a:ext cx="9189720" cy="301752"/>
+          </a:xfrm>
+          <a:prstGeom prst="rect">
+            <a:avLst/>
+          </a:prstGeom>
+          <a:noFill/>
+        </p:spPr>
+        <p:txBody>
+          <a:bodyPr wrap="square" lIns="73152" rIns="73152" tIns="36576" bIns="36576">
+            <a:spAutoFit/>
+          </a:bodyPr>
+          <a:lstStyle/>
+          <a:p>
+            <a:pPr algn="l">
+              <a:spcAft>
+                <a:spcPts val="0"/>
+              </a:spcAft>
+              <a:defRPr sz="1400" b="0">
+                <a:solidFill>
+                  <a:srgbClr val="122C4E"/>
+                </a:solidFill>
+                <a:latin typeface="Noto Sans CJK KR"/>
+              </a:defRPr>
+            </a:pPr>
+            <a:r>
+              <a:t>launch argument → Node → parameters/config 순서로 읽는다.</a:t>
+            </a:r>
+          </a:p>
+        </p:txBody>
+      </p:sp>
+      <p:sp>
+        <p:nvSpPr>
+          <p:cNvPr id="21" name="TextBox 20"/>
+          <p:cNvSpPr txBox="1"/>
+          <p:nvPr/>
+        </p:nvSpPr>
+        <p:spPr>
+          <a:xfrm>
+            <a:off x="868680" y="5202936"/>
+            <a:ext cx="1234440" cy="228600"/>
+          </a:xfrm>
+          <a:prstGeom prst="rect">
+            <a:avLst/>
+          </a:prstGeom>
+          <a:noFill/>
+        </p:spPr>
+        <p:txBody>
+          <a:bodyPr wrap="square" lIns="73152" rIns="73152" tIns="36576" bIns="36576">
+            <a:spAutoFit/>
+          </a:bodyPr>
+          <a:lstStyle/>
+          <a:p>
+            <a:pPr algn="l">
+              <a:spcAft>
+                <a:spcPts val="0"/>
+              </a:spcAft>
+              <a:defRPr sz="1500" b="1">
+                <a:solidFill>
+                  <a:srgbClr val="225B9B"/>
+                </a:solidFill>
+                <a:latin typeface="Noto Sans CJK KR"/>
+              </a:defRPr>
+            </a:pPr>
+            <a:r>
+              <a:t>사용/확인</a:t>
+            </a:r>
+          </a:p>
+        </p:txBody>
+      </p:sp>
+      <p:sp>
+        <p:nvSpPr>
+          <p:cNvPr id="22" name="TextBox 21"/>
+          <p:cNvSpPr txBox="1"/>
+          <p:nvPr/>
+        </p:nvSpPr>
+        <p:spPr>
+          <a:xfrm>
+            <a:off x="1975104" y="5184648"/>
+            <a:ext cx="9189720" cy="512064"/>
+          </a:xfrm>
+          <a:prstGeom prst="rect">
+            <a:avLst/>
+          </a:prstGeom>
+          <a:noFill/>
+        </p:spPr>
+        <p:txBody>
+          <a:bodyPr wrap="square" lIns="73152" rIns="73152" tIns="36576" bIns="36576">
+            <a:spAutoFit/>
+          </a:bodyPr>
+          <a:lstStyle/>
+          <a:p>
+            <a:pPr algn="l">
+              <a:spcAft>
+                <a:spcPts val="0"/>
+              </a:spcAft>
+              <a:defRPr sz="1300" b="0">
+                <a:solidFill>
+                  <a:srgbClr val="122C4E"/>
+                </a:solidFill>
+                <a:latin typeface="Noto Sans CJK KR"/>
+              </a:defRPr>
+            </a:pPr>
+            <a:r>
+              <a:t>사용: ros2 launch로 실행한다.</a:t>
+            </a:r>
+            <a:br/>
+            <a:r>
+              <a:t>화면/출력: terminal의 실행 node와 topic</a:t>
             </a:r>
           </a:p>
         </p:txBody>
@@ -14162,7 +16562,7 @@
               </a:defRPr>
             </a:pPr>
             <a:r>
-              <a:t>launch가 YAML을 읽게 한다</a:t>
+              <a:t>구현 1/2: 폴더를 만들고 빈 파일을 연다</a:t>
             </a:r>
           </a:p>
         </p:txBody>
@@ -14201,7 +16601,7 @@
               </a:defRPr>
             </a:pPr>
             <a:r>
-              <a:t>한 장에는 한 행동만 수행합니다.</a:t>
+              <a:t>파일을 먼저 만든 뒤, 다음 슬라이드의 코드 블록을 위에서 아래로 직접 입력합니다.</a:t>
             </a:r>
           </a:p>
         </p:txBody>
@@ -14337,7 +16737,7 @@
               </a:defRPr>
             </a:pPr>
             <a:r>
-              <a:t>현재 단계 2/2    |    현재 폴더 ~/ros2_curri/agv_ws    |    현재 터미널</a:t>
+              <a:t>현재 단계 파일 생성 1/2    |    현재 폴더 ~/ros2_curri/my_agv_ws    |    현재 터미널</a:t>
             </a:r>
           </a:p>
         </p:txBody>
@@ -14350,8 +16750,8 @@
         </p:nvSpPr>
         <p:spPr>
           <a:xfrm>
-            <a:off x="676656" y="1764792"/>
-            <a:ext cx="1828800" cy="347472"/>
+            <a:off x="685800" y="1719072"/>
+            <a:ext cx="1417320" cy="256032"/>
           </a:xfrm>
           <a:prstGeom prst="rect">
             <a:avLst/>
@@ -14376,7 +16776,7 @@
               </a:defRPr>
             </a:pPr>
             <a:r>
-              <a:t>왜 하는가</a:t>
+              <a:t>이번 파일</a:t>
             </a:r>
           </a:p>
         </p:txBody>
@@ -14389,8 +16789,8 @@
         </p:nvSpPr>
         <p:spPr>
           <a:xfrm>
-            <a:off x="676656" y="2103120"/>
-            <a:ext cx="10789920" cy="512064"/>
+            <a:off x="1920240" y="1719072"/>
+            <a:ext cx="9235440" cy="274320"/>
           </a:xfrm>
           <a:prstGeom prst="rect">
             <a:avLst/>
@@ -14407,29 +16807,107 @@
               <a:spcAft>
                 <a:spcPts val="0"/>
               </a:spcAft>
-              <a:defRPr sz="2000" b="0">
+              <a:defRPr sz="1400" b="1">
                 <a:solidFill>
                   <a:srgbClr val="122C4E"/>
                 </a:solidFill>
-                <a:latin typeface="Noto Sans CJK KR"/>
-              </a:defRPr>
-            </a:pPr>
-            <a:r>
-              <a:t>config_file은 package share 경로에서 찾도록 launch에 넣는다.</a:t>
-            </a:r>
-          </a:p>
-        </p:txBody>
-      </p:sp>
-      <p:sp>
-        <p:nvSpPr>
-          <p:cNvPr id="9" name="Rounded Rectangle 8"/>
+                <a:latin typeface="DejaVu Sans Mono"/>
+              </a:defRPr>
+            </a:pPr>
+            <a:r>
+              <a:t>~/ros2_curri/my_agv_ws/src/agv_gazebo/config/bridge.yaml</a:t>
+            </a:r>
+          </a:p>
+        </p:txBody>
+      </p:sp>
+      <p:sp>
+        <p:nvSpPr>
+          <p:cNvPr id="9" name="TextBox 8"/>
+          <p:cNvSpPr txBox="1"/>
+          <p:nvPr/>
+        </p:nvSpPr>
+        <p:spPr>
+          <a:xfrm>
+            <a:off x="685800" y="2103120"/>
+            <a:ext cx="1417320" cy="256032"/>
+          </a:xfrm>
+          <a:prstGeom prst="rect">
+            <a:avLst/>
+          </a:prstGeom>
+          <a:noFill/>
+        </p:spPr>
+        <p:txBody>
+          <a:bodyPr wrap="square" lIns="73152" rIns="73152" tIns="36576" bIns="36576">
+            <a:spAutoFit/>
+          </a:bodyPr>
+          <a:lstStyle/>
+          <a:p>
+            <a:pPr algn="l">
+              <a:spcAft>
+                <a:spcPts val="0"/>
+              </a:spcAft>
+              <a:defRPr sz="1800" b="1">
+                <a:solidFill>
+                  <a:srgbClr val="2A8B5A"/>
+                </a:solidFill>
+                <a:latin typeface="Noto Sans CJK KR"/>
+              </a:defRPr>
+            </a:pPr>
+            <a:r>
+              <a:t>만드는 것</a:t>
+            </a:r>
+          </a:p>
+        </p:txBody>
+      </p:sp>
+      <p:sp>
+        <p:nvSpPr>
+          <p:cNvPr id="10" name="TextBox 9"/>
+          <p:cNvSpPr txBox="1"/>
+          <p:nvPr/>
+        </p:nvSpPr>
+        <p:spPr>
+          <a:xfrm>
+            <a:off x="1920240" y="2103120"/>
+            <a:ext cx="9235440" cy="438912"/>
+          </a:xfrm>
+          <a:prstGeom prst="rect">
+            <a:avLst/>
+          </a:prstGeom>
+          <a:noFill/>
+        </p:spPr>
+        <p:txBody>
+          <a:bodyPr wrap="square" lIns="73152" rIns="73152" tIns="36576" bIns="36576">
+            <a:spAutoFit/>
+          </a:bodyPr>
+          <a:lstStyle/>
+          <a:p>
+            <a:pPr algn="l">
+              <a:spcAft>
+                <a:spcPts val="0"/>
+              </a:spcAft>
+              <a:defRPr sz="1700" b="0">
+                <a:solidFill>
+                  <a:srgbClr val="122C4E"/>
+                </a:solidFill>
+                <a:latin typeface="Noto Sans CJK KR"/>
+              </a:defRPr>
+            </a:pPr>
+            <a:r>
+              <a:t>Gazebo Transport 메시지와 ROS 2 topic을 방향별로 연결하는 번역표</a:t>
+            </a:r>
+          </a:p>
+        </p:txBody>
+      </p:sp>
+      <p:sp>
+        <p:nvSpPr>
+          <p:cNvPr id="11" name="Rounded Rectangle 10"/>
           <p:cNvSpPr/>
           <p:nvPr/>
         </p:nvSpPr>
         <p:spPr>
           <a:xfrm>
-            <a:off x="676656" y="2871216"/>
-            <a:ext cx="10835640" cy="2331720"/>
+            <a:off x="676656" y="2852928"/>
+            <a:ext cx="10881360" cy="1682496"/>
           </a:xfrm>
           <a:prstGeom prst="roundRect">
             <a:avLst/>
@@ -14473,46 +16951,81 @@
               </a:defRPr>
             </a:pPr>
             <a:r>
-              <a:t>colcon build --symlink-install --packages-select agv_gazebo</a:t>
+              <a:t>mkdir -p ~/ros2_curri/my_agv_ws/src/agv_gazebo/config</a:t>
             </a:r>
             <a:br/>
             <a:r>
-              <a:t>source install/setup.bash</a:t>
-            </a:r>
-            <a:br/>
-            <a:r>
-              <a:t>ros2 launch agv_gazebo gazebo.launch.py</a:t>
-            </a:r>
-          </a:p>
-        </p:txBody>
-      </p:sp>
-      <p:sp>
-        <p:nvSpPr>
-          <p:cNvPr id="10" name="TextBox 9"/>
-          <p:cNvSpPr txBox="1"/>
-          <p:nvPr/>
-        </p:nvSpPr>
-        <p:spPr>
-          <a:xfrm>
-            <a:off x="768096" y="5468112"/>
-            <a:ext cx="1143000" cy="256032"/>
-          </a:xfrm>
-          <a:prstGeom prst="rect">
-            <a:avLst/>
-          </a:prstGeom>
-          <a:noFill/>
-        </p:spPr>
-        <p:txBody>
-          <a:bodyPr wrap="square" lIns="73152" rIns="73152" tIns="36576" bIns="36576">
-            <a:spAutoFit/>
-          </a:bodyPr>
-          <a:lstStyle/>
-          <a:p>
-            <a:pPr algn="l">
-              <a:spcAft>
-                <a:spcPts val="0"/>
-              </a:spcAft>
-              <a:defRPr sz="1800" b="1">
+              <a:t>nano ~/ros2_curri/my_agv_ws/src/agv_gazebo/config/bridge.yaml</a:t>
+            </a:r>
+          </a:p>
+        </p:txBody>
+      </p:sp>
+      <p:sp>
+        <p:nvSpPr>
+          <p:cNvPr id="12" name="TextBox 11"/>
+          <p:cNvSpPr txBox="1"/>
+          <p:nvPr/>
+        </p:nvSpPr>
+        <p:spPr>
+          <a:xfrm>
+            <a:off x="804672" y="4901184"/>
+            <a:ext cx="10241280" cy="329184"/>
+          </a:xfrm>
+          <a:prstGeom prst="rect">
+            <a:avLst/>
+          </a:prstGeom>
+          <a:noFill/>
+        </p:spPr>
+        <p:txBody>
+          <a:bodyPr wrap="square" lIns="73152" rIns="73152" tIns="36576" bIns="36576">
+            <a:spAutoFit/>
+          </a:bodyPr>
+          <a:lstStyle/>
+          <a:p>
+            <a:pPr algn="ctr">
+              <a:spcAft>
+                <a:spcPts val="0"/>
+              </a:spcAft>
+              <a:defRPr sz="1600" b="1">
+                <a:solidFill>
+                  <a:srgbClr val="DB7E22"/>
+                </a:solidFill>
+                <a:latin typeface="Noto Sans CJK KR"/>
+              </a:defRPr>
+            </a:pPr>
+            <a:r>
+              <a:t>nano 저장: Ctrl+O → Enter → Ctrl+X  |  파일이 열리면 아직 비어 있는 것이 정상입니다.</a:t>
+            </a:r>
+          </a:p>
+        </p:txBody>
+      </p:sp>
+      <p:sp>
+        <p:nvSpPr>
+          <p:cNvPr id="13" name="TextBox 12"/>
+          <p:cNvSpPr txBox="1"/>
+          <p:nvPr/>
+        </p:nvSpPr>
+        <p:spPr>
+          <a:xfrm>
+            <a:off x="804672" y="5504688"/>
+            <a:ext cx="10241280" cy="329184"/>
+          </a:xfrm>
+          <a:prstGeom prst="rect">
+            <a:avLst/>
+          </a:prstGeom>
+          <a:noFill/>
+        </p:spPr>
+        <p:txBody>
+          <a:bodyPr wrap="square" lIns="73152" rIns="73152" tIns="36576" bIns="36576">
+            <a:spAutoFit/>
+          </a:bodyPr>
+          <a:lstStyle/>
+          <a:p>
+            <a:pPr algn="ctr">
+              <a:spcAft>
+                <a:spcPts val="0"/>
+              </a:spcAft>
+              <a:defRPr sz="1500" b="1">
                 <a:solidFill>
                   <a:srgbClr val="2A8B5A"/>
                 </a:solidFill>
@@ -14520,46 +17033,7 @@
               </a:defRPr>
             </a:pPr>
             <a:r>
-              <a:t>확인</a:t>
-            </a:r>
-          </a:p>
-        </p:txBody>
-      </p:sp>
-      <p:sp>
-        <p:nvSpPr>
-          <p:cNvPr id="11" name="TextBox 10"/>
-          <p:cNvSpPr txBox="1"/>
-          <p:nvPr/>
-        </p:nvSpPr>
-        <p:spPr>
-          <a:xfrm>
-            <a:off x="768096" y="5742432"/>
-            <a:ext cx="10561320" cy="347472"/>
-          </a:xfrm>
-          <a:prstGeom prst="rect">
-            <a:avLst/>
-          </a:prstGeom>
-          <a:noFill/>
-        </p:spPr>
-        <p:txBody>
-          <a:bodyPr wrap="square" lIns="73152" rIns="73152" tIns="36576" bIns="36576">
-            <a:spAutoFit/>
-          </a:bodyPr>
-          <a:lstStyle/>
-          <a:p>
-            <a:pPr algn="l">
-              <a:spcAft>
-                <a:spcPts val="0"/>
-              </a:spcAft>
-              <a:defRPr sz="1800" b="0">
-                <a:solidFill>
-                  <a:srgbClr val="122C4E"/>
-                </a:solidFill>
-                <a:latin typeface="Noto Sans CJK KR"/>
-              </a:defRPr>
-            </a:pPr>
-            <a:r>
-              <a:t>명령의 출력에서 topic·frame·파일 이름 또는 성공 메시지를 찾으면 이 단계가 완료됩니다.</a:t>
+              <a:t>다음 단계의 확인 화면: ros2 topic info에서 보이는 type과 publisher 수</a:t>
             </a:r>
           </a:p>
         </p:txBody>

--- a/blocks/C_drive_visualization/M10_ros_gz_bridge/M10_ros_gz_bridge_ROS2_Gazebo_연결.pptx
+++ b/blocks/C_drive_visualization/M10_ros_gz_bridge/M10_ros_gz_bridge_ROS2_Gazebo_연결.pptx
@@ -30,6 +30,10 @@
     <p:sldId id="278" r:id="rId30"/>
     <p:sldId id="279" r:id="rId31"/>
     <p:sldId id="280" r:id="rId32"/>
+    <p:sldId id="281" r:id="rId33"/>
+    <p:sldId id="282" r:id="rId34"/>
+    <p:sldId id="283" r:id="rId35"/>
+    <p:sldId id="284" r:id="rId36"/>
   </p:sldIdLst>
   <p:sldSz cx="12191999" cy="6858000" type="screen4x3"/>
   <p:notesSz cx="6858000" cy="9144000"/>
@@ -616,17 +620,17 @@
           <a:lstStyle/>
           <a:p>
             <a:r>
-              <a:t>[설명] ~/ros2_curri/my_agv_ws/src/agv_gazebo/config/bridge.yaml의 1/3 구현 블록을 직접 입력한다.</a:t>
-            </a:r>
-          </a:p>
-          <a:p>
-            <a:r>
-              <a:t>[실행] nano ~/ros2_curri/my_agv_ws/src/agv_gazebo/config/bridge.yaml</a:t>
-            </a:r>
-          </a:p>
-          <a:p>
-            <a:r>
-              <a:t>[확인] 저장 뒤 다음 구현 블록으로 이동한다.</a:t>
+              <a:t>[설명] 코드를 읽어 주는 방식으로 한 줄의 역할과 실행 효과를 연결한다.</a:t>
+            </a:r>
+          </a:p>
+          <a:p>
+            <a:r>
+              <a:t>[실행] 슬라이드의 명령 또는 파일 작성 단계를 진행한다.</a:t>
+            </a:r>
+          </a:p>
+          <a:p>
+            <a:r>
+              <a:t>[확인] 각 코드 줄의 뜻과 확인 위치를 한 문장으로 설명한다.</a:t>
             </a:r>
           </a:p>
           <a:p>
@@ -636,7 +640,7 @@
           </a:p>
           <a:p>
             <a:r>
-              <a:t>[오류] 들여쓰기·XML 태그·따옴표가 슬라이드와 정확히 같은지 확인한다.</a:t>
+              <a:t>[오류] 오류가 나면 현재 폴더, source, 파일 경로를 먼저 확인한다.</a:t>
             </a:r>
           </a:p>
         </p:txBody>
@@ -706,7 +710,7 @@
           <a:lstStyle/>
           <a:p>
             <a:r>
-              <a:t>[설명] ~/ros2_curri/my_agv_ws/src/agv_gazebo/config/bridge.yaml의 2/3 구현 블록을 직접 입력한다.</a:t>
+              <a:t>[설명] ~/ros2_curri/my_agv_ws/src/agv_gazebo/config/bridge.yaml의 1/3 구현 블록을 직접 입력한다.</a:t>
             </a:r>
           </a:p>
           <a:p>
@@ -796,7 +800,7 @@
           <a:lstStyle/>
           <a:p>
             <a:r>
-              <a:t>[설명] ~/ros2_curri/my_agv_ws/src/agv_gazebo/config/bridge.yaml의 3/3 구현 블록을 직접 입력한다.</a:t>
+              <a:t>[설명] ~/ros2_curri/my_agv_ws/src/agv_gazebo/config/bridge.yaml의 2/3 구현 블록을 직접 입력한다.</a:t>
             </a:r>
           </a:p>
           <a:p>
@@ -886,22 +890,17 @@
           <a:lstStyle/>
           <a:p>
             <a:r>
-              <a:t>[설명] 여러 ROS 2 node를 시작 순서대로 조립하는 launch 파일</a:t>
-            </a:r>
-          </a:p>
-          <a:p>
-            <a:r>
-              <a:t>[실행] mkdir -p ~/ros2_curri/my_agv_ws/src/agv_gazebo/launch</a:t>
-            </a:r>
-          </a:p>
-          <a:p>
-            <a:r>
-              <a:t>nano ~/ros2_curri/my_agv_ws/src/agv_gazebo/launch/gazebo.launch.py</a:t>
-            </a:r>
-          </a:p>
-          <a:p>
-            <a:r>
-              <a:t>[확인] 빈 파일을 연 뒤 다음 코드 입력 슬라이드로 간다.</a:t>
+              <a:t>[설명] ~/ros2_curri/my_agv_ws/src/agv_gazebo/config/bridge.yaml의 3/3 구현 블록을 직접 입력한다.</a:t>
+            </a:r>
+          </a:p>
+          <a:p>
+            <a:r>
+              <a:t>[실행] nano ~/ros2_curri/my_agv_ws/src/agv_gazebo/config/bridge.yaml</a:t>
+            </a:r>
+          </a:p>
+          <a:p>
+            <a:r>
+              <a:t>[확인] 저장 뒤 다음 구현 블록으로 이동한다.</a:t>
             </a:r>
           </a:p>
           <a:p>
@@ -911,7 +910,7 @@
           </a:p>
           <a:p>
             <a:r>
-              <a:t>[오류] 오류가 나면 현재 폴더, source, 파일 경로를 먼저 확인한다.</a:t>
+              <a:t>[오류] 들여쓰기·XML 태그·따옴표가 슬라이드와 정확히 같은지 확인한다.</a:t>
             </a:r>
           </a:p>
         </p:txBody>
@@ -981,17 +980,22 @@
           <a:lstStyle/>
           <a:p>
             <a:r>
-              <a:t>[설명] ~/ros2_curri/my_agv_ws/src/agv_gazebo/launch/gazebo.launch.py의 1/2 구현 블록을 직접 입력한다.</a:t>
-            </a:r>
-          </a:p>
-          <a:p>
-            <a:r>
-              <a:t>[실행] nano ~/ros2_curri/my_agv_ws/src/agv_gazebo/launch/gazebo.launch.py</a:t>
-            </a:r>
-          </a:p>
-          <a:p>
-            <a:r>
-              <a:t>[확인] 저장 뒤 다음 구현 블록으로 이동한다.</a:t>
+              <a:t>[설명] 여러 ROS 2 node를 시작 순서대로 조립하는 launch 파일</a:t>
+            </a:r>
+          </a:p>
+          <a:p>
+            <a:r>
+              <a:t>[실행] mkdir -p ~/ros2_curri/my_agv_ws/src/agv_gazebo/launch</a:t>
+            </a:r>
+          </a:p>
+          <a:p>
+            <a:r>
+              <a:t>nano ~/ros2_curri/my_agv_ws/src/agv_gazebo/launch/gazebo.launch.py</a:t>
+            </a:r>
+          </a:p>
+          <a:p>
+            <a:r>
+              <a:t>[확인] 빈 파일을 연 뒤 다음 코드 입력 슬라이드로 간다.</a:t>
             </a:r>
           </a:p>
           <a:p>
@@ -1001,7 +1005,7 @@
           </a:p>
           <a:p>
             <a:r>
-              <a:t>[오류] 들여쓰기·XML 태그·따옴표가 슬라이드와 정확히 같은지 확인한다.</a:t>
+              <a:t>[오류] 오류가 나면 현재 폴더, source, 파일 경로를 먼저 확인한다.</a:t>
             </a:r>
           </a:p>
         </p:txBody>
@@ -1071,17 +1075,17 @@
           <a:lstStyle/>
           <a:p>
             <a:r>
-              <a:t>[설명] ~/ros2_curri/my_agv_ws/src/agv_gazebo/launch/gazebo.launch.py의 2/2 구현 블록을 직접 입력한다.</a:t>
-            </a:r>
-          </a:p>
-          <a:p>
-            <a:r>
-              <a:t>[실행] nano ~/ros2_curri/my_agv_ws/src/agv_gazebo/launch/gazebo.launch.py</a:t>
-            </a:r>
-          </a:p>
-          <a:p>
-            <a:r>
-              <a:t>[확인] 저장 뒤 다음 구현 블록으로 이동한다.</a:t>
+              <a:t>[설명] 코드를 읽어 주는 방식으로 한 줄의 역할과 실행 효과를 연결한다.</a:t>
+            </a:r>
+          </a:p>
+          <a:p>
+            <a:r>
+              <a:t>[실행] 슬라이드의 명령 또는 파일 작성 단계를 진행한다.</a:t>
+            </a:r>
+          </a:p>
+          <a:p>
+            <a:r>
+              <a:t>[확인] 각 코드 줄의 뜻과 확인 위치를 한 문장으로 설명한다.</a:t>
             </a:r>
           </a:p>
           <a:p>
@@ -1091,7 +1095,7 @@
           </a:p>
           <a:p>
             <a:r>
-              <a:t>[오류] 들여쓰기·XML 태그·따옴표가 슬라이드와 정확히 같은지 확인한다.</a:t>
+              <a:t>[오류] 오류가 나면 현재 폴더, source, 파일 경로를 먼저 확인한다.</a:t>
             </a:r>
           </a:p>
         </p:txBody>
@@ -1161,22 +1165,17 @@
           <a:lstStyle/>
           <a:p>
             <a:r>
-              <a:t>[설명] 방향과 양쪽 message type을 한 topic마다 정확히 적는다.</a:t>
-            </a:r>
-          </a:p>
-          <a:p>
-            <a:r>
-              <a:t>[실행] cd ~/ros2_curri/my_agv_ws</a:t>
-            </a:r>
-          </a:p>
-          <a:p>
-            <a:r>
-              <a:t>nano src/agv_gazebo/config/bridge.yaml</a:t>
-            </a:r>
-          </a:p>
-          <a:p>
-            <a:r>
-              <a:t>[확인] 명령 출력에서 슬라이드의 확인 항목을 찾는다.</a:t>
+              <a:t>[설명] 코드를 읽어 주는 방식으로 한 줄의 역할과 실행 효과를 연결한다.</a:t>
+            </a:r>
+          </a:p>
+          <a:p>
+            <a:r>
+              <a:t>[실행] 슬라이드의 명령 또는 파일 작성 단계를 진행한다.</a:t>
+            </a:r>
+          </a:p>
+          <a:p>
+            <a:r>
+              <a:t>[확인] 각 코드 줄의 뜻과 확인 위치를 한 문장으로 설명한다.</a:t>
             </a:r>
           </a:p>
           <a:p>
@@ -1256,27 +1255,17 @@
           <a:lstStyle/>
           <a:p>
             <a:r>
-              <a:t>[설명] config_file은 package share 경로에서 찾도록 launch에 넣는다.</a:t>
-            </a:r>
-          </a:p>
-          <a:p>
-            <a:r>
-              <a:t>[실행] colcon build --symlink-install --packages-select agv_gazebo</a:t>
-            </a:r>
-          </a:p>
-          <a:p>
-            <a:r>
-              <a:t>source install/setup.bash</a:t>
-            </a:r>
-          </a:p>
-          <a:p>
-            <a:r>
-              <a:t>ros2 launch agv_gazebo gazebo.launch.py</a:t>
-            </a:r>
-          </a:p>
-          <a:p>
-            <a:r>
-              <a:t>[확인] 명령 출력에서 슬라이드의 확인 항목을 찾는다.</a:t>
+              <a:t>[설명] 코드를 읽어 주는 방식으로 한 줄의 역할과 실행 효과를 연결한다.</a:t>
+            </a:r>
+          </a:p>
+          <a:p>
+            <a:r>
+              <a:t>[실행] 슬라이드의 명령 또는 파일 작성 단계를 진행한다.</a:t>
+            </a:r>
+          </a:p>
+          <a:p>
+            <a:r>
+              <a:t>[확인] 각 코드 줄의 뜻과 확인 위치를 한 문장으로 설명한다.</a:t>
             </a:r>
           </a:p>
           <a:p>
@@ -1356,22 +1345,17 @@
           <a:lstStyle/>
           <a:p>
             <a:r>
-              <a:t>[설명] build/source/run을 생략 없이 실행한다.</a:t>
-            </a:r>
-          </a:p>
-          <a:p>
-            <a:r>
-              <a:t>[실행] source ~/ros2_curri/my_agv_ws/install/setup.bash</a:t>
-            </a:r>
-          </a:p>
-          <a:p>
-            <a:r>
-              <a:t>ros2 launch agv_gazebo gazebo.launch.py</a:t>
-            </a:r>
-          </a:p>
-          <a:p>
-            <a:r>
-              <a:t>[확인] /cmd_vel ROS→Gazebo 및 odom/scan/imu/camera/clock Gazebo→ROS 매핑을 확인한다.</a:t>
+              <a:t>[설명] ~/ros2_curri/my_agv_ws/src/agv_gazebo/launch/gazebo.launch.py의 1/2 구현 블록을 직접 입력한다.</a:t>
+            </a:r>
+          </a:p>
+          <a:p>
+            <a:r>
+              <a:t>[실행] nano ~/ros2_curri/my_agv_ws/src/agv_gazebo/launch/gazebo.launch.py</a:t>
+            </a:r>
+          </a:p>
+          <a:p>
+            <a:r>
+              <a:t>[확인] 저장 뒤 다음 구현 블록으로 이동한다.</a:t>
             </a:r>
           </a:p>
           <a:p>
@@ -1381,7 +1365,7 @@
           </a:p>
           <a:p>
             <a:r>
-              <a:t>[오류] 오류가 나면 현재 폴더, source, 파일 경로를 먼저 확인한다.</a:t>
+              <a:t>[오류] 들여쓰기·XML 태그·따옴표가 슬라이드와 정확히 같은지 확인한다.</a:t>
             </a:r>
           </a:p>
         </p:txBody>
@@ -1451,17 +1435,17 @@
           <a:lstStyle/>
           <a:p>
             <a:r>
-              <a:t>[설명] 실제 Ubuntu/ROS 2 환경에서 생성한 검증 화면이다.</a:t>
-            </a:r>
-          </a:p>
-          <a:p>
-            <a:r>
-              <a:t>[실행] 슬라이드의 명령 또는 파일 작성 단계를 진행한다.</a:t>
-            </a:r>
-          </a:p>
-          <a:p>
-            <a:r>
-              <a:t>[확인] ① 명령/설정  ② 정상 출력 또는 화면  ③ 다음 검증 명령으로 재확인</a:t>
+              <a:t>[설명] ~/ros2_curri/my_agv_ws/src/agv_gazebo/launch/gazebo.launch.py의 2/2 구현 블록을 직접 입력한다.</a:t>
+            </a:r>
+          </a:p>
+          <a:p>
+            <a:r>
+              <a:t>[실행] nano ~/ros2_curri/my_agv_ws/src/agv_gazebo/launch/gazebo.launch.py</a:t>
+            </a:r>
+          </a:p>
+          <a:p>
+            <a:r>
+              <a:t>[확인] 저장 뒤 다음 구현 블록으로 이동한다.</a:t>
             </a:r>
           </a:p>
           <a:p>
@@ -1471,7 +1455,7 @@
           </a:p>
           <a:p>
             <a:r>
-              <a:t>[오류] 오류가 나면 현재 폴더, source, 파일 경로를 먼저 확인한다.</a:t>
+              <a:t>[오류] 들여쓰기·XML 태그·따옴표가 슬라이드와 정확히 같은지 확인한다.</a:t>
             </a:r>
           </a:p>
         </p:txBody>
@@ -1631,22 +1615,22 @@
           <a:lstStyle/>
           <a:p>
             <a:r>
-              <a:t>[설명] 검증 명령은 GUI 결과와 별도로 실행해 재현 가능한 완료 기준을 만든다.</a:t>
-            </a:r>
-          </a:p>
-          <a:p>
-            <a:r>
-              <a:t>[실행] ros2 topic list | rg '/cmd_vel|/odom|/scan|/imu|/camera|/clock'</a:t>
-            </a:r>
-          </a:p>
-          <a:p>
-            <a:r>
-              <a:t>ros2 topic info /scan</a:t>
-            </a:r>
-          </a:p>
-          <a:p>
-            <a:r>
-              <a:t>[확인] /cmd_vel ROS→Gazebo 및 odom/scan/imu/camera/clock Gazebo→ROS 매핑을 확인한다.</a:t>
+              <a:t>[설명] 방향과 양쪽 message type을 한 topic마다 정확히 적는다.</a:t>
+            </a:r>
+          </a:p>
+          <a:p>
+            <a:r>
+              <a:t>[실행] cd ~/ros2_curri/my_agv_ws</a:t>
+            </a:r>
+          </a:p>
+          <a:p>
+            <a:r>
+              <a:t>nano src/agv_gazebo/config/bridge.yaml</a:t>
+            </a:r>
+          </a:p>
+          <a:p>
+            <a:r>
+              <a:t>[확인] 명령 출력에서 슬라이드의 확인 항목을 찾는다.</a:t>
             </a:r>
           </a:p>
           <a:p>
@@ -1726,17 +1710,27 @@
           <a:lstStyle/>
           <a:p>
             <a:r>
-              <a:t>[설명] 오류를 대신 해결하지 말고 증상부터 우선 확인 순서대로 교육생이 실행하게 한다.</a:t>
-            </a:r>
-          </a:p>
-          <a:p>
-            <a:r>
-              <a:t>[실행] 슬라이드의 명령 또는 파일 작성 단계를 진행한다.</a:t>
-            </a:r>
-          </a:p>
-          <a:p>
-            <a:r>
-              <a:t>[확인] 수정 뒤 첫 검증 명령을 다시 실행한다.</a:t>
+              <a:t>[설명] config_file은 package share 경로에서 찾도록 launch에 넣는다.</a:t>
+            </a:r>
+          </a:p>
+          <a:p>
+            <a:r>
+              <a:t>[실행] colcon build --symlink-install --packages-select agv_gazebo</a:t>
+            </a:r>
+          </a:p>
+          <a:p>
+            <a:r>
+              <a:t>source install/setup.bash</a:t>
+            </a:r>
+          </a:p>
+          <a:p>
+            <a:r>
+              <a:t>ros2 launch agv_gazebo gazebo.launch.py</a:t>
+            </a:r>
+          </a:p>
+          <a:p>
+            <a:r>
+              <a:t>[확인] 명령 출력에서 슬라이드의 확인 항목을 찾는다.</a:t>
             </a:r>
           </a:p>
           <a:p>
@@ -1746,7 +1740,7 @@
           </a:p>
           <a:p>
             <a:r>
-              <a:t>[오류] 슬라이드의 두 대표 오류를 먼저 사용한다.</a:t>
+              <a:t>[오류] 오류가 나면 현재 폴더, source, 파일 경로를 먼저 확인한다.</a:t>
             </a:r>
           </a:p>
         </p:txBody>
@@ -1816,37 +1810,22 @@
           <a:lstStyle/>
           <a:p>
             <a:r>
-              <a:t>[설명] Complete는 정답 복사본이 아니라 막혔을 때 비교·복구하는 안전망이다.</a:t>
-            </a:r>
-          </a:p>
-          <a:p>
-            <a:r>
-              <a:t>[실행] cd ~/ros2_curri</a:t>
-            </a:r>
-          </a:p>
-          <a:p>
-            <a:r>
-              <a:t>diff -ru my_agv_ws/src blocks/C_drive_visualization/M10_ros_gz_bridge/complete/agv_ws/src || true</a:t>
-            </a:r>
-          </a:p>
-          <a:p>
-            <a:r>
-              <a:t>cp -a my_agv_ws/src my_agv_ws/src_before_M10</a:t>
-            </a:r>
-          </a:p>
-          <a:p>
-            <a:r>
-              <a:t>cp -a blocks/C_drive_visualization/M10_ros_gz_bridge/complete/agv_ws/src/. my_agv_ws/src/</a:t>
-            </a:r>
-          </a:p>
-          <a:p>
-            <a:r>
-              <a:t>cd my_agv_ws &amp;&amp; colcon build --symlink-install &amp;&amp; source install/setup.bash</a:t>
-            </a:r>
-          </a:p>
-          <a:p>
-            <a:r>
-              <a:t>[확인] diff에서 내 파일과 Complete의 차이를 설명할 수 있다.</a:t>
+              <a:t>[설명] build/source/run을 생략 없이 실행한다.</a:t>
+            </a:r>
+          </a:p>
+          <a:p>
+            <a:r>
+              <a:t>[실행] source ~/ros2_curri/my_agv_ws/install/setup.bash</a:t>
+            </a:r>
+          </a:p>
+          <a:p>
+            <a:r>
+              <a:t>ros2 launch agv_gazebo gazebo.launch.py</a:t>
+            </a:r>
+          </a:p>
+          <a:p>
+            <a:r>
+              <a:t>[확인] /cmd_vel ROS→Gazebo 및 odom/scan/imu/camera/clock Gazebo→ROS 매핑을 확인한다.</a:t>
             </a:r>
           </a:p>
           <a:p>
@@ -1926,7 +1905,7 @@
           <a:lstStyle/>
           <a:p>
             <a:r>
-              <a:t>[설명] 교육생이 직접 한 값만 바꿔 원인과 결과를 연결하게 한다.</a:t>
+              <a:t>[설명] 실제 Ubuntu/ROS 2 환경에서 생성한 검증 화면이다.</a:t>
             </a:r>
           </a:p>
           <a:p>
@@ -1936,7 +1915,7 @@
           </a:p>
           <a:p>
             <a:r>
-              <a:t>[확인] 원래 값과 변경 값을 모두 기록한다.</a:t>
+              <a:t>[확인] ① 명령/설정  ② 정상 출력 또는 화면  ③ 다음 검증 명령으로 재확인</a:t>
             </a:r>
           </a:p>
           <a:p>
@@ -2016,17 +1995,22 @@
           <a:lstStyle/>
           <a:p>
             <a:r>
-              <a:t>[설명] 교육생이 자신의 workspace·캡처·로그를 저장했는지 확인하고 다음 모듈의 시작 상태를 읽는다.</a:t>
-            </a:r>
-          </a:p>
-          <a:p>
-            <a:r>
-              <a:t>[실행] 슬라이드의 명령 또는 파일 작성 단계를 진행한다.</a:t>
-            </a:r>
-          </a:p>
-          <a:p>
-            <a:r>
-              <a:t>[확인] M11 RViz2 시작 조건을 말할 수 있다.</a:t>
+              <a:t>[설명] 검증 명령은 GUI 결과와 별도로 실행해 재현 가능한 완료 기준을 만든다.</a:t>
+            </a:r>
+          </a:p>
+          <a:p>
+            <a:r>
+              <a:t>[실행] ros2 topic list | rg '/cmd_vel|/odom|/scan|/imu|/camera|/clock'</a:t>
+            </a:r>
+          </a:p>
+          <a:p>
+            <a:r>
+              <a:t>ros2 topic info /scan</a:t>
+            </a:r>
+          </a:p>
+          <a:p>
+            <a:r>
+              <a:t>[확인] /cmd_vel ROS→Gazebo 및 odom/scan/imu/camera/clock Gazebo→ROS 매핑을 확인한다.</a:t>
             </a:r>
           </a:p>
           <a:p>
@@ -2062,6 +2046,386 @@
 </file>
 
 <file path=ppt/notesSlides/notesSlide25.xml><?xml version="1.0" encoding="utf-8"?>
+<p:notes xmlns:a="http://schemas.openxmlformats.org/drawingml/2006/main" xmlns:p="http://schemas.openxmlformats.org/presentationml/2006/main" xmlns:r="http://schemas.openxmlformats.org/officeDocument/2006/relationships">
+  <p:cSld>
+    <p:spTree>
+      <p:nvGrpSpPr>
+        <p:cNvPr id="1" name=""/>
+        <p:cNvGrpSpPr/>
+        <p:nvPr/>
+      </p:nvGrpSpPr>
+      <p:grpSpPr>
+        <a:xfrm>
+          <a:off x="0" y="0"/>
+          <a:ext cx="0" cy="0"/>
+          <a:chOff x="0" y="0"/>
+          <a:chExt cx="0" cy="0"/>
+        </a:xfrm>
+      </p:grpSpPr>
+      <p:sp>
+        <p:nvSpPr>
+          <p:cNvPr id="2" name="Slide Image Placeholder 1"/>
+          <p:cNvSpPr>
+            <a:spLocks noGrp="1"/>
+          </p:cNvSpPr>
+          <p:nvPr>
+            <p:ph type="sldImg" idx="2"/>
+          </p:nvPr>
+        </p:nvSpPr>
+        <p:spPr/>
+      </p:sp>
+      <p:sp>
+        <p:nvSpPr>
+          <p:cNvPr id="3" name="Notes Placeholder 2"/>
+          <p:cNvSpPr>
+            <a:spLocks noGrp="1"/>
+          </p:cNvSpPr>
+          <p:nvPr>
+            <p:ph type="body" idx="3" sz="quarter"/>
+          </p:nvPr>
+        </p:nvSpPr>
+        <p:spPr/>
+        <p:txBody>
+          <a:bodyPr/>
+          <a:lstStyle/>
+          <a:p>
+            <a:r>
+              <a:t>[설명] 오류를 대신 해결하지 말고 증상부터 우선 확인 순서대로 교육생이 실행하게 한다.</a:t>
+            </a:r>
+          </a:p>
+          <a:p>
+            <a:r>
+              <a:t>[실행] 슬라이드의 명령 또는 파일 작성 단계를 진행한다.</a:t>
+            </a:r>
+          </a:p>
+          <a:p>
+            <a:r>
+              <a:t>[확인] 수정 뒤 첫 검증 명령을 다시 실행한다.</a:t>
+            </a:r>
+          </a:p>
+          <a:p>
+            <a:r>
+              <a:t>[멈춤] 교육생이 현재 체크포인트를 통과할 때까지 기다린다.</a:t>
+            </a:r>
+          </a:p>
+          <a:p>
+            <a:r>
+              <a:t>[오류] 슬라이드의 두 대표 오류를 먼저 사용한다.</a:t>
+            </a:r>
+          </a:p>
+        </p:txBody>
+      </p:sp>
+      <p:sp>
+        <p:nvSpPr>
+          <p:cNvPr id="4" name="Slide Number Placeholder 3"/>
+          <p:cNvSpPr>
+            <a:spLocks noGrp="1"/>
+          </p:cNvSpPr>
+          <p:nvPr>
+            <p:ph type="sldNum" idx="5" sz="quarter"/>
+          </p:nvPr>
+        </p:nvSpPr>
+        <p:spPr/>
+      </p:sp>
+    </p:spTree>
+  </p:cSld>
+  <p:clrMapOvr>
+    <a:masterClrMapping/>
+  </p:clrMapOvr>
+</p:notes>
+</file>
+
+<file path=ppt/notesSlides/notesSlide26.xml><?xml version="1.0" encoding="utf-8"?>
+<p:notes xmlns:a="http://schemas.openxmlformats.org/drawingml/2006/main" xmlns:p="http://schemas.openxmlformats.org/presentationml/2006/main" xmlns:r="http://schemas.openxmlformats.org/officeDocument/2006/relationships">
+  <p:cSld>
+    <p:spTree>
+      <p:nvGrpSpPr>
+        <p:cNvPr id="1" name=""/>
+        <p:cNvGrpSpPr/>
+        <p:nvPr/>
+      </p:nvGrpSpPr>
+      <p:grpSpPr>
+        <a:xfrm>
+          <a:off x="0" y="0"/>
+          <a:ext cx="0" cy="0"/>
+          <a:chOff x="0" y="0"/>
+          <a:chExt cx="0" cy="0"/>
+        </a:xfrm>
+      </p:grpSpPr>
+      <p:sp>
+        <p:nvSpPr>
+          <p:cNvPr id="2" name="Slide Image Placeholder 1"/>
+          <p:cNvSpPr>
+            <a:spLocks noGrp="1"/>
+          </p:cNvSpPr>
+          <p:nvPr>
+            <p:ph type="sldImg" idx="2"/>
+          </p:nvPr>
+        </p:nvSpPr>
+        <p:spPr/>
+      </p:sp>
+      <p:sp>
+        <p:nvSpPr>
+          <p:cNvPr id="3" name="Notes Placeholder 2"/>
+          <p:cNvSpPr>
+            <a:spLocks noGrp="1"/>
+          </p:cNvSpPr>
+          <p:nvPr>
+            <p:ph type="body" idx="3" sz="quarter"/>
+          </p:nvPr>
+        </p:nvSpPr>
+        <p:spPr/>
+        <p:txBody>
+          <a:bodyPr/>
+          <a:lstStyle/>
+          <a:p>
+            <a:r>
+              <a:t>[설명] Complete는 정답 복사본이 아니라 막혔을 때 비교·복구하는 안전망이다.</a:t>
+            </a:r>
+          </a:p>
+          <a:p>
+            <a:r>
+              <a:t>[실행] cd ~/ros2_curri</a:t>
+            </a:r>
+          </a:p>
+          <a:p>
+            <a:r>
+              <a:t>diff -ru my_agv_ws/src blocks/C_drive_visualization/M10_ros_gz_bridge/complete/agv_ws/src || true</a:t>
+            </a:r>
+          </a:p>
+          <a:p>
+            <a:r>
+              <a:t>cp -a my_agv_ws/src my_agv_ws/src_before_M10</a:t>
+            </a:r>
+          </a:p>
+          <a:p>
+            <a:r>
+              <a:t>cp -a blocks/C_drive_visualization/M10_ros_gz_bridge/complete/agv_ws/src/. my_agv_ws/src/</a:t>
+            </a:r>
+          </a:p>
+          <a:p>
+            <a:r>
+              <a:t>cd my_agv_ws &amp;&amp; colcon build --symlink-install &amp;&amp; source install/setup.bash</a:t>
+            </a:r>
+          </a:p>
+          <a:p>
+            <a:r>
+              <a:t>[확인] diff에서 내 파일과 Complete의 차이를 설명할 수 있다.</a:t>
+            </a:r>
+          </a:p>
+          <a:p>
+            <a:r>
+              <a:t>[멈춤] 교육생이 현재 체크포인트를 통과할 때까지 기다린다.</a:t>
+            </a:r>
+          </a:p>
+          <a:p>
+            <a:r>
+              <a:t>[오류] 오류가 나면 현재 폴더, source, 파일 경로를 먼저 확인한다.</a:t>
+            </a:r>
+          </a:p>
+        </p:txBody>
+      </p:sp>
+      <p:sp>
+        <p:nvSpPr>
+          <p:cNvPr id="4" name="Slide Number Placeholder 3"/>
+          <p:cNvSpPr>
+            <a:spLocks noGrp="1"/>
+          </p:cNvSpPr>
+          <p:nvPr>
+            <p:ph type="sldNum" idx="5" sz="quarter"/>
+          </p:nvPr>
+        </p:nvSpPr>
+        <p:spPr/>
+      </p:sp>
+    </p:spTree>
+  </p:cSld>
+  <p:clrMapOvr>
+    <a:masterClrMapping/>
+  </p:clrMapOvr>
+</p:notes>
+</file>
+
+<file path=ppt/notesSlides/notesSlide27.xml><?xml version="1.0" encoding="utf-8"?>
+<p:notes xmlns:a="http://schemas.openxmlformats.org/drawingml/2006/main" xmlns:p="http://schemas.openxmlformats.org/presentationml/2006/main" xmlns:r="http://schemas.openxmlformats.org/officeDocument/2006/relationships">
+  <p:cSld>
+    <p:spTree>
+      <p:nvGrpSpPr>
+        <p:cNvPr id="1" name=""/>
+        <p:cNvGrpSpPr/>
+        <p:nvPr/>
+      </p:nvGrpSpPr>
+      <p:grpSpPr>
+        <a:xfrm>
+          <a:off x="0" y="0"/>
+          <a:ext cx="0" cy="0"/>
+          <a:chOff x="0" y="0"/>
+          <a:chExt cx="0" cy="0"/>
+        </a:xfrm>
+      </p:grpSpPr>
+      <p:sp>
+        <p:nvSpPr>
+          <p:cNvPr id="2" name="Slide Image Placeholder 1"/>
+          <p:cNvSpPr>
+            <a:spLocks noGrp="1"/>
+          </p:cNvSpPr>
+          <p:nvPr>
+            <p:ph type="sldImg" idx="2"/>
+          </p:nvPr>
+        </p:nvSpPr>
+        <p:spPr/>
+      </p:sp>
+      <p:sp>
+        <p:nvSpPr>
+          <p:cNvPr id="3" name="Notes Placeholder 2"/>
+          <p:cNvSpPr>
+            <a:spLocks noGrp="1"/>
+          </p:cNvSpPr>
+          <p:nvPr>
+            <p:ph type="body" idx="3" sz="quarter"/>
+          </p:nvPr>
+        </p:nvSpPr>
+        <p:spPr/>
+        <p:txBody>
+          <a:bodyPr/>
+          <a:lstStyle/>
+          <a:p>
+            <a:r>
+              <a:t>[설명] 교육생이 직접 한 값만 바꿔 원인과 결과를 연결하게 한다.</a:t>
+            </a:r>
+          </a:p>
+          <a:p>
+            <a:r>
+              <a:t>[실행] 슬라이드의 명령 또는 파일 작성 단계를 진행한다.</a:t>
+            </a:r>
+          </a:p>
+          <a:p>
+            <a:r>
+              <a:t>[확인] 원래 값과 변경 값을 모두 기록한다.</a:t>
+            </a:r>
+          </a:p>
+          <a:p>
+            <a:r>
+              <a:t>[멈춤] 교육생이 현재 체크포인트를 통과할 때까지 기다린다.</a:t>
+            </a:r>
+          </a:p>
+          <a:p>
+            <a:r>
+              <a:t>[오류] 오류가 나면 현재 폴더, source, 파일 경로를 먼저 확인한다.</a:t>
+            </a:r>
+          </a:p>
+        </p:txBody>
+      </p:sp>
+      <p:sp>
+        <p:nvSpPr>
+          <p:cNvPr id="4" name="Slide Number Placeholder 3"/>
+          <p:cNvSpPr>
+            <a:spLocks noGrp="1"/>
+          </p:cNvSpPr>
+          <p:nvPr>
+            <p:ph type="sldNum" idx="5" sz="quarter"/>
+          </p:nvPr>
+        </p:nvSpPr>
+        <p:spPr/>
+      </p:sp>
+    </p:spTree>
+  </p:cSld>
+  <p:clrMapOvr>
+    <a:masterClrMapping/>
+  </p:clrMapOvr>
+</p:notes>
+</file>
+
+<file path=ppt/notesSlides/notesSlide28.xml><?xml version="1.0" encoding="utf-8"?>
+<p:notes xmlns:a="http://schemas.openxmlformats.org/drawingml/2006/main" xmlns:p="http://schemas.openxmlformats.org/presentationml/2006/main" xmlns:r="http://schemas.openxmlformats.org/officeDocument/2006/relationships">
+  <p:cSld>
+    <p:spTree>
+      <p:nvGrpSpPr>
+        <p:cNvPr id="1" name=""/>
+        <p:cNvGrpSpPr/>
+        <p:nvPr/>
+      </p:nvGrpSpPr>
+      <p:grpSpPr>
+        <a:xfrm>
+          <a:off x="0" y="0"/>
+          <a:ext cx="0" cy="0"/>
+          <a:chOff x="0" y="0"/>
+          <a:chExt cx="0" cy="0"/>
+        </a:xfrm>
+      </p:grpSpPr>
+      <p:sp>
+        <p:nvSpPr>
+          <p:cNvPr id="2" name="Slide Image Placeholder 1"/>
+          <p:cNvSpPr>
+            <a:spLocks noGrp="1"/>
+          </p:cNvSpPr>
+          <p:nvPr>
+            <p:ph type="sldImg" idx="2"/>
+          </p:nvPr>
+        </p:nvSpPr>
+        <p:spPr/>
+      </p:sp>
+      <p:sp>
+        <p:nvSpPr>
+          <p:cNvPr id="3" name="Notes Placeholder 2"/>
+          <p:cNvSpPr>
+            <a:spLocks noGrp="1"/>
+          </p:cNvSpPr>
+          <p:nvPr>
+            <p:ph type="body" idx="3" sz="quarter"/>
+          </p:nvPr>
+        </p:nvSpPr>
+        <p:spPr/>
+        <p:txBody>
+          <a:bodyPr/>
+          <a:lstStyle/>
+          <a:p>
+            <a:r>
+              <a:t>[설명] 교육생이 자신의 workspace·캡처·로그를 저장했는지 확인하고 다음 모듈의 시작 상태를 읽는다.</a:t>
+            </a:r>
+          </a:p>
+          <a:p>
+            <a:r>
+              <a:t>[실행] 슬라이드의 명령 또는 파일 작성 단계를 진행한다.</a:t>
+            </a:r>
+          </a:p>
+          <a:p>
+            <a:r>
+              <a:t>[확인] M11 RViz2 시작 조건을 말할 수 있다.</a:t>
+            </a:r>
+          </a:p>
+          <a:p>
+            <a:r>
+              <a:t>[멈춤] 교육생이 현재 체크포인트를 통과할 때까지 기다린다.</a:t>
+            </a:r>
+          </a:p>
+          <a:p>
+            <a:r>
+              <a:t>[오류] 오류가 나면 현재 폴더, source, 파일 경로를 먼저 확인한다.</a:t>
+            </a:r>
+          </a:p>
+        </p:txBody>
+      </p:sp>
+      <p:sp>
+        <p:nvSpPr>
+          <p:cNvPr id="4" name="Slide Number Placeholder 3"/>
+          <p:cNvSpPr>
+            <a:spLocks noGrp="1"/>
+          </p:cNvSpPr>
+          <p:nvPr>
+            <p:ph type="sldNum" idx="5" sz="quarter"/>
+          </p:nvPr>
+        </p:nvSpPr>
+        <p:spPr/>
+      </p:sp>
+    </p:spTree>
+  </p:cSld>
+  <p:clrMapOvr>
+    <a:masterClrMapping/>
+  </p:clrMapOvr>
+</p:notes>
+</file>
+
+<file path=ppt/notesSlides/notesSlide29.xml><?xml version="1.0" encoding="utf-8"?>
 <p:notes xmlns:a="http://schemas.openxmlformats.org/drawingml/2006/main" xmlns:p="http://schemas.openxmlformats.org/presentationml/2006/main" xmlns:r="http://schemas.openxmlformats.org/officeDocument/2006/relationships">
   <p:cSld>
     <p:spTree>
@@ -6134,7 +6498,7 @@
               </a:defRPr>
             </a:pPr>
             <a:r>
-              <a:t>구현 1/2: 코드 입력 (1/3)</a:t>
+              <a:t>구현 1/2: 코드 읽기 (1/1)</a:t>
             </a:r>
           </a:p>
         </p:txBody>
@@ -6173,7 +6537,7 @@
               </a:defRPr>
             </a:pPr>
             <a:r>
-              <a:t>~/ros2_curri/my_agv_ws/src/agv_gazebo/config/bridge.yaml</a:t>
+              <a:t>짧은 실제 코드 조각을 먼저 읽고, 다음 슬라이드에서 같은 코드를 직접 입력합니다.</a:t>
             </a:r>
           </a:p>
         </p:txBody>
@@ -6309,7 +6673,7 @@
               </a:defRPr>
             </a:pPr>
             <a:r>
-              <a:t>현재 단계 파일 1/2 · 입력 1/3    |    현재 폴더 ~/ros2_curri/my_agv_ws    |    현재 터미널</a:t>
+              <a:t>현재 단계 코드 해설 1/2    |    현재 폴더 ~/ros2_curri/my_agv_ws    |    현재 터미널</a:t>
             </a:r>
           </a:p>
         </p:txBody>
@@ -6322,111 +6686,88 @@
         </p:nvSpPr>
         <p:spPr>
           <a:xfrm>
-            <a:off x="658368" y="1609344"/>
-            <a:ext cx="10972800" cy="384048"/>
-          </a:xfrm>
-          <a:prstGeom prst="rect">
-            <a:avLst/>
-          </a:prstGeom>
-          <a:noFill/>
-        </p:spPr>
-        <p:txBody>
-          <a:bodyPr wrap="square" lIns="73152" rIns="73152" tIns="36576" bIns="36576">
-            <a:spAutoFit/>
-          </a:bodyPr>
-          <a:lstStyle/>
-          <a:p>
-            <a:pPr algn="l">
-              <a:spcAft>
-                <a:spcPts val="0"/>
-              </a:spcAft>
-              <a:defRPr sz="1400" b="1">
-                <a:solidFill>
-                  <a:srgbClr val="122C4E"/>
-                </a:solidFill>
-                <a:latin typeface="Noto Sans CJK KR"/>
-              </a:defRPr>
-            </a:pPr>
-            <a:r>
-              <a:t>이 블록이 하는 일: 들여쓰기와 key 이름을 그대로 입력합니다. 설정 이름은 launch·코드가 찾는 이름과 같아야 합니다.</a:t>
-            </a:r>
-          </a:p>
-        </p:txBody>
-      </p:sp>
-      <p:sp>
-        <p:nvSpPr>
-          <p:cNvPr id="8" name="Rectangle 7"/>
+            <a:off x="694944" y="1618488"/>
+            <a:ext cx="10789920" cy="274320"/>
+          </a:xfrm>
+          <a:prstGeom prst="rect">
+            <a:avLst/>
+          </a:prstGeom>
+          <a:noFill/>
+        </p:spPr>
+        <p:txBody>
+          <a:bodyPr wrap="square" lIns="73152" rIns="73152" tIns="36576" bIns="36576">
+            <a:spAutoFit/>
+          </a:bodyPr>
+          <a:lstStyle/>
+          <a:p>
+            <a:pPr algn="l">
+              <a:spcAft>
+                <a:spcPts val="0"/>
+              </a:spcAft>
+              <a:defRPr sz="1300" b="1">
+                <a:solidFill>
+                  <a:srgbClr val="225B9B"/>
+                </a:solidFill>
+                <a:latin typeface="DejaVu Sans Mono"/>
+              </a:defRPr>
+            </a:pPr>
+            <a:r>
+              <a:t>~/ros2_curri/my_agv_ws/src/agv_gazebo/config/bridge.yaml</a:t>
+            </a:r>
+          </a:p>
+        </p:txBody>
+      </p:sp>
+      <p:sp>
+        <p:nvSpPr>
+          <p:cNvPr id="8" name="TextBox 7"/>
+          <p:cNvSpPr txBox="1"/>
+          <p:nvPr/>
+        </p:nvSpPr>
+        <p:spPr>
+          <a:xfrm>
+            <a:off x="694944" y="1938528"/>
+            <a:ext cx="10789920" cy="274320"/>
+          </a:xfrm>
+          <a:prstGeom prst="rect">
+            <a:avLst/>
+          </a:prstGeom>
+          <a:noFill/>
+        </p:spPr>
+        <p:txBody>
+          <a:bodyPr wrap="square" lIns="73152" rIns="73152" tIns="36576" bIns="36576">
+            <a:spAutoFit/>
+          </a:bodyPr>
+          <a:lstStyle/>
+          <a:p>
+            <a:pPr algn="ctr">
+              <a:spcAft>
+                <a:spcPts val="0"/>
+              </a:spcAft>
+              <a:defRPr sz="1500" b="1">
+                <a:solidFill>
+                  <a:srgbClr val="DB7E22"/>
+                </a:solidFill>
+                <a:latin typeface="Noto Sans CJK KR"/>
+              </a:defRPr>
+            </a:pPr>
+            <a:r>
+              <a:t>말로 먼저 답해 보세요: 이 줄은 무엇을 만들고, 실행하면 어디에서 확인할 수 있을까요?</a:t>
+            </a:r>
+          </a:p>
+        </p:txBody>
+      </p:sp>
+      <p:sp>
+        <p:nvSpPr>
+          <p:cNvPr id="9" name="Rounded Rectangle 8"/>
           <p:cNvSpPr/>
           <p:nvPr/>
         </p:nvSpPr>
         <p:spPr>
           <a:xfrm>
-            <a:off x="658368" y="1956816"/>
-            <a:ext cx="10972800" cy="603504"/>
-          </a:xfrm>
-          <a:prstGeom prst="rect">
-            <a:avLst/>
-          </a:prstGeom>
-          <a:solidFill>
-            <a:srgbClr val="F4F7FB"/>
-          </a:solidFill>
-          <a:ln>
-            <a:solidFill>
-              <a:srgbClr val="F4F7FB"/>
-            </a:solidFill>
-          </a:ln>
-        </p:spPr>
-        <p:style>
-          <a:lnRef idx="1">
-            <a:schemeClr val="accent1"/>
-          </a:lnRef>
-          <a:fillRef idx="3">
-            <a:schemeClr val="accent1"/>
-          </a:fillRef>
-          <a:effectRef idx="2">
-            <a:schemeClr val="accent1"/>
-          </a:effectRef>
-          <a:fontRef idx="minor">
-            <a:schemeClr val="lt1"/>
-          </a:fontRef>
-        </p:style>
-        <p:txBody>
-          <a:bodyPr rtlCol="0" anchor="ctr" wrap="square" lIns="73152" rIns="73152" tIns="36576" bIns="36576"/>
-          <a:lstStyle/>
-          <a:p>
-            <a:pPr algn="l">
-              <a:spcAft>
-                <a:spcPts val="0"/>
-              </a:spcAft>
-              <a:defRPr sz="1300" b="0">
-                <a:solidFill>
-                  <a:srgbClr val="122C4E"/>
-                </a:solidFill>
-                <a:latin typeface="DejaVu Sans Mono"/>
-              </a:defRPr>
-            </a:pPr>
-            <a:r>
-              <a:t>현재 열린 파일: ~/ros2_curri/my_agv_ws/src/agv_gazebo/config/bridge.yaml</a:t>
-            </a:r>
-            <a:br/>
-            <a:r>
-              <a:t>아래 코드만 입력 → Ctrl+O → Enter로 저장 → 다음 블록으로 이동</a:t>
-            </a:r>
-          </a:p>
-        </p:txBody>
-      </p:sp>
-      <p:sp>
-        <p:nvSpPr>
-          <p:cNvPr id="9" name="Rectangle 8"/>
-          <p:cNvSpPr/>
-          <p:nvPr/>
-        </p:nvSpPr>
-        <p:spPr>
-          <a:xfrm>
-            <a:off x="658368" y="2706624"/>
-            <a:ext cx="10972800" cy="3364992"/>
-          </a:xfrm>
-          <a:prstGeom prst="rect">
+            <a:off x="658368" y="2359152"/>
+            <a:ext cx="4160520" cy="1417320"/>
+          </a:xfrm>
+          <a:prstGeom prst="roundRect">
             <a:avLst/>
           </a:prstGeom>
           <a:solidFill>
@@ -6453,14 +6794,14 @@
           </a:fontRef>
         </p:style>
         <p:txBody>
-          <a:bodyPr rtlCol="0" anchor="ctr" wrap="square" lIns="164592" rIns="164592" tIns="109728" bIns="36576"/>
-          <a:lstStyle/>
-          <a:p>
-            <a:pPr algn="l">
-              <a:spcAft>
-                <a:spcPts val="0"/>
-              </a:spcAft>
-              <a:defRPr sz="1400" b="0">
+          <a:bodyPr rtlCol="0" anchor="ctr" wrap="square" lIns="73152" rIns="73152" tIns="36576" bIns="36576"/>
+          <a:lstStyle/>
+          <a:p>
+            <a:pPr algn="l">
+              <a:spcAft>
+                <a:spcPts val="0"/>
+              </a:spcAft>
+              <a:defRPr sz="1300" b="0">
                 <a:solidFill>
                   <a:srgbClr val="FFFFFF"/>
                 </a:solidFill>
@@ -6470,80 +6811,418 @@
             <a:r>
               <a:t>- ros_topic_name: "/cmd_vel"</a:t>
             </a:r>
-            <a:br/>
-            <a:r>
-              <a:t>  gz_topic_name: "/cmd_vel"</a:t>
-            </a:r>
-            <a:br/>
-            <a:r>
-              <a:t>  ros_type_name: "geometry_msgs/msg/Twist"</a:t>
-            </a:r>
-            <a:br/>
-            <a:r>
-              <a:t>  gz_type_name: "gz.msgs.Twist"</a:t>
-            </a:r>
-            <a:br/>
-            <a:r>
-              <a:t>  direction: ROS_TO_GZ</a:t>
-            </a:r>
-            <a:br/>
-            <a:r>
-              <a:t>- ros_topic_name: "/odom"</a:t>
-            </a:r>
-            <a:br/>
-            <a:r>
-              <a:t>  gz_topic_name: "/odom"</a:t>
-            </a:r>
-            <a:br/>
-            <a:r>
-              <a:t>  ros_type_name: "nav_msgs/msg/Odometry"</a:t>
-            </a:r>
-            <a:br/>
-            <a:r>
-              <a:t>  gz_type_name: "gz.msgs.Odometry"</a:t>
-            </a:r>
-            <a:br/>
-            <a:r>
-              <a:t>  direction: GZ_TO_ROS</a:t>
-            </a:r>
-            <a:br/>
-            <a:r>
-              <a:t>- ros_topic_name: "/scan"</a:t>
-            </a:r>
-            <a:br/>
-            <a:r>
-              <a:t>  gz_topic_name: "/scan"</a:t>
-            </a:r>
-          </a:p>
-        </p:txBody>
-      </p:sp>
-      <p:sp>
-        <p:nvSpPr>
-          <p:cNvPr id="10" name="TextBox 9"/>
-          <p:cNvSpPr txBox="1"/>
-          <p:nvPr/>
-        </p:nvSpPr>
-        <p:spPr>
-          <a:xfrm>
-            <a:off x="749808" y="6181344"/>
-            <a:ext cx="10789920" cy="201168"/>
-          </a:xfrm>
-          <a:prstGeom prst="rect">
-            <a:avLst/>
-          </a:prstGeom>
-          <a:noFill/>
-        </p:spPr>
-        <p:txBody>
-          <a:bodyPr wrap="square" lIns="73152" rIns="73152" tIns="36576" bIns="36576">
-            <a:spAutoFit/>
-          </a:bodyPr>
-          <a:lstStyle/>
-          <a:p>
-            <a:pPr algn="l">
-              <a:spcAft>
-                <a:spcPts val="0"/>
-              </a:spcAft>
-              <a:defRPr sz="1000" b="0">
+          </a:p>
+        </p:txBody>
+      </p:sp>
+      <p:sp>
+        <p:nvSpPr>
+          <p:cNvPr id="10" name="Rounded Rectangle 9"/>
+          <p:cNvSpPr/>
+          <p:nvPr/>
+        </p:nvSpPr>
+        <p:spPr>
+          <a:xfrm>
+            <a:off x="5029200" y="2359152"/>
+            <a:ext cx="6537960" cy="1417320"/>
+          </a:xfrm>
+          <a:prstGeom prst="roundRect">
+            <a:avLst/>
+          </a:prstGeom>
+          <a:solidFill>
+            <a:srgbClr val="F4F7FB"/>
+          </a:solidFill>
+          <a:ln>
+            <a:solidFill>
+              <a:srgbClr val="225B9B"/>
+            </a:solidFill>
+          </a:ln>
+        </p:spPr>
+        <p:style>
+          <a:lnRef idx="1">
+            <a:schemeClr val="accent1"/>
+          </a:lnRef>
+          <a:fillRef idx="3">
+            <a:schemeClr val="accent1"/>
+          </a:fillRef>
+          <a:effectRef idx="2">
+            <a:schemeClr val="accent1"/>
+          </a:effectRef>
+          <a:fontRef idx="minor">
+            <a:schemeClr val="lt1"/>
+          </a:fontRef>
+        </p:style>
+        <p:txBody>
+          <a:bodyPr rtlCol="0" anchor="ctr"/>
+          <a:lstStyle/>
+          <a:p>
+            <a:pPr algn="ctr"/>
+          </a:p>
+        </p:txBody>
+      </p:sp>
+      <p:sp>
+        <p:nvSpPr>
+          <p:cNvPr id="11" name="TextBox 10"/>
+          <p:cNvSpPr txBox="1"/>
+          <p:nvPr/>
+        </p:nvSpPr>
+        <p:spPr>
+          <a:xfrm>
+            <a:off x="5239512" y="2468880"/>
+            <a:ext cx="594360" cy="219456"/>
+          </a:xfrm>
+          <a:prstGeom prst="rect">
+            <a:avLst/>
+          </a:prstGeom>
+          <a:noFill/>
+        </p:spPr>
+        <p:txBody>
+          <a:bodyPr wrap="square" lIns="73152" rIns="73152" tIns="36576" bIns="36576">
+            <a:spAutoFit/>
+          </a:bodyPr>
+          <a:lstStyle/>
+          <a:p>
+            <a:pPr algn="l">
+              <a:spcAft>
+                <a:spcPts val="0"/>
+              </a:spcAft>
+              <a:defRPr sz="1400" b="1">
+                <a:solidFill>
+                  <a:srgbClr val="225B9B"/>
+                </a:solidFill>
+                <a:latin typeface="Noto Sans CJK KR"/>
+              </a:defRPr>
+            </a:pPr>
+            <a:r>
+              <a:t>1.</a:t>
+            </a:r>
+          </a:p>
+        </p:txBody>
+      </p:sp>
+      <p:sp>
+        <p:nvSpPr>
+          <p:cNvPr id="12" name="TextBox 11"/>
+          <p:cNvSpPr txBox="1"/>
+          <p:nvPr/>
+        </p:nvSpPr>
+        <p:spPr>
+          <a:xfrm>
+            <a:off x="5596128" y="2450592"/>
+            <a:ext cx="5696712" cy="493776"/>
+          </a:xfrm>
+          <a:prstGeom prst="rect">
+            <a:avLst/>
+          </a:prstGeom>
+          <a:noFill/>
+        </p:spPr>
+        <p:txBody>
+          <a:bodyPr wrap="square" lIns="73152" rIns="73152" tIns="36576" bIns="36576">
+            <a:spAutoFit/>
+          </a:bodyPr>
+          <a:lstStyle/>
+          <a:p>
+            <a:pPr algn="l">
+              <a:spcAft>
+                <a:spcPts val="0"/>
+              </a:spcAft>
+              <a:defRPr sz="1300" b="0">
+                <a:solidFill>
+                  <a:srgbClr val="122C4E"/>
+                </a:solidFill>
+                <a:latin typeface="Noto Sans CJK KR"/>
+              </a:defRPr>
+            </a:pPr>
+            <a:r>
+              <a:t>뜻: 데이터가 오가는 채널의 정확한 이름을 지정합니다.</a:t>
+            </a:r>
+          </a:p>
+        </p:txBody>
+      </p:sp>
+      <p:sp>
+        <p:nvSpPr>
+          <p:cNvPr id="13" name="TextBox 12"/>
+          <p:cNvSpPr txBox="1"/>
+          <p:nvPr/>
+        </p:nvSpPr>
+        <p:spPr>
+          <a:xfrm>
+            <a:off x="5596128" y="3108960"/>
+            <a:ext cx="5696712" cy="457200"/>
+          </a:xfrm>
+          <a:prstGeom prst="rect">
+            <a:avLst/>
+          </a:prstGeom>
+          <a:noFill/>
+        </p:spPr>
+        <p:txBody>
+          <a:bodyPr wrap="square" lIns="73152" rIns="73152" tIns="36576" bIns="36576">
+            <a:spAutoFit/>
+          </a:bodyPr>
+          <a:lstStyle/>
+          <a:p>
+            <a:pPr algn="l">
+              <a:spcAft>
+                <a:spcPts val="0"/>
+              </a:spcAft>
+              <a:defRPr sz="1200" b="0">
+                <a:solidFill>
+                  <a:srgbClr val="2A8B5A"/>
+                </a:solidFill>
+                <a:latin typeface="Noto Sans CJK KR"/>
+              </a:defRPr>
+            </a:pPr>
+            <a:r>
+              <a:t>실행에서: SDF·bridge·node 세 곳의 이름이 같을 때 message가 연결됩니다.</a:t>
+            </a:r>
+          </a:p>
+        </p:txBody>
+      </p:sp>
+      <p:sp>
+        <p:nvSpPr>
+          <p:cNvPr id="14" name="Rounded Rectangle 13"/>
+          <p:cNvSpPr/>
+          <p:nvPr/>
+        </p:nvSpPr>
+        <p:spPr>
+          <a:xfrm>
+            <a:off x="658368" y="4078224"/>
+            <a:ext cx="4160520" cy="1417320"/>
+          </a:xfrm>
+          <a:prstGeom prst="roundRect">
+            <a:avLst/>
+          </a:prstGeom>
+          <a:solidFill>
+            <a:srgbClr val="1D232D"/>
+          </a:solidFill>
+          <a:ln>
+            <a:solidFill>
+              <a:srgbClr val="1D232D"/>
+            </a:solidFill>
+          </a:ln>
+        </p:spPr>
+        <p:style>
+          <a:lnRef idx="1">
+            <a:schemeClr val="accent1"/>
+          </a:lnRef>
+          <a:fillRef idx="3">
+            <a:schemeClr val="accent1"/>
+          </a:fillRef>
+          <a:effectRef idx="2">
+            <a:schemeClr val="accent1"/>
+          </a:effectRef>
+          <a:fontRef idx="minor">
+            <a:schemeClr val="lt1"/>
+          </a:fontRef>
+        </p:style>
+        <p:txBody>
+          <a:bodyPr rtlCol="0" anchor="ctr" wrap="square" lIns="73152" rIns="73152" tIns="36576" bIns="36576"/>
+          <a:lstStyle/>
+          <a:p>
+            <a:pPr algn="l">
+              <a:spcAft>
+                <a:spcPts val="0"/>
+              </a:spcAft>
+              <a:defRPr sz="1300" b="0">
+                <a:solidFill>
+                  <a:srgbClr val="FFFFFF"/>
+                </a:solidFill>
+                <a:latin typeface="DejaVu Sans Mono"/>
+              </a:defRPr>
+            </a:pPr>
+            <a:r>
+              <a:t>ros_type_name: "geometry_msgs/msg/Twist"</a:t>
+            </a:r>
+          </a:p>
+        </p:txBody>
+      </p:sp>
+      <p:sp>
+        <p:nvSpPr>
+          <p:cNvPr id="15" name="Rounded Rectangle 14"/>
+          <p:cNvSpPr/>
+          <p:nvPr/>
+        </p:nvSpPr>
+        <p:spPr>
+          <a:xfrm>
+            <a:off x="5029200" y="4078224"/>
+            <a:ext cx="6537960" cy="1417320"/>
+          </a:xfrm>
+          <a:prstGeom prst="roundRect">
+            <a:avLst/>
+          </a:prstGeom>
+          <a:solidFill>
+            <a:srgbClr val="F4F7FB"/>
+          </a:solidFill>
+          <a:ln>
+            <a:solidFill>
+              <a:srgbClr val="225B9B"/>
+            </a:solidFill>
+          </a:ln>
+        </p:spPr>
+        <p:style>
+          <a:lnRef idx="1">
+            <a:schemeClr val="accent1"/>
+          </a:lnRef>
+          <a:fillRef idx="3">
+            <a:schemeClr val="accent1"/>
+          </a:fillRef>
+          <a:effectRef idx="2">
+            <a:schemeClr val="accent1"/>
+          </a:effectRef>
+          <a:fontRef idx="minor">
+            <a:schemeClr val="lt1"/>
+          </a:fontRef>
+        </p:style>
+        <p:txBody>
+          <a:bodyPr rtlCol="0" anchor="ctr"/>
+          <a:lstStyle/>
+          <a:p>
+            <a:pPr algn="ctr"/>
+          </a:p>
+        </p:txBody>
+      </p:sp>
+      <p:sp>
+        <p:nvSpPr>
+          <p:cNvPr id="16" name="TextBox 15"/>
+          <p:cNvSpPr txBox="1"/>
+          <p:nvPr/>
+        </p:nvSpPr>
+        <p:spPr>
+          <a:xfrm>
+            <a:off x="5239512" y="4187952"/>
+            <a:ext cx="594360" cy="219456"/>
+          </a:xfrm>
+          <a:prstGeom prst="rect">
+            <a:avLst/>
+          </a:prstGeom>
+          <a:noFill/>
+        </p:spPr>
+        <p:txBody>
+          <a:bodyPr wrap="square" lIns="73152" rIns="73152" tIns="36576" bIns="36576">
+            <a:spAutoFit/>
+          </a:bodyPr>
+          <a:lstStyle/>
+          <a:p>
+            <a:pPr algn="l">
+              <a:spcAft>
+                <a:spcPts val="0"/>
+              </a:spcAft>
+              <a:defRPr sz="1400" b="1">
+                <a:solidFill>
+                  <a:srgbClr val="225B9B"/>
+                </a:solidFill>
+                <a:latin typeface="Noto Sans CJK KR"/>
+              </a:defRPr>
+            </a:pPr>
+            <a:r>
+              <a:t>2.</a:t>
+            </a:r>
+          </a:p>
+        </p:txBody>
+      </p:sp>
+      <p:sp>
+        <p:nvSpPr>
+          <p:cNvPr id="17" name="TextBox 16"/>
+          <p:cNvSpPr txBox="1"/>
+          <p:nvPr/>
+        </p:nvSpPr>
+        <p:spPr>
+          <a:xfrm>
+            <a:off x="5596128" y="4169663"/>
+            <a:ext cx="5696712" cy="493776"/>
+          </a:xfrm>
+          <a:prstGeom prst="rect">
+            <a:avLst/>
+          </a:prstGeom>
+          <a:noFill/>
+        </p:spPr>
+        <p:txBody>
+          <a:bodyPr wrap="square" lIns="73152" rIns="73152" tIns="36576" bIns="36576">
+            <a:spAutoFit/>
+          </a:bodyPr>
+          <a:lstStyle/>
+          <a:p>
+            <a:pPr algn="l">
+              <a:spcAft>
+                <a:spcPts val="0"/>
+              </a:spcAft>
+              <a:defRPr sz="1300" b="0">
+                <a:solidFill>
+                  <a:srgbClr val="122C4E"/>
+                </a:solidFill>
+                <a:latin typeface="Noto Sans CJK KR"/>
+              </a:defRPr>
+            </a:pPr>
+            <a:r>
+              <a:t>뜻: 실행 코드와 분리한 설정 키와 값을 적습니다.</a:t>
+            </a:r>
+          </a:p>
+        </p:txBody>
+      </p:sp>
+      <p:sp>
+        <p:nvSpPr>
+          <p:cNvPr id="18" name="TextBox 17"/>
+          <p:cNvSpPr txBox="1"/>
+          <p:nvPr/>
+        </p:nvSpPr>
+        <p:spPr>
+          <a:xfrm>
+            <a:off x="5596128" y="4828032"/>
+            <a:ext cx="5696712" cy="457200"/>
+          </a:xfrm>
+          <a:prstGeom prst="rect">
+            <a:avLst/>
+          </a:prstGeom>
+          <a:noFill/>
+        </p:spPr>
+        <p:txBody>
+          <a:bodyPr wrap="square" lIns="73152" rIns="73152" tIns="36576" bIns="36576">
+            <a:spAutoFit/>
+          </a:bodyPr>
+          <a:lstStyle/>
+          <a:p>
+            <a:pPr algn="l">
+              <a:spcAft>
+                <a:spcPts val="0"/>
+              </a:spcAft>
+              <a:defRPr sz="1200" b="0">
+                <a:solidFill>
+                  <a:srgbClr val="2A8B5A"/>
+                </a:solidFill>
+                <a:latin typeface="Noto Sans CJK KR"/>
+              </a:defRPr>
+            </a:pPr>
+            <a:r>
+              <a:t>실행에서: launch 뒤 parameter/topic 동작에서 이 값의 효과를 확인합니다.</a:t>
+            </a:r>
+          </a:p>
+        </p:txBody>
+      </p:sp>
+      <p:sp>
+        <p:nvSpPr>
+          <p:cNvPr id="19" name="TextBox 18"/>
+          <p:cNvSpPr txBox="1"/>
+          <p:nvPr/>
+        </p:nvSpPr>
+        <p:spPr>
+          <a:xfrm>
+            <a:off x="749808" y="6199632"/>
+            <a:ext cx="10698480" cy="182880"/>
+          </a:xfrm>
+          <a:prstGeom prst="rect">
+            <a:avLst/>
+          </a:prstGeom>
+          <a:noFill/>
+        </p:spPr>
+        <p:txBody>
+          <a:bodyPr wrap="square" lIns="73152" rIns="73152" tIns="36576" bIns="36576">
+            <a:spAutoFit/>
+          </a:bodyPr>
+          <a:lstStyle/>
+          <a:p>
+            <a:pPr algn="ctr">
+              <a:spcAft>
+                <a:spcPts val="0"/>
+              </a:spcAft>
+              <a:defRPr sz="1100" b="0">
                 <a:solidFill>
                   <a:srgbClr val="5C6672"/>
                 </a:solidFill>
@@ -6551,7 +7230,7 @@
               </a:defRPr>
             </a:pPr>
             <a:r>
-              <a:t>입력 1/3 · 이 파일의 다음 코드 블록이 바로 다음 슬라이드에 이어집니다.</a:t>
+              <a:t>다음 코드 입력 슬라이드에서 이 줄을 발견하면, 방금 설명한 ‘뜻’과 ‘실행에서 보이는 변화’를 다시 말해 봅니다.</a:t>
             </a:r>
           </a:p>
         </p:txBody>
@@ -6608,7 +7287,7 @@
               </a:defRPr>
             </a:pPr>
             <a:r>
-              <a:t>구현 1/2: 코드 입력 (2/3)</a:t>
+              <a:t>구현 1/2: 코드 입력 (1/3)</a:t>
             </a:r>
           </a:p>
         </p:txBody>
@@ -6783,7 +7462,7 @@
               </a:defRPr>
             </a:pPr>
             <a:r>
-              <a:t>현재 단계 파일 1/2 · 입력 2/3    |    현재 폴더 ~/ros2_curri/my_agv_ws    |    현재 터미널</a:t>
+              <a:t>현재 단계 파일 1/2 · 입력 1/3    |    현재 폴더 ~/ros2_curri/my_agv_ws    |    현재 터미널</a:t>
             </a:r>
           </a:p>
         </p:txBody>
@@ -6942,51 +7621,51 @@
               </a:defRPr>
             </a:pPr>
             <a:r>
-              <a:t>  ros_type_name: "sensor_msgs/msg/LaserScan"</a:t>
+              <a:t>- ros_topic_name: "/cmd_vel"</a:t>
             </a:r>
             <a:br/>
             <a:r>
-              <a:t>  gz_type_name: "gz.msgs.LaserScan"</a:t>
+              <a:t>  gz_topic_name: "/cmd_vel"</a:t>
             </a:r>
             <a:br/>
             <a:r>
+              <a:t>  ros_type_name: "geometry_msgs/msg/Twist"</a:t>
+            </a:r>
+            <a:br/>
+            <a:r>
+              <a:t>  gz_type_name: "gz.msgs.Twist"</a:t>
+            </a:r>
+            <a:br/>
+            <a:r>
+              <a:t>  direction: ROS_TO_GZ</a:t>
+            </a:r>
+            <a:br/>
+            <a:r>
+              <a:t>- ros_topic_name: "/odom"</a:t>
+            </a:r>
+            <a:br/>
+            <a:r>
+              <a:t>  gz_topic_name: "/odom"</a:t>
+            </a:r>
+            <a:br/>
+            <a:r>
+              <a:t>  ros_type_name: "nav_msgs/msg/Odometry"</a:t>
+            </a:r>
+            <a:br/>
+            <a:r>
+              <a:t>  gz_type_name: "gz.msgs.Odometry"</a:t>
+            </a:r>
+            <a:br/>
+            <a:r>
               <a:t>  direction: GZ_TO_ROS</a:t>
             </a:r>
             <a:br/>
             <a:r>
-              <a:t>- ros_topic_name: "/imu/data"</a:t>
+              <a:t>- ros_topic_name: "/scan"</a:t>
             </a:r>
             <a:br/>
             <a:r>
-              <a:t>  gz_topic_name: "/imu/data"</a:t>
-            </a:r>
-            <a:br/>
-            <a:r>
-              <a:t>  ros_type_name: "sensor_msgs/msg/Imu"</a:t>
-            </a:r>
-            <a:br/>
-            <a:r>
-              <a:t>  gz_type_name: "gz.msgs.IMU"</a:t>
-            </a:r>
-            <a:br/>
-            <a:r>
-              <a:t>  direction: GZ_TO_ROS</a:t>
-            </a:r>
-            <a:br/>
-            <a:r>
-              <a:t>- ros_topic_name: "/camera/image_raw"</a:t>
-            </a:r>
-            <a:br/>
-            <a:r>
-              <a:t>  gz_topic_name: "/camera/image_raw"</a:t>
-            </a:r>
-            <a:br/>
-            <a:r>
-              <a:t>  ros_type_name: "sensor_msgs/msg/Image"</a:t>
-            </a:r>
-            <a:br/>
-            <a:r>
-              <a:t>  gz_type_name: "gz.msgs.Image"</a:t>
+              <a:t>  gz_topic_name: "/scan"</a:t>
             </a:r>
           </a:p>
         </p:txBody>
@@ -7025,7 +7704,7 @@
               </a:defRPr>
             </a:pPr>
             <a:r>
-              <a:t>입력 2/3 · 이 파일의 다음 코드 블록이 바로 다음 슬라이드에 이어집니다.</a:t>
+              <a:t>입력 1/3 · 이 파일의 다음 코드 블록이 바로 다음 슬라이드에 이어집니다.</a:t>
             </a:r>
           </a:p>
         </p:txBody>
@@ -7082,7 +7761,7 @@
               </a:defRPr>
             </a:pPr>
             <a:r>
-              <a:t>구현 1/2: 코드 입력 (3/3)</a:t>
+              <a:t>구현 1/2: 코드 입력 (2/3)</a:t>
             </a:r>
           </a:p>
         </p:txBody>
@@ -7257,7 +7936,7 @@
               </a:defRPr>
             </a:pPr>
             <a:r>
-              <a:t>현재 단계 파일 1/2 · 입력 3/3    |    현재 폴더 ~/ros2_curri/my_agv_ws    |    현재 터미널</a:t>
+              <a:t>현재 단계 파일 1/2 · 입력 2/3    |    현재 폴더 ~/ros2_curri/my_agv_ws    |    현재 터미널</a:t>
             </a:r>
           </a:p>
         </p:txBody>
@@ -7416,27 +8095,51 @@
               </a:defRPr>
             </a:pPr>
             <a:r>
+              <a:t>  ros_type_name: "sensor_msgs/msg/LaserScan"</a:t>
+            </a:r>
+            <a:br/>
+            <a:r>
+              <a:t>  gz_type_name: "gz.msgs.LaserScan"</a:t>
+            </a:r>
+            <a:br/>
+            <a:r>
               <a:t>  direction: GZ_TO_ROS</a:t>
             </a:r>
             <a:br/>
             <a:r>
-              <a:t>- ros_topic_name: "/clock"</a:t>
+              <a:t>- ros_topic_name: "/imu/data"</a:t>
             </a:r>
             <a:br/>
             <a:r>
-              <a:t>  gz_topic_name: "/clock"</a:t>
+              <a:t>  gz_topic_name: "/imu/data"</a:t>
             </a:r>
             <a:br/>
             <a:r>
-              <a:t>  ros_type_name: "rosgraph_msgs/msg/Clock"</a:t>
+              <a:t>  ros_type_name: "sensor_msgs/msg/Imu"</a:t>
             </a:r>
             <a:br/>
             <a:r>
-              <a:t>  gz_type_name: "gz.msgs.Clock"</a:t>
+              <a:t>  gz_type_name: "gz.msgs.IMU"</a:t>
             </a:r>
             <a:br/>
             <a:r>
               <a:t>  direction: GZ_TO_ROS</a:t>
+            </a:r>
+            <a:br/>
+            <a:r>
+              <a:t>- ros_topic_name: "/camera/image_raw"</a:t>
+            </a:r>
+            <a:br/>
+            <a:r>
+              <a:t>  gz_topic_name: "/camera/image_raw"</a:t>
+            </a:r>
+            <a:br/>
+            <a:r>
+              <a:t>  ros_type_name: "sensor_msgs/msg/Image"</a:t>
+            </a:r>
+            <a:br/>
+            <a:r>
+              <a:t>  gz_type_name: "gz.msgs.Image"</a:t>
             </a:r>
           </a:p>
         </p:txBody>
@@ -7475,7 +8178,7 @@
               </a:defRPr>
             </a:pPr>
             <a:r>
-              <a:t>입력 3/3 · 이 파일의 다음 코드 블록이 바로 다음 슬라이드에 이어집니다.</a:t>
+              <a:t>입력 2/3 · 이 파일의 다음 코드 블록이 바로 다음 슬라이드에 이어집니다.</a:t>
             </a:r>
           </a:p>
         </p:txBody>
@@ -7532,7 +8235,7 @@
               </a:defRPr>
             </a:pPr>
             <a:r>
-              <a:t>구현 2/2: 폴더를 만들고 빈 파일을 연다</a:t>
+              <a:t>구현 1/2: 코드 입력 (3/3)</a:t>
             </a:r>
           </a:p>
         </p:txBody>
@@ -7571,7 +8274,7 @@
               </a:defRPr>
             </a:pPr>
             <a:r>
-              <a:t>파일을 먼저 만든 뒤, 다음 슬라이드의 코드 블록을 위에서 아래로 직접 입력합니다.</a:t>
+              <a:t>~/ros2_curri/my_agv_ws/src/agv_gazebo/config/bridge.yaml</a:t>
             </a:r>
           </a:p>
         </p:txBody>
@@ -7707,7 +8410,7 @@
               </a:defRPr>
             </a:pPr>
             <a:r>
-              <a:t>현재 단계 파일 생성 2/2    |    현재 폴더 ~/ros2_curri/my_agv_ws    |    현재 터미널</a:t>
+              <a:t>현재 단계 파일 1/2 · 입력 3/3    |    현재 폴더 ~/ros2_curri/my_agv_ws    |    현재 터미널</a:t>
             </a:r>
           </a:p>
         </p:txBody>
@@ -7720,47 +8423,8 @@
         </p:nvSpPr>
         <p:spPr>
           <a:xfrm>
-            <a:off x="685800" y="1719072"/>
-            <a:ext cx="1417320" cy="256032"/>
-          </a:xfrm>
-          <a:prstGeom prst="rect">
-            <a:avLst/>
-          </a:prstGeom>
-          <a:noFill/>
-        </p:spPr>
-        <p:txBody>
-          <a:bodyPr wrap="square" lIns="73152" rIns="73152" tIns="36576" bIns="36576">
-            <a:spAutoFit/>
-          </a:bodyPr>
-          <a:lstStyle/>
-          <a:p>
-            <a:pPr algn="l">
-              <a:spcAft>
-                <a:spcPts val="0"/>
-              </a:spcAft>
-              <a:defRPr sz="1800" b="1">
-                <a:solidFill>
-                  <a:srgbClr val="225B9B"/>
-                </a:solidFill>
-                <a:latin typeface="Noto Sans CJK KR"/>
-              </a:defRPr>
-            </a:pPr>
-            <a:r>
-              <a:t>이번 파일</a:t>
-            </a:r>
-          </a:p>
-        </p:txBody>
-      </p:sp>
-      <p:sp>
-        <p:nvSpPr>
-          <p:cNvPr id="8" name="TextBox 7"/>
-          <p:cNvSpPr txBox="1"/>
-          <p:nvPr/>
-        </p:nvSpPr>
-        <p:spPr>
-          <a:xfrm>
-            <a:off x="1920240" y="1719072"/>
-            <a:ext cx="9235440" cy="274320"/>
+            <a:off x="658368" y="1609344"/>
+            <a:ext cx="10972800" cy="384048"/>
           </a:xfrm>
           <a:prstGeom prst="rect">
             <a:avLst/>
@@ -7781,105 +8445,89 @@
                 <a:solidFill>
                   <a:srgbClr val="122C4E"/>
                 </a:solidFill>
+                <a:latin typeface="Noto Sans CJK KR"/>
+              </a:defRPr>
+            </a:pPr>
+            <a:r>
+              <a:t>이 블록이 하는 일: 들여쓰기와 key 이름을 그대로 입력합니다. 설정 이름은 launch·코드가 찾는 이름과 같아야 합니다.</a:t>
+            </a:r>
+          </a:p>
+        </p:txBody>
+      </p:sp>
+      <p:sp>
+        <p:nvSpPr>
+          <p:cNvPr id="8" name="Rectangle 7"/>
+          <p:cNvSpPr/>
+          <p:nvPr/>
+        </p:nvSpPr>
+        <p:spPr>
+          <a:xfrm>
+            <a:off x="658368" y="1956816"/>
+            <a:ext cx="10972800" cy="603504"/>
+          </a:xfrm>
+          <a:prstGeom prst="rect">
+            <a:avLst/>
+          </a:prstGeom>
+          <a:solidFill>
+            <a:srgbClr val="F4F7FB"/>
+          </a:solidFill>
+          <a:ln>
+            <a:solidFill>
+              <a:srgbClr val="F4F7FB"/>
+            </a:solidFill>
+          </a:ln>
+        </p:spPr>
+        <p:style>
+          <a:lnRef idx="1">
+            <a:schemeClr val="accent1"/>
+          </a:lnRef>
+          <a:fillRef idx="3">
+            <a:schemeClr val="accent1"/>
+          </a:fillRef>
+          <a:effectRef idx="2">
+            <a:schemeClr val="accent1"/>
+          </a:effectRef>
+          <a:fontRef idx="minor">
+            <a:schemeClr val="lt1"/>
+          </a:fontRef>
+        </p:style>
+        <p:txBody>
+          <a:bodyPr rtlCol="0" anchor="ctr" wrap="square" lIns="73152" rIns="73152" tIns="36576" bIns="36576"/>
+          <a:lstStyle/>
+          <a:p>
+            <a:pPr algn="l">
+              <a:spcAft>
+                <a:spcPts val="0"/>
+              </a:spcAft>
+              <a:defRPr sz="1300" b="0">
+                <a:solidFill>
+                  <a:srgbClr val="122C4E"/>
+                </a:solidFill>
                 <a:latin typeface="DejaVu Sans Mono"/>
               </a:defRPr>
             </a:pPr>
             <a:r>
-              <a:t>~/ros2_curri/my_agv_ws/src/agv_gazebo/launch/gazebo.launch.py</a:t>
-            </a:r>
-          </a:p>
-        </p:txBody>
-      </p:sp>
-      <p:sp>
-        <p:nvSpPr>
-          <p:cNvPr id="9" name="TextBox 8"/>
-          <p:cNvSpPr txBox="1"/>
-          <p:nvPr/>
-        </p:nvSpPr>
-        <p:spPr>
-          <a:xfrm>
-            <a:off x="685800" y="2103120"/>
-            <a:ext cx="1417320" cy="256032"/>
-          </a:xfrm>
-          <a:prstGeom prst="rect">
-            <a:avLst/>
-          </a:prstGeom>
-          <a:noFill/>
-        </p:spPr>
-        <p:txBody>
-          <a:bodyPr wrap="square" lIns="73152" rIns="73152" tIns="36576" bIns="36576">
-            <a:spAutoFit/>
-          </a:bodyPr>
-          <a:lstStyle/>
-          <a:p>
-            <a:pPr algn="l">
-              <a:spcAft>
-                <a:spcPts val="0"/>
-              </a:spcAft>
-              <a:defRPr sz="1800" b="1">
-                <a:solidFill>
-                  <a:srgbClr val="2A8B5A"/>
-                </a:solidFill>
-                <a:latin typeface="Noto Sans CJK KR"/>
-              </a:defRPr>
-            </a:pPr>
-            <a:r>
-              <a:t>만드는 것</a:t>
-            </a:r>
-          </a:p>
-        </p:txBody>
-      </p:sp>
-      <p:sp>
-        <p:nvSpPr>
-          <p:cNvPr id="10" name="TextBox 9"/>
-          <p:cNvSpPr txBox="1"/>
-          <p:nvPr/>
-        </p:nvSpPr>
-        <p:spPr>
-          <a:xfrm>
-            <a:off x="1920240" y="2103120"/>
-            <a:ext cx="9235440" cy="438912"/>
-          </a:xfrm>
-          <a:prstGeom prst="rect">
-            <a:avLst/>
-          </a:prstGeom>
-          <a:noFill/>
-        </p:spPr>
-        <p:txBody>
-          <a:bodyPr wrap="square" lIns="73152" rIns="73152" tIns="36576" bIns="36576">
-            <a:spAutoFit/>
-          </a:bodyPr>
-          <a:lstStyle/>
-          <a:p>
-            <a:pPr algn="l">
-              <a:spcAft>
-                <a:spcPts val="0"/>
-              </a:spcAft>
-              <a:defRPr sz="1700" b="0">
-                <a:solidFill>
-                  <a:srgbClr val="122C4E"/>
-                </a:solidFill>
-                <a:latin typeface="Noto Sans CJK KR"/>
-              </a:defRPr>
-            </a:pPr>
-            <a:r>
-              <a:t>여러 ROS 2 node를 시작 순서대로 조립하는 launch 파일</a:t>
-            </a:r>
-          </a:p>
-        </p:txBody>
-      </p:sp>
-      <p:sp>
-        <p:nvSpPr>
-          <p:cNvPr id="11" name="Rounded Rectangle 10"/>
+              <a:t>현재 열린 파일: ~/ros2_curri/my_agv_ws/src/agv_gazebo/config/bridge.yaml</a:t>
+            </a:r>
+            <a:br/>
+            <a:r>
+              <a:t>아래 코드만 입력 → Ctrl+O → Enter로 저장 → 다음 블록으로 이동</a:t>
+            </a:r>
+          </a:p>
+        </p:txBody>
+      </p:sp>
+      <p:sp>
+        <p:nvSpPr>
+          <p:cNvPr id="9" name="Rectangle 8"/>
           <p:cNvSpPr/>
           <p:nvPr/>
         </p:nvSpPr>
         <p:spPr>
           <a:xfrm>
-            <a:off x="676656" y="2852928"/>
-            <a:ext cx="10881360" cy="1682496"/>
-          </a:xfrm>
-          <a:prstGeom prst="roundRect">
+            <a:off x="658368" y="2706624"/>
+            <a:ext cx="10972800" cy="3364992"/>
+          </a:xfrm>
+          <a:prstGeom prst="rect">
             <a:avLst/>
           </a:prstGeom>
           <a:solidFill>
@@ -7906,14 +8554,14 @@
           </a:fontRef>
         </p:style>
         <p:txBody>
-          <a:bodyPr rtlCol="0" anchor="ctr" wrap="square" lIns="73152" rIns="73152" tIns="36576" bIns="36576"/>
-          <a:lstStyle/>
-          <a:p>
-            <a:pPr algn="l">
-              <a:spcAft>
-                <a:spcPts val="0"/>
-              </a:spcAft>
-              <a:defRPr sz="1600" b="0">
+          <a:bodyPr rtlCol="0" anchor="ctr" wrap="square" lIns="164592" rIns="164592" tIns="109728" bIns="36576"/>
+          <a:lstStyle/>
+          <a:p>
+            <a:pPr algn="l">
+              <a:spcAft>
+                <a:spcPts val="0"/>
+              </a:spcAft>
+              <a:defRPr sz="1400" b="0">
                 <a:solidFill>
                   <a:srgbClr val="FFFFFF"/>
                 </a:solidFill>
@@ -7921,89 +8569,66 @@
               </a:defRPr>
             </a:pPr>
             <a:r>
-              <a:t>mkdir -p ~/ros2_curri/my_agv_ws/src/agv_gazebo/launch</a:t>
+              <a:t>  direction: GZ_TO_ROS</a:t>
             </a:r>
             <a:br/>
             <a:r>
-              <a:t>nano ~/ros2_curri/my_agv_ws/src/agv_gazebo/launch/gazebo.launch.py</a:t>
-            </a:r>
-          </a:p>
-        </p:txBody>
-      </p:sp>
-      <p:sp>
-        <p:nvSpPr>
-          <p:cNvPr id="12" name="TextBox 11"/>
-          <p:cNvSpPr txBox="1"/>
-          <p:nvPr/>
-        </p:nvSpPr>
-        <p:spPr>
-          <a:xfrm>
-            <a:off x="804672" y="4901184"/>
-            <a:ext cx="10241280" cy="329184"/>
-          </a:xfrm>
-          <a:prstGeom prst="rect">
-            <a:avLst/>
-          </a:prstGeom>
-          <a:noFill/>
-        </p:spPr>
-        <p:txBody>
-          <a:bodyPr wrap="square" lIns="73152" rIns="73152" tIns="36576" bIns="36576">
-            <a:spAutoFit/>
-          </a:bodyPr>
-          <a:lstStyle/>
-          <a:p>
-            <a:pPr algn="ctr">
-              <a:spcAft>
-                <a:spcPts val="0"/>
-              </a:spcAft>
-              <a:defRPr sz="1600" b="1">
-                <a:solidFill>
-                  <a:srgbClr val="DB7E22"/>
-                </a:solidFill>
-                <a:latin typeface="Noto Sans CJK KR"/>
-              </a:defRPr>
-            </a:pPr>
-            <a:r>
-              <a:t>nano 저장: Ctrl+O → Enter → Ctrl+X  |  파일이 열리면 아직 비어 있는 것이 정상입니다.</a:t>
-            </a:r>
-          </a:p>
-        </p:txBody>
-      </p:sp>
-      <p:sp>
-        <p:nvSpPr>
-          <p:cNvPr id="13" name="TextBox 12"/>
-          <p:cNvSpPr txBox="1"/>
-          <p:nvPr/>
-        </p:nvSpPr>
-        <p:spPr>
-          <a:xfrm>
-            <a:off x="804672" y="5504688"/>
-            <a:ext cx="10241280" cy="329184"/>
-          </a:xfrm>
-          <a:prstGeom prst="rect">
-            <a:avLst/>
-          </a:prstGeom>
-          <a:noFill/>
-        </p:spPr>
-        <p:txBody>
-          <a:bodyPr wrap="square" lIns="73152" rIns="73152" tIns="36576" bIns="36576">
-            <a:spAutoFit/>
-          </a:bodyPr>
-          <a:lstStyle/>
-          <a:p>
-            <a:pPr algn="ctr">
-              <a:spcAft>
-                <a:spcPts val="0"/>
-              </a:spcAft>
-              <a:defRPr sz="1500" b="1">
-                <a:solidFill>
-                  <a:srgbClr val="2A8B5A"/>
-                </a:solidFill>
-                <a:latin typeface="Noto Sans CJK KR"/>
-              </a:defRPr>
-            </a:pPr>
-            <a:r>
-              <a:t>다음 단계의 확인 화면: terminal의 실행 node와 topic</a:t>
+              <a:t>- ros_topic_name: "/clock"</a:t>
+            </a:r>
+            <a:br/>
+            <a:r>
+              <a:t>  gz_topic_name: "/clock"</a:t>
+            </a:r>
+            <a:br/>
+            <a:r>
+              <a:t>  ros_type_name: "rosgraph_msgs/msg/Clock"</a:t>
+            </a:r>
+            <a:br/>
+            <a:r>
+              <a:t>  gz_type_name: "gz.msgs.Clock"</a:t>
+            </a:r>
+            <a:br/>
+            <a:r>
+              <a:t>  direction: GZ_TO_ROS</a:t>
+            </a:r>
+          </a:p>
+        </p:txBody>
+      </p:sp>
+      <p:sp>
+        <p:nvSpPr>
+          <p:cNvPr id="10" name="TextBox 9"/>
+          <p:cNvSpPr txBox="1"/>
+          <p:nvPr/>
+        </p:nvSpPr>
+        <p:spPr>
+          <a:xfrm>
+            <a:off x="749808" y="6181344"/>
+            <a:ext cx="10789920" cy="201168"/>
+          </a:xfrm>
+          <a:prstGeom prst="rect">
+            <a:avLst/>
+          </a:prstGeom>
+          <a:noFill/>
+        </p:spPr>
+        <p:txBody>
+          <a:bodyPr wrap="square" lIns="73152" rIns="73152" tIns="36576" bIns="36576">
+            <a:spAutoFit/>
+          </a:bodyPr>
+          <a:lstStyle/>
+          <a:p>
+            <a:pPr algn="l">
+              <a:spcAft>
+                <a:spcPts val="0"/>
+              </a:spcAft>
+              <a:defRPr sz="1000" b="0">
+                <a:solidFill>
+                  <a:srgbClr val="5C6672"/>
+                </a:solidFill>
+                <a:latin typeface="Noto Sans CJK KR"/>
+              </a:defRPr>
+            </a:pPr>
+            <a:r>
+              <a:t>입력 3/3 · 이 파일의 다음 코드 블록이 바로 다음 슬라이드에 이어집니다.</a:t>
             </a:r>
           </a:p>
         </p:txBody>
@@ -8060,7 +8685,7 @@
               </a:defRPr>
             </a:pPr>
             <a:r>
-              <a:t>구현 2/2: 코드 입력 (1/2)</a:t>
+              <a:t>구현 2/2: 폴더를 만들고 빈 파일을 연다</a:t>
             </a:r>
           </a:p>
         </p:txBody>
@@ -8099,7 +8724,7 @@
               </a:defRPr>
             </a:pPr>
             <a:r>
-              <a:t>~/ros2_curri/my_agv_ws/src/agv_gazebo/launch/gazebo.launch.py</a:t>
+              <a:t>파일을 먼저 만든 뒤, 다음 슬라이드의 코드 블록을 위에서 아래로 직접 입력합니다.</a:t>
             </a:r>
           </a:p>
         </p:txBody>
@@ -8235,7 +8860,7 @@
               </a:defRPr>
             </a:pPr>
             <a:r>
-              <a:t>현재 단계 파일 2/2 · 입력 1/2    |    현재 폴더 ~/ros2_curri/my_agv_ws    |    현재 터미널</a:t>
+              <a:t>현재 단계 파일 생성 2/2    |    현재 폴더 ~/ros2_curri/my_agv_ws    |    현재 터미널</a:t>
             </a:r>
           </a:p>
         </p:txBody>
@@ -8248,8 +8873,47 @@
         </p:nvSpPr>
         <p:spPr>
           <a:xfrm>
-            <a:off x="658368" y="1609344"/>
-            <a:ext cx="10972800" cy="384048"/>
+            <a:off x="685800" y="1719072"/>
+            <a:ext cx="1417320" cy="256032"/>
+          </a:xfrm>
+          <a:prstGeom prst="rect">
+            <a:avLst/>
+          </a:prstGeom>
+          <a:noFill/>
+        </p:spPr>
+        <p:txBody>
+          <a:bodyPr wrap="square" lIns="73152" rIns="73152" tIns="36576" bIns="36576">
+            <a:spAutoFit/>
+          </a:bodyPr>
+          <a:lstStyle/>
+          <a:p>
+            <a:pPr algn="l">
+              <a:spcAft>
+                <a:spcPts val="0"/>
+              </a:spcAft>
+              <a:defRPr sz="1800" b="1">
+                <a:solidFill>
+                  <a:srgbClr val="225B9B"/>
+                </a:solidFill>
+                <a:latin typeface="Noto Sans CJK KR"/>
+              </a:defRPr>
+            </a:pPr>
+            <a:r>
+              <a:t>이번 파일</a:t>
+            </a:r>
+          </a:p>
+        </p:txBody>
+      </p:sp>
+      <p:sp>
+        <p:nvSpPr>
+          <p:cNvPr id="8" name="TextBox 7"/>
+          <p:cNvSpPr txBox="1"/>
+          <p:nvPr/>
+        </p:nvSpPr>
+        <p:spPr>
+          <a:xfrm>
+            <a:off x="1920240" y="1719072"/>
+            <a:ext cx="9235440" cy="274320"/>
           </a:xfrm>
           <a:prstGeom prst="rect">
             <a:avLst/>
@@ -8270,89 +8934,105 @@
                 <a:solidFill>
                   <a:srgbClr val="122C4E"/>
                 </a:solidFill>
-                <a:latin typeface="Noto Sans CJK KR"/>
-              </a:defRPr>
-            </a:pPr>
-            <a:r>
-              <a:t>이 블록이 하는 일: launch argument와 Node 구성을 입력합니다. package·executable·parameter 경로가 실제 이름과 같아야 합니다.</a:t>
-            </a:r>
-          </a:p>
-        </p:txBody>
-      </p:sp>
-      <p:sp>
-        <p:nvSpPr>
-          <p:cNvPr id="8" name="Rectangle 7"/>
+                <a:latin typeface="DejaVu Sans Mono"/>
+              </a:defRPr>
+            </a:pPr>
+            <a:r>
+              <a:t>~/ros2_curri/my_agv_ws/src/agv_gazebo/launch/gazebo.launch.py</a:t>
+            </a:r>
+          </a:p>
+        </p:txBody>
+      </p:sp>
+      <p:sp>
+        <p:nvSpPr>
+          <p:cNvPr id="9" name="TextBox 8"/>
+          <p:cNvSpPr txBox="1"/>
+          <p:nvPr/>
+        </p:nvSpPr>
+        <p:spPr>
+          <a:xfrm>
+            <a:off x="685800" y="2103120"/>
+            <a:ext cx="1417320" cy="256032"/>
+          </a:xfrm>
+          <a:prstGeom prst="rect">
+            <a:avLst/>
+          </a:prstGeom>
+          <a:noFill/>
+        </p:spPr>
+        <p:txBody>
+          <a:bodyPr wrap="square" lIns="73152" rIns="73152" tIns="36576" bIns="36576">
+            <a:spAutoFit/>
+          </a:bodyPr>
+          <a:lstStyle/>
+          <a:p>
+            <a:pPr algn="l">
+              <a:spcAft>
+                <a:spcPts val="0"/>
+              </a:spcAft>
+              <a:defRPr sz="1800" b="1">
+                <a:solidFill>
+                  <a:srgbClr val="2A8B5A"/>
+                </a:solidFill>
+                <a:latin typeface="Noto Sans CJK KR"/>
+              </a:defRPr>
+            </a:pPr>
+            <a:r>
+              <a:t>만드는 것</a:t>
+            </a:r>
+          </a:p>
+        </p:txBody>
+      </p:sp>
+      <p:sp>
+        <p:nvSpPr>
+          <p:cNvPr id="10" name="TextBox 9"/>
+          <p:cNvSpPr txBox="1"/>
+          <p:nvPr/>
+        </p:nvSpPr>
+        <p:spPr>
+          <a:xfrm>
+            <a:off x="1920240" y="2103120"/>
+            <a:ext cx="9235440" cy="438912"/>
+          </a:xfrm>
+          <a:prstGeom prst="rect">
+            <a:avLst/>
+          </a:prstGeom>
+          <a:noFill/>
+        </p:spPr>
+        <p:txBody>
+          <a:bodyPr wrap="square" lIns="73152" rIns="73152" tIns="36576" bIns="36576">
+            <a:spAutoFit/>
+          </a:bodyPr>
+          <a:lstStyle/>
+          <a:p>
+            <a:pPr algn="l">
+              <a:spcAft>
+                <a:spcPts val="0"/>
+              </a:spcAft>
+              <a:defRPr sz="1700" b="0">
+                <a:solidFill>
+                  <a:srgbClr val="122C4E"/>
+                </a:solidFill>
+                <a:latin typeface="Noto Sans CJK KR"/>
+              </a:defRPr>
+            </a:pPr>
+            <a:r>
+              <a:t>여러 ROS 2 node를 시작 순서대로 조립하는 launch 파일</a:t>
+            </a:r>
+          </a:p>
+        </p:txBody>
+      </p:sp>
+      <p:sp>
+        <p:nvSpPr>
+          <p:cNvPr id="11" name="Rounded Rectangle 10"/>
           <p:cNvSpPr/>
           <p:nvPr/>
         </p:nvSpPr>
         <p:spPr>
           <a:xfrm>
-            <a:off x="658368" y="1956816"/>
-            <a:ext cx="10972800" cy="603504"/>
-          </a:xfrm>
-          <a:prstGeom prst="rect">
-            <a:avLst/>
-          </a:prstGeom>
-          <a:solidFill>
-            <a:srgbClr val="F4F7FB"/>
-          </a:solidFill>
-          <a:ln>
-            <a:solidFill>
-              <a:srgbClr val="F4F7FB"/>
-            </a:solidFill>
-          </a:ln>
-        </p:spPr>
-        <p:style>
-          <a:lnRef idx="1">
-            <a:schemeClr val="accent1"/>
-          </a:lnRef>
-          <a:fillRef idx="3">
-            <a:schemeClr val="accent1"/>
-          </a:fillRef>
-          <a:effectRef idx="2">
-            <a:schemeClr val="accent1"/>
-          </a:effectRef>
-          <a:fontRef idx="minor">
-            <a:schemeClr val="lt1"/>
-          </a:fontRef>
-        </p:style>
-        <p:txBody>
-          <a:bodyPr rtlCol="0" anchor="ctr" wrap="square" lIns="73152" rIns="73152" tIns="36576" bIns="36576"/>
-          <a:lstStyle/>
-          <a:p>
-            <a:pPr algn="l">
-              <a:spcAft>
-                <a:spcPts val="0"/>
-              </a:spcAft>
-              <a:defRPr sz="1300" b="0">
-                <a:solidFill>
-                  <a:srgbClr val="122C4E"/>
-                </a:solidFill>
-                <a:latin typeface="DejaVu Sans Mono"/>
-              </a:defRPr>
-            </a:pPr>
-            <a:r>
-              <a:t>현재 열린 파일: ~/ros2_curri/my_agv_ws/src/agv_gazebo/launch/gazebo.launch.py</a:t>
-            </a:r>
-            <a:br/>
-            <a:r>
-              <a:t>아래 코드만 입력 → Ctrl+O → Enter로 저장 → 다음 블록으로 이동</a:t>
-            </a:r>
-          </a:p>
-        </p:txBody>
-      </p:sp>
-      <p:sp>
-        <p:nvSpPr>
-          <p:cNvPr id="9" name="Rectangle 8"/>
-          <p:cNvSpPr/>
-          <p:nvPr/>
-        </p:nvSpPr>
-        <p:spPr>
-          <a:xfrm>
-            <a:off x="658368" y="2706624"/>
-            <a:ext cx="10972800" cy="3364992"/>
-          </a:xfrm>
-          <a:prstGeom prst="rect">
+            <a:off x="676656" y="2852928"/>
+            <a:ext cx="10881360" cy="1682496"/>
+          </a:xfrm>
+          <a:prstGeom prst="roundRect">
             <a:avLst/>
           </a:prstGeom>
           <a:solidFill>
@@ -8379,14 +9059,14 @@
           </a:fontRef>
         </p:style>
         <p:txBody>
-          <a:bodyPr rtlCol="0" anchor="ctr" wrap="square" lIns="164592" rIns="164592" tIns="109728" bIns="36576"/>
-          <a:lstStyle/>
-          <a:p>
-            <a:pPr algn="l">
-              <a:spcAft>
-                <a:spcPts val="0"/>
-              </a:spcAft>
-              <a:defRPr sz="1400" b="0">
+          <a:bodyPr rtlCol="0" anchor="ctr" wrap="square" lIns="73152" rIns="73152" tIns="36576" bIns="36576"/>
+          <a:lstStyle/>
+          <a:p>
+            <a:pPr algn="l">
+              <a:spcAft>
+                <a:spcPts val="0"/>
+              </a:spcAft>
+              <a:defRPr sz="1600" b="0">
                 <a:solidFill>
                   <a:srgbClr val="FFFFFF"/>
                 </a:solidFill>
@@ -8394,87 +9074,89 @@
               </a:defRPr>
             </a:pPr>
             <a:r>
-              <a:t>import os</a:t>
+              <a:t>mkdir -p ~/ros2_curri/my_agv_ws/src/agv_gazebo/launch</a:t>
             </a:r>
             <a:br/>
             <a:r>
-              <a:t>from ament_index_python.packages import get_package_share_directory</a:t>
-            </a:r>
-            <a:br/>
-            <a:r>
-              <a:t>from launch import LaunchDescription</a:t>
-            </a:r>
-            <a:br/>
-            <a:r>
-              <a:t>from launch.actions import IncludeLaunchDescription, SetEnvironmentVariable</a:t>
-            </a:r>
-            <a:br/>
-            <a:r>
-              <a:t>from launch.launch_description_sources import PythonLaunchDescriptionSource</a:t>
-            </a:r>
-            <a:br/>
-            <a:r>
-              <a:t>from launch_ros.actions import Node</a:t>
-            </a:r>
-            <a:br/>
-            <a:br/>
-            <a:r>
-              <a:t>def generate_launch_description():</a:t>
-            </a:r>
-            <a:br/>
-            <a:r>
-              <a:t>    share = get_package_share_directory('agv_gazebo')</a:t>
-            </a:r>
-            <a:br/>
-            <a:r>
-              <a:t>    world = os.path.join(share, 'worlds', 'warehouse.sdf')</a:t>
-            </a:r>
-            <a:br/>
-            <a:r>
-              <a:t>    models = os.path.join(share, 'models')</a:t>
-            </a:r>
-            <a:br/>
-            <a:r>
-              <a:t>    previous = os.environ.get('GZ_SIM_RESOURCE_PATH', '')</a:t>
-            </a:r>
-          </a:p>
-        </p:txBody>
-      </p:sp>
-      <p:sp>
-        <p:nvSpPr>
-          <p:cNvPr id="10" name="TextBox 9"/>
-          <p:cNvSpPr txBox="1"/>
-          <p:nvPr/>
-        </p:nvSpPr>
-        <p:spPr>
-          <a:xfrm>
-            <a:off x="749808" y="6181344"/>
-            <a:ext cx="10789920" cy="201168"/>
-          </a:xfrm>
-          <a:prstGeom prst="rect">
-            <a:avLst/>
-          </a:prstGeom>
-          <a:noFill/>
-        </p:spPr>
-        <p:txBody>
-          <a:bodyPr wrap="square" lIns="73152" rIns="73152" tIns="36576" bIns="36576">
-            <a:spAutoFit/>
-          </a:bodyPr>
-          <a:lstStyle/>
-          <a:p>
-            <a:pPr algn="l">
-              <a:spcAft>
-                <a:spcPts val="0"/>
-              </a:spcAft>
-              <a:defRPr sz="1000" b="0">
-                <a:solidFill>
-                  <a:srgbClr val="5C6672"/>
-                </a:solidFill>
-                <a:latin typeface="Noto Sans CJK KR"/>
-              </a:defRPr>
-            </a:pPr>
-            <a:r>
-              <a:t>입력 1/2 · 이 파일의 다음 코드 블록이 바로 다음 슬라이드에 이어집니다.</a:t>
+              <a:t>nano ~/ros2_curri/my_agv_ws/src/agv_gazebo/launch/gazebo.launch.py</a:t>
+            </a:r>
+          </a:p>
+        </p:txBody>
+      </p:sp>
+      <p:sp>
+        <p:nvSpPr>
+          <p:cNvPr id="12" name="TextBox 11"/>
+          <p:cNvSpPr txBox="1"/>
+          <p:nvPr/>
+        </p:nvSpPr>
+        <p:spPr>
+          <a:xfrm>
+            <a:off x="804672" y="4901184"/>
+            <a:ext cx="10241280" cy="329184"/>
+          </a:xfrm>
+          <a:prstGeom prst="rect">
+            <a:avLst/>
+          </a:prstGeom>
+          <a:noFill/>
+        </p:spPr>
+        <p:txBody>
+          <a:bodyPr wrap="square" lIns="73152" rIns="73152" tIns="36576" bIns="36576">
+            <a:spAutoFit/>
+          </a:bodyPr>
+          <a:lstStyle/>
+          <a:p>
+            <a:pPr algn="ctr">
+              <a:spcAft>
+                <a:spcPts val="0"/>
+              </a:spcAft>
+              <a:defRPr sz="1600" b="1">
+                <a:solidFill>
+                  <a:srgbClr val="DB7E22"/>
+                </a:solidFill>
+                <a:latin typeface="Noto Sans CJK KR"/>
+              </a:defRPr>
+            </a:pPr>
+            <a:r>
+              <a:t>nano 저장: Ctrl+O → Enter → Ctrl+X  |  파일이 열리면 아직 비어 있는 것이 정상입니다.</a:t>
+            </a:r>
+          </a:p>
+        </p:txBody>
+      </p:sp>
+      <p:sp>
+        <p:nvSpPr>
+          <p:cNvPr id="13" name="TextBox 12"/>
+          <p:cNvSpPr txBox="1"/>
+          <p:nvPr/>
+        </p:nvSpPr>
+        <p:spPr>
+          <a:xfrm>
+            <a:off x="804672" y="5504688"/>
+            <a:ext cx="10241280" cy="329184"/>
+          </a:xfrm>
+          <a:prstGeom prst="rect">
+            <a:avLst/>
+          </a:prstGeom>
+          <a:noFill/>
+        </p:spPr>
+        <p:txBody>
+          <a:bodyPr wrap="square" lIns="73152" rIns="73152" tIns="36576" bIns="36576">
+            <a:spAutoFit/>
+          </a:bodyPr>
+          <a:lstStyle/>
+          <a:p>
+            <a:pPr algn="ctr">
+              <a:spcAft>
+                <a:spcPts val="0"/>
+              </a:spcAft>
+              <a:defRPr sz="1500" b="1">
+                <a:solidFill>
+                  <a:srgbClr val="2A8B5A"/>
+                </a:solidFill>
+                <a:latin typeface="Noto Sans CJK KR"/>
+              </a:defRPr>
+            </a:pPr>
+            <a:r>
+              <a:t>다음 단계의 확인 화면: terminal의 실행 node와 topic</a:t>
             </a:r>
           </a:p>
         </p:txBody>
@@ -8531,7 +9213,7 @@
               </a:defRPr>
             </a:pPr>
             <a:r>
-              <a:t>구현 2/2: 코드 입력 (2/2)</a:t>
+              <a:t>구현 2/2: 코드 읽기 (1/3)</a:t>
             </a:r>
           </a:p>
         </p:txBody>
@@ -8570,7 +9252,7 @@
               </a:defRPr>
             </a:pPr>
             <a:r>
-              <a:t>~/ros2_curri/my_agv_ws/src/agv_gazebo/launch/gazebo.launch.py</a:t>
+              <a:t>짧은 실제 코드 조각을 먼저 읽고, 다음 슬라이드에서 같은 코드를 직접 입력합니다.</a:t>
             </a:r>
           </a:p>
         </p:txBody>
@@ -8706,7 +9388,7 @@
               </a:defRPr>
             </a:pPr>
             <a:r>
-              <a:t>현재 단계 파일 2/2 · 입력 2/2    |    현재 폴더 ~/ros2_curri/my_agv_ws    |    현재 터미널</a:t>
+              <a:t>현재 단계 코드 해설 2/2    |    현재 폴더 ~/ros2_curri/my_agv_ws    |    현재 터미널</a:t>
             </a:r>
           </a:p>
         </p:txBody>
@@ -8719,111 +9401,88 @@
         </p:nvSpPr>
         <p:spPr>
           <a:xfrm>
-            <a:off x="658368" y="1609344"/>
-            <a:ext cx="10972800" cy="384048"/>
-          </a:xfrm>
-          <a:prstGeom prst="rect">
-            <a:avLst/>
-          </a:prstGeom>
-          <a:noFill/>
-        </p:spPr>
-        <p:txBody>
-          <a:bodyPr wrap="square" lIns="73152" rIns="73152" tIns="36576" bIns="36576">
-            <a:spAutoFit/>
-          </a:bodyPr>
-          <a:lstStyle/>
-          <a:p>
-            <a:pPr algn="l">
-              <a:spcAft>
-                <a:spcPts val="0"/>
-              </a:spcAft>
-              <a:defRPr sz="1400" b="1">
-                <a:solidFill>
-                  <a:srgbClr val="122C4E"/>
-                </a:solidFill>
-                <a:latin typeface="Noto Sans CJK KR"/>
-              </a:defRPr>
-            </a:pPr>
-            <a:r>
-              <a:t>이 블록이 하는 일: launch argument와 Node 구성을 입력합니다. package·executable·parameter 경로가 실제 이름과 같아야 합니다.</a:t>
-            </a:r>
-          </a:p>
-        </p:txBody>
-      </p:sp>
-      <p:sp>
-        <p:nvSpPr>
-          <p:cNvPr id="8" name="Rectangle 7"/>
+            <a:off x="694944" y="1618488"/>
+            <a:ext cx="10789920" cy="274320"/>
+          </a:xfrm>
+          <a:prstGeom prst="rect">
+            <a:avLst/>
+          </a:prstGeom>
+          <a:noFill/>
+        </p:spPr>
+        <p:txBody>
+          <a:bodyPr wrap="square" lIns="73152" rIns="73152" tIns="36576" bIns="36576">
+            <a:spAutoFit/>
+          </a:bodyPr>
+          <a:lstStyle/>
+          <a:p>
+            <a:pPr algn="l">
+              <a:spcAft>
+                <a:spcPts val="0"/>
+              </a:spcAft>
+              <a:defRPr sz="1300" b="1">
+                <a:solidFill>
+                  <a:srgbClr val="225B9B"/>
+                </a:solidFill>
+                <a:latin typeface="DejaVu Sans Mono"/>
+              </a:defRPr>
+            </a:pPr>
+            <a:r>
+              <a:t>~/ros2_curri/my_agv_ws/src/agv_gazebo/launch/gazebo.launch.py</a:t>
+            </a:r>
+          </a:p>
+        </p:txBody>
+      </p:sp>
+      <p:sp>
+        <p:nvSpPr>
+          <p:cNvPr id="8" name="TextBox 7"/>
+          <p:cNvSpPr txBox="1"/>
+          <p:nvPr/>
+        </p:nvSpPr>
+        <p:spPr>
+          <a:xfrm>
+            <a:off x="694944" y="1938528"/>
+            <a:ext cx="10789920" cy="274320"/>
+          </a:xfrm>
+          <a:prstGeom prst="rect">
+            <a:avLst/>
+          </a:prstGeom>
+          <a:noFill/>
+        </p:spPr>
+        <p:txBody>
+          <a:bodyPr wrap="square" lIns="73152" rIns="73152" tIns="36576" bIns="36576">
+            <a:spAutoFit/>
+          </a:bodyPr>
+          <a:lstStyle/>
+          <a:p>
+            <a:pPr algn="ctr">
+              <a:spcAft>
+                <a:spcPts val="0"/>
+              </a:spcAft>
+              <a:defRPr sz="1500" b="1">
+                <a:solidFill>
+                  <a:srgbClr val="DB7E22"/>
+                </a:solidFill>
+                <a:latin typeface="Noto Sans CJK KR"/>
+              </a:defRPr>
+            </a:pPr>
+            <a:r>
+              <a:t>말로 먼저 답해 보세요: 이 줄은 무엇을 만들고, 실행하면 어디에서 확인할 수 있을까요?</a:t>
+            </a:r>
+          </a:p>
+        </p:txBody>
+      </p:sp>
+      <p:sp>
+        <p:nvSpPr>
+          <p:cNvPr id="9" name="Rounded Rectangle 8"/>
           <p:cNvSpPr/>
           <p:nvPr/>
         </p:nvSpPr>
         <p:spPr>
           <a:xfrm>
-            <a:off x="658368" y="1956816"/>
-            <a:ext cx="10972800" cy="603504"/>
-          </a:xfrm>
-          <a:prstGeom prst="rect">
-            <a:avLst/>
-          </a:prstGeom>
-          <a:solidFill>
-            <a:srgbClr val="F4F7FB"/>
-          </a:solidFill>
-          <a:ln>
-            <a:solidFill>
-              <a:srgbClr val="F4F7FB"/>
-            </a:solidFill>
-          </a:ln>
-        </p:spPr>
-        <p:style>
-          <a:lnRef idx="1">
-            <a:schemeClr val="accent1"/>
-          </a:lnRef>
-          <a:fillRef idx="3">
-            <a:schemeClr val="accent1"/>
-          </a:fillRef>
-          <a:effectRef idx="2">
-            <a:schemeClr val="accent1"/>
-          </a:effectRef>
-          <a:fontRef idx="minor">
-            <a:schemeClr val="lt1"/>
-          </a:fontRef>
-        </p:style>
-        <p:txBody>
-          <a:bodyPr rtlCol="0" anchor="ctr" wrap="square" lIns="73152" rIns="73152" tIns="36576" bIns="36576"/>
-          <a:lstStyle/>
-          <a:p>
-            <a:pPr algn="l">
-              <a:spcAft>
-                <a:spcPts val="0"/>
-              </a:spcAft>
-              <a:defRPr sz="1300" b="0">
-                <a:solidFill>
-                  <a:srgbClr val="122C4E"/>
-                </a:solidFill>
-                <a:latin typeface="DejaVu Sans Mono"/>
-              </a:defRPr>
-            </a:pPr>
-            <a:r>
-              <a:t>현재 열린 파일: ~/ros2_curri/my_agv_ws/src/agv_gazebo/launch/gazebo.launch.py</a:t>
-            </a:r>
-            <a:br/>
-            <a:r>
-              <a:t>아래 코드만 입력 → Ctrl+O → Enter로 저장 → 다음 블록으로 이동</a:t>
-            </a:r>
-          </a:p>
-        </p:txBody>
-      </p:sp>
-      <p:sp>
-        <p:nvSpPr>
-          <p:cNvPr id="9" name="Rectangle 8"/>
-          <p:cNvSpPr/>
-          <p:nvPr/>
-        </p:nvSpPr>
-        <p:spPr>
-          <a:xfrm>
-            <a:off x="658368" y="2706624"/>
-            <a:ext cx="10972800" cy="3364992"/>
-          </a:xfrm>
-          <a:prstGeom prst="rect">
+            <a:off x="658368" y="2359152"/>
+            <a:ext cx="4160520" cy="1417320"/>
+          </a:xfrm>
+          <a:prstGeom prst="roundRect">
             <a:avLst/>
           </a:prstGeom>
           <a:solidFill>
@@ -8850,14 +9509,14 @@
           </a:fontRef>
         </p:style>
         <p:txBody>
-          <a:bodyPr rtlCol="0" anchor="ctr" wrap="square" lIns="164592" rIns="164592" tIns="109728" bIns="36576"/>
-          <a:lstStyle/>
-          <a:p>
-            <a:pPr algn="l">
-              <a:spcAft>
-                <a:spcPts val="0"/>
-              </a:spcAft>
-              <a:defRPr sz="1400" b="0">
+          <a:bodyPr rtlCol="0" anchor="ctr" wrap="square" lIns="73152" rIns="73152" tIns="36576" bIns="36576"/>
+          <a:lstStyle/>
+          <a:p>
+            <a:pPr algn="l">
+              <a:spcAft>
+                <a:spcPts val="0"/>
+              </a:spcAft>
+              <a:defRPr sz="1300" b="0">
                 <a:solidFill>
                   <a:srgbClr val="FFFFFF"/>
                 </a:solidFill>
@@ -8865,62 +9524,420 @@
               </a:defRPr>
             </a:pPr>
             <a:r>
-              <a:t>    gz_launch = os.path.join(get_package_share_directory('ros_gz_sim'), 'launch', 'gz_sim.launch.py')</a:t>
-            </a:r>
-            <a:br/>
-            <a:r>
-              <a:t>    return LaunchDescription([SetEnvironmentVariable('GZ_SIM_RESOURCE_PATH',</a:t>
-            </a:r>
-            <a:br/>
-            <a:r>
-              <a:t>        models + (':' + previous if previous else '')),</a:t>
-            </a:r>
-            <a:br/>
-            <a:r>
-              <a:t>        IncludeLaunchDescription(PythonLaunchDescriptionSource(gz_launch),</a:t>
-            </a:r>
-            <a:br/>
-            <a:r>
-              <a:t>        launch_arguments={'gz_args': '-r ' + world}.items()), Node(package='ros_gz_bridge',</a:t>
-            </a:r>
-            <a:br/>
-            <a:r>
-              <a:t>         executable='parameter_bridge', parameters=[{'config_file': os.path.join(share,</a:t>
-            </a:r>
-            <a:br/>
-            <a:r>
-              <a:t>        'config', 'bridge.yaml')}], output='screen')])</a:t>
-            </a:r>
-          </a:p>
-        </p:txBody>
-      </p:sp>
-      <p:sp>
-        <p:nvSpPr>
-          <p:cNvPr id="10" name="TextBox 9"/>
-          <p:cNvSpPr txBox="1"/>
-          <p:nvPr/>
-        </p:nvSpPr>
-        <p:spPr>
-          <a:xfrm>
-            <a:off x="749808" y="6181344"/>
-            <a:ext cx="10789920" cy="201168"/>
-          </a:xfrm>
-          <a:prstGeom prst="rect">
-            <a:avLst/>
-          </a:prstGeom>
-          <a:noFill/>
-        </p:spPr>
-        <p:txBody>
-          <a:bodyPr wrap="square" lIns="73152" rIns="73152" tIns="36576" bIns="36576">
-            <a:spAutoFit/>
-          </a:bodyPr>
-          <a:lstStyle/>
-          <a:p>
-            <a:pPr algn="l">
-              <a:spcAft>
-                <a:spcPts val="0"/>
-              </a:spcAft>
-              <a:defRPr sz="1000" b="0">
+              <a:t>import os</a:t>
+            </a:r>
+          </a:p>
+        </p:txBody>
+      </p:sp>
+      <p:sp>
+        <p:nvSpPr>
+          <p:cNvPr id="10" name="Rounded Rectangle 9"/>
+          <p:cNvSpPr/>
+          <p:nvPr/>
+        </p:nvSpPr>
+        <p:spPr>
+          <a:xfrm>
+            <a:off x="5029200" y="2359152"/>
+            <a:ext cx="6537960" cy="1417320"/>
+          </a:xfrm>
+          <a:prstGeom prst="roundRect">
+            <a:avLst/>
+          </a:prstGeom>
+          <a:solidFill>
+            <a:srgbClr val="F4F7FB"/>
+          </a:solidFill>
+          <a:ln>
+            <a:solidFill>
+              <a:srgbClr val="225B9B"/>
+            </a:solidFill>
+          </a:ln>
+        </p:spPr>
+        <p:style>
+          <a:lnRef idx="1">
+            <a:schemeClr val="accent1"/>
+          </a:lnRef>
+          <a:fillRef idx="3">
+            <a:schemeClr val="accent1"/>
+          </a:fillRef>
+          <a:effectRef idx="2">
+            <a:schemeClr val="accent1"/>
+          </a:effectRef>
+          <a:fontRef idx="minor">
+            <a:schemeClr val="lt1"/>
+          </a:fontRef>
+        </p:style>
+        <p:txBody>
+          <a:bodyPr rtlCol="0" anchor="ctr"/>
+          <a:lstStyle/>
+          <a:p>
+            <a:pPr algn="ctr"/>
+          </a:p>
+        </p:txBody>
+      </p:sp>
+      <p:sp>
+        <p:nvSpPr>
+          <p:cNvPr id="11" name="TextBox 10"/>
+          <p:cNvSpPr txBox="1"/>
+          <p:nvPr/>
+        </p:nvSpPr>
+        <p:spPr>
+          <a:xfrm>
+            <a:off x="5239512" y="2468880"/>
+            <a:ext cx="594360" cy="219456"/>
+          </a:xfrm>
+          <a:prstGeom prst="rect">
+            <a:avLst/>
+          </a:prstGeom>
+          <a:noFill/>
+        </p:spPr>
+        <p:txBody>
+          <a:bodyPr wrap="square" lIns="73152" rIns="73152" tIns="36576" bIns="36576">
+            <a:spAutoFit/>
+          </a:bodyPr>
+          <a:lstStyle/>
+          <a:p>
+            <a:pPr algn="l">
+              <a:spcAft>
+                <a:spcPts val="0"/>
+              </a:spcAft>
+              <a:defRPr sz="1400" b="1">
+                <a:solidFill>
+                  <a:srgbClr val="225B9B"/>
+                </a:solidFill>
+                <a:latin typeface="Noto Sans CJK KR"/>
+              </a:defRPr>
+            </a:pPr>
+            <a:r>
+              <a:t>1.</a:t>
+            </a:r>
+          </a:p>
+        </p:txBody>
+      </p:sp>
+      <p:sp>
+        <p:nvSpPr>
+          <p:cNvPr id="12" name="TextBox 11"/>
+          <p:cNvSpPr txBox="1"/>
+          <p:nvPr/>
+        </p:nvSpPr>
+        <p:spPr>
+          <a:xfrm>
+            <a:off x="5596128" y="2450592"/>
+            <a:ext cx="5696712" cy="493776"/>
+          </a:xfrm>
+          <a:prstGeom prst="rect">
+            <a:avLst/>
+          </a:prstGeom>
+          <a:noFill/>
+        </p:spPr>
+        <p:txBody>
+          <a:bodyPr wrap="square" lIns="73152" rIns="73152" tIns="36576" bIns="36576">
+            <a:spAutoFit/>
+          </a:bodyPr>
+          <a:lstStyle/>
+          <a:p>
+            <a:pPr algn="l">
+              <a:spcAft>
+                <a:spcPts val="0"/>
+              </a:spcAft>
+              <a:defRPr sz="1300" b="0">
+                <a:solidFill>
+                  <a:srgbClr val="122C4E"/>
+                </a:solidFill>
+                <a:latin typeface="Noto Sans CJK KR"/>
+              </a:defRPr>
+            </a:pPr>
+            <a:r>
+              <a:t>뜻: 다른 파일에 이미 있는 도구를 이 파일에서 쓰겠다고 가져옵니다.</a:t>
+            </a:r>
+          </a:p>
+        </p:txBody>
+      </p:sp>
+      <p:sp>
+        <p:nvSpPr>
+          <p:cNvPr id="13" name="TextBox 12"/>
+          <p:cNvSpPr txBox="1"/>
+          <p:nvPr/>
+        </p:nvSpPr>
+        <p:spPr>
+          <a:xfrm>
+            <a:off x="5596128" y="3108960"/>
+            <a:ext cx="5696712" cy="457200"/>
+          </a:xfrm>
+          <a:prstGeom prst="rect">
+            <a:avLst/>
+          </a:prstGeom>
+          <a:noFill/>
+        </p:spPr>
+        <p:txBody>
+          <a:bodyPr wrap="square" lIns="73152" rIns="73152" tIns="36576" bIns="36576">
+            <a:spAutoFit/>
+          </a:bodyPr>
+          <a:lstStyle/>
+          <a:p>
+            <a:pPr algn="l">
+              <a:spcAft>
+                <a:spcPts val="0"/>
+              </a:spcAft>
+              <a:defRPr sz="1200" b="0">
+                <a:solidFill>
+                  <a:srgbClr val="2A8B5A"/>
+                </a:solidFill>
+                <a:latin typeface="Noto Sans CJK KR"/>
+              </a:defRPr>
+            </a:pPr>
+            <a:r>
+              <a:t>실행에서: 이 import가 빠지면 실행 전에 이름을 찾지 못했다는 오류가 납니다.</a:t>
+            </a:r>
+          </a:p>
+        </p:txBody>
+      </p:sp>
+      <p:sp>
+        <p:nvSpPr>
+          <p:cNvPr id="14" name="Rounded Rectangle 13"/>
+          <p:cNvSpPr/>
+          <p:nvPr/>
+        </p:nvSpPr>
+        <p:spPr>
+          <a:xfrm>
+            <a:off x="658368" y="4078224"/>
+            <a:ext cx="4160520" cy="1417320"/>
+          </a:xfrm>
+          <a:prstGeom prst="roundRect">
+            <a:avLst/>
+          </a:prstGeom>
+          <a:solidFill>
+            <a:srgbClr val="1D232D"/>
+          </a:solidFill>
+          <a:ln>
+            <a:solidFill>
+              <a:srgbClr val="1D232D"/>
+            </a:solidFill>
+          </a:ln>
+        </p:spPr>
+        <p:style>
+          <a:lnRef idx="1">
+            <a:schemeClr val="accent1"/>
+          </a:lnRef>
+          <a:fillRef idx="3">
+            <a:schemeClr val="accent1"/>
+          </a:fillRef>
+          <a:effectRef idx="2">
+            <a:schemeClr val="accent1"/>
+          </a:effectRef>
+          <a:fontRef idx="minor">
+            <a:schemeClr val="lt1"/>
+          </a:fontRef>
+        </p:style>
+        <p:txBody>
+          <a:bodyPr rtlCol="0" anchor="ctr" wrap="square" lIns="73152" rIns="73152" tIns="36576" bIns="36576"/>
+          <a:lstStyle/>
+          <a:p>
+            <a:pPr algn="l">
+              <a:spcAft>
+                <a:spcPts val="0"/>
+              </a:spcAft>
+              <a:defRPr sz="1300" b="0">
+                <a:solidFill>
+                  <a:srgbClr val="FFFFFF"/>
+                </a:solidFill>
+                <a:latin typeface="DejaVu Sans Mono"/>
+              </a:defRPr>
+            </a:pPr>
+            <a:r>
+              <a:t>def generate_launch_description():</a:t>
+            </a:r>
+          </a:p>
+        </p:txBody>
+      </p:sp>
+      <p:sp>
+        <p:nvSpPr>
+          <p:cNvPr id="15" name="Rounded Rectangle 14"/>
+          <p:cNvSpPr/>
+          <p:nvPr/>
+        </p:nvSpPr>
+        <p:spPr>
+          <a:xfrm>
+            <a:off x="5029200" y="4078224"/>
+            <a:ext cx="6537960" cy="1417320"/>
+          </a:xfrm>
+          <a:prstGeom prst="roundRect">
+            <a:avLst/>
+          </a:prstGeom>
+          <a:solidFill>
+            <a:srgbClr val="F4F7FB"/>
+          </a:solidFill>
+          <a:ln>
+            <a:solidFill>
+              <a:srgbClr val="225B9B"/>
+            </a:solidFill>
+          </a:ln>
+        </p:spPr>
+        <p:style>
+          <a:lnRef idx="1">
+            <a:schemeClr val="accent1"/>
+          </a:lnRef>
+          <a:fillRef idx="3">
+            <a:schemeClr val="accent1"/>
+          </a:fillRef>
+          <a:effectRef idx="2">
+            <a:schemeClr val="accent1"/>
+          </a:effectRef>
+          <a:fontRef idx="minor">
+            <a:schemeClr val="lt1"/>
+          </a:fontRef>
+        </p:style>
+        <p:txBody>
+          <a:bodyPr rtlCol="0" anchor="ctr"/>
+          <a:lstStyle/>
+          <a:p>
+            <a:pPr algn="ctr"/>
+          </a:p>
+        </p:txBody>
+      </p:sp>
+      <p:sp>
+        <p:nvSpPr>
+          <p:cNvPr id="16" name="TextBox 15"/>
+          <p:cNvSpPr txBox="1"/>
+          <p:nvPr/>
+        </p:nvSpPr>
+        <p:spPr>
+          <a:xfrm>
+            <a:off x="5239512" y="4187952"/>
+            <a:ext cx="594360" cy="219456"/>
+          </a:xfrm>
+          <a:prstGeom prst="rect">
+            <a:avLst/>
+          </a:prstGeom>
+          <a:noFill/>
+        </p:spPr>
+        <p:txBody>
+          <a:bodyPr wrap="square" lIns="73152" rIns="73152" tIns="36576" bIns="36576">
+            <a:spAutoFit/>
+          </a:bodyPr>
+          <a:lstStyle/>
+          <a:p>
+            <a:pPr algn="l">
+              <a:spcAft>
+                <a:spcPts val="0"/>
+              </a:spcAft>
+              <a:defRPr sz="1400" b="1">
+                <a:solidFill>
+                  <a:srgbClr val="225B9B"/>
+                </a:solidFill>
+                <a:latin typeface="Noto Sans CJK KR"/>
+              </a:defRPr>
+            </a:pPr>
+            <a:r>
+              <a:t>2.</a:t>
+            </a:r>
+          </a:p>
+        </p:txBody>
+      </p:sp>
+      <p:sp>
+        <p:nvSpPr>
+          <p:cNvPr id="17" name="TextBox 16"/>
+          <p:cNvSpPr txBox="1"/>
+          <p:nvPr/>
+        </p:nvSpPr>
+        <p:spPr>
+          <a:xfrm>
+            <a:off x="5596128" y="4169663"/>
+            <a:ext cx="5696712" cy="493776"/>
+          </a:xfrm>
+          <a:prstGeom prst="rect">
+            <a:avLst/>
+          </a:prstGeom>
+          <a:noFill/>
+        </p:spPr>
+        <p:txBody>
+          <a:bodyPr wrap="square" lIns="73152" rIns="73152" tIns="36576" bIns="36576">
+            <a:spAutoFit/>
+          </a:bodyPr>
+          <a:lstStyle/>
+          <a:p>
+            <a:pPr algn="l">
+              <a:spcAft>
+                <a:spcPts val="0"/>
+              </a:spcAft>
+              <a:defRPr sz="1300" b="0">
+                <a:solidFill>
+                  <a:srgbClr val="122C4E"/>
+                </a:solidFill>
+                <a:latin typeface="Noto Sans CJK KR"/>
+              </a:defRPr>
+            </a:pPr>
+            <a:r>
+              <a:t>뜻: 입력 message가 오거나 timer가 울릴 때 실행할 작은 기능 단위입니다.</a:t>
+            </a:r>
+          </a:p>
+        </p:txBody>
+      </p:sp>
+      <p:sp>
+        <p:nvSpPr>
+          <p:cNvPr id="18" name="TextBox 17"/>
+          <p:cNvSpPr txBox="1"/>
+          <p:nvPr/>
+        </p:nvSpPr>
+        <p:spPr>
+          <a:xfrm>
+            <a:off x="5596128" y="4828032"/>
+            <a:ext cx="5696712" cy="457200"/>
+          </a:xfrm>
+          <a:prstGeom prst="rect">
+            <a:avLst/>
+          </a:prstGeom>
+          <a:noFill/>
+        </p:spPr>
+        <p:txBody>
+          <a:bodyPr wrap="square" lIns="73152" rIns="73152" tIns="36576" bIns="36576">
+            <a:spAutoFit/>
+          </a:bodyPr>
+          <a:lstStyle/>
+          <a:p>
+            <a:pPr algn="l">
+              <a:spcAft>
+                <a:spcPts val="0"/>
+              </a:spcAft>
+              <a:defRPr sz="1200" b="0">
+                <a:solidFill>
+                  <a:srgbClr val="2A8B5A"/>
+                </a:solidFill>
+                <a:latin typeface="Noto Sans CJK KR"/>
+              </a:defRPr>
+            </a:pPr>
+            <a:r>
+              <a:t>실행에서: 이 함수 안의 계산·publish가 실제 node의 반응이 됩니다.</a:t>
+            </a:r>
+          </a:p>
+        </p:txBody>
+      </p:sp>
+      <p:sp>
+        <p:nvSpPr>
+          <p:cNvPr id="19" name="TextBox 18"/>
+          <p:cNvSpPr txBox="1"/>
+          <p:nvPr/>
+        </p:nvSpPr>
+        <p:spPr>
+          <a:xfrm>
+            <a:off x="749808" y="6199632"/>
+            <a:ext cx="10698480" cy="182880"/>
+          </a:xfrm>
+          <a:prstGeom prst="rect">
+            <a:avLst/>
+          </a:prstGeom>
+          <a:noFill/>
+        </p:spPr>
+        <p:txBody>
+          <a:bodyPr wrap="square" lIns="73152" rIns="73152" tIns="36576" bIns="36576">
+            <a:spAutoFit/>
+          </a:bodyPr>
+          <a:lstStyle/>
+          <a:p>
+            <a:pPr algn="ctr">
+              <a:spcAft>
+                <a:spcPts val="0"/>
+              </a:spcAft>
+              <a:defRPr sz="1100" b="0">
                 <a:solidFill>
                   <a:srgbClr val="5C6672"/>
                 </a:solidFill>
@@ -8928,7 +9945,7 @@
               </a:defRPr>
             </a:pPr>
             <a:r>
-              <a:t>입력 2/2 · 이 파일의 다음 코드 블록이 바로 다음 슬라이드에 이어집니다.</a:t>
+              <a:t>다음 코드 입력 슬라이드에서 이 줄을 발견하면, 방금 설명한 ‘뜻’과 ‘실행에서 보이는 변화’를 다시 말해 봅니다.</a:t>
             </a:r>
           </a:p>
         </p:txBody>
@@ -8985,7 +10002,7 @@
               </a:defRPr>
             </a:pPr>
             <a:r>
-              <a:t>구현 뒤 실행 1/2: bridge YAML을 작성한다</a:t>
+              <a:t>구현 2/2: 코드 읽기 (2/3)</a:t>
             </a:r>
           </a:p>
         </p:txBody>
@@ -9024,7 +10041,7 @@
               </a:defRPr>
             </a:pPr>
             <a:r>
-              <a:t>방금 직접 만든 파일을 실행·검사하며 다음 파일로 넘어갈 기준을 만듭니다.</a:t>
+              <a:t>짧은 실제 코드 조각을 먼저 읽고, 다음 슬라이드에서 같은 코드를 직접 입력합니다.</a:t>
             </a:r>
           </a:p>
         </p:txBody>
@@ -9160,7 +10177,7 @@
               </a:defRPr>
             </a:pPr>
             <a:r>
-              <a:t>현재 단계 실행 1/2    |    현재 폴더 ~/ros2_curri/my_agv_ws    |    현재 터미널</a:t>
+              <a:t>현재 단계 코드 해설 2/2    |    현재 폴더 ~/ros2_curri/my_agv_ws    |    현재 터미널</a:t>
             </a:r>
           </a:p>
         </p:txBody>
@@ -9173,33 +10190,33 @@
         </p:nvSpPr>
         <p:spPr>
           <a:xfrm>
-            <a:off x="676656" y="1764792"/>
-            <a:ext cx="1828800" cy="347472"/>
-          </a:xfrm>
-          <a:prstGeom prst="rect">
-            <a:avLst/>
-          </a:prstGeom>
-          <a:noFill/>
-        </p:spPr>
-        <p:txBody>
-          <a:bodyPr wrap="square" lIns="73152" rIns="73152" tIns="36576" bIns="36576">
-            <a:spAutoFit/>
-          </a:bodyPr>
-          <a:lstStyle/>
-          <a:p>
-            <a:pPr algn="l">
-              <a:spcAft>
-                <a:spcPts val="0"/>
-              </a:spcAft>
-              <a:defRPr sz="1800" b="1">
+            <a:off x="694944" y="1618488"/>
+            <a:ext cx="10789920" cy="274320"/>
+          </a:xfrm>
+          <a:prstGeom prst="rect">
+            <a:avLst/>
+          </a:prstGeom>
+          <a:noFill/>
+        </p:spPr>
+        <p:txBody>
+          <a:bodyPr wrap="square" lIns="73152" rIns="73152" tIns="36576" bIns="36576">
+            <a:spAutoFit/>
+          </a:bodyPr>
+          <a:lstStyle/>
+          <a:p>
+            <a:pPr algn="l">
+              <a:spcAft>
+                <a:spcPts val="0"/>
+              </a:spcAft>
+              <a:defRPr sz="1300" b="1">
                 <a:solidFill>
                   <a:srgbClr val="225B9B"/>
                 </a:solidFill>
-                <a:latin typeface="Noto Sans CJK KR"/>
-              </a:defRPr>
-            </a:pPr>
-            <a:r>
-              <a:t>왜 하는가</a:t>
+                <a:latin typeface="DejaVu Sans Mono"/>
+              </a:defRPr>
+            </a:pPr>
+            <a:r>
+              <a:t>~/ros2_curri/my_agv_ws/src/agv_gazebo/launch/gazebo.launch.py</a:t>
             </a:r>
           </a:p>
         </p:txBody>
@@ -9212,33 +10229,33 @@
         </p:nvSpPr>
         <p:spPr>
           <a:xfrm>
-            <a:off x="676656" y="2103120"/>
-            <a:ext cx="10789920" cy="512064"/>
-          </a:xfrm>
-          <a:prstGeom prst="rect">
-            <a:avLst/>
-          </a:prstGeom>
-          <a:noFill/>
-        </p:spPr>
-        <p:txBody>
-          <a:bodyPr wrap="square" lIns="73152" rIns="73152" tIns="36576" bIns="36576">
-            <a:spAutoFit/>
-          </a:bodyPr>
-          <a:lstStyle/>
-          <a:p>
-            <a:pPr algn="l">
-              <a:spcAft>
-                <a:spcPts val="0"/>
-              </a:spcAft>
-              <a:defRPr sz="2000" b="0">
-                <a:solidFill>
-                  <a:srgbClr val="122C4E"/>
-                </a:solidFill>
-                <a:latin typeface="Noto Sans CJK KR"/>
-              </a:defRPr>
-            </a:pPr>
-            <a:r>
-              <a:t>방향과 양쪽 message type을 한 topic마다 정확히 적는다.</a:t>
+            <a:off x="694944" y="1938528"/>
+            <a:ext cx="10789920" cy="274320"/>
+          </a:xfrm>
+          <a:prstGeom prst="rect">
+            <a:avLst/>
+          </a:prstGeom>
+          <a:noFill/>
+        </p:spPr>
+        <p:txBody>
+          <a:bodyPr wrap="square" lIns="73152" rIns="73152" tIns="36576" bIns="36576">
+            <a:spAutoFit/>
+          </a:bodyPr>
+          <a:lstStyle/>
+          <a:p>
+            <a:pPr algn="ctr">
+              <a:spcAft>
+                <a:spcPts val="0"/>
+              </a:spcAft>
+              <a:defRPr sz="1500" b="1">
+                <a:solidFill>
+                  <a:srgbClr val="DB7E22"/>
+                </a:solidFill>
+                <a:latin typeface="Noto Sans CJK KR"/>
+              </a:defRPr>
+            </a:pPr>
+            <a:r>
+              <a:t>말로 먼저 답해 보세요: 이 줄은 무엇을 만들고, 실행하면 어디에서 확인할 수 있을까요?</a:t>
             </a:r>
           </a:p>
         </p:txBody>
@@ -9251,8 +10268,8 @@
         </p:nvSpPr>
         <p:spPr>
           <a:xfrm>
-            <a:off x="676656" y="2871216"/>
-            <a:ext cx="10835640" cy="2331720"/>
+            <a:off x="658368" y="2359152"/>
+            <a:ext cx="4160520" cy="1417320"/>
           </a:xfrm>
           <a:prstGeom prst="roundRect">
             <a:avLst/>
@@ -9288,7 +10305,7 @@
               <a:spcAft>
                 <a:spcPts val="0"/>
               </a:spcAft>
-              <a:defRPr sz="1600" b="0">
+              <a:defRPr sz="1300" b="0">
                 <a:solidFill>
                   <a:srgbClr val="FFFFFF"/>
                 </a:solidFill>
@@ -9296,42 +10313,165 @@
               </a:defRPr>
             </a:pPr>
             <a:r>
-              <a:t>cd ~/ros2_curri/my_agv_ws</a:t>
+              <a:t>return</a:t>
             </a:r>
             <a:br/>
             <a:r>
-              <a:t>nano src/agv_gazebo/config/bridge.yaml</a:t>
-            </a:r>
-          </a:p>
-        </p:txBody>
-      </p:sp>
-      <p:sp>
-        <p:nvSpPr>
-          <p:cNvPr id="10" name="TextBox 9"/>
-          <p:cNvSpPr txBox="1"/>
-          <p:nvPr/>
-        </p:nvSpPr>
-        <p:spPr>
-          <a:xfrm>
-            <a:off x="768096" y="5468112"/>
-            <a:ext cx="1143000" cy="256032"/>
-          </a:xfrm>
-          <a:prstGeom prst="rect">
-            <a:avLst/>
-          </a:prstGeom>
-          <a:noFill/>
-        </p:spPr>
-        <p:txBody>
-          <a:bodyPr wrap="square" lIns="73152" rIns="73152" tIns="36576" bIns="36576">
-            <a:spAutoFit/>
-          </a:bodyPr>
-          <a:lstStyle/>
-          <a:p>
-            <a:pPr algn="l">
-              <a:spcAft>
-                <a:spcPts val="0"/>
-              </a:spcAft>
-              <a:defRPr sz="1800" b="1">
+              <a:t>LaunchDescription([SetEnvironmentVariable('GZ_SIM_RESOURCE_PATH',</a:t>
+            </a:r>
+          </a:p>
+        </p:txBody>
+      </p:sp>
+      <p:sp>
+        <p:nvSpPr>
+          <p:cNvPr id="10" name="Rounded Rectangle 9"/>
+          <p:cNvSpPr/>
+          <p:nvPr/>
+        </p:nvSpPr>
+        <p:spPr>
+          <a:xfrm>
+            <a:off x="5029200" y="2359152"/>
+            <a:ext cx="6537960" cy="1417320"/>
+          </a:xfrm>
+          <a:prstGeom prst="roundRect">
+            <a:avLst/>
+          </a:prstGeom>
+          <a:solidFill>
+            <a:srgbClr val="F4F7FB"/>
+          </a:solidFill>
+          <a:ln>
+            <a:solidFill>
+              <a:srgbClr val="225B9B"/>
+            </a:solidFill>
+          </a:ln>
+        </p:spPr>
+        <p:style>
+          <a:lnRef idx="1">
+            <a:schemeClr val="accent1"/>
+          </a:lnRef>
+          <a:fillRef idx="3">
+            <a:schemeClr val="accent1"/>
+          </a:fillRef>
+          <a:effectRef idx="2">
+            <a:schemeClr val="accent1"/>
+          </a:effectRef>
+          <a:fontRef idx="minor">
+            <a:schemeClr val="lt1"/>
+          </a:fontRef>
+        </p:style>
+        <p:txBody>
+          <a:bodyPr rtlCol="0" anchor="ctr"/>
+          <a:lstStyle/>
+          <a:p>
+            <a:pPr algn="ctr"/>
+          </a:p>
+        </p:txBody>
+      </p:sp>
+      <p:sp>
+        <p:nvSpPr>
+          <p:cNvPr id="11" name="TextBox 10"/>
+          <p:cNvSpPr txBox="1"/>
+          <p:nvPr/>
+        </p:nvSpPr>
+        <p:spPr>
+          <a:xfrm>
+            <a:off x="5239512" y="2468880"/>
+            <a:ext cx="594360" cy="219456"/>
+          </a:xfrm>
+          <a:prstGeom prst="rect">
+            <a:avLst/>
+          </a:prstGeom>
+          <a:noFill/>
+        </p:spPr>
+        <p:txBody>
+          <a:bodyPr wrap="square" lIns="73152" rIns="73152" tIns="36576" bIns="36576">
+            <a:spAutoFit/>
+          </a:bodyPr>
+          <a:lstStyle/>
+          <a:p>
+            <a:pPr algn="l">
+              <a:spcAft>
+                <a:spcPts val="0"/>
+              </a:spcAft>
+              <a:defRPr sz="1400" b="1">
+                <a:solidFill>
+                  <a:srgbClr val="225B9B"/>
+                </a:solidFill>
+                <a:latin typeface="Noto Sans CJK KR"/>
+              </a:defRPr>
+            </a:pPr>
+            <a:r>
+              <a:t>1.</a:t>
+            </a:r>
+          </a:p>
+        </p:txBody>
+      </p:sp>
+      <p:sp>
+        <p:nvSpPr>
+          <p:cNvPr id="12" name="TextBox 11"/>
+          <p:cNvSpPr txBox="1"/>
+          <p:nvPr/>
+        </p:nvSpPr>
+        <p:spPr>
+          <a:xfrm>
+            <a:off x="5596128" y="2450592"/>
+            <a:ext cx="5696712" cy="493776"/>
+          </a:xfrm>
+          <a:prstGeom prst="rect">
+            <a:avLst/>
+          </a:prstGeom>
+          <a:noFill/>
+        </p:spPr>
+        <p:txBody>
+          <a:bodyPr wrap="square" lIns="73152" rIns="73152" tIns="36576" bIns="36576">
+            <a:spAutoFit/>
+          </a:bodyPr>
+          <a:lstStyle/>
+          <a:p>
+            <a:pPr algn="l">
+              <a:spcAft>
+                <a:spcPts val="0"/>
+              </a:spcAft>
+              <a:defRPr sz="1300" b="0">
+                <a:solidFill>
+                  <a:srgbClr val="122C4E"/>
+                </a:solidFill>
+                <a:latin typeface="Noto Sans CJK KR"/>
+              </a:defRPr>
+            </a:pPr>
+            <a:r>
+              <a:t>뜻: launch가 시작할 모든 node와 설정을 담는 목록을 만듭니다.</a:t>
+            </a:r>
+          </a:p>
+        </p:txBody>
+      </p:sp>
+      <p:sp>
+        <p:nvSpPr>
+          <p:cNvPr id="13" name="TextBox 12"/>
+          <p:cNvSpPr txBox="1"/>
+          <p:nvPr/>
+        </p:nvSpPr>
+        <p:spPr>
+          <a:xfrm>
+            <a:off x="5596128" y="3108960"/>
+            <a:ext cx="5696712" cy="457200"/>
+          </a:xfrm>
+          <a:prstGeom prst="rect">
+            <a:avLst/>
+          </a:prstGeom>
+          <a:noFill/>
+        </p:spPr>
+        <p:txBody>
+          <a:bodyPr wrap="square" lIns="73152" rIns="73152" tIns="36576" bIns="36576">
+            <a:spAutoFit/>
+          </a:bodyPr>
+          <a:lstStyle/>
+          <a:p>
+            <a:pPr algn="l">
+              <a:spcAft>
+                <a:spcPts val="0"/>
+              </a:spcAft>
+              <a:defRPr sz="1200" b="0">
                 <a:solidFill>
                   <a:srgbClr val="2A8B5A"/>
                 </a:solidFill>
@@ -9339,38 +10479,184 @@
               </a:defRPr>
             </a:pPr>
             <a:r>
-              <a:t>확인</a:t>
-            </a:r>
-          </a:p>
-        </p:txBody>
-      </p:sp>
-      <p:sp>
-        <p:nvSpPr>
-          <p:cNvPr id="11" name="TextBox 10"/>
-          <p:cNvSpPr txBox="1"/>
-          <p:nvPr/>
-        </p:nvSpPr>
-        <p:spPr>
-          <a:xfrm>
-            <a:off x="768096" y="5742432"/>
-            <a:ext cx="10561320" cy="347472"/>
-          </a:xfrm>
-          <a:prstGeom prst="rect">
-            <a:avLst/>
-          </a:prstGeom>
-          <a:noFill/>
-        </p:spPr>
-        <p:txBody>
-          <a:bodyPr wrap="square" lIns="73152" rIns="73152" tIns="36576" bIns="36576">
-            <a:spAutoFit/>
-          </a:bodyPr>
-          <a:lstStyle/>
-          <a:p>
-            <a:pPr algn="l">
-              <a:spcAft>
-                <a:spcPts val="0"/>
-              </a:spcAft>
-              <a:defRPr sz="1800" b="0">
+              <a:t>실행에서: `ros2 launch` 한 명령이 여러 구성 요소를 함께 시작합니다.</a:t>
+            </a:r>
+          </a:p>
+        </p:txBody>
+      </p:sp>
+      <p:sp>
+        <p:nvSpPr>
+          <p:cNvPr id="14" name="Rounded Rectangle 13"/>
+          <p:cNvSpPr/>
+          <p:nvPr/>
+        </p:nvSpPr>
+        <p:spPr>
+          <a:xfrm>
+            <a:off x="658368" y="4078224"/>
+            <a:ext cx="4160520" cy="1417320"/>
+          </a:xfrm>
+          <a:prstGeom prst="roundRect">
+            <a:avLst/>
+          </a:prstGeom>
+          <a:solidFill>
+            <a:srgbClr val="1D232D"/>
+          </a:solidFill>
+          <a:ln>
+            <a:solidFill>
+              <a:srgbClr val="1D232D"/>
+            </a:solidFill>
+          </a:ln>
+        </p:spPr>
+        <p:style>
+          <a:lnRef idx="1">
+            <a:schemeClr val="accent1"/>
+          </a:lnRef>
+          <a:fillRef idx="3">
+            <a:schemeClr val="accent1"/>
+          </a:fillRef>
+          <a:effectRef idx="2">
+            <a:schemeClr val="accent1"/>
+          </a:effectRef>
+          <a:fontRef idx="minor">
+            <a:schemeClr val="lt1"/>
+          </a:fontRef>
+        </p:style>
+        <p:txBody>
+          <a:bodyPr rtlCol="0" anchor="ctr" wrap="square" lIns="73152" rIns="73152" tIns="36576" bIns="36576"/>
+          <a:lstStyle/>
+          <a:p>
+            <a:pPr algn="l">
+              <a:spcAft>
+                <a:spcPts val="0"/>
+              </a:spcAft>
+              <a:defRPr sz="1300" b="0">
+                <a:solidFill>
+                  <a:srgbClr val="FFFFFF"/>
+                </a:solidFill>
+                <a:latin typeface="DejaVu Sans Mono"/>
+              </a:defRPr>
+            </a:pPr>
+            <a:r>
+              <a:t>launch_arguments={'gz_args': '-r ' + world}.items()),</a:t>
+            </a:r>
+            <a:br/>
+            <a:r>
+              <a:t>Node(package='ros_gz_bridge',</a:t>
+            </a:r>
+          </a:p>
+        </p:txBody>
+      </p:sp>
+      <p:sp>
+        <p:nvSpPr>
+          <p:cNvPr id="15" name="Rounded Rectangle 14"/>
+          <p:cNvSpPr/>
+          <p:nvPr/>
+        </p:nvSpPr>
+        <p:spPr>
+          <a:xfrm>
+            <a:off x="5029200" y="4078224"/>
+            <a:ext cx="6537960" cy="1417320"/>
+          </a:xfrm>
+          <a:prstGeom prst="roundRect">
+            <a:avLst/>
+          </a:prstGeom>
+          <a:solidFill>
+            <a:srgbClr val="F4F7FB"/>
+          </a:solidFill>
+          <a:ln>
+            <a:solidFill>
+              <a:srgbClr val="225B9B"/>
+            </a:solidFill>
+          </a:ln>
+        </p:spPr>
+        <p:style>
+          <a:lnRef idx="1">
+            <a:schemeClr val="accent1"/>
+          </a:lnRef>
+          <a:fillRef idx="3">
+            <a:schemeClr val="accent1"/>
+          </a:fillRef>
+          <a:effectRef idx="2">
+            <a:schemeClr val="accent1"/>
+          </a:effectRef>
+          <a:fontRef idx="minor">
+            <a:schemeClr val="lt1"/>
+          </a:fontRef>
+        </p:style>
+        <p:txBody>
+          <a:bodyPr rtlCol="0" anchor="ctr"/>
+          <a:lstStyle/>
+          <a:p>
+            <a:pPr algn="ctr"/>
+          </a:p>
+        </p:txBody>
+      </p:sp>
+      <p:sp>
+        <p:nvSpPr>
+          <p:cNvPr id="16" name="TextBox 15"/>
+          <p:cNvSpPr txBox="1"/>
+          <p:nvPr/>
+        </p:nvSpPr>
+        <p:spPr>
+          <a:xfrm>
+            <a:off x="5239512" y="4187952"/>
+            <a:ext cx="594360" cy="219456"/>
+          </a:xfrm>
+          <a:prstGeom prst="rect">
+            <a:avLst/>
+          </a:prstGeom>
+          <a:noFill/>
+        </p:spPr>
+        <p:txBody>
+          <a:bodyPr wrap="square" lIns="73152" rIns="73152" tIns="36576" bIns="36576">
+            <a:spAutoFit/>
+          </a:bodyPr>
+          <a:lstStyle/>
+          <a:p>
+            <a:pPr algn="l">
+              <a:spcAft>
+                <a:spcPts val="0"/>
+              </a:spcAft>
+              <a:defRPr sz="1400" b="1">
+                <a:solidFill>
+                  <a:srgbClr val="225B9B"/>
+                </a:solidFill>
+                <a:latin typeface="Noto Sans CJK KR"/>
+              </a:defRPr>
+            </a:pPr>
+            <a:r>
+              <a:t>2.</a:t>
+            </a:r>
+          </a:p>
+        </p:txBody>
+      </p:sp>
+      <p:sp>
+        <p:nvSpPr>
+          <p:cNvPr id="17" name="TextBox 16"/>
+          <p:cNvSpPr txBox="1"/>
+          <p:nvPr/>
+        </p:nvSpPr>
+        <p:spPr>
+          <a:xfrm>
+            <a:off x="5596128" y="4169663"/>
+            <a:ext cx="5696712" cy="493776"/>
+          </a:xfrm>
+          <a:prstGeom prst="rect">
+            <a:avLst/>
+          </a:prstGeom>
+          <a:noFill/>
+        </p:spPr>
+        <p:txBody>
+          <a:bodyPr wrap="square" lIns="73152" rIns="73152" tIns="36576" bIns="36576">
+            <a:spAutoFit/>
+          </a:bodyPr>
+          <a:lstStyle/>
+          <a:p>
+            <a:pPr algn="l">
+              <a:spcAft>
+                <a:spcPts val="0"/>
+              </a:spcAft>
+              <a:defRPr sz="1300" b="0">
                 <a:solidFill>
                   <a:srgbClr val="122C4E"/>
                 </a:solidFill>
@@ -9378,7 +10664,85 @@
               </a:defRPr>
             </a:pPr>
             <a:r>
-              <a:t>출력에서 topic·frame·파일 이름 또는 성공 메시지를 찾고, 맞지 않으면 다음 파일로 가지 않습니다.</a:t>
+              <a:t>뜻: launch 안에서 시작할 ROS node 하나의 package·실행 이름을 지정합니다.</a:t>
+            </a:r>
+          </a:p>
+        </p:txBody>
+      </p:sp>
+      <p:sp>
+        <p:nvSpPr>
+          <p:cNvPr id="18" name="TextBox 17"/>
+          <p:cNvSpPr txBox="1"/>
+          <p:nvPr/>
+        </p:nvSpPr>
+        <p:spPr>
+          <a:xfrm>
+            <a:off x="5596128" y="4828032"/>
+            <a:ext cx="5696712" cy="457200"/>
+          </a:xfrm>
+          <a:prstGeom prst="rect">
+            <a:avLst/>
+          </a:prstGeom>
+          <a:noFill/>
+        </p:spPr>
+        <p:txBody>
+          <a:bodyPr wrap="square" lIns="73152" rIns="73152" tIns="36576" bIns="36576">
+            <a:spAutoFit/>
+          </a:bodyPr>
+          <a:lstStyle/>
+          <a:p>
+            <a:pPr algn="l">
+              <a:spcAft>
+                <a:spcPts val="0"/>
+              </a:spcAft>
+              <a:defRPr sz="1200" b="0">
+                <a:solidFill>
+                  <a:srgbClr val="2A8B5A"/>
+                </a:solidFill>
+                <a:latin typeface="Noto Sans CJK KR"/>
+              </a:defRPr>
+            </a:pPr>
+            <a:r>
+              <a:t>실행에서: 실행 뒤 `ros2 node list`에 이 node가 나타납니다.</a:t>
+            </a:r>
+          </a:p>
+        </p:txBody>
+      </p:sp>
+      <p:sp>
+        <p:nvSpPr>
+          <p:cNvPr id="19" name="TextBox 18"/>
+          <p:cNvSpPr txBox="1"/>
+          <p:nvPr/>
+        </p:nvSpPr>
+        <p:spPr>
+          <a:xfrm>
+            <a:off x="749808" y="6199632"/>
+            <a:ext cx="10698480" cy="182880"/>
+          </a:xfrm>
+          <a:prstGeom prst="rect">
+            <a:avLst/>
+          </a:prstGeom>
+          <a:noFill/>
+        </p:spPr>
+        <p:txBody>
+          <a:bodyPr wrap="square" lIns="73152" rIns="73152" tIns="36576" bIns="36576">
+            <a:spAutoFit/>
+          </a:bodyPr>
+          <a:lstStyle/>
+          <a:p>
+            <a:pPr algn="ctr">
+              <a:spcAft>
+                <a:spcPts val="0"/>
+              </a:spcAft>
+              <a:defRPr sz="1100" b="0">
+                <a:solidFill>
+                  <a:srgbClr val="5C6672"/>
+                </a:solidFill>
+                <a:latin typeface="Noto Sans CJK KR"/>
+              </a:defRPr>
+            </a:pPr>
+            <a:r>
+              <a:t>다음 코드 입력 슬라이드에서 이 줄을 발견하면, 방금 설명한 ‘뜻’과 ‘실행에서 보이는 변화’를 다시 말해 봅니다.</a:t>
             </a:r>
           </a:p>
         </p:txBody>
@@ -9435,7 +10799,7 @@
               </a:defRPr>
             </a:pPr>
             <a:r>
-              <a:t>구현 뒤 실행 2/2: launch가 YAML을 읽게 한다</a:t>
+              <a:t>구현 2/2: 코드 읽기 (3/3)</a:t>
             </a:r>
           </a:p>
         </p:txBody>
@@ -9474,7 +10838,7 @@
               </a:defRPr>
             </a:pPr>
             <a:r>
-              <a:t>방금 직접 만든 파일을 실행·검사하며 다음 파일로 넘어갈 기준을 만듭니다.</a:t>
+              <a:t>짧은 실제 코드 조각을 먼저 읽고, 다음 슬라이드에서 같은 코드를 직접 입력합니다.</a:t>
             </a:r>
           </a:p>
         </p:txBody>
@@ -9610,7 +10974,7 @@
               </a:defRPr>
             </a:pPr>
             <a:r>
-              <a:t>현재 단계 실행 2/2    |    현재 폴더 ~/ros2_curri/my_agv_ws    |    현재 터미널</a:t>
+              <a:t>현재 단계 코드 해설 2/2    |    현재 폴더 ~/ros2_curri/my_agv_ws    |    현재 터미널</a:t>
             </a:r>
           </a:p>
         </p:txBody>
@@ -9623,33 +10987,33 @@
         </p:nvSpPr>
         <p:spPr>
           <a:xfrm>
-            <a:off x="676656" y="1764792"/>
-            <a:ext cx="1828800" cy="347472"/>
-          </a:xfrm>
-          <a:prstGeom prst="rect">
-            <a:avLst/>
-          </a:prstGeom>
-          <a:noFill/>
-        </p:spPr>
-        <p:txBody>
-          <a:bodyPr wrap="square" lIns="73152" rIns="73152" tIns="36576" bIns="36576">
-            <a:spAutoFit/>
-          </a:bodyPr>
-          <a:lstStyle/>
-          <a:p>
-            <a:pPr algn="l">
-              <a:spcAft>
-                <a:spcPts val="0"/>
-              </a:spcAft>
-              <a:defRPr sz="1800" b="1">
+            <a:off x="694944" y="1618488"/>
+            <a:ext cx="10789920" cy="274320"/>
+          </a:xfrm>
+          <a:prstGeom prst="rect">
+            <a:avLst/>
+          </a:prstGeom>
+          <a:noFill/>
+        </p:spPr>
+        <p:txBody>
+          <a:bodyPr wrap="square" lIns="73152" rIns="73152" tIns="36576" bIns="36576">
+            <a:spAutoFit/>
+          </a:bodyPr>
+          <a:lstStyle/>
+          <a:p>
+            <a:pPr algn="l">
+              <a:spcAft>
+                <a:spcPts val="0"/>
+              </a:spcAft>
+              <a:defRPr sz="1300" b="1">
                 <a:solidFill>
                   <a:srgbClr val="225B9B"/>
                 </a:solidFill>
-                <a:latin typeface="Noto Sans CJK KR"/>
-              </a:defRPr>
-            </a:pPr>
-            <a:r>
-              <a:t>왜 하는가</a:t>
+                <a:latin typeface="DejaVu Sans Mono"/>
+              </a:defRPr>
+            </a:pPr>
+            <a:r>
+              <a:t>~/ros2_curri/my_agv_ws/src/agv_gazebo/launch/gazebo.launch.py</a:t>
             </a:r>
           </a:p>
         </p:txBody>
@@ -9662,33 +11026,33 @@
         </p:nvSpPr>
         <p:spPr>
           <a:xfrm>
-            <a:off x="676656" y="2103120"/>
-            <a:ext cx="10789920" cy="512064"/>
-          </a:xfrm>
-          <a:prstGeom prst="rect">
-            <a:avLst/>
-          </a:prstGeom>
-          <a:noFill/>
-        </p:spPr>
-        <p:txBody>
-          <a:bodyPr wrap="square" lIns="73152" rIns="73152" tIns="36576" bIns="36576">
-            <a:spAutoFit/>
-          </a:bodyPr>
-          <a:lstStyle/>
-          <a:p>
-            <a:pPr algn="l">
-              <a:spcAft>
-                <a:spcPts val="0"/>
-              </a:spcAft>
-              <a:defRPr sz="2000" b="0">
-                <a:solidFill>
-                  <a:srgbClr val="122C4E"/>
-                </a:solidFill>
-                <a:latin typeface="Noto Sans CJK KR"/>
-              </a:defRPr>
-            </a:pPr>
-            <a:r>
-              <a:t>config_file은 package share 경로에서 찾도록 launch에 넣는다.</a:t>
+            <a:off x="694944" y="1938528"/>
+            <a:ext cx="10789920" cy="274320"/>
+          </a:xfrm>
+          <a:prstGeom prst="rect">
+            <a:avLst/>
+          </a:prstGeom>
+          <a:noFill/>
+        </p:spPr>
+        <p:txBody>
+          <a:bodyPr wrap="square" lIns="73152" rIns="73152" tIns="36576" bIns="36576">
+            <a:spAutoFit/>
+          </a:bodyPr>
+          <a:lstStyle/>
+          <a:p>
+            <a:pPr algn="ctr">
+              <a:spcAft>
+                <a:spcPts val="0"/>
+              </a:spcAft>
+              <a:defRPr sz="1500" b="1">
+                <a:solidFill>
+                  <a:srgbClr val="DB7E22"/>
+                </a:solidFill>
+                <a:latin typeface="Noto Sans CJK KR"/>
+              </a:defRPr>
+            </a:pPr>
+            <a:r>
+              <a:t>말로 먼저 답해 보세요: 이 줄은 무엇을 만들고, 실행하면 어디에서 확인할 수 있을까요?</a:t>
             </a:r>
           </a:p>
         </p:txBody>
@@ -9701,8 +11065,8 @@
         </p:nvSpPr>
         <p:spPr>
           <a:xfrm>
-            <a:off x="676656" y="2871216"/>
-            <a:ext cx="10835640" cy="2331720"/>
+            <a:off x="658368" y="2359152"/>
+            <a:ext cx="4160520" cy="1417320"/>
           </a:xfrm>
           <a:prstGeom prst="roundRect">
             <a:avLst/>
@@ -9738,7 +11102,7 @@
               <a:spcAft>
                 <a:spcPts val="0"/>
               </a:spcAft>
-              <a:defRPr sz="1600" b="0">
+              <a:defRPr sz="1300" b="0">
                 <a:solidFill>
                   <a:srgbClr val="FFFFFF"/>
                 </a:solidFill>
@@ -9746,46 +11110,165 @@
               </a:defRPr>
             </a:pPr>
             <a:r>
-              <a:t>colcon build --symlink-install --packages-select agv_gazebo</a:t>
+              <a:t>executable='parameter_bridge', parameters=[{'config_file':</a:t>
             </a:r>
             <a:br/>
             <a:r>
-              <a:t>source install/setup.bash</a:t>
-            </a:r>
-            <a:br/>
-            <a:r>
-              <a:t>ros2 launch agv_gazebo gazebo.launch.py</a:t>
-            </a:r>
-          </a:p>
-        </p:txBody>
-      </p:sp>
-      <p:sp>
-        <p:nvSpPr>
-          <p:cNvPr id="10" name="TextBox 9"/>
-          <p:cNvSpPr txBox="1"/>
-          <p:nvPr/>
-        </p:nvSpPr>
-        <p:spPr>
-          <a:xfrm>
-            <a:off x="768096" y="5468112"/>
-            <a:ext cx="1143000" cy="256032"/>
-          </a:xfrm>
-          <a:prstGeom prst="rect">
-            <a:avLst/>
-          </a:prstGeom>
-          <a:noFill/>
-        </p:spPr>
-        <p:txBody>
-          <a:bodyPr wrap="square" lIns="73152" rIns="73152" tIns="36576" bIns="36576">
-            <a:spAutoFit/>
-          </a:bodyPr>
-          <a:lstStyle/>
-          <a:p>
-            <a:pPr algn="l">
-              <a:spcAft>
-                <a:spcPts val="0"/>
-              </a:spcAft>
-              <a:defRPr sz="1800" b="1">
+              <a:t>os.path.join(share,</a:t>
+            </a:r>
+          </a:p>
+        </p:txBody>
+      </p:sp>
+      <p:sp>
+        <p:nvSpPr>
+          <p:cNvPr id="10" name="Rounded Rectangle 9"/>
+          <p:cNvSpPr/>
+          <p:nvPr/>
+        </p:nvSpPr>
+        <p:spPr>
+          <a:xfrm>
+            <a:off x="5029200" y="2359152"/>
+            <a:ext cx="6537960" cy="1417320"/>
+          </a:xfrm>
+          <a:prstGeom prst="roundRect">
+            <a:avLst/>
+          </a:prstGeom>
+          <a:solidFill>
+            <a:srgbClr val="F4F7FB"/>
+          </a:solidFill>
+          <a:ln>
+            <a:solidFill>
+              <a:srgbClr val="225B9B"/>
+            </a:solidFill>
+          </a:ln>
+        </p:spPr>
+        <p:style>
+          <a:lnRef idx="1">
+            <a:schemeClr val="accent1"/>
+          </a:lnRef>
+          <a:fillRef idx="3">
+            <a:schemeClr val="accent1"/>
+          </a:fillRef>
+          <a:effectRef idx="2">
+            <a:schemeClr val="accent1"/>
+          </a:effectRef>
+          <a:fontRef idx="minor">
+            <a:schemeClr val="lt1"/>
+          </a:fontRef>
+        </p:style>
+        <p:txBody>
+          <a:bodyPr rtlCol="0" anchor="ctr"/>
+          <a:lstStyle/>
+          <a:p>
+            <a:pPr algn="ctr"/>
+          </a:p>
+        </p:txBody>
+      </p:sp>
+      <p:sp>
+        <p:nvSpPr>
+          <p:cNvPr id="11" name="TextBox 10"/>
+          <p:cNvSpPr txBox="1"/>
+          <p:nvPr/>
+        </p:nvSpPr>
+        <p:spPr>
+          <a:xfrm>
+            <a:off x="5239512" y="2468880"/>
+            <a:ext cx="594360" cy="219456"/>
+          </a:xfrm>
+          <a:prstGeom prst="rect">
+            <a:avLst/>
+          </a:prstGeom>
+          <a:noFill/>
+        </p:spPr>
+        <p:txBody>
+          <a:bodyPr wrap="square" lIns="73152" rIns="73152" tIns="36576" bIns="36576">
+            <a:spAutoFit/>
+          </a:bodyPr>
+          <a:lstStyle/>
+          <a:p>
+            <a:pPr algn="l">
+              <a:spcAft>
+                <a:spcPts val="0"/>
+              </a:spcAft>
+              <a:defRPr sz="1400" b="1">
+                <a:solidFill>
+                  <a:srgbClr val="225B9B"/>
+                </a:solidFill>
+                <a:latin typeface="Noto Sans CJK KR"/>
+              </a:defRPr>
+            </a:pPr>
+            <a:r>
+              <a:t>1.</a:t>
+            </a:r>
+          </a:p>
+        </p:txBody>
+      </p:sp>
+      <p:sp>
+        <p:nvSpPr>
+          <p:cNvPr id="12" name="TextBox 11"/>
+          <p:cNvSpPr txBox="1"/>
+          <p:nvPr/>
+        </p:nvSpPr>
+        <p:spPr>
+          <a:xfrm>
+            <a:off x="5596128" y="2450592"/>
+            <a:ext cx="5696712" cy="493776"/>
+          </a:xfrm>
+          <a:prstGeom prst="rect">
+            <a:avLst/>
+          </a:prstGeom>
+          <a:noFill/>
+        </p:spPr>
+        <p:txBody>
+          <a:bodyPr wrap="square" lIns="73152" rIns="73152" tIns="36576" bIns="36576">
+            <a:spAutoFit/>
+          </a:bodyPr>
+          <a:lstStyle/>
+          <a:p>
+            <a:pPr algn="l">
+              <a:spcAft>
+                <a:spcPts val="0"/>
+              </a:spcAft>
+              <a:defRPr sz="1300" b="0">
+                <a:solidFill>
+                  <a:srgbClr val="122C4E"/>
+                </a:solidFill>
+                <a:latin typeface="Noto Sans CJK KR"/>
+              </a:defRPr>
+            </a:pPr>
+            <a:r>
+              <a:t>뜻: YAML/값을 node에 parameter로 전달하는 연결 지점입니다.</a:t>
+            </a:r>
+          </a:p>
+        </p:txBody>
+      </p:sp>
+      <p:sp>
+        <p:nvSpPr>
+          <p:cNvPr id="13" name="TextBox 12"/>
+          <p:cNvSpPr txBox="1"/>
+          <p:nvPr/>
+        </p:nvSpPr>
+        <p:spPr>
+          <a:xfrm>
+            <a:off x="5596128" y="3108960"/>
+            <a:ext cx="5696712" cy="457200"/>
+          </a:xfrm>
+          <a:prstGeom prst="rect">
+            <a:avLst/>
+          </a:prstGeom>
+          <a:noFill/>
+        </p:spPr>
+        <p:txBody>
+          <a:bodyPr wrap="square" lIns="73152" rIns="73152" tIns="36576" bIns="36576">
+            <a:spAutoFit/>
+          </a:bodyPr>
+          <a:lstStyle/>
+          <a:p>
+            <a:pPr algn="l">
+              <a:spcAft>
+                <a:spcPts val="0"/>
+              </a:spcAft>
+              <a:defRPr sz="1200" b="0">
                 <a:solidFill>
                   <a:srgbClr val="2A8B5A"/>
                 </a:solidFill>
@@ -9793,46 +11276,46 @@
               </a:defRPr>
             </a:pPr>
             <a:r>
-              <a:t>확인</a:t>
-            </a:r>
-          </a:p>
-        </p:txBody>
-      </p:sp>
-      <p:sp>
-        <p:nvSpPr>
-          <p:cNvPr id="11" name="TextBox 10"/>
-          <p:cNvSpPr txBox="1"/>
-          <p:nvPr/>
-        </p:nvSpPr>
-        <p:spPr>
-          <a:xfrm>
-            <a:off x="768096" y="5742432"/>
-            <a:ext cx="10561320" cy="347472"/>
-          </a:xfrm>
-          <a:prstGeom prst="rect">
-            <a:avLst/>
-          </a:prstGeom>
-          <a:noFill/>
-        </p:spPr>
-        <p:txBody>
-          <a:bodyPr wrap="square" lIns="73152" rIns="73152" tIns="36576" bIns="36576">
-            <a:spAutoFit/>
-          </a:bodyPr>
-          <a:lstStyle/>
-          <a:p>
-            <a:pPr algn="l">
-              <a:spcAft>
-                <a:spcPts val="0"/>
-              </a:spcAft>
-              <a:defRPr sz="1800" b="0">
-                <a:solidFill>
-                  <a:srgbClr val="122C4E"/>
-                </a:solidFill>
-                <a:latin typeface="Noto Sans CJK KR"/>
-              </a:defRPr>
-            </a:pPr>
-            <a:r>
-              <a:t>출력에서 topic·frame·파일 이름 또는 성공 메시지를 찾고, 맞지 않으면 다음 파일로 가지 않습니다.</a:t>
+              <a:t>실행에서: 파일 값이 node parameter와 실행 결과에 반영됩니다.</a:t>
+            </a:r>
+          </a:p>
+        </p:txBody>
+      </p:sp>
+      <p:sp>
+        <p:nvSpPr>
+          <p:cNvPr id="14" name="TextBox 13"/>
+          <p:cNvSpPr txBox="1"/>
+          <p:nvPr/>
+        </p:nvSpPr>
+        <p:spPr>
+          <a:xfrm>
+            <a:off x="749808" y="6199632"/>
+            <a:ext cx="10698480" cy="182880"/>
+          </a:xfrm>
+          <a:prstGeom prst="rect">
+            <a:avLst/>
+          </a:prstGeom>
+          <a:noFill/>
+        </p:spPr>
+        <p:txBody>
+          <a:bodyPr wrap="square" lIns="73152" rIns="73152" tIns="36576" bIns="36576">
+            <a:spAutoFit/>
+          </a:bodyPr>
+          <a:lstStyle/>
+          <a:p>
+            <a:pPr algn="ctr">
+              <a:spcAft>
+                <a:spcPts val="0"/>
+              </a:spcAft>
+              <a:defRPr sz="1100" b="0">
+                <a:solidFill>
+                  <a:srgbClr val="5C6672"/>
+                </a:solidFill>
+                <a:latin typeface="Noto Sans CJK KR"/>
+              </a:defRPr>
+            </a:pPr>
+            <a:r>
+              <a:t>다음 코드 입력 슬라이드에서 이 줄을 발견하면, 방금 설명한 ‘뜻’과 ‘실행에서 보이는 변화’를 다시 말해 봅니다.</a:t>
             </a:r>
           </a:p>
         </p:txBody>
@@ -9889,7 +11372,7 @@
               </a:defRPr>
             </a:pPr>
             <a:r>
-              <a:t>build → source → run 순서로 실행한다</a:t>
+              <a:t>구현 2/2: 코드 입력 (1/2)</a:t>
             </a:r>
           </a:p>
         </p:txBody>
@@ -9928,7 +11411,7 @@
               </a:defRPr>
             </a:pPr>
             <a:r>
-              <a:t>새 파일 또는 수정 파일은 build와 source 뒤에만 실행 이름·설정에 반영됩니다.</a:t>
+              <a:t>~/ros2_curri/my_agv_ws/src/agv_gazebo/launch/gazebo.launch.py</a:t>
             </a:r>
           </a:p>
         </p:txBody>
@@ -10064,23 +11547,124 @@
               </a:defRPr>
             </a:pPr>
             <a:r>
-              <a:t>현재 단계 실행    |    현재 폴더 ~/ros2_curri/my_agv_ws    |    현재 터미널</a:t>
-            </a:r>
-          </a:p>
-        </p:txBody>
-      </p:sp>
-      <p:sp>
-        <p:nvSpPr>
-          <p:cNvPr id="7" name="Rounded Rectangle 6"/>
+              <a:t>현재 단계 파일 2/2 · 입력 1/2    |    현재 폴더 ~/ros2_curri/my_agv_ws    |    현재 터미널</a:t>
+            </a:r>
+          </a:p>
+        </p:txBody>
+      </p:sp>
+      <p:sp>
+        <p:nvSpPr>
+          <p:cNvPr id="7" name="TextBox 6"/>
+          <p:cNvSpPr txBox="1"/>
+          <p:nvPr/>
+        </p:nvSpPr>
+        <p:spPr>
+          <a:xfrm>
+            <a:off x="658368" y="1609344"/>
+            <a:ext cx="10972800" cy="384048"/>
+          </a:xfrm>
+          <a:prstGeom prst="rect">
+            <a:avLst/>
+          </a:prstGeom>
+          <a:noFill/>
+        </p:spPr>
+        <p:txBody>
+          <a:bodyPr wrap="square" lIns="73152" rIns="73152" tIns="36576" bIns="36576">
+            <a:spAutoFit/>
+          </a:bodyPr>
+          <a:lstStyle/>
+          <a:p>
+            <a:pPr algn="l">
+              <a:spcAft>
+                <a:spcPts val="0"/>
+              </a:spcAft>
+              <a:defRPr sz="1400" b="1">
+                <a:solidFill>
+                  <a:srgbClr val="122C4E"/>
+                </a:solidFill>
+                <a:latin typeface="Noto Sans CJK KR"/>
+              </a:defRPr>
+            </a:pPr>
+            <a:r>
+              <a:t>이 블록이 하는 일: launch argument와 Node 구성을 입력합니다. package·executable·parameter 경로가 실제 이름과 같아야 합니다.</a:t>
+            </a:r>
+          </a:p>
+        </p:txBody>
+      </p:sp>
+      <p:sp>
+        <p:nvSpPr>
+          <p:cNvPr id="8" name="Rectangle 7"/>
           <p:cNvSpPr/>
           <p:nvPr/>
         </p:nvSpPr>
         <p:spPr>
           <a:xfrm>
-            <a:off x="658368" y="1700784"/>
-            <a:ext cx="10972800" cy="3182112"/>
-          </a:xfrm>
-          <a:prstGeom prst="roundRect">
+            <a:off x="658368" y="1956816"/>
+            <a:ext cx="10972800" cy="603504"/>
+          </a:xfrm>
+          <a:prstGeom prst="rect">
+            <a:avLst/>
+          </a:prstGeom>
+          <a:solidFill>
+            <a:srgbClr val="F4F7FB"/>
+          </a:solidFill>
+          <a:ln>
+            <a:solidFill>
+              <a:srgbClr val="F4F7FB"/>
+            </a:solidFill>
+          </a:ln>
+        </p:spPr>
+        <p:style>
+          <a:lnRef idx="1">
+            <a:schemeClr val="accent1"/>
+          </a:lnRef>
+          <a:fillRef idx="3">
+            <a:schemeClr val="accent1"/>
+          </a:fillRef>
+          <a:effectRef idx="2">
+            <a:schemeClr val="accent1"/>
+          </a:effectRef>
+          <a:fontRef idx="minor">
+            <a:schemeClr val="lt1"/>
+          </a:fontRef>
+        </p:style>
+        <p:txBody>
+          <a:bodyPr rtlCol="0" anchor="ctr" wrap="square" lIns="73152" rIns="73152" tIns="36576" bIns="36576"/>
+          <a:lstStyle/>
+          <a:p>
+            <a:pPr algn="l">
+              <a:spcAft>
+                <a:spcPts val="0"/>
+              </a:spcAft>
+              <a:defRPr sz="1300" b="0">
+                <a:solidFill>
+                  <a:srgbClr val="122C4E"/>
+                </a:solidFill>
+                <a:latin typeface="DejaVu Sans Mono"/>
+              </a:defRPr>
+            </a:pPr>
+            <a:r>
+              <a:t>현재 열린 파일: ~/ros2_curri/my_agv_ws/src/agv_gazebo/launch/gazebo.launch.py</a:t>
+            </a:r>
+            <a:br/>
+            <a:r>
+              <a:t>아래 코드만 입력 → Ctrl+O → Enter로 저장 → 다음 블록으로 이동</a:t>
+            </a:r>
+          </a:p>
+        </p:txBody>
+      </p:sp>
+      <p:sp>
+        <p:nvSpPr>
+          <p:cNvPr id="9" name="Rectangle 8"/>
+          <p:cNvSpPr/>
+          <p:nvPr/>
+        </p:nvSpPr>
+        <p:spPr>
+          <a:xfrm>
+            <a:off x="658368" y="2706624"/>
+            <a:ext cx="10972800" cy="3364992"/>
+          </a:xfrm>
+          <a:prstGeom prst="rect">
             <a:avLst/>
           </a:prstGeom>
           <a:solidFill>
@@ -10107,14 +11691,14 @@
           </a:fontRef>
         </p:style>
         <p:txBody>
-          <a:bodyPr rtlCol="0" anchor="ctr" wrap="square" lIns="73152" rIns="73152" tIns="36576" bIns="36576"/>
-          <a:lstStyle/>
-          <a:p>
-            <a:pPr algn="l">
-              <a:spcAft>
-                <a:spcPts val="0"/>
-              </a:spcAft>
-              <a:defRPr sz="1600" b="0">
+          <a:bodyPr rtlCol="0" anchor="ctr" wrap="square" lIns="164592" rIns="164592" tIns="109728" bIns="36576"/>
+          <a:lstStyle/>
+          <a:p>
+            <a:pPr algn="l">
+              <a:spcAft>
+                <a:spcPts val="0"/>
+              </a:spcAft>
+              <a:defRPr sz="1400" b="0">
                 <a:solidFill>
                   <a:srgbClr val="FFFFFF"/>
                 </a:solidFill>
@@ -10122,89 +11706,87 @@
               </a:defRPr>
             </a:pPr>
             <a:r>
-              <a:t>source ~/ros2_curri/my_agv_ws/install/setup.bash</a:t>
+              <a:t>import os</a:t>
             </a:r>
             <a:br/>
             <a:r>
-              <a:t>ros2 launch agv_gazebo gazebo.launch.py</a:t>
-            </a:r>
-          </a:p>
-        </p:txBody>
-      </p:sp>
-      <p:sp>
-        <p:nvSpPr>
-          <p:cNvPr id="8" name="TextBox 7"/>
-          <p:cNvSpPr txBox="1"/>
-          <p:nvPr/>
-        </p:nvSpPr>
-        <p:spPr>
-          <a:xfrm>
-            <a:off x="786384" y="5239512"/>
-            <a:ext cx="1261872" cy="237744"/>
-          </a:xfrm>
-          <a:prstGeom prst="rect">
-            <a:avLst/>
-          </a:prstGeom>
-          <a:noFill/>
-        </p:spPr>
-        <p:txBody>
-          <a:bodyPr wrap="square" lIns="73152" rIns="73152" tIns="36576" bIns="36576">
-            <a:spAutoFit/>
-          </a:bodyPr>
-          <a:lstStyle/>
-          <a:p>
-            <a:pPr algn="l">
-              <a:spcAft>
-                <a:spcPts val="0"/>
-              </a:spcAft>
-              <a:defRPr sz="1800" b="1">
-                <a:solidFill>
-                  <a:srgbClr val="2A8B5A"/>
-                </a:solidFill>
-                <a:latin typeface="Noto Sans CJK KR"/>
-              </a:defRPr>
-            </a:pPr>
-            <a:r>
-              <a:t>확인 기준</a:t>
-            </a:r>
-          </a:p>
-        </p:txBody>
-      </p:sp>
-      <p:sp>
-        <p:nvSpPr>
-          <p:cNvPr id="9" name="TextBox 8"/>
-          <p:cNvSpPr txBox="1"/>
-          <p:nvPr/>
-        </p:nvSpPr>
-        <p:spPr>
-          <a:xfrm>
-            <a:off x="786384" y="5532120"/>
-            <a:ext cx="10469880" cy="420624"/>
-          </a:xfrm>
-          <a:prstGeom prst="rect">
-            <a:avLst/>
-          </a:prstGeom>
-          <a:noFill/>
-        </p:spPr>
-        <p:txBody>
-          <a:bodyPr wrap="square" lIns="73152" rIns="73152" tIns="36576" bIns="36576">
-            <a:spAutoFit/>
-          </a:bodyPr>
-          <a:lstStyle/>
-          <a:p>
-            <a:pPr algn="l">
-              <a:spcAft>
-                <a:spcPts val="0"/>
-              </a:spcAft>
-              <a:defRPr sz="1800" b="0">
-                <a:solidFill>
-                  <a:srgbClr val="122C4E"/>
-                </a:solidFill>
-                <a:latin typeface="Noto Sans CJK KR"/>
-              </a:defRPr>
-            </a:pPr>
-            <a:r>
-              <a:t>/cmd_vel ROS→Gazebo 및 odom/scan/imu/camera/clock Gazebo→ROS 매핑을 확인한다.</a:t>
+              <a:t>from ament_index_python.packages import get_package_share_directory</a:t>
+            </a:r>
+            <a:br/>
+            <a:r>
+              <a:t>from launch import LaunchDescription</a:t>
+            </a:r>
+            <a:br/>
+            <a:r>
+              <a:t>from launch.actions import IncludeLaunchDescription, SetEnvironmentVariable</a:t>
+            </a:r>
+            <a:br/>
+            <a:r>
+              <a:t>from launch.launch_description_sources import PythonLaunchDescriptionSource</a:t>
+            </a:r>
+            <a:br/>
+            <a:r>
+              <a:t>from launch_ros.actions import Node</a:t>
+            </a:r>
+            <a:br/>
+            <a:br/>
+            <a:r>
+              <a:t>def generate_launch_description():</a:t>
+            </a:r>
+            <a:br/>
+            <a:r>
+              <a:t>    share = get_package_share_directory('agv_gazebo')</a:t>
+            </a:r>
+            <a:br/>
+            <a:r>
+              <a:t>    world = os.path.join(share, 'worlds', 'warehouse.sdf')</a:t>
+            </a:r>
+            <a:br/>
+            <a:r>
+              <a:t>    models = os.path.join(share, 'models')</a:t>
+            </a:r>
+            <a:br/>
+            <a:r>
+              <a:t>    previous = os.environ.get('GZ_SIM_RESOURCE_PATH', '')</a:t>
+            </a:r>
+          </a:p>
+        </p:txBody>
+      </p:sp>
+      <p:sp>
+        <p:nvSpPr>
+          <p:cNvPr id="10" name="TextBox 9"/>
+          <p:cNvSpPr txBox="1"/>
+          <p:nvPr/>
+        </p:nvSpPr>
+        <p:spPr>
+          <a:xfrm>
+            <a:off x="749808" y="6181344"/>
+            <a:ext cx="10789920" cy="201168"/>
+          </a:xfrm>
+          <a:prstGeom prst="rect">
+            <a:avLst/>
+          </a:prstGeom>
+          <a:noFill/>
+        </p:spPr>
+        <p:txBody>
+          <a:bodyPr wrap="square" lIns="73152" rIns="73152" tIns="36576" bIns="36576">
+            <a:spAutoFit/>
+          </a:bodyPr>
+          <a:lstStyle/>
+          <a:p>
+            <a:pPr algn="l">
+              <a:spcAft>
+                <a:spcPts val="0"/>
+              </a:spcAft>
+              <a:defRPr sz="1000" b="0">
+                <a:solidFill>
+                  <a:srgbClr val="5C6672"/>
+                </a:solidFill>
+                <a:latin typeface="Noto Sans CJK KR"/>
+              </a:defRPr>
+            </a:pPr>
+            <a:r>
+              <a:t>입력 1/2 · 이 파일의 다음 코드 블록이 바로 다음 슬라이드에 이어집니다.</a:t>
             </a:r>
           </a:p>
         </p:txBody>
@@ -10261,7 +11843,7 @@
               </a:defRPr>
             </a:pPr>
             <a:r>
-              <a:t>정상 결과: 실제 환경에서 확인한 출력</a:t>
+              <a:t>구현 2/2: 코드 입력 (2/2)</a:t>
             </a:r>
           </a:p>
         </p:txBody>
@@ -10300,7 +11882,7 @@
               </a:defRPr>
             </a:pPr>
             <a:r>
-              <a:t>실제 ROS 2 환경의 파일·패키지·구성 검증 로그</a:t>
+              <a:t>~/ros2_curri/my_agv_ws/src/agv_gazebo/launch/gazebo.launch.py</a:t>
             </a:r>
           </a:p>
         </p:txBody>
@@ -10383,30 +11965,64 @@
           </a:p>
         </p:txBody>
       </p:sp>
-      <p:pic>
-        <p:nvPicPr>
-          <p:cNvPr id="6" name="Picture 5" descr="validation_terminal.png"/>
-          <p:cNvPicPr>
-            <a:picLocks noChangeAspect="1"/>
-          </p:cNvPicPr>
-          <p:nvPr/>
-        </p:nvPicPr>
-        <p:blipFill>
-          <a:blip r:embed="rId2"/>
-          <a:stretch>
-            <a:fillRect/>
-          </a:stretch>
-        </p:blipFill>
-        <p:spPr>
-          <a:xfrm>
-            <a:off x="2855133" y="1353312"/>
-            <a:ext cx="6478685" cy="4800600"/>
-          </a:xfrm>
-          <a:prstGeom prst="rect">
-            <a:avLst/>
-          </a:prstGeom>
-        </p:spPr>
-      </p:pic>
+      <p:sp>
+        <p:nvSpPr>
+          <p:cNvPr id="6" name="Rectangle 5"/>
+          <p:cNvSpPr/>
+          <p:nvPr/>
+        </p:nvSpPr>
+        <p:spPr>
+          <a:xfrm>
+            <a:off x="566928" y="1188720"/>
+            <a:ext cx="11064240" cy="347472"/>
+          </a:xfrm>
+          <a:prstGeom prst="rect">
+            <a:avLst/>
+          </a:prstGeom>
+          <a:solidFill>
+            <a:srgbClr val="F4F7FB"/>
+          </a:solidFill>
+          <a:ln>
+            <a:solidFill>
+              <a:srgbClr val="F4F7FB"/>
+            </a:solidFill>
+          </a:ln>
+        </p:spPr>
+        <p:style>
+          <a:lnRef idx="1">
+            <a:schemeClr val="accent1"/>
+          </a:lnRef>
+          <a:fillRef idx="3">
+            <a:schemeClr val="accent1"/>
+          </a:fillRef>
+          <a:effectRef idx="2">
+            <a:schemeClr val="accent1"/>
+          </a:effectRef>
+          <a:fontRef idx="minor">
+            <a:schemeClr val="lt1"/>
+          </a:fontRef>
+        </p:style>
+        <p:txBody>
+          <a:bodyPr rtlCol="0" anchor="ctr" wrap="square" lIns="73152" rIns="73152" tIns="36576" bIns="36576"/>
+          <a:lstStyle/>
+          <a:p>
+            <a:pPr algn="l">
+              <a:spcAft>
+                <a:spcPts val="0"/>
+              </a:spcAft>
+              <a:defRPr sz="1300" b="1">
+                <a:solidFill>
+                  <a:srgbClr val="122C4E"/>
+                </a:solidFill>
+                <a:latin typeface="Noto Sans CJK KR"/>
+              </a:defRPr>
+            </a:pPr>
+            <a:r>
+              <a:t>현재 단계 파일 2/2 · 입력 2/2    |    현재 폴더 ~/ros2_curri/my_agv_ws    |    현재 터미널</a:t>
+            </a:r>
+          </a:p>
+        </p:txBody>
+      </p:sp>
       <p:sp>
         <p:nvSpPr>
           <p:cNvPr id="7" name="TextBox 6"/>
@@ -10415,33 +12031,216 @@
         </p:nvSpPr>
         <p:spPr>
           <a:xfrm>
-            <a:off x="777240" y="6144768"/>
-            <a:ext cx="10607040" cy="310896"/>
-          </a:xfrm>
-          <a:prstGeom prst="rect">
-            <a:avLst/>
-          </a:prstGeom>
-          <a:noFill/>
-        </p:spPr>
-        <p:txBody>
-          <a:bodyPr wrap="square" lIns="73152" rIns="73152" tIns="36576" bIns="36576">
-            <a:spAutoFit/>
-          </a:bodyPr>
-          <a:lstStyle/>
-          <a:p>
-            <a:pPr algn="ctr">
-              <a:spcAft>
-                <a:spcPts val="0"/>
-              </a:spcAft>
-              <a:defRPr sz="1100" b="1">
-                <a:solidFill>
-                  <a:srgbClr val="2A8B5A"/>
-                </a:solidFill>
-                <a:latin typeface="Noto Sans CJK KR"/>
-              </a:defRPr>
-            </a:pPr>
-            <a:r>
-              <a:t>화면에서 확인: ① 명령/설정  ② 정상 출력 또는 화면  ③ 다음 검증 명령으로 재확인</a:t>
+            <a:off x="658368" y="1609344"/>
+            <a:ext cx="10972800" cy="384048"/>
+          </a:xfrm>
+          <a:prstGeom prst="rect">
+            <a:avLst/>
+          </a:prstGeom>
+          <a:noFill/>
+        </p:spPr>
+        <p:txBody>
+          <a:bodyPr wrap="square" lIns="73152" rIns="73152" tIns="36576" bIns="36576">
+            <a:spAutoFit/>
+          </a:bodyPr>
+          <a:lstStyle/>
+          <a:p>
+            <a:pPr algn="l">
+              <a:spcAft>
+                <a:spcPts val="0"/>
+              </a:spcAft>
+              <a:defRPr sz="1400" b="1">
+                <a:solidFill>
+                  <a:srgbClr val="122C4E"/>
+                </a:solidFill>
+                <a:latin typeface="Noto Sans CJK KR"/>
+              </a:defRPr>
+            </a:pPr>
+            <a:r>
+              <a:t>이 블록이 하는 일: launch argument와 Node 구성을 입력합니다. package·executable·parameter 경로가 실제 이름과 같아야 합니다.</a:t>
+            </a:r>
+          </a:p>
+        </p:txBody>
+      </p:sp>
+      <p:sp>
+        <p:nvSpPr>
+          <p:cNvPr id="8" name="Rectangle 7"/>
+          <p:cNvSpPr/>
+          <p:nvPr/>
+        </p:nvSpPr>
+        <p:spPr>
+          <a:xfrm>
+            <a:off x="658368" y="1956816"/>
+            <a:ext cx="10972800" cy="603504"/>
+          </a:xfrm>
+          <a:prstGeom prst="rect">
+            <a:avLst/>
+          </a:prstGeom>
+          <a:solidFill>
+            <a:srgbClr val="F4F7FB"/>
+          </a:solidFill>
+          <a:ln>
+            <a:solidFill>
+              <a:srgbClr val="F4F7FB"/>
+            </a:solidFill>
+          </a:ln>
+        </p:spPr>
+        <p:style>
+          <a:lnRef idx="1">
+            <a:schemeClr val="accent1"/>
+          </a:lnRef>
+          <a:fillRef idx="3">
+            <a:schemeClr val="accent1"/>
+          </a:fillRef>
+          <a:effectRef idx="2">
+            <a:schemeClr val="accent1"/>
+          </a:effectRef>
+          <a:fontRef idx="minor">
+            <a:schemeClr val="lt1"/>
+          </a:fontRef>
+        </p:style>
+        <p:txBody>
+          <a:bodyPr rtlCol="0" anchor="ctr" wrap="square" lIns="73152" rIns="73152" tIns="36576" bIns="36576"/>
+          <a:lstStyle/>
+          <a:p>
+            <a:pPr algn="l">
+              <a:spcAft>
+                <a:spcPts val="0"/>
+              </a:spcAft>
+              <a:defRPr sz="1300" b="0">
+                <a:solidFill>
+                  <a:srgbClr val="122C4E"/>
+                </a:solidFill>
+                <a:latin typeface="DejaVu Sans Mono"/>
+              </a:defRPr>
+            </a:pPr>
+            <a:r>
+              <a:t>현재 열린 파일: ~/ros2_curri/my_agv_ws/src/agv_gazebo/launch/gazebo.launch.py</a:t>
+            </a:r>
+            <a:br/>
+            <a:r>
+              <a:t>아래 코드만 입력 → Ctrl+O → Enter로 저장 → 다음 블록으로 이동</a:t>
+            </a:r>
+          </a:p>
+        </p:txBody>
+      </p:sp>
+      <p:sp>
+        <p:nvSpPr>
+          <p:cNvPr id="9" name="Rectangle 8"/>
+          <p:cNvSpPr/>
+          <p:nvPr/>
+        </p:nvSpPr>
+        <p:spPr>
+          <a:xfrm>
+            <a:off x="658368" y="2706624"/>
+            <a:ext cx="10972800" cy="3364992"/>
+          </a:xfrm>
+          <a:prstGeom prst="rect">
+            <a:avLst/>
+          </a:prstGeom>
+          <a:solidFill>
+            <a:srgbClr val="1D232D"/>
+          </a:solidFill>
+          <a:ln>
+            <a:solidFill>
+              <a:srgbClr val="1D232D"/>
+            </a:solidFill>
+          </a:ln>
+        </p:spPr>
+        <p:style>
+          <a:lnRef idx="1">
+            <a:schemeClr val="accent1"/>
+          </a:lnRef>
+          <a:fillRef idx="3">
+            <a:schemeClr val="accent1"/>
+          </a:fillRef>
+          <a:effectRef idx="2">
+            <a:schemeClr val="accent1"/>
+          </a:effectRef>
+          <a:fontRef idx="minor">
+            <a:schemeClr val="lt1"/>
+          </a:fontRef>
+        </p:style>
+        <p:txBody>
+          <a:bodyPr rtlCol="0" anchor="ctr" wrap="square" lIns="164592" rIns="164592" tIns="109728" bIns="36576"/>
+          <a:lstStyle/>
+          <a:p>
+            <a:pPr algn="l">
+              <a:spcAft>
+                <a:spcPts val="0"/>
+              </a:spcAft>
+              <a:defRPr sz="1400" b="0">
+                <a:solidFill>
+                  <a:srgbClr val="FFFFFF"/>
+                </a:solidFill>
+                <a:latin typeface="DejaVu Sans Mono"/>
+              </a:defRPr>
+            </a:pPr>
+            <a:r>
+              <a:t>    gz_launch = os.path.join(get_package_share_directory('ros_gz_sim'), 'launch', 'gz_sim.launch.py')</a:t>
+            </a:r>
+            <a:br/>
+            <a:r>
+              <a:t>    return LaunchDescription([SetEnvironmentVariable('GZ_SIM_RESOURCE_PATH',</a:t>
+            </a:r>
+            <a:br/>
+            <a:r>
+              <a:t>        models + (':' + previous if previous else '')),</a:t>
+            </a:r>
+            <a:br/>
+            <a:r>
+              <a:t>        IncludeLaunchDescription(PythonLaunchDescriptionSource(gz_launch),</a:t>
+            </a:r>
+            <a:br/>
+            <a:r>
+              <a:t>        launch_arguments={'gz_args': '-r ' + world}.items()), Node(package='ros_gz_bridge',</a:t>
+            </a:r>
+            <a:br/>
+            <a:r>
+              <a:t>         executable='parameter_bridge', parameters=[{'config_file': os.path.join(share,</a:t>
+            </a:r>
+            <a:br/>
+            <a:r>
+              <a:t>        'config', 'bridge.yaml')}], output='screen')])</a:t>
+            </a:r>
+          </a:p>
+        </p:txBody>
+      </p:sp>
+      <p:sp>
+        <p:nvSpPr>
+          <p:cNvPr id="10" name="TextBox 9"/>
+          <p:cNvSpPr txBox="1"/>
+          <p:nvPr/>
+        </p:nvSpPr>
+        <p:spPr>
+          <a:xfrm>
+            <a:off x="749808" y="6181344"/>
+            <a:ext cx="10789920" cy="201168"/>
+          </a:xfrm>
+          <a:prstGeom prst="rect">
+            <a:avLst/>
+          </a:prstGeom>
+          <a:noFill/>
+        </p:spPr>
+        <p:txBody>
+          <a:bodyPr wrap="square" lIns="73152" rIns="73152" tIns="36576" bIns="36576">
+            <a:spAutoFit/>
+          </a:bodyPr>
+          <a:lstStyle/>
+          <a:p>
+            <a:pPr algn="l">
+              <a:spcAft>
+                <a:spcPts val="0"/>
+              </a:spcAft>
+              <a:defRPr sz="1000" b="0">
+                <a:solidFill>
+                  <a:srgbClr val="5C6672"/>
+                </a:solidFill>
+                <a:latin typeface="Noto Sans CJK KR"/>
+              </a:defRPr>
+            </a:pPr>
+            <a:r>
+              <a:t>입력 2/2 · 이 파일의 다음 코드 블록이 바로 다음 슬라이드에 이어집니다.</a:t>
             </a:r>
           </a:p>
         </p:txBody>
@@ -10959,7 +12758,7 @@
               </a:defRPr>
             </a:pPr>
             <a:r>
-              <a:t>객관적 검증 명령으로 완료를 확인한다</a:t>
+              <a:t>구현 뒤 실행 1/2: bridge YAML을 작성한다</a:t>
             </a:r>
           </a:p>
         </p:txBody>
@@ -10998,7 +12797,7 @@
               </a:defRPr>
             </a:pPr>
             <a:r>
-              <a:t>화면만 보지 말고 topic·frame·파일·parameter를 다시 확인합니다.</a:t>
+              <a:t>방금 직접 만든 파일을 실행·검사하며 다음 파일로 넘어갈 기준을 만듭니다.</a:t>
             </a:r>
           </a:p>
         </p:txBody>
@@ -11134,21 +12933,99 @@
               </a:defRPr>
             </a:pPr>
             <a:r>
-              <a:t>현재 단계 검증    |    현재 폴더 ~/ros2_curri/my_agv_ws    |    현재 터미널</a:t>
-            </a:r>
-          </a:p>
-        </p:txBody>
-      </p:sp>
-      <p:sp>
-        <p:nvSpPr>
-          <p:cNvPr id="7" name="Rounded Rectangle 6"/>
+              <a:t>현재 단계 실행 1/2    |    현재 폴더 ~/ros2_curri/my_agv_ws    |    현재 터미널</a:t>
+            </a:r>
+          </a:p>
+        </p:txBody>
+      </p:sp>
+      <p:sp>
+        <p:nvSpPr>
+          <p:cNvPr id="7" name="TextBox 6"/>
+          <p:cNvSpPr txBox="1"/>
+          <p:nvPr/>
+        </p:nvSpPr>
+        <p:spPr>
+          <a:xfrm>
+            <a:off x="676656" y="1764792"/>
+            <a:ext cx="1828800" cy="347472"/>
+          </a:xfrm>
+          <a:prstGeom prst="rect">
+            <a:avLst/>
+          </a:prstGeom>
+          <a:noFill/>
+        </p:spPr>
+        <p:txBody>
+          <a:bodyPr wrap="square" lIns="73152" rIns="73152" tIns="36576" bIns="36576">
+            <a:spAutoFit/>
+          </a:bodyPr>
+          <a:lstStyle/>
+          <a:p>
+            <a:pPr algn="l">
+              <a:spcAft>
+                <a:spcPts val="0"/>
+              </a:spcAft>
+              <a:defRPr sz="1800" b="1">
+                <a:solidFill>
+                  <a:srgbClr val="225B9B"/>
+                </a:solidFill>
+                <a:latin typeface="Noto Sans CJK KR"/>
+              </a:defRPr>
+            </a:pPr>
+            <a:r>
+              <a:t>왜 하는가</a:t>
+            </a:r>
+          </a:p>
+        </p:txBody>
+      </p:sp>
+      <p:sp>
+        <p:nvSpPr>
+          <p:cNvPr id="8" name="TextBox 7"/>
+          <p:cNvSpPr txBox="1"/>
+          <p:nvPr/>
+        </p:nvSpPr>
+        <p:spPr>
+          <a:xfrm>
+            <a:off x="676656" y="2103120"/>
+            <a:ext cx="10789920" cy="512064"/>
+          </a:xfrm>
+          <a:prstGeom prst="rect">
+            <a:avLst/>
+          </a:prstGeom>
+          <a:noFill/>
+        </p:spPr>
+        <p:txBody>
+          <a:bodyPr wrap="square" lIns="73152" rIns="73152" tIns="36576" bIns="36576">
+            <a:spAutoFit/>
+          </a:bodyPr>
+          <a:lstStyle/>
+          <a:p>
+            <a:pPr algn="l">
+              <a:spcAft>
+                <a:spcPts val="0"/>
+              </a:spcAft>
+              <a:defRPr sz="2000" b="0">
+                <a:solidFill>
+                  <a:srgbClr val="122C4E"/>
+                </a:solidFill>
+                <a:latin typeface="Noto Sans CJK KR"/>
+              </a:defRPr>
+            </a:pPr>
+            <a:r>
+              <a:t>방향과 양쪽 message type을 한 topic마다 정확히 적는다.</a:t>
+            </a:r>
+          </a:p>
+        </p:txBody>
+      </p:sp>
+      <p:sp>
+        <p:nvSpPr>
+          <p:cNvPr id="9" name="Rounded Rectangle 8"/>
           <p:cNvSpPr/>
           <p:nvPr/>
         </p:nvSpPr>
         <p:spPr>
           <a:xfrm>
-            <a:off x="658368" y="1755648"/>
-            <a:ext cx="10972800" cy="2148840"/>
+            <a:off x="676656" y="2871216"/>
+            <a:ext cx="10835640" cy="2331720"/>
           </a:xfrm>
           <a:prstGeom prst="roundRect">
             <a:avLst/>
@@ -11192,54 +13069,35 @@
               </a:defRPr>
             </a:pPr>
             <a:r>
-              <a:t>ros2 topic list | rg '/cmd_vel|/odom|/scan|/imu|/camera|/clock'</a:t>
+              <a:t>cd ~/ros2_curri/my_agv_ws</a:t>
             </a:r>
             <a:br/>
             <a:r>
-              <a:t>ros2 topic info /scan</a:t>
-            </a:r>
-          </a:p>
-        </p:txBody>
-      </p:sp>
-      <p:sp>
-        <p:nvSpPr>
-          <p:cNvPr id="8" name="Rounded Rectangle 7"/>
-          <p:cNvSpPr/>
-          <p:nvPr/>
-        </p:nvSpPr>
-        <p:spPr>
-          <a:xfrm>
-            <a:off x="658368" y="4206240"/>
-            <a:ext cx="10972800" cy="1554480"/>
-          </a:xfrm>
-          <a:prstGeom prst="roundRect">
-            <a:avLst/>
-          </a:prstGeom>
-          <a:solidFill>
-            <a:srgbClr val="F4F7FB"/>
-          </a:solidFill>
-          <a:ln>
-            <a:solidFill>
-              <a:srgbClr val="D1DFD5"/>
-            </a:solidFill>
-          </a:ln>
-        </p:spPr>
-        <p:style>
-          <a:lnRef idx="1">
-            <a:schemeClr val="accent1"/>
-          </a:lnRef>
-          <a:fillRef idx="3">
-            <a:schemeClr val="accent1"/>
-          </a:fillRef>
-          <a:effectRef idx="2">
-            <a:schemeClr val="accent1"/>
-          </a:effectRef>
-          <a:fontRef idx="minor">
-            <a:schemeClr val="lt1"/>
-          </a:fontRef>
-        </p:style>
-        <p:txBody>
-          <a:bodyPr rtlCol="0" anchor="ctr" wrap="square" lIns="73152" rIns="73152" tIns="36576" bIns="36576"/>
+              <a:t>nano src/agv_gazebo/config/bridge.yaml</a:t>
+            </a:r>
+          </a:p>
+        </p:txBody>
+      </p:sp>
+      <p:sp>
+        <p:nvSpPr>
+          <p:cNvPr id="10" name="TextBox 9"/>
+          <p:cNvSpPr txBox="1"/>
+          <p:nvPr/>
+        </p:nvSpPr>
+        <p:spPr>
+          <a:xfrm>
+            <a:off x="768096" y="5468112"/>
+            <a:ext cx="1143000" cy="256032"/>
+          </a:xfrm>
+          <a:prstGeom prst="rect">
+            <a:avLst/>
+          </a:prstGeom>
+          <a:noFill/>
+        </p:spPr>
+        <p:txBody>
+          <a:bodyPr wrap="square" lIns="73152" rIns="73152" tIns="36576" bIns="36576">
+            <a:spAutoFit/>
+          </a:bodyPr>
           <a:lstStyle/>
           <a:p>
             <a:pPr algn="l">
@@ -11254,50 +13112,38 @@
               </a:defRPr>
             </a:pPr>
             <a:r>
-              <a:t>완료 체크</a:t>
-            </a:r>
-            <a:br/>
-            <a:r>
-              <a:t>□ 명령이 오류 없이 실행된다.</a:t>
-            </a:r>
-            <a:br/>
-            <a:r>
-              <a:t>□ 기대한 파일·topic·frame·parameter 이름이 보인다.</a:t>
-            </a:r>
-            <a:br/>
-            <a:r>
-              <a:t>□ 값의 단위와 방향을 한 문장으로 설명할 수 있다.</a:t>
-            </a:r>
-          </a:p>
-        </p:txBody>
-      </p:sp>
-      <p:sp>
-        <p:nvSpPr>
-          <p:cNvPr id="9" name="TextBox 8"/>
-          <p:cNvSpPr txBox="1"/>
-          <p:nvPr/>
-        </p:nvSpPr>
-        <p:spPr>
-          <a:xfrm>
-            <a:off x="731520" y="5989320"/>
-            <a:ext cx="10789920" cy="237744"/>
-          </a:xfrm>
-          <a:prstGeom prst="rect">
-            <a:avLst/>
-          </a:prstGeom>
-          <a:noFill/>
-        </p:spPr>
-        <p:txBody>
-          <a:bodyPr wrap="square" lIns="73152" rIns="73152" tIns="36576" bIns="36576">
-            <a:spAutoFit/>
-          </a:bodyPr>
-          <a:lstStyle/>
-          <a:p>
-            <a:pPr algn="l">
-              <a:spcAft>
-                <a:spcPts val="0"/>
-              </a:spcAft>
-              <a:defRPr sz="1500" b="1">
+              <a:t>확인</a:t>
+            </a:r>
+          </a:p>
+        </p:txBody>
+      </p:sp>
+      <p:sp>
+        <p:nvSpPr>
+          <p:cNvPr id="11" name="TextBox 10"/>
+          <p:cNvSpPr txBox="1"/>
+          <p:nvPr/>
+        </p:nvSpPr>
+        <p:spPr>
+          <a:xfrm>
+            <a:off x="768096" y="5742432"/>
+            <a:ext cx="10561320" cy="347472"/>
+          </a:xfrm>
+          <a:prstGeom prst="rect">
+            <a:avLst/>
+          </a:prstGeom>
+          <a:noFill/>
+        </p:spPr>
+        <p:txBody>
+          <a:bodyPr wrap="square" lIns="73152" rIns="73152" tIns="36576" bIns="36576">
+            <a:spAutoFit/>
+          </a:bodyPr>
+          <a:lstStyle/>
+          <a:p>
+            <a:pPr algn="l">
+              <a:spcAft>
+                <a:spcPts val="0"/>
+              </a:spcAft>
+              <a:defRPr sz="1800" b="0">
                 <a:solidFill>
                   <a:srgbClr val="122C4E"/>
                 </a:solidFill>
@@ -11305,7 +13151,7 @@
               </a:defRPr>
             </a:pPr>
             <a:r>
-              <a:t>완료 조건: /cmd_vel ROS→Gazebo 및 odom/scan/imu/camera/clock Gazebo→ROS 매핑을 확인한다.</a:t>
+              <a:t>출력에서 topic·frame·파일 이름 또는 성공 메시지를 찾고, 맞지 않으면 다음 파일로 가지 않습니다.</a:t>
             </a:r>
           </a:p>
         </p:txBody>
@@ -11362,7 +13208,7 @@
               </a:defRPr>
             </a:pPr>
             <a:r>
-              <a:t>막히면: 증상 → 우선 확인 → 재검증</a:t>
+              <a:t>구현 뒤 실행 2/2: launch가 YAML을 읽게 한다</a:t>
             </a:r>
           </a:p>
         </p:txBody>
@@ -11401,7 +13247,7 @@
               </a:defRPr>
             </a:pPr>
             <a:r>
-              <a:t>오류 메시지를 숨기지 않고 같은 순서로 점검합니다.</a:t>
+              <a:t>방금 직접 만든 파일을 실행·검사하며 다음 파일로 넘어갈 기준을 만듭니다.</a:t>
             </a:r>
           </a:p>
         </p:txBody>
@@ -11537,31 +13383,109 @@
               </a:defRPr>
             </a:pPr>
             <a:r>
-              <a:t>현재 단계 오류 대응    |    현재 폴더 ~/ros2_curri/my_agv_ws    |    현재 터미널</a:t>
-            </a:r>
-          </a:p>
-        </p:txBody>
-      </p:sp>
-      <p:sp>
-        <p:nvSpPr>
-          <p:cNvPr id="7" name="Rounded Rectangle 6"/>
+              <a:t>현재 단계 실행 2/2    |    현재 폴더 ~/ros2_curri/my_agv_ws    |    현재 터미널</a:t>
+            </a:r>
+          </a:p>
+        </p:txBody>
+      </p:sp>
+      <p:sp>
+        <p:nvSpPr>
+          <p:cNvPr id="7" name="TextBox 6"/>
+          <p:cNvSpPr txBox="1"/>
+          <p:nvPr/>
+        </p:nvSpPr>
+        <p:spPr>
+          <a:xfrm>
+            <a:off x="676656" y="1764792"/>
+            <a:ext cx="1828800" cy="347472"/>
+          </a:xfrm>
+          <a:prstGeom prst="rect">
+            <a:avLst/>
+          </a:prstGeom>
+          <a:noFill/>
+        </p:spPr>
+        <p:txBody>
+          <a:bodyPr wrap="square" lIns="73152" rIns="73152" tIns="36576" bIns="36576">
+            <a:spAutoFit/>
+          </a:bodyPr>
+          <a:lstStyle/>
+          <a:p>
+            <a:pPr algn="l">
+              <a:spcAft>
+                <a:spcPts val="0"/>
+              </a:spcAft>
+              <a:defRPr sz="1800" b="1">
+                <a:solidFill>
+                  <a:srgbClr val="225B9B"/>
+                </a:solidFill>
+                <a:latin typeface="Noto Sans CJK KR"/>
+              </a:defRPr>
+            </a:pPr>
+            <a:r>
+              <a:t>왜 하는가</a:t>
+            </a:r>
+          </a:p>
+        </p:txBody>
+      </p:sp>
+      <p:sp>
+        <p:nvSpPr>
+          <p:cNvPr id="8" name="TextBox 7"/>
+          <p:cNvSpPr txBox="1"/>
+          <p:nvPr/>
+        </p:nvSpPr>
+        <p:spPr>
+          <a:xfrm>
+            <a:off x="676656" y="2103120"/>
+            <a:ext cx="10789920" cy="512064"/>
+          </a:xfrm>
+          <a:prstGeom prst="rect">
+            <a:avLst/>
+          </a:prstGeom>
+          <a:noFill/>
+        </p:spPr>
+        <p:txBody>
+          <a:bodyPr wrap="square" lIns="73152" rIns="73152" tIns="36576" bIns="36576">
+            <a:spAutoFit/>
+          </a:bodyPr>
+          <a:lstStyle/>
+          <a:p>
+            <a:pPr algn="l">
+              <a:spcAft>
+                <a:spcPts val="0"/>
+              </a:spcAft>
+              <a:defRPr sz="2000" b="0">
+                <a:solidFill>
+                  <a:srgbClr val="122C4E"/>
+                </a:solidFill>
+                <a:latin typeface="Noto Sans CJK KR"/>
+              </a:defRPr>
+            </a:pPr>
+            <a:r>
+              <a:t>config_file은 package share 경로에서 찾도록 launch에 넣는다.</a:t>
+            </a:r>
+          </a:p>
+        </p:txBody>
+      </p:sp>
+      <p:sp>
+        <p:nvSpPr>
+          <p:cNvPr id="9" name="Rounded Rectangle 8"/>
           <p:cNvSpPr/>
           <p:nvPr/>
         </p:nvSpPr>
         <p:spPr>
           <a:xfrm>
-            <a:off x="694944" y="1755648"/>
-            <a:ext cx="10972800" cy="1115568"/>
+            <a:off x="676656" y="2871216"/>
+            <a:ext cx="10835640" cy="2331720"/>
           </a:xfrm>
           <a:prstGeom prst="roundRect">
             <a:avLst/>
           </a:prstGeom>
           <a:solidFill>
-            <a:srgbClr val="FFF7F4"/>
+            <a:srgbClr val="1D232D"/>
           </a:solidFill>
           <a:ln>
             <a:solidFill>
-              <a:srgbClr val="EDBEB4"/>
+              <a:srgbClr val="1D232D"/>
             </a:solidFill>
           </a:ln>
         </p:spPr>
@@ -11580,23 +13504,44 @@
           </a:fontRef>
         </p:style>
         <p:txBody>
-          <a:bodyPr rtlCol="0" anchor="ctr"/>
-          <a:lstStyle/>
-          <a:p>
-            <a:pPr algn="ctr"/>
-          </a:p>
-        </p:txBody>
-      </p:sp>
-      <p:sp>
-        <p:nvSpPr>
-          <p:cNvPr id="8" name="TextBox 7"/>
-          <p:cNvSpPr txBox="1"/>
-          <p:nvPr/>
-        </p:nvSpPr>
-        <p:spPr>
-          <a:xfrm>
-            <a:off x="896112" y="1901952"/>
-            <a:ext cx="2926080" cy="274320"/>
+          <a:bodyPr rtlCol="0" anchor="ctr" wrap="square" lIns="73152" rIns="73152" tIns="36576" bIns="36576"/>
+          <a:lstStyle/>
+          <a:p>
+            <a:pPr algn="l">
+              <a:spcAft>
+                <a:spcPts val="0"/>
+              </a:spcAft>
+              <a:defRPr sz="1600" b="0">
+                <a:solidFill>
+                  <a:srgbClr val="FFFFFF"/>
+                </a:solidFill>
+                <a:latin typeface="DejaVu Sans Mono"/>
+              </a:defRPr>
+            </a:pPr>
+            <a:r>
+              <a:t>colcon build --symlink-install --packages-select agv_gazebo</a:t>
+            </a:r>
+            <a:br/>
+            <a:r>
+              <a:t>source install/setup.bash</a:t>
+            </a:r>
+            <a:br/>
+            <a:r>
+              <a:t>ros2 launch agv_gazebo gazebo.launch.py</a:t>
+            </a:r>
+          </a:p>
+        </p:txBody>
+      </p:sp>
+      <p:sp>
+        <p:nvSpPr>
+          <p:cNvPr id="10" name="TextBox 9"/>
+          <p:cNvSpPr txBox="1"/>
+          <p:nvPr/>
+        </p:nvSpPr>
+        <p:spPr>
+          <a:xfrm>
+            <a:off x="768096" y="5468112"/>
+            <a:ext cx="1143000" cy="256032"/>
           </a:xfrm>
           <a:prstGeom prst="rect">
             <a:avLst/>
@@ -11615,44 +13560,44 @@
               </a:spcAft>
               <a:defRPr sz="1800" b="1">
                 <a:solidFill>
-                  <a:srgbClr val="BE3B3B"/>
-                </a:solidFill>
-                <a:latin typeface="Noto Sans CJK KR"/>
-              </a:defRPr>
-            </a:pPr>
-            <a:r>
-              <a:t>증상 1: ROS topic이 생성되지 않음</a:t>
-            </a:r>
-          </a:p>
-        </p:txBody>
-      </p:sp>
-      <p:sp>
-        <p:nvSpPr>
-          <p:cNvPr id="9" name="TextBox 8"/>
-          <p:cNvSpPr txBox="1"/>
-          <p:nvPr/>
-        </p:nvSpPr>
-        <p:spPr>
-          <a:xfrm>
-            <a:off x="3794760" y="1883664"/>
-            <a:ext cx="7543800" cy="621792"/>
-          </a:xfrm>
-          <a:prstGeom prst="rect">
-            <a:avLst/>
-          </a:prstGeom>
-          <a:noFill/>
-        </p:spPr>
-        <p:txBody>
-          <a:bodyPr wrap="square" lIns="73152" rIns="73152" tIns="36576" bIns="36576">
-            <a:spAutoFit/>
-          </a:bodyPr>
-          <a:lstStyle/>
-          <a:p>
-            <a:pPr algn="l">
-              <a:spcAft>
-                <a:spcPts val="0"/>
-              </a:spcAft>
-              <a:defRPr sz="1600" b="0">
+                  <a:srgbClr val="2A8B5A"/>
+                </a:solidFill>
+                <a:latin typeface="Noto Sans CJK KR"/>
+              </a:defRPr>
+            </a:pPr>
+            <a:r>
+              <a:t>확인</a:t>
+            </a:r>
+          </a:p>
+        </p:txBody>
+      </p:sp>
+      <p:sp>
+        <p:nvSpPr>
+          <p:cNvPr id="11" name="TextBox 10"/>
+          <p:cNvSpPr txBox="1"/>
+          <p:nvPr/>
+        </p:nvSpPr>
+        <p:spPr>
+          <a:xfrm>
+            <a:off x="768096" y="5742432"/>
+            <a:ext cx="10561320" cy="347472"/>
+          </a:xfrm>
+          <a:prstGeom prst="rect">
+            <a:avLst/>
+          </a:prstGeom>
+          <a:noFill/>
+        </p:spPr>
+        <p:txBody>
+          <a:bodyPr wrap="square" lIns="73152" rIns="73152" tIns="36576" bIns="36576">
+            <a:spAutoFit/>
+          </a:bodyPr>
+          <a:lstStyle/>
+          <a:p>
+            <a:pPr algn="l">
+              <a:spcAft>
+                <a:spcPts val="0"/>
+              </a:spcAft>
+              <a:defRPr sz="1800" b="0">
                 <a:solidFill>
                   <a:srgbClr val="122C4E"/>
                 </a:solidFill>
@@ -11660,177 +13605,7 @@
               </a:defRPr>
             </a:pPr>
             <a:r>
-              <a:t>우선 확인: bridge 프로세스·topic 이름·message type을 확인한다.</a:t>
-            </a:r>
-            <a:br/>
-            <a:r>
-              <a:t>수정 후: ros2 topic list | rg '/cmd_vel|/odom|/scan|/imu|/camera|/clock'</a:t>
-            </a:r>
-          </a:p>
-        </p:txBody>
-      </p:sp>
-      <p:sp>
-        <p:nvSpPr>
-          <p:cNvPr id="10" name="Rounded Rectangle 9"/>
-          <p:cNvSpPr/>
-          <p:nvPr/>
-        </p:nvSpPr>
-        <p:spPr>
-          <a:xfrm>
-            <a:off x="694944" y="3172968"/>
-            <a:ext cx="10972800" cy="1115568"/>
-          </a:xfrm>
-          <a:prstGeom prst="roundRect">
-            <a:avLst/>
-          </a:prstGeom>
-          <a:solidFill>
-            <a:srgbClr val="FFF7F4"/>
-          </a:solidFill>
-          <a:ln>
-            <a:solidFill>
-              <a:srgbClr val="EDBEB4"/>
-            </a:solidFill>
-          </a:ln>
-        </p:spPr>
-        <p:style>
-          <a:lnRef idx="1">
-            <a:schemeClr val="accent1"/>
-          </a:lnRef>
-          <a:fillRef idx="3">
-            <a:schemeClr val="accent1"/>
-          </a:fillRef>
-          <a:effectRef idx="2">
-            <a:schemeClr val="accent1"/>
-          </a:effectRef>
-          <a:fontRef idx="minor">
-            <a:schemeClr val="lt1"/>
-          </a:fontRef>
-        </p:style>
-        <p:txBody>
-          <a:bodyPr rtlCol="0" anchor="ctr"/>
-          <a:lstStyle/>
-          <a:p>
-            <a:pPr algn="ctr"/>
-          </a:p>
-        </p:txBody>
-      </p:sp>
-      <p:sp>
-        <p:nvSpPr>
-          <p:cNvPr id="11" name="TextBox 10"/>
-          <p:cNvSpPr txBox="1"/>
-          <p:nvPr/>
-        </p:nvSpPr>
-        <p:spPr>
-          <a:xfrm>
-            <a:off x="896112" y="3319272"/>
-            <a:ext cx="2926080" cy="274320"/>
-          </a:xfrm>
-          <a:prstGeom prst="rect">
-            <a:avLst/>
-          </a:prstGeom>
-          <a:noFill/>
-        </p:spPr>
-        <p:txBody>
-          <a:bodyPr wrap="square" lIns="73152" rIns="73152" tIns="36576" bIns="36576">
-            <a:spAutoFit/>
-          </a:bodyPr>
-          <a:lstStyle/>
-          <a:p>
-            <a:pPr algn="l">
-              <a:spcAft>
-                <a:spcPts val="0"/>
-              </a:spcAft>
-              <a:defRPr sz="1800" b="1">
-                <a:solidFill>
-                  <a:srgbClr val="BE3B3B"/>
-                </a:solidFill>
-                <a:latin typeface="Noto Sans CJK KR"/>
-              </a:defRPr>
-            </a:pPr>
-            <a:r>
-              <a:t>증상 2: 한 방향으로만 전달됨</a:t>
-            </a:r>
-          </a:p>
-        </p:txBody>
-      </p:sp>
-      <p:sp>
-        <p:nvSpPr>
-          <p:cNvPr id="12" name="TextBox 11"/>
-          <p:cNvSpPr txBox="1"/>
-          <p:nvPr/>
-        </p:nvSpPr>
-        <p:spPr>
-          <a:xfrm>
-            <a:off x="3794760" y="3300984"/>
-            <a:ext cx="7543800" cy="621792"/>
-          </a:xfrm>
-          <a:prstGeom prst="rect">
-            <a:avLst/>
-          </a:prstGeom>
-          <a:noFill/>
-        </p:spPr>
-        <p:txBody>
-          <a:bodyPr wrap="square" lIns="73152" rIns="73152" tIns="36576" bIns="36576">
-            <a:spAutoFit/>
-          </a:bodyPr>
-          <a:lstStyle/>
-          <a:p>
-            <a:pPr algn="l">
-              <a:spcAft>
-                <a:spcPts val="0"/>
-              </a:spcAft>
-              <a:defRPr sz="1600" b="0">
-                <a:solidFill>
-                  <a:srgbClr val="122C4E"/>
-                </a:solidFill>
-                <a:latin typeface="Noto Sans CJK KR"/>
-              </a:defRPr>
-            </a:pPr>
-            <a:r>
-              <a:t>우선 확인: direction ROS_TO_GZ/GZ_TO_ROS 설정을 확인한다.</a:t>
-            </a:r>
-            <a:br/>
-            <a:r>
-              <a:t>수정 후: ros2 topic list | rg '/cmd_vel|/odom|/scan|/imu|/camera|/clock'</a:t>
-            </a:r>
-          </a:p>
-        </p:txBody>
-      </p:sp>
-      <p:sp>
-        <p:nvSpPr>
-          <p:cNvPr id="13" name="TextBox 12"/>
-          <p:cNvSpPr txBox="1"/>
-          <p:nvPr/>
-        </p:nvSpPr>
-        <p:spPr>
-          <a:xfrm>
-            <a:off x="822960" y="5102352"/>
-            <a:ext cx="10607040" cy="402336"/>
-          </a:xfrm>
-          <a:prstGeom prst="rect">
-            <a:avLst/>
-          </a:prstGeom>
-          <a:noFill/>
-        </p:spPr>
-        <p:txBody>
-          <a:bodyPr wrap="square" lIns="73152" rIns="73152" tIns="36576" bIns="36576">
-            <a:spAutoFit/>
-          </a:bodyPr>
-          <a:lstStyle/>
-          <a:p>
-            <a:pPr algn="ctr">
-              <a:spcAft>
-                <a:spcPts val="0"/>
-              </a:spcAft>
-              <a:defRPr sz="1800" b="1">
-                <a:solidFill>
-                  <a:srgbClr val="DB7E22"/>
-                </a:solidFill>
-                <a:latin typeface="Noto Sans CJK KR"/>
-              </a:defRPr>
-            </a:pPr>
-            <a:r>
-              <a:t>공통 순서: ① 현재 폴더 ② source ③ 파일 경로 ④ 이름/타입/단위 ⑤ build·source 후 재실행</a:t>
+              <a:t>출력에서 topic·frame·파일 이름 또는 성공 메시지를 찾고, 맞지 않으면 다음 파일로 가지 않습니다.</a:t>
             </a:r>
           </a:p>
         </p:txBody>
@@ -11887,7 +13662,7 @@
               </a:defRPr>
             </a:pPr>
             <a:r>
-              <a:t>막혔을 때만: Complete를 복구용으로 사용한다</a:t>
+              <a:t>build → source → run 순서로 실행한다</a:t>
             </a:r>
           </a:p>
         </p:txBody>
@@ -11926,7 +13701,7 @@
               </a:defRPr>
             </a:pPr>
             <a:r>
-              <a:t>이 슬라이드가 먼저가 아닙니다. 직접 입력·실행을 시도한 뒤에만 내 파일과 Complete를 비교합니다.</a:t>
+              <a:t>새 파일 또는 수정 파일은 build와 source 뒤에만 실행 이름·설정에 반영됩니다.</a:t>
             </a:r>
           </a:p>
         </p:txBody>
@@ -12062,60 +13837,21 @@
               </a:defRPr>
             </a:pPr>
             <a:r>
-              <a:t>현재 단계 복구용 Complete    |    현재 폴더 ~/ros2_curri    |    현재 터미널</a:t>
-            </a:r>
-          </a:p>
-        </p:txBody>
-      </p:sp>
-      <p:sp>
-        <p:nvSpPr>
-          <p:cNvPr id="7" name="TextBox 6"/>
-          <p:cNvSpPr txBox="1"/>
-          <p:nvPr/>
-        </p:nvSpPr>
-        <p:spPr>
-          <a:xfrm>
-            <a:off x="713232" y="1664208"/>
-            <a:ext cx="10698480" cy="402336"/>
-          </a:xfrm>
-          <a:prstGeom prst="rect">
-            <a:avLst/>
-          </a:prstGeom>
-          <a:noFill/>
-        </p:spPr>
-        <p:txBody>
-          <a:bodyPr wrap="square" lIns="73152" rIns="73152" tIns="36576" bIns="36576">
-            <a:spAutoFit/>
-          </a:bodyPr>
-          <a:lstStyle/>
-          <a:p>
-            <a:pPr algn="ctr">
-              <a:spcAft>
-                <a:spcPts val="0"/>
-              </a:spcAft>
-              <a:defRPr sz="1800" b="1">
-                <a:solidFill>
-                  <a:srgbClr val="DB7E22"/>
-                </a:solidFill>
-                <a:latin typeface="Noto Sans CJK KR"/>
-              </a:defRPr>
-            </a:pPr>
-            <a:r>
-              <a:t>권장 순서: ① 내 오류를 확인  ② Complete와 diff  ③ 꼭 필요할 때만 backup 후 복사</a:t>
-            </a:r>
-          </a:p>
-        </p:txBody>
-      </p:sp>
-      <p:sp>
-        <p:nvSpPr>
-          <p:cNvPr id="8" name="Rounded Rectangle 7"/>
+              <a:t>현재 단계 실행    |    현재 폴더 ~/ros2_curri/my_agv_ws    |    현재 터미널</a:t>
+            </a:r>
+          </a:p>
+        </p:txBody>
+      </p:sp>
+      <p:sp>
+        <p:nvSpPr>
+          <p:cNvPr id="7" name="Rounded Rectangle 6"/>
           <p:cNvSpPr/>
           <p:nvPr/>
         </p:nvSpPr>
         <p:spPr>
           <a:xfrm>
-            <a:off x="676656" y="2423160"/>
-            <a:ext cx="10881360" cy="2606040"/>
+            <a:off x="658368" y="1700784"/>
+            <a:ext cx="10972800" cy="3182112"/>
           </a:xfrm>
           <a:prstGeom prst="roundRect">
             <a:avLst/>
@@ -12151,7 +13887,7 @@
               <a:spcAft>
                 <a:spcPts val="0"/>
               </a:spcAft>
-              <a:defRPr sz="1400" b="0">
+              <a:defRPr sz="1600" b="0">
                 <a:solidFill>
                   <a:srgbClr val="FFFFFF"/>
                 </a:solidFill>
@@ -12159,23 +13895,50 @@
               </a:defRPr>
             </a:pPr>
             <a:r>
-              <a:t>cd ~/ros2_curri</a:t>
+              <a:t>source ~/ros2_curri/my_agv_ws/install/setup.bash</a:t>
             </a:r>
             <a:br/>
             <a:r>
-              <a:t>diff -ru my_agv_ws/src blocks/C_drive_visualization/M10_ros_gz_bridge/complete/agv_ws/src || true</a:t>
-            </a:r>
-            <a:br/>
-            <a:r>
-              <a:t>cp -a my_agv_ws/src my_agv_ws/src_before_M10</a:t>
-            </a:r>
-            <a:br/>
-            <a:r>
-              <a:t>cp -a blocks/C_drive_visualization/M10_ros_gz_bridge/complete/agv_ws/src/. my_agv_ws/src/</a:t>
-            </a:r>
-            <a:br/>
-            <a:r>
-              <a:t>cd my_agv_ws &amp;&amp; colcon build --symlink-install &amp;&amp; source install/setup.bash</a:t>
+              <a:t>ros2 launch agv_gazebo gazebo.launch.py</a:t>
+            </a:r>
+          </a:p>
+        </p:txBody>
+      </p:sp>
+      <p:sp>
+        <p:nvSpPr>
+          <p:cNvPr id="8" name="TextBox 7"/>
+          <p:cNvSpPr txBox="1"/>
+          <p:nvPr/>
+        </p:nvSpPr>
+        <p:spPr>
+          <a:xfrm>
+            <a:off x="786384" y="5239512"/>
+            <a:ext cx="1261872" cy="237744"/>
+          </a:xfrm>
+          <a:prstGeom prst="rect">
+            <a:avLst/>
+          </a:prstGeom>
+          <a:noFill/>
+        </p:spPr>
+        <p:txBody>
+          <a:bodyPr wrap="square" lIns="73152" rIns="73152" tIns="36576" bIns="36576">
+            <a:spAutoFit/>
+          </a:bodyPr>
+          <a:lstStyle/>
+          <a:p>
+            <a:pPr algn="l">
+              <a:spcAft>
+                <a:spcPts val="0"/>
+              </a:spcAft>
+              <a:defRPr sz="1800" b="1">
+                <a:solidFill>
+                  <a:srgbClr val="2A8B5A"/>
+                </a:solidFill>
+                <a:latin typeface="Noto Sans CJK KR"/>
+              </a:defRPr>
+            </a:pPr>
+            <a:r>
+              <a:t>확인 기준</a:t>
             </a:r>
           </a:p>
         </p:txBody>
@@ -12188,33 +13951,33 @@
         </p:nvSpPr>
         <p:spPr>
           <a:xfrm>
-            <a:off x="786384" y="5413248"/>
-            <a:ext cx="10424160" cy="429768"/>
-          </a:xfrm>
-          <a:prstGeom prst="rect">
-            <a:avLst/>
-          </a:prstGeom>
-          <a:noFill/>
-        </p:spPr>
-        <p:txBody>
-          <a:bodyPr wrap="square" lIns="73152" rIns="73152" tIns="36576" bIns="36576">
-            <a:spAutoFit/>
-          </a:bodyPr>
-          <a:lstStyle/>
-          <a:p>
-            <a:pPr algn="ctr">
-              <a:spcAft>
-                <a:spcPts val="0"/>
-              </a:spcAft>
-              <a:defRPr sz="1700" b="1">
-                <a:solidFill>
-                  <a:srgbClr val="2A8B5A"/>
-                </a:solidFill>
-                <a:latin typeface="Noto Sans CJK KR"/>
-              </a:defRPr>
-            </a:pPr>
-            <a:r>
-              <a:t>복구 뒤에는 끝내지 말고, 내 파일과 Complete의 차이를 한 줄씩 설명한 뒤 다시 직접 입력해 봅니다.</a:t>
+            <a:off x="786384" y="5532120"/>
+            <a:ext cx="10469880" cy="420624"/>
+          </a:xfrm>
+          <a:prstGeom prst="rect">
+            <a:avLst/>
+          </a:prstGeom>
+          <a:noFill/>
+        </p:spPr>
+        <p:txBody>
+          <a:bodyPr wrap="square" lIns="73152" rIns="73152" tIns="36576" bIns="36576">
+            <a:spAutoFit/>
+          </a:bodyPr>
+          <a:lstStyle/>
+          <a:p>
+            <a:pPr algn="l">
+              <a:spcAft>
+                <a:spcPts val="0"/>
+              </a:spcAft>
+              <a:defRPr sz="1800" b="0">
+                <a:solidFill>
+                  <a:srgbClr val="122C4E"/>
+                </a:solidFill>
+                <a:latin typeface="Noto Sans CJK KR"/>
+              </a:defRPr>
+            </a:pPr>
+            <a:r>
+              <a:t>/cmd_vel ROS→Gazebo 및 odom/scan/imu/camera/clock Gazebo→ROS 매핑을 확인한다.</a:t>
             </a:r>
           </a:p>
         </p:txBody>
@@ -12271,7 +14034,7 @@
               </a:defRPr>
             </a:pPr>
             <a:r>
-              <a:t>미니 실습: 값 하나를 바꾸고 결과를 비교한다</a:t>
+              <a:t>정상 결과: 실제 환경에서 확인한 출력</a:t>
             </a:r>
           </a:p>
         </p:txBody>
@@ -12310,7 +14073,7 @@
               </a:defRPr>
             </a:pPr>
             <a:r>
-              <a:t>정상 결과를 만든 뒤에는 한 번에 하나의 값만 바꿉니다.</a:t>
+              <a:t>실제 ROS 2 환경의 파일·패키지·구성 검증 로그</a:t>
             </a:r>
           </a:p>
         </p:txBody>
@@ -12393,157 +14156,65 @@
           </a:p>
         </p:txBody>
       </p:sp>
-      <p:sp>
-        <p:nvSpPr>
-          <p:cNvPr id="6" name="Rectangle 5"/>
-          <p:cNvSpPr/>
-          <p:nvPr/>
-        </p:nvSpPr>
-        <p:spPr>
-          <a:xfrm>
-            <a:off x="566928" y="1188720"/>
-            <a:ext cx="11064240" cy="347472"/>
-          </a:xfrm>
-          <a:prstGeom prst="rect">
-            <a:avLst/>
-          </a:prstGeom>
-          <a:solidFill>
-            <a:srgbClr val="F4F7FB"/>
-          </a:solidFill>
-          <a:ln>
-            <a:solidFill>
-              <a:srgbClr val="F4F7FB"/>
-            </a:solidFill>
-          </a:ln>
-        </p:spPr>
-        <p:style>
-          <a:lnRef idx="1">
-            <a:schemeClr val="accent1"/>
-          </a:lnRef>
-          <a:fillRef idx="3">
-            <a:schemeClr val="accent1"/>
-          </a:fillRef>
-          <a:effectRef idx="2">
-            <a:schemeClr val="accent1"/>
-          </a:effectRef>
-          <a:fontRef idx="minor">
-            <a:schemeClr val="lt1"/>
-          </a:fontRef>
-        </p:style>
-        <p:txBody>
-          <a:bodyPr rtlCol="0" anchor="ctr" wrap="square" lIns="73152" rIns="73152" tIns="36576" bIns="36576"/>
-          <a:lstStyle/>
-          <a:p>
-            <a:pPr algn="l">
-              <a:spcAft>
-                <a:spcPts val="0"/>
-              </a:spcAft>
-              <a:defRPr sz="1300" b="1">
-                <a:solidFill>
-                  <a:srgbClr val="122C4E"/>
-                </a:solidFill>
-                <a:latin typeface="Noto Sans CJK KR"/>
-              </a:defRPr>
-            </a:pPr>
-            <a:r>
-              <a:t>현재 단계 미니 실습    |    현재 폴더 ~/ros2_curri/my_agv_ws    |    현재 터미널</a:t>
-            </a:r>
-          </a:p>
-        </p:txBody>
-      </p:sp>
-      <p:sp>
-        <p:nvSpPr>
-          <p:cNvPr id="7" name="Rounded Rectangle 6"/>
-          <p:cNvSpPr/>
-          <p:nvPr/>
-        </p:nvSpPr>
-        <p:spPr>
-          <a:xfrm>
-            <a:off x="749808" y="1874519"/>
-            <a:ext cx="10652760" cy="1993392"/>
-          </a:xfrm>
-          <a:prstGeom prst="roundRect">
-            <a:avLst/>
-          </a:prstGeom>
-          <a:solidFill>
-            <a:srgbClr val="FFF8EB"/>
-          </a:solidFill>
-          <a:ln>
-            <a:solidFill>
-              <a:srgbClr val="ECC680"/>
-            </a:solidFill>
-          </a:ln>
-        </p:spPr>
-        <p:style>
-          <a:lnRef idx="1">
-            <a:schemeClr val="accent1"/>
-          </a:lnRef>
-          <a:fillRef idx="3">
-            <a:schemeClr val="accent1"/>
-          </a:fillRef>
-          <a:effectRef idx="2">
-            <a:schemeClr val="accent1"/>
-          </a:effectRef>
-          <a:fontRef idx="minor">
-            <a:schemeClr val="lt1"/>
-          </a:fontRef>
-        </p:style>
-        <p:txBody>
-          <a:bodyPr rtlCol="0" anchor="ctr" wrap="square" lIns="73152" rIns="73152" tIns="36576" bIns="36576"/>
+      <p:pic>
+        <p:nvPicPr>
+          <p:cNvPr id="6" name="Picture 5" descr="validation_terminal.png"/>
+          <p:cNvPicPr>
+            <a:picLocks noChangeAspect="1"/>
+          </p:cNvPicPr>
+          <p:nvPr/>
+        </p:nvPicPr>
+        <p:blipFill>
+          <a:blip r:embed="rId2"/>
+          <a:stretch>
+            <a:fillRect/>
+          </a:stretch>
+        </p:blipFill>
+        <p:spPr>
+          <a:xfrm>
+            <a:off x="2855133" y="1353312"/>
+            <a:ext cx="6478685" cy="4800600"/>
+          </a:xfrm>
+          <a:prstGeom prst="rect">
+            <a:avLst/>
+          </a:prstGeom>
+        </p:spPr>
+      </p:pic>
+      <p:sp>
+        <p:nvSpPr>
+          <p:cNvPr id="7" name="TextBox 6"/>
+          <p:cNvSpPr txBox="1"/>
+          <p:nvPr/>
+        </p:nvSpPr>
+        <p:spPr>
+          <a:xfrm>
+            <a:off x="777240" y="6144768"/>
+            <a:ext cx="10607040" cy="310896"/>
+          </a:xfrm>
+          <a:prstGeom prst="rect">
+            <a:avLst/>
+          </a:prstGeom>
+          <a:noFill/>
+        </p:spPr>
+        <p:txBody>
+          <a:bodyPr wrap="square" lIns="73152" rIns="73152" tIns="36576" bIns="36576">
+            <a:spAutoFit/>
+          </a:bodyPr>
           <a:lstStyle/>
           <a:p>
             <a:pPr algn="ctr">
               <a:spcAft>
                 <a:spcPts val="0"/>
               </a:spcAft>
-              <a:defRPr sz="2300" b="1">
-                <a:solidFill>
-                  <a:srgbClr val="122C4E"/>
-                </a:solidFill>
-                <a:latin typeface="Noto Sans CJK KR"/>
-              </a:defRPr>
-            </a:pPr>
-            <a:r>
-              <a:t>bridge.yaml에서 /scan 항목의 ros_type_name을 읽고 `ros2 interface show sensor_msgs/msg/LaserScan`으로 필드를 확인한다.</a:t>
-            </a:r>
-          </a:p>
-        </p:txBody>
-      </p:sp>
-      <p:sp>
-        <p:nvSpPr>
-          <p:cNvPr id="8" name="TextBox 7"/>
-          <p:cNvSpPr txBox="1"/>
-          <p:nvPr/>
-        </p:nvSpPr>
-        <p:spPr>
-          <a:xfrm>
-            <a:off x="877824" y="4590288"/>
-            <a:ext cx="10241280" cy="594360"/>
-          </a:xfrm>
-          <a:prstGeom prst="rect">
-            <a:avLst/>
-          </a:prstGeom>
-          <a:noFill/>
-        </p:spPr>
-        <p:txBody>
-          <a:bodyPr wrap="square" lIns="73152" rIns="73152" tIns="36576" bIns="36576">
-            <a:spAutoFit/>
-          </a:bodyPr>
-          <a:lstStyle/>
-          <a:p>
-            <a:pPr algn="ctr">
-              <a:spcAft>
-                <a:spcPts val="0"/>
-              </a:spcAft>
-              <a:defRPr sz="1900" b="1">
-                <a:solidFill>
-                  <a:srgbClr val="DB7E22"/>
-                </a:solidFill>
-                <a:latin typeface="Noto Sans CJK KR"/>
-              </a:defRPr>
-            </a:pPr>
-            <a:r>
-              <a:t>기록할 것: 바꾼 값(단위) · 기대한 변화 · 실제 출력/화면 · 원래 값으로 되돌린 결과</a:t>
+              <a:defRPr sz="1100" b="1">
+                <a:solidFill>
+                  <a:srgbClr val="2A8B5A"/>
+                </a:solidFill>
+                <a:latin typeface="Noto Sans CJK KR"/>
+              </a:defRPr>
+            </a:pPr>
+            <a:r>
+              <a:t>화면에서 확인: ① 명령/설정  ② 정상 출력 또는 화면  ③ 다음 검증 명령으로 재확인</a:t>
             </a:r>
           </a:p>
         </p:txBody>
@@ -12600,7 +14271,7 @@
               </a:defRPr>
             </a:pPr>
             <a:r>
-              <a:t>내 프로젝트 체크포인트를 저장하고 다음 모듈로 넘긴다</a:t>
+              <a:t>객관적 검증 명령으로 완료를 확인한다</a:t>
             </a:r>
           </a:p>
         </p:txBody>
@@ -12639,7 +14310,7 @@
               </a:defRPr>
             </a:pPr>
             <a:r>
-              <a:t>Complete는 복구용 비교 기준이고, 다음 단계는 내가 직접 만든 workspace에서 계속합니다.</a:t>
+              <a:t>화면만 보지 말고 topic·frame·파일·parameter를 다시 확인합니다.</a:t>
             </a:r>
           </a:p>
         </p:txBody>
@@ -12775,7 +14446,7 @@
               </a:defRPr>
             </a:pPr>
             <a:r>
-              <a:t>현재 단계 체크포인트    |    현재 폴더 ~/ros2_curri/my_agv_ws    |    현재 터미널</a:t>
+              <a:t>현재 단계 검증    |    현재 폴더 ~/ros2_curri/my_agv_ws    |    현재 터미널</a:t>
             </a:r>
           </a:p>
         </p:txBody>
@@ -12788,8 +14459,70 @@
         </p:nvSpPr>
         <p:spPr>
           <a:xfrm>
-            <a:off x="685800" y="1737360"/>
-            <a:ext cx="10972800" cy="3611880"/>
+            <a:off x="658368" y="1755648"/>
+            <a:ext cx="10972800" cy="2148840"/>
+          </a:xfrm>
+          <a:prstGeom prst="roundRect">
+            <a:avLst/>
+          </a:prstGeom>
+          <a:solidFill>
+            <a:srgbClr val="1D232D"/>
+          </a:solidFill>
+          <a:ln>
+            <a:solidFill>
+              <a:srgbClr val="1D232D"/>
+            </a:solidFill>
+          </a:ln>
+        </p:spPr>
+        <p:style>
+          <a:lnRef idx="1">
+            <a:schemeClr val="accent1"/>
+          </a:lnRef>
+          <a:fillRef idx="3">
+            <a:schemeClr val="accent1"/>
+          </a:fillRef>
+          <a:effectRef idx="2">
+            <a:schemeClr val="accent1"/>
+          </a:effectRef>
+          <a:fontRef idx="minor">
+            <a:schemeClr val="lt1"/>
+          </a:fontRef>
+        </p:style>
+        <p:txBody>
+          <a:bodyPr rtlCol="0" anchor="ctr" wrap="square" lIns="73152" rIns="73152" tIns="36576" bIns="36576"/>
+          <a:lstStyle/>
+          <a:p>
+            <a:pPr algn="l">
+              <a:spcAft>
+                <a:spcPts val="0"/>
+              </a:spcAft>
+              <a:defRPr sz="1600" b="0">
+                <a:solidFill>
+                  <a:srgbClr val="FFFFFF"/>
+                </a:solidFill>
+                <a:latin typeface="DejaVu Sans Mono"/>
+              </a:defRPr>
+            </a:pPr>
+            <a:r>
+              <a:t>ros2 topic list | rg '/cmd_vel|/odom|/scan|/imu|/camera|/clock'</a:t>
+            </a:r>
+            <a:br/>
+            <a:r>
+              <a:t>ros2 topic info /scan</a:t>
+            </a:r>
+          </a:p>
+        </p:txBody>
+      </p:sp>
+      <p:sp>
+        <p:nvSpPr>
+          <p:cNvPr id="8" name="Rounded Rectangle 7"/>
+          <p:cNvSpPr/>
+          <p:nvPr/>
+        </p:nvSpPr>
+        <p:spPr>
+          <a:xfrm>
+            <a:off x="658368" y="4206240"/>
+            <a:ext cx="10972800" cy="1554480"/>
           </a:xfrm>
           <a:prstGeom prst="roundRect">
             <a:avLst/>
@@ -12799,7 +14532,7 @@
           </a:solidFill>
           <a:ln>
             <a:solidFill>
-              <a:srgbClr val="D2DCE8"/>
+              <a:srgbClr val="D1DFD5"/>
             </a:solidFill>
           </a:ln>
         </p:spPr>
@@ -12818,40 +14551,65 @@
           </a:fontRef>
         </p:style>
         <p:txBody>
-          <a:bodyPr rtlCol="0" anchor="ctr"/>
-          <a:lstStyle/>
-          <a:p>
-            <a:pPr algn="ctr"/>
-          </a:p>
-        </p:txBody>
-      </p:sp>
-      <p:sp>
-        <p:nvSpPr>
-          <p:cNvPr id="8" name="TextBox 7"/>
-          <p:cNvSpPr txBox="1"/>
-          <p:nvPr/>
-        </p:nvSpPr>
-        <p:spPr>
-          <a:xfrm>
-            <a:off x="896112" y="1993392"/>
-            <a:ext cx="10332720" cy="2971800"/>
-          </a:xfrm>
-          <a:prstGeom prst="rect">
-            <a:avLst/>
-          </a:prstGeom>
-          <a:noFill/>
-        </p:spPr>
-        <p:txBody>
-          <a:bodyPr wrap="square" lIns="109728" rIns="109728">
-            <a:spAutoFit/>
-          </a:bodyPr>
-          <a:lstStyle/>
-          <a:p>
-            <a:pPr>
-              <a:spcAft>
-                <a:spcPts val="800"/>
-              </a:spcAft>
-              <a:defRPr sz="1800">
+          <a:bodyPr rtlCol="0" anchor="ctr" wrap="square" lIns="73152" rIns="73152" tIns="36576" bIns="36576"/>
+          <a:lstStyle/>
+          <a:p>
+            <a:pPr algn="l">
+              <a:spcAft>
+                <a:spcPts val="0"/>
+              </a:spcAft>
+              <a:defRPr sz="1800" b="1">
+                <a:solidFill>
+                  <a:srgbClr val="2A8B5A"/>
+                </a:solidFill>
+                <a:latin typeface="Noto Sans CJK KR"/>
+              </a:defRPr>
+            </a:pPr>
+            <a:r>
+              <a:t>완료 체크</a:t>
+            </a:r>
+            <a:br/>
+            <a:r>
+              <a:t>□ 명령이 오류 없이 실행된다.</a:t>
+            </a:r>
+            <a:br/>
+            <a:r>
+              <a:t>□ 기대한 파일·topic·frame·parameter 이름이 보인다.</a:t>
+            </a:r>
+            <a:br/>
+            <a:r>
+              <a:t>□ 값의 단위와 방향을 한 문장으로 설명할 수 있다.</a:t>
+            </a:r>
+          </a:p>
+        </p:txBody>
+      </p:sp>
+      <p:sp>
+        <p:nvSpPr>
+          <p:cNvPr id="9" name="TextBox 8"/>
+          <p:cNvSpPr txBox="1"/>
+          <p:nvPr/>
+        </p:nvSpPr>
+        <p:spPr>
+          <a:xfrm>
+            <a:off x="731520" y="5989320"/>
+            <a:ext cx="10789920" cy="237744"/>
+          </a:xfrm>
+          <a:prstGeom prst="rect">
+            <a:avLst/>
+          </a:prstGeom>
+          <a:noFill/>
+        </p:spPr>
+        <p:txBody>
+          <a:bodyPr wrap="square" lIns="73152" rIns="73152" tIns="36576" bIns="36576">
+            <a:spAutoFit/>
+          </a:bodyPr>
+          <a:lstStyle/>
+          <a:p>
+            <a:pPr algn="l">
+              <a:spcAft>
+                <a:spcPts val="0"/>
+              </a:spcAft>
+              <a:defRPr sz="1500" b="1">
                 <a:solidFill>
                   <a:srgbClr val="122C4E"/>
                 </a:solidFill>
@@ -12859,110 +14617,7 @@
               </a:defRPr>
             </a:pPr>
             <a:r>
-              <a:t>• □ 완료 화면: /cmd_vel ROS→Gazebo 및 odom/scan/imu/camera/clock Gazebo→ROS 매핑을 확인한다.</a:t>
-            </a:r>
-          </a:p>
-          <a:p>
-            <a:pPr>
-              <a:spcAft>
-                <a:spcPts val="800"/>
-              </a:spcAft>
-              <a:defRPr sz="1800">
-                <a:solidFill>
-                  <a:srgbClr val="122C4E"/>
-                </a:solidFill>
-                <a:latin typeface="Noto Sans CJK KR"/>
-              </a:defRPr>
-            </a:pPr>
-            <a:r>
-              <a:t>• □ 막혔을 때 비교할 Complete: blocks/C_drive_visualization/M10_ros_gz_bridge/complete/</a:t>
-            </a:r>
-          </a:p>
-          <a:p>
-            <a:pPr>
-              <a:spcAft>
-                <a:spcPts val="800"/>
-              </a:spcAft>
-              <a:defRPr sz="1800">
-                <a:solidFill>
-                  <a:srgbClr val="122C4E"/>
-                </a:solidFill>
-                <a:latin typeface="Noto Sans CJK KR"/>
-              </a:defRPr>
-            </a:pPr>
-            <a:r>
-              <a:t>• □ 정상 로그·캡처: logs/validation.log, screenshots/validation_terminal.png</a:t>
-            </a:r>
-          </a:p>
-          <a:p>
-            <a:pPr>
-              <a:spcAft>
-                <a:spcPts val="800"/>
-              </a:spcAft>
-              <a:defRPr sz="1800">
-                <a:solidFill>
-                  <a:srgbClr val="122C4E"/>
-                </a:solidFill>
-                <a:latin typeface="Noto Sans CJK KR"/>
-              </a:defRPr>
-            </a:pPr>
-            <a:r>
-              <a:t>• □ 버전 식별: CHECKSUM_or_TAG.txt의 SHA-256 manifest</a:t>
-            </a:r>
-          </a:p>
-          <a:p>
-            <a:pPr>
-              <a:spcAft>
-                <a:spcPts val="800"/>
-              </a:spcAft>
-              <a:defRPr sz="1800">
-                <a:solidFill>
-                  <a:srgbClr val="122C4E"/>
-                </a:solidFill>
-                <a:latin typeface="Noto Sans CJK KR"/>
-              </a:defRPr>
-            </a:pPr>
-            <a:r>
-              <a:t>• □ 다음 시작 조건: M11 RViz2</a:t>
-            </a:r>
-          </a:p>
-        </p:txBody>
-      </p:sp>
-      <p:sp>
-        <p:nvSpPr>
-          <p:cNvPr id="9" name="TextBox 8"/>
-          <p:cNvSpPr txBox="1"/>
-          <p:nvPr/>
-        </p:nvSpPr>
-        <p:spPr>
-          <a:xfrm>
-            <a:off x="868680" y="5596128"/>
-            <a:ext cx="10515600" cy="338328"/>
-          </a:xfrm>
-          <a:prstGeom prst="rect">
-            <a:avLst/>
-          </a:prstGeom>
-          <a:noFill/>
-        </p:spPr>
-        <p:txBody>
-          <a:bodyPr wrap="square" lIns="73152" rIns="73152" tIns="36576" bIns="36576">
-            <a:spAutoFit/>
-          </a:bodyPr>
-          <a:lstStyle/>
-          <a:p>
-            <a:pPr algn="ctr">
-              <a:spcAft>
-                <a:spcPts val="0"/>
-              </a:spcAft>
-              <a:defRPr sz="1700" b="1">
-                <a:solidFill>
-                  <a:srgbClr val="2A8B5A"/>
-                </a:solidFill>
-                <a:latin typeface="Noto Sans CJK KR"/>
-              </a:defRPr>
-            </a:pPr>
-            <a:r>
-              <a:t>다음 모듈을 시작하기 전, 내 src의 변경사항을 저장하고 현재 완료 조건을 다시 확인합니다.</a:t>
+              <a:t>완료 조건: /cmd_vel ROS→Gazebo 및 odom/scan/imu/camera/clock Gazebo→ROS 매핑을 확인한다.</a:t>
             </a:r>
           </a:p>
         </p:txBody>
@@ -12976,6 +14631,1663 @@
 </file>
 
 <file path=ppt/slides/slide25.xml><?xml version="1.0" encoding="utf-8"?>
+<p:sld xmlns:a="http://schemas.openxmlformats.org/drawingml/2006/main" xmlns:p="http://schemas.openxmlformats.org/presentationml/2006/main" xmlns:r="http://schemas.openxmlformats.org/officeDocument/2006/relationships">
+  <p:cSld>
+    <p:spTree>
+      <p:nvGrpSpPr>
+        <p:cNvPr id="1" name=""/>
+        <p:cNvGrpSpPr/>
+        <p:nvPr/>
+      </p:nvGrpSpPr>
+      <p:grpSpPr/>
+      <p:sp>
+        <p:nvSpPr>
+          <p:cNvPr id="2" name="TextBox 1"/>
+          <p:cNvSpPr txBox="1"/>
+          <p:nvPr/>
+        </p:nvSpPr>
+        <p:spPr>
+          <a:xfrm>
+            <a:off x="566928" y="347472"/>
+            <a:ext cx="10881360" cy="438912"/>
+          </a:xfrm>
+          <a:prstGeom prst="rect">
+            <a:avLst/>
+          </a:prstGeom>
+          <a:noFill/>
+        </p:spPr>
+        <p:txBody>
+          <a:bodyPr wrap="square" lIns="73152" rIns="73152" tIns="36576" bIns="36576">
+            <a:spAutoFit/>
+          </a:bodyPr>
+          <a:lstStyle/>
+          <a:p>
+            <a:pPr algn="l">
+              <a:spcAft>
+                <a:spcPts val="0"/>
+              </a:spcAft>
+              <a:defRPr sz="3200" b="1">
+                <a:solidFill>
+                  <a:srgbClr val="122C4E"/>
+                </a:solidFill>
+                <a:latin typeface="Noto Sans CJK KR"/>
+              </a:defRPr>
+            </a:pPr>
+            <a:r>
+              <a:t>막히면: 증상 → 우선 확인 → 재검증</a:t>
+            </a:r>
+          </a:p>
+        </p:txBody>
+      </p:sp>
+      <p:sp>
+        <p:nvSpPr>
+          <p:cNvPr id="3" name="TextBox 2"/>
+          <p:cNvSpPr txBox="1"/>
+          <p:nvPr/>
+        </p:nvSpPr>
+        <p:spPr>
+          <a:xfrm>
+            <a:off x="603504" y="859536"/>
+            <a:ext cx="10698480" cy="292608"/>
+          </a:xfrm>
+          <a:prstGeom prst="rect">
+            <a:avLst/>
+          </a:prstGeom>
+          <a:noFill/>
+        </p:spPr>
+        <p:txBody>
+          <a:bodyPr wrap="square" lIns="73152" rIns="73152" tIns="36576" bIns="36576">
+            <a:spAutoFit/>
+          </a:bodyPr>
+          <a:lstStyle/>
+          <a:p>
+            <a:pPr algn="l">
+              <a:spcAft>
+                <a:spcPts val="0"/>
+              </a:spcAft>
+              <a:defRPr sz="1700" b="0">
+                <a:solidFill>
+                  <a:srgbClr val="5C6672"/>
+                </a:solidFill>
+                <a:latin typeface="Noto Sans CJK KR"/>
+              </a:defRPr>
+            </a:pPr>
+            <a:r>
+              <a:t>오류 메시지를 숨기지 않고 같은 순서로 점검합니다.</a:t>
+            </a:r>
+          </a:p>
+        </p:txBody>
+      </p:sp>
+      <p:sp>
+        <p:nvSpPr>
+          <p:cNvPr id="4" name="TextBox 3"/>
+          <p:cNvSpPr txBox="1"/>
+          <p:nvPr/>
+        </p:nvSpPr>
+        <p:spPr>
+          <a:xfrm>
+            <a:off x="530352" y="6510528"/>
+            <a:ext cx="7772400" cy="201168"/>
+          </a:xfrm>
+          <a:prstGeom prst="rect">
+            <a:avLst/>
+          </a:prstGeom>
+          <a:noFill/>
+        </p:spPr>
+        <p:txBody>
+          <a:bodyPr wrap="square" lIns="73152" rIns="73152" tIns="36576" bIns="36576">
+            <a:spAutoFit/>
+          </a:bodyPr>
+          <a:lstStyle/>
+          <a:p>
+            <a:pPr algn="l">
+              <a:spcAft>
+                <a:spcPts val="0"/>
+              </a:spcAft>
+              <a:defRPr sz="1000" b="0">
+                <a:solidFill>
+                  <a:srgbClr val="5C6672"/>
+                </a:solidFill>
+                <a:latin typeface="Noto Sans CJK KR"/>
+              </a:defRPr>
+            </a:pPr>
+            <a:r>
+              <a:t>ROS 2 Jazzy · Gazebo Harmonic · M10 · 따라 하기형 AGV 실습</a:t>
+            </a:r>
+          </a:p>
+        </p:txBody>
+      </p:sp>
+      <p:sp>
+        <p:nvSpPr>
+          <p:cNvPr id="5" name="TextBox 4"/>
+          <p:cNvSpPr txBox="1"/>
+          <p:nvPr/>
+        </p:nvSpPr>
+        <p:spPr>
+          <a:xfrm>
+            <a:off x="9144000" y="6510528"/>
+            <a:ext cx="2468880" cy="201168"/>
+          </a:xfrm>
+          <a:prstGeom prst="rect">
+            <a:avLst/>
+          </a:prstGeom>
+          <a:noFill/>
+        </p:spPr>
+        <p:txBody>
+          <a:bodyPr wrap="square" lIns="73152" rIns="73152" tIns="36576" bIns="36576">
+            <a:spAutoFit/>
+          </a:bodyPr>
+          <a:lstStyle/>
+          <a:p>
+            <a:pPr algn="r">
+              <a:spcAft>
+                <a:spcPts val="0"/>
+              </a:spcAft>
+              <a:defRPr sz="1000" b="0">
+                <a:solidFill>
+                  <a:srgbClr val="5C6672"/>
+                </a:solidFill>
+                <a:latin typeface="Noto Sans CJK KR"/>
+              </a:defRPr>
+            </a:pPr>
+            <a:r>
+              <a:t>명령·파일 경로는 슬라이드에서 복사 가능</a:t>
+            </a:r>
+          </a:p>
+        </p:txBody>
+      </p:sp>
+      <p:sp>
+        <p:nvSpPr>
+          <p:cNvPr id="6" name="Rectangle 5"/>
+          <p:cNvSpPr/>
+          <p:nvPr/>
+        </p:nvSpPr>
+        <p:spPr>
+          <a:xfrm>
+            <a:off x="566928" y="1188720"/>
+            <a:ext cx="11064240" cy="347472"/>
+          </a:xfrm>
+          <a:prstGeom prst="rect">
+            <a:avLst/>
+          </a:prstGeom>
+          <a:solidFill>
+            <a:srgbClr val="F4F7FB"/>
+          </a:solidFill>
+          <a:ln>
+            <a:solidFill>
+              <a:srgbClr val="F4F7FB"/>
+            </a:solidFill>
+          </a:ln>
+        </p:spPr>
+        <p:style>
+          <a:lnRef idx="1">
+            <a:schemeClr val="accent1"/>
+          </a:lnRef>
+          <a:fillRef idx="3">
+            <a:schemeClr val="accent1"/>
+          </a:fillRef>
+          <a:effectRef idx="2">
+            <a:schemeClr val="accent1"/>
+          </a:effectRef>
+          <a:fontRef idx="minor">
+            <a:schemeClr val="lt1"/>
+          </a:fontRef>
+        </p:style>
+        <p:txBody>
+          <a:bodyPr rtlCol="0" anchor="ctr" wrap="square" lIns="73152" rIns="73152" tIns="36576" bIns="36576"/>
+          <a:lstStyle/>
+          <a:p>
+            <a:pPr algn="l">
+              <a:spcAft>
+                <a:spcPts val="0"/>
+              </a:spcAft>
+              <a:defRPr sz="1300" b="1">
+                <a:solidFill>
+                  <a:srgbClr val="122C4E"/>
+                </a:solidFill>
+                <a:latin typeface="Noto Sans CJK KR"/>
+              </a:defRPr>
+            </a:pPr>
+            <a:r>
+              <a:t>현재 단계 오류 대응    |    현재 폴더 ~/ros2_curri/my_agv_ws    |    현재 터미널</a:t>
+            </a:r>
+          </a:p>
+        </p:txBody>
+      </p:sp>
+      <p:sp>
+        <p:nvSpPr>
+          <p:cNvPr id="7" name="Rounded Rectangle 6"/>
+          <p:cNvSpPr/>
+          <p:nvPr/>
+        </p:nvSpPr>
+        <p:spPr>
+          <a:xfrm>
+            <a:off x="694944" y="1755648"/>
+            <a:ext cx="10972800" cy="1115568"/>
+          </a:xfrm>
+          <a:prstGeom prst="roundRect">
+            <a:avLst/>
+          </a:prstGeom>
+          <a:solidFill>
+            <a:srgbClr val="FFF7F4"/>
+          </a:solidFill>
+          <a:ln>
+            <a:solidFill>
+              <a:srgbClr val="EDBEB4"/>
+            </a:solidFill>
+          </a:ln>
+        </p:spPr>
+        <p:style>
+          <a:lnRef idx="1">
+            <a:schemeClr val="accent1"/>
+          </a:lnRef>
+          <a:fillRef idx="3">
+            <a:schemeClr val="accent1"/>
+          </a:fillRef>
+          <a:effectRef idx="2">
+            <a:schemeClr val="accent1"/>
+          </a:effectRef>
+          <a:fontRef idx="minor">
+            <a:schemeClr val="lt1"/>
+          </a:fontRef>
+        </p:style>
+        <p:txBody>
+          <a:bodyPr rtlCol="0" anchor="ctr"/>
+          <a:lstStyle/>
+          <a:p>
+            <a:pPr algn="ctr"/>
+          </a:p>
+        </p:txBody>
+      </p:sp>
+      <p:sp>
+        <p:nvSpPr>
+          <p:cNvPr id="8" name="TextBox 7"/>
+          <p:cNvSpPr txBox="1"/>
+          <p:nvPr/>
+        </p:nvSpPr>
+        <p:spPr>
+          <a:xfrm>
+            <a:off x="896112" y="1901952"/>
+            <a:ext cx="2926080" cy="274320"/>
+          </a:xfrm>
+          <a:prstGeom prst="rect">
+            <a:avLst/>
+          </a:prstGeom>
+          <a:noFill/>
+        </p:spPr>
+        <p:txBody>
+          <a:bodyPr wrap="square" lIns="73152" rIns="73152" tIns="36576" bIns="36576">
+            <a:spAutoFit/>
+          </a:bodyPr>
+          <a:lstStyle/>
+          <a:p>
+            <a:pPr algn="l">
+              <a:spcAft>
+                <a:spcPts val="0"/>
+              </a:spcAft>
+              <a:defRPr sz="1800" b="1">
+                <a:solidFill>
+                  <a:srgbClr val="BE3B3B"/>
+                </a:solidFill>
+                <a:latin typeface="Noto Sans CJK KR"/>
+              </a:defRPr>
+            </a:pPr>
+            <a:r>
+              <a:t>증상 1: ROS topic이 생성되지 않음</a:t>
+            </a:r>
+          </a:p>
+        </p:txBody>
+      </p:sp>
+      <p:sp>
+        <p:nvSpPr>
+          <p:cNvPr id="9" name="TextBox 8"/>
+          <p:cNvSpPr txBox="1"/>
+          <p:nvPr/>
+        </p:nvSpPr>
+        <p:spPr>
+          <a:xfrm>
+            <a:off x="3794760" y="1883664"/>
+            <a:ext cx="7543800" cy="621792"/>
+          </a:xfrm>
+          <a:prstGeom prst="rect">
+            <a:avLst/>
+          </a:prstGeom>
+          <a:noFill/>
+        </p:spPr>
+        <p:txBody>
+          <a:bodyPr wrap="square" lIns="73152" rIns="73152" tIns="36576" bIns="36576">
+            <a:spAutoFit/>
+          </a:bodyPr>
+          <a:lstStyle/>
+          <a:p>
+            <a:pPr algn="l">
+              <a:spcAft>
+                <a:spcPts val="0"/>
+              </a:spcAft>
+              <a:defRPr sz="1600" b="0">
+                <a:solidFill>
+                  <a:srgbClr val="122C4E"/>
+                </a:solidFill>
+                <a:latin typeface="Noto Sans CJK KR"/>
+              </a:defRPr>
+            </a:pPr>
+            <a:r>
+              <a:t>우선 확인: bridge 프로세스·topic 이름·message type을 확인한다.</a:t>
+            </a:r>
+            <a:br/>
+            <a:r>
+              <a:t>수정 후: ros2 topic list | rg '/cmd_vel|/odom|/scan|/imu|/camera|/clock'</a:t>
+            </a:r>
+          </a:p>
+        </p:txBody>
+      </p:sp>
+      <p:sp>
+        <p:nvSpPr>
+          <p:cNvPr id="10" name="Rounded Rectangle 9"/>
+          <p:cNvSpPr/>
+          <p:nvPr/>
+        </p:nvSpPr>
+        <p:spPr>
+          <a:xfrm>
+            <a:off x="694944" y="3172968"/>
+            <a:ext cx="10972800" cy="1115568"/>
+          </a:xfrm>
+          <a:prstGeom prst="roundRect">
+            <a:avLst/>
+          </a:prstGeom>
+          <a:solidFill>
+            <a:srgbClr val="FFF7F4"/>
+          </a:solidFill>
+          <a:ln>
+            <a:solidFill>
+              <a:srgbClr val="EDBEB4"/>
+            </a:solidFill>
+          </a:ln>
+        </p:spPr>
+        <p:style>
+          <a:lnRef idx="1">
+            <a:schemeClr val="accent1"/>
+          </a:lnRef>
+          <a:fillRef idx="3">
+            <a:schemeClr val="accent1"/>
+          </a:fillRef>
+          <a:effectRef idx="2">
+            <a:schemeClr val="accent1"/>
+          </a:effectRef>
+          <a:fontRef idx="minor">
+            <a:schemeClr val="lt1"/>
+          </a:fontRef>
+        </p:style>
+        <p:txBody>
+          <a:bodyPr rtlCol="0" anchor="ctr"/>
+          <a:lstStyle/>
+          <a:p>
+            <a:pPr algn="ctr"/>
+          </a:p>
+        </p:txBody>
+      </p:sp>
+      <p:sp>
+        <p:nvSpPr>
+          <p:cNvPr id="11" name="TextBox 10"/>
+          <p:cNvSpPr txBox="1"/>
+          <p:nvPr/>
+        </p:nvSpPr>
+        <p:spPr>
+          <a:xfrm>
+            <a:off x="896112" y="3319272"/>
+            <a:ext cx="2926080" cy="274320"/>
+          </a:xfrm>
+          <a:prstGeom prst="rect">
+            <a:avLst/>
+          </a:prstGeom>
+          <a:noFill/>
+        </p:spPr>
+        <p:txBody>
+          <a:bodyPr wrap="square" lIns="73152" rIns="73152" tIns="36576" bIns="36576">
+            <a:spAutoFit/>
+          </a:bodyPr>
+          <a:lstStyle/>
+          <a:p>
+            <a:pPr algn="l">
+              <a:spcAft>
+                <a:spcPts val="0"/>
+              </a:spcAft>
+              <a:defRPr sz="1800" b="1">
+                <a:solidFill>
+                  <a:srgbClr val="BE3B3B"/>
+                </a:solidFill>
+                <a:latin typeface="Noto Sans CJK KR"/>
+              </a:defRPr>
+            </a:pPr>
+            <a:r>
+              <a:t>증상 2: 한 방향으로만 전달됨</a:t>
+            </a:r>
+          </a:p>
+        </p:txBody>
+      </p:sp>
+      <p:sp>
+        <p:nvSpPr>
+          <p:cNvPr id="12" name="TextBox 11"/>
+          <p:cNvSpPr txBox="1"/>
+          <p:nvPr/>
+        </p:nvSpPr>
+        <p:spPr>
+          <a:xfrm>
+            <a:off x="3794760" y="3300984"/>
+            <a:ext cx="7543800" cy="621792"/>
+          </a:xfrm>
+          <a:prstGeom prst="rect">
+            <a:avLst/>
+          </a:prstGeom>
+          <a:noFill/>
+        </p:spPr>
+        <p:txBody>
+          <a:bodyPr wrap="square" lIns="73152" rIns="73152" tIns="36576" bIns="36576">
+            <a:spAutoFit/>
+          </a:bodyPr>
+          <a:lstStyle/>
+          <a:p>
+            <a:pPr algn="l">
+              <a:spcAft>
+                <a:spcPts val="0"/>
+              </a:spcAft>
+              <a:defRPr sz="1600" b="0">
+                <a:solidFill>
+                  <a:srgbClr val="122C4E"/>
+                </a:solidFill>
+                <a:latin typeface="Noto Sans CJK KR"/>
+              </a:defRPr>
+            </a:pPr>
+            <a:r>
+              <a:t>우선 확인: direction ROS_TO_GZ/GZ_TO_ROS 설정을 확인한다.</a:t>
+            </a:r>
+            <a:br/>
+            <a:r>
+              <a:t>수정 후: ros2 topic list | rg '/cmd_vel|/odom|/scan|/imu|/camera|/clock'</a:t>
+            </a:r>
+          </a:p>
+        </p:txBody>
+      </p:sp>
+      <p:sp>
+        <p:nvSpPr>
+          <p:cNvPr id="13" name="TextBox 12"/>
+          <p:cNvSpPr txBox="1"/>
+          <p:nvPr/>
+        </p:nvSpPr>
+        <p:spPr>
+          <a:xfrm>
+            <a:off x="822960" y="5102352"/>
+            <a:ext cx="10607040" cy="402336"/>
+          </a:xfrm>
+          <a:prstGeom prst="rect">
+            <a:avLst/>
+          </a:prstGeom>
+          <a:noFill/>
+        </p:spPr>
+        <p:txBody>
+          <a:bodyPr wrap="square" lIns="73152" rIns="73152" tIns="36576" bIns="36576">
+            <a:spAutoFit/>
+          </a:bodyPr>
+          <a:lstStyle/>
+          <a:p>
+            <a:pPr algn="ctr">
+              <a:spcAft>
+                <a:spcPts val="0"/>
+              </a:spcAft>
+              <a:defRPr sz="1800" b="1">
+                <a:solidFill>
+                  <a:srgbClr val="DB7E22"/>
+                </a:solidFill>
+                <a:latin typeface="Noto Sans CJK KR"/>
+              </a:defRPr>
+            </a:pPr>
+            <a:r>
+              <a:t>공통 순서: ① 현재 폴더 ② source ③ 파일 경로 ④ 이름/타입/단위 ⑤ build·source 후 재실행</a:t>
+            </a:r>
+          </a:p>
+        </p:txBody>
+      </p:sp>
+    </p:spTree>
+  </p:cSld>
+  <p:clrMapOvr>
+    <a:masterClrMapping/>
+  </p:clrMapOvr>
+</p:sld>
+</file>
+
+<file path=ppt/slides/slide26.xml><?xml version="1.0" encoding="utf-8"?>
+<p:sld xmlns:a="http://schemas.openxmlformats.org/drawingml/2006/main" xmlns:p="http://schemas.openxmlformats.org/presentationml/2006/main" xmlns:r="http://schemas.openxmlformats.org/officeDocument/2006/relationships">
+  <p:cSld>
+    <p:spTree>
+      <p:nvGrpSpPr>
+        <p:cNvPr id="1" name=""/>
+        <p:cNvGrpSpPr/>
+        <p:nvPr/>
+      </p:nvGrpSpPr>
+      <p:grpSpPr/>
+      <p:sp>
+        <p:nvSpPr>
+          <p:cNvPr id="2" name="TextBox 1"/>
+          <p:cNvSpPr txBox="1"/>
+          <p:nvPr/>
+        </p:nvSpPr>
+        <p:spPr>
+          <a:xfrm>
+            <a:off x="566928" y="347472"/>
+            <a:ext cx="10881360" cy="438912"/>
+          </a:xfrm>
+          <a:prstGeom prst="rect">
+            <a:avLst/>
+          </a:prstGeom>
+          <a:noFill/>
+        </p:spPr>
+        <p:txBody>
+          <a:bodyPr wrap="square" lIns="73152" rIns="73152" tIns="36576" bIns="36576">
+            <a:spAutoFit/>
+          </a:bodyPr>
+          <a:lstStyle/>
+          <a:p>
+            <a:pPr algn="l">
+              <a:spcAft>
+                <a:spcPts val="0"/>
+              </a:spcAft>
+              <a:defRPr sz="3200" b="1">
+                <a:solidFill>
+                  <a:srgbClr val="122C4E"/>
+                </a:solidFill>
+                <a:latin typeface="Noto Sans CJK KR"/>
+              </a:defRPr>
+            </a:pPr>
+            <a:r>
+              <a:t>막혔을 때만: Complete를 복구용으로 사용한다</a:t>
+            </a:r>
+          </a:p>
+        </p:txBody>
+      </p:sp>
+      <p:sp>
+        <p:nvSpPr>
+          <p:cNvPr id="3" name="TextBox 2"/>
+          <p:cNvSpPr txBox="1"/>
+          <p:nvPr/>
+        </p:nvSpPr>
+        <p:spPr>
+          <a:xfrm>
+            <a:off x="603504" y="859536"/>
+            <a:ext cx="10698480" cy="292608"/>
+          </a:xfrm>
+          <a:prstGeom prst="rect">
+            <a:avLst/>
+          </a:prstGeom>
+          <a:noFill/>
+        </p:spPr>
+        <p:txBody>
+          <a:bodyPr wrap="square" lIns="73152" rIns="73152" tIns="36576" bIns="36576">
+            <a:spAutoFit/>
+          </a:bodyPr>
+          <a:lstStyle/>
+          <a:p>
+            <a:pPr algn="l">
+              <a:spcAft>
+                <a:spcPts val="0"/>
+              </a:spcAft>
+              <a:defRPr sz="1700" b="0">
+                <a:solidFill>
+                  <a:srgbClr val="5C6672"/>
+                </a:solidFill>
+                <a:latin typeface="Noto Sans CJK KR"/>
+              </a:defRPr>
+            </a:pPr>
+            <a:r>
+              <a:t>이 슬라이드가 먼저가 아닙니다. 직접 입력·실행을 시도한 뒤에만 내 파일과 Complete를 비교합니다.</a:t>
+            </a:r>
+          </a:p>
+        </p:txBody>
+      </p:sp>
+      <p:sp>
+        <p:nvSpPr>
+          <p:cNvPr id="4" name="TextBox 3"/>
+          <p:cNvSpPr txBox="1"/>
+          <p:nvPr/>
+        </p:nvSpPr>
+        <p:spPr>
+          <a:xfrm>
+            <a:off x="530352" y="6510528"/>
+            <a:ext cx="7772400" cy="201168"/>
+          </a:xfrm>
+          <a:prstGeom prst="rect">
+            <a:avLst/>
+          </a:prstGeom>
+          <a:noFill/>
+        </p:spPr>
+        <p:txBody>
+          <a:bodyPr wrap="square" lIns="73152" rIns="73152" tIns="36576" bIns="36576">
+            <a:spAutoFit/>
+          </a:bodyPr>
+          <a:lstStyle/>
+          <a:p>
+            <a:pPr algn="l">
+              <a:spcAft>
+                <a:spcPts val="0"/>
+              </a:spcAft>
+              <a:defRPr sz="1000" b="0">
+                <a:solidFill>
+                  <a:srgbClr val="5C6672"/>
+                </a:solidFill>
+                <a:latin typeface="Noto Sans CJK KR"/>
+              </a:defRPr>
+            </a:pPr>
+            <a:r>
+              <a:t>ROS 2 Jazzy · Gazebo Harmonic · M10 · 따라 하기형 AGV 실습</a:t>
+            </a:r>
+          </a:p>
+        </p:txBody>
+      </p:sp>
+      <p:sp>
+        <p:nvSpPr>
+          <p:cNvPr id="5" name="TextBox 4"/>
+          <p:cNvSpPr txBox="1"/>
+          <p:nvPr/>
+        </p:nvSpPr>
+        <p:spPr>
+          <a:xfrm>
+            <a:off x="9144000" y="6510528"/>
+            <a:ext cx="2468880" cy="201168"/>
+          </a:xfrm>
+          <a:prstGeom prst="rect">
+            <a:avLst/>
+          </a:prstGeom>
+          <a:noFill/>
+        </p:spPr>
+        <p:txBody>
+          <a:bodyPr wrap="square" lIns="73152" rIns="73152" tIns="36576" bIns="36576">
+            <a:spAutoFit/>
+          </a:bodyPr>
+          <a:lstStyle/>
+          <a:p>
+            <a:pPr algn="r">
+              <a:spcAft>
+                <a:spcPts val="0"/>
+              </a:spcAft>
+              <a:defRPr sz="1000" b="0">
+                <a:solidFill>
+                  <a:srgbClr val="5C6672"/>
+                </a:solidFill>
+                <a:latin typeface="Noto Sans CJK KR"/>
+              </a:defRPr>
+            </a:pPr>
+            <a:r>
+              <a:t>명령·파일 경로는 슬라이드에서 복사 가능</a:t>
+            </a:r>
+          </a:p>
+        </p:txBody>
+      </p:sp>
+      <p:sp>
+        <p:nvSpPr>
+          <p:cNvPr id="6" name="Rectangle 5"/>
+          <p:cNvSpPr/>
+          <p:nvPr/>
+        </p:nvSpPr>
+        <p:spPr>
+          <a:xfrm>
+            <a:off x="566928" y="1188720"/>
+            <a:ext cx="11064240" cy="347472"/>
+          </a:xfrm>
+          <a:prstGeom prst="rect">
+            <a:avLst/>
+          </a:prstGeom>
+          <a:solidFill>
+            <a:srgbClr val="F4F7FB"/>
+          </a:solidFill>
+          <a:ln>
+            <a:solidFill>
+              <a:srgbClr val="F4F7FB"/>
+            </a:solidFill>
+          </a:ln>
+        </p:spPr>
+        <p:style>
+          <a:lnRef idx="1">
+            <a:schemeClr val="accent1"/>
+          </a:lnRef>
+          <a:fillRef idx="3">
+            <a:schemeClr val="accent1"/>
+          </a:fillRef>
+          <a:effectRef idx="2">
+            <a:schemeClr val="accent1"/>
+          </a:effectRef>
+          <a:fontRef idx="minor">
+            <a:schemeClr val="lt1"/>
+          </a:fontRef>
+        </p:style>
+        <p:txBody>
+          <a:bodyPr rtlCol="0" anchor="ctr" wrap="square" lIns="73152" rIns="73152" tIns="36576" bIns="36576"/>
+          <a:lstStyle/>
+          <a:p>
+            <a:pPr algn="l">
+              <a:spcAft>
+                <a:spcPts val="0"/>
+              </a:spcAft>
+              <a:defRPr sz="1300" b="1">
+                <a:solidFill>
+                  <a:srgbClr val="122C4E"/>
+                </a:solidFill>
+                <a:latin typeface="Noto Sans CJK KR"/>
+              </a:defRPr>
+            </a:pPr>
+            <a:r>
+              <a:t>현재 단계 복구용 Complete    |    현재 폴더 ~/ros2_curri    |    현재 터미널</a:t>
+            </a:r>
+          </a:p>
+        </p:txBody>
+      </p:sp>
+      <p:sp>
+        <p:nvSpPr>
+          <p:cNvPr id="7" name="TextBox 6"/>
+          <p:cNvSpPr txBox="1"/>
+          <p:nvPr/>
+        </p:nvSpPr>
+        <p:spPr>
+          <a:xfrm>
+            <a:off x="713232" y="1664208"/>
+            <a:ext cx="10698480" cy="402336"/>
+          </a:xfrm>
+          <a:prstGeom prst="rect">
+            <a:avLst/>
+          </a:prstGeom>
+          <a:noFill/>
+        </p:spPr>
+        <p:txBody>
+          <a:bodyPr wrap="square" lIns="73152" rIns="73152" tIns="36576" bIns="36576">
+            <a:spAutoFit/>
+          </a:bodyPr>
+          <a:lstStyle/>
+          <a:p>
+            <a:pPr algn="ctr">
+              <a:spcAft>
+                <a:spcPts val="0"/>
+              </a:spcAft>
+              <a:defRPr sz="1800" b="1">
+                <a:solidFill>
+                  <a:srgbClr val="DB7E22"/>
+                </a:solidFill>
+                <a:latin typeface="Noto Sans CJK KR"/>
+              </a:defRPr>
+            </a:pPr>
+            <a:r>
+              <a:t>권장 순서: ① 내 오류를 확인  ② Complete와 diff  ③ 꼭 필요할 때만 backup 후 복사</a:t>
+            </a:r>
+          </a:p>
+        </p:txBody>
+      </p:sp>
+      <p:sp>
+        <p:nvSpPr>
+          <p:cNvPr id="8" name="Rounded Rectangle 7"/>
+          <p:cNvSpPr/>
+          <p:nvPr/>
+        </p:nvSpPr>
+        <p:spPr>
+          <a:xfrm>
+            <a:off x="676656" y="2423160"/>
+            <a:ext cx="10881360" cy="2606040"/>
+          </a:xfrm>
+          <a:prstGeom prst="roundRect">
+            <a:avLst/>
+          </a:prstGeom>
+          <a:solidFill>
+            <a:srgbClr val="1D232D"/>
+          </a:solidFill>
+          <a:ln>
+            <a:solidFill>
+              <a:srgbClr val="1D232D"/>
+            </a:solidFill>
+          </a:ln>
+        </p:spPr>
+        <p:style>
+          <a:lnRef idx="1">
+            <a:schemeClr val="accent1"/>
+          </a:lnRef>
+          <a:fillRef idx="3">
+            <a:schemeClr val="accent1"/>
+          </a:fillRef>
+          <a:effectRef idx="2">
+            <a:schemeClr val="accent1"/>
+          </a:effectRef>
+          <a:fontRef idx="minor">
+            <a:schemeClr val="lt1"/>
+          </a:fontRef>
+        </p:style>
+        <p:txBody>
+          <a:bodyPr rtlCol="0" anchor="ctr" wrap="square" lIns="73152" rIns="73152" tIns="36576" bIns="36576"/>
+          <a:lstStyle/>
+          <a:p>
+            <a:pPr algn="l">
+              <a:spcAft>
+                <a:spcPts val="0"/>
+              </a:spcAft>
+              <a:defRPr sz="1400" b="0">
+                <a:solidFill>
+                  <a:srgbClr val="FFFFFF"/>
+                </a:solidFill>
+                <a:latin typeface="DejaVu Sans Mono"/>
+              </a:defRPr>
+            </a:pPr>
+            <a:r>
+              <a:t>cd ~/ros2_curri</a:t>
+            </a:r>
+            <a:br/>
+            <a:r>
+              <a:t>diff -ru my_agv_ws/src blocks/C_drive_visualization/M10_ros_gz_bridge/complete/agv_ws/src || true</a:t>
+            </a:r>
+            <a:br/>
+            <a:r>
+              <a:t>cp -a my_agv_ws/src my_agv_ws/src_before_M10</a:t>
+            </a:r>
+            <a:br/>
+            <a:r>
+              <a:t>cp -a blocks/C_drive_visualization/M10_ros_gz_bridge/complete/agv_ws/src/. my_agv_ws/src/</a:t>
+            </a:r>
+            <a:br/>
+            <a:r>
+              <a:t>cd my_agv_ws &amp;&amp; colcon build --symlink-install &amp;&amp; source install/setup.bash</a:t>
+            </a:r>
+          </a:p>
+        </p:txBody>
+      </p:sp>
+      <p:sp>
+        <p:nvSpPr>
+          <p:cNvPr id="9" name="TextBox 8"/>
+          <p:cNvSpPr txBox="1"/>
+          <p:nvPr/>
+        </p:nvSpPr>
+        <p:spPr>
+          <a:xfrm>
+            <a:off x="786384" y="5413248"/>
+            <a:ext cx="10424160" cy="429768"/>
+          </a:xfrm>
+          <a:prstGeom prst="rect">
+            <a:avLst/>
+          </a:prstGeom>
+          <a:noFill/>
+        </p:spPr>
+        <p:txBody>
+          <a:bodyPr wrap="square" lIns="73152" rIns="73152" tIns="36576" bIns="36576">
+            <a:spAutoFit/>
+          </a:bodyPr>
+          <a:lstStyle/>
+          <a:p>
+            <a:pPr algn="ctr">
+              <a:spcAft>
+                <a:spcPts val="0"/>
+              </a:spcAft>
+              <a:defRPr sz="1700" b="1">
+                <a:solidFill>
+                  <a:srgbClr val="2A8B5A"/>
+                </a:solidFill>
+                <a:latin typeface="Noto Sans CJK KR"/>
+              </a:defRPr>
+            </a:pPr>
+            <a:r>
+              <a:t>복구 뒤에는 끝내지 말고, 내 파일과 Complete의 차이를 한 줄씩 설명한 뒤 다시 직접 입력해 봅니다.</a:t>
+            </a:r>
+          </a:p>
+        </p:txBody>
+      </p:sp>
+    </p:spTree>
+  </p:cSld>
+  <p:clrMapOvr>
+    <a:masterClrMapping/>
+  </p:clrMapOvr>
+</p:sld>
+</file>
+
+<file path=ppt/slides/slide27.xml><?xml version="1.0" encoding="utf-8"?>
+<p:sld xmlns:a="http://schemas.openxmlformats.org/drawingml/2006/main" xmlns:p="http://schemas.openxmlformats.org/presentationml/2006/main" xmlns:r="http://schemas.openxmlformats.org/officeDocument/2006/relationships">
+  <p:cSld>
+    <p:spTree>
+      <p:nvGrpSpPr>
+        <p:cNvPr id="1" name=""/>
+        <p:cNvGrpSpPr/>
+        <p:nvPr/>
+      </p:nvGrpSpPr>
+      <p:grpSpPr/>
+      <p:sp>
+        <p:nvSpPr>
+          <p:cNvPr id="2" name="TextBox 1"/>
+          <p:cNvSpPr txBox="1"/>
+          <p:nvPr/>
+        </p:nvSpPr>
+        <p:spPr>
+          <a:xfrm>
+            <a:off x="566928" y="347472"/>
+            <a:ext cx="10881360" cy="438912"/>
+          </a:xfrm>
+          <a:prstGeom prst="rect">
+            <a:avLst/>
+          </a:prstGeom>
+          <a:noFill/>
+        </p:spPr>
+        <p:txBody>
+          <a:bodyPr wrap="square" lIns="73152" rIns="73152" tIns="36576" bIns="36576">
+            <a:spAutoFit/>
+          </a:bodyPr>
+          <a:lstStyle/>
+          <a:p>
+            <a:pPr algn="l">
+              <a:spcAft>
+                <a:spcPts val="0"/>
+              </a:spcAft>
+              <a:defRPr sz="3200" b="1">
+                <a:solidFill>
+                  <a:srgbClr val="122C4E"/>
+                </a:solidFill>
+                <a:latin typeface="Noto Sans CJK KR"/>
+              </a:defRPr>
+            </a:pPr>
+            <a:r>
+              <a:t>미니 실습: 값 하나를 바꾸고 결과를 비교한다</a:t>
+            </a:r>
+          </a:p>
+        </p:txBody>
+      </p:sp>
+      <p:sp>
+        <p:nvSpPr>
+          <p:cNvPr id="3" name="TextBox 2"/>
+          <p:cNvSpPr txBox="1"/>
+          <p:nvPr/>
+        </p:nvSpPr>
+        <p:spPr>
+          <a:xfrm>
+            <a:off x="603504" y="859536"/>
+            <a:ext cx="10698480" cy="292608"/>
+          </a:xfrm>
+          <a:prstGeom prst="rect">
+            <a:avLst/>
+          </a:prstGeom>
+          <a:noFill/>
+        </p:spPr>
+        <p:txBody>
+          <a:bodyPr wrap="square" lIns="73152" rIns="73152" tIns="36576" bIns="36576">
+            <a:spAutoFit/>
+          </a:bodyPr>
+          <a:lstStyle/>
+          <a:p>
+            <a:pPr algn="l">
+              <a:spcAft>
+                <a:spcPts val="0"/>
+              </a:spcAft>
+              <a:defRPr sz="1700" b="0">
+                <a:solidFill>
+                  <a:srgbClr val="5C6672"/>
+                </a:solidFill>
+                <a:latin typeface="Noto Sans CJK KR"/>
+              </a:defRPr>
+            </a:pPr>
+            <a:r>
+              <a:t>정상 결과를 만든 뒤에는 한 번에 하나의 값만 바꿉니다.</a:t>
+            </a:r>
+          </a:p>
+        </p:txBody>
+      </p:sp>
+      <p:sp>
+        <p:nvSpPr>
+          <p:cNvPr id="4" name="TextBox 3"/>
+          <p:cNvSpPr txBox="1"/>
+          <p:nvPr/>
+        </p:nvSpPr>
+        <p:spPr>
+          <a:xfrm>
+            <a:off x="530352" y="6510528"/>
+            <a:ext cx="7772400" cy="201168"/>
+          </a:xfrm>
+          <a:prstGeom prst="rect">
+            <a:avLst/>
+          </a:prstGeom>
+          <a:noFill/>
+        </p:spPr>
+        <p:txBody>
+          <a:bodyPr wrap="square" lIns="73152" rIns="73152" tIns="36576" bIns="36576">
+            <a:spAutoFit/>
+          </a:bodyPr>
+          <a:lstStyle/>
+          <a:p>
+            <a:pPr algn="l">
+              <a:spcAft>
+                <a:spcPts val="0"/>
+              </a:spcAft>
+              <a:defRPr sz="1000" b="0">
+                <a:solidFill>
+                  <a:srgbClr val="5C6672"/>
+                </a:solidFill>
+                <a:latin typeface="Noto Sans CJK KR"/>
+              </a:defRPr>
+            </a:pPr>
+            <a:r>
+              <a:t>ROS 2 Jazzy · Gazebo Harmonic · M10 · 따라 하기형 AGV 실습</a:t>
+            </a:r>
+          </a:p>
+        </p:txBody>
+      </p:sp>
+      <p:sp>
+        <p:nvSpPr>
+          <p:cNvPr id="5" name="TextBox 4"/>
+          <p:cNvSpPr txBox="1"/>
+          <p:nvPr/>
+        </p:nvSpPr>
+        <p:spPr>
+          <a:xfrm>
+            <a:off x="9144000" y="6510528"/>
+            <a:ext cx="2468880" cy="201168"/>
+          </a:xfrm>
+          <a:prstGeom prst="rect">
+            <a:avLst/>
+          </a:prstGeom>
+          <a:noFill/>
+        </p:spPr>
+        <p:txBody>
+          <a:bodyPr wrap="square" lIns="73152" rIns="73152" tIns="36576" bIns="36576">
+            <a:spAutoFit/>
+          </a:bodyPr>
+          <a:lstStyle/>
+          <a:p>
+            <a:pPr algn="r">
+              <a:spcAft>
+                <a:spcPts val="0"/>
+              </a:spcAft>
+              <a:defRPr sz="1000" b="0">
+                <a:solidFill>
+                  <a:srgbClr val="5C6672"/>
+                </a:solidFill>
+                <a:latin typeface="Noto Sans CJK KR"/>
+              </a:defRPr>
+            </a:pPr>
+            <a:r>
+              <a:t>명령·파일 경로는 슬라이드에서 복사 가능</a:t>
+            </a:r>
+          </a:p>
+        </p:txBody>
+      </p:sp>
+      <p:sp>
+        <p:nvSpPr>
+          <p:cNvPr id="6" name="Rectangle 5"/>
+          <p:cNvSpPr/>
+          <p:nvPr/>
+        </p:nvSpPr>
+        <p:spPr>
+          <a:xfrm>
+            <a:off x="566928" y="1188720"/>
+            <a:ext cx="11064240" cy="347472"/>
+          </a:xfrm>
+          <a:prstGeom prst="rect">
+            <a:avLst/>
+          </a:prstGeom>
+          <a:solidFill>
+            <a:srgbClr val="F4F7FB"/>
+          </a:solidFill>
+          <a:ln>
+            <a:solidFill>
+              <a:srgbClr val="F4F7FB"/>
+            </a:solidFill>
+          </a:ln>
+        </p:spPr>
+        <p:style>
+          <a:lnRef idx="1">
+            <a:schemeClr val="accent1"/>
+          </a:lnRef>
+          <a:fillRef idx="3">
+            <a:schemeClr val="accent1"/>
+          </a:fillRef>
+          <a:effectRef idx="2">
+            <a:schemeClr val="accent1"/>
+          </a:effectRef>
+          <a:fontRef idx="minor">
+            <a:schemeClr val="lt1"/>
+          </a:fontRef>
+        </p:style>
+        <p:txBody>
+          <a:bodyPr rtlCol="0" anchor="ctr" wrap="square" lIns="73152" rIns="73152" tIns="36576" bIns="36576"/>
+          <a:lstStyle/>
+          <a:p>
+            <a:pPr algn="l">
+              <a:spcAft>
+                <a:spcPts val="0"/>
+              </a:spcAft>
+              <a:defRPr sz="1300" b="1">
+                <a:solidFill>
+                  <a:srgbClr val="122C4E"/>
+                </a:solidFill>
+                <a:latin typeface="Noto Sans CJK KR"/>
+              </a:defRPr>
+            </a:pPr>
+            <a:r>
+              <a:t>현재 단계 미니 실습    |    현재 폴더 ~/ros2_curri/my_agv_ws    |    현재 터미널</a:t>
+            </a:r>
+          </a:p>
+        </p:txBody>
+      </p:sp>
+      <p:sp>
+        <p:nvSpPr>
+          <p:cNvPr id="7" name="Rounded Rectangle 6"/>
+          <p:cNvSpPr/>
+          <p:nvPr/>
+        </p:nvSpPr>
+        <p:spPr>
+          <a:xfrm>
+            <a:off x="749808" y="1874519"/>
+            <a:ext cx="10652760" cy="1993392"/>
+          </a:xfrm>
+          <a:prstGeom prst="roundRect">
+            <a:avLst/>
+          </a:prstGeom>
+          <a:solidFill>
+            <a:srgbClr val="FFF8EB"/>
+          </a:solidFill>
+          <a:ln>
+            <a:solidFill>
+              <a:srgbClr val="ECC680"/>
+            </a:solidFill>
+          </a:ln>
+        </p:spPr>
+        <p:style>
+          <a:lnRef idx="1">
+            <a:schemeClr val="accent1"/>
+          </a:lnRef>
+          <a:fillRef idx="3">
+            <a:schemeClr val="accent1"/>
+          </a:fillRef>
+          <a:effectRef idx="2">
+            <a:schemeClr val="accent1"/>
+          </a:effectRef>
+          <a:fontRef idx="minor">
+            <a:schemeClr val="lt1"/>
+          </a:fontRef>
+        </p:style>
+        <p:txBody>
+          <a:bodyPr rtlCol="0" anchor="ctr" wrap="square" lIns="73152" rIns="73152" tIns="36576" bIns="36576"/>
+          <a:lstStyle/>
+          <a:p>
+            <a:pPr algn="ctr">
+              <a:spcAft>
+                <a:spcPts val="0"/>
+              </a:spcAft>
+              <a:defRPr sz="2300" b="1">
+                <a:solidFill>
+                  <a:srgbClr val="122C4E"/>
+                </a:solidFill>
+                <a:latin typeface="Noto Sans CJK KR"/>
+              </a:defRPr>
+            </a:pPr>
+            <a:r>
+              <a:t>bridge.yaml에서 /scan 항목의 ros_type_name을 읽고 `ros2 interface show sensor_msgs/msg/LaserScan`으로 필드를 확인한다.</a:t>
+            </a:r>
+          </a:p>
+        </p:txBody>
+      </p:sp>
+      <p:sp>
+        <p:nvSpPr>
+          <p:cNvPr id="8" name="TextBox 7"/>
+          <p:cNvSpPr txBox="1"/>
+          <p:nvPr/>
+        </p:nvSpPr>
+        <p:spPr>
+          <a:xfrm>
+            <a:off x="877824" y="4590288"/>
+            <a:ext cx="10241280" cy="594360"/>
+          </a:xfrm>
+          <a:prstGeom prst="rect">
+            <a:avLst/>
+          </a:prstGeom>
+          <a:noFill/>
+        </p:spPr>
+        <p:txBody>
+          <a:bodyPr wrap="square" lIns="73152" rIns="73152" tIns="36576" bIns="36576">
+            <a:spAutoFit/>
+          </a:bodyPr>
+          <a:lstStyle/>
+          <a:p>
+            <a:pPr algn="ctr">
+              <a:spcAft>
+                <a:spcPts val="0"/>
+              </a:spcAft>
+              <a:defRPr sz="1900" b="1">
+                <a:solidFill>
+                  <a:srgbClr val="DB7E22"/>
+                </a:solidFill>
+                <a:latin typeface="Noto Sans CJK KR"/>
+              </a:defRPr>
+            </a:pPr>
+            <a:r>
+              <a:t>기록할 것: 바꾼 값(단위) · 기대한 변화 · 실제 출력/화면 · 원래 값으로 되돌린 결과</a:t>
+            </a:r>
+          </a:p>
+        </p:txBody>
+      </p:sp>
+    </p:spTree>
+  </p:cSld>
+  <p:clrMapOvr>
+    <a:masterClrMapping/>
+  </p:clrMapOvr>
+</p:sld>
+</file>
+
+<file path=ppt/slides/slide28.xml><?xml version="1.0" encoding="utf-8"?>
+<p:sld xmlns:a="http://schemas.openxmlformats.org/drawingml/2006/main" xmlns:p="http://schemas.openxmlformats.org/presentationml/2006/main" xmlns:r="http://schemas.openxmlformats.org/officeDocument/2006/relationships">
+  <p:cSld>
+    <p:spTree>
+      <p:nvGrpSpPr>
+        <p:cNvPr id="1" name=""/>
+        <p:cNvGrpSpPr/>
+        <p:nvPr/>
+      </p:nvGrpSpPr>
+      <p:grpSpPr/>
+      <p:sp>
+        <p:nvSpPr>
+          <p:cNvPr id="2" name="TextBox 1"/>
+          <p:cNvSpPr txBox="1"/>
+          <p:nvPr/>
+        </p:nvSpPr>
+        <p:spPr>
+          <a:xfrm>
+            <a:off x="566928" y="347472"/>
+            <a:ext cx="10881360" cy="438912"/>
+          </a:xfrm>
+          <a:prstGeom prst="rect">
+            <a:avLst/>
+          </a:prstGeom>
+          <a:noFill/>
+        </p:spPr>
+        <p:txBody>
+          <a:bodyPr wrap="square" lIns="73152" rIns="73152" tIns="36576" bIns="36576">
+            <a:spAutoFit/>
+          </a:bodyPr>
+          <a:lstStyle/>
+          <a:p>
+            <a:pPr algn="l">
+              <a:spcAft>
+                <a:spcPts val="0"/>
+              </a:spcAft>
+              <a:defRPr sz="3200" b="1">
+                <a:solidFill>
+                  <a:srgbClr val="122C4E"/>
+                </a:solidFill>
+                <a:latin typeface="Noto Sans CJK KR"/>
+              </a:defRPr>
+            </a:pPr>
+            <a:r>
+              <a:t>내 프로젝트 체크포인트를 저장하고 다음 모듈로 넘긴다</a:t>
+            </a:r>
+          </a:p>
+        </p:txBody>
+      </p:sp>
+      <p:sp>
+        <p:nvSpPr>
+          <p:cNvPr id="3" name="TextBox 2"/>
+          <p:cNvSpPr txBox="1"/>
+          <p:nvPr/>
+        </p:nvSpPr>
+        <p:spPr>
+          <a:xfrm>
+            <a:off x="603504" y="859536"/>
+            <a:ext cx="10698480" cy="292608"/>
+          </a:xfrm>
+          <a:prstGeom prst="rect">
+            <a:avLst/>
+          </a:prstGeom>
+          <a:noFill/>
+        </p:spPr>
+        <p:txBody>
+          <a:bodyPr wrap="square" lIns="73152" rIns="73152" tIns="36576" bIns="36576">
+            <a:spAutoFit/>
+          </a:bodyPr>
+          <a:lstStyle/>
+          <a:p>
+            <a:pPr algn="l">
+              <a:spcAft>
+                <a:spcPts val="0"/>
+              </a:spcAft>
+              <a:defRPr sz="1700" b="0">
+                <a:solidFill>
+                  <a:srgbClr val="5C6672"/>
+                </a:solidFill>
+                <a:latin typeface="Noto Sans CJK KR"/>
+              </a:defRPr>
+            </a:pPr>
+            <a:r>
+              <a:t>Complete는 복구용 비교 기준이고, 다음 단계는 내가 직접 만든 workspace에서 계속합니다.</a:t>
+            </a:r>
+          </a:p>
+        </p:txBody>
+      </p:sp>
+      <p:sp>
+        <p:nvSpPr>
+          <p:cNvPr id="4" name="TextBox 3"/>
+          <p:cNvSpPr txBox="1"/>
+          <p:nvPr/>
+        </p:nvSpPr>
+        <p:spPr>
+          <a:xfrm>
+            <a:off x="530352" y="6510528"/>
+            <a:ext cx="7772400" cy="201168"/>
+          </a:xfrm>
+          <a:prstGeom prst="rect">
+            <a:avLst/>
+          </a:prstGeom>
+          <a:noFill/>
+        </p:spPr>
+        <p:txBody>
+          <a:bodyPr wrap="square" lIns="73152" rIns="73152" tIns="36576" bIns="36576">
+            <a:spAutoFit/>
+          </a:bodyPr>
+          <a:lstStyle/>
+          <a:p>
+            <a:pPr algn="l">
+              <a:spcAft>
+                <a:spcPts val="0"/>
+              </a:spcAft>
+              <a:defRPr sz="1000" b="0">
+                <a:solidFill>
+                  <a:srgbClr val="5C6672"/>
+                </a:solidFill>
+                <a:latin typeface="Noto Sans CJK KR"/>
+              </a:defRPr>
+            </a:pPr>
+            <a:r>
+              <a:t>ROS 2 Jazzy · Gazebo Harmonic · M10 · 따라 하기형 AGV 실습</a:t>
+            </a:r>
+          </a:p>
+        </p:txBody>
+      </p:sp>
+      <p:sp>
+        <p:nvSpPr>
+          <p:cNvPr id="5" name="TextBox 4"/>
+          <p:cNvSpPr txBox="1"/>
+          <p:nvPr/>
+        </p:nvSpPr>
+        <p:spPr>
+          <a:xfrm>
+            <a:off x="9144000" y="6510528"/>
+            <a:ext cx="2468880" cy="201168"/>
+          </a:xfrm>
+          <a:prstGeom prst="rect">
+            <a:avLst/>
+          </a:prstGeom>
+          <a:noFill/>
+        </p:spPr>
+        <p:txBody>
+          <a:bodyPr wrap="square" lIns="73152" rIns="73152" tIns="36576" bIns="36576">
+            <a:spAutoFit/>
+          </a:bodyPr>
+          <a:lstStyle/>
+          <a:p>
+            <a:pPr algn="r">
+              <a:spcAft>
+                <a:spcPts val="0"/>
+              </a:spcAft>
+              <a:defRPr sz="1000" b="0">
+                <a:solidFill>
+                  <a:srgbClr val="5C6672"/>
+                </a:solidFill>
+                <a:latin typeface="Noto Sans CJK KR"/>
+              </a:defRPr>
+            </a:pPr>
+            <a:r>
+              <a:t>명령·파일 경로는 슬라이드에서 복사 가능</a:t>
+            </a:r>
+          </a:p>
+        </p:txBody>
+      </p:sp>
+      <p:sp>
+        <p:nvSpPr>
+          <p:cNvPr id="6" name="Rectangle 5"/>
+          <p:cNvSpPr/>
+          <p:nvPr/>
+        </p:nvSpPr>
+        <p:spPr>
+          <a:xfrm>
+            <a:off x="566928" y="1188720"/>
+            <a:ext cx="11064240" cy="347472"/>
+          </a:xfrm>
+          <a:prstGeom prst="rect">
+            <a:avLst/>
+          </a:prstGeom>
+          <a:solidFill>
+            <a:srgbClr val="F4F7FB"/>
+          </a:solidFill>
+          <a:ln>
+            <a:solidFill>
+              <a:srgbClr val="F4F7FB"/>
+            </a:solidFill>
+          </a:ln>
+        </p:spPr>
+        <p:style>
+          <a:lnRef idx="1">
+            <a:schemeClr val="accent1"/>
+          </a:lnRef>
+          <a:fillRef idx="3">
+            <a:schemeClr val="accent1"/>
+          </a:fillRef>
+          <a:effectRef idx="2">
+            <a:schemeClr val="accent1"/>
+          </a:effectRef>
+          <a:fontRef idx="minor">
+            <a:schemeClr val="lt1"/>
+          </a:fontRef>
+        </p:style>
+        <p:txBody>
+          <a:bodyPr rtlCol="0" anchor="ctr" wrap="square" lIns="73152" rIns="73152" tIns="36576" bIns="36576"/>
+          <a:lstStyle/>
+          <a:p>
+            <a:pPr algn="l">
+              <a:spcAft>
+                <a:spcPts val="0"/>
+              </a:spcAft>
+              <a:defRPr sz="1300" b="1">
+                <a:solidFill>
+                  <a:srgbClr val="122C4E"/>
+                </a:solidFill>
+                <a:latin typeface="Noto Sans CJK KR"/>
+              </a:defRPr>
+            </a:pPr>
+            <a:r>
+              <a:t>현재 단계 체크포인트    |    현재 폴더 ~/ros2_curri/my_agv_ws    |    현재 터미널</a:t>
+            </a:r>
+          </a:p>
+        </p:txBody>
+      </p:sp>
+      <p:sp>
+        <p:nvSpPr>
+          <p:cNvPr id="7" name="Rounded Rectangle 6"/>
+          <p:cNvSpPr/>
+          <p:nvPr/>
+        </p:nvSpPr>
+        <p:spPr>
+          <a:xfrm>
+            <a:off x="685800" y="1737360"/>
+            <a:ext cx="10972800" cy="3611880"/>
+          </a:xfrm>
+          <a:prstGeom prst="roundRect">
+            <a:avLst/>
+          </a:prstGeom>
+          <a:solidFill>
+            <a:srgbClr val="F4F7FB"/>
+          </a:solidFill>
+          <a:ln>
+            <a:solidFill>
+              <a:srgbClr val="D2DCE8"/>
+            </a:solidFill>
+          </a:ln>
+        </p:spPr>
+        <p:style>
+          <a:lnRef idx="1">
+            <a:schemeClr val="accent1"/>
+          </a:lnRef>
+          <a:fillRef idx="3">
+            <a:schemeClr val="accent1"/>
+          </a:fillRef>
+          <a:effectRef idx="2">
+            <a:schemeClr val="accent1"/>
+          </a:effectRef>
+          <a:fontRef idx="minor">
+            <a:schemeClr val="lt1"/>
+          </a:fontRef>
+        </p:style>
+        <p:txBody>
+          <a:bodyPr rtlCol="0" anchor="ctr"/>
+          <a:lstStyle/>
+          <a:p>
+            <a:pPr algn="ctr"/>
+          </a:p>
+        </p:txBody>
+      </p:sp>
+      <p:sp>
+        <p:nvSpPr>
+          <p:cNvPr id="8" name="TextBox 7"/>
+          <p:cNvSpPr txBox="1"/>
+          <p:nvPr/>
+        </p:nvSpPr>
+        <p:spPr>
+          <a:xfrm>
+            <a:off x="896112" y="1993392"/>
+            <a:ext cx="10332720" cy="2971800"/>
+          </a:xfrm>
+          <a:prstGeom prst="rect">
+            <a:avLst/>
+          </a:prstGeom>
+          <a:noFill/>
+        </p:spPr>
+        <p:txBody>
+          <a:bodyPr wrap="square" lIns="109728" rIns="109728">
+            <a:spAutoFit/>
+          </a:bodyPr>
+          <a:lstStyle/>
+          <a:p>
+            <a:pPr>
+              <a:spcAft>
+                <a:spcPts val="800"/>
+              </a:spcAft>
+              <a:defRPr sz="1800">
+                <a:solidFill>
+                  <a:srgbClr val="122C4E"/>
+                </a:solidFill>
+                <a:latin typeface="Noto Sans CJK KR"/>
+              </a:defRPr>
+            </a:pPr>
+            <a:r>
+              <a:t>• □ 완료 화면: /cmd_vel ROS→Gazebo 및 odom/scan/imu/camera/clock Gazebo→ROS 매핑을 확인한다.</a:t>
+            </a:r>
+          </a:p>
+          <a:p>
+            <a:pPr>
+              <a:spcAft>
+                <a:spcPts val="800"/>
+              </a:spcAft>
+              <a:defRPr sz="1800">
+                <a:solidFill>
+                  <a:srgbClr val="122C4E"/>
+                </a:solidFill>
+                <a:latin typeface="Noto Sans CJK KR"/>
+              </a:defRPr>
+            </a:pPr>
+            <a:r>
+              <a:t>• □ 막혔을 때 비교할 Complete: blocks/C_drive_visualization/M10_ros_gz_bridge/complete/</a:t>
+            </a:r>
+          </a:p>
+          <a:p>
+            <a:pPr>
+              <a:spcAft>
+                <a:spcPts val="800"/>
+              </a:spcAft>
+              <a:defRPr sz="1800">
+                <a:solidFill>
+                  <a:srgbClr val="122C4E"/>
+                </a:solidFill>
+                <a:latin typeface="Noto Sans CJK KR"/>
+              </a:defRPr>
+            </a:pPr>
+            <a:r>
+              <a:t>• □ 정상 로그·캡처: logs/validation.log, screenshots/validation_terminal.png</a:t>
+            </a:r>
+          </a:p>
+          <a:p>
+            <a:pPr>
+              <a:spcAft>
+                <a:spcPts val="800"/>
+              </a:spcAft>
+              <a:defRPr sz="1800">
+                <a:solidFill>
+                  <a:srgbClr val="122C4E"/>
+                </a:solidFill>
+                <a:latin typeface="Noto Sans CJK KR"/>
+              </a:defRPr>
+            </a:pPr>
+            <a:r>
+              <a:t>• □ 버전 식별: CHECKSUM_or_TAG.txt의 SHA-256 manifest</a:t>
+            </a:r>
+          </a:p>
+          <a:p>
+            <a:pPr>
+              <a:spcAft>
+                <a:spcPts val="800"/>
+              </a:spcAft>
+              <a:defRPr sz="1800">
+                <a:solidFill>
+                  <a:srgbClr val="122C4E"/>
+                </a:solidFill>
+                <a:latin typeface="Noto Sans CJK KR"/>
+              </a:defRPr>
+            </a:pPr>
+            <a:r>
+              <a:t>• □ 다음 시작 조건: M11 RViz2</a:t>
+            </a:r>
+          </a:p>
+        </p:txBody>
+      </p:sp>
+      <p:sp>
+        <p:nvSpPr>
+          <p:cNvPr id="9" name="TextBox 8"/>
+          <p:cNvSpPr txBox="1"/>
+          <p:nvPr/>
+        </p:nvSpPr>
+        <p:spPr>
+          <a:xfrm>
+            <a:off x="868680" y="5596128"/>
+            <a:ext cx="10515600" cy="338328"/>
+          </a:xfrm>
+          <a:prstGeom prst="rect">
+            <a:avLst/>
+          </a:prstGeom>
+          <a:noFill/>
+        </p:spPr>
+        <p:txBody>
+          <a:bodyPr wrap="square" lIns="73152" rIns="73152" tIns="36576" bIns="36576">
+            <a:spAutoFit/>
+          </a:bodyPr>
+          <a:lstStyle/>
+          <a:p>
+            <a:pPr algn="ctr">
+              <a:spcAft>
+                <a:spcPts val="0"/>
+              </a:spcAft>
+              <a:defRPr sz="1700" b="1">
+                <a:solidFill>
+                  <a:srgbClr val="2A8B5A"/>
+                </a:solidFill>
+                <a:latin typeface="Noto Sans CJK KR"/>
+              </a:defRPr>
+            </a:pPr>
+            <a:r>
+              <a:t>다음 모듈을 시작하기 전, 내 src의 변경사항을 저장하고 현재 완료 조건을 다시 확인합니다.</a:t>
+            </a:r>
+          </a:p>
+        </p:txBody>
+      </p:sp>
+    </p:spTree>
+  </p:cSld>
+  <p:clrMapOvr>
+    <a:masterClrMapping/>
+  </p:clrMapOvr>
+</p:sld>
+</file>
+
+<file path=ppt/slides/slide29.xml><?xml version="1.0" encoding="utf-8"?>
 <p:sld xmlns:a="http://schemas.openxmlformats.org/drawingml/2006/main" xmlns:p="http://schemas.openxmlformats.org/presentationml/2006/main" xmlns:r="http://schemas.openxmlformats.org/officeDocument/2006/relationships">
   <p:cSld>
     <p:spTree>

--- a/blocks/C_drive_visualization/M10_ros_gz_bridge/M10_ros_gz_bridge_ROS2_Gazebo_연결.pptx
+++ b/blocks/C_drive_visualization/M10_ros_gz_bridge/M10_ros_gz_bridge_ROS2_Gazebo_연결.pptx
@@ -6176,7 +6176,7 @@
               <a:spcAft>
                 <a:spcPts val="0"/>
               </a:spcAft>
-              <a:defRPr sz="1800" b="1">
+              <a:defRPr sz="1400" b="1">
                 <a:solidFill>
                   <a:srgbClr val="FFFFFF"/>
                 </a:solidFill>
@@ -6184,7 +6184,7 @@
               </a:defRPr>
             </a:pPr>
             <a:r>
-              <a:t>M10 · Block C · ROS 2 + Gazebo Sim AGV</a:t>
+              <a:t>ROS 2 기반 AGV End-to-End 개발 커리큘럼 · M10 · Block C</a:t>
             </a:r>
           </a:p>
         </p:txBody>
@@ -6394,7 +6394,7 @@
               <a:spcAft>
                 <a:spcPts val="0"/>
               </a:spcAft>
-              <a:defRPr sz="1000" b="0">
+              <a:defRPr sz="900" b="0">
                 <a:solidFill>
                   <a:srgbClr val="5C6672"/>
                 </a:solidFill>
@@ -6402,7 +6402,7 @@
               </a:defRPr>
             </a:pPr>
             <a:r>
-              <a:t>ROS 2 Jazzy · Gazebo Harmonic · M10 · 따라 하기형 AGV 실습</a:t>
+              <a:t>ROS 2 기반 AGV End-to-End 개발 커리큘럼 · M10 · Block C</a:t>
             </a:r>
           </a:p>
         </p:txBody>
@@ -6568,7 +6568,7 @@
               <a:spcAft>
                 <a:spcPts val="0"/>
               </a:spcAft>
-              <a:defRPr sz="1000" b="0">
+              <a:defRPr sz="900" b="0">
                 <a:solidFill>
                   <a:srgbClr val="5C6672"/>
                 </a:solidFill>
@@ -6576,7 +6576,7 @@
               </a:defRPr>
             </a:pPr>
             <a:r>
-              <a:t>ROS 2 Jazzy · Gazebo Harmonic · M10 · 따라 하기형 AGV 실습</a:t>
+              <a:t>ROS 2 기반 AGV End-to-End 개발 커리큘럼 · M10 · Block C</a:t>
             </a:r>
           </a:p>
         </p:txBody>
@@ -7357,7 +7357,7 @@
               <a:spcAft>
                 <a:spcPts val="0"/>
               </a:spcAft>
-              <a:defRPr sz="1000" b="0">
+              <a:defRPr sz="900" b="0">
                 <a:solidFill>
                   <a:srgbClr val="5C6672"/>
                 </a:solidFill>
@@ -7365,7 +7365,7 @@
               </a:defRPr>
             </a:pPr>
             <a:r>
-              <a:t>ROS 2 Jazzy · Gazebo Harmonic · M10 · 따라 하기형 AGV 실습</a:t>
+              <a:t>ROS 2 기반 AGV End-to-End 개발 커리큘럼 · M10 · Block C</a:t>
             </a:r>
           </a:p>
         </p:txBody>
@@ -7831,7 +7831,7 @@
               <a:spcAft>
                 <a:spcPts val="0"/>
               </a:spcAft>
-              <a:defRPr sz="1000" b="0">
+              <a:defRPr sz="900" b="0">
                 <a:solidFill>
                   <a:srgbClr val="5C6672"/>
                 </a:solidFill>
@@ -7839,7 +7839,7 @@
               </a:defRPr>
             </a:pPr>
             <a:r>
-              <a:t>ROS 2 Jazzy · Gazebo Harmonic · M10 · 따라 하기형 AGV 실습</a:t>
+              <a:t>ROS 2 기반 AGV End-to-End 개발 커리큘럼 · M10 · Block C</a:t>
             </a:r>
           </a:p>
         </p:txBody>
@@ -8305,7 +8305,7 @@
               <a:spcAft>
                 <a:spcPts val="0"/>
               </a:spcAft>
-              <a:defRPr sz="1000" b="0">
+              <a:defRPr sz="900" b="0">
                 <a:solidFill>
                   <a:srgbClr val="5C6672"/>
                 </a:solidFill>
@@ -8313,7 +8313,7 @@
               </a:defRPr>
             </a:pPr>
             <a:r>
-              <a:t>ROS 2 Jazzy · Gazebo Harmonic · M10 · 따라 하기형 AGV 실습</a:t>
+              <a:t>ROS 2 기반 AGV End-to-End 개발 커리큘럼 · M10 · Block C</a:t>
             </a:r>
           </a:p>
         </p:txBody>
@@ -8755,7 +8755,7 @@
               <a:spcAft>
                 <a:spcPts val="0"/>
               </a:spcAft>
-              <a:defRPr sz="1000" b="0">
+              <a:defRPr sz="900" b="0">
                 <a:solidFill>
                   <a:srgbClr val="5C6672"/>
                 </a:solidFill>
@@ -8763,7 +8763,7 @@
               </a:defRPr>
             </a:pPr>
             <a:r>
-              <a:t>ROS 2 Jazzy · Gazebo Harmonic · M10 · 따라 하기형 AGV 실습</a:t>
+              <a:t>ROS 2 기반 AGV End-to-End 개발 커리큘럼 · M10 · Block C</a:t>
             </a:r>
           </a:p>
         </p:txBody>
@@ -9283,7 +9283,7 @@
               <a:spcAft>
                 <a:spcPts val="0"/>
               </a:spcAft>
-              <a:defRPr sz="1000" b="0">
+              <a:defRPr sz="900" b="0">
                 <a:solidFill>
                   <a:srgbClr val="5C6672"/>
                 </a:solidFill>
@@ -9291,7 +9291,7 @@
               </a:defRPr>
             </a:pPr>
             <a:r>
-              <a:t>ROS 2 Jazzy · Gazebo Harmonic · M10 · 따라 하기형 AGV 실습</a:t>
+              <a:t>ROS 2 기반 AGV End-to-End 개발 커리큘럼 · M10 · Block C</a:t>
             </a:r>
           </a:p>
         </p:txBody>
@@ -10072,7 +10072,7 @@
               <a:spcAft>
                 <a:spcPts val="0"/>
               </a:spcAft>
-              <a:defRPr sz="1000" b="0">
+              <a:defRPr sz="900" b="0">
                 <a:solidFill>
                   <a:srgbClr val="5C6672"/>
                 </a:solidFill>
@@ -10080,7 +10080,7 @@
               </a:defRPr>
             </a:pPr>
             <a:r>
-              <a:t>ROS 2 Jazzy · Gazebo Harmonic · M10 · 따라 하기형 AGV 실습</a:t>
+              <a:t>ROS 2 기반 AGV End-to-End 개발 커리큘럼 · M10 · Block C</a:t>
             </a:r>
           </a:p>
         </p:txBody>
@@ -10869,7 +10869,7 @@
               <a:spcAft>
                 <a:spcPts val="0"/>
               </a:spcAft>
-              <a:defRPr sz="1000" b="0">
+              <a:defRPr sz="900" b="0">
                 <a:solidFill>
                   <a:srgbClr val="5C6672"/>
                 </a:solidFill>
@@ -10877,7 +10877,7 @@
               </a:defRPr>
             </a:pPr>
             <a:r>
-              <a:t>ROS 2 Jazzy · Gazebo Harmonic · M10 · 따라 하기형 AGV 실습</a:t>
+              <a:t>ROS 2 기반 AGV End-to-End 개발 커리큘럼 · M10 · Block C</a:t>
             </a:r>
           </a:p>
         </p:txBody>
@@ -11442,7 +11442,7 @@
               <a:spcAft>
                 <a:spcPts val="0"/>
               </a:spcAft>
-              <a:defRPr sz="1000" b="0">
+              <a:defRPr sz="900" b="0">
                 <a:solidFill>
                   <a:srgbClr val="5C6672"/>
                 </a:solidFill>
@@ -11450,7 +11450,7 @@
               </a:defRPr>
             </a:pPr>
             <a:r>
-              <a:t>ROS 2 Jazzy · Gazebo Harmonic · M10 · 따라 하기형 AGV 실습</a:t>
+              <a:t>ROS 2 기반 AGV End-to-End 개발 커리큘럼 · M10 · Block C</a:t>
             </a:r>
           </a:p>
         </p:txBody>
@@ -11913,7 +11913,7 @@
               <a:spcAft>
                 <a:spcPts val="0"/>
               </a:spcAft>
-              <a:defRPr sz="1000" b="0">
+              <a:defRPr sz="900" b="0">
                 <a:solidFill>
                   <a:srgbClr val="5C6672"/>
                 </a:solidFill>
@@ -11921,7 +11921,7 @@
               </a:defRPr>
             </a:pPr>
             <a:r>
-              <a:t>ROS 2 Jazzy · Gazebo Harmonic · M10 · 따라 하기형 AGV 실습</a:t>
+              <a:t>ROS 2 기반 AGV End-to-End 개발 커리큘럼 · M10 · Block C</a:t>
             </a:r>
           </a:p>
         </p:txBody>
@@ -12367,7 +12367,7 @@
               <a:spcAft>
                 <a:spcPts val="0"/>
               </a:spcAft>
-              <a:defRPr sz="1000" b="0">
+              <a:defRPr sz="900" b="0">
                 <a:solidFill>
                   <a:srgbClr val="5C6672"/>
                 </a:solidFill>
@@ -12375,7 +12375,7 @@
               </a:defRPr>
             </a:pPr>
             <a:r>
-              <a:t>ROS 2 Jazzy · Gazebo Harmonic · M10 · 따라 하기형 AGV 실습</a:t>
+              <a:t>ROS 2 기반 AGV End-to-End 개발 커리큘럼 · M10 · Block C</a:t>
             </a:r>
           </a:p>
         </p:txBody>
@@ -12828,7 +12828,7 @@
               <a:spcAft>
                 <a:spcPts val="0"/>
               </a:spcAft>
-              <a:defRPr sz="1000" b="0">
+              <a:defRPr sz="900" b="0">
                 <a:solidFill>
                   <a:srgbClr val="5C6672"/>
                 </a:solidFill>
@@ -12836,7 +12836,7 @@
               </a:defRPr>
             </a:pPr>
             <a:r>
-              <a:t>ROS 2 Jazzy · Gazebo Harmonic · M10 · 따라 하기형 AGV 실습</a:t>
+              <a:t>ROS 2 기반 AGV End-to-End 개발 커리큘럼 · M10 · Block C</a:t>
             </a:r>
           </a:p>
         </p:txBody>
@@ -13278,7 +13278,7 @@
               <a:spcAft>
                 <a:spcPts val="0"/>
               </a:spcAft>
-              <a:defRPr sz="1000" b="0">
+              <a:defRPr sz="900" b="0">
                 <a:solidFill>
                   <a:srgbClr val="5C6672"/>
                 </a:solidFill>
@@ -13286,7 +13286,7 @@
               </a:defRPr>
             </a:pPr>
             <a:r>
-              <a:t>ROS 2 Jazzy · Gazebo Harmonic · M10 · 따라 하기형 AGV 실습</a:t>
+              <a:t>ROS 2 기반 AGV End-to-End 개발 커리큘럼 · M10 · Block C</a:t>
             </a:r>
           </a:p>
         </p:txBody>
@@ -13732,7 +13732,7 @@
               <a:spcAft>
                 <a:spcPts val="0"/>
               </a:spcAft>
-              <a:defRPr sz="1000" b="0">
+              <a:defRPr sz="900" b="0">
                 <a:solidFill>
                   <a:srgbClr val="5C6672"/>
                 </a:solidFill>
@@ -13740,7 +13740,7 @@
               </a:defRPr>
             </a:pPr>
             <a:r>
-              <a:t>ROS 2 Jazzy · Gazebo Harmonic · M10 · 따라 하기형 AGV 실습</a:t>
+              <a:t>ROS 2 기반 AGV End-to-End 개발 커리큘럼 · M10 · Block C</a:t>
             </a:r>
           </a:p>
         </p:txBody>
@@ -14104,7 +14104,7 @@
               <a:spcAft>
                 <a:spcPts val="0"/>
               </a:spcAft>
-              <a:defRPr sz="1000" b="0">
+              <a:defRPr sz="900" b="0">
                 <a:solidFill>
                   <a:srgbClr val="5C6672"/>
                 </a:solidFill>
@@ -14112,7 +14112,7 @@
               </a:defRPr>
             </a:pPr>
             <a:r>
-              <a:t>ROS 2 Jazzy · Gazebo Harmonic · M10 · 따라 하기형 AGV 실습</a:t>
+              <a:t>ROS 2 기반 AGV End-to-End 개발 커리큘럼 · M10 · Block C</a:t>
             </a:r>
           </a:p>
         </p:txBody>
@@ -14341,7 +14341,7 @@
               <a:spcAft>
                 <a:spcPts val="0"/>
               </a:spcAft>
-              <a:defRPr sz="1000" b="0">
+              <a:defRPr sz="900" b="0">
                 <a:solidFill>
                   <a:srgbClr val="5C6672"/>
                 </a:solidFill>
@@ -14349,7 +14349,7 @@
               </a:defRPr>
             </a:pPr>
             <a:r>
-              <a:t>ROS 2 Jazzy · Gazebo Harmonic · M10 · 따라 하기형 AGV 실습</a:t>
+              <a:t>ROS 2 기반 AGV End-to-End 개발 커리큘럼 · M10 · Block C</a:t>
             </a:r>
           </a:p>
         </p:txBody>
@@ -14744,7 +14744,7 @@
               <a:spcAft>
                 <a:spcPts val="0"/>
               </a:spcAft>
-              <a:defRPr sz="1000" b="0">
+              <a:defRPr sz="900" b="0">
                 <a:solidFill>
                   <a:srgbClr val="5C6672"/>
                 </a:solidFill>
@@ -14752,7 +14752,7 @@
               </a:defRPr>
             </a:pPr>
             <a:r>
-              <a:t>ROS 2 Jazzy · Gazebo Harmonic · M10 · 따라 하기형 AGV 실습</a:t>
+              <a:t>ROS 2 기반 AGV End-to-End 개발 커리큘럼 · M10 · Block C</a:t>
             </a:r>
           </a:p>
         </p:txBody>
@@ -15269,7 +15269,7 @@
               <a:spcAft>
                 <a:spcPts val="0"/>
               </a:spcAft>
-              <a:defRPr sz="1000" b="0">
+              <a:defRPr sz="900" b="0">
                 <a:solidFill>
                   <a:srgbClr val="5C6672"/>
                 </a:solidFill>
@@ -15277,7 +15277,7 @@
               </a:defRPr>
             </a:pPr>
             <a:r>
-              <a:t>ROS 2 Jazzy · Gazebo Harmonic · M10 · 따라 하기형 AGV 실습</a:t>
+              <a:t>ROS 2 기반 AGV End-to-End 개발 커리큘럼 · M10 · Block C</a:t>
             </a:r>
           </a:p>
         </p:txBody>
@@ -15653,7 +15653,7 @@
               <a:spcAft>
                 <a:spcPts val="0"/>
               </a:spcAft>
-              <a:defRPr sz="1000" b="0">
+              <a:defRPr sz="900" b="0">
                 <a:solidFill>
                   <a:srgbClr val="5C6672"/>
                 </a:solidFill>
@@ -15661,7 +15661,7 @@
               </a:defRPr>
             </a:pPr>
             <a:r>
-              <a:t>ROS 2 Jazzy · Gazebo Harmonic · M10 · 따라 하기형 AGV 실습</a:t>
+              <a:t>ROS 2 기반 AGV End-to-End 개발 커리큘럼 · M10 · Block C</a:t>
             </a:r>
           </a:p>
         </p:txBody>
@@ -15982,7 +15982,7 @@
               <a:spcAft>
                 <a:spcPts val="0"/>
               </a:spcAft>
-              <a:defRPr sz="1000" b="0">
+              <a:defRPr sz="900" b="0">
                 <a:solidFill>
                   <a:srgbClr val="5C6672"/>
                 </a:solidFill>
@@ -15990,7 +15990,7 @@
               </a:defRPr>
             </a:pPr>
             <a:r>
-              <a:t>ROS 2 Jazzy · Gazebo Harmonic · M10 · 따라 하기형 AGV 실습</a:t>
+              <a:t>ROS 2 기반 AGV End-to-End 개발 커리큘럼 · M10 · Block C</a:t>
             </a:r>
           </a:p>
         </p:txBody>
@@ -16401,7 +16401,7 @@
               <a:spcAft>
                 <a:spcPts val="0"/>
               </a:spcAft>
-              <a:defRPr sz="1000" b="0">
+              <a:defRPr sz="900" b="0">
                 <a:solidFill>
                   <a:srgbClr val="5C6672"/>
                 </a:solidFill>
@@ -16409,7 +16409,7 @@
               </a:defRPr>
             </a:pPr>
             <a:r>
-              <a:t>ROS 2 Jazzy · Gazebo Harmonic · M10 · 따라 하기형 AGV 실습</a:t>
+              <a:t>ROS 2 기반 AGV End-to-End 개발 커리큘럼 · M10 · Block C</a:t>
             </a:r>
           </a:p>
         </p:txBody>
@@ -16932,7 +16932,7 @@
               <a:spcAft>
                 <a:spcPts val="0"/>
               </a:spcAft>
-              <a:defRPr sz="1000" b="0">
+              <a:defRPr sz="900" b="0">
                 <a:solidFill>
                   <a:srgbClr val="5C6672"/>
                 </a:solidFill>
@@ -16940,7 +16940,7 @@
               </a:defRPr>
             </a:pPr>
             <a:r>
-              <a:t>ROS 2 Jazzy · Gazebo Harmonic · M10 · 따라 하기형 AGV 실습</a:t>
+              <a:t>ROS 2 기반 AGV End-to-End 개발 커리큘럼 · M10 · Block C</a:t>
             </a:r>
           </a:p>
         </p:txBody>
@@ -17351,7 +17351,7 @@
               <a:spcAft>
                 <a:spcPts val="0"/>
               </a:spcAft>
-              <a:defRPr sz="1000" b="0">
+              <a:defRPr sz="900" b="0">
                 <a:solidFill>
                   <a:srgbClr val="5C6672"/>
                 </a:solidFill>
@@ -17359,7 +17359,7 @@
               </a:defRPr>
             </a:pPr>
             <a:r>
-              <a:t>ROS 2 Jazzy · Gazebo Harmonic · M10 · 따라 하기형 AGV 실습</a:t>
+              <a:t>ROS 2 기반 AGV End-to-End 개발 커리큘럼 · M10 · Block C</a:t>
             </a:r>
           </a:p>
         </p:txBody>
@@ -17684,7 +17684,7 @@
               <a:spcAft>
                 <a:spcPts val="0"/>
               </a:spcAft>
-              <a:defRPr sz="1000" b="0">
+              <a:defRPr sz="900" b="0">
                 <a:solidFill>
                   <a:srgbClr val="5C6672"/>
                 </a:solidFill>
@@ -17692,7 +17692,7 @@
               </a:defRPr>
             </a:pPr>
             <a:r>
-              <a:t>ROS 2 Jazzy · Gazebo Harmonic · M10 · 따라 하기형 AGV 실습</a:t>
+              <a:t>ROS 2 기반 AGV End-to-End 개발 커리큘럼 · M10 · Block C</a:t>
             </a:r>
           </a:p>
         </p:txBody>
@@ -18324,7 +18324,7 @@
               <a:spcAft>
                 <a:spcPts val="0"/>
               </a:spcAft>
-              <a:defRPr sz="1000" b="0">
+              <a:defRPr sz="900" b="0">
                 <a:solidFill>
                   <a:srgbClr val="5C6672"/>
                 </a:solidFill>
@@ -18332,7 +18332,7 @@
               </a:defRPr>
             </a:pPr>
             <a:r>
-              <a:t>ROS 2 Jazzy · Gazebo Harmonic · M10 · 따라 하기형 AGV 실습</a:t>
+              <a:t>ROS 2 기반 AGV End-to-End 개발 커리큘럼 · M10 · Block C</a:t>
             </a:r>
           </a:p>
         </p:txBody>
@@ -18789,7 +18789,7 @@
               <a:spcAft>
                 <a:spcPts val="0"/>
               </a:spcAft>
-              <a:defRPr sz="1000" b="0">
+              <a:defRPr sz="900" b="0">
                 <a:solidFill>
                   <a:srgbClr val="5C6672"/>
                 </a:solidFill>
@@ -18797,7 +18797,7 @@
               </a:defRPr>
             </a:pPr>
             <a:r>
-              <a:t>ROS 2 Jazzy · Gazebo Harmonic · M10 · 따라 하기형 AGV 실습</a:t>
+              <a:t>ROS 2 기반 AGV End-to-End 개발 커리큘럼 · M10 · Block C</a:t>
             </a:r>
           </a:p>
         </p:txBody>
@@ -19068,7 +19068,7 @@
               <a:spcAft>
                 <a:spcPts val="0"/>
               </a:spcAft>
-              <a:defRPr sz="1000" b="0">
+              <a:defRPr sz="900" b="0">
                 <a:solidFill>
                   <a:srgbClr val="5C6672"/>
                 </a:solidFill>
@@ -19076,7 +19076,7 @@
               </a:defRPr>
             </a:pPr>
             <a:r>
-              <a:t>ROS 2 Jazzy · Gazebo Harmonic · M10 · 따라 하기형 AGV 실습</a:t>
+              <a:t>ROS 2 기반 AGV End-to-End 개발 커리큘럼 · M10 · Block C</a:t>
             </a:r>
           </a:p>
         </p:txBody>
@@ -19944,7 +19944,7 @@
               <a:spcAft>
                 <a:spcPts val="0"/>
               </a:spcAft>
-              <a:defRPr sz="1000" b="0">
+              <a:defRPr sz="900" b="0">
                 <a:solidFill>
                   <a:srgbClr val="5C6672"/>
                 </a:solidFill>
@@ -19952,7 +19952,7 @@
               </a:defRPr>
             </a:pPr>
             <a:r>
-              <a:t>ROS 2 Jazzy · Gazebo Harmonic · M10 · 따라 하기형 AGV 실습</a:t>
+              <a:t>ROS 2 기반 AGV End-to-End 개발 커리큘럼 · M10 · Block C</a:t>
             </a:r>
           </a:p>
         </p:txBody>

--- a/blocks/C_drive_visualization/M10_ros_gz_bridge/M10_ros_gz_bridge_ROS2_Gazebo_연결.pptx
+++ b/blocks/C_drive_visualization/M10_ros_gz_bridge/M10_ros_gz_bridge_ROS2_Gazebo_연결.pptx
@@ -7606,7 +7606,7 @@
           </a:fontRef>
         </p:style>
         <p:txBody>
-          <a:bodyPr rtlCol="0" anchor="ctr" wrap="square" lIns="164592" rIns="164592" tIns="109728" bIns="36576"/>
+          <a:bodyPr rtlCol="0" anchor="ctr" wrap="square" lIns="164592" rIns="164592" tIns="109728" bIns="73152"/>
           <a:lstStyle/>
           <a:p>
             <a:pPr algn="l">
@@ -7623,47 +7623,179 @@
             <a:r>
               <a:t>- ros_topic_name: "/cmd_vel"</a:t>
             </a:r>
-            <a:br/>
+          </a:p>
+          <a:p>
+            <a:pPr algn="l">
+              <a:spcAft>
+                <a:spcPts val="0"/>
+              </a:spcAft>
+              <a:defRPr sz="1400" b="0">
+                <a:solidFill>
+                  <a:srgbClr val="FFFFFF"/>
+                </a:solidFill>
+                <a:latin typeface="DejaVu Sans Mono"/>
+              </a:defRPr>
+            </a:pPr>
             <a:r>
               <a:t>  gz_topic_name: "/cmd_vel"</a:t>
             </a:r>
-            <a:br/>
+          </a:p>
+          <a:p>
+            <a:pPr algn="l">
+              <a:spcAft>
+                <a:spcPts val="0"/>
+              </a:spcAft>
+              <a:defRPr sz="1400" b="0">
+                <a:solidFill>
+                  <a:srgbClr val="FFFFFF"/>
+                </a:solidFill>
+                <a:latin typeface="DejaVu Sans Mono"/>
+              </a:defRPr>
+            </a:pPr>
             <a:r>
               <a:t>  ros_type_name: "geometry_msgs/msg/Twist"</a:t>
             </a:r>
-            <a:br/>
+          </a:p>
+          <a:p>
+            <a:pPr algn="l">
+              <a:spcAft>
+                <a:spcPts val="0"/>
+              </a:spcAft>
+              <a:defRPr sz="1400" b="0">
+                <a:solidFill>
+                  <a:srgbClr val="FFFFFF"/>
+                </a:solidFill>
+                <a:latin typeface="DejaVu Sans Mono"/>
+              </a:defRPr>
+            </a:pPr>
             <a:r>
               <a:t>  gz_type_name: "gz.msgs.Twist"</a:t>
             </a:r>
-            <a:br/>
+          </a:p>
+          <a:p>
+            <a:pPr algn="l">
+              <a:spcAft>
+                <a:spcPts val="0"/>
+              </a:spcAft>
+              <a:defRPr sz="1400" b="0">
+                <a:solidFill>
+                  <a:srgbClr val="FFFFFF"/>
+                </a:solidFill>
+                <a:latin typeface="DejaVu Sans Mono"/>
+              </a:defRPr>
+            </a:pPr>
             <a:r>
               <a:t>  direction: ROS_TO_GZ</a:t>
             </a:r>
-            <a:br/>
+          </a:p>
+          <a:p>
+            <a:pPr algn="l">
+              <a:spcAft>
+                <a:spcPts val="0"/>
+              </a:spcAft>
+              <a:defRPr sz="1400" b="0">
+                <a:solidFill>
+                  <a:srgbClr val="FFFFFF"/>
+                </a:solidFill>
+                <a:latin typeface="DejaVu Sans Mono"/>
+              </a:defRPr>
+            </a:pPr>
             <a:r>
               <a:t>- ros_topic_name: "/odom"</a:t>
             </a:r>
-            <a:br/>
+          </a:p>
+          <a:p>
+            <a:pPr algn="l">
+              <a:spcAft>
+                <a:spcPts val="0"/>
+              </a:spcAft>
+              <a:defRPr sz="1400" b="0">
+                <a:solidFill>
+                  <a:srgbClr val="FFFFFF"/>
+                </a:solidFill>
+                <a:latin typeface="DejaVu Sans Mono"/>
+              </a:defRPr>
+            </a:pPr>
             <a:r>
               <a:t>  gz_topic_name: "/odom"</a:t>
             </a:r>
-            <a:br/>
+          </a:p>
+          <a:p>
+            <a:pPr algn="l">
+              <a:spcAft>
+                <a:spcPts val="0"/>
+              </a:spcAft>
+              <a:defRPr sz="1400" b="0">
+                <a:solidFill>
+                  <a:srgbClr val="FFFFFF"/>
+                </a:solidFill>
+                <a:latin typeface="DejaVu Sans Mono"/>
+              </a:defRPr>
+            </a:pPr>
             <a:r>
               <a:t>  ros_type_name: "nav_msgs/msg/Odometry"</a:t>
             </a:r>
-            <a:br/>
+          </a:p>
+          <a:p>
+            <a:pPr algn="l">
+              <a:spcAft>
+                <a:spcPts val="0"/>
+              </a:spcAft>
+              <a:defRPr sz="1400" b="0">
+                <a:solidFill>
+                  <a:srgbClr val="FFFFFF"/>
+                </a:solidFill>
+                <a:latin typeface="DejaVu Sans Mono"/>
+              </a:defRPr>
+            </a:pPr>
             <a:r>
               <a:t>  gz_type_name: "gz.msgs.Odometry"</a:t>
             </a:r>
-            <a:br/>
+          </a:p>
+          <a:p>
+            <a:pPr algn="l">
+              <a:spcAft>
+                <a:spcPts val="0"/>
+              </a:spcAft>
+              <a:defRPr sz="1400" b="0">
+                <a:solidFill>
+                  <a:srgbClr val="FFFFFF"/>
+                </a:solidFill>
+                <a:latin typeface="DejaVu Sans Mono"/>
+              </a:defRPr>
+            </a:pPr>
             <a:r>
               <a:t>  direction: GZ_TO_ROS</a:t>
             </a:r>
-            <a:br/>
+          </a:p>
+          <a:p>
+            <a:pPr algn="l">
+              <a:spcAft>
+                <a:spcPts val="0"/>
+              </a:spcAft>
+              <a:defRPr sz="1400" b="0">
+                <a:solidFill>
+                  <a:srgbClr val="FFFFFF"/>
+                </a:solidFill>
+                <a:latin typeface="DejaVu Sans Mono"/>
+              </a:defRPr>
+            </a:pPr>
             <a:r>
               <a:t>- ros_topic_name: "/scan"</a:t>
             </a:r>
-            <a:br/>
+          </a:p>
+          <a:p>
+            <a:pPr algn="l">
+              <a:spcAft>
+                <a:spcPts val="0"/>
+              </a:spcAft>
+              <a:defRPr sz="1400" b="0">
+                <a:solidFill>
+                  <a:srgbClr val="FFFFFF"/>
+                </a:solidFill>
+                <a:latin typeface="DejaVu Sans Mono"/>
+              </a:defRPr>
+            </a:pPr>
             <a:r>
               <a:t>  gz_topic_name: "/scan"</a:t>
             </a:r>
@@ -8080,7 +8212,7 @@
           </a:fontRef>
         </p:style>
         <p:txBody>
-          <a:bodyPr rtlCol="0" anchor="ctr" wrap="square" lIns="164592" rIns="164592" tIns="109728" bIns="36576"/>
+          <a:bodyPr rtlCol="0" anchor="ctr" wrap="square" lIns="164592" rIns="164592" tIns="109728" bIns="73152"/>
           <a:lstStyle/>
           <a:p>
             <a:pPr algn="l">
@@ -8097,47 +8229,179 @@
             <a:r>
               <a:t>  ros_type_name: "sensor_msgs/msg/LaserScan"</a:t>
             </a:r>
-            <a:br/>
+          </a:p>
+          <a:p>
+            <a:pPr algn="l">
+              <a:spcAft>
+                <a:spcPts val="0"/>
+              </a:spcAft>
+              <a:defRPr sz="1400" b="0">
+                <a:solidFill>
+                  <a:srgbClr val="FFFFFF"/>
+                </a:solidFill>
+                <a:latin typeface="DejaVu Sans Mono"/>
+              </a:defRPr>
+            </a:pPr>
             <a:r>
               <a:t>  gz_type_name: "gz.msgs.LaserScan"</a:t>
             </a:r>
-            <a:br/>
+          </a:p>
+          <a:p>
+            <a:pPr algn="l">
+              <a:spcAft>
+                <a:spcPts val="0"/>
+              </a:spcAft>
+              <a:defRPr sz="1400" b="0">
+                <a:solidFill>
+                  <a:srgbClr val="FFFFFF"/>
+                </a:solidFill>
+                <a:latin typeface="DejaVu Sans Mono"/>
+              </a:defRPr>
+            </a:pPr>
             <a:r>
               <a:t>  direction: GZ_TO_ROS</a:t>
             </a:r>
-            <a:br/>
+          </a:p>
+          <a:p>
+            <a:pPr algn="l">
+              <a:spcAft>
+                <a:spcPts val="0"/>
+              </a:spcAft>
+              <a:defRPr sz="1400" b="0">
+                <a:solidFill>
+                  <a:srgbClr val="FFFFFF"/>
+                </a:solidFill>
+                <a:latin typeface="DejaVu Sans Mono"/>
+              </a:defRPr>
+            </a:pPr>
             <a:r>
               <a:t>- ros_topic_name: "/imu/data"</a:t>
             </a:r>
-            <a:br/>
+          </a:p>
+          <a:p>
+            <a:pPr algn="l">
+              <a:spcAft>
+                <a:spcPts val="0"/>
+              </a:spcAft>
+              <a:defRPr sz="1400" b="0">
+                <a:solidFill>
+                  <a:srgbClr val="FFFFFF"/>
+                </a:solidFill>
+                <a:latin typeface="DejaVu Sans Mono"/>
+              </a:defRPr>
+            </a:pPr>
             <a:r>
               <a:t>  gz_topic_name: "/imu/data"</a:t>
             </a:r>
-            <a:br/>
+          </a:p>
+          <a:p>
+            <a:pPr algn="l">
+              <a:spcAft>
+                <a:spcPts val="0"/>
+              </a:spcAft>
+              <a:defRPr sz="1400" b="0">
+                <a:solidFill>
+                  <a:srgbClr val="FFFFFF"/>
+                </a:solidFill>
+                <a:latin typeface="DejaVu Sans Mono"/>
+              </a:defRPr>
+            </a:pPr>
             <a:r>
               <a:t>  ros_type_name: "sensor_msgs/msg/Imu"</a:t>
             </a:r>
-            <a:br/>
+          </a:p>
+          <a:p>
+            <a:pPr algn="l">
+              <a:spcAft>
+                <a:spcPts val="0"/>
+              </a:spcAft>
+              <a:defRPr sz="1400" b="0">
+                <a:solidFill>
+                  <a:srgbClr val="FFFFFF"/>
+                </a:solidFill>
+                <a:latin typeface="DejaVu Sans Mono"/>
+              </a:defRPr>
+            </a:pPr>
             <a:r>
               <a:t>  gz_type_name: "gz.msgs.IMU"</a:t>
             </a:r>
-            <a:br/>
+          </a:p>
+          <a:p>
+            <a:pPr algn="l">
+              <a:spcAft>
+                <a:spcPts val="0"/>
+              </a:spcAft>
+              <a:defRPr sz="1400" b="0">
+                <a:solidFill>
+                  <a:srgbClr val="FFFFFF"/>
+                </a:solidFill>
+                <a:latin typeface="DejaVu Sans Mono"/>
+              </a:defRPr>
+            </a:pPr>
             <a:r>
               <a:t>  direction: GZ_TO_ROS</a:t>
             </a:r>
-            <a:br/>
+          </a:p>
+          <a:p>
+            <a:pPr algn="l">
+              <a:spcAft>
+                <a:spcPts val="0"/>
+              </a:spcAft>
+              <a:defRPr sz="1400" b="0">
+                <a:solidFill>
+                  <a:srgbClr val="FFFFFF"/>
+                </a:solidFill>
+                <a:latin typeface="DejaVu Sans Mono"/>
+              </a:defRPr>
+            </a:pPr>
             <a:r>
               <a:t>- ros_topic_name: "/camera/image_raw"</a:t>
             </a:r>
-            <a:br/>
+          </a:p>
+          <a:p>
+            <a:pPr algn="l">
+              <a:spcAft>
+                <a:spcPts val="0"/>
+              </a:spcAft>
+              <a:defRPr sz="1400" b="0">
+                <a:solidFill>
+                  <a:srgbClr val="FFFFFF"/>
+                </a:solidFill>
+                <a:latin typeface="DejaVu Sans Mono"/>
+              </a:defRPr>
+            </a:pPr>
             <a:r>
               <a:t>  gz_topic_name: "/camera/image_raw"</a:t>
             </a:r>
-            <a:br/>
+          </a:p>
+          <a:p>
+            <a:pPr algn="l">
+              <a:spcAft>
+                <a:spcPts val="0"/>
+              </a:spcAft>
+              <a:defRPr sz="1400" b="0">
+                <a:solidFill>
+                  <a:srgbClr val="FFFFFF"/>
+                </a:solidFill>
+                <a:latin typeface="DejaVu Sans Mono"/>
+              </a:defRPr>
+            </a:pPr>
             <a:r>
               <a:t>  ros_type_name: "sensor_msgs/msg/Image"</a:t>
             </a:r>
-            <a:br/>
+          </a:p>
+          <a:p>
+            <a:pPr algn="l">
+              <a:spcAft>
+                <a:spcPts val="0"/>
+              </a:spcAft>
+              <a:defRPr sz="1400" b="0">
+                <a:solidFill>
+                  <a:srgbClr val="FFFFFF"/>
+                </a:solidFill>
+                <a:latin typeface="DejaVu Sans Mono"/>
+              </a:defRPr>
+            </a:pPr>
             <a:r>
               <a:t>  gz_type_name: "gz.msgs.Image"</a:t>
             </a:r>
@@ -8554,7 +8818,7 @@
           </a:fontRef>
         </p:style>
         <p:txBody>
-          <a:bodyPr rtlCol="0" anchor="ctr" wrap="square" lIns="164592" rIns="164592" tIns="109728" bIns="36576"/>
+          <a:bodyPr rtlCol="0" anchor="ctr" wrap="square" lIns="164592" rIns="164592" tIns="109728" bIns="73152"/>
           <a:lstStyle/>
           <a:p>
             <a:pPr algn="l">
@@ -8571,23 +8835,83 @@
             <a:r>
               <a:t>  direction: GZ_TO_ROS</a:t>
             </a:r>
-            <a:br/>
+          </a:p>
+          <a:p>
+            <a:pPr algn="l">
+              <a:spcAft>
+                <a:spcPts val="0"/>
+              </a:spcAft>
+              <a:defRPr sz="1400" b="0">
+                <a:solidFill>
+                  <a:srgbClr val="FFFFFF"/>
+                </a:solidFill>
+                <a:latin typeface="DejaVu Sans Mono"/>
+              </a:defRPr>
+            </a:pPr>
             <a:r>
               <a:t>- ros_topic_name: "/clock"</a:t>
             </a:r>
-            <a:br/>
+          </a:p>
+          <a:p>
+            <a:pPr algn="l">
+              <a:spcAft>
+                <a:spcPts val="0"/>
+              </a:spcAft>
+              <a:defRPr sz="1400" b="0">
+                <a:solidFill>
+                  <a:srgbClr val="FFFFFF"/>
+                </a:solidFill>
+                <a:latin typeface="DejaVu Sans Mono"/>
+              </a:defRPr>
+            </a:pPr>
             <a:r>
               <a:t>  gz_topic_name: "/clock"</a:t>
             </a:r>
-            <a:br/>
+          </a:p>
+          <a:p>
+            <a:pPr algn="l">
+              <a:spcAft>
+                <a:spcPts val="0"/>
+              </a:spcAft>
+              <a:defRPr sz="1400" b="0">
+                <a:solidFill>
+                  <a:srgbClr val="FFFFFF"/>
+                </a:solidFill>
+                <a:latin typeface="DejaVu Sans Mono"/>
+              </a:defRPr>
+            </a:pPr>
             <a:r>
               <a:t>  ros_type_name: "rosgraph_msgs/msg/Clock"</a:t>
             </a:r>
-            <a:br/>
+          </a:p>
+          <a:p>
+            <a:pPr algn="l">
+              <a:spcAft>
+                <a:spcPts val="0"/>
+              </a:spcAft>
+              <a:defRPr sz="1400" b="0">
+                <a:solidFill>
+                  <a:srgbClr val="FFFFFF"/>
+                </a:solidFill>
+                <a:latin typeface="DejaVu Sans Mono"/>
+              </a:defRPr>
+            </a:pPr>
             <a:r>
               <a:t>  gz_type_name: "gz.msgs.Clock"</a:t>
             </a:r>
-            <a:br/>
+          </a:p>
+          <a:p>
+            <a:pPr algn="l">
+              <a:spcAft>
+                <a:spcPts val="0"/>
+              </a:spcAft>
+              <a:defRPr sz="1400" b="0">
+                <a:solidFill>
+                  <a:srgbClr val="FFFFFF"/>
+                </a:solidFill>
+                <a:latin typeface="DejaVu Sans Mono"/>
+              </a:defRPr>
+            </a:pPr>
             <a:r>
               <a:t>  direction: GZ_TO_ROS</a:t>
             </a:r>
@@ -9059,7 +9383,7 @@
           </a:fontRef>
         </p:style>
         <p:txBody>
-          <a:bodyPr rtlCol="0" anchor="ctr" wrap="square" lIns="73152" rIns="73152" tIns="36576" bIns="36576"/>
+          <a:bodyPr rtlCol="0" anchor="ctr" wrap="square" lIns="109728" rIns="109728" tIns="73152" bIns="73152"/>
           <a:lstStyle/>
           <a:p>
             <a:pPr algn="l">
@@ -9076,7 +9400,19 @@
             <a:r>
               <a:t>mkdir -p ~/ros2_curri/my_agv_ws/src/agv_gazebo/launch</a:t>
             </a:r>
-            <a:br/>
+          </a:p>
+          <a:p>
+            <a:pPr algn="l">
+              <a:spcAft>
+                <a:spcPts val="0"/>
+              </a:spcAft>
+              <a:defRPr sz="1600" b="0">
+                <a:solidFill>
+                  <a:srgbClr val="FFFFFF"/>
+                </a:solidFill>
+                <a:latin typeface="DejaVu Sans Mono"/>
+              </a:defRPr>
+            </a:pPr>
             <a:r>
               <a:t>nano ~/ros2_curri/my_agv_ws/src/agv_gazebo/launch/gazebo.launch.py</a:t>
             </a:r>
@@ -11691,7 +12027,7 @@
           </a:fontRef>
         </p:style>
         <p:txBody>
-          <a:bodyPr rtlCol="0" anchor="ctr" wrap="square" lIns="164592" rIns="164592" tIns="109728" bIns="36576"/>
+          <a:bodyPr rtlCol="0" anchor="ctr" wrap="square" lIns="164592" rIns="164592" tIns="109728" bIns="73152"/>
           <a:lstStyle/>
           <a:p>
             <a:pPr algn="l">
@@ -11708,44 +12044,176 @@
             <a:r>
               <a:t>import os</a:t>
             </a:r>
-            <a:br/>
+          </a:p>
+          <a:p>
+            <a:pPr algn="l">
+              <a:spcAft>
+                <a:spcPts val="0"/>
+              </a:spcAft>
+              <a:defRPr sz="1400" b="0">
+                <a:solidFill>
+                  <a:srgbClr val="FFFFFF"/>
+                </a:solidFill>
+                <a:latin typeface="DejaVu Sans Mono"/>
+              </a:defRPr>
+            </a:pPr>
             <a:r>
               <a:t>from ament_index_python.packages import get_package_share_directory</a:t>
             </a:r>
-            <a:br/>
+          </a:p>
+          <a:p>
+            <a:pPr algn="l">
+              <a:spcAft>
+                <a:spcPts val="0"/>
+              </a:spcAft>
+              <a:defRPr sz="1400" b="0">
+                <a:solidFill>
+                  <a:srgbClr val="FFFFFF"/>
+                </a:solidFill>
+                <a:latin typeface="DejaVu Sans Mono"/>
+              </a:defRPr>
+            </a:pPr>
             <a:r>
               <a:t>from launch import LaunchDescription</a:t>
             </a:r>
-            <a:br/>
+          </a:p>
+          <a:p>
+            <a:pPr algn="l">
+              <a:spcAft>
+                <a:spcPts val="0"/>
+              </a:spcAft>
+              <a:defRPr sz="1400" b="0">
+                <a:solidFill>
+                  <a:srgbClr val="FFFFFF"/>
+                </a:solidFill>
+                <a:latin typeface="DejaVu Sans Mono"/>
+              </a:defRPr>
+            </a:pPr>
             <a:r>
               <a:t>from launch.actions import IncludeLaunchDescription, SetEnvironmentVariable</a:t>
             </a:r>
-            <a:br/>
+          </a:p>
+          <a:p>
+            <a:pPr algn="l">
+              <a:spcAft>
+                <a:spcPts val="0"/>
+              </a:spcAft>
+              <a:defRPr sz="1400" b="0">
+                <a:solidFill>
+                  <a:srgbClr val="FFFFFF"/>
+                </a:solidFill>
+                <a:latin typeface="DejaVu Sans Mono"/>
+              </a:defRPr>
+            </a:pPr>
             <a:r>
               <a:t>from launch.launch_description_sources import PythonLaunchDescriptionSource</a:t>
             </a:r>
-            <a:br/>
+          </a:p>
+          <a:p>
+            <a:pPr algn="l">
+              <a:spcAft>
+                <a:spcPts val="0"/>
+              </a:spcAft>
+              <a:defRPr sz="1400" b="0">
+                <a:solidFill>
+                  <a:srgbClr val="FFFFFF"/>
+                </a:solidFill>
+                <a:latin typeface="DejaVu Sans Mono"/>
+              </a:defRPr>
+            </a:pPr>
             <a:r>
               <a:t>from launch_ros.actions import Node</a:t>
             </a:r>
-            <a:br/>
-            <a:br/>
+          </a:p>
+          <a:p>
+            <a:pPr algn="l">
+              <a:spcAft>
+                <a:spcPts val="0"/>
+              </a:spcAft>
+              <a:defRPr sz="1400" b="0">
+                <a:solidFill>
+                  <a:srgbClr val="FFFFFF"/>
+                </a:solidFill>
+                <a:latin typeface="DejaVu Sans Mono"/>
+              </a:defRPr>
+            </a:pPr>
+          </a:p>
+          <a:p>
+            <a:pPr algn="l">
+              <a:spcAft>
+                <a:spcPts val="0"/>
+              </a:spcAft>
+              <a:defRPr sz="1400" b="0">
+                <a:solidFill>
+                  <a:srgbClr val="FFFFFF"/>
+                </a:solidFill>
+                <a:latin typeface="DejaVu Sans Mono"/>
+              </a:defRPr>
+            </a:pPr>
             <a:r>
               <a:t>def generate_launch_description():</a:t>
             </a:r>
-            <a:br/>
+          </a:p>
+          <a:p>
+            <a:pPr algn="l">
+              <a:spcAft>
+                <a:spcPts val="0"/>
+              </a:spcAft>
+              <a:defRPr sz="1400" b="0">
+                <a:solidFill>
+                  <a:srgbClr val="FFFFFF"/>
+                </a:solidFill>
+                <a:latin typeface="DejaVu Sans Mono"/>
+              </a:defRPr>
+            </a:pPr>
             <a:r>
               <a:t>    share = get_package_share_directory('agv_gazebo')</a:t>
             </a:r>
-            <a:br/>
+          </a:p>
+          <a:p>
+            <a:pPr algn="l">
+              <a:spcAft>
+                <a:spcPts val="0"/>
+              </a:spcAft>
+              <a:defRPr sz="1400" b="0">
+                <a:solidFill>
+                  <a:srgbClr val="FFFFFF"/>
+                </a:solidFill>
+                <a:latin typeface="DejaVu Sans Mono"/>
+              </a:defRPr>
+            </a:pPr>
             <a:r>
               <a:t>    world = os.path.join(share, 'worlds', 'warehouse.sdf')</a:t>
             </a:r>
-            <a:br/>
+          </a:p>
+          <a:p>
+            <a:pPr algn="l">
+              <a:spcAft>
+                <a:spcPts val="0"/>
+              </a:spcAft>
+              <a:defRPr sz="1400" b="0">
+                <a:solidFill>
+                  <a:srgbClr val="FFFFFF"/>
+                </a:solidFill>
+                <a:latin typeface="DejaVu Sans Mono"/>
+              </a:defRPr>
+            </a:pPr>
             <a:r>
               <a:t>    models = os.path.join(share, 'models')</a:t>
             </a:r>
-            <a:br/>
+          </a:p>
+          <a:p>
+            <a:pPr algn="l">
+              <a:spcAft>
+                <a:spcPts val="0"/>
+              </a:spcAft>
+              <a:defRPr sz="1400" b="0">
+                <a:solidFill>
+                  <a:srgbClr val="FFFFFF"/>
+                </a:solidFill>
+                <a:latin typeface="DejaVu Sans Mono"/>
+              </a:defRPr>
+            </a:pPr>
             <a:r>
               <a:t>    previous = os.environ.get('GZ_SIM_RESOURCE_PATH', '')</a:t>
             </a:r>
@@ -12162,7 +12630,7 @@
           </a:fontRef>
         </p:style>
         <p:txBody>
-          <a:bodyPr rtlCol="0" anchor="ctr" wrap="square" lIns="164592" rIns="164592" tIns="109728" bIns="36576"/>
+          <a:bodyPr rtlCol="0" anchor="ctr" wrap="square" lIns="164592" rIns="164592" tIns="109728" bIns="73152"/>
           <a:lstStyle/>
           <a:p>
             <a:pPr algn="l">
@@ -12179,27 +12647,99 @@
             <a:r>
               <a:t>    gz_launch = os.path.join(get_package_share_directory('ros_gz_sim'), 'launch', 'gz_sim.launch.py')</a:t>
             </a:r>
-            <a:br/>
+          </a:p>
+          <a:p>
+            <a:pPr algn="l">
+              <a:spcAft>
+                <a:spcPts val="0"/>
+              </a:spcAft>
+              <a:defRPr sz="1400" b="0">
+                <a:solidFill>
+                  <a:srgbClr val="FFFFFF"/>
+                </a:solidFill>
+                <a:latin typeface="DejaVu Sans Mono"/>
+              </a:defRPr>
+            </a:pPr>
             <a:r>
               <a:t>    return LaunchDescription([SetEnvironmentVariable('GZ_SIM_RESOURCE_PATH',</a:t>
             </a:r>
-            <a:br/>
+          </a:p>
+          <a:p>
+            <a:pPr algn="l">
+              <a:spcAft>
+                <a:spcPts val="0"/>
+              </a:spcAft>
+              <a:defRPr sz="1400" b="0">
+                <a:solidFill>
+                  <a:srgbClr val="FFFFFF"/>
+                </a:solidFill>
+                <a:latin typeface="DejaVu Sans Mono"/>
+              </a:defRPr>
+            </a:pPr>
             <a:r>
               <a:t>        models + (':' + previous if previous else '')),</a:t>
             </a:r>
-            <a:br/>
+          </a:p>
+          <a:p>
+            <a:pPr algn="l">
+              <a:spcAft>
+                <a:spcPts val="0"/>
+              </a:spcAft>
+              <a:defRPr sz="1400" b="0">
+                <a:solidFill>
+                  <a:srgbClr val="FFFFFF"/>
+                </a:solidFill>
+                <a:latin typeface="DejaVu Sans Mono"/>
+              </a:defRPr>
+            </a:pPr>
             <a:r>
               <a:t>        IncludeLaunchDescription(PythonLaunchDescriptionSource(gz_launch),</a:t>
             </a:r>
-            <a:br/>
+          </a:p>
+          <a:p>
+            <a:pPr algn="l">
+              <a:spcAft>
+                <a:spcPts val="0"/>
+              </a:spcAft>
+              <a:defRPr sz="1400" b="0">
+                <a:solidFill>
+                  <a:srgbClr val="FFFFFF"/>
+                </a:solidFill>
+                <a:latin typeface="DejaVu Sans Mono"/>
+              </a:defRPr>
+            </a:pPr>
             <a:r>
               <a:t>        launch_arguments={'gz_args': '-r ' + world}.items()), Node(package='ros_gz_bridge',</a:t>
             </a:r>
-            <a:br/>
+          </a:p>
+          <a:p>
+            <a:pPr algn="l">
+              <a:spcAft>
+                <a:spcPts val="0"/>
+              </a:spcAft>
+              <a:defRPr sz="1400" b="0">
+                <a:solidFill>
+                  <a:srgbClr val="FFFFFF"/>
+                </a:solidFill>
+                <a:latin typeface="DejaVu Sans Mono"/>
+              </a:defRPr>
+            </a:pPr>
             <a:r>
               <a:t>         executable='parameter_bridge', parameters=[{'config_file': os.path.join(share,</a:t>
             </a:r>
-            <a:br/>
+          </a:p>
+          <a:p>
+            <a:pPr algn="l">
+              <a:spcAft>
+                <a:spcPts val="0"/>
+              </a:spcAft>
+              <a:defRPr sz="1400" b="0">
+                <a:solidFill>
+                  <a:srgbClr val="FFFFFF"/>
+                </a:solidFill>
+                <a:latin typeface="DejaVu Sans Mono"/>
+              </a:defRPr>
+            </a:pPr>
             <a:r>
               <a:t>        'config', 'bridge.yaml')}], output='screen')])</a:t>
             </a:r>
@@ -12933,7 +13473,7 @@
               </a:defRPr>
             </a:pPr>
             <a:r>
-              <a:t>현재 단계 실행 1/2    |    현재 폴더 ~/ros2_curri/my_agv_ws    |    현재 터미널</a:t>
+              <a:t>현재 단계 실행 1/2    |    현재 폴더 ~/ros2_curri/my_agv_ws    |    터미널 1</a:t>
             </a:r>
           </a:p>
         </p:txBody>
@@ -12946,25 +13486,25 @@
         </p:nvSpPr>
         <p:spPr>
           <a:xfrm>
-            <a:off x="676656" y="1764792"/>
-            <a:ext cx="1828800" cy="347472"/>
-          </a:xfrm>
-          <a:prstGeom prst="rect">
-            <a:avLst/>
-          </a:prstGeom>
-          <a:noFill/>
-        </p:spPr>
-        <p:txBody>
-          <a:bodyPr wrap="square" lIns="73152" rIns="73152" tIns="36576" bIns="36576">
-            <a:spAutoFit/>
-          </a:bodyPr>
-          <a:lstStyle/>
-          <a:p>
-            <a:pPr algn="l">
-              <a:spcAft>
-                <a:spcPts val="0"/>
-              </a:spcAft>
-              <a:defRPr sz="1800" b="1">
+            <a:off x="676656" y="1719072"/>
+            <a:ext cx="1691640" cy="274320"/>
+          </a:xfrm>
+          <a:prstGeom prst="rect">
+            <a:avLst/>
+          </a:prstGeom>
+          <a:noFill/>
+        </p:spPr>
+        <p:txBody>
+          <a:bodyPr wrap="square" lIns="73152" rIns="73152" tIns="36576" bIns="36576">
+            <a:spAutoFit/>
+          </a:bodyPr>
+          <a:lstStyle/>
+          <a:p>
+            <a:pPr algn="l">
+              <a:spcAft>
+                <a:spcPts val="0"/>
+              </a:spcAft>
+              <a:defRPr sz="1700" b="1">
                 <a:solidFill>
                   <a:srgbClr val="225B9B"/>
                 </a:solidFill>
@@ -12972,7 +13512,7 @@
               </a:defRPr>
             </a:pPr>
             <a:r>
-              <a:t>왜 하는가</a:t>
+              <a:t>명령의 목적</a:t>
             </a:r>
           </a:p>
         </p:txBody>
@@ -12985,7 +13525,7 @@
         </p:nvSpPr>
         <p:spPr>
           <a:xfrm>
-            <a:off x="676656" y="2103120"/>
+            <a:off x="676656" y="2002536"/>
             <a:ext cx="10789920" cy="512064"/>
           </a:xfrm>
           <a:prstGeom prst="rect">
@@ -13003,7 +13543,7 @@
               <a:spcAft>
                 <a:spcPts val="0"/>
               </a:spcAft>
-              <a:defRPr sz="2000" b="0">
+              <a:defRPr sz="1800" b="0">
                 <a:solidFill>
                   <a:srgbClr val="122C4E"/>
                 </a:solidFill>
@@ -13018,14 +13558,53 @@
       </p:sp>
       <p:sp>
         <p:nvSpPr>
-          <p:cNvPr id="9" name="Rounded Rectangle 8"/>
+          <p:cNvPr id="9" name="TextBox 8"/>
+          <p:cNvSpPr txBox="1"/>
+          <p:nvPr/>
+        </p:nvSpPr>
+        <p:spPr>
+          <a:xfrm>
+            <a:off x="676656" y="2816352"/>
+            <a:ext cx="10835640" cy="256032"/>
+          </a:xfrm>
+          <a:prstGeom prst="rect">
+            <a:avLst/>
+          </a:prstGeom>
+          <a:noFill/>
+        </p:spPr>
+        <p:txBody>
+          <a:bodyPr wrap="square" lIns="73152" rIns="73152" tIns="36576" bIns="36576">
+            <a:spAutoFit/>
+          </a:bodyPr>
+          <a:lstStyle/>
+          <a:p>
+            <a:pPr algn="ctr">
+              <a:spcAft>
+                <a:spcPts val="0"/>
+              </a:spcAft>
+              <a:defRPr sz="1600" b="1">
+                <a:solidFill>
+                  <a:srgbClr val="225B9B"/>
+                </a:solidFill>
+                <a:latin typeface="Noto Sans CJK KR"/>
+              </a:defRPr>
+            </a:pPr>
+            <a:r>
+              <a:t>터미널 1 — 아래 검은 블록은 명령만 복사합니다.</a:t>
+            </a:r>
+          </a:p>
+        </p:txBody>
+      </p:sp>
+      <p:sp>
+        <p:nvSpPr>
+          <p:cNvPr id="10" name="Rounded Rectangle 9"/>
           <p:cNvSpPr/>
           <p:nvPr/>
         </p:nvSpPr>
         <p:spPr>
           <a:xfrm>
-            <a:off x="676656" y="2871216"/>
-            <a:ext cx="10835640" cy="2331720"/>
+            <a:off x="676656" y="3154680"/>
+            <a:ext cx="10835640" cy="1938528"/>
           </a:xfrm>
           <a:prstGeom prst="roundRect">
             <a:avLst/>
@@ -13054,7 +13633,7 @@
           </a:fontRef>
         </p:style>
         <p:txBody>
-          <a:bodyPr rtlCol="0" anchor="ctr" wrap="square" lIns="73152" rIns="73152" tIns="36576" bIns="36576"/>
+          <a:bodyPr rtlCol="0" anchor="ctr" wrap="square" lIns="109728" rIns="109728" tIns="73152" bIns="73152"/>
           <a:lstStyle/>
           <a:p>
             <a:pPr algn="l">
@@ -13071,7 +13650,19 @@
             <a:r>
               <a:t>cd ~/ros2_curri/my_agv_ws</a:t>
             </a:r>
-            <a:br/>
+          </a:p>
+          <a:p>
+            <a:pPr algn="l">
+              <a:spcAft>
+                <a:spcPts val="0"/>
+              </a:spcAft>
+              <a:defRPr sz="1600" b="0">
+                <a:solidFill>
+                  <a:srgbClr val="FFFFFF"/>
+                </a:solidFill>
+                <a:latin typeface="DejaVu Sans Mono"/>
+              </a:defRPr>
+            </a:pPr>
             <a:r>
               <a:t>nano src/agv_gazebo/config/bridge.yaml</a:t>
             </a:r>
@@ -13080,31 +13671,31 @@
       </p:sp>
       <p:sp>
         <p:nvSpPr>
-          <p:cNvPr id="10" name="TextBox 9"/>
-          <p:cNvSpPr txBox="1"/>
-          <p:nvPr/>
-        </p:nvSpPr>
-        <p:spPr>
-          <a:xfrm>
-            <a:off x="768096" y="5468112"/>
-            <a:ext cx="1143000" cy="256032"/>
-          </a:xfrm>
-          <a:prstGeom prst="rect">
-            <a:avLst/>
-          </a:prstGeom>
-          <a:noFill/>
-        </p:spPr>
-        <p:txBody>
-          <a:bodyPr wrap="square" lIns="73152" rIns="73152" tIns="36576" bIns="36576">
-            <a:spAutoFit/>
-          </a:bodyPr>
-          <a:lstStyle/>
-          <a:p>
-            <a:pPr algn="l">
-              <a:spcAft>
-                <a:spcPts val="0"/>
-              </a:spcAft>
-              <a:defRPr sz="1800" b="1">
+          <p:cNvPr id="11" name="TextBox 10"/>
+          <p:cNvSpPr txBox="1"/>
+          <p:nvPr/>
+        </p:nvSpPr>
+        <p:spPr>
+          <a:xfrm>
+            <a:off x="768096" y="5276088"/>
+            <a:ext cx="10561320" cy="384048"/>
+          </a:xfrm>
+          <a:prstGeom prst="rect">
+            <a:avLst/>
+          </a:prstGeom>
+          <a:noFill/>
+        </p:spPr>
+        <p:txBody>
+          <a:bodyPr wrap="square" lIns="73152" rIns="73152" tIns="36576" bIns="36576">
+            <a:spAutoFit/>
+          </a:bodyPr>
+          <a:lstStyle/>
+          <a:p>
+            <a:pPr algn="ctr">
+              <a:spcAft>
+                <a:spcPts val="0"/>
+              </a:spcAft>
+              <a:defRPr sz="1500" b="1">
                 <a:solidFill>
                   <a:srgbClr val="2A8B5A"/>
                 </a:solidFill>
@@ -13112,38 +13703,38 @@
               </a:defRPr>
             </a:pPr>
             <a:r>
-              <a:t>확인</a:t>
-            </a:r>
-          </a:p>
-        </p:txBody>
-      </p:sp>
-      <p:sp>
-        <p:nvSpPr>
-          <p:cNvPr id="11" name="TextBox 10"/>
-          <p:cNvSpPr txBox="1"/>
-          <p:nvPr/>
-        </p:nvSpPr>
-        <p:spPr>
-          <a:xfrm>
-            <a:off x="768096" y="5742432"/>
-            <a:ext cx="10561320" cy="347472"/>
-          </a:xfrm>
-          <a:prstGeom prst="rect">
-            <a:avLst/>
-          </a:prstGeom>
-          <a:noFill/>
-        </p:spPr>
-        <p:txBody>
-          <a:bodyPr wrap="square" lIns="73152" rIns="73152" tIns="36576" bIns="36576">
-            <a:spAutoFit/>
-          </a:bodyPr>
-          <a:lstStyle/>
-          <a:p>
-            <a:pPr algn="l">
-              <a:spcAft>
-                <a:spcPts val="0"/>
-              </a:spcAft>
-              <a:defRPr sz="1800" b="0">
+              <a:t>터미널 1 역할: 터미널 1에서 이 명령만 그대로 복사해 실행합니다.</a:t>
+            </a:r>
+          </a:p>
+        </p:txBody>
+      </p:sp>
+      <p:sp>
+        <p:nvSpPr>
+          <p:cNvPr id="12" name="TextBox 11"/>
+          <p:cNvSpPr txBox="1"/>
+          <p:nvPr/>
+        </p:nvSpPr>
+        <p:spPr>
+          <a:xfrm>
+            <a:off x="768096" y="5916168"/>
+            <a:ext cx="10561320" cy="292608"/>
+          </a:xfrm>
+          <a:prstGeom prst="rect">
+            <a:avLst/>
+          </a:prstGeom>
+          <a:noFill/>
+        </p:spPr>
+        <p:txBody>
+          <a:bodyPr wrap="square" lIns="73152" rIns="73152" tIns="36576" bIns="36576">
+            <a:spAutoFit/>
+          </a:bodyPr>
+          <a:lstStyle/>
+          <a:p>
+            <a:pPr algn="ctr">
+              <a:spcAft>
+                <a:spcPts val="0"/>
+              </a:spcAft>
+              <a:defRPr sz="1500" b="1">
                 <a:solidFill>
                   <a:srgbClr val="122C4E"/>
                 </a:solidFill>
@@ -13151,7 +13742,7 @@
               </a:defRPr>
             </a:pPr>
             <a:r>
-              <a:t>출력에서 topic·frame·파일 이름 또는 성공 메시지를 찾고, 맞지 않으면 다음 파일로 가지 않습니다.</a:t>
+              <a:t>확인: 출력에서 topic·frame·파일 이름 또는 성공 메시지를 찾고, 맞지 않으면 다음 파일로 가지 않습니다.</a:t>
             </a:r>
           </a:p>
         </p:txBody>
@@ -13383,7 +13974,7 @@
               </a:defRPr>
             </a:pPr>
             <a:r>
-              <a:t>현재 단계 실행 2/2    |    현재 폴더 ~/ros2_curri/my_agv_ws    |    현재 터미널</a:t>
+              <a:t>현재 단계 실행 2/2    |    현재 폴더 ~/ros2_curri/my_agv_ws    |    터미널 1</a:t>
             </a:r>
           </a:p>
         </p:txBody>
@@ -13396,25 +13987,25 @@
         </p:nvSpPr>
         <p:spPr>
           <a:xfrm>
-            <a:off x="676656" y="1764792"/>
-            <a:ext cx="1828800" cy="347472"/>
-          </a:xfrm>
-          <a:prstGeom prst="rect">
-            <a:avLst/>
-          </a:prstGeom>
-          <a:noFill/>
-        </p:spPr>
-        <p:txBody>
-          <a:bodyPr wrap="square" lIns="73152" rIns="73152" tIns="36576" bIns="36576">
-            <a:spAutoFit/>
-          </a:bodyPr>
-          <a:lstStyle/>
-          <a:p>
-            <a:pPr algn="l">
-              <a:spcAft>
-                <a:spcPts val="0"/>
-              </a:spcAft>
-              <a:defRPr sz="1800" b="1">
+            <a:off x="676656" y="1719072"/>
+            <a:ext cx="1691640" cy="274320"/>
+          </a:xfrm>
+          <a:prstGeom prst="rect">
+            <a:avLst/>
+          </a:prstGeom>
+          <a:noFill/>
+        </p:spPr>
+        <p:txBody>
+          <a:bodyPr wrap="square" lIns="73152" rIns="73152" tIns="36576" bIns="36576">
+            <a:spAutoFit/>
+          </a:bodyPr>
+          <a:lstStyle/>
+          <a:p>
+            <a:pPr algn="l">
+              <a:spcAft>
+                <a:spcPts val="0"/>
+              </a:spcAft>
+              <a:defRPr sz="1700" b="1">
                 <a:solidFill>
                   <a:srgbClr val="225B9B"/>
                 </a:solidFill>
@@ -13422,7 +14013,7 @@
               </a:defRPr>
             </a:pPr>
             <a:r>
-              <a:t>왜 하는가</a:t>
+              <a:t>명령의 목적</a:t>
             </a:r>
           </a:p>
         </p:txBody>
@@ -13435,7 +14026,7 @@
         </p:nvSpPr>
         <p:spPr>
           <a:xfrm>
-            <a:off x="676656" y="2103120"/>
+            <a:off x="676656" y="2002536"/>
             <a:ext cx="10789920" cy="512064"/>
           </a:xfrm>
           <a:prstGeom prst="rect">
@@ -13453,7 +14044,7 @@
               <a:spcAft>
                 <a:spcPts val="0"/>
               </a:spcAft>
-              <a:defRPr sz="2000" b="0">
+              <a:defRPr sz="1800" b="0">
                 <a:solidFill>
                   <a:srgbClr val="122C4E"/>
                 </a:solidFill>
@@ -13468,14 +14059,53 @@
       </p:sp>
       <p:sp>
         <p:nvSpPr>
-          <p:cNvPr id="9" name="Rounded Rectangle 8"/>
+          <p:cNvPr id="9" name="TextBox 8"/>
+          <p:cNvSpPr txBox="1"/>
+          <p:nvPr/>
+        </p:nvSpPr>
+        <p:spPr>
+          <a:xfrm>
+            <a:off x="676656" y="2816352"/>
+            <a:ext cx="10835640" cy="256032"/>
+          </a:xfrm>
+          <a:prstGeom prst="rect">
+            <a:avLst/>
+          </a:prstGeom>
+          <a:noFill/>
+        </p:spPr>
+        <p:txBody>
+          <a:bodyPr wrap="square" lIns="73152" rIns="73152" tIns="36576" bIns="36576">
+            <a:spAutoFit/>
+          </a:bodyPr>
+          <a:lstStyle/>
+          <a:p>
+            <a:pPr algn="ctr">
+              <a:spcAft>
+                <a:spcPts val="0"/>
+              </a:spcAft>
+              <a:defRPr sz="1600" b="1">
+                <a:solidFill>
+                  <a:srgbClr val="225B9B"/>
+                </a:solidFill>
+                <a:latin typeface="Noto Sans CJK KR"/>
+              </a:defRPr>
+            </a:pPr>
+            <a:r>
+              <a:t>터미널 1 — 아래 검은 블록은 명령만 복사합니다.</a:t>
+            </a:r>
+          </a:p>
+        </p:txBody>
+      </p:sp>
+      <p:sp>
+        <p:nvSpPr>
+          <p:cNvPr id="10" name="Rounded Rectangle 9"/>
           <p:cNvSpPr/>
           <p:nvPr/>
         </p:nvSpPr>
         <p:spPr>
           <a:xfrm>
-            <a:off x="676656" y="2871216"/>
-            <a:ext cx="10835640" cy="2331720"/>
+            <a:off x="676656" y="3154680"/>
+            <a:ext cx="10835640" cy="1938528"/>
           </a:xfrm>
           <a:prstGeom prst="roundRect">
             <a:avLst/>
@@ -13504,7 +14134,7 @@
           </a:fontRef>
         </p:style>
         <p:txBody>
-          <a:bodyPr rtlCol="0" anchor="ctr" wrap="square" lIns="73152" rIns="73152" tIns="36576" bIns="36576"/>
+          <a:bodyPr rtlCol="0" anchor="ctr" wrap="square" lIns="109728" rIns="109728" tIns="73152" bIns="73152"/>
           <a:lstStyle/>
           <a:p>
             <a:pPr algn="l">
@@ -13521,11 +14151,35 @@
             <a:r>
               <a:t>colcon build --symlink-install --packages-select agv_gazebo</a:t>
             </a:r>
-            <a:br/>
+          </a:p>
+          <a:p>
+            <a:pPr algn="l">
+              <a:spcAft>
+                <a:spcPts val="0"/>
+              </a:spcAft>
+              <a:defRPr sz="1600" b="0">
+                <a:solidFill>
+                  <a:srgbClr val="FFFFFF"/>
+                </a:solidFill>
+                <a:latin typeface="DejaVu Sans Mono"/>
+              </a:defRPr>
+            </a:pPr>
             <a:r>
               <a:t>source install/setup.bash</a:t>
             </a:r>
-            <a:br/>
+          </a:p>
+          <a:p>
+            <a:pPr algn="l">
+              <a:spcAft>
+                <a:spcPts val="0"/>
+              </a:spcAft>
+              <a:defRPr sz="1600" b="0">
+                <a:solidFill>
+                  <a:srgbClr val="FFFFFF"/>
+                </a:solidFill>
+                <a:latin typeface="DejaVu Sans Mono"/>
+              </a:defRPr>
+            </a:pPr>
             <a:r>
               <a:t>ros2 launch agv_gazebo gazebo.launch.py</a:t>
             </a:r>
@@ -13534,31 +14188,31 @@
       </p:sp>
       <p:sp>
         <p:nvSpPr>
-          <p:cNvPr id="10" name="TextBox 9"/>
-          <p:cNvSpPr txBox="1"/>
-          <p:nvPr/>
-        </p:nvSpPr>
-        <p:spPr>
-          <a:xfrm>
-            <a:off x="768096" y="5468112"/>
-            <a:ext cx="1143000" cy="256032"/>
-          </a:xfrm>
-          <a:prstGeom prst="rect">
-            <a:avLst/>
-          </a:prstGeom>
-          <a:noFill/>
-        </p:spPr>
-        <p:txBody>
-          <a:bodyPr wrap="square" lIns="73152" rIns="73152" tIns="36576" bIns="36576">
-            <a:spAutoFit/>
-          </a:bodyPr>
-          <a:lstStyle/>
-          <a:p>
-            <a:pPr algn="l">
-              <a:spcAft>
-                <a:spcPts val="0"/>
-              </a:spcAft>
-              <a:defRPr sz="1800" b="1">
+          <p:cNvPr id="11" name="TextBox 10"/>
+          <p:cNvSpPr txBox="1"/>
+          <p:nvPr/>
+        </p:nvSpPr>
+        <p:spPr>
+          <a:xfrm>
+            <a:off x="768096" y="5276088"/>
+            <a:ext cx="10561320" cy="384048"/>
+          </a:xfrm>
+          <a:prstGeom prst="rect">
+            <a:avLst/>
+          </a:prstGeom>
+          <a:noFill/>
+        </p:spPr>
+        <p:txBody>
+          <a:bodyPr wrap="square" lIns="73152" rIns="73152" tIns="36576" bIns="36576">
+            <a:spAutoFit/>
+          </a:bodyPr>
+          <a:lstStyle/>
+          <a:p>
+            <a:pPr algn="ctr">
+              <a:spcAft>
+                <a:spcPts val="0"/>
+              </a:spcAft>
+              <a:defRPr sz="1500" b="1">
                 <a:solidFill>
                   <a:srgbClr val="2A8B5A"/>
                 </a:solidFill>
@@ -13566,38 +14220,38 @@
               </a:defRPr>
             </a:pPr>
             <a:r>
-              <a:t>확인</a:t>
-            </a:r>
-          </a:p>
-        </p:txBody>
-      </p:sp>
-      <p:sp>
-        <p:nvSpPr>
-          <p:cNvPr id="11" name="TextBox 10"/>
-          <p:cNvSpPr txBox="1"/>
-          <p:nvPr/>
-        </p:nvSpPr>
-        <p:spPr>
-          <a:xfrm>
-            <a:off x="768096" y="5742432"/>
-            <a:ext cx="10561320" cy="347472"/>
-          </a:xfrm>
-          <a:prstGeom prst="rect">
-            <a:avLst/>
-          </a:prstGeom>
-          <a:noFill/>
-        </p:spPr>
-        <p:txBody>
-          <a:bodyPr wrap="square" lIns="73152" rIns="73152" tIns="36576" bIns="36576">
-            <a:spAutoFit/>
-          </a:bodyPr>
-          <a:lstStyle/>
-          <a:p>
-            <a:pPr algn="l">
-              <a:spcAft>
-                <a:spcPts val="0"/>
-              </a:spcAft>
-              <a:defRPr sz="1800" b="0">
+              <a:t>터미널 1 역할: 시뮬레이터·bridge·node를 먼저 시작한 뒤 이 창은 종료하지 않고 둡니다.</a:t>
+            </a:r>
+          </a:p>
+        </p:txBody>
+      </p:sp>
+      <p:sp>
+        <p:nvSpPr>
+          <p:cNvPr id="12" name="TextBox 11"/>
+          <p:cNvSpPr txBox="1"/>
+          <p:nvPr/>
+        </p:nvSpPr>
+        <p:spPr>
+          <a:xfrm>
+            <a:off x="768096" y="5916168"/>
+            <a:ext cx="10561320" cy="292608"/>
+          </a:xfrm>
+          <a:prstGeom prst="rect">
+            <a:avLst/>
+          </a:prstGeom>
+          <a:noFill/>
+        </p:spPr>
+        <p:txBody>
+          <a:bodyPr wrap="square" lIns="73152" rIns="73152" tIns="36576" bIns="36576">
+            <a:spAutoFit/>
+          </a:bodyPr>
+          <a:lstStyle/>
+          <a:p>
+            <a:pPr algn="ctr">
+              <a:spcAft>
+                <a:spcPts val="0"/>
+              </a:spcAft>
+              <a:defRPr sz="1500" b="1">
                 <a:solidFill>
                   <a:srgbClr val="122C4E"/>
                 </a:solidFill>
@@ -13605,7 +14259,7 @@
               </a:defRPr>
             </a:pPr>
             <a:r>
-              <a:t>출력에서 topic·frame·파일 이름 또는 성공 메시지를 찾고, 맞지 않으면 다음 파일로 가지 않습니다.</a:t>
+              <a:t>확인: 출력에서 topic·frame·파일 이름 또는 성공 메시지를 찾고, 맞지 않으면 다음 파일로 가지 않습니다.</a:t>
             </a:r>
           </a:p>
         </p:txBody>
@@ -13837,21 +14491,138 @@
               </a:defRPr>
             </a:pPr>
             <a:r>
-              <a:t>현재 단계 실행    |    현재 폴더 ~/ros2_curri/my_agv_ws    |    현재 터미널</a:t>
-            </a:r>
-          </a:p>
-        </p:txBody>
-      </p:sp>
-      <p:sp>
-        <p:nvSpPr>
-          <p:cNvPr id="7" name="Rounded Rectangle 6"/>
+              <a:t>현재 단계 실행    |    현재 폴더 ~/ros2_curri/my_agv_ws    |    터미널 1</a:t>
+            </a:r>
+          </a:p>
+        </p:txBody>
+      </p:sp>
+      <p:sp>
+        <p:nvSpPr>
+          <p:cNvPr id="7" name="TextBox 6"/>
+          <p:cNvSpPr txBox="1"/>
+          <p:nvPr/>
+        </p:nvSpPr>
+        <p:spPr>
+          <a:xfrm>
+            <a:off x="676656" y="1719072"/>
+            <a:ext cx="1691640" cy="274320"/>
+          </a:xfrm>
+          <a:prstGeom prst="rect">
+            <a:avLst/>
+          </a:prstGeom>
+          <a:noFill/>
+        </p:spPr>
+        <p:txBody>
+          <a:bodyPr wrap="square" lIns="73152" rIns="73152" tIns="36576" bIns="36576">
+            <a:spAutoFit/>
+          </a:bodyPr>
+          <a:lstStyle/>
+          <a:p>
+            <a:pPr algn="l">
+              <a:spcAft>
+                <a:spcPts val="0"/>
+              </a:spcAft>
+              <a:defRPr sz="1700" b="1">
+                <a:solidFill>
+                  <a:srgbClr val="225B9B"/>
+                </a:solidFill>
+                <a:latin typeface="Noto Sans CJK KR"/>
+              </a:defRPr>
+            </a:pPr>
+            <a:r>
+              <a:t>명령의 목적</a:t>
+            </a:r>
+          </a:p>
+        </p:txBody>
+      </p:sp>
+      <p:sp>
+        <p:nvSpPr>
+          <p:cNvPr id="8" name="TextBox 7"/>
+          <p:cNvSpPr txBox="1"/>
+          <p:nvPr/>
+        </p:nvSpPr>
+        <p:spPr>
+          <a:xfrm>
+            <a:off x="676656" y="2002536"/>
+            <a:ext cx="10789920" cy="512064"/>
+          </a:xfrm>
+          <a:prstGeom prst="rect">
+            <a:avLst/>
+          </a:prstGeom>
+          <a:noFill/>
+        </p:spPr>
+        <p:txBody>
+          <a:bodyPr wrap="square" lIns="73152" rIns="73152" tIns="36576" bIns="36576">
+            <a:spAutoFit/>
+          </a:bodyPr>
+          <a:lstStyle/>
+          <a:p>
+            <a:pPr algn="l">
+              <a:spcAft>
+                <a:spcPts val="0"/>
+              </a:spcAft>
+              <a:defRPr sz="1800" b="0">
+                <a:solidFill>
+                  <a:srgbClr val="122C4E"/>
+                </a:solidFill>
+                <a:latin typeface="Noto Sans CJK KR"/>
+              </a:defRPr>
+            </a:pPr>
+            <a:r>
+              <a:t>명령 순서를 바꾸지 않습니다. build가 끝난 뒤 source하고, 마지막 명령으로 node·Gazebo·RViz를 실행합니다.</a:t>
+            </a:r>
+          </a:p>
+        </p:txBody>
+      </p:sp>
+      <p:sp>
+        <p:nvSpPr>
+          <p:cNvPr id="9" name="TextBox 8"/>
+          <p:cNvSpPr txBox="1"/>
+          <p:nvPr/>
+        </p:nvSpPr>
+        <p:spPr>
+          <a:xfrm>
+            <a:off x="676656" y="2816352"/>
+            <a:ext cx="10835640" cy="256032"/>
+          </a:xfrm>
+          <a:prstGeom prst="rect">
+            <a:avLst/>
+          </a:prstGeom>
+          <a:noFill/>
+        </p:spPr>
+        <p:txBody>
+          <a:bodyPr wrap="square" lIns="73152" rIns="73152" tIns="36576" bIns="36576">
+            <a:spAutoFit/>
+          </a:bodyPr>
+          <a:lstStyle/>
+          <a:p>
+            <a:pPr algn="ctr">
+              <a:spcAft>
+                <a:spcPts val="0"/>
+              </a:spcAft>
+              <a:defRPr sz="1600" b="1">
+                <a:solidFill>
+                  <a:srgbClr val="225B9B"/>
+                </a:solidFill>
+                <a:latin typeface="Noto Sans CJK KR"/>
+              </a:defRPr>
+            </a:pPr>
+            <a:r>
+              <a:t>터미널 1 — 아래 검은 블록은 명령만 복사합니다.</a:t>
+            </a:r>
+          </a:p>
+        </p:txBody>
+      </p:sp>
+      <p:sp>
+        <p:nvSpPr>
+          <p:cNvPr id="10" name="Rounded Rectangle 9"/>
           <p:cNvSpPr/>
           <p:nvPr/>
         </p:nvSpPr>
         <p:spPr>
           <a:xfrm>
-            <a:off x="658368" y="1700784"/>
-            <a:ext cx="10972800" cy="3182112"/>
+            <a:off x="676656" y="3154680"/>
+            <a:ext cx="10835640" cy="1938528"/>
           </a:xfrm>
           <a:prstGeom prst="roundRect">
             <a:avLst/>
@@ -13880,7 +14651,7 @@
           </a:fontRef>
         </p:style>
         <p:txBody>
-          <a:bodyPr rtlCol="0" anchor="ctr" wrap="square" lIns="73152" rIns="73152" tIns="36576" bIns="36576"/>
+          <a:bodyPr rtlCol="0" anchor="ctr" wrap="square" lIns="109728" rIns="109728" tIns="73152" bIns="73152"/>
           <a:lstStyle/>
           <a:p>
             <a:pPr algn="l">
@@ -13897,7 +14668,19 @@
             <a:r>
               <a:t>source ~/ros2_curri/my_agv_ws/install/setup.bash</a:t>
             </a:r>
-            <a:br/>
+          </a:p>
+          <a:p>
+            <a:pPr algn="l">
+              <a:spcAft>
+                <a:spcPts val="0"/>
+              </a:spcAft>
+              <a:defRPr sz="1600" b="0">
+                <a:solidFill>
+                  <a:srgbClr val="FFFFFF"/>
+                </a:solidFill>
+                <a:latin typeface="DejaVu Sans Mono"/>
+              </a:defRPr>
+            </a:pPr>
             <a:r>
               <a:t>ros2 launch agv_gazebo gazebo.launch.py</a:t>
             </a:r>
@@ -13906,31 +14689,31 @@
       </p:sp>
       <p:sp>
         <p:nvSpPr>
-          <p:cNvPr id="8" name="TextBox 7"/>
-          <p:cNvSpPr txBox="1"/>
-          <p:nvPr/>
-        </p:nvSpPr>
-        <p:spPr>
-          <a:xfrm>
-            <a:off x="786384" y="5239512"/>
-            <a:ext cx="1261872" cy="237744"/>
-          </a:xfrm>
-          <a:prstGeom prst="rect">
-            <a:avLst/>
-          </a:prstGeom>
-          <a:noFill/>
-        </p:spPr>
-        <p:txBody>
-          <a:bodyPr wrap="square" lIns="73152" rIns="73152" tIns="36576" bIns="36576">
-            <a:spAutoFit/>
-          </a:bodyPr>
-          <a:lstStyle/>
-          <a:p>
-            <a:pPr algn="l">
-              <a:spcAft>
-                <a:spcPts val="0"/>
-              </a:spcAft>
-              <a:defRPr sz="1800" b="1">
+          <p:cNvPr id="11" name="TextBox 10"/>
+          <p:cNvSpPr txBox="1"/>
+          <p:nvPr/>
+        </p:nvSpPr>
+        <p:spPr>
+          <a:xfrm>
+            <a:off x="768096" y="5276088"/>
+            <a:ext cx="10561320" cy="384048"/>
+          </a:xfrm>
+          <a:prstGeom prst="rect">
+            <a:avLst/>
+          </a:prstGeom>
+          <a:noFill/>
+        </p:spPr>
+        <p:txBody>
+          <a:bodyPr wrap="square" lIns="73152" rIns="73152" tIns="36576" bIns="36576">
+            <a:spAutoFit/>
+          </a:bodyPr>
+          <a:lstStyle/>
+          <a:p>
+            <a:pPr algn="ctr">
+              <a:spcAft>
+                <a:spcPts val="0"/>
+              </a:spcAft>
+              <a:defRPr sz="1500" b="1">
                 <a:solidFill>
                   <a:srgbClr val="2A8B5A"/>
                 </a:solidFill>
@@ -13938,38 +14721,38 @@
               </a:defRPr>
             </a:pPr>
             <a:r>
-              <a:t>확인 기준</a:t>
-            </a:r>
-          </a:p>
-        </p:txBody>
-      </p:sp>
-      <p:sp>
-        <p:nvSpPr>
-          <p:cNvPr id="9" name="TextBox 8"/>
-          <p:cNvSpPr txBox="1"/>
-          <p:nvPr/>
-        </p:nvSpPr>
-        <p:spPr>
-          <a:xfrm>
-            <a:off x="786384" y="5532120"/>
-            <a:ext cx="10469880" cy="420624"/>
-          </a:xfrm>
-          <a:prstGeom prst="rect">
-            <a:avLst/>
-          </a:prstGeom>
-          <a:noFill/>
-        </p:spPr>
-        <p:txBody>
-          <a:bodyPr wrap="square" lIns="73152" rIns="73152" tIns="36576" bIns="36576">
-            <a:spAutoFit/>
-          </a:bodyPr>
-          <a:lstStyle/>
-          <a:p>
-            <a:pPr algn="l">
-              <a:spcAft>
-                <a:spcPts val="0"/>
-              </a:spcAft>
-              <a:defRPr sz="1800" b="0">
+              <a:t>터미널 1 역할: 시뮬레이터·bridge·node를 먼저 시작한 뒤 이 창은 종료하지 않고 둡니다.</a:t>
+            </a:r>
+          </a:p>
+        </p:txBody>
+      </p:sp>
+      <p:sp>
+        <p:nvSpPr>
+          <p:cNvPr id="12" name="TextBox 11"/>
+          <p:cNvSpPr txBox="1"/>
+          <p:nvPr/>
+        </p:nvSpPr>
+        <p:spPr>
+          <a:xfrm>
+            <a:off x="768096" y="5916168"/>
+            <a:ext cx="10561320" cy="292608"/>
+          </a:xfrm>
+          <a:prstGeom prst="rect">
+            <a:avLst/>
+          </a:prstGeom>
+          <a:noFill/>
+        </p:spPr>
+        <p:txBody>
+          <a:bodyPr wrap="square" lIns="73152" rIns="73152" tIns="36576" bIns="36576">
+            <a:spAutoFit/>
+          </a:bodyPr>
+          <a:lstStyle/>
+          <a:p>
+            <a:pPr algn="ctr">
+              <a:spcAft>
+                <a:spcPts val="0"/>
+              </a:spcAft>
+              <a:defRPr sz="1500" b="1">
                 <a:solidFill>
                   <a:srgbClr val="122C4E"/>
                 </a:solidFill>
@@ -13977,7 +14760,7 @@
               </a:defRPr>
             </a:pPr>
             <a:r>
-              <a:t>/cmd_vel ROS→Gazebo 및 odom/scan/imu/camera/clock Gazebo→ROS 매핑을 확인한다.</a:t>
+              <a:t>확인: /cmd_vel ROS→Gazebo 및 odom/scan/imu/camera/clock Gazebo→ROS 매핑을 확인한다.</a:t>
             </a:r>
           </a:p>
         </p:txBody>
@@ -14489,7 +15272,7 @@
           </a:fontRef>
         </p:style>
         <p:txBody>
-          <a:bodyPr rtlCol="0" anchor="ctr" wrap="square" lIns="73152" rIns="73152" tIns="36576" bIns="36576"/>
+          <a:bodyPr rtlCol="0" anchor="ctr" wrap="square" lIns="109728" rIns="109728" tIns="73152" bIns="73152"/>
           <a:lstStyle/>
           <a:p>
             <a:pPr algn="l">
@@ -14506,7 +15289,19 @@
             <a:r>
               <a:t>ros2 topic list | rg '/cmd_vel|/odom|/scan|/imu|/camera|/clock'</a:t>
             </a:r>
-            <a:br/>
+          </a:p>
+          <a:p>
+            <a:pPr algn="l">
+              <a:spcAft>
+                <a:spcPts val="0"/>
+              </a:spcAft>
+              <a:defRPr sz="1600" b="0">
+                <a:solidFill>
+                  <a:srgbClr val="FFFFFF"/>
+                </a:solidFill>
+                <a:latin typeface="DejaVu Sans Mono"/>
+              </a:defRPr>
+            </a:pPr>
             <a:r>
               <a:t>ros2 topic info /scan</a:t>
             </a:r>
@@ -15456,7 +16251,7 @@
           </a:fontRef>
         </p:style>
         <p:txBody>
-          <a:bodyPr rtlCol="0" anchor="ctr" wrap="square" lIns="73152" rIns="73152" tIns="36576" bIns="36576"/>
+          <a:bodyPr rtlCol="0" anchor="ctr" wrap="square" lIns="109728" rIns="109728" tIns="73152" bIns="73152"/>
           <a:lstStyle/>
           <a:p>
             <a:pPr algn="l">
@@ -15473,19 +16268,67 @@
             <a:r>
               <a:t>cd ~/ros2_curri</a:t>
             </a:r>
-            <a:br/>
+          </a:p>
+          <a:p>
+            <a:pPr algn="l">
+              <a:spcAft>
+                <a:spcPts val="0"/>
+              </a:spcAft>
+              <a:defRPr sz="1400" b="0">
+                <a:solidFill>
+                  <a:srgbClr val="FFFFFF"/>
+                </a:solidFill>
+                <a:latin typeface="DejaVu Sans Mono"/>
+              </a:defRPr>
+            </a:pPr>
             <a:r>
               <a:t>diff -ru my_agv_ws/src blocks/C_drive_visualization/M10_ros_gz_bridge/complete/agv_ws/src || true</a:t>
             </a:r>
-            <a:br/>
+          </a:p>
+          <a:p>
+            <a:pPr algn="l">
+              <a:spcAft>
+                <a:spcPts val="0"/>
+              </a:spcAft>
+              <a:defRPr sz="1400" b="0">
+                <a:solidFill>
+                  <a:srgbClr val="FFFFFF"/>
+                </a:solidFill>
+                <a:latin typeface="DejaVu Sans Mono"/>
+              </a:defRPr>
+            </a:pPr>
             <a:r>
               <a:t>cp -a my_agv_ws/src my_agv_ws/src_before_M10</a:t>
             </a:r>
-            <a:br/>
+          </a:p>
+          <a:p>
+            <a:pPr algn="l">
+              <a:spcAft>
+                <a:spcPts val="0"/>
+              </a:spcAft>
+              <a:defRPr sz="1400" b="0">
+                <a:solidFill>
+                  <a:srgbClr val="FFFFFF"/>
+                </a:solidFill>
+                <a:latin typeface="DejaVu Sans Mono"/>
+              </a:defRPr>
+            </a:pPr>
             <a:r>
               <a:t>cp -a blocks/C_drive_visualization/M10_ros_gz_bridge/complete/agv_ws/src/. my_agv_ws/src/</a:t>
             </a:r>
-            <a:br/>
+          </a:p>
+          <a:p>
+            <a:pPr algn="l">
+              <a:spcAft>
+                <a:spcPts val="0"/>
+              </a:spcAft>
+              <a:defRPr sz="1400" b="0">
+                <a:solidFill>
+                  <a:srgbClr val="FFFFFF"/>
+                </a:solidFill>
+                <a:latin typeface="DejaVu Sans Mono"/>
+              </a:defRPr>
+            </a:pPr>
             <a:r>
               <a:t>cd my_agv_ws &amp;&amp; colcon build --symlink-install &amp;&amp; source install/setup.bash</a:t>
             </a:r>
@@ -20248,7 +21091,7 @@
           </a:fontRef>
         </p:style>
         <p:txBody>
-          <a:bodyPr rtlCol="0" anchor="ctr" wrap="square" lIns="73152" rIns="73152" tIns="36576" bIns="36576"/>
+          <a:bodyPr rtlCol="0" anchor="ctr" wrap="square" lIns="109728" rIns="109728" tIns="73152" bIns="73152"/>
           <a:lstStyle/>
           <a:p>
             <a:pPr algn="l">
@@ -20265,7 +21108,19 @@
             <a:r>
               <a:t>mkdir -p ~/ros2_curri/my_agv_ws/src/agv_gazebo/config</a:t>
             </a:r>
-            <a:br/>
+          </a:p>
+          <a:p>
+            <a:pPr algn="l">
+              <a:spcAft>
+                <a:spcPts val="0"/>
+              </a:spcAft>
+              <a:defRPr sz="1600" b="0">
+                <a:solidFill>
+                  <a:srgbClr val="FFFFFF"/>
+                </a:solidFill>
+                <a:latin typeface="DejaVu Sans Mono"/>
+              </a:defRPr>
+            </a:pPr>
             <a:r>
               <a:t>nano ~/ros2_curri/my_agv_ws/src/agv_gazebo/config/bridge.yaml</a:t>
             </a:r>
